--- a/docs/2027년_사무직원_채용계획안.pptx
+++ b/docs/2027년_사무직원_채용계획안.pptx
@@ -1952,49 +1952,59 @@
           <a:chExt cx="0" cy="0"/>
         </a:xfrm>
       </p:grpSpPr>
-      <p:sp>
-        <p:nvSpPr>
-          <p:cNvPr id="2" name="Shape 0"/>
-          <p:cNvSpPr/>
-          <p:nvPr/>
-        </p:nvSpPr>
-        <p:spPr>
-          <a:xfrm>
-            <a:off x="8686800" y="-1463040"/>
-            <a:ext cx="5120640" cy="5120640"/>
-          </a:xfrm>
-          <a:prstGeom prst="ellipse">
-            <a:avLst/>
-          </a:prstGeom>
-          <a:solidFill>
-            <a:srgbClr val="141B44"/>
-          </a:solidFill>
-          <a:ln/>
-        </p:spPr>
-      </p:sp>
-      <p:sp>
-        <p:nvSpPr>
-          <p:cNvPr id="3" name="Shape 1"/>
-          <p:cNvSpPr/>
-          <p:nvPr/>
-        </p:nvSpPr>
-        <p:spPr>
-          <a:xfrm>
-            <a:off x="10149840" y="4114800"/>
-            <a:ext cx="2926080" cy="2926080"/>
-          </a:xfrm>
-          <a:prstGeom prst="ellipse">
-            <a:avLst/>
-          </a:prstGeom>
-          <a:solidFill>
-            <a:srgbClr val="141B44"/>
-          </a:solidFill>
-          <a:ln/>
-        </p:spPr>
-      </p:sp>
-      <p:sp>
-        <p:nvSpPr>
-          <p:cNvPr id="4" name="Text 2"/>
+      <p:pic>
+        <p:nvPicPr>
+          <p:cNvPr id="2" name="Image 0" descr="정석항공과학고등학교 엠블럼">    </p:cNvPr>
+          <p:cNvPicPr>
+            <a:picLocks noChangeAspect="1"/>
+          </p:cNvPicPr>
+          <p:nvPr/>
+        </p:nvPicPr>
+        <p:blipFill>
+          <a:blip r:embed="rId1">
+            <a:alphaModFix amt="16000"/>
+          </a:blip>
+          <a:stretch>
+            <a:fillRect/>
+          </a:stretch>
+        </p:blipFill>
+        <p:spPr>
+          <a:xfrm>
+            <a:off x="7680960" y="1097280"/>
+            <a:ext cx="4023360" cy="4023360"/>
+          </a:xfrm>
+          <a:prstGeom prst="rect">
+            <a:avLst/>
+          </a:prstGeom>
+        </p:spPr>
+      </p:pic>
+      <p:pic>
+        <p:nvPicPr>
+          <p:cNvPr id="3" name="Image 1" descr="정석항공과학고등학교 교표">    </p:cNvPr>
+          <p:cNvPicPr>
+            <a:picLocks noChangeAspect="1"/>
+          </p:cNvPicPr>
+          <p:nvPr/>
+        </p:nvPicPr>
+        <p:blipFill>
+          <a:blip r:embed="rId2"/>
+          <a:stretch>
+            <a:fillRect/>
+          </a:stretch>
+        </p:blipFill>
+        <p:spPr>
+          <a:xfrm>
+            <a:off x="658368" y="457200"/>
+            <a:ext cx="1133856" cy="484632"/>
+          </a:xfrm>
+          <a:prstGeom prst="rect">
+            <a:avLst/>
+          </a:prstGeom>
+        </p:spPr>
+      </p:pic>
+      <p:sp>
+        <p:nvSpPr>
+          <p:cNvPr id="4" name="Text 0"/>
           <p:cNvSpPr txBox="1"/>
           <p:nvPr/>
         </p:nvSpPr>
@@ -2025,7 +2035,7 @@
                 <a:ea typeface="맑은 고딕" pitchFamily="34" charset="-122"/>
                 <a:cs typeface="맑은 고딕" pitchFamily="34" charset="-120"/>
               </a:rPr>
-              <a:t>정석고등학교 (24학급)</a:t>
+              <a:t>정석항공과학고등학교 (24학급)</a:t>
             </a:r>
             <a:endParaRPr lang="en-US" sz="1500" dirty="0"/>
           </a:p>
@@ -2033,7 +2043,7 @@
       </p:sp>
       <p:sp>
         <p:nvSpPr>
-          <p:cNvPr id="5" name="Text 3"/>
+          <p:cNvPr id="5" name="Text 1"/>
           <p:cNvSpPr txBox="1"/>
           <p:nvPr/>
         </p:nvSpPr>
@@ -2095,7 +2105,7 @@
       </p:sp>
       <p:sp>
         <p:nvSpPr>
-          <p:cNvPr id="6" name="Shape 4"/>
+          <p:cNvPr id="6" name="Shape 2"/>
           <p:cNvSpPr/>
           <p:nvPr/>
         </p:nvSpPr>
@@ -2117,7 +2127,7 @@
       </p:sp>
       <p:sp>
         <p:nvSpPr>
-          <p:cNvPr id="7" name="Text 5"/>
+          <p:cNvPr id="7" name="Text 3"/>
           <p:cNvSpPr txBox="1"/>
           <p:nvPr/>
         </p:nvSpPr>
@@ -2156,7 +2166,7 @@
       </p:sp>
       <p:sp>
         <p:nvSpPr>
-          <p:cNvPr id="8" name="Text 6"/>
+          <p:cNvPr id="8" name="Text 4"/>
           <p:cNvSpPr txBox="1"/>
           <p:nvPr/>
         </p:nvSpPr>
@@ -2195,7 +2205,7 @@
       </p:sp>
       <p:sp>
         <p:nvSpPr>
-          <p:cNvPr id="9" name="Text 7"/>
+          <p:cNvPr id="9" name="Text 5"/>
           <p:cNvSpPr txBox="1"/>
           <p:nvPr/>
         </p:nvSpPr>
@@ -2234,7 +2244,7 @@
       </p:sp>
       <p:sp>
         <p:nvSpPr>
-          <p:cNvPr id="10" name="Text 8"/>
+          <p:cNvPr id="10" name="Text 6"/>
           <p:cNvSpPr txBox="1"/>
           <p:nvPr/>
         </p:nvSpPr>
@@ -2273,7 +2283,7 @@
       </p:sp>
       <p:sp>
         <p:nvSpPr>
-          <p:cNvPr id="11" name="Text 9"/>
+          <p:cNvPr id="11" name="Text 7"/>
           <p:cNvSpPr txBox="1"/>
           <p:nvPr/>
         </p:nvSpPr>
@@ -2312,7 +2322,7 @@
       </p:sp>
       <p:sp>
         <p:nvSpPr>
-          <p:cNvPr id="12" name="Text 10"/>
+          <p:cNvPr id="12" name="Text 8"/>
           <p:cNvSpPr txBox="1"/>
           <p:nvPr/>
         </p:nvSpPr>
@@ -2351,7 +2361,7 @@
       </p:sp>
       <p:sp>
         <p:nvSpPr>
-          <p:cNvPr id="13" name="Text 11"/>
+          <p:cNvPr id="13" name="Text 9"/>
           <p:cNvSpPr txBox="1"/>
           <p:nvPr/>
         </p:nvSpPr>
@@ -2390,7 +2400,7 @@
       </p:sp>
       <p:sp>
         <p:nvSpPr>
-          <p:cNvPr id="14" name="Text 12"/>
+          <p:cNvPr id="14" name="Text 10"/>
           <p:cNvSpPr txBox="1"/>
           <p:nvPr/>
         </p:nvSpPr>
@@ -3292,7 +3302,7 @@
                 <a:ea typeface="맑은 고딕" pitchFamily="34" charset="-122"/>
                 <a:cs typeface="맑은 고딕" pitchFamily="34" charset="-120"/>
               </a:rPr>
-              <a:t>정석고등학교 · 기술·관리운영직(9급) 1명 공개채용</a:t>
+              <a:t>정석항공과학고등학교 · 기술·관리운영직(9급) 1명 공개채용</a:t>
             </a:r>
             <a:endParaRPr lang="en-US" sz="1400" dirty="0"/>
           </a:p>

--- a/docs/2027년_사무직원_채용계획안.pptx
+++ b/docs/2027년_사무직원_채용계획안.pptx
@@ -2023,7 +2023,7 @@
           <a:bodyPr wrap="square" lIns="0" tIns="0" rIns="0" bIns="0" rtlCol="0" anchor="ctr"/>
           <a:lstStyle/>
           <a:p>
-            <a:pPr indent="0" marL="0">
+            <a:pPr eaLnBrk="0" latinLnBrk="0" indent="0" marL="0">
               <a:buNone/>
             </a:pPr>
             <a:r>
@@ -2062,7 +2062,7 @@
           <a:bodyPr wrap="square" lIns="0" tIns="0" rIns="0" bIns="0" rtlCol="0" anchor="ctr"/>
           <a:lstStyle/>
           <a:p>
-            <a:pPr indent="0" marL="0">
+            <a:pPr eaLnBrk="0" latinLnBrk="0" indent="0" marL="0">
               <a:lnSpc>
                 <a:spcPts val="5400"/>
               </a:lnSpc>
@@ -2082,7 +2082,7 @@
             <a:endParaRPr lang="en-US" sz="4600" dirty="0"/>
           </a:p>
           <a:p>
-            <a:pPr indent="0" marL="0">
+            <a:pPr eaLnBrk="0" latinLnBrk="0" indent="0" marL="0">
               <a:lnSpc>
                 <a:spcPts val="5400"/>
               </a:lnSpc>
@@ -2146,7 +2146,7 @@
           <a:bodyPr wrap="square" lIns="0" tIns="0" rIns="0" bIns="0" rtlCol="0" anchor="ctr"/>
           <a:lstStyle/>
           <a:p>
-            <a:pPr algn="ctr" indent="0" marL="0">
+            <a:pPr eaLnBrk="0" latinLnBrk="0" algn="ctr" indent="0" marL="0">
               <a:buNone/>
             </a:pPr>
             <a:r>
@@ -2185,7 +2185,7 @@
           <a:bodyPr wrap="square" lIns="0" tIns="0" rIns="0" bIns="0" rtlCol="0" anchor="ctr"/>
           <a:lstStyle/>
           <a:p>
-            <a:pPr indent="0" marL="0">
+            <a:pPr eaLnBrk="0" latinLnBrk="0" indent="0" marL="0">
               <a:buNone/>
             </a:pPr>
             <a:r>
@@ -2224,7 +2224,7 @@
           <a:bodyPr wrap="square" lIns="0" tIns="0" rIns="0" bIns="0" rtlCol="0" anchor="ctr"/>
           <a:lstStyle/>
           <a:p>
-            <a:pPr indent="0" marL="0">
+            <a:pPr eaLnBrk="0" latinLnBrk="0" indent="0" marL="0">
               <a:buNone/>
             </a:pPr>
             <a:r>
@@ -2263,7 +2263,7 @@
           <a:bodyPr wrap="square" lIns="0" tIns="0" rIns="0" bIns="0" rtlCol="0" anchor="ctr"/>
           <a:lstStyle/>
           <a:p>
-            <a:pPr indent="0" marL="0">
+            <a:pPr eaLnBrk="0" latinLnBrk="0" indent="0" marL="0">
               <a:buNone/>
             </a:pPr>
             <a:r>
@@ -2302,7 +2302,7 @@
           <a:bodyPr wrap="square" lIns="0" tIns="0" rIns="0" bIns="0" rtlCol="0" anchor="ctr"/>
           <a:lstStyle/>
           <a:p>
-            <a:pPr indent="0" marL="0">
+            <a:pPr eaLnBrk="0" latinLnBrk="0" indent="0" marL="0">
               <a:buNone/>
             </a:pPr>
             <a:r>
@@ -2341,7 +2341,7 @@
           <a:bodyPr wrap="square" lIns="0" tIns="0" rIns="0" bIns="0" rtlCol="0" anchor="ctr"/>
           <a:lstStyle/>
           <a:p>
-            <a:pPr indent="0" marL="0">
+            <a:pPr eaLnBrk="0" latinLnBrk="0" indent="0" marL="0">
               <a:buNone/>
             </a:pPr>
             <a:r>
@@ -2380,7 +2380,7 @@
           <a:bodyPr wrap="square" lIns="0" tIns="0" rIns="0" bIns="0" rtlCol="0" anchor="ctr"/>
           <a:lstStyle/>
           <a:p>
-            <a:pPr indent="0" marL="0">
+            <a:pPr eaLnBrk="0" latinLnBrk="0" indent="0" marL="0">
               <a:buNone/>
             </a:pPr>
             <a:r>
@@ -2419,7 +2419,7 @@
           <a:bodyPr wrap="square" lIns="0" tIns="0" rIns="0" bIns="0" rtlCol="0" anchor="ctr"/>
           <a:lstStyle/>
           <a:p>
-            <a:pPr indent="0" marL="0">
+            <a:pPr eaLnBrk="0" latinLnBrk="0" indent="0" marL="0">
               <a:buNone/>
             </a:pPr>
             <a:r>
@@ -2514,7 +2514,7 @@
           <a:bodyPr wrap="square" lIns="0" tIns="0" rIns="0" bIns="0" rtlCol="0" anchor="ctr"/>
           <a:lstStyle/>
           <a:p>
-            <a:pPr algn="ctr" indent="0" marL="0">
+            <a:pPr eaLnBrk="0" latinLnBrk="0" algn="ctr" indent="0" marL="0">
               <a:buNone/>
             </a:pPr>
             <a:r>
@@ -2553,7 +2553,7 @@
           <a:bodyPr wrap="square" lIns="0" tIns="0" rIns="0" bIns="0" rtlCol="0" anchor="ctr"/>
           <a:lstStyle/>
           <a:p>
-            <a:pPr indent="0" marL="0">
+            <a:pPr eaLnBrk="0" latinLnBrk="0" indent="0" marL="0">
               <a:buNone/>
             </a:pPr>
             <a:r>
@@ -2592,7 +2592,7 @@
           <a:bodyPr wrap="square" lIns="0" tIns="0" rIns="0" bIns="0" rtlCol="0" anchor="ctr"/>
           <a:lstStyle/>
           <a:p>
-            <a:pPr indent="0" marL="0">
+            <a:pPr eaLnBrk="0" latinLnBrk="0" indent="0" marL="0">
               <a:buNone/>
             </a:pPr>
             <a:r>
@@ -2685,7 +2685,7 @@
           <a:bodyPr wrap="square" lIns="0" tIns="0" rIns="0" bIns="0" rtlCol="0" anchor="ctr"/>
           <a:lstStyle/>
           <a:p>
-            <a:pPr algn="ctr" indent="0" marL="0">
+            <a:pPr eaLnBrk="0" latinLnBrk="0" algn="ctr" indent="0" marL="0">
               <a:buNone/>
             </a:pPr>
             <a:r>
@@ -2724,7 +2724,7 @@
           <a:bodyPr wrap="square" lIns="0" tIns="0" rIns="0" bIns="0" rtlCol="0" anchor="ctr"/>
           <a:lstStyle/>
           <a:p>
-            <a:pPr indent="0" marL="0">
+            <a:pPr eaLnBrk="0" latinLnBrk="0" indent="0" marL="0">
               <a:buNone/>
             </a:pPr>
             <a:r>
@@ -2763,7 +2763,7 @@
           <a:bodyPr wrap="square" lIns="0" tIns="0" rIns="0" bIns="0" rtlCol="0" anchor="t"/>
           <a:lstStyle/>
           <a:p>
-            <a:pPr marL="342900" indent="-342900">
+            <a:pPr eaLnBrk="0" latinLnBrk="0" marL="342900" indent="-342900">
               <a:lnSpc>
                 <a:spcPts val="2200"/>
               </a:lnSpc>
@@ -2787,7 +2787,7 @@
             <a:endParaRPr lang="en-US" sz="1300" dirty="0"/>
           </a:p>
           <a:p>
-            <a:pPr marL="342900" indent="-342900">
+            <a:pPr eaLnBrk="0" latinLnBrk="0" marL="342900" indent="-342900">
               <a:lnSpc>
                 <a:spcPts val="2200"/>
               </a:lnSpc>
@@ -2887,7 +2887,7 @@
           <a:bodyPr wrap="square" lIns="0" tIns="0" rIns="0" bIns="0" rtlCol="0" anchor="ctr"/>
           <a:lstStyle/>
           <a:p>
-            <a:pPr algn="ctr" indent="0" marL="0">
+            <a:pPr eaLnBrk="0" latinLnBrk="0" algn="ctr" indent="0" marL="0">
               <a:buNone/>
             </a:pPr>
             <a:r>
@@ -2926,7 +2926,7 @@
           <a:bodyPr wrap="square" lIns="0" tIns="0" rIns="0" bIns="0" rtlCol="0" anchor="ctr"/>
           <a:lstStyle/>
           <a:p>
-            <a:pPr indent="0" marL="0">
+            <a:pPr eaLnBrk="0" latinLnBrk="0" indent="0" marL="0">
               <a:buNone/>
             </a:pPr>
             <a:r>
@@ -2965,7 +2965,7 @@
           <a:bodyPr wrap="square" lIns="0" tIns="0" rIns="0" bIns="0" rtlCol="0" anchor="t"/>
           <a:lstStyle/>
           <a:p>
-            <a:pPr marL="342900" indent="-342900">
+            <a:pPr eaLnBrk="0" latinLnBrk="0" marL="342900" indent="-342900">
               <a:lnSpc>
                 <a:spcPts val="2200"/>
               </a:lnSpc>
@@ -3065,7 +3065,7 @@
           <a:bodyPr wrap="square" lIns="0" tIns="0" rIns="0" bIns="0" rtlCol="0" anchor="ctr"/>
           <a:lstStyle/>
           <a:p>
-            <a:pPr algn="ctr" indent="0" marL="0">
+            <a:pPr eaLnBrk="0" latinLnBrk="0" algn="ctr" indent="0" marL="0">
               <a:buNone/>
             </a:pPr>
             <a:r>
@@ -3104,7 +3104,7 @@
           <a:bodyPr wrap="square" lIns="0" tIns="0" rIns="0" bIns="0" rtlCol="0" anchor="ctr"/>
           <a:lstStyle/>
           <a:p>
-            <a:pPr indent="0" marL="0">
+            <a:pPr eaLnBrk="0" latinLnBrk="0" indent="0" marL="0">
               <a:buNone/>
             </a:pPr>
             <a:r>
@@ -3143,7 +3143,7 @@
           <a:bodyPr wrap="square" lIns="0" tIns="0" rIns="0" bIns="0" rtlCol="0" anchor="t"/>
           <a:lstStyle/>
           <a:p>
-            <a:pPr marL="342900" indent="-342900">
+            <a:pPr eaLnBrk="0" latinLnBrk="0" marL="342900" indent="-342900">
               <a:lnSpc>
                 <a:spcPts val="2200"/>
               </a:lnSpc>
@@ -3223,7 +3223,7 @@
           <a:bodyPr wrap="square" lIns="0" tIns="0" rIns="0" bIns="0" rtlCol="0" anchor="ctr"/>
           <a:lstStyle/>
           <a:p>
-            <a:pPr algn="ctr" indent="0" marL="0">
+            <a:pPr eaLnBrk="0" latinLnBrk="0" algn="ctr" indent="0" marL="0">
               <a:buNone/>
             </a:pPr>
             <a:r>
@@ -3318,7 +3318,7 @@
           <a:bodyPr wrap="square" lIns="0" tIns="0" rIns="0" bIns="0" rtlCol="0" anchor="ctr"/>
           <a:lstStyle/>
           <a:p>
-            <a:pPr algn="ctr" indent="0" marL="0">
+            <a:pPr eaLnBrk="0" latinLnBrk="0" algn="ctr" indent="0" marL="0">
               <a:buNone/>
             </a:pPr>
             <a:r>
@@ -3357,7 +3357,7 @@
           <a:bodyPr wrap="square" lIns="0" tIns="0" rIns="0" bIns="0" rtlCol="0" anchor="ctr"/>
           <a:lstStyle/>
           <a:p>
-            <a:pPr indent="0" marL="0">
+            <a:pPr eaLnBrk="0" latinLnBrk="0" indent="0" marL="0">
               <a:buNone/>
             </a:pPr>
             <a:r>
@@ -3396,7 +3396,7 @@
           <a:bodyPr wrap="square" lIns="0" tIns="0" rIns="0" bIns="0" rtlCol="0" anchor="ctr"/>
           <a:lstStyle/>
           <a:p>
-            <a:pPr indent="0" marL="0">
+            <a:pPr eaLnBrk="0" latinLnBrk="0" indent="0" marL="0">
               <a:buNone/>
             </a:pPr>
             <a:r>
@@ -3462,7 +3462,7 @@
           <a:bodyPr wrap="square" lIns="0" tIns="0" rIns="0" bIns="0" rtlCol="0" anchor="ctr"/>
           <a:lstStyle/>
           <a:p>
-            <a:pPr indent="0" marL="0">
+            <a:pPr eaLnBrk="0" latinLnBrk="0" indent="0" marL="0">
               <a:buNone/>
             </a:pPr>
             <a:r>
@@ -3501,7 +3501,7 @@
           <a:bodyPr wrap="square" lIns="0" tIns="0" rIns="0" bIns="0" rtlCol="0" anchor="ctr"/>
           <a:lstStyle/>
           <a:p>
-            <a:pPr indent="0" marL="0">
+            <a:pPr eaLnBrk="0" latinLnBrk="0" indent="0" marL="0">
               <a:buNone/>
             </a:pPr>
             <a:r>
@@ -3540,7 +3540,7 @@
           <a:bodyPr wrap="square" lIns="0" tIns="0" rIns="0" bIns="0" rtlCol="0" anchor="ctr"/>
           <a:lstStyle/>
           <a:p>
-            <a:pPr indent="0" marL="0">
+            <a:pPr eaLnBrk="0" latinLnBrk="0" indent="0" marL="0">
               <a:lnSpc>
                 <a:spcPts val="1600"/>
               </a:lnSpc>
@@ -3609,7 +3609,7 @@
           <a:bodyPr wrap="square" lIns="0" tIns="0" rIns="0" bIns="0" rtlCol="0" anchor="ctr"/>
           <a:lstStyle/>
           <a:p>
-            <a:pPr indent="0" marL="0">
+            <a:pPr eaLnBrk="0" latinLnBrk="0" indent="0" marL="0">
               <a:buNone/>
             </a:pPr>
             <a:r>
@@ -3648,7 +3648,7 @@
           <a:bodyPr wrap="square" lIns="0" tIns="0" rIns="0" bIns="0" rtlCol="0" anchor="ctr"/>
           <a:lstStyle/>
           <a:p>
-            <a:pPr indent="0" marL="0">
+            <a:pPr eaLnBrk="0" latinLnBrk="0" indent="0" marL="0">
               <a:buNone/>
             </a:pPr>
             <a:r>
@@ -3687,7 +3687,7 @@
           <a:bodyPr wrap="square" lIns="0" tIns="0" rIns="0" bIns="0" rtlCol="0" anchor="ctr"/>
           <a:lstStyle/>
           <a:p>
-            <a:pPr indent="0" marL="0">
+            <a:pPr eaLnBrk="0" latinLnBrk="0" indent="0" marL="0">
               <a:lnSpc>
                 <a:spcPts val="1600"/>
               </a:lnSpc>
@@ -3756,7 +3756,7 @@
           <a:bodyPr wrap="square" lIns="0" tIns="0" rIns="0" bIns="0" rtlCol="0" anchor="ctr"/>
           <a:lstStyle/>
           <a:p>
-            <a:pPr indent="0" marL="0">
+            <a:pPr eaLnBrk="0" latinLnBrk="0" indent="0" marL="0">
               <a:buNone/>
             </a:pPr>
             <a:r>
@@ -3795,7 +3795,7 @@
           <a:bodyPr wrap="square" lIns="0" tIns="0" rIns="0" bIns="0" rtlCol="0" anchor="ctr"/>
           <a:lstStyle/>
           <a:p>
-            <a:pPr indent="0" marL="0">
+            <a:pPr eaLnBrk="0" latinLnBrk="0" indent="0" marL="0">
               <a:buNone/>
             </a:pPr>
             <a:r>
@@ -3834,7 +3834,7 @@
           <a:bodyPr wrap="square" lIns="0" tIns="0" rIns="0" bIns="0" rtlCol="0" anchor="ctr"/>
           <a:lstStyle/>
           <a:p>
-            <a:pPr indent="0" marL="0">
+            <a:pPr eaLnBrk="0" latinLnBrk="0" indent="0" marL="0">
               <a:lnSpc>
                 <a:spcPts val="1600"/>
               </a:lnSpc>
@@ -3903,7 +3903,7 @@
           <a:bodyPr wrap="square" lIns="0" tIns="0" rIns="0" bIns="0" rtlCol="0" anchor="ctr"/>
           <a:lstStyle/>
           <a:p>
-            <a:pPr indent="0" marL="0">
+            <a:pPr eaLnBrk="0" latinLnBrk="0" indent="0" marL="0">
               <a:buNone/>
             </a:pPr>
             <a:r>
@@ -3942,7 +3942,7 @@
           <a:bodyPr wrap="square" lIns="0" tIns="0" rIns="0" bIns="0" rtlCol="0" anchor="ctr"/>
           <a:lstStyle/>
           <a:p>
-            <a:pPr indent="0" marL="0">
+            <a:pPr eaLnBrk="0" latinLnBrk="0" indent="0" marL="0">
               <a:buNone/>
             </a:pPr>
             <a:r>
@@ -3981,7 +3981,7 @@
           <a:bodyPr wrap="square" lIns="0" tIns="0" rIns="0" bIns="0" rtlCol="0" anchor="ctr"/>
           <a:lstStyle/>
           <a:p>
-            <a:pPr indent="0" marL="0">
+            <a:pPr eaLnBrk="0" latinLnBrk="0" indent="0" marL="0">
               <a:lnSpc>
                 <a:spcPts val="1600"/>
               </a:lnSpc>
@@ -4023,7 +4023,7 @@
           <a:bodyPr wrap="square" lIns="0" tIns="0" rIns="0" bIns="0" rtlCol="0" anchor="ctr"/>
           <a:lstStyle/>
           <a:p>
-            <a:pPr indent="0" marL="0">
+            <a:pPr eaLnBrk="0" latinLnBrk="0" indent="0" marL="0">
               <a:buNone/>
             </a:pPr>
             <a:r>
@@ -4082,7 +4082,7 @@
           <a:bodyPr wrap="square" lIns="0" tIns="0" rIns="0" bIns="0" rtlCol="0" anchor="ctr"/>
           <a:lstStyle/>
           <a:p>
-            <a:pPr indent="0" marL="0">
+            <a:pPr eaLnBrk="0" latinLnBrk="0" indent="0" marL="0">
               <a:buNone/>
             </a:pPr>
             <a:r>
@@ -4121,7 +4121,7 @@
           <a:bodyPr wrap="square" lIns="0" tIns="0" rIns="0" bIns="0" rtlCol="0" anchor="ctr"/>
           <a:lstStyle/>
           <a:p>
-            <a:pPr indent="0" marL="0">
+            <a:pPr eaLnBrk="0" latinLnBrk="0" indent="0" marL="0">
               <a:lnSpc>
                 <a:spcPts val="1700"/>
               </a:lnSpc>
@@ -4183,7 +4183,7 @@
           <a:bodyPr wrap="square" lIns="0" tIns="0" rIns="0" bIns="0" rtlCol="0" anchor="ctr"/>
           <a:lstStyle/>
           <a:p>
-            <a:pPr indent="0" marL="0">
+            <a:pPr eaLnBrk="0" latinLnBrk="0" indent="0" marL="0">
               <a:buNone/>
             </a:pPr>
             <a:r>
@@ -4222,7 +4222,7 @@
           <a:bodyPr wrap="square" lIns="0" tIns="0" rIns="0" bIns="0" rtlCol="0" anchor="ctr"/>
           <a:lstStyle/>
           <a:p>
-            <a:pPr indent="0" marL="0">
+            <a:pPr eaLnBrk="0" latinLnBrk="0" indent="0" marL="0">
               <a:lnSpc>
                 <a:spcPts val="1700"/>
               </a:lnSpc>
@@ -4284,7 +4284,7 @@
           <a:bodyPr wrap="square" lIns="0" tIns="0" rIns="0" bIns="0" rtlCol="0" anchor="ctr"/>
           <a:lstStyle/>
           <a:p>
-            <a:pPr indent="0" marL="0">
+            <a:pPr eaLnBrk="0" latinLnBrk="0" indent="0" marL="0">
               <a:buNone/>
             </a:pPr>
             <a:r>
@@ -4323,7 +4323,7 @@
           <a:bodyPr wrap="square" lIns="0" tIns="0" rIns="0" bIns="0" rtlCol="0" anchor="ctr"/>
           <a:lstStyle/>
           <a:p>
-            <a:pPr indent="0" marL="0">
+            <a:pPr eaLnBrk="0" latinLnBrk="0" indent="0" marL="0">
               <a:lnSpc>
                 <a:spcPts val="1700"/>
               </a:lnSpc>
@@ -4385,7 +4385,7 @@
           <a:bodyPr wrap="square" lIns="0" tIns="0" rIns="0" bIns="0" rtlCol="0" anchor="ctr"/>
           <a:lstStyle/>
           <a:p>
-            <a:pPr indent="0" marL="0">
+            <a:pPr eaLnBrk="0" latinLnBrk="0" indent="0" marL="0">
               <a:buNone/>
             </a:pPr>
             <a:r>
@@ -4424,7 +4424,7 @@
           <a:bodyPr wrap="square" lIns="0" tIns="0" rIns="0" bIns="0" rtlCol="0" anchor="ctr"/>
           <a:lstStyle/>
           <a:p>
-            <a:pPr indent="0" marL="0">
+            <a:pPr eaLnBrk="0" latinLnBrk="0" indent="0" marL="0">
               <a:lnSpc>
                 <a:spcPts val="1700"/>
               </a:lnSpc>
@@ -4522,7 +4522,7 @@
           <a:bodyPr wrap="square" lIns="0" tIns="0" rIns="0" bIns="0" rtlCol="0" anchor="ctr"/>
           <a:lstStyle/>
           <a:p>
-            <a:pPr algn="ctr" indent="0" marL="0">
+            <a:pPr eaLnBrk="0" latinLnBrk="0" algn="ctr" indent="0" marL="0">
               <a:buNone/>
             </a:pPr>
             <a:r>
@@ -4561,7 +4561,7 @@
           <a:bodyPr wrap="square" lIns="0" tIns="0" rIns="0" bIns="0" rtlCol="0" anchor="ctr"/>
           <a:lstStyle/>
           <a:p>
-            <a:pPr indent="0" marL="0">
+            <a:pPr eaLnBrk="0" latinLnBrk="0" indent="0" marL="0">
               <a:buNone/>
             </a:pPr>
             <a:r>
@@ -4600,7 +4600,7 @@
           <a:bodyPr wrap="square" lIns="0" tIns="0" rIns="0" bIns="0" rtlCol="0" anchor="ctr"/>
           <a:lstStyle/>
           <a:p>
-            <a:pPr indent="0" marL="0">
+            <a:pPr eaLnBrk="0" latinLnBrk="0" indent="0" marL="0">
               <a:buNone/>
             </a:pPr>
             <a:r>
@@ -4673,7 +4673,7 @@
           <a:bodyPr wrap="square" lIns="0" tIns="0" rIns="0" bIns="0" rtlCol="0" anchor="ctr"/>
           <a:lstStyle/>
           <a:p>
-            <a:pPr algn="ctr" indent="0" marL="0">
+            <a:pPr eaLnBrk="0" latinLnBrk="0" algn="ctr" indent="0" marL="0">
               <a:buNone/>
             </a:pPr>
             <a:r>
@@ -4712,7 +4712,7 @@
           <a:bodyPr wrap="square" lIns="0" tIns="0" rIns="0" bIns="0" rtlCol="0" anchor="ctr"/>
           <a:lstStyle/>
           <a:p>
-            <a:pPr algn="ctr" indent="0" marL="0">
+            <a:pPr eaLnBrk="0" latinLnBrk="0" algn="ctr" indent="0" marL="0">
               <a:buNone/>
             </a:pPr>
             <a:r>
@@ -4785,7 +4785,7 @@
           <a:bodyPr wrap="square" lIns="0" tIns="0" rIns="0" bIns="0" rtlCol="0" anchor="ctr"/>
           <a:lstStyle/>
           <a:p>
-            <a:pPr algn="ctr" indent="0" marL="0">
+            <a:pPr eaLnBrk="0" latinLnBrk="0" algn="ctr" indent="0" marL="0">
               <a:buNone/>
             </a:pPr>
             <a:r>
@@ -4824,7 +4824,7 @@
           <a:bodyPr wrap="square" lIns="0" tIns="0" rIns="0" bIns="0" rtlCol="0" anchor="ctr"/>
           <a:lstStyle/>
           <a:p>
-            <a:pPr algn="ctr" indent="0" marL="0">
+            <a:pPr eaLnBrk="0" latinLnBrk="0" algn="ctr" indent="0" marL="0">
               <a:buNone/>
             </a:pPr>
             <a:r>
@@ -4897,7 +4897,7 @@
           <a:bodyPr wrap="square" lIns="0" tIns="0" rIns="0" bIns="0" rtlCol="0" anchor="ctr"/>
           <a:lstStyle/>
           <a:p>
-            <a:pPr algn="ctr" indent="0" marL="0">
+            <a:pPr eaLnBrk="0" latinLnBrk="0" algn="ctr" indent="0" marL="0">
               <a:buNone/>
             </a:pPr>
             <a:r>
@@ -4936,7 +4936,7 @@
           <a:bodyPr wrap="square" lIns="0" tIns="0" rIns="0" bIns="0" rtlCol="0" anchor="ctr"/>
           <a:lstStyle/>
           <a:p>
-            <a:pPr algn="ctr" indent="0" marL="0">
+            <a:pPr eaLnBrk="0" latinLnBrk="0" algn="ctr" indent="0" marL="0">
               <a:buNone/>
             </a:pPr>
             <a:r>
@@ -5009,7 +5009,7 @@
           <a:bodyPr wrap="square" lIns="0" tIns="0" rIns="0" bIns="0" rtlCol="0" anchor="ctr"/>
           <a:lstStyle/>
           <a:p>
-            <a:pPr indent="0" marL="0">
+            <a:pPr eaLnBrk="0" latinLnBrk="0" indent="0" marL="0">
               <a:buNone/>
             </a:pPr>
             <a:r>
@@ -5048,7 +5048,7 @@
           <a:bodyPr wrap="square" lIns="0" tIns="0" rIns="0" bIns="0" rtlCol="0" anchor="ctr"/>
           <a:lstStyle/>
           <a:p>
-            <a:pPr indent="0" marL="0">
+            <a:pPr eaLnBrk="0" latinLnBrk="0" indent="0" marL="0">
               <a:buNone/>
             </a:pPr>
             <a:r>
@@ -5087,7 +5087,7 @@
           <a:bodyPr wrap="square" lIns="0" tIns="0" rIns="0" bIns="0" rtlCol="0" anchor="ctr"/>
           <a:lstStyle/>
           <a:p>
-            <a:pPr indent="0" marL="0">
+            <a:pPr eaLnBrk="0" latinLnBrk="0" indent="0" marL="0">
               <a:lnSpc>
                 <a:spcPts val="2100"/>
               </a:lnSpc>
@@ -5107,7 +5107,7 @@
             <a:endParaRPr lang="en-US" sz="1300" dirty="0"/>
           </a:p>
           <a:p>
-            <a:pPr indent="0" marL="0">
+            <a:pPr eaLnBrk="0" latinLnBrk="0" indent="0" marL="0">
               <a:lnSpc>
                 <a:spcPts val="2100"/>
               </a:lnSpc>
@@ -5183,7 +5183,7 @@
           <a:bodyPr wrap="square" lIns="0" tIns="0" rIns="0" bIns="0" rtlCol="0" anchor="ctr"/>
           <a:lstStyle/>
           <a:p>
-            <a:pPr indent="0" marL="0">
+            <a:pPr eaLnBrk="0" latinLnBrk="0" indent="0" marL="0">
               <a:buNone/>
             </a:pPr>
             <a:r>
@@ -5222,7 +5222,7 @@
           <a:bodyPr wrap="square" lIns="0" tIns="0" rIns="0" bIns="0" rtlCol="0" anchor="ctr"/>
           <a:lstStyle/>
           <a:p>
-            <a:pPr indent="0" marL="0">
+            <a:pPr eaLnBrk="0" latinLnBrk="0" indent="0" marL="0">
               <a:buNone/>
             </a:pPr>
             <a:r>
@@ -5295,7 +5295,7 @@
           <a:bodyPr wrap="square" lIns="0" tIns="0" rIns="0" bIns="0" rtlCol="0" anchor="ctr"/>
           <a:lstStyle/>
           <a:p>
-            <a:pPr indent="0" marL="0">
+            <a:pPr eaLnBrk="0" latinLnBrk="0" indent="0" marL="0">
               <a:buNone/>
             </a:pPr>
             <a:r>
@@ -5354,7 +5354,7 @@
           <a:bodyPr wrap="square" lIns="0" tIns="0" rIns="0" bIns="0" rtlCol="0" anchor="ctr"/>
           <a:lstStyle/>
           <a:p>
-            <a:pPr algn="ctr" indent="0" marL="0">
+            <a:pPr eaLnBrk="0" latinLnBrk="0" algn="ctr" indent="0" marL="0">
               <a:buNone/>
             </a:pPr>
             <a:r>
@@ -5393,7 +5393,7 @@
           <a:bodyPr wrap="square" lIns="0" tIns="0" rIns="0" bIns="0" rtlCol="0" anchor="ctr"/>
           <a:lstStyle/>
           <a:p>
-            <a:pPr indent="0" marL="0">
+            <a:pPr eaLnBrk="0" latinLnBrk="0" indent="0" marL="0">
               <a:lnSpc>
                 <a:spcPts val="2500"/>
               </a:lnSpc>
@@ -5455,7 +5455,7 @@
           <a:bodyPr wrap="square" lIns="0" tIns="0" rIns="0" bIns="0" rtlCol="0" anchor="ctr"/>
           <a:lstStyle/>
           <a:p>
-            <a:pPr algn="ctr" indent="0" marL="0">
+            <a:pPr eaLnBrk="0" latinLnBrk="0" algn="ctr" indent="0" marL="0">
               <a:buNone/>
             </a:pPr>
             <a:r>
@@ -5494,7 +5494,7 @@
           <a:bodyPr wrap="square" lIns="0" tIns="0" rIns="0" bIns="0" rtlCol="0" anchor="ctr"/>
           <a:lstStyle/>
           <a:p>
-            <a:pPr indent="0" marL="0">
+            <a:pPr eaLnBrk="0" latinLnBrk="0" indent="0" marL="0">
               <a:lnSpc>
                 <a:spcPts val="2500"/>
               </a:lnSpc>
@@ -5536,7 +5536,7 @@
           <a:bodyPr wrap="square" lIns="0" tIns="0" rIns="0" bIns="0" rtlCol="0" anchor="ctr"/>
           <a:lstStyle/>
           <a:p>
-            <a:pPr indent="0" marL="0">
+            <a:pPr eaLnBrk="0" latinLnBrk="0" indent="0" marL="0">
               <a:buNone/>
             </a:pPr>
             <a:r>
@@ -5631,7 +5631,7 @@
           <a:bodyPr wrap="square" lIns="0" tIns="0" rIns="0" bIns="0" rtlCol="0" anchor="ctr"/>
           <a:lstStyle/>
           <a:p>
-            <a:pPr algn="ctr" indent="0" marL="0">
+            <a:pPr eaLnBrk="0" latinLnBrk="0" algn="ctr" indent="0" marL="0">
               <a:buNone/>
             </a:pPr>
             <a:r>
@@ -5670,7 +5670,7 @@
           <a:bodyPr wrap="square" lIns="0" tIns="0" rIns="0" bIns="0" rtlCol="0" anchor="ctr"/>
           <a:lstStyle/>
           <a:p>
-            <a:pPr indent="0" marL="0">
+            <a:pPr eaLnBrk="0" latinLnBrk="0" indent="0" marL="0">
               <a:buNone/>
             </a:pPr>
             <a:r>
@@ -5709,7 +5709,7 @@
           <a:bodyPr wrap="square" lIns="0" tIns="0" rIns="0" bIns="0" rtlCol="0" anchor="ctr"/>
           <a:lstStyle/>
           <a:p>
-            <a:pPr indent="0" marL="0">
+            <a:pPr eaLnBrk="0" latinLnBrk="0" indent="0" marL="0">
               <a:buNone/>
             </a:pPr>
             <a:r>
@@ -5748,7 +5748,7 @@
           <a:bodyPr wrap="square" lIns="0" tIns="0" rIns="0" bIns="0" rtlCol="0" anchor="ctr"/>
           <a:lstStyle/>
           <a:p>
-            <a:pPr indent="0" marL="0">
+            <a:pPr eaLnBrk="0" latinLnBrk="0" indent="0" marL="0">
               <a:buNone/>
             </a:pPr>
             <a:r>
@@ -5789,27 +5789,27 @@
             <a:tbl>
               <a:tblPr/>
               <a:tblGrid>
-                <a:gridCol w="1133856"/>
-                <a:gridCol w="658368"/>
-                <a:gridCol w="548640"/>
-                <a:gridCol w="548640"/>
-                <a:gridCol w="548640"/>
-                <a:gridCol w="548640"/>
-                <a:gridCol w="1060704"/>
-                <a:gridCol w="548640"/>
-                <a:gridCol w="694944"/>
-                <a:gridCol w="603504"/>
-                <a:gridCol w="694944"/>
-                <a:gridCol w="822960"/>
-                <a:gridCol w="2432304"/>
+                <a:gridCol w="1097280"/>
+                <a:gridCol w="676656"/>
+                <a:gridCol w="682782"/>
+                <a:gridCol w="682782"/>
+                <a:gridCol w="682782"/>
+                <a:gridCol w="682782"/>
+                <a:gridCol w="1143000"/>
+                <a:gridCol w="682782"/>
+                <a:gridCol w="682782"/>
+                <a:gridCol w="682782"/>
+                <a:gridCol w="682782"/>
+                <a:gridCol w="682782"/>
+                <a:gridCol w="1783080"/>
               </a:tblGrid>
-              <a:tr h="347472">
+              <a:tr h="365760">
                 <a:tc rowSpan="3" gridSpan="2">
                   <a:txBody>
                     <a:bodyPr/>
                     <a:lstStyle/>
                     <a:p>
-                      <a:pPr algn="ctr" indent="0" marL="0">
+                      <a:pPr eaLnBrk="0" latinLnBrk="0" algn="ctr" indent="0" marL="0">
                         <a:buNone/>
                       </a:pPr>
                       <a:r>
@@ -5830,7 +5830,7 @@
                       </a:endParaRPr>
                     </a:p>
                   </a:txBody>
-                  <a:tcPr marL="91440" marR="91440" marT="45720" marB="45720" anchor="ctr">
+                  <a:tcPr marL="38100" marR="38100" marT="38100" marB="38100" anchor="ctr">
                     <a:lnL w="12700" cap="flat" cmpd="sng" algn="ctr">
                       <a:solidFill>
                         <a:srgbClr val="C6CEE2"/>
@@ -5880,7 +5880,7 @@
                     <a:bodyPr/>
                     <a:lstStyle/>
                     <a:p>
-                      <a:pPr algn="ctr" indent="0" marL="0">
+                      <a:pPr eaLnBrk="0" latinLnBrk="0" algn="ctr" indent="0" marL="0">
                         <a:buNone/>
                       </a:pPr>
                       <a:r>
@@ -5901,7 +5901,7 @@
                       </a:endParaRPr>
                     </a:p>
                   </a:txBody>
-                  <a:tcPr marL="91440" marR="91440" marT="45720" marB="45720" anchor="ctr">
+                  <a:tcPr marL="38100" marR="38100" marT="38100" marB="38100" anchor="ctr">
                     <a:lnL w="12700" cap="flat" cmpd="sng" algn="ctr">
                       <a:solidFill>
                         <a:srgbClr val="C6CEE2"/>
@@ -5960,7 +5960,7 @@
                     <a:bodyPr/>
                     <a:lstStyle/>
                     <a:p>
-                      <a:pPr algn="ctr" indent="0" marL="0">
+                      <a:pPr eaLnBrk="0" latinLnBrk="0" algn="ctr" indent="0" marL="0">
                         <a:buNone/>
                       </a:pPr>
                       <a:r>
@@ -5981,7 +5981,7 @@
                       </a:endParaRPr>
                     </a:p>
                   </a:txBody>
-                  <a:tcPr marL="91440" marR="91440" marT="45720" marB="45720" anchor="ctr">
+                  <a:tcPr marL="38100" marR="38100" marT="38100" marB="38100" anchor="ctr">
                     <a:lnL w="12700" cap="flat" cmpd="sng" algn="ctr">
                       <a:solidFill>
                         <a:srgbClr val="C6CEE2"/>
@@ -6028,7 +6028,7 @@
                     <a:bodyPr/>
                     <a:lstStyle/>
                     <a:p>
-                      <a:pPr algn="ctr" indent="0" marL="0">
+                      <a:pPr eaLnBrk="0" latinLnBrk="0" algn="ctr" indent="0" marL="0">
                         <a:buNone/>
                       </a:pPr>
                       <a:r>
@@ -6049,7 +6049,7 @@
                       </a:endParaRPr>
                     </a:p>
                     <a:p>
-                      <a:pPr algn="ctr" indent="0" marL="0">
+                      <a:pPr eaLnBrk="0" latinLnBrk="0" algn="ctr" indent="0" marL="0">
                         <a:buNone/>
                       </a:pPr>
                       <a:r>
@@ -6070,7 +6070,7 @@
                       </a:endParaRPr>
                     </a:p>
                   </a:txBody>
-                  <a:tcPr marL="91440" marR="91440" marT="45720" marB="45720" anchor="ctr">
+                  <a:tcPr marL="38100" marR="38100" marT="38100" marB="38100" anchor="ctr">
                     <a:lnL w="12700" cap="flat" cmpd="sng" algn="ctr">
                       <a:solidFill>
                         <a:srgbClr val="C6CEE2"/>
@@ -6117,7 +6117,7 @@
                     <a:bodyPr/>
                     <a:lstStyle/>
                     <a:p>
-                      <a:pPr algn="ctr" indent="0" marL="0">
+                      <a:pPr eaLnBrk="0" latinLnBrk="0" algn="ctr" indent="0" marL="0">
                         <a:buNone/>
                       </a:pPr>
                       <a:r>
@@ -6138,7 +6138,7 @@
                       </a:endParaRPr>
                     </a:p>
                   </a:txBody>
-                  <a:tcPr marL="91440" marR="91440" marT="45720" marB="45720" anchor="ctr">
+                  <a:tcPr marL="38100" marR="38100" marT="38100" marB="38100" anchor="ctr">
                     <a:lnL w="12700" cap="flat" cmpd="sng" algn="ctr">
                       <a:solidFill>
                         <a:srgbClr val="C6CEE2"/>
@@ -6185,7 +6185,7 @@
                     <a:bodyPr/>
                     <a:lstStyle/>
                     <a:p>
-                      <a:pPr algn="ctr" indent="0" marL="0">
+                      <a:pPr eaLnBrk="0" latinLnBrk="0" algn="ctr" indent="0" marL="0">
                         <a:buNone/>
                       </a:pPr>
                       <a:r>
@@ -6206,7 +6206,7 @@
                       </a:endParaRPr>
                     </a:p>
                   </a:txBody>
-                  <a:tcPr marL="91440" marR="91440" marT="45720" marB="45720" anchor="ctr">
+                  <a:tcPr marL="38100" marR="38100" marT="38100" marB="38100" anchor="ctr">
                     <a:lnL w="12700" cap="flat" cmpd="sng" algn="ctr">
                       <a:solidFill>
                         <a:srgbClr val="C6CEE2"/>
@@ -6253,7 +6253,7 @@
                     <a:bodyPr/>
                     <a:lstStyle/>
                     <a:p>
-                      <a:pPr algn="ctr" indent="0" marL="0">
+                      <a:pPr eaLnBrk="0" latinLnBrk="0" algn="ctr" indent="0" marL="0">
                         <a:buNone/>
                       </a:pPr>
                       <a:r>
@@ -6274,7 +6274,7 @@
                       </a:endParaRPr>
                     </a:p>
                   </a:txBody>
-                  <a:tcPr marL="91440" marR="91440" marT="45720" marB="45720" anchor="ctr">
+                  <a:tcPr marL="38100" marR="38100" marT="38100" marB="38100" anchor="ctr">
                     <a:lnL w="12700" cap="flat" cmpd="sng" algn="ctr">
                       <a:solidFill>
                         <a:srgbClr val="C6CEE2"/>
@@ -6321,7 +6321,7 @@
                     <a:bodyPr/>
                     <a:lstStyle/>
                     <a:p>
-                      <a:pPr algn="ctr" indent="0" marL="0">
+                      <a:pPr eaLnBrk="0" latinLnBrk="0" algn="ctr" indent="0" marL="0">
                         <a:buNone/>
                       </a:pPr>
                       <a:r>
@@ -6342,7 +6342,7 @@
                       </a:endParaRPr>
                     </a:p>
                   </a:txBody>
-                  <a:tcPr marL="91440" marR="91440" marT="45720" marB="45720" anchor="ctr">
+                  <a:tcPr marL="38100" marR="38100" marT="38100" marB="38100" anchor="ctr">
                     <a:lnL w="12700" cap="flat" cmpd="sng" algn="ctr">
                       <a:solidFill>
                         <a:srgbClr val="C6CEE2"/>
@@ -6385,7 +6385,7 @@
                   </a:tcPr>
                 </a:tc>
               </a:tr>
-              <a:tr h="347472">
+              <a:tr h="365760">
                 <a:tc gridSpan="2" vMerge="1">
                   <a:tcPr/>
                 </a:tc>
@@ -6397,7 +6397,7 @@
                     <a:bodyPr/>
                     <a:lstStyle/>
                     <a:p>
-                      <a:pPr algn="ctr" indent="0" marL="0">
+                      <a:pPr eaLnBrk="0" latinLnBrk="0" algn="ctr" indent="0" marL="0">
                         <a:buNone/>
                       </a:pPr>
                       <a:r>
@@ -6418,7 +6418,7 @@
                       </a:endParaRPr>
                     </a:p>
                   </a:txBody>
-                  <a:tcPr marL="91440" marR="91440" marT="45720" marB="45720" anchor="ctr">
+                  <a:tcPr marL="38100" marR="38100" marT="38100" marB="38100" anchor="ctr">
                     <a:lnL w="12700" cap="flat" cmpd="sng" algn="ctr">
                       <a:solidFill>
                         <a:srgbClr val="C6CEE2"/>
@@ -6474,7 +6474,7 @@
                     <a:bodyPr/>
                     <a:lstStyle/>
                     <a:p>
-                      <a:pPr algn="ctr" indent="0" marL="0">
+                      <a:pPr eaLnBrk="0" latinLnBrk="0" algn="ctr" indent="0" marL="0">
                         <a:buNone/>
                       </a:pPr>
                       <a:r>
@@ -6495,7 +6495,7 @@
                       </a:endParaRPr>
                     </a:p>
                     <a:p>
-                      <a:pPr algn="ctr" indent="0" marL="0">
+                      <a:pPr eaLnBrk="0" latinLnBrk="0" algn="ctr" indent="0" marL="0">
                         <a:buNone/>
                       </a:pPr>
                       <a:r>
@@ -6516,7 +6516,7 @@
                       </a:endParaRPr>
                     </a:p>
                   </a:txBody>
-                  <a:tcPr marL="91440" marR="91440" marT="45720" marB="45720" anchor="ctr">
+                  <a:tcPr marL="38100" marR="38100" marT="38100" marB="38100" anchor="ctr">
                     <a:lnL w="12700" cap="flat" cmpd="sng" algn="ctr">
                       <a:solidFill>
                         <a:srgbClr val="C6CEE2"/>
@@ -6577,7 +6577,7 @@
                   <a:tcPr/>
                 </a:tc>
               </a:tr>
-              <a:tr h="347472">
+              <a:tr h="365760">
                 <a:tc gridSpan="2" vMerge="1">
                   <a:tcPr/>
                 </a:tc>
@@ -6589,7 +6589,7 @@
                     <a:bodyPr/>
                     <a:lstStyle/>
                     <a:p>
-                      <a:pPr algn="ctr" indent="0" marL="0">
+                      <a:pPr eaLnBrk="0" latinLnBrk="0" algn="ctr" indent="0" marL="0">
                         <a:buNone/>
                       </a:pPr>
                       <a:r>
@@ -6610,7 +6610,7 @@
                       </a:endParaRPr>
                     </a:p>
                   </a:txBody>
-                  <a:tcPr marL="91440" marR="91440" marT="45720" marB="45720" anchor="ctr">
+                  <a:tcPr marL="38100" marR="38100" marT="38100" marB="38100" anchor="ctr">
                     <a:lnL w="12700" cap="flat" cmpd="sng" algn="ctr">
                       <a:solidFill>
                         <a:srgbClr val="C6CEE2"/>
@@ -6657,7 +6657,7 @@
                     <a:bodyPr/>
                     <a:lstStyle/>
                     <a:p>
-                      <a:pPr algn="ctr" indent="0" marL="0">
+                      <a:pPr eaLnBrk="0" latinLnBrk="0" algn="ctr" indent="0" marL="0">
                         <a:buNone/>
                       </a:pPr>
                       <a:r>
@@ -6678,7 +6678,7 @@
                       </a:endParaRPr>
                     </a:p>
                   </a:txBody>
-                  <a:tcPr marL="91440" marR="91440" marT="45720" marB="45720" anchor="ctr">
+                  <a:tcPr marL="38100" marR="38100" marT="38100" marB="38100" anchor="ctr">
                     <a:lnL w="12700" cap="flat" cmpd="sng" algn="ctr">
                       <a:solidFill>
                         <a:srgbClr val="C6CEE2"/>
@@ -6725,7 +6725,7 @@
                     <a:bodyPr/>
                     <a:lstStyle/>
                     <a:p>
-                      <a:pPr algn="ctr" indent="0" marL="0">
+                      <a:pPr eaLnBrk="0" latinLnBrk="0" algn="ctr" indent="0" marL="0">
                         <a:buNone/>
                       </a:pPr>
                       <a:r>
@@ -6746,7 +6746,7 @@
                       </a:endParaRPr>
                     </a:p>
                   </a:txBody>
-                  <a:tcPr marL="91440" marR="91440" marT="45720" marB="45720" anchor="ctr">
+                  <a:tcPr marL="38100" marR="38100" marT="38100" marB="38100" anchor="ctr">
                     <a:lnL w="12700" cap="flat" cmpd="sng" algn="ctr">
                       <a:solidFill>
                         <a:srgbClr val="C6CEE2"/>
@@ -6793,7 +6793,7 @@
                     <a:bodyPr/>
                     <a:lstStyle/>
                     <a:p>
-                      <a:pPr algn="ctr" indent="0" marL="0">
+                      <a:pPr eaLnBrk="0" latinLnBrk="0" algn="ctr" indent="0" marL="0">
                         <a:buNone/>
                       </a:pPr>
                       <a:r>
@@ -6814,7 +6814,7 @@
                       </a:endParaRPr>
                     </a:p>
                   </a:txBody>
-                  <a:tcPr marL="91440" marR="91440" marT="45720" marB="45720" anchor="ctr">
+                  <a:tcPr marL="38100" marR="38100" marT="38100" marB="38100" anchor="ctr">
                     <a:lnL w="12700" cap="flat" cmpd="sng" algn="ctr">
                       <a:solidFill>
                         <a:srgbClr val="C6CEE2"/>
@@ -6878,13 +6878,13 @@
                   <a:tcPr/>
                 </a:tc>
               </a:tr>
-              <a:tr h="658368">
+              <a:tr h="676656">
                 <a:tc rowSpan="2">
                   <a:txBody>
                     <a:bodyPr/>
                     <a:lstStyle/>
                     <a:p>
-                      <a:pPr algn="ctr" indent="0" marL="0">
+                      <a:pPr eaLnBrk="0" latinLnBrk="0" algn="ctr" indent="0" marL="0">
                         <a:buNone/>
                       </a:pPr>
                       <a:r>
@@ -6905,7 +6905,7 @@
                       </a:endParaRPr>
                     </a:p>
                     <a:p>
-                      <a:pPr algn="ctr" indent="0" marL="0">
+                      <a:pPr eaLnBrk="0" latinLnBrk="0" algn="ctr" indent="0" marL="0">
                         <a:buNone/>
                       </a:pPr>
                       <a:r>
@@ -6926,7 +6926,7 @@
                       </a:endParaRPr>
                     </a:p>
                   </a:txBody>
-                  <a:tcPr marL="91440" marR="91440" marT="45720" marB="45720" anchor="ctr">
+                  <a:tcPr marL="38100" marR="38100" marT="38100" marB="38100" anchor="ctr">
                     <a:lnL w="12700" cap="flat" cmpd="sng" algn="ctr">
                       <a:solidFill>
                         <a:srgbClr val="C6CEE2"/>
@@ -6973,7 +6973,7 @@
                     <a:bodyPr/>
                     <a:lstStyle/>
                     <a:p>
-                      <a:pPr algn="ctr" indent="0" marL="0">
+                      <a:pPr eaLnBrk="0" latinLnBrk="0" algn="ctr" indent="0" marL="0">
                         <a:buNone/>
                       </a:pPr>
                       <a:r>
@@ -6994,7 +6994,7 @@
                       </a:endParaRPr>
                     </a:p>
                   </a:txBody>
-                  <a:tcPr marL="91440" marR="91440" marT="45720" marB="45720" anchor="ctr">
+                  <a:tcPr marL="38100" marR="38100" marT="38100" marB="38100" anchor="ctr">
                     <a:lnL w="12700" cap="flat" cmpd="sng" algn="ctr">
                       <a:solidFill>
                         <a:srgbClr val="C6CEE2"/>
@@ -7041,7 +7041,7 @@
                     <a:bodyPr/>
                     <a:lstStyle/>
                     <a:p>
-                      <a:pPr algn="ctr" indent="0" marL="0">
+                      <a:pPr eaLnBrk="0" latinLnBrk="0" algn="ctr" indent="0" marL="0">
                         <a:buNone/>
                       </a:pPr>
                       <a:r>
@@ -7062,7 +7062,7 @@
                       </a:endParaRPr>
                     </a:p>
                   </a:txBody>
-                  <a:tcPr marL="91440" marR="91440" marT="45720" marB="45720" anchor="ctr">
+                  <a:tcPr marL="38100" marR="38100" marT="38100" marB="38100" anchor="ctr">
                     <a:lnL w="12700" cap="flat" cmpd="sng" algn="ctr">
                       <a:solidFill>
                         <a:srgbClr val="C6CEE2"/>
@@ -7106,7 +7106,7 @@
                     <a:bodyPr/>
                     <a:lstStyle/>
                     <a:p>
-                      <a:pPr algn="ctr" indent="0" marL="0">
+                      <a:pPr eaLnBrk="0" latinLnBrk="0" algn="ctr" indent="0" marL="0">
                         <a:buNone/>
                       </a:pPr>
                       <a:r>
@@ -7127,7 +7127,7 @@
                       </a:endParaRPr>
                     </a:p>
                   </a:txBody>
-                  <a:tcPr marL="91440" marR="91440" marT="45720" marB="45720" anchor="ctr">
+                  <a:tcPr marL="38100" marR="38100" marT="38100" marB="38100" anchor="ctr">
                     <a:lnL w="12700" cap="flat" cmpd="sng" algn="ctr">
                       <a:solidFill>
                         <a:srgbClr val="C6CEE2"/>
@@ -7171,7 +7171,7 @@
                     <a:bodyPr/>
                     <a:lstStyle/>
                     <a:p>
-                      <a:pPr algn="ctr" indent="0" marL="0">
+                      <a:pPr eaLnBrk="0" latinLnBrk="0" algn="ctr" indent="0" marL="0">
                         <a:buNone/>
                       </a:pPr>
                       <a:r>
@@ -7192,7 +7192,7 @@
                       </a:endParaRPr>
                     </a:p>
                   </a:txBody>
-                  <a:tcPr marL="91440" marR="91440" marT="45720" marB="45720" anchor="ctr">
+                  <a:tcPr marL="38100" marR="38100" marT="38100" marB="38100" anchor="ctr">
                     <a:lnL w="12700" cap="flat" cmpd="sng" algn="ctr">
                       <a:solidFill>
                         <a:srgbClr val="C6CEE2"/>
@@ -7236,7 +7236,7 @@
                     <a:bodyPr/>
                     <a:lstStyle/>
                     <a:p>
-                      <a:pPr algn="ctr" indent="0" marL="0">
+                      <a:pPr eaLnBrk="0" latinLnBrk="0" algn="ctr" indent="0" marL="0">
                         <a:buNone/>
                       </a:pPr>
                       <a:r>
@@ -7257,7 +7257,7 @@
                       </a:endParaRPr>
                     </a:p>
                   </a:txBody>
-                  <a:tcPr marL="91440" marR="91440" marT="45720" marB="45720" anchor="ctr">
+                  <a:tcPr marL="38100" marR="38100" marT="38100" marB="38100" anchor="ctr">
                     <a:lnL w="12700" cap="flat" cmpd="sng" algn="ctr">
                       <a:solidFill>
                         <a:srgbClr val="C6CEE2"/>
@@ -7301,7 +7301,7 @@
                     <a:bodyPr/>
                     <a:lstStyle/>
                     <a:p>
-                      <a:pPr algn="ctr" indent="0" marL="0">
+                      <a:pPr eaLnBrk="0" latinLnBrk="0" algn="ctr" indent="0" marL="0">
                         <a:buNone/>
                       </a:pPr>
                       <a:r>
@@ -7322,7 +7322,7 @@
                       </a:endParaRPr>
                     </a:p>
                   </a:txBody>
-                  <a:tcPr marL="91440" marR="91440" marT="45720" marB="45720" anchor="ctr">
+                  <a:tcPr marL="38100" marR="38100" marT="38100" marB="38100" anchor="ctr">
                     <a:lnL w="12700" cap="flat" cmpd="sng" algn="ctr">
                       <a:solidFill>
                         <a:srgbClr val="C6CEE2"/>
@@ -7366,7 +7366,7 @@
                     <a:bodyPr/>
                     <a:lstStyle/>
                     <a:p>
-                      <a:pPr algn="ctr" indent="0" marL="0">
+                      <a:pPr eaLnBrk="0" latinLnBrk="0" algn="ctr" indent="0" marL="0">
                         <a:buNone/>
                       </a:pPr>
                       <a:r>
@@ -7387,7 +7387,7 @@
                       </a:endParaRPr>
                     </a:p>
                   </a:txBody>
-                  <a:tcPr marL="91440" marR="91440" marT="45720" marB="45720" anchor="ctr">
+                  <a:tcPr marL="38100" marR="38100" marT="38100" marB="38100" anchor="ctr">
                     <a:lnL w="12700" cap="flat" cmpd="sng" algn="ctr">
                       <a:solidFill>
                         <a:srgbClr val="C6CEE2"/>
@@ -7431,7 +7431,7 @@
                     <a:bodyPr/>
                     <a:lstStyle/>
                     <a:p>
-                      <a:pPr algn="ctr" indent="0" marL="0">
+                      <a:pPr eaLnBrk="0" latinLnBrk="0" algn="ctr" indent="0" marL="0">
                         <a:buNone/>
                       </a:pPr>
                       <a:r>
@@ -7452,7 +7452,7 @@
                       </a:endParaRPr>
                     </a:p>
                   </a:txBody>
-                  <a:tcPr marL="91440" marR="91440" marT="45720" marB="45720" anchor="ctr">
+                  <a:tcPr marL="38100" marR="38100" marT="38100" marB="38100" anchor="ctr">
                     <a:lnL w="12700" cap="flat" cmpd="sng" algn="ctr">
                       <a:solidFill>
                         <a:srgbClr val="C6CEE2"/>
@@ -7496,7 +7496,7 @@
                     <a:bodyPr/>
                     <a:lstStyle/>
                     <a:p>
-                      <a:pPr algn="ctr" indent="0" marL="0">
+                      <a:pPr eaLnBrk="0" latinLnBrk="0" algn="ctr" indent="0" marL="0">
                         <a:buNone/>
                       </a:pPr>
                       <a:r>
@@ -7517,7 +7517,7 @@
                       </a:endParaRPr>
                     </a:p>
                   </a:txBody>
-                  <a:tcPr marL="91440" marR="91440" marT="45720" marB="45720" anchor="ctr">
+                  <a:tcPr marL="38100" marR="38100" marT="38100" marB="38100" anchor="ctr">
                     <a:lnL w="12700" cap="flat" cmpd="sng" algn="ctr">
                       <a:solidFill>
                         <a:srgbClr val="C6CEE2"/>
@@ -7561,7 +7561,7 @@
                     <a:bodyPr/>
                     <a:lstStyle/>
                     <a:p>
-                      <a:pPr algn="ctr" indent="0" marL="0">
+                      <a:pPr eaLnBrk="0" latinLnBrk="0" algn="ctr" indent="0" marL="0">
                         <a:buNone/>
                       </a:pPr>
                       <a:r>
@@ -7582,7 +7582,7 @@
                       </a:endParaRPr>
                     </a:p>
                   </a:txBody>
-                  <a:tcPr marL="91440" marR="91440" marT="45720" marB="45720" anchor="ctr">
+                  <a:tcPr marL="38100" marR="38100" marT="38100" marB="38100" anchor="ctr">
                     <a:lnL w="12700" cap="flat" cmpd="sng" algn="ctr">
                       <a:solidFill>
                         <a:srgbClr val="C6CEE2"/>
@@ -7629,7 +7629,7 @@
                     <a:bodyPr/>
                     <a:lstStyle/>
                     <a:p>
-                      <a:pPr algn="ctr" indent="0" marL="0">
+                      <a:pPr eaLnBrk="0" latinLnBrk="0" algn="ctr" indent="0" marL="0">
                         <a:buNone/>
                       </a:pPr>
                       <a:r>
@@ -7650,7 +7650,7 @@
                       </a:endParaRPr>
                     </a:p>
                   </a:txBody>
-                  <a:tcPr marL="91440" marR="91440" marT="45720" marB="45720" anchor="ctr">
+                  <a:tcPr marL="38100" marR="38100" marT="38100" marB="38100" anchor="ctr">
                     <a:lnL w="12700" cap="flat" cmpd="sng" algn="ctr">
                       <a:solidFill>
                         <a:srgbClr val="C6CEE2"/>
@@ -7697,7 +7697,7 @@
                     <a:bodyPr/>
                     <a:lstStyle/>
                     <a:p>
-                      <a:pPr algn="l" indent="0" marL="0">
+                      <a:pPr eaLnBrk="0" latinLnBrk="0" algn="l" indent="0" marL="0">
                         <a:buNone/>
                       </a:pPr>
                       <a:r>
@@ -7718,7 +7718,7 @@
                       </a:endParaRPr>
                     </a:p>
                     <a:p>
-                      <a:pPr algn="l" indent="0" marL="0">
+                      <a:pPr eaLnBrk="0" latinLnBrk="0" algn="l" indent="0" marL="0">
                         <a:buNone/>
                       </a:pPr>
                       <a:r>
@@ -7739,7 +7739,7 @@
                       </a:endParaRPr>
                     </a:p>
                   </a:txBody>
-                  <a:tcPr marL="91440" marR="91440" marT="45720" marB="45720" anchor="ctr">
+                  <a:tcPr marL="38100" marR="38100" marT="38100" marB="38100" anchor="ctr">
                     <a:lnL w="12700" cap="flat" cmpd="sng" algn="ctr">
                       <a:solidFill>
                         <a:srgbClr val="C6CEE2"/>
@@ -7779,7 +7779,7 @@
                   </a:tcPr>
                 </a:tc>
               </a:tr>
-              <a:tr h="658368">
+              <a:tr h="676656">
                 <a:tc vMerge="1">
                   <a:tcPr/>
                 </a:tc>
@@ -7788,7 +7788,7 @@
                     <a:bodyPr/>
                     <a:lstStyle/>
                     <a:p>
-                      <a:pPr algn="ctr" indent="0" marL="0">
+                      <a:pPr eaLnBrk="0" latinLnBrk="0" algn="ctr" indent="0" marL="0">
                         <a:buNone/>
                       </a:pPr>
                       <a:r>
@@ -7809,7 +7809,7 @@
                       </a:endParaRPr>
                     </a:p>
                   </a:txBody>
-                  <a:tcPr marL="91440" marR="91440" marT="45720" marB="45720" anchor="ctr">
+                  <a:tcPr marL="38100" marR="38100" marT="38100" marB="38100" anchor="ctr">
                     <a:lnL w="12700" cap="flat" cmpd="sng" algn="ctr">
                       <a:solidFill>
                         <a:srgbClr val="C6CEE2"/>
@@ -7856,7 +7856,7 @@
                     <a:bodyPr/>
                     <a:lstStyle/>
                     <a:p>
-                      <a:pPr algn="ctr" indent="0" marL="0">
+                      <a:pPr eaLnBrk="0" latinLnBrk="0" algn="ctr" indent="0" marL="0">
                         <a:buNone/>
                       </a:pPr>
                       <a:endParaRPr lang="en-US" sz="1200" dirty="0">
@@ -7866,7 +7866,7 @@
                       </a:endParaRPr>
                     </a:p>
                   </a:txBody>
-                  <a:tcPr marL="91440" marR="91440" marT="45720" marB="45720" anchor="ctr">
+                  <a:tcPr marL="38100" marR="38100" marT="38100" marB="38100" anchor="ctr">
                     <a:lnL w="12700" cap="flat" cmpd="sng" algn="ctr">
                       <a:solidFill>
                         <a:srgbClr val="C6CEE2"/>
@@ -7910,7 +7910,7 @@
                     <a:bodyPr/>
                     <a:lstStyle/>
                     <a:p>
-                      <a:pPr algn="ctr" indent="0" marL="0">
+                      <a:pPr eaLnBrk="0" latinLnBrk="0" algn="ctr" indent="0" marL="0">
                         <a:buNone/>
                       </a:pPr>
                       <a:r>
@@ -7931,7 +7931,7 @@
                       </a:endParaRPr>
                     </a:p>
                   </a:txBody>
-                  <a:tcPr marL="91440" marR="91440" marT="45720" marB="45720" anchor="ctr">
+                  <a:tcPr marL="38100" marR="38100" marT="38100" marB="38100" anchor="ctr">
                     <a:lnL w="12700" cap="flat" cmpd="sng" algn="ctr">
                       <a:solidFill>
                         <a:srgbClr val="C6CEE2"/>
@@ -7975,7 +7975,7 @@
                     <a:bodyPr/>
                     <a:lstStyle/>
                     <a:p>
-                      <a:pPr algn="ctr" indent="0" marL="0">
+                      <a:pPr eaLnBrk="0" latinLnBrk="0" algn="ctr" indent="0" marL="0">
                         <a:buNone/>
                       </a:pPr>
                       <a:r>
@@ -7996,7 +7996,7 @@
                       </a:endParaRPr>
                     </a:p>
                   </a:txBody>
-                  <a:tcPr marL="91440" marR="91440" marT="45720" marB="45720" anchor="ctr">
+                  <a:tcPr marL="38100" marR="38100" marT="38100" marB="38100" anchor="ctr">
                     <a:lnL w="12700" cap="flat" cmpd="sng" algn="ctr">
                       <a:solidFill>
                         <a:srgbClr val="C6CEE2"/>
@@ -8040,7 +8040,7 @@
                     <a:bodyPr/>
                     <a:lstStyle/>
                     <a:p>
-                      <a:pPr algn="ctr" indent="0" marL="0">
+                      <a:pPr eaLnBrk="0" latinLnBrk="0" algn="ctr" indent="0" marL="0">
                         <a:buNone/>
                       </a:pPr>
                       <a:r>
@@ -8061,7 +8061,7 @@
                       </a:endParaRPr>
                     </a:p>
                   </a:txBody>
-                  <a:tcPr marL="91440" marR="91440" marT="45720" marB="45720" anchor="ctr">
+                  <a:tcPr marL="38100" marR="38100" marT="38100" marB="38100" anchor="ctr">
                     <a:lnL w="12700" cap="flat" cmpd="sng" algn="ctr">
                       <a:solidFill>
                         <a:srgbClr val="C6CEE2"/>
@@ -8105,7 +8105,7 @@
                     <a:bodyPr/>
                     <a:lstStyle/>
                     <a:p>
-                      <a:pPr algn="ctr" indent="0" marL="0">
+                      <a:pPr eaLnBrk="0" latinLnBrk="0" algn="ctr" indent="0" marL="0">
                         <a:buNone/>
                       </a:pPr>
                       <a:r>
@@ -8126,7 +8126,7 @@
                       </a:endParaRPr>
                     </a:p>
                   </a:txBody>
-                  <a:tcPr marL="91440" marR="91440" marT="45720" marB="45720" anchor="ctr">
+                  <a:tcPr marL="38100" marR="38100" marT="38100" marB="38100" anchor="ctr">
                     <a:lnL w="12700" cap="flat" cmpd="sng" algn="ctr">
                       <a:solidFill>
                         <a:srgbClr val="C6CEE2"/>
@@ -8170,7 +8170,7 @@
                     <a:bodyPr/>
                     <a:lstStyle/>
                     <a:p>
-                      <a:pPr algn="ctr" indent="0" marL="0">
+                      <a:pPr eaLnBrk="0" latinLnBrk="0" algn="ctr" indent="0" marL="0">
                         <a:buNone/>
                       </a:pPr>
                       <a:r>
@@ -8191,7 +8191,7 @@
                       </a:endParaRPr>
                     </a:p>
                   </a:txBody>
-                  <a:tcPr marL="91440" marR="91440" marT="45720" marB="45720" anchor="ctr">
+                  <a:tcPr marL="38100" marR="38100" marT="38100" marB="38100" anchor="ctr">
                     <a:lnL w="12700" cap="flat" cmpd="sng" algn="ctr">
                       <a:solidFill>
                         <a:srgbClr val="C6CEE2"/>
@@ -8235,7 +8235,7 @@
                     <a:bodyPr/>
                     <a:lstStyle/>
                     <a:p>
-                      <a:pPr algn="ctr" indent="0" marL="0">
+                      <a:pPr eaLnBrk="0" latinLnBrk="0" algn="ctr" indent="0" marL="0">
                         <a:buNone/>
                       </a:pPr>
                       <a:r>
@@ -8256,7 +8256,7 @@
                       </a:endParaRPr>
                     </a:p>
                   </a:txBody>
-                  <a:tcPr marL="91440" marR="91440" marT="45720" marB="45720" anchor="ctr">
+                  <a:tcPr marL="38100" marR="38100" marT="38100" marB="38100" anchor="ctr">
                     <a:lnL w="12700" cap="flat" cmpd="sng" algn="ctr">
                       <a:solidFill>
                         <a:srgbClr val="C6CEE2"/>
@@ -8300,7 +8300,7 @@
                     <a:bodyPr/>
                     <a:lstStyle/>
                     <a:p>
-                      <a:pPr algn="ctr" indent="0" marL="0">
+                      <a:pPr eaLnBrk="0" latinLnBrk="0" algn="ctr" indent="0" marL="0">
                         <a:buNone/>
                       </a:pPr>
                       <a:r>
@@ -8321,7 +8321,7 @@
                       </a:endParaRPr>
                     </a:p>
                   </a:txBody>
-                  <a:tcPr marL="91440" marR="91440" marT="45720" marB="45720" anchor="ctr">
+                  <a:tcPr marL="38100" marR="38100" marT="38100" marB="38100" anchor="ctr">
                     <a:lnL w="12700" cap="flat" cmpd="sng" algn="ctr">
                       <a:solidFill>
                         <a:srgbClr val="C6CEE2"/>
@@ -8382,7 +8382,7 @@
         </p:nvSpPr>
         <p:spPr>
           <a:xfrm>
-            <a:off x="658368" y="4114800"/>
+            <a:off x="658368" y="4224528"/>
             <a:ext cx="11027664" cy="310896"/>
           </a:xfrm>
           <a:prstGeom prst="rect">
@@ -8395,7 +8395,7 @@
           <a:bodyPr wrap="square" lIns="0" tIns="0" rIns="0" bIns="0" rtlCol="0" anchor="ctr"/>
           <a:lstStyle/>
           <a:p>
-            <a:pPr indent="0" marL="0">
+            <a:pPr eaLnBrk="0" latinLnBrk="0" indent="0" marL="0">
               <a:buNone/>
             </a:pPr>
             <a:r>
@@ -8421,7 +8421,7 @@
         </p:nvSpPr>
         <p:spPr>
           <a:xfrm>
-            <a:off x="658368" y="4846320"/>
+            <a:off x="658368" y="4901184"/>
             <a:ext cx="2011680" cy="1042416"/>
           </a:xfrm>
           <a:prstGeom prst="roundRect">
@@ -8455,7 +8455,7 @@
         </p:nvSpPr>
         <p:spPr>
           <a:xfrm>
-            <a:off x="658368" y="4992624"/>
+            <a:off x="658368" y="5047488"/>
             <a:ext cx="2011680" cy="274320"/>
           </a:xfrm>
           <a:prstGeom prst="rect">
@@ -8468,7 +8468,7 @@
           <a:bodyPr wrap="square" lIns="0" tIns="0" rIns="0" bIns="0" rtlCol="0" anchor="ctr"/>
           <a:lstStyle/>
           <a:p>
-            <a:pPr algn="ctr" indent="0" marL="0">
+            <a:pPr eaLnBrk="0" latinLnBrk="0" algn="ctr" indent="0" marL="0">
               <a:buNone/>
             </a:pPr>
             <a:r>
@@ -8494,7 +8494,7 @@
         </p:nvSpPr>
         <p:spPr>
           <a:xfrm>
-            <a:off x="658368" y="5285232"/>
+            <a:off x="658368" y="5340096"/>
             <a:ext cx="2011680" cy="457200"/>
           </a:xfrm>
           <a:prstGeom prst="rect">
@@ -8507,7 +8507,7 @@
           <a:bodyPr wrap="square" lIns="0" tIns="0" rIns="0" bIns="0" rtlCol="0" anchor="ctr"/>
           <a:lstStyle/>
           <a:p>
-            <a:pPr algn="ctr" indent="0" marL="0">
+            <a:pPr eaLnBrk="0" latinLnBrk="0" algn="ctr" indent="0" marL="0">
               <a:buNone/>
             </a:pPr>
             <a:r>
@@ -8533,7 +8533,7 @@
         </p:nvSpPr>
         <p:spPr>
           <a:xfrm>
-            <a:off x="2852928" y="4846320"/>
+            <a:off x="2852928" y="4901184"/>
             <a:ext cx="2011680" cy="1042416"/>
           </a:xfrm>
           <a:prstGeom prst="roundRect">
@@ -8567,7 +8567,7 @@
         </p:nvSpPr>
         <p:spPr>
           <a:xfrm>
-            <a:off x="2852928" y="4992624"/>
+            <a:off x="2852928" y="5047488"/>
             <a:ext cx="2011680" cy="274320"/>
           </a:xfrm>
           <a:prstGeom prst="rect">
@@ -8580,7 +8580,7 @@
           <a:bodyPr wrap="square" lIns="0" tIns="0" rIns="0" bIns="0" rtlCol="0" anchor="ctr"/>
           <a:lstStyle/>
           <a:p>
-            <a:pPr algn="ctr" indent="0" marL="0">
+            <a:pPr eaLnBrk="0" latinLnBrk="0" algn="ctr" indent="0" marL="0">
               <a:buNone/>
             </a:pPr>
             <a:r>
@@ -8606,7 +8606,7 @@
         </p:nvSpPr>
         <p:spPr>
           <a:xfrm>
-            <a:off x="2852928" y="5285232"/>
+            <a:off x="2852928" y="5340096"/>
             <a:ext cx="2011680" cy="457200"/>
           </a:xfrm>
           <a:prstGeom prst="rect">
@@ -8619,7 +8619,7 @@
           <a:bodyPr wrap="square" lIns="0" tIns="0" rIns="0" bIns="0" rtlCol="0" anchor="ctr"/>
           <a:lstStyle/>
           <a:p>
-            <a:pPr algn="ctr" indent="0" marL="0">
+            <a:pPr eaLnBrk="0" latinLnBrk="0" algn="ctr" indent="0" marL="0">
               <a:buNone/>
             </a:pPr>
             <a:r>
@@ -8645,7 +8645,7 @@
         </p:nvSpPr>
         <p:spPr>
           <a:xfrm>
-            <a:off x="5047488" y="4846320"/>
+            <a:off x="5047488" y="4901184"/>
             <a:ext cx="2011680" cy="1042416"/>
           </a:xfrm>
           <a:prstGeom prst="roundRect">
@@ -8679,7 +8679,7 @@
         </p:nvSpPr>
         <p:spPr>
           <a:xfrm>
-            <a:off x="5047488" y="4992624"/>
+            <a:off x="5047488" y="5047488"/>
             <a:ext cx="2011680" cy="274320"/>
           </a:xfrm>
           <a:prstGeom prst="rect">
@@ -8692,7 +8692,7 @@
           <a:bodyPr wrap="square" lIns="0" tIns="0" rIns="0" bIns="0" rtlCol="0" anchor="ctr"/>
           <a:lstStyle/>
           <a:p>
-            <a:pPr algn="ctr" indent="0" marL="0">
+            <a:pPr eaLnBrk="0" latinLnBrk="0" algn="ctr" indent="0" marL="0">
               <a:buNone/>
             </a:pPr>
             <a:r>
@@ -8718,7 +8718,7 @@
         </p:nvSpPr>
         <p:spPr>
           <a:xfrm>
-            <a:off x="5047488" y="5285232"/>
+            <a:off x="5047488" y="5340096"/>
             <a:ext cx="2011680" cy="457200"/>
           </a:xfrm>
           <a:prstGeom prst="rect">
@@ -8731,7 +8731,7 @@
           <a:bodyPr wrap="square" lIns="0" tIns="0" rIns="0" bIns="0" rtlCol="0" anchor="ctr"/>
           <a:lstStyle/>
           <a:p>
-            <a:pPr algn="ctr" indent="0" marL="0">
+            <a:pPr eaLnBrk="0" latinLnBrk="0" algn="ctr" indent="0" marL="0">
               <a:buNone/>
             </a:pPr>
             <a:r>
@@ -8757,7 +8757,7 @@
         </p:nvSpPr>
         <p:spPr>
           <a:xfrm>
-            <a:off x="7242048" y="4846320"/>
+            <a:off x="7242048" y="4901184"/>
             <a:ext cx="2011680" cy="1042416"/>
           </a:xfrm>
           <a:prstGeom prst="roundRect">
@@ -8791,7 +8791,7 @@
         </p:nvSpPr>
         <p:spPr>
           <a:xfrm>
-            <a:off x="7242048" y="4992624"/>
+            <a:off x="7242048" y="5047488"/>
             <a:ext cx="2011680" cy="274320"/>
           </a:xfrm>
           <a:prstGeom prst="rect">
@@ -8804,7 +8804,7 @@
           <a:bodyPr wrap="square" lIns="0" tIns="0" rIns="0" bIns="0" rtlCol="0" anchor="ctr"/>
           <a:lstStyle/>
           <a:p>
-            <a:pPr algn="ctr" indent="0" marL="0">
+            <a:pPr eaLnBrk="0" latinLnBrk="0" algn="ctr" indent="0" marL="0">
               <a:buNone/>
             </a:pPr>
             <a:r>
@@ -8830,7 +8830,7 @@
         </p:nvSpPr>
         <p:spPr>
           <a:xfrm>
-            <a:off x="7242048" y="5285232"/>
+            <a:off x="7242048" y="5340096"/>
             <a:ext cx="2011680" cy="457200"/>
           </a:xfrm>
           <a:prstGeom prst="rect">
@@ -8843,7 +8843,7 @@
           <a:bodyPr wrap="square" lIns="0" tIns="0" rIns="0" bIns="0" rtlCol="0" anchor="ctr"/>
           <a:lstStyle/>
           <a:p>
-            <a:pPr algn="ctr" indent="0" marL="0">
+            <a:pPr eaLnBrk="0" latinLnBrk="0" algn="ctr" indent="0" marL="0">
               <a:buNone/>
             </a:pPr>
             <a:r>
@@ -8869,7 +8869,7 @@
         </p:nvSpPr>
         <p:spPr>
           <a:xfrm>
-            <a:off x="9436608" y="4846320"/>
+            <a:off x="9436608" y="4901184"/>
             <a:ext cx="2011680" cy="1042416"/>
           </a:xfrm>
           <a:prstGeom prst="roundRect">
@@ -8903,7 +8903,7 @@
         </p:nvSpPr>
         <p:spPr>
           <a:xfrm>
-            <a:off x="9436608" y="4992624"/>
+            <a:off x="9436608" y="5047488"/>
             <a:ext cx="2011680" cy="274320"/>
           </a:xfrm>
           <a:prstGeom prst="rect">
@@ -8916,7 +8916,7 @@
           <a:bodyPr wrap="square" lIns="0" tIns="0" rIns="0" bIns="0" rtlCol="0" anchor="ctr"/>
           <a:lstStyle/>
           <a:p>
-            <a:pPr algn="ctr" indent="0" marL="0">
+            <a:pPr eaLnBrk="0" latinLnBrk="0" algn="ctr" indent="0" marL="0">
               <a:buNone/>
             </a:pPr>
             <a:r>
@@ -8942,7 +8942,7 @@
         </p:nvSpPr>
         <p:spPr>
           <a:xfrm>
-            <a:off x="9436608" y="5285232"/>
+            <a:off x="9436608" y="5340096"/>
             <a:ext cx="2011680" cy="457200"/>
           </a:xfrm>
           <a:prstGeom prst="rect">
@@ -8955,7 +8955,7 @@
           <a:bodyPr wrap="square" lIns="0" tIns="0" rIns="0" bIns="0" rtlCol="0" anchor="ctr"/>
           <a:lstStyle/>
           <a:p>
-            <a:pPr algn="ctr" indent="0" marL="0">
+            <a:pPr eaLnBrk="0" latinLnBrk="0" algn="ctr" indent="0" marL="0">
               <a:buNone/>
             </a:pPr>
             <a:r>
@@ -9050,7 +9050,7 @@
           <a:bodyPr wrap="square" lIns="0" tIns="0" rIns="0" bIns="0" rtlCol="0" anchor="ctr"/>
           <a:lstStyle/>
           <a:p>
-            <a:pPr algn="ctr" indent="0" marL="0">
+            <a:pPr eaLnBrk="0" latinLnBrk="0" algn="ctr" indent="0" marL="0">
               <a:buNone/>
             </a:pPr>
             <a:r>
@@ -9089,7 +9089,7 @@
           <a:bodyPr wrap="square" lIns="0" tIns="0" rIns="0" bIns="0" rtlCol="0" anchor="ctr"/>
           <a:lstStyle/>
           <a:p>
-            <a:pPr indent="0" marL="0">
+            <a:pPr eaLnBrk="0" latinLnBrk="0" indent="0" marL="0">
               <a:buNone/>
             </a:pPr>
             <a:r>
@@ -9128,7 +9128,7 @@
           <a:bodyPr wrap="square" lIns="0" tIns="0" rIns="0" bIns="0" rtlCol="0" anchor="ctr"/>
           <a:lstStyle/>
           <a:p>
-            <a:pPr indent="0" marL="0">
+            <a:pPr eaLnBrk="0" latinLnBrk="0" indent="0" marL="0">
               <a:buNone/>
             </a:pPr>
             <a:r>
@@ -9221,7 +9221,7 @@
           <a:bodyPr wrap="square" lIns="0" tIns="0" rIns="0" bIns="0" rtlCol="0" anchor="ctr"/>
           <a:lstStyle/>
           <a:p>
-            <a:pPr algn="ctr" indent="0" marL="0">
+            <a:pPr eaLnBrk="0" latinLnBrk="0" algn="ctr" indent="0" marL="0">
               <a:buNone/>
             </a:pPr>
             <a:r>
@@ -9260,7 +9260,7 @@
           <a:bodyPr wrap="square" lIns="0" tIns="0" rIns="0" bIns="0" rtlCol="0" anchor="ctr"/>
           <a:lstStyle/>
           <a:p>
-            <a:pPr algn="ctr" indent="0" marL="0">
+            <a:pPr eaLnBrk="0" latinLnBrk="0" algn="ctr" indent="0" marL="0">
               <a:lnSpc>
                 <a:spcPts val="2000"/>
               </a:lnSpc>
@@ -9280,7 +9280,7 @@
             <a:endParaRPr lang="en-US" sz="1300" dirty="0"/>
           </a:p>
           <a:p>
-            <a:pPr algn="ctr" indent="0" marL="0">
+            <a:pPr eaLnBrk="0" latinLnBrk="0" algn="ctr" indent="0" marL="0">
               <a:lnSpc>
                 <a:spcPts val="2000"/>
               </a:lnSpc>
@@ -9322,7 +9322,7 @@
           <a:bodyPr wrap="square" lIns="0" tIns="0" rIns="0" bIns="0" rtlCol="0" anchor="ctr"/>
           <a:lstStyle/>
           <a:p>
-            <a:pPr algn="ctr" indent="0" marL="0">
+            <a:pPr eaLnBrk="0" latinLnBrk="0" algn="ctr" indent="0" marL="0">
               <a:buNone/>
             </a:pPr>
             <a:r>
@@ -9435,7 +9435,7 @@
           <a:bodyPr wrap="square" lIns="0" tIns="0" rIns="0" bIns="0" rtlCol="0" anchor="ctr"/>
           <a:lstStyle/>
           <a:p>
-            <a:pPr algn="ctr" indent="0" marL="0">
+            <a:pPr eaLnBrk="0" latinLnBrk="0" algn="ctr" indent="0" marL="0">
               <a:buNone/>
             </a:pPr>
             <a:r>
@@ -9474,7 +9474,7 @@
           <a:bodyPr wrap="square" lIns="0" tIns="0" rIns="0" bIns="0" rtlCol="0" anchor="ctr"/>
           <a:lstStyle/>
           <a:p>
-            <a:pPr algn="ctr" indent="0" marL="0">
+            <a:pPr eaLnBrk="0" latinLnBrk="0" algn="ctr" indent="0" marL="0">
               <a:lnSpc>
                 <a:spcPts val="2000"/>
               </a:lnSpc>
@@ -9494,7 +9494,7 @@
             <a:endParaRPr lang="en-US" sz="1300" dirty="0"/>
           </a:p>
           <a:p>
-            <a:pPr algn="ctr" indent="0" marL="0">
+            <a:pPr eaLnBrk="0" latinLnBrk="0" algn="ctr" indent="0" marL="0">
               <a:lnSpc>
                 <a:spcPts val="2000"/>
               </a:lnSpc>
@@ -9536,7 +9536,7 @@
           <a:bodyPr wrap="square" lIns="0" tIns="0" rIns="0" bIns="0" rtlCol="0" anchor="ctr"/>
           <a:lstStyle/>
           <a:p>
-            <a:pPr algn="ctr" indent="0" marL="0">
+            <a:pPr eaLnBrk="0" latinLnBrk="0" algn="ctr" indent="0" marL="0">
               <a:buNone/>
             </a:pPr>
             <a:r>
@@ -9649,7 +9649,7 @@
           <a:bodyPr wrap="square" lIns="0" tIns="0" rIns="0" bIns="0" rtlCol="0" anchor="ctr"/>
           <a:lstStyle/>
           <a:p>
-            <a:pPr algn="ctr" indent="0" marL="0">
+            <a:pPr eaLnBrk="0" latinLnBrk="0" algn="ctr" indent="0" marL="0">
               <a:buNone/>
             </a:pPr>
             <a:r>
@@ -9688,7 +9688,7 @@
           <a:bodyPr wrap="square" lIns="0" tIns="0" rIns="0" bIns="0" rtlCol="0" anchor="ctr"/>
           <a:lstStyle/>
           <a:p>
-            <a:pPr algn="ctr" indent="0" marL="0">
+            <a:pPr eaLnBrk="0" latinLnBrk="0" algn="ctr" indent="0" marL="0">
               <a:lnSpc>
                 <a:spcPts val="2000"/>
               </a:lnSpc>
@@ -9708,7 +9708,7 @@
             <a:endParaRPr lang="en-US" sz="1300" dirty="0"/>
           </a:p>
           <a:p>
-            <a:pPr algn="ctr" indent="0" marL="0">
+            <a:pPr eaLnBrk="0" latinLnBrk="0" algn="ctr" indent="0" marL="0">
               <a:lnSpc>
                 <a:spcPts val="2000"/>
               </a:lnSpc>
@@ -9728,7 +9728,7 @@
             <a:endParaRPr lang="en-US" sz="1300" dirty="0"/>
           </a:p>
           <a:p>
-            <a:pPr algn="ctr" indent="0" marL="0">
+            <a:pPr eaLnBrk="0" latinLnBrk="0" algn="ctr" indent="0" marL="0">
               <a:lnSpc>
                 <a:spcPts val="2000"/>
               </a:lnSpc>
@@ -9770,7 +9770,7 @@
           <a:bodyPr wrap="square" lIns="0" tIns="0" rIns="0" bIns="0" rtlCol="0" anchor="ctr"/>
           <a:lstStyle/>
           <a:p>
-            <a:pPr algn="ctr" indent="0" marL="0">
+            <a:pPr eaLnBrk="0" latinLnBrk="0" algn="ctr" indent="0" marL="0">
               <a:buNone/>
             </a:pPr>
             <a:r>
@@ -9883,7 +9883,7 @@
           <a:bodyPr wrap="square" lIns="0" tIns="0" rIns="0" bIns="0" rtlCol="0" anchor="ctr"/>
           <a:lstStyle/>
           <a:p>
-            <a:pPr algn="ctr" indent="0" marL="0">
+            <a:pPr eaLnBrk="0" latinLnBrk="0" algn="ctr" indent="0" marL="0">
               <a:buNone/>
             </a:pPr>
             <a:r>
@@ -9922,7 +9922,7 @@
           <a:bodyPr wrap="square" lIns="0" tIns="0" rIns="0" bIns="0" rtlCol="0" anchor="ctr"/>
           <a:lstStyle/>
           <a:p>
-            <a:pPr algn="ctr" indent="0" marL="0">
+            <a:pPr eaLnBrk="0" latinLnBrk="0" algn="ctr" indent="0" marL="0">
               <a:lnSpc>
                 <a:spcPts val="2000"/>
               </a:lnSpc>
@@ -9942,7 +9942,7 @@
             <a:endParaRPr lang="en-US" sz="1300" dirty="0"/>
           </a:p>
           <a:p>
-            <a:pPr algn="ctr" indent="0" marL="0">
+            <a:pPr eaLnBrk="0" latinLnBrk="0" algn="ctr" indent="0" marL="0">
               <a:lnSpc>
                 <a:spcPts val="2000"/>
               </a:lnSpc>
@@ -9984,7 +9984,7 @@
           <a:bodyPr wrap="square" lIns="0" tIns="0" rIns="0" bIns="0" rtlCol="0" anchor="ctr"/>
           <a:lstStyle/>
           <a:p>
-            <a:pPr algn="ctr" indent="0" marL="0">
+            <a:pPr eaLnBrk="0" latinLnBrk="0" algn="ctr" indent="0" marL="0">
               <a:buNone/>
             </a:pPr>
             <a:r>
@@ -10097,7 +10097,7 @@
           <a:bodyPr wrap="square" lIns="0" tIns="0" rIns="0" bIns="0" rtlCol="0" anchor="ctr"/>
           <a:lstStyle/>
           <a:p>
-            <a:pPr algn="ctr" indent="0" marL="0">
+            <a:pPr eaLnBrk="0" latinLnBrk="0" algn="ctr" indent="0" marL="0">
               <a:buNone/>
             </a:pPr>
             <a:r>
@@ -10136,7 +10136,7 @@
           <a:bodyPr wrap="square" lIns="0" tIns="0" rIns="0" bIns="0" rtlCol="0" anchor="ctr"/>
           <a:lstStyle/>
           <a:p>
-            <a:pPr algn="ctr" indent="0" marL="0">
+            <a:pPr eaLnBrk="0" latinLnBrk="0" algn="ctr" indent="0" marL="0">
               <a:lnSpc>
                 <a:spcPts val="2000"/>
               </a:lnSpc>
@@ -10178,7 +10178,7 @@
           <a:bodyPr wrap="square" lIns="0" tIns="0" rIns="0" bIns="0" rtlCol="0" anchor="ctr"/>
           <a:lstStyle/>
           <a:p>
-            <a:pPr algn="ctr" indent="0" marL="0">
+            <a:pPr eaLnBrk="0" latinLnBrk="0" algn="ctr" indent="0" marL="0">
               <a:buNone/>
             </a:pPr>
             <a:r>
@@ -10251,7 +10251,7 @@
           <a:bodyPr wrap="square" lIns="0" tIns="0" rIns="0" bIns="0" rtlCol="0" anchor="ctr"/>
           <a:lstStyle/>
           <a:p>
-            <a:pPr algn="ctr" indent="0" marL="0">
+            <a:pPr eaLnBrk="0" latinLnBrk="0" algn="ctr" indent="0" marL="0">
               <a:buNone/>
             </a:pPr>
             <a:r>
@@ -10346,7 +10346,7 @@
           <a:bodyPr wrap="square" lIns="0" tIns="0" rIns="0" bIns="0" rtlCol="0" anchor="ctr"/>
           <a:lstStyle/>
           <a:p>
-            <a:pPr algn="ctr" indent="0" marL="0">
+            <a:pPr eaLnBrk="0" latinLnBrk="0" algn="ctr" indent="0" marL="0">
               <a:buNone/>
             </a:pPr>
             <a:r>
@@ -10385,7 +10385,7 @@
           <a:bodyPr wrap="square" lIns="0" tIns="0" rIns="0" bIns="0" rtlCol="0" anchor="ctr"/>
           <a:lstStyle/>
           <a:p>
-            <a:pPr indent="0" marL="0">
+            <a:pPr eaLnBrk="0" latinLnBrk="0" indent="0" marL="0">
               <a:buNone/>
             </a:pPr>
             <a:r>
@@ -10424,7 +10424,7 @@
           <a:bodyPr wrap="square" lIns="0" tIns="0" rIns="0" bIns="0" rtlCol="0" anchor="ctr"/>
           <a:lstStyle/>
           <a:p>
-            <a:pPr indent="0" marL="0">
+            <a:pPr eaLnBrk="0" latinLnBrk="0" indent="0" marL="0">
               <a:buNone/>
             </a:pPr>
             <a:r>
@@ -10517,7 +10517,7 @@
           <a:bodyPr wrap="square" lIns="0" tIns="0" rIns="0" bIns="0" rtlCol="0" anchor="ctr"/>
           <a:lstStyle/>
           <a:p>
-            <a:pPr algn="ctr" indent="0" marL="0">
+            <a:pPr eaLnBrk="0" latinLnBrk="0" algn="ctr" indent="0" marL="0">
               <a:buNone/>
             </a:pPr>
             <a:r>
@@ -10556,7 +10556,7 @@
           <a:bodyPr wrap="square" lIns="0" tIns="0" rIns="0" bIns="0" rtlCol="0" anchor="ctr"/>
           <a:lstStyle/>
           <a:p>
-            <a:pPr algn="ctr" indent="0" marL="0">
+            <a:pPr eaLnBrk="0" latinLnBrk="0" algn="ctr" indent="0" marL="0">
               <a:lnSpc>
                 <a:spcPts val="2100"/>
               </a:lnSpc>
@@ -10672,7 +10672,7 @@
           <a:bodyPr wrap="square" lIns="0" tIns="0" rIns="0" bIns="0" rtlCol="0" anchor="ctr"/>
           <a:lstStyle/>
           <a:p>
-            <a:pPr algn="ctr" indent="0" marL="0">
+            <a:pPr eaLnBrk="0" latinLnBrk="0" algn="ctr" indent="0" marL="0">
               <a:buNone/>
             </a:pPr>
             <a:r>
@@ -10711,7 +10711,7 @@
           <a:bodyPr wrap="square" lIns="0" tIns="0" rIns="0" bIns="0" rtlCol="0" anchor="ctr"/>
           <a:lstStyle/>
           <a:p>
-            <a:pPr algn="ctr" indent="0" marL="0">
+            <a:pPr eaLnBrk="0" latinLnBrk="0" algn="ctr" indent="0" marL="0">
               <a:lnSpc>
                 <a:spcPts val="2100"/>
               </a:lnSpc>
@@ -10753,7 +10753,7 @@
           <a:bodyPr wrap="square" lIns="0" tIns="0" rIns="0" bIns="0" rtlCol="0" anchor="ctr"/>
           <a:lstStyle/>
           <a:p>
-            <a:pPr algn="ctr" indent="0" marL="0">
+            <a:pPr eaLnBrk="0" latinLnBrk="0" algn="ctr" indent="0" marL="0">
               <a:lnSpc>
                 <a:spcPts val="1800"/>
               </a:lnSpc>
@@ -10869,7 +10869,7 @@
           <a:bodyPr wrap="square" lIns="0" tIns="0" rIns="0" bIns="0" rtlCol="0" anchor="ctr"/>
           <a:lstStyle/>
           <a:p>
-            <a:pPr algn="ctr" indent="0" marL="0">
+            <a:pPr eaLnBrk="0" latinLnBrk="0" algn="ctr" indent="0" marL="0">
               <a:buNone/>
             </a:pPr>
             <a:r>
@@ -10908,7 +10908,7 @@
           <a:bodyPr wrap="square" lIns="0" tIns="0" rIns="0" bIns="0" rtlCol="0" anchor="ctr"/>
           <a:lstStyle/>
           <a:p>
-            <a:pPr algn="ctr" indent="0" marL="0">
+            <a:pPr eaLnBrk="0" latinLnBrk="0" algn="ctr" indent="0" marL="0">
               <a:lnSpc>
                 <a:spcPts val="2100"/>
               </a:lnSpc>
@@ -10928,7 +10928,7 @@
             <a:endParaRPr lang="en-US" sz="1500" dirty="0"/>
           </a:p>
           <a:p>
-            <a:pPr algn="ctr" indent="0" marL="0">
+            <a:pPr eaLnBrk="0" latinLnBrk="0" algn="ctr" indent="0" marL="0">
               <a:lnSpc>
                 <a:spcPts val="2100"/>
               </a:lnSpc>
@@ -10970,7 +10970,7 @@
           <a:bodyPr wrap="square" lIns="0" tIns="0" rIns="0" bIns="0" rtlCol="0" anchor="ctr"/>
           <a:lstStyle/>
           <a:p>
-            <a:pPr algn="ctr" indent="0" marL="0">
+            <a:pPr eaLnBrk="0" latinLnBrk="0" algn="ctr" indent="0" marL="0">
               <a:lnSpc>
                 <a:spcPts val="1800"/>
               </a:lnSpc>
@@ -10990,7 +10990,7 @@
             <a:endParaRPr lang="en-US" sz="1250" dirty="0"/>
           </a:p>
           <a:p>
-            <a:pPr algn="ctr" indent="0" marL="0">
+            <a:pPr eaLnBrk="0" latinLnBrk="0" algn="ctr" indent="0" marL="0">
               <a:lnSpc>
                 <a:spcPts val="1800"/>
               </a:lnSpc>
@@ -11106,7 +11106,7 @@
           <a:bodyPr wrap="square" lIns="0" tIns="0" rIns="0" bIns="0" rtlCol="0" anchor="ctr"/>
           <a:lstStyle/>
           <a:p>
-            <a:pPr algn="ctr" indent="0" marL="0">
+            <a:pPr eaLnBrk="0" latinLnBrk="0" algn="ctr" indent="0" marL="0">
               <a:buNone/>
             </a:pPr>
             <a:r>
@@ -11145,7 +11145,7 @@
           <a:bodyPr wrap="square" lIns="0" tIns="0" rIns="0" bIns="0" rtlCol="0" anchor="ctr"/>
           <a:lstStyle/>
           <a:p>
-            <a:pPr algn="ctr" indent="0" marL="0">
+            <a:pPr eaLnBrk="0" latinLnBrk="0" algn="ctr" indent="0" marL="0">
               <a:lnSpc>
                 <a:spcPts val="2100"/>
               </a:lnSpc>
@@ -11165,7 +11165,7 @@
             <a:endParaRPr lang="en-US" sz="1500" dirty="0"/>
           </a:p>
           <a:p>
-            <a:pPr algn="ctr" indent="0" marL="0">
+            <a:pPr eaLnBrk="0" latinLnBrk="0" algn="ctr" indent="0" marL="0">
               <a:lnSpc>
                 <a:spcPts val="2100"/>
               </a:lnSpc>
@@ -11207,7 +11207,7 @@
           <a:bodyPr wrap="square" lIns="0" tIns="0" rIns="0" bIns="0" rtlCol="0" anchor="t"/>
           <a:lstStyle/>
           <a:p>
-            <a:pPr marL="342900" indent="-342900">
+            <a:pPr eaLnBrk="0" latinLnBrk="0" marL="342900" indent="-342900">
               <a:spcAft>
                 <a:spcPts val="600"/>
               </a:spcAft>
@@ -11228,7 +11228,7 @@
             <a:endParaRPr lang="en-US" sz="1150" dirty="0"/>
           </a:p>
           <a:p>
-            <a:pPr marL="342900" indent="-342900">
+            <a:pPr eaLnBrk="0" latinLnBrk="0" marL="342900" indent="-342900">
               <a:spcAft>
                 <a:spcPts val="600"/>
               </a:spcAft>
@@ -11249,7 +11249,7 @@
             <a:endParaRPr lang="en-US" sz="1150" dirty="0"/>
           </a:p>
           <a:p>
-            <a:pPr marL="342900" indent="-342900">
+            <a:pPr eaLnBrk="0" latinLnBrk="0" marL="342900" indent="-342900">
               <a:spcAft>
                 <a:spcPts val="600"/>
               </a:spcAft>
@@ -11366,7 +11366,7 @@
           <a:bodyPr wrap="square" lIns="0" tIns="0" rIns="0" bIns="0" rtlCol="0" anchor="ctr"/>
           <a:lstStyle/>
           <a:p>
-            <a:pPr algn="ctr" indent="0" marL="0">
+            <a:pPr eaLnBrk="0" latinLnBrk="0" algn="ctr" indent="0" marL="0">
               <a:buNone/>
             </a:pPr>
             <a:r>
@@ -11405,7 +11405,7 @@
           <a:bodyPr wrap="square" lIns="0" tIns="0" rIns="0" bIns="0" rtlCol="0" anchor="ctr"/>
           <a:lstStyle/>
           <a:p>
-            <a:pPr algn="ctr" indent="0" marL="0">
+            <a:pPr eaLnBrk="0" latinLnBrk="0" algn="ctr" indent="0" marL="0">
               <a:lnSpc>
                 <a:spcPts val="2100"/>
               </a:lnSpc>
@@ -11425,7 +11425,7 @@
             <a:endParaRPr lang="en-US" sz="1500" dirty="0"/>
           </a:p>
           <a:p>
-            <a:pPr algn="ctr" indent="0" marL="0">
+            <a:pPr eaLnBrk="0" latinLnBrk="0" algn="ctr" indent="0" marL="0">
               <a:lnSpc>
                 <a:spcPts val="2100"/>
               </a:lnSpc>
@@ -11467,7 +11467,7 @@
           <a:bodyPr wrap="square" lIns="0" tIns="0" rIns="0" bIns="0" rtlCol="0" anchor="ctr"/>
           <a:lstStyle/>
           <a:p>
-            <a:pPr algn="ctr" indent="0" marL="0">
+            <a:pPr eaLnBrk="0" latinLnBrk="0" algn="ctr" indent="0" marL="0">
               <a:lnSpc>
                 <a:spcPts val="1800"/>
               </a:lnSpc>
@@ -11543,7 +11543,7 @@
           <a:bodyPr wrap="square" lIns="0" tIns="0" rIns="0" bIns="0" rtlCol="0" anchor="ctr"/>
           <a:lstStyle/>
           <a:p>
-            <a:pPr indent="0" marL="0">
+            <a:pPr eaLnBrk="0" latinLnBrk="0" indent="0" marL="0">
               <a:buNone/>
             </a:pPr>
             <a:r>
@@ -11582,7 +11582,7 @@
           <a:bodyPr wrap="square" lIns="0" tIns="0" rIns="0" bIns="0" rtlCol="0" anchor="ctr"/>
           <a:lstStyle/>
           <a:p>
-            <a:pPr indent="0" marL="0">
+            <a:pPr eaLnBrk="0" latinLnBrk="0" indent="0" marL="0">
               <a:lnSpc>
                 <a:spcPts val="1700"/>
               </a:lnSpc>
@@ -11658,7 +11658,7 @@
           <a:bodyPr wrap="square" lIns="0" tIns="0" rIns="0" bIns="0" rtlCol="0" anchor="ctr"/>
           <a:lstStyle/>
           <a:p>
-            <a:pPr indent="0" marL="0">
+            <a:pPr eaLnBrk="0" latinLnBrk="0" indent="0" marL="0">
               <a:buNone/>
             </a:pPr>
             <a:r>
@@ -11697,7 +11697,7 @@
           <a:bodyPr wrap="square" lIns="0" tIns="0" rIns="0" bIns="0" rtlCol="0" anchor="ctr"/>
           <a:lstStyle/>
           <a:p>
-            <a:pPr indent="0" marL="0">
+            <a:pPr eaLnBrk="0" latinLnBrk="0" indent="0" marL="0">
               <a:lnSpc>
                 <a:spcPts val="1700"/>
               </a:lnSpc>
@@ -11795,7 +11795,7 @@
           <a:bodyPr wrap="square" lIns="0" tIns="0" rIns="0" bIns="0" rtlCol="0" anchor="ctr"/>
           <a:lstStyle/>
           <a:p>
-            <a:pPr algn="ctr" indent="0" marL="0">
+            <a:pPr eaLnBrk="0" latinLnBrk="0" algn="ctr" indent="0" marL="0">
               <a:buNone/>
             </a:pPr>
             <a:r>
@@ -11834,7 +11834,7 @@
           <a:bodyPr wrap="square" lIns="0" tIns="0" rIns="0" bIns="0" rtlCol="0" anchor="ctr"/>
           <a:lstStyle/>
           <a:p>
-            <a:pPr indent="0" marL="0">
+            <a:pPr eaLnBrk="0" latinLnBrk="0" indent="0" marL="0">
               <a:buNone/>
             </a:pPr>
             <a:r>
@@ -11873,7 +11873,7 @@
           <a:bodyPr wrap="square" lIns="0" tIns="0" rIns="0" bIns="0" rtlCol="0" anchor="ctr"/>
           <a:lstStyle/>
           <a:p>
-            <a:pPr indent="0" marL="0">
+            <a:pPr eaLnBrk="0" latinLnBrk="0" indent="0" marL="0">
               <a:buNone/>
             </a:pPr>
             <a:r>
@@ -11934,7 +11934,7 @@
           <a:bodyPr wrap="square" lIns="0" tIns="0" rIns="0" bIns="0" rtlCol="0" anchor="ctr"/>
           <a:lstStyle/>
           <a:p>
-            <a:pPr algn="ctr" indent="0" marL="0">
+            <a:pPr eaLnBrk="0" latinLnBrk="0" algn="ctr" indent="0" marL="0">
               <a:buNone/>
             </a:pPr>
             <a:r>
@@ -11995,7 +11995,7 @@
           <a:bodyPr wrap="square" lIns="0" tIns="0" rIns="0" bIns="0" rtlCol="0" anchor="ctr"/>
           <a:lstStyle/>
           <a:p>
-            <a:pPr algn="ctr" indent="0" marL="0">
+            <a:pPr eaLnBrk="0" latinLnBrk="0" algn="ctr" indent="0" marL="0">
               <a:buNone/>
             </a:pPr>
             <a:r>
@@ -12056,7 +12056,7 @@
           <a:bodyPr wrap="square" lIns="0" tIns="0" rIns="0" bIns="0" rtlCol="0" anchor="ctr"/>
           <a:lstStyle/>
           <a:p>
-            <a:pPr algn="ctr" indent="0" marL="0">
+            <a:pPr eaLnBrk="0" latinLnBrk="0" algn="ctr" indent="0" marL="0">
               <a:buNone/>
             </a:pPr>
             <a:r>
@@ -12117,7 +12117,7 @@
           <a:bodyPr wrap="square" lIns="0" tIns="0" rIns="0" bIns="0" rtlCol="0" anchor="ctr"/>
           <a:lstStyle/>
           <a:p>
-            <a:pPr algn="ctr" indent="0" marL="0">
+            <a:pPr eaLnBrk="0" latinLnBrk="0" algn="ctr" indent="0" marL="0">
               <a:buNone/>
             </a:pPr>
             <a:r>
@@ -12190,7 +12190,7 @@
           <a:bodyPr wrap="square" lIns="0" tIns="0" rIns="0" bIns="0" rtlCol="0" anchor="ctr"/>
           <a:lstStyle/>
           <a:p>
-            <a:pPr indent="0" marL="0">
+            <a:pPr eaLnBrk="0" latinLnBrk="0" indent="0" marL="0">
               <a:buNone/>
             </a:pPr>
             <a:r>
@@ -12249,7 +12249,7 @@
           <a:bodyPr wrap="square" lIns="0" tIns="0" rIns="0" bIns="0" rtlCol="0" anchor="ctr"/>
           <a:lstStyle/>
           <a:p>
-            <a:pPr indent="0" marL="0">
+            <a:pPr eaLnBrk="0" latinLnBrk="0" indent="0" marL="0">
               <a:lnSpc>
                 <a:spcPts val="2300"/>
               </a:lnSpc>
@@ -12311,7 +12311,7 @@
           <a:bodyPr wrap="square" lIns="0" tIns="0" rIns="0" bIns="0" rtlCol="0" anchor="ctr"/>
           <a:lstStyle/>
           <a:p>
-            <a:pPr indent="0" marL="0">
+            <a:pPr eaLnBrk="0" latinLnBrk="0" indent="0" marL="0">
               <a:lnSpc>
                 <a:spcPts val="2300"/>
               </a:lnSpc>
@@ -12387,7 +12387,7 @@
           <a:bodyPr wrap="square" lIns="0" tIns="0" rIns="0" bIns="0" rtlCol="0" anchor="ctr"/>
           <a:lstStyle/>
           <a:p>
-            <a:pPr indent="0" marL="0">
+            <a:pPr eaLnBrk="0" latinLnBrk="0" indent="0" marL="0">
               <a:buNone/>
             </a:pPr>
             <a:r>
@@ -12426,7 +12426,7 @@
           <a:bodyPr wrap="square" lIns="0" tIns="0" rIns="0" bIns="0" rtlCol="0" anchor="ctr"/>
           <a:lstStyle/>
           <a:p>
-            <a:pPr indent="0" marL="0">
+            <a:pPr eaLnBrk="0" latinLnBrk="0" indent="0" marL="0">
               <a:buNone/>
             </a:pPr>
             <a:r>
@@ -12465,7 +12465,7 @@
           <a:bodyPr wrap="square" lIns="0" tIns="0" rIns="0" bIns="0" rtlCol="0" anchor="ctr"/>
           <a:lstStyle/>
           <a:p>
-            <a:pPr indent="0" marL="0">
+            <a:pPr eaLnBrk="0" latinLnBrk="0" indent="0" marL="0">
               <a:buNone/>
             </a:pPr>
             <a:r>
@@ -12558,7 +12558,7 @@
           <a:bodyPr wrap="square" lIns="0" tIns="0" rIns="0" bIns="0" rtlCol="0" anchor="ctr"/>
           <a:lstStyle/>
           <a:p>
-            <a:pPr algn="ctr" indent="0" marL="0">
+            <a:pPr eaLnBrk="0" latinLnBrk="0" algn="ctr" indent="0" marL="0">
               <a:buNone/>
             </a:pPr>
             <a:r>
@@ -12597,7 +12597,7 @@
           <a:bodyPr wrap="square" lIns="0" tIns="0" rIns="0" bIns="0" rtlCol="0" anchor="ctr"/>
           <a:lstStyle/>
           <a:p>
-            <a:pPr indent="0" marL="0">
+            <a:pPr eaLnBrk="0" latinLnBrk="0" indent="0" marL="0">
               <a:lnSpc>
                 <a:spcPts val="2000"/>
               </a:lnSpc>
@@ -12693,7 +12693,7 @@
           <a:bodyPr wrap="square" lIns="0" tIns="0" rIns="0" bIns="0" rtlCol="0" anchor="ctr"/>
           <a:lstStyle/>
           <a:p>
-            <a:pPr algn="ctr" indent="0" marL="0">
+            <a:pPr eaLnBrk="0" latinLnBrk="0" algn="ctr" indent="0" marL="0">
               <a:buNone/>
             </a:pPr>
             <a:r>
@@ -12732,7 +12732,7 @@
           <a:bodyPr wrap="square" lIns="0" tIns="0" rIns="0" bIns="0" rtlCol="0" anchor="ctr"/>
           <a:lstStyle/>
           <a:p>
-            <a:pPr indent="0" marL="0">
+            <a:pPr eaLnBrk="0" latinLnBrk="0" indent="0" marL="0">
               <a:lnSpc>
                 <a:spcPts val="2000"/>
               </a:lnSpc>
@@ -12828,7 +12828,7 @@
           <a:bodyPr wrap="square" lIns="0" tIns="0" rIns="0" bIns="0" rtlCol="0" anchor="ctr"/>
           <a:lstStyle/>
           <a:p>
-            <a:pPr algn="ctr" indent="0" marL="0">
+            <a:pPr eaLnBrk="0" latinLnBrk="0" algn="ctr" indent="0" marL="0">
               <a:buNone/>
             </a:pPr>
             <a:r>
@@ -12867,7 +12867,7 @@
           <a:bodyPr wrap="square" lIns="0" tIns="0" rIns="0" bIns="0" rtlCol="0" anchor="ctr"/>
           <a:lstStyle/>
           <a:p>
-            <a:pPr indent="0" marL="0">
+            <a:pPr eaLnBrk="0" latinLnBrk="0" indent="0" marL="0">
               <a:lnSpc>
                 <a:spcPts val="2000"/>
               </a:lnSpc>
@@ -12963,7 +12963,7 @@
           <a:bodyPr wrap="square" lIns="0" tIns="0" rIns="0" bIns="0" rtlCol="0" anchor="ctr"/>
           <a:lstStyle/>
           <a:p>
-            <a:pPr algn="ctr" indent="0" marL="0">
+            <a:pPr eaLnBrk="0" latinLnBrk="0" algn="ctr" indent="0" marL="0">
               <a:buNone/>
             </a:pPr>
             <a:r>
@@ -13002,7 +13002,7 @@
           <a:bodyPr wrap="square" lIns="0" tIns="0" rIns="0" bIns="0" rtlCol="0" anchor="ctr"/>
           <a:lstStyle/>
           <a:p>
-            <a:pPr indent="0" marL="0">
+            <a:pPr eaLnBrk="0" latinLnBrk="0" indent="0" marL="0">
               <a:lnSpc>
                 <a:spcPts val="2000"/>
               </a:lnSpc>
@@ -13100,7 +13100,7 @@
           <a:bodyPr wrap="square" lIns="0" tIns="0" rIns="0" bIns="0" rtlCol="0" anchor="ctr"/>
           <a:lstStyle/>
           <a:p>
-            <a:pPr algn="ctr" indent="0" marL="0">
+            <a:pPr eaLnBrk="0" latinLnBrk="0" algn="ctr" indent="0" marL="0">
               <a:buNone/>
             </a:pPr>
             <a:r>
@@ -13139,7 +13139,7 @@
           <a:bodyPr wrap="square" lIns="0" tIns="0" rIns="0" bIns="0" rtlCol="0" anchor="ctr"/>
           <a:lstStyle/>
           <a:p>
-            <a:pPr indent="0" marL="0">
+            <a:pPr eaLnBrk="0" latinLnBrk="0" indent="0" marL="0">
               <a:buNone/>
             </a:pPr>
             <a:r>
@@ -13178,7 +13178,7 @@
           <a:bodyPr wrap="square" lIns="0" tIns="0" rIns="0" bIns="0" rtlCol="0" anchor="ctr"/>
           <a:lstStyle/>
           <a:p>
-            <a:pPr indent="0" marL="0">
+            <a:pPr eaLnBrk="0" latinLnBrk="0" indent="0" marL="0">
               <a:buNone/>
             </a:pPr>
             <a:r>
@@ -13239,7 +13239,7 @@
           <a:bodyPr wrap="square" lIns="0" tIns="0" rIns="0" bIns="0" rtlCol="0" anchor="ctr"/>
           <a:lstStyle/>
           <a:p>
-            <a:pPr algn="ctr" indent="0" marL="0">
+            <a:pPr eaLnBrk="0" latinLnBrk="0" algn="ctr" indent="0" marL="0">
               <a:buNone/>
             </a:pPr>
             <a:r>
@@ -13300,7 +13300,7 @@
           <a:bodyPr wrap="square" lIns="0" tIns="0" rIns="0" bIns="0" rtlCol="0" anchor="ctr"/>
           <a:lstStyle/>
           <a:p>
-            <a:pPr algn="ctr" indent="0" marL="0">
+            <a:pPr eaLnBrk="0" latinLnBrk="0" algn="ctr" indent="0" marL="0">
               <a:buNone/>
             </a:pPr>
             <a:r>
@@ -13361,7 +13361,7 @@
           <a:bodyPr wrap="square" lIns="0" tIns="0" rIns="0" bIns="0" rtlCol="0" anchor="ctr"/>
           <a:lstStyle/>
           <a:p>
-            <a:pPr algn="ctr" indent="0" marL="0">
+            <a:pPr eaLnBrk="0" latinLnBrk="0" algn="ctr" indent="0" marL="0">
               <a:buNone/>
             </a:pPr>
             <a:r>
@@ -13422,7 +13422,7 @@
           <a:bodyPr wrap="square" lIns="0" tIns="0" rIns="0" bIns="0" rtlCol="0" anchor="ctr"/>
           <a:lstStyle/>
           <a:p>
-            <a:pPr algn="ctr" indent="0" marL="0">
+            <a:pPr eaLnBrk="0" latinLnBrk="0" algn="ctr" indent="0" marL="0">
               <a:buNone/>
             </a:pPr>
             <a:r>
@@ -13461,7 +13461,7 @@
           <a:bodyPr wrap="square" lIns="0" tIns="0" rIns="0" bIns="0" rtlCol="0" anchor="ctr"/>
           <a:lstStyle/>
           <a:p>
-            <a:pPr indent="0" marL="0">
+            <a:pPr eaLnBrk="0" latinLnBrk="0" indent="0" marL="0">
               <a:buNone/>
             </a:pPr>
             <a:r>
@@ -13475,7 +13475,7 @@
               </a:rPr>
               <a:t>평가방법  </a:t>
             </a:r>
-            <a:pPr indent="0" marL="0">
+            <a:pPr eaLnBrk="0" latinLnBrk="0" indent="0" marL="0">
               <a:buNone/>
             </a:pPr>
             <a:r>
@@ -13514,7 +13514,7 @@
           <a:bodyPr wrap="square" lIns="0" tIns="0" rIns="0" bIns="0" rtlCol="0" anchor="ctr"/>
           <a:lstStyle/>
           <a:p>
-            <a:pPr indent="0" marL="0">
+            <a:pPr eaLnBrk="0" latinLnBrk="0" indent="0" marL="0">
               <a:buNone/>
             </a:pPr>
             <a:r>
@@ -13528,7 +13528,7 @@
               </a:rPr>
               <a:t>심사위원  </a:t>
             </a:r>
-            <a:pPr indent="0" marL="0">
+            <a:pPr eaLnBrk="0" latinLnBrk="0" indent="0" marL="0">
               <a:buNone/>
             </a:pPr>
             <a:r>
@@ -13579,7 +13579,7 @@
                     <a:bodyPr/>
                     <a:lstStyle/>
                     <a:p>
-                      <a:pPr algn="ctr" indent="0" marL="0">
+                      <a:pPr eaLnBrk="0" latinLnBrk="0" algn="ctr" indent="0" marL="0">
                         <a:buNone/>
                       </a:pPr>
                       <a:r>
@@ -13647,7 +13647,7 @@
                     <a:bodyPr/>
                     <a:lstStyle/>
                     <a:p>
-                      <a:pPr algn="ctr" indent="0" marL="0">
+                      <a:pPr eaLnBrk="0" latinLnBrk="0" algn="ctr" indent="0" marL="0">
                         <a:buNone/>
                       </a:pPr>
                       <a:r>
@@ -13715,7 +13715,7 @@
                     <a:bodyPr/>
                     <a:lstStyle/>
                     <a:p>
-                      <a:pPr algn="ctr" indent="0" marL="0">
+                      <a:pPr eaLnBrk="0" latinLnBrk="0" algn="ctr" indent="0" marL="0">
                         <a:buNone/>
                       </a:pPr>
                       <a:r>
@@ -13785,7 +13785,7 @@
                     <a:bodyPr/>
                     <a:lstStyle/>
                     <a:p>
-                      <a:pPr algn="l" indent="0" marL="0">
+                      <a:pPr eaLnBrk="0" latinLnBrk="0" algn="l" indent="0" marL="0">
                         <a:buNone/>
                       </a:pPr>
                       <a:r>
@@ -13850,7 +13850,7 @@
                     <a:bodyPr/>
                     <a:lstStyle/>
                     <a:p>
-                      <a:pPr algn="ctr" indent="0" marL="0">
+                      <a:pPr eaLnBrk="0" latinLnBrk="0" algn="ctr" indent="0" marL="0">
                         <a:buNone/>
                       </a:pPr>
                       <a:r>
@@ -13915,7 +13915,7 @@
                     <a:bodyPr/>
                     <a:lstStyle/>
                     <a:p>
-                      <a:pPr algn="ctr" indent="0" marL="0">
+                      <a:pPr eaLnBrk="0" latinLnBrk="0" algn="ctr" indent="0" marL="0">
                         <a:buNone/>
                       </a:pPr>
                       <a:r>
@@ -13936,7 +13936,7 @@
                       </a:endParaRPr>
                     </a:p>
                     <a:p>
-                      <a:pPr algn="ctr" indent="0" marL="0">
+                      <a:pPr eaLnBrk="0" latinLnBrk="0" algn="ctr" indent="0" marL="0">
                         <a:buNone/>
                       </a:pPr>
                       <a:r>
@@ -14006,7 +14006,7 @@
                     <a:bodyPr/>
                     <a:lstStyle/>
                     <a:p>
-                      <a:pPr algn="l" indent="0" marL="0">
+                      <a:pPr eaLnBrk="0" latinLnBrk="0" algn="l" indent="0" marL="0">
                         <a:buNone/>
                       </a:pPr>
                       <a:r>
@@ -14071,7 +14071,7 @@
                     <a:bodyPr/>
                     <a:lstStyle/>
                     <a:p>
-                      <a:pPr algn="ctr" indent="0" marL="0">
+                      <a:pPr eaLnBrk="0" latinLnBrk="0" algn="ctr" indent="0" marL="0">
                         <a:buNone/>
                       </a:pPr>
                       <a:r>
@@ -14141,7 +14141,7 @@
                     <a:bodyPr/>
                     <a:lstStyle/>
                     <a:p>
-                      <a:pPr algn="l" indent="0" marL="0">
+                      <a:pPr eaLnBrk="0" latinLnBrk="0" algn="l" indent="0" marL="0">
                         <a:buNone/>
                       </a:pPr>
                       <a:r>
@@ -14206,7 +14206,7 @@
                     <a:bodyPr/>
                     <a:lstStyle/>
                     <a:p>
-                      <a:pPr algn="ctr" indent="0" marL="0">
+                      <a:pPr eaLnBrk="0" latinLnBrk="0" algn="ctr" indent="0" marL="0">
                         <a:buNone/>
                       </a:pPr>
                       <a:r>
@@ -14276,7 +14276,7 @@
                     <a:bodyPr/>
                     <a:lstStyle/>
                     <a:p>
-                      <a:pPr algn="l" indent="0" marL="0">
+                      <a:pPr eaLnBrk="0" latinLnBrk="0" algn="l" indent="0" marL="0">
                         <a:buNone/>
                       </a:pPr>
                       <a:r>
@@ -14341,7 +14341,7 @@
                     <a:bodyPr/>
                     <a:lstStyle/>
                     <a:p>
-                      <a:pPr algn="ctr" indent="0" marL="0">
+                      <a:pPr eaLnBrk="0" latinLnBrk="0" algn="ctr" indent="0" marL="0">
                         <a:buNone/>
                       </a:pPr>
                       <a:r>
@@ -14411,7 +14411,7 @@
                     <a:bodyPr/>
                     <a:lstStyle/>
                     <a:p>
-                      <a:pPr algn="l" indent="0" marL="0">
+                      <a:pPr eaLnBrk="0" latinLnBrk="0" algn="l" indent="0" marL="0">
                         <a:buNone/>
                       </a:pPr>
                       <a:r>
@@ -14479,7 +14479,7 @@
                     <a:bodyPr/>
                     <a:lstStyle/>
                     <a:p>
-                      <a:pPr algn="ctr" indent="0" marL="0">
+                      <a:pPr eaLnBrk="0" latinLnBrk="0" algn="ctr" indent="0" marL="0">
                         <a:buNone/>
                       </a:pPr>
                       <a:r>
@@ -14605,7 +14605,7 @@
           <a:bodyPr wrap="square" lIns="0" tIns="0" rIns="0" bIns="0" rtlCol="0" anchor="ctr"/>
           <a:lstStyle/>
           <a:p>
-            <a:pPr indent="0" marL="0">
+            <a:pPr eaLnBrk="0" latinLnBrk="0" indent="0" marL="0">
               <a:lnSpc>
                 <a:spcPts val="2600"/>
               </a:lnSpc>
@@ -14625,7 +14625,7 @@
             <a:endParaRPr lang="en-US" sz="1800" dirty="0"/>
           </a:p>
           <a:p>
-            <a:pPr indent="0" marL="0">
+            <a:pPr eaLnBrk="0" latinLnBrk="0" indent="0" marL="0">
               <a:lnSpc>
                 <a:spcPts val="2600"/>
               </a:lnSpc>
@@ -14687,7 +14687,7 @@
           <a:bodyPr wrap="square" lIns="0" tIns="0" rIns="0" bIns="0" rtlCol="0" anchor="ctr"/>
           <a:lstStyle/>
           <a:p>
-            <a:pPr indent="0" marL="0">
+            <a:pPr eaLnBrk="0" latinLnBrk="0" indent="0" marL="0">
               <a:lnSpc>
                 <a:spcPts val="2100"/>
               </a:lnSpc>
@@ -14749,7 +14749,7 @@
           <a:bodyPr wrap="square" lIns="0" tIns="0" rIns="0" bIns="0" rtlCol="0" anchor="ctr"/>
           <a:lstStyle/>
           <a:p>
-            <a:pPr indent="0" marL="0">
+            <a:pPr eaLnBrk="0" latinLnBrk="0" indent="0" marL="0">
               <a:lnSpc>
                 <a:spcPts val="2100"/>
               </a:lnSpc>
@@ -14811,7 +14811,7 @@
           <a:bodyPr wrap="square" lIns="0" tIns="0" rIns="0" bIns="0" rtlCol="0" anchor="ctr"/>
           <a:lstStyle/>
           <a:p>
-            <a:pPr indent="0" marL="0">
+            <a:pPr eaLnBrk="0" latinLnBrk="0" indent="0" marL="0">
               <a:lnSpc>
                 <a:spcPts val="2100"/>
               </a:lnSpc>
@@ -14887,7 +14887,7 @@
           <a:bodyPr wrap="square" lIns="0" tIns="0" rIns="0" bIns="0" rtlCol="0" anchor="ctr"/>
           <a:lstStyle/>
           <a:p>
-            <a:pPr algn="ctr" indent="0" marL="0">
+            <a:pPr eaLnBrk="0" latinLnBrk="0" algn="ctr" indent="0" marL="0">
               <a:buNone/>
             </a:pPr>
             <a:r>
@@ -14982,7 +14982,7 @@
           <a:bodyPr wrap="square" lIns="0" tIns="0" rIns="0" bIns="0" rtlCol="0" anchor="ctr"/>
           <a:lstStyle/>
           <a:p>
-            <a:pPr algn="ctr" indent="0" marL="0">
+            <a:pPr eaLnBrk="0" latinLnBrk="0" algn="ctr" indent="0" marL="0">
               <a:buNone/>
             </a:pPr>
             <a:r>
@@ -15021,7 +15021,7 @@
           <a:bodyPr wrap="square" lIns="0" tIns="0" rIns="0" bIns="0" rtlCol="0" anchor="ctr"/>
           <a:lstStyle/>
           <a:p>
-            <a:pPr indent="0" marL="0">
+            <a:pPr eaLnBrk="0" latinLnBrk="0" indent="0" marL="0">
               <a:buNone/>
             </a:pPr>
             <a:r>
@@ -15060,7 +15060,7 @@
           <a:bodyPr wrap="square" lIns="0" tIns="0" rIns="0" bIns="0" rtlCol="0" anchor="ctr"/>
           <a:lstStyle/>
           <a:p>
-            <a:pPr indent="0" marL="0">
+            <a:pPr eaLnBrk="0" latinLnBrk="0" indent="0" marL="0">
               <a:buNone/>
             </a:pPr>
             <a:r>
@@ -15121,7 +15121,7 @@
           <a:bodyPr wrap="square" lIns="0" tIns="0" rIns="0" bIns="0" rtlCol="0" anchor="ctr"/>
           <a:lstStyle/>
           <a:p>
-            <a:pPr algn="ctr" indent="0" marL="0">
+            <a:pPr eaLnBrk="0" latinLnBrk="0" algn="ctr" indent="0" marL="0">
               <a:buNone/>
             </a:pPr>
             <a:r>
@@ -15182,7 +15182,7 @@
           <a:bodyPr wrap="square" lIns="0" tIns="0" rIns="0" bIns="0" rtlCol="0" anchor="ctr"/>
           <a:lstStyle/>
           <a:p>
-            <a:pPr algn="ctr" indent="0" marL="0">
+            <a:pPr eaLnBrk="0" latinLnBrk="0" algn="ctr" indent="0" marL="0">
               <a:buNone/>
             </a:pPr>
             <a:r>
@@ -15243,7 +15243,7 @@
           <a:bodyPr wrap="square" lIns="0" tIns="0" rIns="0" bIns="0" rtlCol="0" anchor="ctr"/>
           <a:lstStyle/>
           <a:p>
-            <a:pPr algn="ctr" indent="0" marL="0">
+            <a:pPr eaLnBrk="0" latinLnBrk="0" algn="ctr" indent="0" marL="0">
               <a:buNone/>
             </a:pPr>
             <a:r>
@@ -15304,7 +15304,7 @@
           <a:bodyPr wrap="square" lIns="0" tIns="0" rIns="0" bIns="0" rtlCol="0" anchor="ctr"/>
           <a:lstStyle/>
           <a:p>
-            <a:pPr algn="ctr" indent="0" marL="0">
+            <a:pPr eaLnBrk="0" latinLnBrk="0" algn="ctr" indent="0" marL="0">
               <a:buNone/>
             </a:pPr>
             <a:r>
@@ -15343,7 +15343,7 @@
           <a:bodyPr wrap="square" lIns="0" tIns="0" rIns="0" bIns="0" rtlCol="0" anchor="ctr"/>
           <a:lstStyle/>
           <a:p>
-            <a:pPr indent="0" marL="0">
+            <a:pPr eaLnBrk="0" latinLnBrk="0" indent="0" marL="0">
               <a:buNone/>
             </a:pPr>
             <a:r>
@@ -15357,7 +15357,7 @@
               </a:rPr>
               <a:t>평가방법  </a:t>
             </a:r>
-            <a:pPr indent="0" marL="0">
+            <a:pPr eaLnBrk="0" latinLnBrk="0" indent="0" marL="0">
               <a:buNone/>
             </a:pPr>
             <a:r>
@@ -15396,7 +15396,7 @@
           <a:bodyPr wrap="square" lIns="0" tIns="0" rIns="0" bIns="0" rtlCol="0" anchor="ctr"/>
           <a:lstStyle/>
           <a:p>
-            <a:pPr indent="0" marL="0">
+            <a:pPr eaLnBrk="0" latinLnBrk="0" indent="0" marL="0">
               <a:buNone/>
             </a:pPr>
             <a:r>
@@ -15410,7 +15410,7 @@
               </a:rPr>
               <a:t>심사위원  </a:t>
             </a:r>
-            <a:pPr indent="0" marL="0">
+            <a:pPr eaLnBrk="0" latinLnBrk="0" indent="0" marL="0">
               <a:buNone/>
             </a:pPr>
             <a:r>
@@ -15461,7 +15461,7 @@
                     <a:bodyPr/>
                     <a:lstStyle/>
                     <a:p>
-                      <a:pPr algn="ctr" indent="0" marL="0">
+                      <a:pPr eaLnBrk="0" latinLnBrk="0" algn="ctr" indent="0" marL="0">
                         <a:buNone/>
                       </a:pPr>
                       <a:r>
@@ -15529,7 +15529,7 @@
                     <a:bodyPr/>
                     <a:lstStyle/>
                     <a:p>
-                      <a:pPr algn="ctr" indent="0" marL="0">
+                      <a:pPr eaLnBrk="0" latinLnBrk="0" algn="ctr" indent="0" marL="0">
                         <a:buNone/>
                       </a:pPr>
                       <a:r>
@@ -15597,7 +15597,7 @@
                     <a:bodyPr/>
                     <a:lstStyle/>
                     <a:p>
-                      <a:pPr algn="ctr" indent="0" marL="0">
+                      <a:pPr eaLnBrk="0" latinLnBrk="0" algn="ctr" indent="0" marL="0">
                         <a:buNone/>
                       </a:pPr>
                       <a:r>
@@ -15667,7 +15667,7 @@
                     <a:bodyPr/>
                     <a:lstStyle/>
                     <a:p>
-                      <a:pPr algn="l" indent="0" marL="0">
+                      <a:pPr eaLnBrk="0" latinLnBrk="0" algn="l" indent="0" marL="0">
                         <a:buNone/>
                       </a:pPr>
                       <a:r>
@@ -15732,7 +15732,7 @@
                     <a:bodyPr/>
                     <a:lstStyle/>
                     <a:p>
-                      <a:pPr algn="ctr" indent="0" marL="0">
+                      <a:pPr eaLnBrk="0" latinLnBrk="0" algn="ctr" indent="0" marL="0">
                         <a:buNone/>
                       </a:pPr>
                       <a:r>
@@ -15797,7 +15797,7 @@
                     <a:bodyPr/>
                     <a:lstStyle/>
                     <a:p>
-                      <a:pPr algn="ctr" indent="0" marL="0">
+                      <a:pPr eaLnBrk="0" latinLnBrk="0" algn="ctr" indent="0" marL="0">
                         <a:buNone/>
                       </a:pPr>
                       <a:r>
@@ -15818,7 +15818,7 @@
                       </a:endParaRPr>
                     </a:p>
                     <a:p>
-                      <a:pPr algn="ctr" indent="0" marL="0">
+                      <a:pPr eaLnBrk="0" latinLnBrk="0" algn="ctr" indent="0" marL="0">
                         <a:buNone/>
                       </a:pPr>
                       <a:r>
@@ -15888,7 +15888,7 @@
                     <a:bodyPr/>
                     <a:lstStyle/>
                     <a:p>
-                      <a:pPr algn="l" indent="0" marL="0">
+                      <a:pPr eaLnBrk="0" latinLnBrk="0" algn="l" indent="0" marL="0">
                         <a:buNone/>
                       </a:pPr>
                       <a:r>
@@ -15953,7 +15953,7 @@
                     <a:bodyPr/>
                     <a:lstStyle/>
                     <a:p>
-                      <a:pPr algn="ctr" indent="0" marL="0">
+                      <a:pPr eaLnBrk="0" latinLnBrk="0" algn="ctr" indent="0" marL="0">
                         <a:buNone/>
                       </a:pPr>
                       <a:r>
@@ -16023,7 +16023,7 @@
                     <a:bodyPr/>
                     <a:lstStyle/>
                     <a:p>
-                      <a:pPr algn="l" indent="0" marL="0">
+                      <a:pPr eaLnBrk="0" latinLnBrk="0" algn="l" indent="0" marL="0">
                         <a:buNone/>
                       </a:pPr>
                       <a:r>
@@ -16088,7 +16088,7 @@
                     <a:bodyPr/>
                     <a:lstStyle/>
                     <a:p>
-                      <a:pPr algn="ctr" indent="0" marL="0">
+                      <a:pPr eaLnBrk="0" latinLnBrk="0" algn="ctr" indent="0" marL="0">
                         <a:buNone/>
                       </a:pPr>
                       <a:r>
@@ -16158,7 +16158,7 @@
                     <a:bodyPr/>
                     <a:lstStyle/>
                     <a:p>
-                      <a:pPr algn="l" indent="0" marL="0">
+                      <a:pPr eaLnBrk="0" latinLnBrk="0" algn="l" indent="0" marL="0">
                         <a:buNone/>
                       </a:pPr>
                       <a:r>
@@ -16223,7 +16223,7 @@
                     <a:bodyPr/>
                     <a:lstStyle/>
                     <a:p>
-                      <a:pPr algn="ctr" indent="0" marL="0">
+                      <a:pPr eaLnBrk="0" latinLnBrk="0" algn="ctr" indent="0" marL="0">
                         <a:buNone/>
                       </a:pPr>
                       <a:r>
@@ -16293,7 +16293,7 @@
                     <a:bodyPr/>
                     <a:lstStyle/>
                     <a:p>
-                      <a:pPr algn="l" indent="0" marL="0">
+                      <a:pPr eaLnBrk="0" latinLnBrk="0" algn="l" indent="0" marL="0">
                         <a:buNone/>
                       </a:pPr>
                       <a:r>
@@ -16361,7 +16361,7 @@
                     <a:bodyPr/>
                     <a:lstStyle/>
                     <a:p>
-                      <a:pPr algn="ctr" indent="0" marL="0">
+                      <a:pPr eaLnBrk="0" latinLnBrk="0" algn="ctr" indent="0" marL="0">
                         <a:buNone/>
                       </a:pPr>
                       <a:r>
@@ -16487,7 +16487,7 @@
           <a:bodyPr wrap="square" lIns="0" tIns="0" rIns="0" bIns="0" rtlCol="0" anchor="ctr"/>
           <a:lstStyle/>
           <a:p>
-            <a:pPr indent="0" marL="0">
+            <a:pPr eaLnBrk="0" latinLnBrk="0" indent="0" marL="0">
               <a:buNone/>
             </a:pPr>
             <a:r>
@@ -16564,7 +16564,7 @@
           <a:bodyPr wrap="square" lIns="0" tIns="0" rIns="0" bIns="0" rtlCol="0" anchor="ctr"/>
           <a:lstStyle/>
           <a:p>
-            <a:pPr indent="0" marL="0">
+            <a:pPr eaLnBrk="0" latinLnBrk="0" indent="0" marL="0">
               <a:buNone/>
             </a:pPr>
             <a:r>
@@ -16603,7 +16603,7 @@
           <a:bodyPr wrap="square" lIns="0" tIns="0" rIns="0" bIns="0" rtlCol="0" anchor="ctr"/>
           <a:lstStyle/>
           <a:p>
-            <a:pPr algn="r" indent="0" marL="0">
+            <a:pPr eaLnBrk="0" latinLnBrk="0" algn="r" indent="0" marL="0">
               <a:buNone/>
             </a:pPr>
             <a:r>
@@ -16664,7 +16664,7 @@
           <a:bodyPr wrap="square" lIns="0" tIns="0" rIns="0" bIns="0" rtlCol="0" anchor="ctr"/>
           <a:lstStyle/>
           <a:p>
-            <a:pPr indent="0" marL="0">
+            <a:pPr eaLnBrk="0" latinLnBrk="0" indent="0" marL="0">
               <a:buNone/>
             </a:pPr>
             <a:r>
@@ -16703,7 +16703,7 @@
           <a:bodyPr wrap="square" lIns="0" tIns="0" rIns="0" bIns="0" rtlCol="0" anchor="ctr"/>
           <a:lstStyle/>
           <a:p>
-            <a:pPr algn="r" indent="0" marL="0">
+            <a:pPr eaLnBrk="0" latinLnBrk="0" algn="r" indent="0" marL="0">
               <a:buNone/>
             </a:pPr>
             <a:r>
@@ -16742,7 +16742,7 @@
           <a:bodyPr wrap="square" lIns="0" tIns="0" rIns="0" bIns="0" rtlCol="0" anchor="ctr"/>
           <a:lstStyle/>
           <a:p>
-            <a:pPr algn="ctr" indent="0" marL="0">
+            <a:pPr eaLnBrk="0" latinLnBrk="0" algn="ctr" indent="0" marL="0">
               <a:buNone/>
             </a:pPr>
             <a:r>
@@ -16781,7 +16781,7 @@
           <a:bodyPr wrap="square" lIns="0" tIns="0" rIns="0" bIns="0" rtlCol="0" anchor="ctr"/>
           <a:lstStyle/>
           <a:p>
-            <a:pPr algn="ctr" indent="0" marL="0">
+            <a:pPr eaLnBrk="0" latinLnBrk="0" algn="ctr" indent="0" marL="0">
               <a:buNone/>
             </a:pPr>
             <a:r>
@@ -16876,7 +16876,7 @@
           <a:bodyPr wrap="square" lIns="0" tIns="0" rIns="0" bIns="0" rtlCol="0" anchor="ctr"/>
           <a:lstStyle/>
           <a:p>
-            <a:pPr algn="ctr" indent="0" marL="0">
+            <a:pPr eaLnBrk="0" latinLnBrk="0" algn="ctr" indent="0" marL="0">
               <a:buNone/>
             </a:pPr>
             <a:r>
@@ -16915,7 +16915,7 @@
           <a:bodyPr wrap="square" lIns="0" tIns="0" rIns="0" bIns="0" rtlCol="0" anchor="ctr"/>
           <a:lstStyle/>
           <a:p>
-            <a:pPr indent="0" marL="0">
+            <a:pPr eaLnBrk="0" latinLnBrk="0" indent="0" marL="0">
               <a:buNone/>
             </a:pPr>
             <a:r>
@@ -16954,7 +16954,7 @@
           <a:bodyPr wrap="square" lIns="0" tIns="0" rIns="0" bIns="0" rtlCol="0" anchor="ctr"/>
           <a:lstStyle/>
           <a:p>
-            <a:pPr indent="0" marL="0">
+            <a:pPr eaLnBrk="0" latinLnBrk="0" indent="0" marL="0">
               <a:buNone/>
             </a:pPr>
             <a:r>
@@ -17015,7 +17015,7 @@
           <a:bodyPr wrap="square" lIns="0" tIns="0" rIns="0" bIns="0" rtlCol="0" anchor="ctr"/>
           <a:lstStyle/>
           <a:p>
-            <a:pPr algn="ctr" indent="0" marL="0">
+            <a:pPr eaLnBrk="0" latinLnBrk="0" algn="ctr" indent="0" marL="0">
               <a:buNone/>
             </a:pPr>
             <a:r>
@@ -17076,7 +17076,7 @@
           <a:bodyPr wrap="square" lIns="0" tIns="0" rIns="0" bIns="0" rtlCol="0" anchor="ctr"/>
           <a:lstStyle/>
           <a:p>
-            <a:pPr algn="ctr" indent="0" marL="0">
+            <a:pPr eaLnBrk="0" latinLnBrk="0" algn="ctr" indent="0" marL="0">
               <a:buNone/>
             </a:pPr>
             <a:r>
@@ -17137,7 +17137,7 @@
           <a:bodyPr wrap="square" lIns="0" tIns="0" rIns="0" bIns="0" rtlCol="0" anchor="ctr"/>
           <a:lstStyle/>
           <a:p>
-            <a:pPr algn="ctr" indent="0" marL="0">
+            <a:pPr eaLnBrk="0" latinLnBrk="0" algn="ctr" indent="0" marL="0">
               <a:buNone/>
             </a:pPr>
             <a:r>
@@ -17198,7 +17198,7 @@
           <a:bodyPr wrap="square" lIns="0" tIns="0" rIns="0" bIns="0" rtlCol="0" anchor="ctr"/>
           <a:lstStyle/>
           <a:p>
-            <a:pPr algn="ctr" indent="0" marL="0">
+            <a:pPr eaLnBrk="0" latinLnBrk="0" algn="ctr" indent="0" marL="0">
               <a:buNone/>
             </a:pPr>
             <a:r>
@@ -17237,7 +17237,7 @@
           <a:bodyPr wrap="square" lIns="0" tIns="0" rIns="0" bIns="0" rtlCol="0" anchor="ctr"/>
           <a:lstStyle/>
           <a:p>
-            <a:pPr indent="0" marL="0">
+            <a:pPr eaLnBrk="0" latinLnBrk="0" indent="0" marL="0">
               <a:buNone/>
             </a:pPr>
             <a:r>
@@ -17251,7 +17251,7 @@
               </a:rPr>
               <a:t>대 상 자  </a:t>
             </a:r>
-            <a:pPr indent="0" marL="0">
+            <a:pPr eaLnBrk="0" latinLnBrk="0" indent="0" marL="0">
               <a:buNone/>
             </a:pPr>
             <a:r>
@@ -17265,7 +17265,7 @@
               </a:rPr>
               <a:t>최종합격 예정자</a:t>
             </a:r>
-            <a:pPr indent="0" marL="0">
+            <a:pPr eaLnBrk="0" latinLnBrk="0" indent="0" marL="0">
               <a:buNone/>
             </a:pPr>
             <a:r>
@@ -17279,7 +17279,7 @@
               </a:rPr>
               <a:t>         검증내용  </a:t>
             </a:r>
-            <a:pPr indent="0" marL="0">
+            <a:pPr eaLnBrk="0" latinLnBrk="0" indent="0" marL="0">
               <a:buNone/>
             </a:pPr>
             <a:r>
@@ -17352,7 +17352,7 @@
           <a:bodyPr wrap="square" lIns="0" tIns="0" rIns="0" bIns="0" rtlCol="0" anchor="ctr"/>
           <a:lstStyle/>
           <a:p>
-            <a:pPr indent="0" marL="0">
+            <a:pPr eaLnBrk="0" latinLnBrk="0" indent="0" marL="0">
               <a:buNone/>
             </a:pPr>
             <a:r>
@@ -17391,7 +17391,7 @@
           <a:bodyPr wrap="square" lIns="0" tIns="0" rIns="0" bIns="0" rtlCol="0" anchor="ctr"/>
           <a:lstStyle/>
           <a:p>
-            <a:pPr indent="0" marL="0">
+            <a:pPr eaLnBrk="0" latinLnBrk="0" indent="0" marL="0">
               <a:buNone/>
             </a:pPr>
             <a:r>
@@ -17430,7 +17430,7 @@
           <a:bodyPr wrap="square" lIns="0" tIns="0" rIns="0" bIns="0" rtlCol="0" anchor="ctr"/>
           <a:lstStyle/>
           <a:p>
-            <a:pPr indent="0" marL="0">
+            <a:pPr eaLnBrk="0" latinLnBrk="0" indent="0" marL="0">
               <a:lnSpc>
                 <a:spcPts val="1800"/>
               </a:lnSpc>
@@ -17450,7 +17450,7 @@
             <a:endParaRPr lang="en-US" sz="1250" dirty="0"/>
           </a:p>
           <a:p>
-            <a:pPr indent="0" marL="0">
+            <a:pPr eaLnBrk="0" latinLnBrk="0" indent="0" marL="0">
               <a:lnSpc>
                 <a:spcPts val="1800"/>
               </a:lnSpc>
@@ -17492,7 +17492,7 @@
           <a:bodyPr wrap="square" lIns="0" tIns="0" rIns="0" bIns="0" rtlCol="0" anchor="ctr"/>
           <a:lstStyle/>
           <a:p>
-            <a:pPr indent="0" marL="0">
+            <a:pPr eaLnBrk="0" latinLnBrk="0" indent="0" marL="0">
               <a:buNone/>
             </a:pPr>
             <a:r>
@@ -17531,7 +17531,7 @@
           <a:bodyPr wrap="square" lIns="0" tIns="0" rIns="0" bIns="0" rtlCol="0" anchor="ctr"/>
           <a:lstStyle/>
           <a:p>
-            <a:pPr indent="0" marL="0">
+            <a:pPr eaLnBrk="0" latinLnBrk="0" indent="0" marL="0">
               <a:lnSpc>
                 <a:spcPts val="1800"/>
               </a:lnSpc>
@@ -17551,7 +17551,7 @@
             <a:endParaRPr lang="en-US" sz="1250" dirty="0"/>
           </a:p>
           <a:p>
-            <a:pPr indent="0" marL="0">
+            <a:pPr eaLnBrk="0" latinLnBrk="0" indent="0" marL="0">
               <a:lnSpc>
                 <a:spcPts val="1800"/>
               </a:lnSpc>
@@ -17593,7 +17593,7 @@
           <a:bodyPr wrap="square" lIns="0" tIns="0" rIns="0" bIns="0" rtlCol="0" anchor="ctr"/>
           <a:lstStyle/>
           <a:p>
-            <a:pPr indent="0" marL="0">
+            <a:pPr eaLnBrk="0" latinLnBrk="0" indent="0" marL="0">
               <a:buNone/>
             </a:pPr>
             <a:r>
@@ -17644,7 +17644,7 @@
                     <a:bodyPr/>
                     <a:lstStyle/>
                     <a:p>
-                      <a:pPr algn="ctr" indent="0" marL="0">
+                      <a:pPr eaLnBrk="0" latinLnBrk="0" algn="ctr" indent="0" marL="0">
                         <a:buNone/>
                       </a:pPr>
                       <a:r>
@@ -17712,7 +17712,7 @@
                     <a:bodyPr/>
                     <a:lstStyle/>
                     <a:p>
-                      <a:pPr algn="ctr" indent="0" marL="0">
+                      <a:pPr eaLnBrk="0" latinLnBrk="0" algn="ctr" indent="0" marL="0">
                         <a:buNone/>
                       </a:pPr>
                       <a:r>
@@ -17780,7 +17780,7 @@
                     <a:bodyPr/>
                     <a:lstStyle/>
                     <a:p>
-                      <a:pPr algn="ctr" indent="0" marL="0">
+                      <a:pPr eaLnBrk="0" latinLnBrk="0" algn="ctr" indent="0" marL="0">
                         <a:buNone/>
                       </a:pPr>
                       <a:r>
@@ -17850,7 +17850,7 @@
                     <a:bodyPr/>
                     <a:lstStyle/>
                     <a:p>
-                      <a:pPr algn="ctr" indent="0" marL="0">
+                      <a:pPr eaLnBrk="0" latinLnBrk="0" algn="ctr" indent="0" marL="0">
                         <a:buNone/>
                       </a:pPr>
                       <a:r>
@@ -17871,7 +17871,7 @@
                       </a:endParaRPr>
                     </a:p>
                     <a:p>
-                      <a:pPr algn="ctr" indent="0" marL="0">
+                      <a:pPr eaLnBrk="0" latinLnBrk="0" algn="ctr" indent="0" marL="0">
                         <a:buNone/>
                       </a:pPr>
                       <a:r>
@@ -17936,7 +17936,7 @@
                     <a:bodyPr/>
                     <a:lstStyle/>
                     <a:p>
-                      <a:pPr algn="l" indent="0" marL="0">
+                      <a:pPr eaLnBrk="0" latinLnBrk="0" algn="l" indent="0" marL="0">
                         <a:buNone/>
                       </a:pPr>
                       <a:r>
@@ -17957,7 +17957,7 @@
                       </a:endParaRPr>
                     </a:p>
                     <a:p>
-                      <a:pPr algn="l" indent="0" marL="0">
+                      <a:pPr eaLnBrk="0" latinLnBrk="0" algn="l" indent="0" marL="0">
                         <a:buNone/>
                       </a:pPr>
                       <a:r>
@@ -18022,7 +18022,7 @@
                     <a:bodyPr/>
                     <a:lstStyle/>
                     <a:p>
-                      <a:pPr algn="ctr" indent="0" marL="0">
+                      <a:pPr eaLnBrk="0" latinLnBrk="0" algn="ctr" indent="0" marL="0">
                         <a:buNone/>
                       </a:pPr>
                       <a:r>
@@ -18043,7 +18043,7 @@
                       </a:endParaRPr>
                     </a:p>
                     <a:p>
-                      <a:pPr algn="ctr" indent="0" marL="0">
+                      <a:pPr eaLnBrk="0" latinLnBrk="0" algn="ctr" indent="0" marL="0">
                         <a:buNone/>
                       </a:pPr>
                       <a:r>
@@ -18113,7 +18113,7 @@
                     <a:bodyPr/>
                     <a:lstStyle/>
                     <a:p>
-                      <a:pPr algn="ctr" indent="0" marL="0">
+                      <a:pPr eaLnBrk="0" latinLnBrk="0" algn="ctr" indent="0" marL="0">
                         <a:buNone/>
                       </a:pPr>
                       <a:r>
@@ -18134,7 +18134,7 @@
                       </a:endParaRPr>
                     </a:p>
                     <a:p>
-                      <a:pPr algn="ctr" indent="0" marL="0">
+                      <a:pPr eaLnBrk="0" latinLnBrk="0" algn="ctr" indent="0" marL="0">
                         <a:buNone/>
                       </a:pPr>
                       <a:r>
@@ -18199,7 +18199,7 @@
                     <a:bodyPr/>
                     <a:lstStyle/>
                     <a:p>
-                      <a:pPr algn="l" indent="0" marL="0">
+                      <a:pPr eaLnBrk="0" latinLnBrk="0" algn="l" indent="0" marL="0">
                         <a:buNone/>
                       </a:pPr>
                       <a:r>
@@ -18220,7 +18220,7 @@
                       </a:endParaRPr>
                     </a:p>
                     <a:p>
-                      <a:pPr algn="l" indent="0" marL="0">
+                      <a:pPr eaLnBrk="0" latinLnBrk="0" algn="l" indent="0" marL="0">
                         <a:buNone/>
                       </a:pPr>
                       <a:r>
@@ -18343,7 +18343,7 @@
           <a:bodyPr wrap="square" lIns="0" tIns="0" rIns="0" bIns="0" rtlCol="0" anchor="ctr"/>
           <a:lstStyle/>
           <a:p>
-            <a:pPr indent="0" marL="0">
+            <a:pPr eaLnBrk="0" latinLnBrk="0" indent="0" marL="0">
               <a:buNone/>
             </a:pPr>
             <a:r>
@@ -18404,7 +18404,7 @@
           <a:bodyPr wrap="square" lIns="0" tIns="0" rIns="0" bIns="0" rtlCol="0" anchor="ctr"/>
           <a:lstStyle/>
           <a:p>
-            <a:pPr algn="ctr" indent="0" marL="0">
+            <a:pPr eaLnBrk="0" latinLnBrk="0" algn="ctr" indent="0" marL="0">
               <a:buNone/>
             </a:pPr>
             <a:r>
@@ -18465,7 +18465,7 @@
           <a:bodyPr wrap="square" lIns="0" tIns="0" rIns="0" bIns="0" rtlCol="0" anchor="ctr"/>
           <a:lstStyle/>
           <a:p>
-            <a:pPr algn="ctr" indent="0" marL="0">
+            <a:pPr eaLnBrk="0" latinLnBrk="0" algn="ctr" indent="0" marL="0">
               <a:buNone/>
             </a:pPr>
             <a:r>
@@ -18526,7 +18526,7 @@
           <a:bodyPr wrap="square" lIns="0" tIns="0" rIns="0" bIns="0" rtlCol="0" anchor="ctr"/>
           <a:lstStyle/>
           <a:p>
-            <a:pPr algn="ctr" indent="0" marL="0">
+            <a:pPr eaLnBrk="0" latinLnBrk="0" algn="ctr" indent="0" marL="0">
               <a:buNone/>
             </a:pPr>
             <a:r>

--- a/docs/2027년_사무직원_채용계획안.pptx
+++ b/docs/2027년_사무직원_채용계획안.pptx
@@ -8421,12 +8421,12 @@
         </p:nvSpPr>
         <p:spPr>
           <a:xfrm>
-            <a:off x="658368" y="4901184"/>
-            <a:ext cx="2011680" cy="1042416"/>
+            <a:off x="658368" y="4645152"/>
+            <a:ext cx="1335024" cy="1335024"/>
           </a:xfrm>
           <a:prstGeom prst="roundRect">
             <a:avLst>
-              <a:gd name="adj" fmla="val 6140"/>
+              <a:gd name="adj" fmla="val 4795"/>
             </a:avLst>
           </a:prstGeom>
           <a:solidFill>
@@ -8455,8 +8455,8 @@
         </p:nvSpPr>
         <p:spPr>
           <a:xfrm>
-            <a:off x="658368" y="5047488"/>
-            <a:ext cx="2011680" cy="274320"/>
+            <a:off x="658368" y="4882896"/>
+            <a:ext cx="1335024" cy="274320"/>
           </a:xfrm>
           <a:prstGeom prst="rect">
             <a:avLst/>
@@ -8472,7 +8472,7 @@
               <a:buNone/>
             </a:pPr>
             <a:r>
-              <a:rPr lang="en-US" sz="1100" dirty="0">
+              <a:rPr lang="en-US" sz="1200" dirty="0">
                 <a:solidFill>
                   <a:srgbClr val="6B7186"/>
                 </a:solidFill>
@@ -8482,7 +8482,7 @@
               </a:rPr>
               <a:t>정원</a:t>
             </a:r>
-            <a:endParaRPr lang="en-US" sz="1100" dirty="0"/>
+            <a:endParaRPr lang="en-US" sz="1200" dirty="0"/>
           </a:p>
         </p:txBody>
       </p:sp>
@@ -8494,8 +8494,8 @@
         </p:nvSpPr>
         <p:spPr>
           <a:xfrm>
-            <a:off x="658368" y="5340096"/>
-            <a:ext cx="2011680" cy="457200"/>
+            <a:off x="658368" y="5212080"/>
+            <a:ext cx="1335024" cy="512064"/>
           </a:xfrm>
           <a:prstGeom prst="rect">
             <a:avLst/>
@@ -8511,7 +8511,7 @@
               <a:buNone/>
             </a:pPr>
             <a:r>
-              <a:rPr lang="en-US" sz="2100" b="1" dirty="0">
+              <a:rPr lang="en-US" sz="2400" b="1" dirty="0">
                 <a:solidFill>
                   <a:srgbClr val="1E2761"/>
                 </a:solidFill>
@@ -8521,24 +8521,63 @@
               </a:rPr>
               <a:t>8명</a:t>
             </a:r>
-            <a:endParaRPr lang="en-US" sz="2100" dirty="0"/>
-          </a:p>
-        </p:txBody>
-      </p:sp>
-      <p:sp>
-        <p:nvSpPr>
-          <p:cNvPr id="12" name="Shape 8"/>
+            <a:endParaRPr lang="en-US" sz="2400" dirty="0"/>
+          </a:p>
+        </p:txBody>
+      </p:sp>
+      <p:sp>
+        <p:nvSpPr>
+          <p:cNvPr id="12" name="Text 8"/>
+          <p:cNvSpPr txBox="1"/>
+          <p:nvPr/>
+        </p:nvSpPr>
+        <p:spPr>
+          <a:xfrm>
+            <a:off x="1993392" y="4645152"/>
+            <a:ext cx="365760" cy="1335024"/>
+          </a:xfrm>
+          <a:prstGeom prst="rect">
+            <a:avLst/>
+          </a:prstGeom>
+          <a:noFill/>
+          <a:ln/>
+        </p:spPr>
+        <p:txBody>
+          <a:bodyPr wrap="square" lIns="0" tIns="0" rIns="0" bIns="0" rtlCol="0" anchor="ctr"/>
+          <a:lstStyle/>
+          <a:p>
+            <a:pPr eaLnBrk="0" latinLnBrk="0" algn="ctr" indent="0" marL="0">
+              <a:buNone/>
+            </a:pPr>
+            <a:r>
+              <a:rPr lang="en-US" sz="2000" b="1" dirty="0">
+                <a:solidFill>
+                  <a:srgbClr val="6B7186"/>
+                </a:solidFill>
+                <a:latin typeface="맑은 고딕" pitchFamily="34" charset="0"/>
+                <a:ea typeface="맑은 고딕" pitchFamily="34" charset="-122"/>
+                <a:cs typeface="맑은 고딕" pitchFamily="34" charset="-120"/>
+              </a:rPr>
+              <a:t>-</a:t>
+            </a:r>
+            <a:endParaRPr lang="en-US" sz="2000" dirty="0"/>
+          </a:p>
+        </p:txBody>
+      </p:sp>
+      <p:sp>
+        <p:nvSpPr>
+          <p:cNvPr id="13" name="Shape 9"/>
           <p:cNvSpPr/>
           <p:nvPr/>
         </p:nvSpPr>
         <p:spPr>
           <a:xfrm>
-            <a:off x="2852928" y="4901184"/>
-            <a:ext cx="2011680" cy="1042416"/>
+            <a:off x="2359152" y="4645152"/>
+            <a:ext cx="1335024" cy="1335024"/>
           </a:xfrm>
           <a:prstGeom prst="roundRect">
             <a:avLst>
-              <a:gd name="adj" fmla="val 6140"/>
+              <a:gd name="adj" fmla="val 4795"/>
             </a:avLst>
           </a:prstGeom>
           <a:solidFill>
@@ -8561,14 +8600,14 @@
       </p:sp>
       <p:sp>
         <p:nvSpPr>
-          <p:cNvPr id="13" name="Text 9"/>
-          <p:cNvSpPr txBox="1"/>
-          <p:nvPr/>
-        </p:nvSpPr>
-        <p:spPr>
-          <a:xfrm>
-            <a:off x="2852928" y="5047488"/>
-            <a:ext cx="2011680" cy="274320"/>
+          <p:cNvPr id="14" name="Text 10"/>
+          <p:cNvSpPr txBox="1"/>
+          <p:nvPr/>
+        </p:nvSpPr>
+        <p:spPr>
+          <a:xfrm>
+            <a:off x="2359152" y="4882896"/>
+            <a:ext cx="1335024" cy="274320"/>
           </a:xfrm>
           <a:prstGeom prst="rect">
             <a:avLst/>
@@ -8584,7 +8623,7 @@
               <a:buNone/>
             </a:pPr>
             <a:r>
-              <a:rPr lang="en-US" sz="1100" dirty="0">
+              <a:rPr lang="en-US" sz="1200" dirty="0">
                 <a:solidFill>
                   <a:srgbClr val="6B7186"/>
                 </a:solidFill>
@@ -8594,20 +8633,20 @@
               </a:rPr>
               <a:t>현원</a:t>
             </a:r>
-            <a:endParaRPr lang="en-US" sz="1100" dirty="0"/>
-          </a:p>
-        </p:txBody>
-      </p:sp>
-      <p:sp>
-        <p:nvSpPr>
-          <p:cNvPr id="14" name="Text 10"/>
-          <p:cNvSpPr txBox="1"/>
-          <p:nvPr/>
-        </p:nvSpPr>
-        <p:spPr>
-          <a:xfrm>
-            <a:off x="2852928" y="5340096"/>
-            <a:ext cx="2011680" cy="457200"/>
+            <a:endParaRPr lang="en-US" sz="1200" dirty="0"/>
+          </a:p>
+        </p:txBody>
+      </p:sp>
+      <p:sp>
+        <p:nvSpPr>
+          <p:cNvPr id="15" name="Text 11"/>
+          <p:cNvSpPr txBox="1"/>
+          <p:nvPr/>
+        </p:nvSpPr>
+        <p:spPr>
+          <a:xfrm>
+            <a:off x="2359152" y="5212080"/>
+            <a:ext cx="1335024" cy="512064"/>
           </a:xfrm>
           <a:prstGeom prst="rect">
             <a:avLst/>
@@ -8623,7 +8662,7 @@
               <a:buNone/>
             </a:pPr>
             <a:r>
-              <a:rPr lang="en-US" sz="2100" b="1" dirty="0">
+              <a:rPr lang="en-US" sz="2400" b="1" dirty="0">
                 <a:solidFill>
                   <a:srgbClr val="1E2761"/>
                 </a:solidFill>
@@ -8633,24 +8672,195 @@
               </a:rPr>
               <a:t>5명</a:t>
             </a:r>
-            <a:endParaRPr lang="en-US" sz="2100" dirty="0"/>
-          </a:p>
-        </p:txBody>
-      </p:sp>
-      <p:sp>
-        <p:nvSpPr>
-          <p:cNvPr id="15" name="Shape 11"/>
+            <a:endParaRPr lang="en-US" sz="2400" dirty="0"/>
+          </a:p>
+        </p:txBody>
+      </p:sp>
+      <p:sp>
+        <p:nvSpPr>
+          <p:cNvPr id="16" name="Text 12"/>
+          <p:cNvSpPr txBox="1"/>
+          <p:nvPr/>
+        </p:nvSpPr>
+        <p:spPr>
+          <a:xfrm>
+            <a:off x="3694176" y="4645152"/>
+            <a:ext cx="365760" cy="1335024"/>
+          </a:xfrm>
+          <a:prstGeom prst="rect">
+            <a:avLst/>
+          </a:prstGeom>
+          <a:noFill/>
+          <a:ln/>
+        </p:spPr>
+        <p:txBody>
+          <a:bodyPr wrap="square" lIns="0" tIns="0" rIns="0" bIns="0" rtlCol="0" anchor="ctr"/>
+          <a:lstStyle/>
+          <a:p>
+            <a:pPr eaLnBrk="0" latinLnBrk="0" algn="ctr" indent="0" marL="0">
+              <a:buNone/>
+            </a:pPr>
+            <a:r>
+              <a:rPr lang="en-US" sz="2000" b="1" dirty="0">
+                <a:solidFill>
+                  <a:srgbClr val="6B7186"/>
+                </a:solidFill>
+                <a:latin typeface="맑은 고딕" pitchFamily="34" charset="0"/>
+                <a:ea typeface="맑은 고딕" pitchFamily="34" charset="-122"/>
+                <a:cs typeface="맑은 고딕" pitchFamily="34" charset="-120"/>
+              </a:rPr>
+              <a:t>=</a:t>
+            </a:r>
+            <a:endParaRPr lang="en-US" sz="2000" dirty="0"/>
+          </a:p>
+        </p:txBody>
+      </p:sp>
+      <p:sp>
+        <p:nvSpPr>
+          <p:cNvPr id="17" name="Shape 13"/>
           <p:cNvSpPr/>
           <p:nvPr/>
         </p:nvSpPr>
         <p:spPr>
           <a:xfrm>
-            <a:off x="5047488" y="4901184"/>
-            <a:ext cx="2011680" cy="1042416"/>
+            <a:off x="4059936" y="4645152"/>
+            <a:ext cx="1335024" cy="1335024"/>
           </a:xfrm>
           <a:prstGeom prst="roundRect">
             <a:avLst>
-              <a:gd name="adj" fmla="val 6140"/>
+              <a:gd name="adj" fmla="val 4795"/>
+            </a:avLst>
+          </a:prstGeom>
+          <a:solidFill>
+            <a:srgbClr val="FBEDEC"/>
+          </a:solidFill>
+          <a:ln w="12700">
+            <a:solidFill>
+              <a:srgbClr val="E3E8F4"/>
+            </a:solidFill>
+            <a:prstDash val="solid"/>
+          </a:ln>
+          <a:effectLst>
+            <a:outerShdw sx="100000" sy="100000" kx="0" ky="0" algn="bl" rotWithShape="0" blurRad="101600" dist="25400" dir="5400000">
+              <a:srgbClr val="1E2761">
+                <a:alpha val="10000"/>
+              </a:srgbClr>
+            </a:outerShdw>
+          </a:effectLst>
+        </p:spPr>
+      </p:sp>
+      <p:sp>
+        <p:nvSpPr>
+          <p:cNvPr id="18" name="Text 14"/>
+          <p:cNvSpPr txBox="1"/>
+          <p:nvPr/>
+        </p:nvSpPr>
+        <p:spPr>
+          <a:xfrm>
+            <a:off x="4059936" y="4882896"/>
+            <a:ext cx="1335024" cy="274320"/>
+          </a:xfrm>
+          <a:prstGeom prst="rect">
+            <a:avLst/>
+          </a:prstGeom>
+          <a:noFill/>
+          <a:ln/>
+        </p:spPr>
+        <p:txBody>
+          <a:bodyPr wrap="square" lIns="0" tIns="0" rIns="0" bIns="0" rtlCol="0" anchor="ctr"/>
+          <a:lstStyle/>
+          <a:p>
+            <a:pPr eaLnBrk="0" latinLnBrk="0" algn="ctr" indent="0" marL="0">
+              <a:buNone/>
+            </a:pPr>
+            <a:r>
+              <a:rPr lang="en-US" sz="1200" dirty="0">
+                <a:solidFill>
+                  <a:srgbClr val="6B7186"/>
+                </a:solidFill>
+                <a:latin typeface="맑은 고딕" pitchFamily="34" charset="0"/>
+                <a:ea typeface="맑은 고딕" pitchFamily="34" charset="-122"/>
+                <a:cs typeface="맑은 고딕" pitchFamily="34" charset="-120"/>
+              </a:rPr>
+              <a:t>결원</a:t>
+            </a:r>
+            <a:endParaRPr lang="en-US" sz="1200" dirty="0"/>
+          </a:p>
+        </p:txBody>
+      </p:sp>
+      <p:sp>
+        <p:nvSpPr>
+          <p:cNvPr id="19" name="Text 15"/>
+          <p:cNvSpPr txBox="1"/>
+          <p:nvPr/>
+        </p:nvSpPr>
+        <p:spPr>
+          <a:xfrm>
+            <a:off x="4059936" y="5212080"/>
+            <a:ext cx="1335024" cy="512064"/>
+          </a:xfrm>
+          <a:prstGeom prst="rect">
+            <a:avLst/>
+          </a:prstGeom>
+          <a:noFill/>
+          <a:ln/>
+        </p:spPr>
+        <p:txBody>
+          <a:bodyPr wrap="square" lIns="0" tIns="0" rIns="0" bIns="0" rtlCol="0" anchor="ctr"/>
+          <a:lstStyle/>
+          <a:p>
+            <a:pPr eaLnBrk="0" latinLnBrk="0" algn="ctr" indent="0" marL="0">
+              <a:buNone/>
+            </a:pPr>
+            <a:r>
+              <a:rPr lang="en-US" sz="2400" b="1" dirty="0">
+                <a:solidFill>
+                  <a:srgbClr val="B23A34"/>
+                </a:solidFill>
+                <a:latin typeface="맑은 고딕" pitchFamily="34" charset="0"/>
+                <a:ea typeface="맑은 고딕" pitchFamily="34" charset="-122"/>
+                <a:cs typeface="맑은 고딕" pitchFamily="34" charset="-120"/>
+              </a:rPr>
+              <a:t>3명</a:t>
+            </a:r>
+            <a:endParaRPr lang="en-US" sz="2400" dirty="0"/>
+          </a:p>
+        </p:txBody>
+      </p:sp>
+      <p:sp>
+        <p:nvSpPr>
+          <p:cNvPr id="20" name="Shape 16"/>
+          <p:cNvSpPr/>
+          <p:nvPr/>
+        </p:nvSpPr>
+        <p:spPr>
+          <a:xfrm rot="5400000">
+            <a:off x="5522976" y="5202936"/>
+            <a:ext cx="219456" cy="219456"/>
+          </a:xfrm>
+          <a:prstGeom prst="triangle">
+            <a:avLst/>
+          </a:prstGeom>
+          <a:solidFill>
+            <a:srgbClr val="1E2761"/>
+          </a:solidFill>
+          <a:ln/>
+        </p:spPr>
+      </p:sp>
+      <p:sp>
+        <p:nvSpPr>
+          <p:cNvPr id="21" name="Shape 17"/>
+          <p:cNvSpPr/>
+          <p:nvPr/>
+        </p:nvSpPr>
+        <p:spPr>
+          <a:xfrm>
+            <a:off x="5870448" y="4645152"/>
+            <a:ext cx="5815584" cy="1335024"/>
+          </a:xfrm>
+          <a:prstGeom prst="roundRect">
+            <a:avLst>
+              <a:gd name="adj" fmla="val 4795"/>
             </a:avLst>
           </a:prstGeom>
           <a:solidFill>
@@ -8673,14 +8883,14 @@
       </p:sp>
       <p:sp>
         <p:nvSpPr>
-          <p:cNvPr id="16" name="Text 12"/>
-          <p:cNvSpPr txBox="1"/>
-          <p:nvPr/>
-        </p:nvSpPr>
-        <p:spPr>
-          <a:xfrm>
-            <a:off x="5047488" y="5047488"/>
-            <a:ext cx="2011680" cy="274320"/>
+          <p:cNvPr id="22" name="Text 18"/>
+          <p:cNvSpPr txBox="1"/>
+          <p:nvPr/>
+        </p:nvSpPr>
+        <p:spPr>
+          <a:xfrm>
+            <a:off x="6126480" y="4791456"/>
+            <a:ext cx="5303520" cy="292608"/>
           </a:xfrm>
           <a:prstGeom prst="rect">
             <a:avLst/>
@@ -8692,50 +8902,11 @@
           <a:bodyPr wrap="square" lIns="0" tIns="0" rIns="0" bIns="0" rtlCol="0" anchor="ctr"/>
           <a:lstStyle/>
           <a:p>
-            <a:pPr eaLnBrk="0" latinLnBrk="0" algn="ctr" indent="0" marL="0">
-              <a:buNone/>
-            </a:pPr>
-            <a:r>
-              <a:rPr lang="en-US" sz="1100" dirty="0">
-                <a:solidFill>
-                  <a:srgbClr val="6B7186"/>
-                </a:solidFill>
-                <a:latin typeface="맑은 고딕" pitchFamily="34" charset="0"/>
-                <a:ea typeface="맑은 고딕" pitchFamily="34" charset="-122"/>
-                <a:cs typeface="맑은 고딕" pitchFamily="34" charset="-120"/>
-              </a:rPr>
-              <a:t>결원</a:t>
-            </a:r>
-            <a:endParaRPr lang="en-US" sz="1100" dirty="0"/>
-          </a:p>
-        </p:txBody>
-      </p:sp>
-      <p:sp>
-        <p:nvSpPr>
-          <p:cNvPr id="17" name="Text 13"/>
-          <p:cNvSpPr txBox="1"/>
-          <p:nvPr/>
-        </p:nvSpPr>
-        <p:spPr>
-          <a:xfrm>
-            <a:off x="5047488" y="5340096"/>
-            <a:ext cx="2011680" cy="457200"/>
-          </a:xfrm>
-          <a:prstGeom prst="rect">
-            <a:avLst/>
-          </a:prstGeom>
-          <a:noFill/>
-          <a:ln/>
-        </p:spPr>
-        <p:txBody>
-          <a:bodyPr wrap="square" lIns="0" tIns="0" rIns="0" bIns="0" rtlCol="0" anchor="ctr"/>
-          <a:lstStyle/>
-          <a:p>
-            <a:pPr eaLnBrk="0" latinLnBrk="0" algn="ctr" indent="0" marL="0">
-              <a:buNone/>
-            </a:pPr>
-            <a:r>
-              <a:rPr lang="en-US" sz="2100" b="1" dirty="0">
+            <a:pPr eaLnBrk="0" latinLnBrk="0" indent="0" marL="0">
+              <a:buNone/>
+            </a:pPr>
+            <a:r>
+              <a:rPr lang="en-US" sz="1400" b="1" dirty="0">
                 <a:solidFill>
                   <a:srgbClr val="1E2761"/>
                 </a:solidFill>
@@ -8743,56 +8914,44 @@
                 <a:ea typeface="맑은 고딕" pitchFamily="34" charset="-122"/>
                 <a:cs typeface="맑은 고딕" pitchFamily="34" charset="-120"/>
               </a:rPr>
-              <a:t>3명</a:t>
-            </a:r>
-            <a:endParaRPr lang="en-US" sz="2100" dirty="0"/>
-          </a:p>
-        </p:txBody>
-      </p:sp>
-      <p:sp>
-        <p:nvSpPr>
-          <p:cNvPr id="18" name="Shape 14"/>
+              <a:t>결원 3명 충원 방안</a:t>
+            </a:r>
+            <a:endParaRPr lang="en-US" sz="1400" dirty="0"/>
+          </a:p>
+        </p:txBody>
+      </p:sp>
+      <p:sp>
+        <p:nvSpPr>
+          <p:cNvPr id="23" name="Shape 19"/>
           <p:cNvSpPr/>
           <p:nvPr/>
         </p:nvSpPr>
         <p:spPr>
           <a:xfrm>
-            <a:off x="7242048" y="4901184"/>
-            <a:ext cx="2011680" cy="1042416"/>
+            <a:off x="6126480" y="5157216"/>
+            <a:ext cx="2569464" cy="658368"/>
           </a:xfrm>
           <a:prstGeom prst="roundRect">
             <a:avLst>
-              <a:gd name="adj" fmla="val 6140"/>
+              <a:gd name="adj" fmla="val 9722"/>
             </a:avLst>
           </a:prstGeom>
           <a:solidFill>
             <a:srgbClr val="1E2761"/>
           </a:solidFill>
-          <a:ln w="12700">
-            <a:solidFill>
-              <a:srgbClr val="E3E8F4"/>
-            </a:solidFill>
-            <a:prstDash val="solid"/>
-          </a:ln>
-          <a:effectLst>
-            <a:outerShdw sx="100000" sy="100000" kx="0" ky="0" algn="bl" rotWithShape="0" blurRad="101600" dist="25400" dir="5400000">
-              <a:srgbClr val="1E2761">
-                <a:alpha val="10000"/>
-              </a:srgbClr>
-            </a:outerShdw>
-          </a:effectLst>
-        </p:spPr>
-      </p:sp>
-      <p:sp>
-        <p:nvSpPr>
-          <p:cNvPr id="19" name="Text 15"/>
-          <p:cNvSpPr txBox="1"/>
-          <p:nvPr/>
-        </p:nvSpPr>
-        <p:spPr>
-          <a:xfrm>
-            <a:off x="7242048" y="5047488"/>
-            <a:ext cx="2011680" cy="274320"/>
+          <a:ln/>
+        </p:spPr>
+      </p:sp>
+      <p:sp>
+        <p:nvSpPr>
+          <p:cNvPr id="24" name="Text 20"/>
+          <p:cNvSpPr txBox="1"/>
+          <p:nvPr/>
+        </p:nvSpPr>
+        <p:spPr>
+          <a:xfrm>
+            <a:off x="6309360" y="5157216"/>
+            <a:ext cx="822960" cy="658368"/>
           </a:xfrm>
           <a:prstGeom prst="rect">
             <a:avLst/>
@@ -8804,11 +8963,50 @@
           <a:bodyPr wrap="square" lIns="0" tIns="0" rIns="0" bIns="0" rtlCol="0" anchor="ctr"/>
           <a:lstStyle/>
           <a:p>
-            <a:pPr eaLnBrk="0" latinLnBrk="0" algn="ctr" indent="0" marL="0">
-              <a:buNone/>
-            </a:pPr>
-            <a:r>
-              <a:rPr lang="en-US" sz="1100" dirty="0">
+            <a:pPr eaLnBrk="0" latinLnBrk="0" indent="0" marL="0">
+              <a:buNone/>
+            </a:pPr>
+            <a:r>
+              <a:rPr lang="en-US" sz="2200" b="1" dirty="0">
+                <a:solidFill>
+                  <a:srgbClr val="FFFFFF"/>
+                </a:solidFill>
+                <a:latin typeface="맑은 고딕" pitchFamily="34" charset="0"/>
+                <a:ea typeface="맑은 고딕" pitchFamily="34" charset="-122"/>
+                <a:cs typeface="맑은 고딕" pitchFamily="34" charset="-120"/>
+              </a:rPr>
+              <a:t>1명</a:t>
+            </a:r>
+            <a:endParaRPr lang="en-US" sz="2200" dirty="0"/>
+          </a:p>
+        </p:txBody>
+      </p:sp>
+      <p:sp>
+        <p:nvSpPr>
+          <p:cNvPr id="25" name="Text 21"/>
+          <p:cNvSpPr txBox="1"/>
+          <p:nvPr/>
+        </p:nvSpPr>
+        <p:spPr>
+          <a:xfrm>
+            <a:off x="7150608" y="5157216"/>
+            <a:ext cx="1399032" cy="658368"/>
+          </a:xfrm>
+          <a:prstGeom prst="rect">
+            <a:avLst/>
+          </a:prstGeom>
+          <a:noFill/>
+          <a:ln/>
+        </p:spPr>
+        <p:txBody>
+          <a:bodyPr wrap="square" lIns="0" tIns="0" rIns="0" bIns="0" rtlCol="0" anchor="ctr"/>
+          <a:lstStyle/>
+          <a:p>
+            <a:pPr eaLnBrk="0" latinLnBrk="0" indent="0" marL="0">
+              <a:buNone/>
+            </a:pPr>
+            <a:r>
+              <a:rPr lang="en-US" sz="1250" dirty="0">
                 <a:solidFill>
                   <a:srgbClr val="CADCFC"/>
                 </a:solidFill>
@@ -8818,93 +9016,42 @@
               </a:rPr>
               <a:t>공개채용</a:t>
             </a:r>
-            <a:endParaRPr lang="en-US" sz="1100" dirty="0"/>
-          </a:p>
-        </p:txBody>
-      </p:sp>
-      <p:sp>
-        <p:nvSpPr>
-          <p:cNvPr id="20" name="Text 16"/>
-          <p:cNvSpPr txBox="1"/>
-          <p:nvPr/>
-        </p:nvSpPr>
-        <p:spPr>
-          <a:xfrm>
-            <a:off x="7242048" y="5340096"/>
-            <a:ext cx="2011680" cy="457200"/>
-          </a:xfrm>
-          <a:prstGeom prst="rect">
-            <a:avLst/>
-          </a:prstGeom>
-          <a:noFill/>
-          <a:ln/>
-        </p:spPr>
-        <p:txBody>
-          <a:bodyPr wrap="square" lIns="0" tIns="0" rIns="0" bIns="0" rtlCol="0" anchor="ctr"/>
-          <a:lstStyle/>
-          <a:p>
-            <a:pPr eaLnBrk="0" latinLnBrk="0" algn="ctr" indent="0" marL="0">
-              <a:buNone/>
-            </a:pPr>
-            <a:r>
-              <a:rPr lang="en-US" sz="2100" b="1" dirty="0">
-                <a:solidFill>
-                  <a:srgbClr val="FFFFFF"/>
-                </a:solidFill>
-                <a:latin typeface="맑은 고딕" pitchFamily="34" charset="0"/>
-                <a:ea typeface="맑은 고딕" pitchFamily="34" charset="-122"/>
-                <a:cs typeface="맑은 고딕" pitchFamily="34" charset="-120"/>
-              </a:rPr>
-              <a:t>1명</a:t>
-            </a:r>
-            <a:endParaRPr lang="en-US" sz="2100" dirty="0"/>
-          </a:p>
-        </p:txBody>
-      </p:sp>
-      <p:sp>
-        <p:nvSpPr>
-          <p:cNvPr id="21" name="Shape 17"/>
+            <a:endParaRPr lang="en-US" sz="1250" dirty="0"/>
+          </a:p>
+        </p:txBody>
+      </p:sp>
+      <p:sp>
+        <p:nvSpPr>
+          <p:cNvPr id="26" name="Shape 22"/>
           <p:cNvSpPr/>
           <p:nvPr/>
         </p:nvSpPr>
         <p:spPr>
           <a:xfrm>
-            <a:off x="9436608" y="4901184"/>
-            <a:ext cx="2011680" cy="1042416"/>
+            <a:off x="8860536" y="5157216"/>
+            <a:ext cx="2569464" cy="658368"/>
           </a:xfrm>
           <a:prstGeom prst="roundRect">
             <a:avLst>
-              <a:gd name="adj" fmla="val 6140"/>
+              <a:gd name="adj" fmla="val 9722"/>
             </a:avLst>
           </a:prstGeom>
           <a:solidFill>
-            <a:srgbClr val="FFFFFF"/>
+            <a:srgbClr val="E8EFFC"/>
           </a:solidFill>
-          <a:ln w="12700">
-            <a:solidFill>
-              <a:srgbClr val="E3E8F4"/>
-            </a:solidFill>
-            <a:prstDash val="solid"/>
-          </a:ln>
-          <a:effectLst>
-            <a:outerShdw sx="100000" sy="100000" kx="0" ky="0" algn="bl" rotWithShape="0" blurRad="101600" dist="25400" dir="5400000">
-              <a:srgbClr val="1E2761">
-                <a:alpha val="10000"/>
-              </a:srgbClr>
-            </a:outerShdw>
-          </a:effectLst>
-        </p:spPr>
-      </p:sp>
-      <p:sp>
-        <p:nvSpPr>
-          <p:cNvPr id="22" name="Text 18"/>
-          <p:cNvSpPr txBox="1"/>
-          <p:nvPr/>
-        </p:nvSpPr>
-        <p:spPr>
-          <a:xfrm>
-            <a:off x="9436608" y="5047488"/>
-            <a:ext cx="2011680" cy="274320"/>
+          <a:ln/>
+        </p:spPr>
+      </p:sp>
+      <p:sp>
+        <p:nvSpPr>
+          <p:cNvPr id="27" name="Text 23"/>
+          <p:cNvSpPr txBox="1"/>
+          <p:nvPr/>
+        </p:nvSpPr>
+        <p:spPr>
+          <a:xfrm>
+            <a:off x="9043416" y="5157216"/>
+            <a:ext cx="822960" cy="658368"/>
           </a:xfrm>
           <a:prstGeom prst="rect">
             <a:avLst/>
@@ -8916,13 +9063,52 @@
           <a:bodyPr wrap="square" lIns="0" tIns="0" rIns="0" bIns="0" rtlCol="0" anchor="ctr"/>
           <a:lstStyle/>
           <a:p>
-            <a:pPr eaLnBrk="0" latinLnBrk="0" algn="ctr" indent="0" marL="0">
-              <a:buNone/>
-            </a:pPr>
-            <a:r>
-              <a:rPr lang="en-US" sz="1100" dirty="0">
-                <a:solidFill>
-                  <a:srgbClr val="6B7186"/>
+            <a:pPr eaLnBrk="0" latinLnBrk="0" indent="0" marL="0">
+              <a:buNone/>
+            </a:pPr>
+            <a:r>
+              <a:rPr lang="en-US" sz="2200" b="1" dirty="0">
+                <a:solidFill>
+                  <a:srgbClr val="1E2761"/>
+                </a:solidFill>
+                <a:latin typeface="맑은 고딕" pitchFamily="34" charset="0"/>
+                <a:ea typeface="맑은 고딕" pitchFamily="34" charset="-122"/>
+                <a:cs typeface="맑은 고딕" pitchFamily="34" charset="-120"/>
+              </a:rPr>
+              <a:t>2명</a:t>
+            </a:r>
+            <a:endParaRPr lang="en-US" sz="2200" dirty="0"/>
+          </a:p>
+        </p:txBody>
+      </p:sp>
+      <p:sp>
+        <p:nvSpPr>
+          <p:cNvPr id="28" name="Text 24"/>
+          <p:cNvSpPr txBox="1"/>
+          <p:nvPr/>
+        </p:nvSpPr>
+        <p:spPr>
+          <a:xfrm>
+            <a:off x="9884664" y="5157216"/>
+            <a:ext cx="1399032" cy="658368"/>
+          </a:xfrm>
+          <a:prstGeom prst="rect">
+            <a:avLst/>
+          </a:prstGeom>
+          <a:noFill/>
+          <a:ln/>
+        </p:spPr>
+        <p:txBody>
+          <a:bodyPr wrap="square" lIns="0" tIns="0" rIns="0" bIns="0" rtlCol="0" anchor="ctr"/>
+          <a:lstStyle/>
+          <a:p>
+            <a:pPr eaLnBrk="0" latinLnBrk="0" indent="0" marL="0">
+              <a:buNone/>
+            </a:pPr>
+            <a:r>
+              <a:rPr lang="en-US" sz="1250" dirty="0">
+                <a:solidFill>
+                  <a:srgbClr val="22263A"/>
                 </a:solidFill>
                 <a:latin typeface="맑은 고딕" pitchFamily="34" charset="0"/>
                 <a:ea typeface="맑은 고딕" pitchFamily="34" charset="-122"/>
@@ -8930,46 +9116,7 @@
               </a:rPr>
               <a:t>기간제 운영</a:t>
             </a:r>
-            <a:endParaRPr lang="en-US" sz="1100" dirty="0"/>
-          </a:p>
-        </p:txBody>
-      </p:sp>
-      <p:sp>
-        <p:nvSpPr>
-          <p:cNvPr id="23" name="Text 19"/>
-          <p:cNvSpPr txBox="1"/>
-          <p:nvPr/>
-        </p:nvSpPr>
-        <p:spPr>
-          <a:xfrm>
-            <a:off x="9436608" y="5340096"/>
-            <a:ext cx="2011680" cy="457200"/>
-          </a:xfrm>
-          <a:prstGeom prst="rect">
-            <a:avLst/>
-          </a:prstGeom>
-          <a:noFill/>
-          <a:ln/>
-        </p:spPr>
-        <p:txBody>
-          <a:bodyPr wrap="square" lIns="0" tIns="0" rIns="0" bIns="0" rtlCol="0" anchor="ctr"/>
-          <a:lstStyle/>
-          <a:p>
-            <a:pPr eaLnBrk="0" latinLnBrk="0" algn="ctr" indent="0" marL="0">
-              <a:buNone/>
-            </a:pPr>
-            <a:r>
-              <a:rPr lang="en-US" sz="2100" b="1" dirty="0">
-                <a:solidFill>
-                  <a:srgbClr val="1E2761"/>
-                </a:solidFill>
-                <a:latin typeface="맑은 고딕" pitchFamily="34" charset="0"/>
-                <a:ea typeface="맑은 고딕" pitchFamily="34" charset="-122"/>
-                <a:cs typeface="맑은 고딕" pitchFamily="34" charset="-120"/>
-              </a:rPr>
-              <a:t>2명</a:t>
-            </a:r>
-            <a:endParaRPr lang="en-US" sz="2100" dirty="0"/>
+            <a:endParaRPr lang="en-US" sz="1250" dirty="0"/>
           </a:p>
         </p:txBody>
       </p:sp>

--- a/docs/2027년_사무직원_채용계획안.pptx
+++ b/docs/2027년_사무직원_채용계획안.pptx
@@ -6274,7 +6274,28 @@
                           <a:ea typeface="맑은 고딕" pitchFamily="34" charset="-122"/>
                           <a:cs typeface="맑은 고딕" pitchFamily="34" charset="-120"/>
                         </a:rPr>
-                        <a:t>채용(안)</a:t>
+                        <a:t>채용</a:t>
+                      </a:r>
+                      <a:endParaRPr lang="en-US" sz="950" dirty="0">
+                        <a:latin typeface="맑은 고딕" charset="0"/>
+                        <a:ea typeface="맑은 고딕" charset="0"/>
+                        <a:cs typeface="맑은 고딕" charset="0"/>
+                      </a:endParaRPr>
+                    </a:p>
+                    <a:p>
+                      <a:pPr eaLnBrk="0" latinLnBrk="0" algn="ctr" indent="0" marL="0">
+                        <a:buNone/>
+                      </a:pPr>
+                      <a:r>
+                        <a:rPr lang="en-US" sz="950" b="1" dirty="0">
+                          <a:solidFill>
+                            <a:srgbClr val="FFFFFF"/>
+                          </a:solidFill>
+                          <a:latin typeface="맑은 고딕" pitchFamily="34" charset="0"/>
+                          <a:ea typeface="맑은 고딕" pitchFamily="34" charset="-122"/>
+                          <a:cs typeface="맑은 고딕" pitchFamily="34" charset="-120"/>
+                        </a:rPr>
+                        <a:t>(안)</a:t>
                       </a:r>
                       <a:endParaRPr lang="en-US" sz="950" dirty="0">
                         <a:latin typeface="맑은 고딕" charset="0"/>
@@ -11353,8 +11374,8 @@
         </p:nvSpPr>
         <p:spPr>
           <a:xfrm>
-            <a:off x="5769864" y="3383280"/>
-            <a:ext cx="1097280" cy="1005840"/>
+            <a:off x="5660136" y="3383280"/>
+            <a:ext cx="1243584" cy="1005840"/>
           </a:xfrm>
           <a:prstGeom prst="rect">
             <a:avLst/>
@@ -11366,7 +11387,7 @@
           <a:bodyPr wrap="square" lIns="0" tIns="0" rIns="0" bIns="0" rtlCol="0" anchor="t"/>
           <a:lstStyle/>
           <a:p>
-            <a:pPr eaLnBrk="0" latinLnBrk="0" marL="342900" indent="-342900">
+            <a:pPr eaLnBrk="0" latinLnBrk="0" marL="127000" indent="-127000">
               <a:spcAft>
                 <a:spcPts val="500"/>
               </a:spcAft>
@@ -11374,7 +11395,7 @@
               <a:buChar char="•"/>
             </a:pPr>
             <a:r>
-              <a:rPr lang="en-US" sz="1000" dirty="0">
+              <a:rPr lang="en-US" sz="950" dirty="0">
                 <a:solidFill>
                   <a:srgbClr val="22263A"/>
                 </a:solidFill>
@@ -11384,10 +11405,10 @@
               </a:rPr>
               <a:t>채용신체검사</a:t>
             </a:r>
-            <a:endParaRPr lang="en-US" sz="1000" dirty="0"/>
-          </a:p>
-          <a:p>
-            <a:pPr eaLnBrk="0" latinLnBrk="0" marL="342900" indent="-342900">
+            <a:endParaRPr lang="en-US" sz="950" dirty="0"/>
+          </a:p>
+          <a:p>
+            <a:pPr eaLnBrk="0" latinLnBrk="0" marL="127000" indent="-127000">
               <a:spcAft>
                 <a:spcPts val="500"/>
               </a:spcAft>
@@ -11395,7 +11416,7 @@
               <a:buChar char="•"/>
             </a:pPr>
             <a:r>
-              <a:rPr lang="en-US" sz="1000" dirty="0">
+              <a:rPr lang="en-US" sz="950" dirty="0">
                 <a:solidFill>
                   <a:srgbClr val="22263A"/>
                 </a:solidFill>
@@ -11405,10 +11426,10 @@
               </a:rPr>
               <a:t>결격사유 조회</a:t>
             </a:r>
-            <a:endParaRPr lang="en-US" sz="1000" dirty="0"/>
-          </a:p>
-          <a:p>
-            <a:pPr eaLnBrk="0" latinLnBrk="0" marL="342900" indent="-342900">
+            <a:endParaRPr lang="en-US" sz="950" dirty="0"/>
+          </a:p>
+          <a:p>
+            <a:pPr eaLnBrk="0" latinLnBrk="0" marL="127000" indent="-127000">
               <a:spcAft>
                 <a:spcPts val="500"/>
               </a:spcAft>
@@ -11416,7 +11437,7 @@
               <a:buChar char="•"/>
             </a:pPr>
             <a:r>
-              <a:rPr lang="en-US" sz="1000" dirty="0">
+              <a:rPr lang="en-US" sz="950" dirty="0">
                 <a:solidFill>
                   <a:srgbClr val="22263A"/>
                 </a:solidFill>
@@ -11426,7 +11447,7 @@
               </a:rPr>
               <a:t>성범죄 조회</a:t>
             </a:r>
-            <a:endParaRPr lang="en-US" sz="1000" dirty="0"/>
+            <a:endParaRPr lang="en-US" sz="950" dirty="0"/>
           </a:p>
         </p:txBody>
       </p:sp>

--- a/docs/2027년_사무직원_채용계획안.pptx
+++ b/docs/2027년_사무직원_채용계획안.pptx
@@ -12331,18 +12331,57 @@
       </p:sp>
       <p:sp>
         <p:nvSpPr>
-          <p:cNvPr id="14" name="Shape 11"/>
+          <p:cNvPr id="14" name="Text 11"/>
+          <p:cNvSpPr txBox="1"/>
+          <p:nvPr/>
+        </p:nvSpPr>
+        <p:spPr>
+          <a:xfrm>
+            <a:off x="457200" y="1664208"/>
+            <a:ext cx="3840480" cy="292608"/>
+          </a:xfrm>
+          <a:prstGeom prst="rect">
+            <a:avLst/>
+          </a:prstGeom>
+          <a:noFill/>
+          <a:ln/>
+        </p:spPr>
+        <p:txBody>
+          <a:bodyPr wrap="square" lIns="0" tIns="0" rIns="0" bIns="0" rtlCol="0" anchor="ctr"/>
+          <a:lstStyle/>
+          <a:p>
+            <a:pPr eaLnBrk="0" latinLnBrk="0" indent="0" marL="0">
+              <a:buNone/>
+            </a:pPr>
+            <a:r>
+              <a:rPr lang="en-US" sz="1500" b="1" dirty="0">
+                <a:solidFill>
+                  <a:srgbClr val="1E2761"/>
+                </a:solidFill>
+                <a:latin typeface="맑은 고딕" pitchFamily="34" charset="0"/>
+                <a:ea typeface="맑은 고딕" pitchFamily="34" charset="-122"/>
+                <a:cs typeface="맑은 고딕" pitchFamily="34" charset="-120"/>
+              </a:rPr>
+              <a:t>지원 자격</a:t>
+            </a:r>
+            <a:endParaRPr lang="en-US" sz="1500" dirty="0"/>
+          </a:p>
+        </p:txBody>
+      </p:sp>
+      <p:sp>
+        <p:nvSpPr>
+          <p:cNvPr id="15" name="Shape 12"/>
           <p:cNvSpPr/>
           <p:nvPr/>
         </p:nvSpPr>
         <p:spPr>
           <a:xfrm>
-            <a:off x="457200" y="1691640"/>
-            <a:ext cx="3840480" cy="2377440"/>
+            <a:off x="457200" y="2011680"/>
+            <a:ext cx="3840480" cy="1874520"/>
           </a:xfrm>
           <a:prstGeom prst="roundRect">
             <a:avLst>
-              <a:gd name="adj" fmla="val 2308"/>
+              <a:gd name="adj" fmla="val 2927"/>
             </a:avLst>
           </a:prstGeom>
           <a:solidFill>
@@ -12365,52 +12404,13 @@
       </p:sp>
       <p:sp>
         <p:nvSpPr>
-          <p:cNvPr id="15" name="Text 12"/>
-          <p:cNvSpPr txBox="1"/>
-          <p:nvPr/>
-        </p:nvSpPr>
-        <p:spPr>
-          <a:xfrm>
-            <a:off x="731520" y="1883664"/>
-            <a:ext cx="3291840" cy="292608"/>
-          </a:xfrm>
-          <a:prstGeom prst="rect">
-            <a:avLst/>
-          </a:prstGeom>
-          <a:noFill/>
-          <a:ln/>
-        </p:spPr>
-        <p:txBody>
-          <a:bodyPr wrap="square" lIns="0" tIns="0" rIns="0" bIns="0" rtlCol="0" anchor="ctr"/>
-          <a:lstStyle/>
-          <a:p>
-            <a:pPr eaLnBrk="0" latinLnBrk="0" indent="0" marL="0">
-              <a:buNone/>
-            </a:pPr>
-            <a:r>
-              <a:rPr lang="en-US" sz="1600" b="1" dirty="0">
-                <a:solidFill>
-                  <a:srgbClr val="1E2761"/>
-                </a:solidFill>
-                <a:latin typeface="맑은 고딕" pitchFamily="34" charset="0"/>
-                <a:ea typeface="맑은 고딕" pitchFamily="34" charset="-122"/>
-                <a:cs typeface="맑은 고딕" pitchFamily="34" charset="-120"/>
-              </a:rPr>
-              <a:t>지원 자격</a:t>
-            </a:r>
-            <a:endParaRPr lang="en-US" sz="1600" dirty="0"/>
-          </a:p>
-        </p:txBody>
-      </p:sp>
-      <p:sp>
-        <p:nvSpPr>
           <p:cNvPr id="16" name="Shape 13"/>
           <p:cNvSpPr/>
           <p:nvPr/>
         </p:nvSpPr>
         <p:spPr>
           <a:xfrm>
-            <a:off x="749808" y="2377440"/>
+            <a:off x="731520" y="2304288"/>
             <a:ext cx="82296" cy="82296"/>
           </a:xfrm>
           <a:prstGeom prst="ellipse">
@@ -12430,8 +12430,8 @@
         </p:nvSpPr>
         <p:spPr>
           <a:xfrm>
-            <a:off x="950976" y="2286000"/>
-            <a:ext cx="3054096" cy="731520"/>
+            <a:off x="932688" y="2212848"/>
+            <a:ext cx="3072384" cy="731520"/>
           </a:xfrm>
           <a:prstGeom prst="rect">
             <a:avLst/>
@@ -12472,7 +12472,7 @@
         </p:nvSpPr>
         <p:spPr>
           <a:xfrm>
-            <a:off x="749808" y="3163824"/>
+            <a:off x="731520" y="3090672"/>
             <a:ext cx="82296" cy="82296"/>
           </a:xfrm>
           <a:prstGeom prst="ellipse">
@@ -12492,8 +12492,8 @@
         </p:nvSpPr>
         <p:spPr>
           <a:xfrm>
-            <a:off x="950976" y="3072384"/>
-            <a:ext cx="3054096" cy="731520"/>
+            <a:off x="932688" y="2999232"/>
+            <a:ext cx="3072384" cy="731520"/>
           </a:xfrm>
           <a:prstGeom prst="rect">
             <a:avLst/>
@@ -12534,7 +12534,7 @@
         </p:nvSpPr>
         <p:spPr>
           <a:xfrm>
-            <a:off x="457200" y="4224528"/>
+            <a:off x="457200" y="4069080"/>
             <a:ext cx="3840480" cy="960120"/>
           </a:xfrm>
           <a:prstGeom prst="roundRect">
@@ -12568,7 +12568,7 @@
         </p:nvSpPr>
         <p:spPr>
           <a:xfrm>
-            <a:off x="731520" y="4370832"/>
+            <a:off x="731520" y="4206240"/>
             <a:ext cx="3291840" cy="274320"/>
           </a:xfrm>
           <a:prstGeom prst="rect">
@@ -12607,7 +12607,7 @@
         </p:nvSpPr>
         <p:spPr>
           <a:xfrm>
-            <a:off x="731520" y="4681728"/>
+            <a:off x="731520" y="4517136"/>
             <a:ext cx="3291840" cy="274320"/>
           </a:xfrm>
           <a:prstGeom prst="rect">
@@ -12646,8 +12646,8 @@
         </p:nvSpPr>
         <p:spPr>
           <a:xfrm>
-            <a:off x="4572000" y="1691640"/>
-            <a:ext cx="4114800" cy="310896"/>
+            <a:off x="4572000" y="1664208"/>
+            <a:ext cx="4114800" cy="292608"/>
           </a:xfrm>
           <a:prstGeom prst="rect">
             <a:avLst/>
@@ -12663,7 +12663,7 @@
               <a:buNone/>
             </a:pPr>
             <a:r>
-              <a:rPr lang="en-US" sz="1600" b="1" dirty="0">
+              <a:rPr lang="en-US" sz="1500" b="1" dirty="0">
                 <a:solidFill>
                   <a:srgbClr val="1E2761"/>
                 </a:solidFill>
@@ -12673,7 +12673,7 @@
               </a:rPr>
               <a:t>자기소개서 문항 (800자 이내)</a:t>
             </a:r>
-            <a:endParaRPr lang="en-US" sz="1600" dirty="0"/>
+            <a:endParaRPr lang="en-US" sz="1500" dirty="0"/>
           </a:p>
         </p:txBody>
       </p:sp>
@@ -12685,12 +12685,12 @@
         </p:nvSpPr>
         <p:spPr>
           <a:xfrm>
-            <a:off x="4572000" y="2121408"/>
-            <a:ext cx="4114800" cy="749808"/>
+            <a:off x="4572000" y="2011680"/>
+            <a:ext cx="4114800" cy="685800"/>
           </a:xfrm>
           <a:prstGeom prst="roundRect">
             <a:avLst>
-              <a:gd name="adj" fmla="val 7317"/>
+              <a:gd name="adj" fmla="val 8000"/>
             </a:avLst>
           </a:prstGeom>
           <a:solidFill>
@@ -12719,8 +12719,8 @@
         </p:nvSpPr>
         <p:spPr>
           <a:xfrm>
-            <a:off x="4754880" y="2313432"/>
-            <a:ext cx="365760" cy="365760"/>
+            <a:off x="4736592" y="2180844"/>
+            <a:ext cx="347472" cy="347472"/>
           </a:xfrm>
           <a:prstGeom prst="ellipse">
             <a:avLst/>
@@ -12739,8 +12739,8 @@
         </p:nvSpPr>
         <p:spPr>
           <a:xfrm>
-            <a:off x="4754880" y="2313432"/>
-            <a:ext cx="365760" cy="365760"/>
+            <a:off x="4736592" y="2180844"/>
+            <a:ext cx="347472" cy="347472"/>
           </a:xfrm>
           <a:prstGeom prst="rect">
             <a:avLst/>
@@ -12778,8 +12778,8 @@
         </p:nvSpPr>
         <p:spPr>
           <a:xfrm>
-            <a:off x="5230368" y="2157984"/>
-            <a:ext cx="3255264" cy="676656"/>
+            <a:off x="5175504" y="2039112"/>
+            <a:ext cx="3328416" cy="630936"/>
           </a:xfrm>
           <a:prstGeom prst="rect">
             <a:avLst/>
@@ -12793,12 +12793,12 @@
           <a:p>
             <a:pPr eaLnBrk="0" latinLnBrk="0" indent="0" marL="0">
               <a:lnSpc>
-                <a:spcPts val="1800"/>
+                <a:spcPts val="1700"/>
               </a:lnSpc>
               <a:buNone/>
             </a:pPr>
             <a:r>
-              <a:rPr lang="en-US" sz="1150" dirty="0">
+              <a:rPr lang="en-US" sz="1100" dirty="0">
                 <a:solidFill>
                   <a:srgbClr val="22263A"/>
                 </a:solidFill>
@@ -12808,7 +12808,7 @@
               </a:rPr>
               <a:t>성장배경, 본인 성격의 장·단점</a:t>
             </a:r>
-            <a:endParaRPr lang="en-US" sz="1150" dirty="0"/>
+            <a:endParaRPr lang="en-US" sz="1100" dirty="0"/>
           </a:p>
         </p:txBody>
       </p:sp>
@@ -12820,12 +12820,12 @@
         </p:nvSpPr>
         <p:spPr>
           <a:xfrm>
-            <a:off x="4572000" y="2980944"/>
-            <a:ext cx="4114800" cy="749808"/>
+            <a:off x="4572000" y="2788920"/>
+            <a:ext cx="4114800" cy="685800"/>
           </a:xfrm>
           <a:prstGeom prst="roundRect">
             <a:avLst>
-              <a:gd name="adj" fmla="val 7317"/>
+              <a:gd name="adj" fmla="val 8000"/>
             </a:avLst>
           </a:prstGeom>
           <a:solidFill>
@@ -12854,8 +12854,8 @@
         </p:nvSpPr>
         <p:spPr>
           <a:xfrm>
-            <a:off x="4754880" y="3172968"/>
-            <a:ext cx="365760" cy="365760"/>
+            <a:off x="4736592" y="2958084"/>
+            <a:ext cx="347472" cy="347472"/>
           </a:xfrm>
           <a:prstGeom prst="ellipse">
             <a:avLst/>
@@ -12874,8 +12874,8 @@
         </p:nvSpPr>
         <p:spPr>
           <a:xfrm>
-            <a:off x="4754880" y="3172968"/>
-            <a:ext cx="365760" cy="365760"/>
+            <a:off x="4736592" y="2958084"/>
+            <a:ext cx="347472" cy="347472"/>
           </a:xfrm>
           <a:prstGeom prst="rect">
             <a:avLst/>
@@ -12913,8 +12913,8 @@
         </p:nvSpPr>
         <p:spPr>
           <a:xfrm>
-            <a:off x="5230368" y="3017520"/>
-            <a:ext cx="3255264" cy="676656"/>
+            <a:off x="5175504" y="2816352"/>
+            <a:ext cx="3328416" cy="630936"/>
           </a:xfrm>
           <a:prstGeom prst="rect">
             <a:avLst/>
@@ -12928,12 +12928,12 @@
           <a:p>
             <a:pPr eaLnBrk="0" latinLnBrk="0" indent="0" marL="0">
               <a:lnSpc>
-                <a:spcPts val="1800"/>
+                <a:spcPts val="1700"/>
               </a:lnSpc>
               <a:buNone/>
             </a:pPr>
             <a:r>
-              <a:rPr lang="en-US" sz="1150" dirty="0">
+              <a:rPr lang="en-US" sz="1100" dirty="0">
                 <a:solidFill>
                   <a:srgbClr val="22263A"/>
                 </a:solidFill>
@@ -12943,7 +12943,7 @@
               </a:rPr>
               <a:t>지원동기 (본교에 지원하게 된 이유와 응시 직종에 본인이 적합하다고 판단되는 이유)</a:t>
             </a:r>
-            <a:endParaRPr lang="en-US" sz="1150" dirty="0"/>
+            <a:endParaRPr lang="en-US" sz="1100" dirty="0"/>
           </a:p>
         </p:txBody>
       </p:sp>
@@ -12955,12 +12955,12 @@
         </p:nvSpPr>
         <p:spPr>
           <a:xfrm>
-            <a:off x="4572000" y="3840480"/>
-            <a:ext cx="4114800" cy="749808"/>
+            <a:off x="4572000" y="3566160"/>
+            <a:ext cx="4114800" cy="685800"/>
           </a:xfrm>
           <a:prstGeom prst="roundRect">
             <a:avLst>
-              <a:gd name="adj" fmla="val 7317"/>
+              <a:gd name="adj" fmla="val 8000"/>
             </a:avLst>
           </a:prstGeom>
           <a:solidFill>
@@ -12989,8 +12989,8 @@
         </p:nvSpPr>
         <p:spPr>
           <a:xfrm>
-            <a:off x="4754880" y="4032504"/>
-            <a:ext cx="365760" cy="365760"/>
+            <a:off x="4736592" y="3735324"/>
+            <a:ext cx="347472" cy="347472"/>
           </a:xfrm>
           <a:prstGeom prst="ellipse">
             <a:avLst/>
@@ -13009,8 +13009,8 @@
         </p:nvSpPr>
         <p:spPr>
           <a:xfrm>
-            <a:off x="4754880" y="4032504"/>
-            <a:ext cx="365760" cy="365760"/>
+            <a:off x="4736592" y="3735324"/>
+            <a:ext cx="347472" cy="347472"/>
           </a:xfrm>
           <a:prstGeom prst="rect">
             <a:avLst/>
@@ -13048,8 +13048,8 @@
         </p:nvSpPr>
         <p:spPr>
           <a:xfrm>
-            <a:off x="5230368" y="3877056"/>
-            <a:ext cx="3255264" cy="676656"/>
+            <a:off x="5175504" y="3593592"/>
+            <a:ext cx="3328416" cy="630936"/>
           </a:xfrm>
           <a:prstGeom prst="rect">
             <a:avLst/>
@@ -13063,12 +13063,12 @@
           <a:p>
             <a:pPr eaLnBrk="0" latinLnBrk="0" indent="0" marL="0">
               <a:lnSpc>
-                <a:spcPts val="1800"/>
+                <a:spcPts val="1700"/>
               </a:lnSpc>
               <a:buNone/>
             </a:pPr>
             <a:r>
-              <a:rPr lang="en-US" sz="1150" dirty="0">
+              <a:rPr lang="en-US" sz="1100" dirty="0">
                 <a:solidFill>
                   <a:srgbClr val="22263A"/>
                 </a:solidFill>
@@ -13078,7 +13078,7 @@
               </a:rPr>
               <a:t>입사 후 포부 및 직무 수행 계획</a:t>
             </a:r>
-            <a:endParaRPr lang="en-US" sz="1150" dirty="0"/>
+            <a:endParaRPr lang="en-US" sz="1100" dirty="0"/>
           </a:p>
         </p:txBody>
       </p:sp>
@@ -13090,12 +13090,12 @@
         </p:nvSpPr>
         <p:spPr>
           <a:xfrm>
-            <a:off x="4572000" y="4700016"/>
-            <a:ext cx="4114800" cy="749808"/>
+            <a:off x="4572000" y="4343400"/>
+            <a:ext cx="4114800" cy="685800"/>
           </a:xfrm>
           <a:prstGeom prst="roundRect">
             <a:avLst>
-              <a:gd name="adj" fmla="val 7317"/>
+              <a:gd name="adj" fmla="val 8000"/>
             </a:avLst>
           </a:prstGeom>
           <a:solidFill>
@@ -13124,8 +13124,8 @@
         </p:nvSpPr>
         <p:spPr>
           <a:xfrm>
-            <a:off x="4754880" y="4892040"/>
-            <a:ext cx="365760" cy="365760"/>
+            <a:off x="4736592" y="4512564"/>
+            <a:ext cx="347472" cy="347472"/>
           </a:xfrm>
           <a:prstGeom prst="ellipse">
             <a:avLst/>
@@ -13144,8 +13144,8 @@
         </p:nvSpPr>
         <p:spPr>
           <a:xfrm>
-            <a:off x="4754880" y="4892040"/>
-            <a:ext cx="365760" cy="365760"/>
+            <a:off x="4736592" y="4512564"/>
+            <a:ext cx="347472" cy="347472"/>
           </a:xfrm>
           <a:prstGeom prst="rect">
             <a:avLst/>
@@ -13183,8 +13183,8 @@
         </p:nvSpPr>
         <p:spPr>
           <a:xfrm>
-            <a:off x="5230368" y="4736592"/>
-            <a:ext cx="3255264" cy="676656"/>
+            <a:off x="5175504" y="4370832"/>
+            <a:ext cx="3328416" cy="630936"/>
           </a:xfrm>
           <a:prstGeom prst="rect">
             <a:avLst/>
@@ -13198,12 +13198,12 @@
           <a:p>
             <a:pPr eaLnBrk="0" latinLnBrk="0" indent="0" marL="0">
               <a:lnSpc>
-                <a:spcPts val="1800"/>
+                <a:spcPts val="1700"/>
               </a:lnSpc>
               <a:buNone/>
             </a:pPr>
             <a:r>
-              <a:rPr lang="en-US" sz="1150" dirty="0">
+              <a:rPr lang="en-US" sz="1100" dirty="0">
                 <a:solidFill>
                   <a:srgbClr val="22263A"/>
                 </a:solidFill>
@@ -13213,7 +13213,7 @@
               </a:rPr>
               <a:t>조직 내 갈등 상황과 이를 해결하기 위한 노력 및 극복했던 경험</a:t>
             </a:r>
-            <a:endParaRPr lang="en-US" sz="1150" dirty="0"/>
+            <a:endParaRPr lang="en-US" sz="1100" dirty="0"/>
           </a:p>
         </p:txBody>
       </p:sp>
@@ -13642,7 +13642,7 @@
         </p:nvSpPr>
         <p:spPr>
           <a:xfrm>
-            <a:off x="457200" y="1700784"/>
+            <a:off x="457200" y="1664208"/>
             <a:ext cx="4937760" cy="256032"/>
           </a:xfrm>
           <a:prstGeom prst="rect">
@@ -13695,7 +13695,7 @@
         </p:nvSpPr>
         <p:spPr>
           <a:xfrm>
-            <a:off x="457200" y="1975104"/>
+            <a:off x="457200" y="1938528"/>
             <a:ext cx="4937760" cy="256032"/>
           </a:xfrm>
           <a:prstGeom prst="rect">
@@ -13755,7 +13755,7 @@
           </p:nvPr>
         </p:nvGraphicFramePr>
         <p:xfrm>
-          <a:off x="457200" y="2340864"/>
+          <a:off x="457200" y="2286000"/>
           <a:ext cx="4572000" cy="914400"/>
         </p:xfrm>
         <a:graphic>
@@ -13767,7 +13767,7 @@
                 <a:gridCol w="1143000"/>
                 <a:gridCol w="1143000"/>
               </a:tblGrid>
-              <a:tr h="329184">
+              <a:tr h="365760">
                 <a:tc>
                   <a:txBody>
                     <a:bodyPr/>
@@ -13973,7 +13973,7 @@
                   </a:tcPr>
                 </a:tc>
               </a:tr>
-              <a:tr h="347472">
+              <a:tr h="384048">
                 <a:tc>
                   <a:txBody>
                     <a:bodyPr/>
@@ -14194,7 +14194,7 @@
                   </a:tcPr>
                 </a:tc>
               </a:tr>
-              <a:tr h="347472">
+              <a:tr h="384048">
                 <a:tc>
                   <a:txBody>
                     <a:bodyPr/>
@@ -14329,7 +14329,7 @@
                   <a:tcPr/>
                 </a:tc>
               </a:tr>
-              <a:tr h="347472">
+              <a:tr h="384048">
                 <a:tc>
                   <a:txBody>
                     <a:bodyPr/>
@@ -14464,7 +14464,7 @@
                   <a:tcPr/>
                 </a:tc>
               </a:tr>
-              <a:tr h="347472">
+              <a:tr h="384048">
                 <a:tc>
                   <a:txBody>
                     <a:bodyPr/>
@@ -14599,7 +14599,7 @@
                   <a:tcPr/>
                 </a:tc>
               </a:tr>
-              <a:tr h="384048">
+              <a:tr h="420624">
                 <a:tc>
                   <a:txBody>
                     <a:bodyPr/>
@@ -14752,12 +14752,12 @@
         </p:nvSpPr>
         <p:spPr>
           <a:xfrm>
-            <a:off x="5303520" y="1700784"/>
-            <a:ext cx="3383280" cy="3017520"/>
+            <a:off x="5303520" y="2286000"/>
+            <a:ext cx="3383280" cy="2322576"/>
           </a:xfrm>
           <a:prstGeom prst="roundRect">
             <a:avLst>
-              <a:gd name="adj" fmla="val 1818"/>
+              <a:gd name="adj" fmla="val 2362"/>
             </a:avLst>
           </a:prstGeom>
           <a:solidFill>
@@ -14786,8 +14786,8 @@
         </p:nvSpPr>
         <p:spPr>
           <a:xfrm>
-            <a:off x="5541264" y="1920240"/>
-            <a:ext cx="2907792" cy="603504"/>
+            <a:off x="5541264" y="2432304"/>
+            <a:ext cx="2907792" cy="566928"/>
           </a:xfrm>
           <a:prstGeom prst="rect">
             <a:avLst/>
@@ -14801,12 +14801,12 @@
           <a:p>
             <a:pPr eaLnBrk="0" latinLnBrk="0" indent="0" marL="0">
               <a:lnSpc>
-                <a:spcPts val="2200"/>
+                <a:spcPts val="2100"/>
               </a:lnSpc>
               <a:buNone/>
             </a:pPr>
             <a:r>
-              <a:rPr lang="en-US" sz="1450" b="1" dirty="0">
+              <a:rPr lang="en-US" sz="1350" b="1" dirty="0">
                 <a:solidFill>
                   <a:srgbClr val="B23A34"/>
                 </a:solidFill>
@@ -14816,17 +14816,17 @@
               </a:rPr>
               <a:t>자기소개서 불성실 작성자</a:t>
             </a:r>
-            <a:endParaRPr lang="en-US" sz="1450" dirty="0"/>
+            <a:endParaRPr lang="en-US" sz="1350" dirty="0"/>
           </a:p>
           <a:p>
             <a:pPr eaLnBrk="0" latinLnBrk="0" indent="0" marL="0">
               <a:lnSpc>
-                <a:spcPts val="2200"/>
+                <a:spcPts val="2100"/>
               </a:lnSpc>
               <a:buNone/>
             </a:pPr>
             <a:r>
-              <a:rPr lang="en-US" sz="1450" b="1" dirty="0">
+              <a:rPr lang="en-US" sz="1350" b="1" dirty="0">
                 <a:solidFill>
                   <a:srgbClr val="B23A34"/>
                 </a:solidFill>
@@ -14836,7 +14836,7 @@
               </a:rPr>
               <a:t>탈락 기준</a:t>
             </a:r>
-            <a:endParaRPr lang="en-US" sz="1450" dirty="0"/>
+            <a:endParaRPr lang="en-US" sz="1350" dirty="0"/>
           </a:p>
         </p:txBody>
       </p:sp>
@@ -14848,8 +14848,8 @@
         </p:nvSpPr>
         <p:spPr>
           <a:xfrm>
-            <a:off x="5559552" y="2779776"/>
-            <a:ext cx="82296" cy="82296"/>
+            <a:off x="5541264" y="3209544"/>
+            <a:ext cx="73152" cy="73152"/>
           </a:xfrm>
           <a:prstGeom prst="ellipse">
             <a:avLst/>
@@ -14868,8 +14868,8 @@
         </p:nvSpPr>
         <p:spPr>
           <a:xfrm>
-            <a:off x="5760720" y="2688336"/>
-            <a:ext cx="2670048" cy="566928"/>
+            <a:off x="5724144" y="3127248"/>
+            <a:ext cx="2724912" cy="420624"/>
           </a:xfrm>
           <a:prstGeom prst="rect">
             <a:avLst/>
@@ -14883,12 +14883,12 @@
           <a:p>
             <a:pPr eaLnBrk="0" latinLnBrk="0" indent="0" marL="0">
               <a:lnSpc>
-                <a:spcPts val="1800"/>
+                <a:spcPts val="1600"/>
               </a:lnSpc>
               <a:buNone/>
             </a:pPr>
             <a:r>
-              <a:rPr lang="en-US" sz="1100" dirty="0">
+              <a:rPr lang="en-US" sz="1050" dirty="0">
                 <a:solidFill>
                   <a:srgbClr val="22263A"/>
                 </a:solidFill>
@@ -14898,7 +14898,7 @@
               </a:rPr>
               <a:t>문항과 전혀 무관한 내용을 작성</a:t>
             </a:r>
-            <a:endParaRPr lang="en-US" sz="1100" dirty="0"/>
+            <a:endParaRPr lang="en-US" sz="1050" dirty="0"/>
           </a:p>
         </p:txBody>
       </p:sp>
@@ -14910,8 +14910,8 @@
         </p:nvSpPr>
         <p:spPr>
           <a:xfrm>
-            <a:off x="5559552" y="3401568"/>
-            <a:ext cx="82296" cy="82296"/>
+            <a:off x="5541264" y="3666744"/>
+            <a:ext cx="73152" cy="73152"/>
           </a:xfrm>
           <a:prstGeom prst="ellipse">
             <a:avLst/>
@@ -14930,8 +14930,8 @@
         </p:nvSpPr>
         <p:spPr>
           <a:xfrm>
-            <a:off x="5760720" y="3310128"/>
-            <a:ext cx="2670048" cy="566928"/>
+            <a:off x="5724144" y="3584448"/>
+            <a:ext cx="2724912" cy="420624"/>
           </a:xfrm>
           <a:prstGeom prst="rect">
             <a:avLst/>
@@ -14945,12 +14945,12 @@
           <a:p>
             <a:pPr eaLnBrk="0" latinLnBrk="0" indent="0" marL="0">
               <a:lnSpc>
-                <a:spcPts val="1800"/>
+                <a:spcPts val="1600"/>
               </a:lnSpc>
               <a:buNone/>
             </a:pPr>
             <a:r>
-              <a:rPr lang="en-US" sz="1100" dirty="0">
+              <a:rPr lang="en-US" sz="1050" dirty="0">
                 <a:solidFill>
                   <a:srgbClr val="22263A"/>
                 </a:solidFill>
@@ -14960,7 +14960,7 @@
               </a:rPr>
               <a:t>동일 내용 반복 또는 문항별 50% 미만(약 400자) 작성한 경우</a:t>
             </a:r>
-            <a:endParaRPr lang="en-US" sz="1100" dirty="0"/>
+            <a:endParaRPr lang="en-US" sz="1050" dirty="0"/>
           </a:p>
         </p:txBody>
       </p:sp>
@@ -14972,8 +14972,8 @@
         </p:nvSpPr>
         <p:spPr>
           <a:xfrm>
-            <a:off x="5559552" y="4023360"/>
-            <a:ext cx="82296" cy="82296"/>
+            <a:off x="5541264" y="4123944"/>
+            <a:ext cx="73152" cy="73152"/>
           </a:xfrm>
           <a:prstGeom prst="ellipse">
             <a:avLst/>
@@ -14992,8 +14992,8 @@
         </p:nvSpPr>
         <p:spPr>
           <a:xfrm>
-            <a:off x="5760720" y="3931920"/>
-            <a:ext cx="2670048" cy="566928"/>
+            <a:off x="5724144" y="4041648"/>
+            <a:ext cx="2724912" cy="420624"/>
           </a:xfrm>
           <a:prstGeom prst="rect">
             <a:avLst/>
@@ -15007,12 +15007,12 @@
           <a:p>
             <a:pPr eaLnBrk="0" latinLnBrk="0" indent="0" marL="0">
               <a:lnSpc>
-                <a:spcPts val="1800"/>
+                <a:spcPts val="1600"/>
               </a:lnSpc>
               <a:buNone/>
             </a:pPr>
             <a:r>
-              <a:rPr lang="en-US" sz="1100" dirty="0">
+              <a:rPr lang="en-US" sz="1050" dirty="0">
                 <a:solidFill>
                   <a:srgbClr val="22263A"/>
                 </a:solidFill>
@@ -15022,7 +15022,7 @@
               </a:rPr>
               <a:t>채용 기관명을 오기재하여 제출한 경우 등</a:t>
             </a:r>
-            <a:endParaRPr lang="en-US" sz="1100" dirty="0"/>
+            <a:endParaRPr lang="en-US" sz="1050" dirty="0"/>
           </a:p>
         </p:txBody>
       </p:sp>
@@ -15524,7 +15524,7 @@
         </p:nvSpPr>
         <p:spPr>
           <a:xfrm>
-            <a:off x="457200" y="1700784"/>
+            <a:off x="457200" y="1664208"/>
             <a:ext cx="4937760" cy="256032"/>
           </a:xfrm>
           <a:prstGeom prst="rect">
@@ -15577,7 +15577,7 @@
         </p:nvSpPr>
         <p:spPr>
           <a:xfrm>
-            <a:off x="457200" y="1975104"/>
+            <a:off x="457200" y="1938528"/>
             <a:ext cx="4937760" cy="256032"/>
           </a:xfrm>
           <a:prstGeom prst="rect">
@@ -15637,7 +15637,7 @@
           </p:nvPr>
         </p:nvGraphicFramePr>
         <p:xfrm>
-          <a:off x="457200" y="2340864"/>
+          <a:off x="457200" y="2286000"/>
           <a:ext cx="4572000" cy="914400"/>
         </p:xfrm>
         <a:graphic>
@@ -15649,7 +15649,7 @@
                 <a:gridCol w="1143000"/>
                 <a:gridCol w="1143000"/>
               </a:tblGrid>
-              <a:tr h="329184">
+              <a:tr h="365760">
                 <a:tc>
                   <a:txBody>
                     <a:bodyPr/>
@@ -15855,7 +15855,7 @@
                   </a:tcPr>
                 </a:tc>
               </a:tr>
-              <a:tr h="347472">
+              <a:tr h="384048">
                 <a:tc>
                   <a:txBody>
                     <a:bodyPr/>
@@ -16076,7 +16076,7 @@
                   </a:tcPr>
                 </a:tc>
               </a:tr>
-              <a:tr h="347472">
+              <a:tr h="384048">
                 <a:tc>
                   <a:txBody>
                     <a:bodyPr/>
@@ -16211,7 +16211,7 @@
                   <a:tcPr/>
                 </a:tc>
               </a:tr>
-              <a:tr h="347472">
+              <a:tr h="384048">
                 <a:tc>
                   <a:txBody>
                     <a:bodyPr/>
@@ -16346,7 +16346,7 @@
                   <a:tcPr/>
                 </a:tc>
               </a:tr>
-              <a:tr h="347472">
+              <a:tr h="384048">
                 <a:tc>
                   <a:txBody>
                     <a:bodyPr/>
@@ -16481,7 +16481,7 @@
                   <a:tcPr/>
                 </a:tc>
               </a:tr>
-              <a:tr h="384048">
+              <a:tr h="420624">
                 <a:tc>
                   <a:txBody>
                     <a:bodyPr/>
@@ -16634,12 +16634,12 @@
         </p:nvSpPr>
         <p:spPr>
           <a:xfrm>
-            <a:off x="5303520" y="1700784"/>
-            <a:ext cx="3383280" cy="3877056"/>
+            <a:off x="5303520" y="2286000"/>
+            <a:ext cx="3383280" cy="3200400"/>
           </a:xfrm>
           <a:prstGeom prst="roundRect">
             <a:avLst>
-              <a:gd name="adj" fmla="val 1622"/>
+              <a:gd name="adj" fmla="val 1714"/>
             </a:avLst>
           </a:prstGeom>
           <a:solidFill>
@@ -16668,7 +16668,7 @@
         </p:nvSpPr>
         <p:spPr>
           <a:xfrm>
-            <a:off x="5541264" y="1901952"/>
+            <a:off x="5541264" y="2468880"/>
             <a:ext cx="2907792" cy="292608"/>
           </a:xfrm>
           <a:prstGeom prst="rect">
@@ -16706,8 +16706,8 @@
           <p:nvPr/>
         </p:nvGraphicFramePr>
         <p:xfrm>
-          <a:off x="5760720" y="2231136"/>
-          <a:ext cx="2468880" cy="1691640"/>
+          <a:off x="5760720" y="2761488"/>
+          <a:ext cx="2468880" cy="1371600"/>
         </p:xfrm>
         <a:graphic xmlns:a="http://schemas.openxmlformats.org/drawingml/2006/main">
           <a:graphicData uri="http://schemas.openxmlformats.org/drawingml/2006/chart">
@@ -16723,7 +16723,7 @@
         </p:nvSpPr>
         <p:spPr>
           <a:xfrm>
-            <a:off x="5669280" y="4114800"/>
+            <a:off x="5669280" y="4279392"/>
             <a:ext cx="164592" cy="164592"/>
           </a:xfrm>
           <a:prstGeom prst="roundRect">
@@ -16745,7 +16745,7 @@
         </p:nvSpPr>
         <p:spPr>
           <a:xfrm>
-            <a:off x="5943600" y="4041648"/>
+            <a:off x="5943600" y="4206240"/>
             <a:ext cx="1554480" cy="310896"/>
           </a:xfrm>
           <a:prstGeom prst="rect">
@@ -16784,7 +16784,7 @@
         </p:nvSpPr>
         <p:spPr>
           <a:xfrm>
-            <a:off x="7132320" y="4041648"/>
+            <a:off x="7132320" y="4206240"/>
             <a:ext cx="914400" cy="310896"/>
           </a:xfrm>
           <a:prstGeom prst="rect">
@@ -16823,7 +16823,7 @@
         </p:nvSpPr>
         <p:spPr>
           <a:xfrm>
-            <a:off x="5669280" y="4462272"/>
+            <a:off x="5669280" y="4590288"/>
             <a:ext cx="164592" cy="164592"/>
           </a:xfrm>
           <a:prstGeom prst="roundRect">
@@ -16845,7 +16845,7 @@
         </p:nvSpPr>
         <p:spPr>
           <a:xfrm>
-            <a:off x="5943600" y="4389120"/>
+            <a:off x="5943600" y="4517136"/>
             <a:ext cx="1554480" cy="310896"/>
           </a:xfrm>
           <a:prstGeom prst="rect">
@@ -16884,7 +16884,7 @@
         </p:nvSpPr>
         <p:spPr>
           <a:xfrm>
-            <a:off x="7132320" y="4389120"/>
+            <a:off x="7132320" y="4517136"/>
             <a:ext cx="914400" cy="310896"/>
           </a:xfrm>
           <a:prstGeom prst="rect">
@@ -16923,8 +16923,8 @@
         </p:nvSpPr>
         <p:spPr>
           <a:xfrm>
-            <a:off x="5541264" y="4828032"/>
-            <a:ext cx="2907792" cy="310896"/>
+            <a:off x="5541264" y="4846320"/>
+            <a:ext cx="2907792" cy="292608"/>
           </a:xfrm>
           <a:prstGeom prst="rect">
             <a:avLst/>
@@ -16940,7 +16940,7 @@
               <a:buNone/>
             </a:pPr>
             <a:r>
-              <a:rPr lang="en-US" sz="1300" b="1" dirty="0">
+              <a:rPr lang="en-US" sz="1250" b="1" dirty="0">
                 <a:solidFill>
                   <a:srgbClr val="1E2761"/>
                 </a:solidFill>
@@ -16950,7 +16950,7 @@
               </a:rPr>
               <a:t>1·2차 전형결과 합산 총 100점</a:t>
             </a:r>
-            <a:endParaRPr lang="en-US" sz="1300" dirty="0"/>
+            <a:endParaRPr lang="en-US" sz="1250" dirty="0"/>
           </a:p>
         </p:txBody>
       </p:sp>
@@ -16963,7 +16963,7 @@
         <p:spPr>
           <a:xfrm>
             <a:off x="5541264" y="5120640"/>
-            <a:ext cx="2907792" cy="402336"/>
+            <a:ext cx="2907792" cy="365760"/>
           </a:xfrm>
           <a:prstGeom prst="rect">
             <a:avLst/>
@@ -17516,18 +17516,57 @@
       </p:sp>
       <p:sp>
         <p:nvSpPr>
-          <p:cNvPr id="15" name="Shape 12"/>
+          <p:cNvPr id="15" name="Text 12"/>
+          <p:cNvSpPr txBox="1"/>
+          <p:nvPr/>
+        </p:nvSpPr>
+        <p:spPr>
+          <a:xfrm>
+            <a:off x="457200" y="2084832"/>
+            <a:ext cx="3108960" cy="292608"/>
+          </a:xfrm>
+          <a:prstGeom prst="rect">
+            <a:avLst/>
+          </a:prstGeom>
+          <a:noFill/>
+          <a:ln/>
+        </p:spPr>
+        <p:txBody>
+          <a:bodyPr wrap="square" lIns="0" tIns="0" rIns="0" bIns="0" rtlCol="0" anchor="ctr"/>
+          <a:lstStyle/>
+          <a:p>
+            <a:pPr eaLnBrk="0" latinLnBrk="0" indent="0" marL="0">
+              <a:buNone/>
+            </a:pPr>
+            <a:r>
+              <a:rPr lang="en-US" sz="1450" b="1" dirty="0">
+                <a:solidFill>
+                  <a:srgbClr val="1E2761"/>
+                </a:solidFill>
+                <a:latin typeface="맑은 고딕" pitchFamily="34" charset="0"/>
+                <a:ea typeface="맑은 고딕" pitchFamily="34" charset="-122"/>
+                <a:cs typeface="맑은 고딕" pitchFamily="34" charset="-120"/>
+              </a:rPr>
+              <a:t>채용신체검사</a:t>
+            </a:r>
+            <a:endParaRPr lang="en-US" sz="1450" dirty="0"/>
+          </a:p>
+        </p:txBody>
+      </p:sp>
+      <p:sp>
+        <p:nvSpPr>
+          <p:cNvPr id="16" name="Shape 13"/>
           <p:cNvSpPr/>
           <p:nvPr/>
         </p:nvSpPr>
         <p:spPr>
           <a:xfrm>
-            <a:off x="457200" y="2084832"/>
-            <a:ext cx="3108960" cy="2103120"/>
+            <a:off x="457200" y="2450592"/>
+            <a:ext cx="3108960" cy="1645920"/>
           </a:xfrm>
           <a:prstGeom prst="roundRect">
             <a:avLst>
-              <a:gd name="adj" fmla="val 2609"/>
+              <a:gd name="adj" fmla="val 3333"/>
             </a:avLst>
           </a:prstGeom>
           <a:solidFill>
@@ -17550,14 +17589,14 @@
       </p:sp>
       <p:sp>
         <p:nvSpPr>
-          <p:cNvPr id="16" name="Text 13"/>
-          <p:cNvSpPr txBox="1"/>
-          <p:nvPr/>
-        </p:nvSpPr>
-        <p:spPr>
-          <a:xfrm>
-            <a:off x="713232" y="2304288"/>
-            <a:ext cx="2596896" cy="329184"/>
+          <p:cNvPr id="17" name="Text 14"/>
+          <p:cNvSpPr txBox="1"/>
+          <p:nvPr/>
+        </p:nvSpPr>
+        <p:spPr>
+          <a:xfrm>
+            <a:off x="694944" y="2615184"/>
+            <a:ext cx="822960" cy="621792"/>
           </a:xfrm>
           <a:prstGeom prst="rect">
             <a:avLst/>
@@ -17573,45 +17612,6 @@
               <a:buNone/>
             </a:pPr>
             <a:r>
-              <a:rPr lang="en-US" sz="1600" b="1" dirty="0">
-                <a:solidFill>
-                  <a:srgbClr val="FFFFFF"/>
-                </a:solidFill>
-                <a:latin typeface="맑은 고딕" pitchFamily="34" charset="0"/>
-                <a:ea typeface="맑은 고딕" pitchFamily="34" charset="-122"/>
-                <a:cs typeface="맑은 고딕" pitchFamily="34" charset="-120"/>
-              </a:rPr>
-              <a:t>채용신체검사</a:t>
-            </a:r>
-            <a:endParaRPr lang="en-US" sz="1600" dirty="0"/>
-          </a:p>
-        </p:txBody>
-      </p:sp>
-      <p:sp>
-        <p:nvSpPr>
-          <p:cNvPr id="17" name="Text 14"/>
-          <p:cNvSpPr txBox="1"/>
-          <p:nvPr/>
-        </p:nvSpPr>
-        <p:spPr>
-          <a:xfrm>
-            <a:off x="713232" y="2798064"/>
-            <a:ext cx="822960" cy="585216"/>
-          </a:xfrm>
-          <a:prstGeom prst="rect">
-            <a:avLst/>
-          </a:prstGeom>
-          <a:noFill/>
-          <a:ln/>
-        </p:spPr>
-        <p:txBody>
-          <a:bodyPr wrap="square" lIns="0" tIns="0" rIns="0" bIns="0" rtlCol="0" anchor="ctr"/>
-          <a:lstStyle/>
-          <a:p>
-            <a:pPr eaLnBrk="0" latinLnBrk="0" indent="0" marL="0">
-              <a:buNone/>
-            </a:pPr>
-            <a:r>
               <a:rPr lang="en-US" sz="1050" b="1" dirty="0">
                 <a:solidFill>
                   <a:srgbClr val="CADCFC"/>
@@ -17634,8 +17634,8 @@
         </p:nvSpPr>
         <p:spPr>
           <a:xfrm>
-            <a:off x="1554480" y="2798064"/>
-            <a:ext cx="1755648" cy="585216"/>
+            <a:off x="1536192" y="2615184"/>
+            <a:ext cx="1792224" cy="621792"/>
           </a:xfrm>
           <a:prstGeom prst="rect">
             <a:avLst/>
@@ -17696,8 +17696,8 @@
         </p:nvSpPr>
         <p:spPr>
           <a:xfrm>
-            <a:off x="713232" y="3456432"/>
-            <a:ext cx="822960" cy="585216"/>
+            <a:off x="694944" y="3291840"/>
+            <a:ext cx="822960" cy="621792"/>
           </a:xfrm>
           <a:prstGeom prst="rect">
             <a:avLst/>
@@ -17735,8 +17735,8 @@
         </p:nvSpPr>
         <p:spPr>
           <a:xfrm>
-            <a:off x="1554480" y="3456432"/>
-            <a:ext cx="1755648" cy="585216"/>
+            <a:off x="1536192" y="3291840"/>
+            <a:ext cx="1792224" cy="621792"/>
           </a:xfrm>
           <a:prstGeom prst="rect">
             <a:avLst/>

--- a/docs/2027년_사무직원_채용계획안.pptx
+++ b/docs/2027년_사무직원_채용계획안.pptx
@@ -15649,7 +15649,7 @@
                 <a:gridCol w="1143000"/>
                 <a:gridCol w="1143000"/>
               </a:tblGrid>
-              <a:tr h="365760">
+              <a:tr h="402336">
                 <a:tc>
                   <a:txBody>
                     <a:bodyPr/>
@@ -15855,7 +15855,7 @@
                   </a:tcPr>
                 </a:tc>
               </a:tr>
-              <a:tr h="384048">
+              <a:tr h="580644">
                 <a:tc>
                   <a:txBody>
                     <a:bodyPr/>
@@ -15910,14 +15910,8 @@
                       <a:headEnd type="none" w="med" len="med"/>
                       <a:tailEnd type="none" w="med" len="med"/>
                     </a:lnT>
-                    <a:lnB w="12700" cap="flat" cmpd="sng" algn="ctr">
-                      <a:solidFill>
-                        <a:srgbClr val="C6CEE2"/>
-                      </a:solidFill>
-                      <a:prstDash val="solid"/>
-                      <a:round/>
-                      <a:headEnd type="none" w="med" len="med"/>
-                      <a:tailEnd type="none" w="med" len="med"/>
+                    <a:lnB w="0" cap="flat" cmpd="sng" algn="ctr">
+                      <a:noFill/>
                     </a:lnB>
                   </a:tcPr>
                 </a:tc>
@@ -15975,14 +15969,8 @@
                       <a:headEnd type="none" w="med" len="med"/>
                       <a:tailEnd type="none" w="med" len="med"/>
                     </a:lnT>
-                    <a:lnB w="12700" cap="flat" cmpd="sng" algn="ctr">
-                      <a:solidFill>
-                        <a:srgbClr val="C6CEE2"/>
-                      </a:solidFill>
-                      <a:prstDash val="solid"/>
-                      <a:round/>
-                      <a:headEnd type="none" w="med" len="med"/>
-                      <a:tailEnd type="none" w="med" len="med"/>
+                    <a:lnB w="0" cap="flat" cmpd="sng" algn="ctr">
+                      <a:noFill/>
                     </a:lnB>
                   </a:tcPr>
                 </a:tc>
@@ -16076,7 +16064,7 @@
                   </a:tcPr>
                 </a:tc>
               </a:tr>
-              <a:tr h="384048">
+              <a:tr h="580644">
                 <a:tc>
                   <a:txBody>
                     <a:bodyPr/>
@@ -16122,23 +16110,11 @@
                       <a:headEnd type="none" w="med" len="med"/>
                       <a:tailEnd type="none" w="med" len="med"/>
                     </a:lnR>
-                    <a:lnT w="12700" cap="flat" cmpd="sng" algn="ctr">
-                      <a:solidFill>
-                        <a:srgbClr val="C6CEE2"/>
-                      </a:solidFill>
-                      <a:prstDash val="solid"/>
-                      <a:round/>
-                      <a:headEnd type="none" w="med" len="med"/>
-                      <a:tailEnd type="none" w="med" len="med"/>
+                    <a:lnT w="0" cap="flat" cmpd="sng" algn="ctr">
+                      <a:noFill/>
                     </a:lnT>
-                    <a:lnB w="12700" cap="flat" cmpd="sng" algn="ctr">
-                      <a:solidFill>
-                        <a:srgbClr val="C6CEE2"/>
-                      </a:solidFill>
-                      <a:prstDash val="solid"/>
-                      <a:round/>
-                      <a:headEnd type="none" w="med" len="med"/>
-                      <a:tailEnd type="none" w="med" len="med"/>
+                    <a:lnB w="0" cap="flat" cmpd="sng" algn="ctr">
+                      <a:noFill/>
                     </a:lnB>
                   </a:tcPr>
                 </a:tc>
@@ -16187,23 +16163,11 @@
                       <a:headEnd type="none" w="med" len="med"/>
                       <a:tailEnd type="none" w="med" len="med"/>
                     </a:lnR>
-                    <a:lnT w="12700" cap="flat" cmpd="sng" algn="ctr">
-                      <a:solidFill>
-                        <a:srgbClr val="C6CEE2"/>
-                      </a:solidFill>
-                      <a:prstDash val="solid"/>
-                      <a:round/>
-                      <a:headEnd type="none" w="med" len="med"/>
-                      <a:tailEnd type="none" w="med" len="med"/>
+                    <a:lnT w="0" cap="flat" cmpd="sng" algn="ctr">
+                      <a:noFill/>
                     </a:lnT>
-                    <a:lnB w="12700" cap="flat" cmpd="sng" algn="ctr">
-                      <a:solidFill>
-                        <a:srgbClr val="C6CEE2"/>
-                      </a:solidFill>
-                      <a:prstDash val="solid"/>
-                      <a:round/>
-                      <a:headEnd type="none" w="med" len="med"/>
-                      <a:tailEnd type="none" w="med" len="med"/>
+                    <a:lnB w="0" cap="flat" cmpd="sng" algn="ctr">
+                      <a:noFill/>
                     </a:lnB>
                   </a:tcPr>
                 </a:tc>
@@ -16211,7 +16175,7 @@
                   <a:tcPr/>
                 </a:tc>
               </a:tr>
-              <a:tr h="384048">
+              <a:tr h="580644">
                 <a:tc>
                   <a:txBody>
                     <a:bodyPr/>
@@ -16257,23 +16221,11 @@
                       <a:headEnd type="none" w="med" len="med"/>
                       <a:tailEnd type="none" w="med" len="med"/>
                     </a:lnR>
-                    <a:lnT w="12700" cap="flat" cmpd="sng" algn="ctr">
-                      <a:solidFill>
-                        <a:srgbClr val="C6CEE2"/>
-                      </a:solidFill>
-                      <a:prstDash val="solid"/>
-                      <a:round/>
-                      <a:headEnd type="none" w="med" len="med"/>
-                      <a:tailEnd type="none" w="med" len="med"/>
+                    <a:lnT w="0" cap="flat" cmpd="sng" algn="ctr">
+                      <a:noFill/>
                     </a:lnT>
-                    <a:lnB w="12700" cap="flat" cmpd="sng" algn="ctr">
-                      <a:solidFill>
-                        <a:srgbClr val="C6CEE2"/>
-                      </a:solidFill>
-                      <a:prstDash val="solid"/>
-                      <a:round/>
-                      <a:headEnd type="none" w="med" len="med"/>
-                      <a:tailEnd type="none" w="med" len="med"/>
+                    <a:lnB w="0" cap="flat" cmpd="sng" algn="ctr">
+                      <a:noFill/>
                     </a:lnB>
                   </a:tcPr>
                 </a:tc>
@@ -16322,23 +16274,11 @@
                       <a:headEnd type="none" w="med" len="med"/>
                       <a:tailEnd type="none" w="med" len="med"/>
                     </a:lnR>
-                    <a:lnT w="12700" cap="flat" cmpd="sng" algn="ctr">
-                      <a:solidFill>
-                        <a:srgbClr val="C6CEE2"/>
-                      </a:solidFill>
-                      <a:prstDash val="solid"/>
-                      <a:round/>
-                      <a:headEnd type="none" w="med" len="med"/>
-                      <a:tailEnd type="none" w="med" len="med"/>
+                    <a:lnT w="0" cap="flat" cmpd="sng" algn="ctr">
+                      <a:noFill/>
                     </a:lnT>
-                    <a:lnB w="12700" cap="flat" cmpd="sng" algn="ctr">
-                      <a:solidFill>
-                        <a:srgbClr val="C6CEE2"/>
-                      </a:solidFill>
-                      <a:prstDash val="solid"/>
-                      <a:round/>
-                      <a:headEnd type="none" w="med" len="med"/>
-                      <a:tailEnd type="none" w="med" len="med"/>
+                    <a:lnB w="0" cap="flat" cmpd="sng" algn="ctr">
+                      <a:noFill/>
                     </a:lnB>
                   </a:tcPr>
                 </a:tc>
@@ -16346,7 +16286,7 @@
                   <a:tcPr/>
                 </a:tc>
               </a:tr>
-              <a:tr h="384048">
+              <a:tr h="580644">
                 <a:tc>
                   <a:txBody>
                     <a:bodyPr/>
@@ -16392,14 +16332,8 @@
                       <a:headEnd type="none" w="med" len="med"/>
                       <a:tailEnd type="none" w="med" len="med"/>
                     </a:lnR>
-                    <a:lnT w="12700" cap="flat" cmpd="sng" algn="ctr">
-                      <a:solidFill>
-                        <a:srgbClr val="C6CEE2"/>
-                      </a:solidFill>
-                      <a:prstDash val="solid"/>
-                      <a:round/>
-                      <a:headEnd type="none" w="med" len="med"/>
-                      <a:tailEnd type="none" w="med" len="med"/>
+                    <a:lnT w="0" cap="flat" cmpd="sng" algn="ctr">
+                      <a:noFill/>
                     </a:lnT>
                     <a:lnB w="12700" cap="flat" cmpd="sng" algn="ctr">
                       <a:solidFill>
@@ -16457,14 +16391,8 @@
                       <a:headEnd type="none" w="med" len="med"/>
                       <a:tailEnd type="none" w="med" len="med"/>
                     </a:lnR>
-                    <a:lnT w="12700" cap="flat" cmpd="sng" algn="ctr">
-                      <a:solidFill>
-                        <a:srgbClr val="C6CEE2"/>
-                      </a:solidFill>
-                      <a:prstDash val="solid"/>
-                      <a:round/>
-                      <a:headEnd type="none" w="med" len="med"/>
-                      <a:tailEnd type="none" w="med" len="med"/>
+                    <a:lnT w="0" cap="flat" cmpd="sng" algn="ctr">
+                      <a:noFill/>
                     </a:lnT>
                     <a:lnB w="12700" cap="flat" cmpd="sng" algn="ctr">
                       <a:solidFill>
@@ -16481,7 +16409,7 @@
                   <a:tcPr/>
                 </a:tc>
               </a:tr>
-              <a:tr h="420624">
+              <a:tr h="475488">
                 <a:tc>
                   <a:txBody>
                     <a:bodyPr/>
@@ -16634,6 +16562,75 @@
         </p:nvSpPr>
         <p:spPr>
           <a:xfrm>
+            <a:off x="457200" y="3268980"/>
+            <a:ext cx="3429000" cy="0"/>
+          </a:xfrm>
+          <a:prstGeom prst="line">
+            <a:avLst/>
+          </a:prstGeom>
+          <a:noFill/>
+          <a:ln w="12700">
+            <a:solidFill>
+              <a:srgbClr val="C6CEE2"/>
+            </a:solidFill>
+            <a:prstDash val="dash"/>
+          </a:ln>
+        </p:spPr>
+      </p:sp>
+      <p:sp>
+        <p:nvSpPr>
+          <p:cNvPr id="18" name="Shape 14"/>
+          <p:cNvSpPr/>
+          <p:nvPr/>
+        </p:nvSpPr>
+        <p:spPr>
+          <a:xfrm>
+            <a:off x="457200" y="3849624"/>
+            <a:ext cx="3429000" cy="0"/>
+          </a:xfrm>
+          <a:prstGeom prst="line">
+            <a:avLst/>
+          </a:prstGeom>
+          <a:noFill/>
+          <a:ln w="12700">
+            <a:solidFill>
+              <a:srgbClr val="C6CEE2"/>
+            </a:solidFill>
+            <a:prstDash val="dash"/>
+          </a:ln>
+        </p:spPr>
+      </p:sp>
+      <p:sp>
+        <p:nvSpPr>
+          <p:cNvPr id="19" name="Shape 15"/>
+          <p:cNvSpPr/>
+          <p:nvPr/>
+        </p:nvSpPr>
+        <p:spPr>
+          <a:xfrm>
+            <a:off x="457200" y="4430268"/>
+            <a:ext cx="3429000" cy="0"/>
+          </a:xfrm>
+          <a:prstGeom prst="line">
+            <a:avLst/>
+          </a:prstGeom>
+          <a:noFill/>
+          <a:ln w="12700">
+            <a:solidFill>
+              <a:srgbClr val="C6CEE2"/>
+            </a:solidFill>
+            <a:prstDash val="dash"/>
+          </a:ln>
+        </p:spPr>
+      </p:sp>
+      <p:sp>
+        <p:nvSpPr>
+          <p:cNvPr id="20" name="Shape 16"/>
+          <p:cNvSpPr/>
+          <p:nvPr/>
+        </p:nvSpPr>
+        <p:spPr>
+          <a:xfrm>
             <a:off x="5303520" y="2286000"/>
             <a:ext cx="3383280" cy="3200400"/>
           </a:xfrm>
@@ -16662,7 +16659,7 @@
       </p:sp>
       <p:sp>
         <p:nvSpPr>
-          <p:cNvPr id="18" name="Text 14"/>
+          <p:cNvPr id="21" name="Text 17"/>
           <p:cNvSpPr txBox="1"/>
           <p:nvPr/>
         </p:nvSpPr>
@@ -16701,7 +16698,7 @@
       </p:sp>
       <p:graphicFrame>
         <p:nvGraphicFramePr>
-          <p:cNvPr id="19" name="Chart 0" descr=""/>
+          <p:cNvPr id="22" name="Chart 0" descr=""/>
           <p:cNvGraphicFramePr/>
           <p:nvPr/>
         </p:nvGraphicFramePr>
@@ -16717,7 +16714,7 @@
       </p:graphicFrame>
       <p:sp>
         <p:nvSpPr>
-          <p:cNvPr id="20" name="Shape 15"/>
+          <p:cNvPr id="23" name="Shape 18"/>
           <p:cNvSpPr/>
           <p:nvPr/>
         </p:nvSpPr>
@@ -16739,7 +16736,7 @@
       </p:sp>
       <p:sp>
         <p:nvSpPr>
-          <p:cNvPr id="21" name="Text 16"/>
+          <p:cNvPr id="24" name="Text 19"/>
           <p:cNvSpPr txBox="1"/>
           <p:nvPr/>
         </p:nvSpPr>
@@ -16778,7 +16775,7 @@
       </p:sp>
       <p:sp>
         <p:nvSpPr>
-          <p:cNvPr id="22" name="Text 17"/>
+          <p:cNvPr id="25" name="Text 20"/>
           <p:cNvSpPr txBox="1"/>
           <p:nvPr/>
         </p:nvSpPr>
@@ -16817,7 +16814,7 @@
       </p:sp>
       <p:sp>
         <p:nvSpPr>
-          <p:cNvPr id="23" name="Shape 18"/>
+          <p:cNvPr id="26" name="Shape 21"/>
           <p:cNvSpPr/>
           <p:nvPr/>
         </p:nvSpPr>
@@ -16839,7 +16836,7 @@
       </p:sp>
       <p:sp>
         <p:nvSpPr>
-          <p:cNvPr id="24" name="Text 19"/>
+          <p:cNvPr id="27" name="Text 22"/>
           <p:cNvSpPr txBox="1"/>
           <p:nvPr/>
         </p:nvSpPr>
@@ -16878,7 +16875,7 @@
       </p:sp>
       <p:sp>
         <p:nvSpPr>
-          <p:cNvPr id="25" name="Text 20"/>
+          <p:cNvPr id="28" name="Text 23"/>
           <p:cNvSpPr txBox="1"/>
           <p:nvPr/>
         </p:nvSpPr>
@@ -16917,7 +16914,7 @@
       </p:sp>
       <p:sp>
         <p:nvSpPr>
-          <p:cNvPr id="26" name="Text 21"/>
+          <p:cNvPr id="29" name="Text 24"/>
           <p:cNvSpPr txBox="1"/>
           <p:nvPr/>
         </p:nvSpPr>
@@ -16956,7 +16953,7 @@
       </p:sp>
       <p:sp>
         <p:nvSpPr>
-          <p:cNvPr id="27" name="Text 22"/>
+          <p:cNvPr id="30" name="Text 25"/>
           <p:cNvSpPr txBox="1"/>
           <p:nvPr/>
         </p:nvSpPr>

--- a/docs/2027년_사무직원_채용계획안.pptx
+++ b/docs/2027년_사무직원_채용계획안.pptx
@@ -14028,14 +14028,8 @@
                       <a:headEnd type="none" w="med" len="med"/>
                       <a:tailEnd type="none" w="med" len="med"/>
                     </a:lnT>
-                    <a:lnB w="12700" cap="flat" cmpd="sng" algn="ctr">
-                      <a:solidFill>
-                        <a:srgbClr val="C6CEE2"/>
-                      </a:solidFill>
-                      <a:prstDash val="solid"/>
-                      <a:round/>
-                      <a:headEnd type="none" w="med" len="med"/>
-                      <a:tailEnd type="none" w="med" len="med"/>
+                    <a:lnB w="0" cap="flat" cmpd="sng" algn="ctr">
+                      <a:noFill/>
                     </a:lnB>
                   </a:tcPr>
                 </a:tc>
@@ -14093,14 +14087,8 @@
                       <a:headEnd type="none" w="med" len="med"/>
                       <a:tailEnd type="none" w="med" len="med"/>
                     </a:lnT>
-                    <a:lnB w="12700" cap="flat" cmpd="sng" algn="ctr">
-                      <a:solidFill>
-                        <a:srgbClr val="C6CEE2"/>
-                      </a:solidFill>
-                      <a:prstDash val="solid"/>
-                      <a:round/>
-                      <a:headEnd type="none" w="med" len="med"/>
-                      <a:tailEnd type="none" w="med" len="med"/>
+                    <a:lnB w="0" cap="flat" cmpd="sng" algn="ctr">
+                      <a:noFill/>
                     </a:lnB>
                   </a:tcPr>
                 </a:tc>
@@ -14240,23 +14228,11 @@
                       <a:headEnd type="none" w="med" len="med"/>
                       <a:tailEnd type="none" w="med" len="med"/>
                     </a:lnR>
-                    <a:lnT w="12700" cap="flat" cmpd="sng" algn="ctr">
-                      <a:solidFill>
-                        <a:srgbClr val="C6CEE2"/>
-                      </a:solidFill>
-                      <a:prstDash val="solid"/>
-                      <a:round/>
-                      <a:headEnd type="none" w="med" len="med"/>
-                      <a:tailEnd type="none" w="med" len="med"/>
+                    <a:lnT w="0" cap="flat" cmpd="sng" algn="ctr">
+                      <a:noFill/>
                     </a:lnT>
-                    <a:lnB w="12700" cap="flat" cmpd="sng" algn="ctr">
-                      <a:solidFill>
-                        <a:srgbClr val="C6CEE2"/>
-                      </a:solidFill>
-                      <a:prstDash val="solid"/>
-                      <a:round/>
-                      <a:headEnd type="none" w="med" len="med"/>
-                      <a:tailEnd type="none" w="med" len="med"/>
+                    <a:lnB w="0" cap="flat" cmpd="sng" algn="ctr">
+                      <a:noFill/>
                     </a:lnB>
                   </a:tcPr>
                 </a:tc>
@@ -14305,23 +14281,11 @@
                       <a:headEnd type="none" w="med" len="med"/>
                       <a:tailEnd type="none" w="med" len="med"/>
                     </a:lnR>
-                    <a:lnT w="12700" cap="flat" cmpd="sng" algn="ctr">
-                      <a:solidFill>
-                        <a:srgbClr val="C6CEE2"/>
-                      </a:solidFill>
-                      <a:prstDash val="solid"/>
-                      <a:round/>
-                      <a:headEnd type="none" w="med" len="med"/>
-                      <a:tailEnd type="none" w="med" len="med"/>
+                    <a:lnT w="0" cap="flat" cmpd="sng" algn="ctr">
+                      <a:noFill/>
                     </a:lnT>
-                    <a:lnB w="12700" cap="flat" cmpd="sng" algn="ctr">
-                      <a:solidFill>
-                        <a:srgbClr val="C6CEE2"/>
-                      </a:solidFill>
-                      <a:prstDash val="solid"/>
-                      <a:round/>
-                      <a:headEnd type="none" w="med" len="med"/>
-                      <a:tailEnd type="none" w="med" len="med"/>
+                    <a:lnB w="0" cap="flat" cmpd="sng" algn="ctr">
+                      <a:noFill/>
                     </a:lnB>
                   </a:tcPr>
                 </a:tc>
@@ -14375,23 +14339,11 @@
                       <a:headEnd type="none" w="med" len="med"/>
                       <a:tailEnd type="none" w="med" len="med"/>
                     </a:lnR>
-                    <a:lnT w="12700" cap="flat" cmpd="sng" algn="ctr">
-                      <a:solidFill>
-                        <a:srgbClr val="C6CEE2"/>
-                      </a:solidFill>
-                      <a:prstDash val="solid"/>
-                      <a:round/>
-                      <a:headEnd type="none" w="med" len="med"/>
-                      <a:tailEnd type="none" w="med" len="med"/>
+                    <a:lnT w="0" cap="flat" cmpd="sng" algn="ctr">
+                      <a:noFill/>
                     </a:lnT>
-                    <a:lnB w="12700" cap="flat" cmpd="sng" algn="ctr">
-                      <a:solidFill>
-                        <a:srgbClr val="C6CEE2"/>
-                      </a:solidFill>
-                      <a:prstDash val="solid"/>
-                      <a:round/>
-                      <a:headEnd type="none" w="med" len="med"/>
-                      <a:tailEnd type="none" w="med" len="med"/>
+                    <a:lnB w="0" cap="flat" cmpd="sng" algn="ctr">
+                      <a:noFill/>
                     </a:lnB>
                   </a:tcPr>
                 </a:tc>
@@ -14440,23 +14392,11 @@
                       <a:headEnd type="none" w="med" len="med"/>
                       <a:tailEnd type="none" w="med" len="med"/>
                     </a:lnR>
-                    <a:lnT w="12700" cap="flat" cmpd="sng" algn="ctr">
-                      <a:solidFill>
-                        <a:srgbClr val="C6CEE2"/>
-                      </a:solidFill>
-                      <a:prstDash val="solid"/>
-                      <a:round/>
-                      <a:headEnd type="none" w="med" len="med"/>
-                      <a:tailEnd type="none" w="med" len="med"/>
+                    <a:lnT w="0" cap="flat" cmpd="sng" algn="ctr">
+                      <a:noFill/>
                     </a:lnT>
-                    <a:lnB w="12700" cap="flat" cmpd="sng" algn="ctr">
-                      <a:solidFill>
-                        <a:srgbClr val="C6CEE2"/>
-                      </a:solidFill>
-                      <a:prstDash val="solid"/>
-                      <a:round/>
-                      <a:headEnd type="none" w="med" len="med"/>
-                      <a:tailEnd type="none" w="med" len="med"/>
+                    <a:lnB w="0" cap="flat" cmpd="sng" algn="ctr">
+                      <a:noFill/>
                     </a:lnB>
                   </a:tcPr>
                 </a:tc>
@@ -14510,14 +14450,8 @@
                       <a:headEnd type="none" w="med" len="med"/>
                       <a:tailEnd type="none" w="med" len="med"/>
                     </a:lnR>
-                    <a:lnT w="12700" cap="flat" cmpd="sng" algn="ctr">
-                      <a:solidFill>
-                        <a:srgbClr val="C6CEE2"/>
-                      </a:solidFill>
-                      <a:prstDash val="solid"/>
-                      <a:round/>
-                      <a:headEnd type="none" w="med" len="med"/>
-                      <a:tailEnd type="none" w="med" len="med"/>
+                    <a:lnT w="0" cap="flat" cmpd="sng" algn="ctr">
+                      <a:noFill/>
                     </a:lnT>
                     <a:lnB w="12700" cap="flat" cmpd="sng" algn="ctr">
                       <a:solidFill>
@@ -14575,14 +14509,8 @@
                       <a:headEnd type="none" w="med" len="med"/>
                       <a:tailEnd type="none" w="med" len="med"/>
                     </a:lnR>
-                    <a:lnT w="12700" cap="flat" cmpd="sng" algn="ctr">
-                      <a:solidFill>
-                        <a:srgbClr val="C6CEE2"/>
-                      </a:solidFill>
-                      <a:prstDash val="solid"/>
-                      <a:round/>
-                      <a:headEnd type="none" w="med" len="med"/>
-                      <a:tailEnd type="none" w="med" len="med"/>
+                    <a:lnT w="0" cap="flat" cmpd="sng" algn="ctr">
+                      <a:noFill/>
                     </a:lnT>
                     <a:lnB w="12700" cap="flat" cmpd="sng" algn="ctr">
                       <a:solidFill>
@@ -14752,6 +14680,75 @@
         </p:nvSpPr>
         <p:spPr>
           <a:xfrm>
+            <a:off x="457200" y="3035808"/>
+            <a:ext cx="3429000" cy="0"/>
+          </a:xfrm>
+          <a:prstGeom prst="line">
+            <a:avLst/>
+          </a:prstGeom>
+          <a:noFill/>
+          <a:ln w="12700">
+            <a:solidFill>
+              <a:srgbClr val="C6CEE2"/>
+            </a:solidFill>
+            <a:prstDash val="dash"/>
+          </a:ln>
+        </p:spPr>
+      </p:sp>
+      <p:sp>
+        <p:nvSpPr>
+          <p:cNvPr id="18" name="Shape 14"/>
+          <p:cNvSpPr/>
+          <p:nvPr/>
+        </p:nvSpPr>
+        <p:spPr>
+          <a:xfrm>
+            <a:off x="457200" y="3419856"/>
+            <a:ext cx="3429000" cy="0"/>
+          </a:xfrm>
+          <a:prstGeom prst="line">
+            <a:avLst/>
+          </a:prstGeom>
+          <a:noFill/>
+          <a:ln w="12700">
+            <a:solidFill>
+              <a:srgbClr val="C6CEE2"/>
+            </a:solidFill>
+            <a:prstDash val="dash"/>
+          </a:ln>
+        </p:spPr>
+      </p:sp>
+      <p:sp>
+        <p:nvSpPr>
+          <p:cNvPr id="19" name="Shape 15"/>
+          <p:cNvSpPr/>
+          <p:nvPr/>
+        </p:nvSpPr>
+        <p:spPr>
+          <a:xfrm>
+            <a:off x="457200" y="3803904"/>
+            <a:ext cx="3429000" cy="0"/>
+          </a:xfrm>
+          <a:prstGeom prst="line">
+            <a:avLst/>
+          </a:prstGeom>
+          <a:noFill/>
+          <a:ln w="12700">
+            <a:solidFill>
+              <a:srgbClr val="C6CEE2"/>
+            </a:solidFill>
+            <a:prstDash val="dash"/>
+          </a:ln>
+        </p:spPr>
+      </p:sp>
+      <p:sp>
+        <p:nvSpPr>
+          <p:cNvPr id="20" name="Shape 16"/>
+          <p:cNvSpPr/>
+          <p:nvPr/>
+        </p:nvSpPr>
+        <p:spPr>
+          <a:xfrm>
             <a:off x="5303520" y="2286000"/>
             <a:ext cx="3383280" cy="2322576"/>
           </a:xfrm>
@@ -14780,7 +14777,7 @@
       </p:sp>
       <p:sp>
         <p:nvSpPr>
-          <p:cNvPr id="18" name="Text 14"/>
+          <p:cNvPr id="21" name="Text 17"/>
           <p:cNvSpPr txBox="1"/>
           <p:nvPr/>
         </p:nvSpPr>
@@ -14842,7 +14839,7 @@
       </p:sp>
       <p:sp>
         <p:nvSpPr>
-          <p:cNvPr id="19" name="Shape 15"/>
+          <p:cNvPr id="22" name="Shape 18"/>
           <p:cNvSpPr/>
           <p:nvPr/>
         </p:nvSpPr>
@@ -14862,7 +14859,7 @@
       </p:sp>
       <p:sp>
         <p:nvSpPr>
-          <p:cNvPr id="20" name="Text 16"/>
+          <p:cNvPr id="23" name="Text 19"/>
           <p:cNvSpPr txBox="1"/>
           <p:nvPr/>
         </p:nvSpPr>
@@ -14904,7 +14901,7 @@
       </p:sp>
       <p:sp>
         <p:nvSpPr>
-          <p:cNvPr id="21" name="Shape 17"/>
+          <p:cNvPr id="24" name="Shape 20"/>
           <p:cNvSpPr/>
           <p:nvPr/>
         </p:nvSpPr>
@@ -14924,7 +14921,7 @@
       </p:sp>
       <p:sp>
         <p:nvSpPr>
-          <p:cNvPr id="22" name="Text 18"/>
+          <p:cNvPr id="25" name="Text 21"/>
           <p:cNvSpPr txBox="1"/>
           <p:nvPr/>
         </p:nvSpPr>
@@ -14966,7 +14963,7 @@
       </p:sp>
       <p:sp>
         <p:nvSpPr>
-          <p:cNvPr id="23" name="Shape 19"/>
+          <p:cNvPr id="26" name="Shape 22"/>
           <p:cNvSpPr/>
           <p:nvPr/>
         </p:nvSpPr>
@@ -14986,7 +14983,7 @@
       </p:sp>
       <p:sp>
         <p:nvSpPr>
-          <p:cNvPr id="24" name="Text 20"/>
+          <p:cNvPr id="27" name="Text 23"/>
           <p:cNvSpPr txBox="1"/>
           <p:nvPr/>
         </p:nvSpPr>
@@ -15028,7 +15025,7 @@
       </p:sp>
       <p:sp>
         <p:nvSpPr>
-          <p:cNvPr id="25" name="Shape 21"/>
+          <p:cNvPr id="28" name="Shape 24"/>
           <p:cNvSpPr/>
           <p:nvPr/>
         </p:nvSpPr>
@@ -15062,7 +15059,7 @@
       </p:sp>
       <p:sp>
         <p:nvSpPr>
-          <p:cNvPr id="26" name="Text 22"/>
+          <p:cNvPr id="29" name="Text 25"/>
           <p:cNvSpPr txBox="1"/>
           <p:nvPr/>
         </p:nvSpPr>

--- a/docs/2027년_사무직원_채용계획안.pptx
+++ b/docs/2027년_사무직원_채용계획안.pptx
@@ -1767,20 +1767,102 @@
       </p:grpSpPr>
       <p:sp>
         <p:nvSpPr>
-          <p:cNvPr id="2" name="Text 0"/>
+          <p:cNvPr id="2" name="Shape 0"/>
+          <p:cNvSpPr/>
+          <p:nvPr/>
+        </p:nvSpPr>
+        <p:spPr>
+          <a:xfrm>
+            <a:off x="0" y="6620256"/>
+            <a:ext cx="9144000" cy="237744"/>
+          </a:xfrm>
+          <a:prstGeom prst="rect">
+            <a:avLst/>
+          </a:prstGeom>
+          <a:solidFill>
+            <a:srgbClr val="4FADD1"/>
+          </a:solidFill>
+          <a:ln w="6350">
+            <a:solidFill>
+              <a:srgbClr val="4FADD1"/>
+            </a:solidFill>
+            <a:prstDash val="solid"/>
+          </a:ln>
+        </p:spPr>
+      </p:sp>
+      <p:sp>
+        <p:nvSpPr>
+          <p:cNvPr id="3" name="Shape 1"/>
+          <p:cNvSpPr/>
+          <p:nvPr/>
+        </p:nvSpPr>
+        <p:spPr>
+          <a:xfrm>
+            <a:off x="0" y="0"/>
+            <a:ext cx="9144000" cy="237744"/>
+          </a:xfrm>
+          <a:prstGeom prst="rect">
+            <a:avLst/>
+          </a:prstGeom>
+          <a:solidFill>
+            <a:srgbClr val="4FADD1"/>
+          </a:solidFill>
+          <a:ln w="6350">
+            <a:solidFill>
+              <a:srgbClr val="4FADD1"/>
+            </a:solidFill>
+            <a:prstDash val="solid"/>
+          </a:ln>
+        </p:spPr>
+      </p:sp>
+      <p:sp>
+        <p:nvSpPr>
+          <p:cNvPr id="4" name="Shape 2"/>
+          <p:cNvSpPr/>
+          <p:nvPr/>
+        </p:nvSpPr>
+        <p:spPr>
+          <a:xfrm>
+            <a:off x="0" y="1929384"/>
+            <a:ext cx="9144000" cy="1929384"/>
+          </a:xfrm>
+          <a:prstGeom prst="rect">
+            <a:avLst/>
+          </a:prstGeom>
+          <a:solidFill>
+            <a:srgbClr val="4FADD1"/>
+          </a:solidFill>
+          <a:ln w="6350">
+            <a:solidFill>
+              <a:srgbClr val="4FADD1"/>
+            </a:solidFill>
+            <a:prstDash val="solid"/>
+          </a:ln>
+        </p:spPr>
+      </p:sp>
+      <p:sp>
+        <p:nvSpPr>
+          <p:cNvPr id="5" name="Text 3"/>
           <p:cNvSpPr txBox="1"/>
           <p:nvPr/>
         </p:nvSpPr>
         <p:spPr>
           <a:xfrm>
-            <a:off x="457200" y="2286000"/>
-            <a:ext cx="8229600" cy="731520"/>
+            <a:off x="457200" y="1929384"/>
+            <a:ext cx="8229600" cy="1929384"/>
           </a:xfrm>
           <a:prstGeom prst="rect">
             <a:avLst/>
           </a:prstGeom>
           <a:noFill/>
           <a:ln/>
+          <a:effectLst>
+            <a:outerShdw sx="100000" sy="100000" kx="0" ky="0" algn="bl" rotWithShape="0" blurRad="38100" dist="38100" dir="2700000">
+              <a:srgbClr val="000000">
+                <a:alpha val="43000"/>
+              </a:srgbClr>
+            </a:outerShdw>
+          </a:effectLst>
         </p:spPr>
         <p:txBody>
           <a:bodyPr wrap="square" lIns="0" tIns="0" rIns="0" bIns="0" rtlCol="0" anchor="ctr"/>
@@ -1806,13 +1888,13 @@
       </p:sp>
       <p:sp>
         <p:nvSpPr>
-          <p:cNvPr id="3" name="Text 1"/>
+          <p:cNvPr id="6" name="Text 4"/>
           <p:cNvSpPr txBox="1"/>
           <p:nvPr/>
         </p:nvSpPr>
         <p:spPr>
           <a:xfrm>
-            <a:off x="457200" y="3310128"/>
+            <a:off x="457200" y="4261104"/>
             <a:ext cx="8229600" cy="365760"/>
           </a:xfrm>
           <a:prstGeom prst="rect">
@@ -1845,7 +1927,7 @@
       </p:sp>
       <p:pic>
         <p:nvPicPr>
-          <p:cNvPr id="4" name="Image 0" descr="정석항공과학고등학교 엠블럼">    </p:cNvPr>
+          <p:cNvPr id="7" name="Image 0" descr="정석항공과학고등학교 엠블럼">    </p:cNvPr>
           <p:cNvPicPr>
             <a:picLocks noChangeAspect="1"/>
           </p:cNvPicPr>
@@ -1859,7 +1941,7 @@
         </p:blipFill>
         <p:spPr>
           <a:xfrm>
-            <a:off x="2999232" y="4736592"/>
+            <a:off x="2999232" y="5175504"/>
             <a:ext cx="658368" cy="658368"/>
           </a:xfrm>
           <a:prstGeom prst="rect">
@@ -1869,13 +1951,13 @@
       </p:pic>
       <p:sp>
         <p:nvSpPr>
-          <p:cNvPr id="5" name="Text 2"/>
+          <p:cNvPr id="8" name="Text 5"/>
           <p:cNvSpPr txBox="1"/>
           <p:nvPr/>
         </p:nvSpPr>
         <p:spPr>
           <a:xfrm>
-            <a:off x="3785616" y="4736592"/>
+            <a:off x="3785616" y="5175504"/>
             <a:ext cx="2377440" cy="658368"/>
           </a:xfrm>
           <a:prstGeom prst="rect">
@@ -1938,9 +2020,59 @@
           <a:chExt cx="0" cy="0"/>
         </a:xfrm>
       </p:grpSpPr>
+      <p:sp>
+        <p:nvSpPr>
+          <p:cNvPr id="2" name="Shape 0"/>
+          <p:cNvSpPr/>
+          <p:nvPr/>
+        </p:nvSpPr>
+        <p:spPr>
+          <a:xfrm>
+            <a:off x="0" y="6620256"/>
+            <a:ext cx="9144000" cy="237744"/>
+          </a:xfrm>
+          <a:prstGeom prst="rect">
+            <a:avLst/>
+          </a:prstGeom>
+          <a:solidFill>
+            <a:srgbClr val="4FADD1"/>
+          </a:solidFill>
+          <a:ln w="6350">
+            <a:solidFill>
+              <a:srgbClr val="4FADD1"/>
+            </a:solidFill>
+            <a:prstDash val="solid"/>
+          </a:ln>
+        </p:spPr>
+      </p:sp>
+      <p:sp>
+        <p:nvSpPr>
+          <p:cNvPr id="3" name="Shape 1"/>
+          <p:cNvSpPr/>
+          <p:nvPr/>
+        </p:nvSpPr>
+        <p:spPr>
+          <a:xfrm>
+            <a:off x="0" y="0"/>
+            <a:ext cx="9144000" cy="713232"/>
+          </a:xfrm>
+          <a:prstGeom prst="rect">
+            <a:avLst/>
+          </a:prstGeom>
+          <a:solidFill>
+            <a:srgbClr val="4FADD1"/>
+          </a:solidFill>
+          <a:ln w="6350">
+            <a:solidFill>
+              <a:srgbClr val="4FADD1"/>
+            </a:solidFill>
+            <a:prstDash val="solid"/>
+          </a:ln>
+        </p:spPr>
+      </p:sp>
       <p:pic>
         <p:nvPicPr>
-          <p:cNvPr id="2" name="Image 0" descr="정석항공과학고등학교 교표">    </p:cNvPr>
+          <p:cNvPr id="4" name="Image 0" descr="정석항공과학고등학교 교표">    </p:cNvPr>
           <p:cNvPicPr>
             <a:picLocks noChangeAspect="1"/>
           </p:cNvPicPr>
@@ -1954,7 +2086,7 @@
         </p:blipFill>
         <p:spPr>
           <a:xfrm>
-            <a:off x="7973568" y="256032"/>
+            <a:off x="7973568" y="201168"/>
             <a:ext cx="713232" cy="305410"/>
           </a:xfrm>
           <a:prstGeom prst="rect">
@@ -1964,13 +2096,13 @@
       </p:pic>
       <p:sp>
         <p:nvSpPr>
-          <p:cNvPr id="3" name="Text 0"/>
+          <p:cNvPr id="5" name="Text 2"/>
           <p:cNvSpPr txBox="1"/>
           <p:nvPr/>
         </p:nvSpPr>
         <p:spPr>
           <a:xfrm>
-            <a:off x="3657600" y="6345936"/>
+            <a:off x="3657600" y="6291072"/>
             <a:ext cx="1828800" cy="274320"/>
           </a:xfrm>
           <a:prstGeom prst="rect">
@@ -2003,13 +2135,13 @@
       </p:sp>
       <p:sp>
         <p:nvSpPr>
-          <p:cNvPr id="4" name="Text 1"/>
+          <p:cNvPr id="6" name="Text 3"/>
           <p:cNvSpPr txBox="1"/>
           <p:nvPr/>
         </p:nvSpPr>
         <p:spPr>
           <a:xfrm>
-            <a:off x="457200" y="237744"/>
+            <a:off x="457200" y="82296"/>
             <a:ext cx="7132320" cy="548640"/>
           </a:xfrm>
           <a:prstGeom prst="rect">
@@ -2026,9 +2158,9 @@
               <a:buNone/>
             </a:pPr>
             <a:r>
-              <a:rPr lang="en-US" sz="2800" dirty="0">
+              <a:rPr lang="en-US" sz="2600" dirty="0">
                 <a:solidFill>
-                  <a:srgbClr val="000000"/>
+                  <a:srgbClr val="FFFFFF"/>
                 </a:solidFill>
                 <a:latin typeface="HY헤드라인M" pitchFamily="34" charset="0"/>
                 <a:ea typeface="HY헤드라인M" pitchFamily="34" charset="-122"/>
@@ -2036,13 +2168,13 @@
               </a:rPr>
               <a:t>9. 기타 사항</a:t>
             </a:r>
-            <a:endParaRPr lang="en-US" sz="2800" dirty="0"/>
+            <a:endParaRPr lang="en-US" sz="2600" dirty="0"/>
           </a:p>
         </p:txBody>
       </p:sp>
       <p:sp>
         <p:nvSpPr>
-          <p:cNvPr id="5" name="Text 2"/>
+          <p:cNvPr id="7" name="Text 4"/>
           <p:cNvSpPr txBox="1"/>
           <p:nvPr/>
         </p:nvSpPr>
@@ -2081,7 +2213,7 @@
       </p:sp>
       <p:sp>
         <p:nvSpPr>
-          <p:cNvPr id="6" name="Text 3"/>
+          <p:cNvPr id="8" name="Text 5"/>
           <p:cNvSpPr txBox="1"/>
           <p:nvPr/>
         </p:nvSpPr>
@@ -2120,7 +2252,7 @@
       </p:sp>
       <p:sp>
         <p:nvSpPr>
-          <p:cNvPr id="7" name="Text 4"/>
+          <p:cNvPr id="9" name="Text 6"/>
           <p:cNvSpPr txBox="1"/>
           <p:nvPr/>
         </p:nvSpPr>
@@ -2162,7 +2294,7 @@
       </p:sp>
       <p:sp>
         <p:nvSpPr>
-          <p:cNvPr id="8" name="Text 5"/>
+          <p:cNvPr id="10" name="Text 7"/>
           <p:cNvSpPr txBox="1"/>
           <p:nvPr/>
         </p:nvSpPr>
@@ -2201,7 +2333,7 @@
       </p:sp>
       <p:sp>
         <p:nvSpPr>
-          <p:cNvPr id="9" name="Text 6"/>
+          <p:cNvPr id="11" name="Text 8"/>
           <p:cNvSpPr txBox="1"/>
           <p:nvPr/>
         </p:nvSpPr>
@@ -2243,7 +2375,7 @@
       </p:sp>
       <p:sp>
         <p:nvSpPr>
-          <p:cNvPr id="10" name="Text 7"/>
+          <p:cNvPr id="12" name="Text 9"/>
           <p:cNvSpPr txBox="1"/>
           <p:nvPr/>
         </p:nvSpPr>
@@ -2282,7 +2414,7 @@
       </p:sp>
       <p:sp>
         <p:nvSpPr>
-          <p:cNvPr id="11" name="Text 8"/>
+          <p:cNvPr id="13" name="Text 10"/>
           <p:cNvSpPr txBox="1"/>
           <p:nvPr/>
         </p:nvSpPr>
@@ -2321,7 +2453,7 @@
       </p:sp>
       <p:sp>
         <p:nvSpPr>
-          <p:cNvPr id="12" name="Text 9"/>
+          <p:cNvPr id="14" name="Text 11"/>
           <p:cNvSpPr txBox="1"/>
           <p:nvPr/>
         </p:nvSpPr>
@@ -2363,7 +2495,7 @@
       </p:sp>
       <p:sp>
         <p:nvSpPr>
-          <p:cNvPr id="13" name="Text 10"/>
+          <p:cNvPr id="15" name="Text 12"/>
           <p:cNvSpPr txBox="1"/>
           <p:nvPr/>
         </p:nvSpPr>
@@ -2402,7 +2534,7 @@
       </p:sp>
       <p:sp>
         <p:nvSpPr>
-          <p:cNvPr id="14" name="Text 11"/>
+          <p:cNvPr id="16" name="Text 13"/>
           <p:cNvSpPr txBox="1"/>
           <p:nvPr/>
         </p:nvSpPr>
@@ -2441,7 +2573,7 @@
       </p:sp>
       <p:sp>
         <p:nvSpPr>
-          <p:cNvPr id="15" name="Text 12"/>
+          <p:cNvPr id="17" name="Text 14"/>
           <p:cNvSpPr txBox="1"/>
           <p:nvPr/>
         </p:nvSpPr>
@@ -2483,7 +2615,7 @@
       </p:sp>
       <p:sp>
         <p:nvSpPr>
-          <p:cNvPr id="16" name="Text 13"/>
+          <p:cNvPr id="18" name="Text 15"/>
           <p:cNvSpPr txBox="1"/>
           <p:nvPr/>
         </p:nvSpPr>
@@ -2552,9 +2684,59 @@
           <a:chExt cx="0" cy="0"/>
         </a:xfrm>
       </p:grpSpPr>
+      <p:sp>
+        <p:nvSpPr>
+          <p:cNvPr id="2" name="Shape 0"/>
+          <p:cNvSpPr/>
+          <p:nvPr/>
+        </p:nvSpPr>
+        <p:spPr>
+          <a:xfrm>
+            <a:off x="0" y="6620256"/>
+            <a:ext cx="9144000" cy="237744"/>
+          </a:xfrm>
+          <a:prstGeom prst="rect">
+            <a:avLst/>
+          </a:prstGeom>
+          <a:solidFill>
+            <a:srgbClr val="4FADD1"/>
+          </a:solidFill>
+          <a:ln w="6350">
+            <a:solidFill>
+              <a:srgbClr val="4FADD1"/>
+            </a:solidFill>
+            <a:prstDash val="solid"/>
+          </a:ln>
+        </p:spPr>
+      </p:sp>
+      <p:sp>
+        <p:nvSpPr>
+          <p:cNvPr id="3" name="Shape 1"/>
+          <p:cNvSpPr/>
+          <p:nvPr/>
+        </p:nvSpPr>
+        <p:spPr>
+          <a:xfrm>
+            <a:off x="0" y="0"/>
+            <a:ext cx="9144000" cy="713232"/>
+          </a:xfrm>
+          <a:prstGeom prst="rect">
+            <a:avLst/>
+          </a:prstGeom>
+          <a:solidFill>
+            <a:srgbClr val="4FADD1"/>
+          </a:solidFill>
+          <a:ln w="6350">
+            <a:solidFill>
+              <a:srgbClr val="4FADD1"/>
+            </a:solidFill>
+            <a:prstDash val="solid"/>
+          </a:ln>
+        </p:spPr>
+      </p:sp>
       <p:pic>
         <p:nvPicPr>
-          <p:cNvPr id="2" name="Image 0" descr="정석항공과학고등학교 교표">    </p:cNvPr>
+          <p:cNvPr id="4" name="Image 0" descr="정석항공과학고등학교 교표">    </p:cNvPr>
           <p:cNvPicPr>
             <a:picLocks noChangeAspect="1"/>
           </p:cNvPicPr>
@@ -2568,7 +2750,7 @@
         </p:blipFill>
         <p:spPr>
           <a:xfrm>
-            <a:off x="7973568" y="256032"/>
+            <a:off x="7973568" y="201168"/>
             <a:ext cx="713232" cy="305410"/>
           </a:xfrm>
           <a:prstGeom prst="rect">
@@ -2578,13 +2760,13 @@
       </p:pic>
       <p:sp>
         <p:nvSpPr>
-          <p:cNvPr id="3" name="Text 0"/>
+          <p:cNvPr id="5" name="Text 2"/>
           <p:cNvSpPr txBox="1"/>
           <p:nvPr/>
         </p:nvSpPr>
         <p:spPr>
           <a:xfrm>
-            <a:off x="3657600" y="6345936"/>
+            <a:off x="3657600" y="6291072"/>
             <a:ext cx="1828800" cy="274320"/>
           </a:xfrm>
           <a:prstGeom prst="rect">
@@ -2617,13 +2799,13 @@
       </p:sp>
       <p:sp>
         <p:nvSpPr>
-          <p:cNvPr id="4" name="Text 1"/>
+          <p:cNvPr id="6" name="Text 3"/>
           <p:cNvSpPr txBox="1"/>
           <p:nvPr/>
         </p:nvSpPr>
         <p:spPr>
           <a:xfrm>
-            <a:off x="457200" y="237744"/>
+            <a:off x="457200" y="82296"/>
             <a:ext cx="7132320" cy="548640"/>
           </a:xfrm>
           <a:prstGeom prst="rect">
@@ -2640,9 +2822,9 @@
               <a:buNone/>
             </a:pPr>
             <a:r>
-              <a:rPr lang="en-US" sz="2800" dirty="0">
+              <a:rPr lang="en-US" sz="2600" dirty="0">
                 <a:solidFill>
-                  <a:srgbClr val="000000"/>
+                  <a:srgbClr val="FFFFFF"/>
                 </a:solidFill>
                 <a:latin typeface="HY헤드라인M" pitchFamily="34" charset="0"/>
                 <a:ea typeface="HY헤드라인M" pitchFamily="34" charset="-122"/>
@@ -2650,13 +2832,13 @@
               </a:rPr>
               <a:t>10. 채용 계획 요약</a:t>
             </a:r>
-            <a:endParaRPr lang="en-US" sz="2800" dirty="0"/>
+            <a:endParaRPr lang="en-US" sz="2600" dirty="0"/>
           </a:p>
         </p:txBody>
       </p:sp>
       <p:sp>
         <p:nvSpPr>
-          <p:cNvPr id="5" name="Text 2"/>
+          <p:cNvPr id="7" name="Text 4"/>
           <p:cNvSpPr txBox="1"/>
           <p:nvPr/>
         </p:nvSpPr>
@@ -3787,7 +3969,7 @@
       </p:graphicFrame>
       <p:sp>
         <p:nvSpPr>
-          <p:cNvPr id="7" name="Text 3"/>
+          <p:cNvPr id="9" name="Text 5"/>
           <p:cNvSpPr txBox="1"/>
           <p:nvPr/>
         </p:nvSpPr>
@@ -4487,9 +4669,59 @@
           <a:chExt cx="0" cy="0"/>
         </a:xfrm>
       </p:grpSpPr>
+      <p:sp>
+        <p:nvSpPr>
+          <p:cNvPr id="2" name="Shape 0"/>
+          <p:cNvSpPr/>
+          <p:nvPr/>
+        </p:nvSpPr>
+        <p:spPr>
+          <a:xfrm>
+            <a:off x="0" y="6620256"/>
+            <a:ext cx="9144000" cy="237744"/>
+          </a:xfrm>
+          <a:prstGeom prst="rect">
+            <a:avLst/>
+          </a:prstGeom>
+          <a:solidFill>
+            <a:srgbClr val="4FADD1"/>
+          </a:solidFill>
+          <a:ln w="6350">
+            <a:solidFill>
+              <a:srgbClr val="4FADD1"/>
+            </a:solidFill>
+            <a:prstDash val="solid"/>
+          </a:ln>
+        </p:spPr>
+      </p:sp>
+      <p:sp>
+        <p:nvSpPr>
+          <p:cNvPr id="3" name="Shape 1"/>
+          <p:cNvSpPr/>
+          <p:nvPr/>
+        </p:nvSpPr>
+        <p:spPr>
+          <a:xfrm>
+            <a:off x="0" y="0"/>
+            <a:ext cx="9144000" cy="713232"/>
+          </a:xfrm>
+          <a:prstGeom prst="rect">
+            <a:avLst/>
+          </a:prstGeom>
+          <a:solidFill>
+            <a:srgbClr val="4FADD1"/>
+          </a:solidFill>
+          <a:ln w="6350">
+            <a:solidFill>
+              <a:srgbClr val="4FADD1"/>
+            </a:solidFill>
+            <a:prstDash val="solid"/>
+          </a:ln>
+        </p:spPr>
+      </p:sp>
       <p:pic>
         <p:nvPicPr>
-          <p:cNvPr id="2" name="Image 0" descr="정석항공과학고등학교 교표">    </p:cNvPr>
+          <p:cNvPr id="4" name="Image 0" descr="정석항공과학고등학교 교표">    </p:cNvPr>
           <p:cNvPicPr>
             <a:picLocks noChangeAspect="1"/>
           </p:cNvPicPr>
@@ -4503,7 +4735,7 @@
         </p:blipFill>
         <p:spPr>
           <a:xfrm>
-            <a:off x="7973568" y="256032"/>
+            <a:off x="7973568" y="201168"/>
             <a:ext cx="713232" cy="305410"/>
           </a:xfrm>
           <a:prstGeom prst="rect">
@@ -4513,13 +4745,13 @@
       </p:pic>
       <p:sp>
         <p:nvSpPr>
-          <p:cNvPr id="3" name="Text 0"/>
+          <p:cNvPr id="5" name="Text 2"/>
           <p:cNvSpPr txBox="1"/>
           <p:nvPr/>
         </p:nvSpPr>
         <p:spPr>
           <a:xfrm>
-            <a:off x="3657600" y="6345936"/>
+            <a:off x="3657600" y="6291072"/>
             <a:ext cx="1828800" cy="274320"/>
           </a:xfrm>
           <a:prstGeom prst="rect">
@@ -4552,13 +4784,13 @@
       </p:sp>
       <p:sp>
         <p:nvSpPr>
-          <p:cNvPr id="4" name="Text 1"/>
+          <p:cNvPr id="6" name="Text 3"/>
           <p:cNvSpPr txBox="1"/>
           <p:nvPr/>
         </p:nvSpPr>
         <p:spPr>
           <a:xfrm>
-            <a:off x="457200" y="237744"/>
+            <a:off x="457200" y="82296"/>
             <a:ext cx="7132320" cy="548640"/>
           </a:xfrm>
           <a:prstGeom prst="rect">
@@ -4575,9 +4807,9 @@
               <a:buNone/>
             </a:pPr>
             <a:r>
-              <a:rPr lang="en-US" sz="2800" dirty="0">
+              <a:rPr lang="en-US" sz="2600" dirty="0">
                 <a:solidFill>
-                  <a:srgbClr val="000000"/>
+                  <a:srgbClr val="FFFFFF"/>
                 </a:solidFill>
                 <a:latin typeface="HY헤드라인M" pitchFamily="34" charset="0"/>
                 <a:ea typeface="HY헤드라인M" pitchFamily="34" charset="-122"/>
@@ -4585,13 +4817,13 @@
               </a:rPr>
               <a:t>1. 채용 인원 및 채용 사유</a:t>
             </a:r>
-            <a:endParaRPr lang="en-US" sz="2800" dirty="0"/>
+            <a:endParaRPr lang="en-US" sz="2600" dirty="0"/>
           </a:p>
         </p:txBody>
       </p:sp>
       <p:sp>
         <p:nvSpPr>
-          <p:cNvPr id="5" name="Text 2"/>
+          <p:cNvPr id="7" name="Text 4"/>
           <p:cNvSpPr txBox="1"/>
           <p:nvPr/>
         </p:nvSpPr>
@@ -4630,7 +4862,7 @@
       </p:sp>
       <p:sp>
         <p:nvSpPr>
-          <p:cNvPr id="6" name="Text 3"/>
+          <p:cNvPr id="8" name="Text 5"/>
           <p:cNvSpPr txBox="1"/>
           <p:nvPr/>
         </p:nvSpPr>
@@ -4669,7 +4901,7 @@
       </p:sp>
       <p:sp>
         <p:nvSpPr>
-          <p:cNvPr id="7" name="Text 4"/>
+          <p:cNvPr id="9" name="Text 6"/>
           <p:cNvSpPr txBox="1"/>
           <p:nvPr/>
         </p:nvSpPr>
@@ -4711,7 +4943,7 @@
       </p:sp>
       <p:sp>
         <p:nvSpPr>
-          <p:cNvPr id="8" name="Text 5"/>
+          <p:cNvPr id="10" name="Text 7"/>
           <p:cNvSpPr txBox="1"/>
           <p:nvPr/>
         </p:nvSpPr>
@@ -4750,7 +4982,7 @@
       </p:sp>
       <p:sp>
         <p:nvSpPr>
-          <p:cNvPr id="9" name="Text 6"/>
+          <p:cNvPr id="11" name="Text 8"/>
           <p:cNvSpPr txBox="1"/>
           <p:nvPr/>
         </p:nvSpPr>
@@ -4789,7 +5021,7 @@
       </p:sp>
       <p:sp>
         <p:nvSpPr>
-          <p:cNvPr id="10" name="Text 7"/>
+          <p:cNvPr id="12" name="Text 9"/>
           <p:cNvSpPr txBox="1"/>
           <p:nvPr/>
         </p:nvSpPr>
@@ -4831,7 +5063,7 @@
       </p:sp>
       <p:sp>
         <p:nvSpPr>
-          <p:cNvPr id="11" name="Text 8"/>
+          <p:cNvPr id="13" name="Text 10"/>
           <p:cNvSpPr txBox="1"/>
           <p:nvPr/>
         </p:nvSpPr>
@@ -4870,7 +5102,7 @@
       </p:sp>
       <p:sp>
         <p:nvSpPr>
-          <p:cNvPr id="12" name="Text 9"/>
+          <p:cNvPr id="14" name="Text 11"/>
           <p:cNvSpPr txBox="1"/>
           <p:nvPr/>
         </p:nvSpPr>
@@ -4912,7 +5144,7 @@
       </p:sp>
       <p:sp>
         <p:nvSpPr>
-          <p:cNvPr id="13" name="Text 10"/>
+          <p:cNvPr id="15" name="Text 12"/>
           <p:cNvSpPr txBox="1"/>
           <p:nvPr/>
         </p:nvSpPr>
@@ -5653,7 +5885,7 @@
       </p:graphicFrame>
       <p:sp>
         <p:nvSpPr>
-          <p:cNvPr id="15" name="Text 11"/>
+          <p:cNvPr id="17" name="Text 13"/>
           <p:cNvSpPr txBox="1"/>
           <p:nvPr/>
         </p:nvSpPr>
@@ -5722,9 +5954,59 @@
           <a:chExt cx="0" cy="0"/>
         </a:xfrm>
       </p:grpSpPr>
+      <p:sp>
+        <p:nvSpPr>
+          <p:cNvPr id="2" name="Shape 0"/>
+          <p:cNvSpPr/>
+          <p:nvPr/>
+        </p:nvSpPr>
+        <p:spPr>
+          <a:xfrm>
+            <a:off x="0" y="6620256"/>
+            <a:ext cx="9144000" cy="237744"/>
+          </a:xfrm>
+          <a:prstGeom prst="rect">
+            <a:avLst/>
+          </a:prstGeom>
+          <a:solidFill>
+            <a:srgbClr val="4FADD1"/>
+          </a:solidFill>
+          <a:ln w="6350">
+            <a:solidFill>
+              <a:srgbClr val="4FADD1"/>
+            </a:solidFill>
+            <a:prstDash val="solid"/>
+          </a:ln>
+        </p:spPr>
+      </p:sp>
+      <p:sp>
+        <p:nvSpPr>
+          <p:cNvPr id="3" name="Shape 1"/>
+          <p:cNvSpPr/>
+          <p:nvPr/>
+        </p:nvSpPr>
+        <p:spPr>
+          <a:xfrm>
+            <a:off x="0" y="0"/>
+            <a:ext cx="9144000" cy="713232"/>
+          </a:xfrm>
+          <a:prstGeom prst="rect">
+            <a:avLst/>
+          </a:prstGeom>
+          <a:solidFill>
+            <a:srgbClr val="4FADD1"/>
+          </a:solidFill>
+          <a:ln w="6350">
+            <a:solidFill>
+              <a:srgbClr val="4FADD1"/>
+            </a:solidFill>
+            <a:prstDash val="solid"/>
+          </a:ln>
+        </p:spPr>
+      </p:sp>
       <p:pic>
         <p:nvPicPr>
-          <p:cNvPr id="2" name="Image 0" descr="정석항공과학고등학교 교표">    </p:cNvPr>
+          <p:cNvPr id="4" name="Image 0" descr="정석항공과학고등학교 교표">    </p:cNvPr>
           <p:cNvPicPr>
             <a:picLocks noChangeAspect="1"/>
           </p:cNvPicPr>
@@ -5738,7 +6020,7 @@
         </p:blipFill>
         <p:spPr>
           <a:xfrm>
-            <a:off x="7973568" y="256032"/>
+            <a:off x="7973568" y="201168"/>
             <a:ext cx="713232" cy="305410"/>
           </a:xfrm>
           <a:prstGeom prst="rect">
@@ -5748,13 +6030,13 @@
       </p:pic>
       <p:sp>
         <p:nvSpPr>
-          <p:cNvPr id="3" name="Text 0"/>
+          <p:cNvPr id="5" name="Text 2"/>
           <p:cNvSpPr txBox="1"/>
           <p:nvPr/>
         </p:nvSpPr>
         <p:spPr>
           <a:xfrm>
-            <a:off x="3657600" y="6345936"/>
+            <a:off x="3657600" y="6291072"/>
             <a:ext cx="1828800" cy="274320"/>
           </a:xfrm>
           <a:prstGeom prst="rect">
@@ -5787,13 +6069,13 @@
       </p:sp>
       <p:sp>
         <p:nvSpPr>
-          <p:cNvPr id="4" name="Text 1"/>
+          <p:cNvPr id="6" name="Text 3"/>
           <p:cNvSpPr txBox="1"/>
           <p:nvPr/>
         </p:nvSpPr>
         <p:spPr>
           <a:xfrm>
-            <a:off x="457200" y="237744"/>
+            <a:off x="457200" y="82296"/>
             <a:ext cx="7132320" cy="548640"/>
           </a:xfrm>
           <a:prstGeom prst="rect">
@@ -5810,9 +6092,9 @@
               <a:buNone/>
             </a:pPr>
             <a:r>
-              <a:rPr lang="en-US" sz="2800" dirty="0">
+              <a:rPr lang="en-US" sz="2600" dirty="0">
                 <a:solidFill>
-                  <a:srgbClr val="000000"/>
+                  <a:srgbClr val="FFFFFF"/>
                 </a:solidFill>
                 <a:latin typeface="HY헤드라인M" pitchFamily="34" charset="0"/>
                 <a:ea typeface="HY헤드라인M" pitchFamily="34" charset="-122"/>
@@ -5820,13 +6102,13 @@
               </a:rPr>
               <a:t>2. 직원 현황</a:t>
             </a:r>
-            <a:endParaRPr lang="en-US" sz="2800" dirty="0"/>
+            <a:endParaRPr lang="en-US" sz="2600" dirty="0"/>
           </a:p>
         </p:txBody>
       </p:sp>
       <p:sp>
         <p:nvSpPr>
-          <p:cNvPr id="5" name="Text 2"/>
+          <p:cNvPr id="7" name="Text 4"/>
           <p:cNvSpPr txBox="1"/>
           <p:nvPr/>
         </p:nvSpPr>
@@ -5865,7 +6147,7 @@
       </p:sp>
       <p:sp>
         <p:nvSpPr>
-          <p:cNvPr id="6" name="Text 3"/>
+          <p:cNvPr id="8" name="Text 5"/>
           <p:cNvSpPr txBox="1"/>
           <p:nvPr/>
         </p:nvSpPr>
@@ -8518,7 +8800,7 @@
       </p:graphicFrame>
       <p:sp>
         <p:nvSpPr>
-          <p:cNvPr id="8" name="Text 4"/>
+          <p:cNvPr id="10" name="Text 6"/>
           <p:cNvSpPr txBox="1"/>
           <p:nvPr/>
         </p:nvSpPr>
@@ -8557,7 +8839,7 @@
       </p:sp>
       <p:sp>
         <p:nvSpPr>
-          <p:cNvPr id="9" name="Text 5"/>
+          <p:cNvPr id="11" name="Text 7"/>
           <p:cNvSpPr txBox="1"/>
           <p:nvPr/>
         </p:nvSpPr>
@@ -9517,7 +9799,7 @@
       </p:graphicFrame>
       <p:sp>
         <p:nvSpPr>
-          <p:cNvPr id="11" name="Text 6"/>
+          <p:cNvPr id="13" name="Text 8"/>
           <p:cNvSpPr txBox="1"/>
           <p:nvPr/>
         </p:nvSpPr>
@@ -9586,9 +9868,59 @@
           <a:chExt cx="0" cy="0"/>
         </a:xfrm>
       </p:grpSpPr>
+      <p:sp>
+        <p:nvSpPr>
+          <p:cNvPr id="2" name="Shape 0"/>
+          <p:cNvSpPr/>
+          <p:nvPr/>
+        </p:nvSpPr>
+        <p:spPr>
+          <a:xfrm>
+            <a:off x="0" y="6620256"/>
+            <a:ext cx="9144000" cy="237744"/>
+          </a:xfrm>
+          <a:prstGeom prst="rect">
+            <a:avLst/>
+          </a:prstGeom>
+          <a:solidFill>
+            <a:srgbClr val="4FADD1"/>
+          </a:solidFill>
+          <a:ln w="6350">
+            <a:solidFill>
+              <a:srgbClr val="4FADD1"/>
+            </a:solidFill>
+            <a:prstDash val="solid"/>
+          </a:ln>
+        </p:spPr>
+      </p:sp>
+      <p:sp>
+        <p:nvSpPr>
+          <p:cNvPr id="3" name="Shape 1"/>
+          <p:cNvSpPr/>
+          <p:nvPr/>
+        </p:nvSpPr>
+        <p:spPr>
+          <a:xfrm>
+            <a:off x="0" y="0"/>
+            <a:ext cx="9144000" cy="713232"/>
+          </a:xfrm>
+          <a:prstGeom prst="rect">
+            <a:avLst/>
+          </a:prstGeom>
+          <a:solidFill>
+            <a:srgbClr val="4FADD1"/>
+          </a:solidFill>
+          <a:ln w="6350">
+            <a:solidFill>
+              <a:srgbClr val="4FADD1"/>
+            </a:solidFill>
+            <a:prstDash val="solid"/>
+          </a:ln>
+        </p:spPr>
+      </p:sp>
       <p:pic>
         <p:nvPicPr>
-          <p:cNvPr id="2" name="Image 0" descr="정석항공과학고등학교 교표">    </p:cNvPr>
+          <p:cNvPr id="4" name="Image 0" descr="정석항공과학고등학교 교표">    </p:cNvPr>
           <p:cNvPicPr>
             <a:picLocks noChangeAspect="1"/>
           </p:cNvPicPr>
@@ -9602,7 +9934,7 @@
         </p:blipFill>
         <p:spPr>
           <a:xfrm>
-            <a:off x="7973568" y="256032"/>
+            <a:off x="7973568" y="201168"/>
             <a:ext cx="713232" cy="305410"/>
           </a:xfrm>
           <a:prstGeom prst="rect">
@@ -9612,13 +9944,13 @@
       </p:pic>
       <p:sp>
         <p:nvSpPr>
-          <p:cNvPr id="3" name="Text 0"/>
+          <p:cNvPr id="5" name="Text 2"/>
           <p:cNvSpPr txBox="1"/>
           <p:nvPr/>
         </p:nvSpPr>
         <p:spPr>
           <a:xfrm>
-            <a:off x="3657600" y="6345936"/>
+            <a:off x="3657600" y="6291072"/>
             <a:ext cx="1828800" cy="274320"/>
           </a:xfrm>
           <a:prstGeom prst="rect">
@@ -9651,13 +9983,13 @@
       </p:sp>
       <p:sp>
         <p:nvSpPr>
-          <p:cNvPr id="4" name="Text 1"/>
+          <p:cNvPr id="6" name="Text 3"/>
           <p:cNvSpPr txBox="1"/>
           <p:nvPr/>
         </p:nvSpPr>
         <p:spPr>
           <a:xfrm>
-            <a:off x="457200" y="237744"/>
+            <a:off x="457200" y="82296"/>
             <a:ext cx="7132320" cy="548640"/>
           </a:xfrm>
           <a:prstGeom prst="rect">
@@ -9674,9 +10006,9 @@
               <a:buNone/>
             </a:pPr>
             <a:r>
-              <a:rPr lang="en-US" sz="2800" dirty="0">
+              <a:rPr lang="en-US" sz="2600" dirty="0">
                 <a:solidFill>
-                  <a:srgbClr val="000000"/>
+                  <a:srgbClr val="FFFFFF"/>
                 </a:solidFill>
                 <a:latin typeface="HY헤드라인M" pitchFamily="34" charset="0"/>
                 <a:ea typeface="HY헤드라인M" pitchFamily="34" charset="-122"/>
@@ -9684,13 +10016,13 @@
               </a:rPr>
               <a:t>3. 채용 계획</a:t>
             </a:r>
-            <a:endParaRPr lang="en-US" sz="2800" dirty="0"/>
+            <a:endParaRPr lang="en-US" sz="2600" dirty="0"/>
           </a:p>
         </p:txBody>
       </p:sp>
       <p:sp>
         <p:nvSpPr>
-          <p:cNvPr id="5" name="Text 2"/>
+          <p:cNvPr id="7" name="Text 4"/>
           <p:cNvSpPr txBox="1"/>
           <p:nvPr/>
         </p:nvSpPr>
@@ -9729,7 +10061,7 @@
       </p:sp>
       <p:sp>
         <p:nvSpPr>
-          <p:cNvPr id="6" name="Shape 3"/>
+          <p:cNvPr id="8" name="Shape 5"/>
           <p:cNvSpPr/>
           <p:nvPr/>
         </p:nvSpPr>
@@ -9754,7 +10086,7 @@
       </p:sp>
       <p:sp>
         <p:nvSpPr>
-          <p:cNvPr id="7" name="Text 4"/>
+          <p:cNvPr id="9" name="Text 6"/>
           <p:cNvSpPr txBox="1"/>
           <p:nvPr/>
         </p:nvSpPr>
@@ -9816,7 +10148,7 @@
       </p:sp>
       <p:sp>
         <p:nvSpPr>
-          <p:cNvPr id="8" name="Shape 5"/>
+          <p:cNvPr id="10" name="Shape 7"/>
           <p:cNvSpPr/>
           <p:nvPr/>
         </p:nvSpPr>
@@ -9841,7 +10173,7 @@
       </p:sp>
       <p:sp>
         <p:nvSpPr>
-          <p:cNvPr id="9" name="Text 6"/>
+          <p:cNvPr id="11" name="Text 8"/>
           <p:cNvSpPr txBox="1"/>
           <p:nvPr/>
         </p:nvSpPr>
@@ -9883,7 +10215,7 @@
       </p:sp>
       <p:sp>
         <p:nvSpPr>
-          <p:cNvPr id="10" name="Shape 7"/>
+          <p:cNvPr id="12" name="Shape 9"/>
           <p:cNvSpPr/>
           <p:nvPr/>
         </p:nvSpPr>
@@ -9903,7 +10235,7 @@
       </p:sp>
       <p:sp>
         <p:nvSpPr>
-          <p:cNvPr id="11" name="Shape 8"/>
+          <p:cNvPr id="13" name="Shape 10"/>
           <p:cNvSpPr/>
           <p:nvPr/>
         </p:nvSpPr>
@@ -9928,7 +10260,7 @@
       </p:sp>
       <p:sp>
         <p:nvSpPr>
-          <p:cNvPr id="12" name="Text 9"/>
+          <p:cNvPr id="14" name="Text 11"/>
           <p:cNvSpPr txBox="1"/>
           <p:nvPr/>
         </p:nvSpPr>
@@ -9990,7 +10322,7 @@
       </p:sp>
       <p:sp>
         <p:nvSpPr>
-          <p:cNvPr id="13" name="Shape 10"/>
+          <p:cNvPr id="15" name="Shape 12"/>
           <p:cNvSpPr/>
           <p:nvPr/>
         </p:nvSpPr>
@@ -10015,7 +10347,7 @@
       </p:sp>
       <p:sp>
         <p:nvSpPr>
-          <p:cNvPr id="14" name="Text 11"/>
+          <p:cNvPr id="16" name="Text 13"/>
           <p:cNvSpPr txBox="1"/>
           <p:nvPr/>
         </p:nvSpPr>
@@ -10057,7 +10389,7 @@
       </p:sp>
       <p:sp>
         <p:nvSpPr>
-          <p:cNvPr id="15" name="Shape 12"/>
+          <p:cNvPr id="17" name="Shape 14"/>
           <p:cNvSpPr/>
           <p:nvPr/>
         </p:nvSpPr>
@@ -10077,7 +10409,7 @@
       </p:sp>
       <p:sp>
         <p:nvSpPr>
-          <p:cNvPr id="16" name="Shape 13"/>
+          <p:cNvPr id="18" name="Shape 15"/>
           <p:cNvSpPr/>
           <p:nvPr/>
         </p:nvSpPr>
@@ -10102,7 +10434,7 @@
       </p:sp>
       <p:sp>
         <p:nvSpPr>
-          <p:cNvPr id="17" name="Text 14"/>
+          <p:cNvPr id="19" name="Text 16"/>
           <p:cNvSpPr txBox="1"/>
           <p:nvPr/>
         </p:nvSpPr>
@@ -10184,7 +10516,7 @@
       </p:sp>
       <p:sp>
         <p:nvSpPr>
-          <p:cNvPr id="18" name="Shape 15"/>
+          <p:cNvPr id="20" name="Shape 17"/>
           <p:cNvSpPr/>
           <p:nvPr/>
         </p:nvSpPr>
@@ -10209,7 +10541,7 @@
       </p:sp>
       <p:sp>
         <p:nvSpPr>
-          <p:cNvPr id="19" name="Text 16"/>
+          <p:cNvPr id="21" name="Text 18"/>
           <p:cNvSpPr txBox="1"/>
           <p:nvPr/>
         </p:nvSpPr>
@@ -10251,7 +10583,7 @@
       </p:sp>
       <p:sp>
         <p:nvSpPr>
-          <p:cNvPr id="20" name="Shape 17"/>
+          <p:cNvPr id="22" name="Shape 19"/>
           <p:cNvSpPr/>
           <p:nvPr/>
         </p:nvSpPr>
@@ -10271,7 +10603,7 @@
       </p:sp>
       <p:sp>
         <p:nvSpPr>
-          <p:cNvPr id="21" name="Shape 18"/>
+          <p:cNvPr id="23" name="Shape 20"/>
           <p:cNvSpPr/>
           <p:nvPr/>
         </p:nvSpPr>
@@ -10296,7 +10628,7 @@
       </p:sp>
       <p:sp>
         <p:nvSpPr>
-          <p:cNvPr id="22" name="Text 19"/>
+          <p:cNvPr id="24" name="Text 21"/>
           <p:cNvSpPr txBox="1"/>
           <p:nvPr/>
         </p:nvSpPr>
@@ -10358,7 +10690,7 @@
       </p:sp>
       <p:sp>
         <p:nvSpPr>
-          <p:cNvPr id="23" name="Shape 20"/>
+          <p:cNvPr id="25" name="Shape 22"/>
           <p:cNvSpPr/>
           <p:nvPr/>
         </p:nvSpPr>
@@ -10383,7 +10715,7 @@
       </p:sp>
       <p:sp>
         <p:nvSpPr>
-          <p:cNvPr id="24" name="Text 21"/>
+          <p:cNvPr id="26" name="Text 23"/>
           <p:cNvSpPr txBox="1"/>
           <p:nvPr/>
         </p:nvSpPr>
@@ -10425,7 +10757,7 @@
       </p:sp>
       <p:sp>
         <p:nvSpPr>
-          <p:cNvPr id="25" name="Shape 22"/>
+          <p:cNvPr id="27" name="Shape 24"/>
           <p:cNvSpPr/>
           <p:nvPr/>
         </p:nvSpPr>
@@ -10445,7 +10777,7 @@
       </p:sp>
       <p:sp>
         <p:nvSpPr>
-          <p:cNvPr id="26" name="Shape 23"/>
+          <p:cNvPr id="28" name="Shape 25"/>
           <p:cNvSpPr/>
           <p:nvPr/>
         </p:nvSpPr>
@@ -10470,7 +10802,7 @@
       </p:sp>
       <p:sp>
         <p:nvSpPr>
-          <p:cNvPr id="27" name="Text 24"/>
+          <p:cNvPr id="29" name="Text 26"/>
           <p:cNvSpPr txBox="1"/>
           <p:nvPr/>
         </p:nvSpPr>
@@ -10512,7 +10844,7 @@
       </p:sp>
       <p:sp>
         <p:nvSpPr>
-          <p:cNvPr id="28" name="Shape 25"/>
+          <p:cNvPr id="30" name="Shape 27"/>
           <p:cNvSpPr/>
           <p:nvPr/>
         </p:nvSpPr>
@@ -10537,7 +10869,7 @@
       </p:sp>
       <p:sp>
         <p:nvSpPr>
-          <p:cNvPr id="29" name="Text 26"/>
+          <p:cNvPr id="31" name="Text 28"/>
           <p:cNvSpPr txBox="1"/>
           <p:nvPr/>
         </p:nvSpPr>
@@ -10579,7 +10911,7 @@
       </p:sp>
       <p:sp>
         <p:nvSpPr>
-          <p:cNvPr id="30" name="Text 27"/>
+          <p:cNvPr id="32" name="Text 29"/>
           <p:cNvSpPr txBox="1"/>
           <p:nvPr/>
         </p:nvSpPr>
@@ -10648,9 +10980,59 @@
           <a:chExt cx="0" cy="0"/>
         </a:xfrm>
       </p:grpSpPr>
+      <p:sp>
+        <p:nvSpPr>
+          <p:cNvPr id="2" name="Shape 0"/>
+          <p:cNvSpPr/>
+          <p:nvPr/>
+        </p:nvSpPr>
+        <p:spPr>
+          <a:xfrm>
+            <a:off x="0" y="6620256"/>
+            <a:ext cx="9144000" cy="237744"/>
+          </a:xfrm>
+          <a:prstGeom prst="rect">
+            <a:avLst/>
+          </a:prstGeom>
+          <a:solidFill>
+            <a:srgbClr val="4FADD1"/>
+          </a:solidFill>
+          <a:ln w="6350">
+            <a:solidFill>
+              <a:srgbClr val="4FADD1"/>
+            </a:solidFill>
+            <a:prstDash val="solid"/>
+          </a:ln>
+        </p:spPr>
+      </p:sp>
+      <p:sp>
+        <p:nvSpPr>
+          <p:cNvPr id="3" name="Shape 1"/>
+          <p:cNvSpPr/>
+          <p:nvPr/>
+        </p:nvSpPr>
+        <p:spPr>
+          <a:xfrm>
+            <a:off x="0" y="0"/>
+            <a:ext cx="9144000" cy="713232"/>
+          </a:xfrm>
+          <a:prstGeom prst="rect">
+            <a:avLst/>
+          </a:prstGeom>
+          <a:solidFill>
+            <a:srgbClr val="4FADD1"/>
+          </a:solidFill>
+          <a:ln w="6350">
+            <a:solidFill>
+              <a:srgbClr val="4FADD1"/>
+            </a:solidFill>
+            <a:prstDash val="solid"/>
+          </a:ln>
+        </p:spPr>
+      </p:sp>
       <p:pic>
         <p:nvPicPr>
-          <p:cNvPr id="2" name="Image 0" descr="정석항공과학고등학교 교표">    </p:cNvPr>
+          <p:cNvPr id="4" name="Image 0" descr="정석항공과학고등학교 교표">    </p:cNvPr>
           <p:cNvPicPr>
             <a:picLocks noChangeAspect="1"/>
           </p:cNvPicPr>
@@ -10664,7 +11046,7 @@
         </p:blipFill>
         <p:spPr>
           <a:xfrm>
-            <a:off x="7973568" y="256032"/>
+            <a:off x="7973568" y="201168"/>
             <a:ext cx="713232" cy="305410"/>
           </a:xfrm>
           <a:prstGeom prst="rect">
@@ -10674,13 +11056,13 @@
       </p:pic>
       <p:sp>
         <p:nvSpPr>
-          <p:cNvPr id="3" name="Text 0"/>
+          <p:cNvPr id="5" name="Text 2"/>
           <p:cNvSpPr txBox="1"/>
           <p:nvPr/>
         </p:nvSpPr>
         <p:spPr>
           <a:xfrm>
-            <a:off x="3657600" y="6345936"/>
+            <a:off x="3657600" y="6291072"/>
             <a:ext cx="1828800" cy="274320"/>
           </a:xfrm>
           <a:prstGeom prst="rect">
@@ -10713,13 +11095,13 @@
       </p:sp>
       <p:sp>
         <p:nvSpPr>
-          <p:cNvPr id="4" name="Text 1"/>
+          <p:cNvPr id="6" name="Text 3"/>
           <p:cNvSpPr txBox="1"/>
           <p:nvPr/>
         </p:nvSpPr>
         <p:spPr>
           <a:xfrm>
-            <a:off x="457200" y="237744"/>
+            <a:off x="457200" y="82296"/>
             <a:ext cx="7132320" cy="548640"/>
           </a:xfrm>
           <a:prstGeom prst="rect">
@@ -10736,9 +11118,9 @@
               <a:buNone/>
             </a:pPr>
             <a:r>
-              <a:rPr lang="en-US" sz="2800" dirty="0">
+              <a:rPr lang="en-US" sz="2600" dirty="0">
                 <a:solidFill>
-                  <a:srgbClr val="000000"/>
+                  <a:srgbClr val="FFFFFF"/>
                 </a:solidFill>
                 <a:latin typeface="HY헤드라인M" pitchFamily="34" charset="0"/>
                 <a:ea typeface="HY헤드라인M" pitchFamily="34" charset="-122"/>
@@ -10746,13 +11128,13 @@
               </a:rPr>
               <a:t>4. 전형 절차</a:t>
             </a:r>
-            <a:endParaRPr lang="en-US" sz="2800" dirty="0"/>
+            <a:endParaRPr lang="en-US" sz="2600" dirty="0"/>
           </a:p>
         </p:txBody>
       </p:sp>
       <p:sp>
         <p:nvSpPr>
-          <p:cNvPr id="5" name="Text 2"/>
+          <p:cNvPr id="7" name="Text 4"/>
           <p:cNvSpPr txBox="1"/>
           <p:nvPr/>
         </p:nvSpPr>
@@ -10791,7 +11173,7 @@
       </p:sp>
       <p:sp>
         <p:nvSpPr>
-          <p:cNvPr id="6" name="Shape 3"/>
+          <p:cNvPr id="8" name="Shape 5"/>
           <p:cNvSpPr/>
           <p:nvPr/>
         </p:nvSpPr>
@@ -10816,7 +11198,7 @@
       </p:sp>
       <p:sp>
         <p:nvSpPr>
-          <p:cNvPr id="7" name="Text 4"/>
+          <p:cNvPr id="9" name="Text 6"/>
           <p:cNvSpPr txBox="1"/>
           <p:nvPr/>
         </p:nvSpPr>
@@ -10858,7 +11240,7 @@
       </p:sp>
       <p:sp>
         <p:nvSpPr>
-          <p:cNvPr id="8" name="Shape 5"/>
+          <p:cNvPr id="10" name="Shape 7"/>
           <p:cNvSpPr/>
           <p:nvPr/>
         </p:nvSpPr>
@@ -10883,7 +11265,7 @@
       </p:sp>
       <p:sp>
         <p:nvSpPr>
-          <p:cNvPr id="9" name="Text 6"/>
+          <p:cNvPr id="11" name="Text 8"/>
           <p:cNvSpPr txBox="1"/>
           <p:nvPr/>
         </p:nvSpPr>
@@ -10925,7 +11307,7 @@
       </p:sp>
       <p:sp>
         <p:nvSpPr>
-          <p:cNvPr id="10" name="Shape 7"/>
+          <p:cNvPr id="12" name="Shape 9"/>
           <p:cNvSpPr/>
           <p:nvPr/>
         </p:nvSpPr>
@@ -10945,7 +11327,7 @@
       </p:sp>
       <p:sp>
         <p:nvSpPr>
-          <p:cNvPr id="11" name="Shape 8"/>
+          <p:cNvPr id="13" name="Shape 10"/>
           <p:cNvSpPr/>
           <p:nvPr/>
         </p:nvSpPr>
@@ -10970,7 +11352,7 @@
       </p:sp>
       <p:sp>
         <p:nvSpPr>
-          <p:cNvPr id="12" name="Text 9"/>
+          <p:cNvPr id="14" name="Text 11"/>
           <p:cNvSpPr txBox="1"/>
           <p:nvPr/>
         </p:nvSpPr>
@@ -11012,7 +11394,7 @@
       </p:sp>
       <p:sp>
         <p:nvSpPr>
-          <p:cNvPr id="13" name="Shape 10"/>
+          <p:cNvPr id="15" name="Shape 12"/>
           <p:cNvSpPr/>
           <p:nvPr/>
         </p:nvSpPr>
@@ -11037,7 +11419,7 @@
       </p:sp>
       <p:sp>
         <p:nvSpPr>
-          <p:cNvPr id="14" name="Text 11"/>
+          <p:cNvPr id="16" name="Text 13"/>
           <p:cNvSpPr txBox="1"/>
           <p:nvPr/>
         </p:nvSpPr>
@@ -11079,7 +11461,7 @@
       </p:sp>
       <p:sp>
         <p:nvSpPr>
-          <p:cNvPr id="15" name="Shape 12"/>
+          <p:cNvPr id="17" name="Shape 14"/>
           <p:cNvSpPr/>
           <p:nvPr/>
         </p:nvSpPr>
@@ -11099,7 +11481,7 @@
       </p:sp>
       <p:sp>
         <p:nvSpPr>
-          <p:cNvPr id="16" name="Shape 13"/>
+          <p:cNvPr id="18" name="Shape 15"/>
           <p:cNvSpPr/>
           <p:nvPr/>
         </p:nvSpPr>
@@ -11124,7 +11506,7 @@
       </p:sp>
       <p:sp>
         <p:nvSpPr>
-          <p:cNvPr id="17" name="Text 14"/>
+          <p:cNvPr id="19" name="Text 16"/>
           <p:cNvSpPr txBox="1"/>
           <p:nvPr/>
         </p:nvSpPr>
@@ -11186,7 +11568,7 @@
       </p:sp>
       <p:sp>
         <p:nvSpPr>
-          <p:cNvPr id="18" name="Shape 15"/>
+          <p:cNvPr id="20" name="Shape 17"/>
           <p:cNvSpPr/>
           <p:nvPr/>
         </p:nvSpPr>
@@ -11211,7 +11593,7 @@
       </p:sp>
       <p:sp>
         <p:nvSpPr>
-          <p:cNvPr id="19" name="Text 16"/>
+          <p:cNvPr id="21" name="Text 18"/>
           <p:cNvSpPr txBox="1"/>
           <p:nvPr/>
         </p:nvSpPr>
@@ -11273,7 +11655,7 @@
       </p:sp>
       <p:sp>
         <p:nvSpPr>
-          <p:cNvPr id="20" name="Shape 17"/>
+          <p:cNvPr id="22" name="Shape 19"/>
           <p:cNvSpPr/>
           <p:nvPr/>
         </p:nvSpPr>
@@ -11293,7 +11675,7 @@
       </p:sp>
       <p:sp>
         <p:nvSpPr>
-          <p:cNvPr id="21" name="Shape 18"/>
+          <p:cNvPr id="23" name="Shape 20"/>
           <p:cNvSpPr/>
           <p:nvPr/>
         </p:nvSpPr>
@@ -11318,7 +11700,7 @@
       </p:sp>
       <p:sp>
         <p:nvSpPr>
-          <p:cNvPr id="22" name="Text 19"/>
+          <p:cNvPr id="24" name="Text 21"/>
           <p:cNvSpPr txBox="1"/>
           <p:nvPr/>
         </p:nvSpPr>
@@ -11360,7 +11742,7 @@
       </p:sp>
       <p:sp>
         <p:nvSpPr>
-          <p:cNvPr id="23" name="Shape 20"/>
+          <p:cNvPr id="25" name="Shape 22"/>
           <p:cNvSpPr/>
           <p:nvPr/>
         </p:nvSpPr>
@@ -11385,7 +11767,7 @@
       </p:sp>
       <p:sp>
         <p:nvSpPr>
-          <p:cNvPr id="24" name="Text 21"/>
+          <p:cNvPr id="26" name="Text 23"/>
           <p:cNvSpPr txBox="1"/>
           <p:nvPr/>
         </p:nvSpPr>
@@ -11447,7 +11829,7 @@
       </p:sp>
       <p:sp>
         <p:nvSpPr>
-          <p:cNvPr id="25" name="Shape 22"/>
+          <p:cNvPr id="27" name="Shape 24"/>
           <p:cNvSpPr/>
           <p:nvPr/>
         </p:nvSpPr>
@@ -11467,7 +11849,7 @@
       </p:sp>
       <p:sp>
         <p:nvSpPr>
-          <p:cNvPr id="26" name="Shape 23"/>
+          <p:cNvPr id="28" name="Shape 25"/>
           <p:cNvSpPr/>
           <p:nvPr/>
         </p:nvSpPr>
@@ -11492,7 +11874,7 @@
       </p:sp>
       <p:sp>
         <p:nvSpPr>
-          <p:cNvPr id="27" name="Text 24"/>
+          <p:cNvPr id="29" name="Text 26"/>
           <p:cNvSpPr txBox="1"/>
           <p:nvPr/>
         </p:nvSpPr>
@@ -11534,7 +11916,7 @@
       </p:sp>
       <p:sp>
         <p:nvSpPr>
-          <p:cNvPr id="28" name="Shape 25"/>
+          <p:cNvPr id="30" name="Shape 27"/>
           <p:cNvSpPr/>
           <p:nvPr/>
         </p:nvSpPr>
@@ -11559,7 +11941,7 @@
       </p:sp>
       <p:sp>
         <p:nvSpPr>
-          <p:cNvPr id="29" name="Text 26"/>
+          <p:cNvPr id="31" name="Text 28"/>
           <p:cNvSpPr txBox="1"/>
           <p:nvPr/>
         </p:nvSpPr>
@@ -11601,7 +11983,7 @@
       </p:sp>
       <p:sp>
         <p:nvSpPr>
-          <p:cNvPr id="30" name="Text 27"/>
+          <p:cNvPr id="32" name="Text 29"/>
           <p:cNvSpPr txBox="1"/>
           <p:nvPr/>
         </p:nvSpPr>
@@ -12774,9 +13156,59 @@
           <a:chExt cx="0" cy="0"/>
         </a:xfrm>
       </p:grpSpPr>
+      <p:sp>
+        <p:nvSpPr>
+          <p:cNvPr id="2" name="Shape 0"/>
+          <p:cNvSpPr/>
+          <p:nvPr/>
+        </p:nvSpPr>
+        <p:spPr>
+          <a:xfrm>
+            <a:off x="0" y="6620256"/>
+            <a:ext cx="9144000" cy="237744"/>
+          </a:xfrm>
+          <a:prstGeom prst="rect">
+            <a:avLst/>
+          </a:prstGeom>
+          <a:solidFill>
+            <a:srgbClr val="4FADD1"/>
+          </a:solidFill>
+          <a:ln w="6350">
+            <a:solidFill>
+              <a:srgbClr val="4FADD1"/>
+            </a:solidFill>
+            <a:prstDash val="solid"/>
+          </a:ln>
+        </p:spPr>
+      </p:sp>
+      <p:sp>
+        <p:nvSpPr>
+          <p:cNvPr id="3" name="Shape 1"/>
+          <p:cNvSpPr/>
+          <p:nvPr/>
+        </p:nvSpPr>
+        <p:spPr>
+          <a:xfrm>
+            <a:off x="0" y="0"/>
+            <a:ext cx="9144000" cy="713232"/>
+          </a:xfrm>
+          <a:prstGeom prst="rect">
+            <a:avLst/>
+          </a:prstGeom>
+          <a:solidFill>
+            <a:srgbClr val="4FADD1"/>
+          </a:solidFill>
+          <a:ln w="6350">
+            <a:solidFill>
+              <a:srgbClr val="4FADD1"/>
+            </a:solidFill>
+            <a:prstDash val="solid"/>
+          </a:ln>
+        </p:spPr>
+      </p:sp>
       <p:pic>
         <p:nvPicPr>
-          <p:cNvPr id="2" name="Image 0" descr="정석항공과학고등학교 교표">    </p:cNvPr>
+          <p:cNvPr id="4" name="Image 0" descr="정석항공과학고등학교 교표">    </p:cNvPr>
           <p:cNvPicPr>
             <a:picLocks noChangeAspect="1"/>
           </p:cNvPicPr>
@@ -12790,7 +13222,7 @@
         </p:blipFill>
         <p:spPr>
           <a:xfrm>
-            <a:off x="7973568" y="256032"/>
+            <a:off x="7973568" y="201168"/>
             <a:ext cx="713232" cy="305410"/>
           </a:xfrm>
           <a:prstGeom prst="rect">
@@ -12800,13 +13232,13 @@
       </p:pic>
       <p:sp>
         <p:nvSpPr>
-          <p:cNvPr id="3" name="Text 0"/>
+          <p:cNvPr id="5" name="Text 2"/>
           <p:cNvSpPr txBox="1"/>
           <p:nvPr/>
         </p:nvSpPr>
         <p:spPr>
           <a:xfrm>
-            <a:off x="3657600" y="6345936"/>
+            <a:off x="3657600" y="6291072"/>
             <a:ext cx="1828800" cy="274320"/>
           </a:xfrm>
           <a:prstGeom prst="rect">
@@ -12839,13 +13271,13 @@
       </p:sp>
       <p:sp>
         <p:nvSpPr>
-          <p:cNvPr id="4" name="Text 1"/>
+          <p:cNvPr id="6" name="Text 3"/>
           <p:cNvSpPr txBox="1"/>
           <p:nvPr/>
         </p:nvSpPr>
         <p:spPr>
           <a:xfrm>
-            <a:off x="457200" y="237744"/>
+            <a:off x="457200" y="82296"/>
             <a:ext cx="7132320" cy="548640"/>
           </a:xfrm>
           <a:prstGeom prst="rect">
@@ -12862,9 +13294,9 @@
               <a:buNone/>
             </a:pPr>
             <a:r>
-              <a:rPr lang="en-US" sz="2800" dirty="0">
+              <a:rPr lang="en-US" sz="2600" dirty="0">
                 <a:solidFill>
-                  <a:srgbClr val="000000"/>
+                  <a:srgbClr val="FFFFFF"/>
                 </a:solidFill>
                 <a:latin typeface="HY헤드라인M" pitchFamily="34" charset="0"/>
                 <a:ea typeface="HY헤드라인M" pitchFamily="34" charset="-122"/>
@@ -12872,20 +13304,20 @@
               </a:rPr>
               <a:t>5. 지원서 접수</a:t>
             </a:r>
-            <a:endParaRPr lang="en-US" sz="2800" dirty="0"/>
+            <a:endParaRPr lang="en-US" sz="2600" dirty="0"/>
           </a:p>
         </p:txBody>
       </p:sp>
       <p:sp>
         <p:nvSpPr>
-          <p:cNvPr id="5" name="Text 2"/>
+          <p:cNvPr id="7" name="Text 4"/>
           <p:cNvSpPr txBox="1"/>
           <p:nvPr/>
         </p:nvSpPr>
         <p:spPr>
           <a:xfrm>
-            <a:off x="5029200" y="329184"/>
-            <a:ext cx="2788920" cy="310896"/>
+            <a:off x="4937760" y="201168"/>
+            <a:ext cx="2880360" cy="310896"/>
           </a:xfrm>
           <a:prstGeom prst="rect">
             <a:avLst/>
@@ -12901,9 +13333,9 @@
               <a:buNone/>
             </a:pPr>
             <a:r>
-              <a:rPr lang="en-US" sz="1200" b="1" dirty="0">
+              <a:rPr lang="en-US" sz="1150" b="1" dirty="0">
                 <a:solidFill>
-                  <a:srgbClr val="000000"/>
+                  <a:srgbClr val="FFFFFF"/>
                 </a:solidFill>
                 <a:latin typeface="맑은 고딕" pitchFamily="34" charset="0"/>
                 <a:ea typeface="맑은 고딕" pitchFamily="34" charset="-122"/>
@@ -12911,13 +13343,13 @@
               </a:rPr>
               <a:t>[ 전형 1단계 / 4단계 ]</a:t>
             </a:r>
-            <a:endParaRPr lang="en-US" sz="1200" dirty="0"/>
+            <a:endParaRPr lang="en-US" sz="1150" dirty="0"/>
           </a:p>
         </p:txBody>
       </p:sp>
       <p:sp>
         <p:nvSpPr>
-          <p:cNvPr id="6" name="Text 3"/>
+          <p:cNvPr id="8" name="Text 5"/>
           <p:cNvSpPr txBox="1"/>
           <p:nvPr/>
         </p:nvSpPr>
@@ -12956,7 +13388,7 @@
       </p:sp>
       <p:sp>
         <p:nvSpPr>
-          <p:cNvPr id="7" name="Text 4"/>
+          <p:cNvPr id="9" name="Text 6"/>
           <p:cNvSpPr txBox="1"/>
           <p:nvPr/>
         </p:nvSpPr>
@@ -12995,7 +13427,7 @@
       </p:sp>
       <p:sp>
         <p:nvSpPr>
-          <p:cNvPr id="8" name="Text 5"/>
+          <p:cNvPr id="10" name="Text 7"/>
           <p:cNvSpPr txBox="1"/>
           <p:nvPr/>
         </p:nvSpPr>
@@ -13037,7 +13469,7 @@
       </p:sp>
       <p:sp>
         <p:nvSpPr>
-          <p:cNvPr id="9" name="Text 6"/>
+          <p:cNvPr id="11" name="Text 8"/>
           <p:cNvSpPr txBox="1"/>
           <p:nvPr/>
         </p:nvSpPr>
@@ -13076,7 +13508,7 @@
       </p:sp>
       <p:sp>
         <p:nvSpPr>
-          <p:cNvPr id="10" name="Text 7"/>
+          <p:cNvPr id="12" name="Text 9"/>
           <p:cNvSpPr txBox="1"/>
           <p:nvPr/>
         </p:nvSpPr>
@@ -13118,7 +13550,7 @@
       </p:sp>
       <p:sp>
         <p:nvSpPr>
-          <p:cNvPr id="11" name="Text 8"/>
+          <p:cNvPr id="13" name="Text 10"/>
           <p:cNvSpPr txBox="1"/>
           <p:nvPr/>
         </p:nvSpPr>
@@ -13157,7 +13589,7 @@
       </p:sp>
       <p:sp>
         <p:nvSpPr>
-          <p:cNvPr id="12" name="Text 9"/>
+          <p:cNvPr id="14" name="Text 11"/>
           <p:cNvSpPr txBox="1"/>
           <p:nvPr/>
         </p:nvSpPr>
@@ -13196,7 +13628,7 @@
       </p:sp>
       <p:sp>
         <p:nvSpPr>
-          <p:cNvPr id="13" name="Text 10"/>
+          <p:cNvPr id="15" name="Text 12"/>
           <p:cNvSpPr txBox="1"/>
           <p:nvPr/>
         </p:nvSpPr>
@@ -13238,7 +13670,7 @@
       </p:sp>
       <p:sp>
         <p:nvSpPr>
-          <p:cNvPr id="14" name="Text 11"/>
+          <p:cNvPr id="16" name="Text 13"/>
           <p:cNvSpPr txBox="1"/>
           <p:nvPr/>
         </p:nvSpPr>
@@ -13277,7 +13709,7 @@
       </p:sp>
       <p:sp>
         <p:nvSpPr>
-          <p:cNvPr id="15" name="Text 12"/>
+          <p:cNvPr id="17" name="Text 14"/>
           <p:cNvSpPr txBox="1"/>
           <p:nvPr/>
         </p:nvSpPr>
@@ -14045,9 +14477,59 @@
           <a:chExt cx="0" cy="0"/>
         </a:xfrm>
       </p:grpSpPr>
+      <p:sp>
+        <p:nvSpPr>
+          <p:cNvPr id="2" name="Shape 0"/>
+          <p:cNvSpPr/>
+          <p:nvPr/>
+        </p:nvSpPr>
+        <p:spPr>
+          <a:xfrm>
+            <a:off x="0" y="6620256"/>
+            <a:ext cx="9144000" cy="237744"/>
+          </a:xfrm>
+          <a:prstGeom prst="rect">
+            <a:avLst/>
+          </a:prstGeom>
+          <a:solidFill>
+            <a:srgbClr val="4FADD1"/>
+          </a:solidFill>
+          <a:ln w="6350">
+            <a:solidFill>
+              <a:srgbClr val="4FADD1"/>
+            </a:solidFill>
+            <a:prstDash val="solid"/>
+          </a:ln>
+        </p:spPr>
+      </p:sp>
+      <p:sp>
+        <p:nvSpPr>
+          <p:cNvPr id="3" name="Shape 1"/>
+          <p:cNvSpPr/>
+          <p:nvPr/>
+        </p:nvSpPr>
+        <p:spPr>
+          <a:xfrm>
+            <a:off x="0" y="0"/>
+            <a:ext cx="9144000" cy="713232"/>
+          </a:xfrm>
+          <a:prstGeom prst="rect">
+            <a:avLst/>
+          </a:prstGeom>
+          <a:solidFill>
+            <a:srgbClr val="4FADD1"/>
+          </a:solidFill>
+          <a:ln w="6350">
+            <a:solidFill>
+              <a:srgbClr val="4FADD1"/>
+            </a:solidFill>
+            <a:prstDash val="solid"/>
+          </a:ln>
+        </p:spPr>
+      </p:sp>
       <p:pic>
         <p:nvPicPr>
-          <p:cNvPr id="2" name="Image 0" descr="정석항공과학고등학교 교표">    </p:cNvPr>
+          <p:cNvPr id="4" name="Image 0" descr="정석항공과학고등학교 교표">    </p:cNvPr>
           <p:cNvPicPr>
             <a:picLocks noChangeAspect="1"/>
           </p:cNvPicPr>
@@ -14061,7 +14543,7 @@
         </p:blipFill>
         <p:spPr>
           <a:xfrm>
-            <a:off x="7973568" y="256032"/>
+            <a:off x="7973568" y="201168"/>
             <a:ext cx="713232" cy="305410"/>
           </a:xfrm>
           <a:prstGeom prst="rect">
@@ -14071,13 +14553,13 @@
       </p:pic>
       <p:sp>
         <p:nvSpPr>
-          <p:cNvPr id="3" name="Text 0"/>
+          <p:cNvPr id="5" name="Text 2"/>
           <p:cNvSpPr txBox="1"/>
           <p:nvPr/>
         </p:nvSpPr>
         <p:spPr>
           <a:xfrm>
-            <a:off x="3657600" y="6345936"/>
+            <a:off x="3657600" y="6291072"/>
             <a:ext cx="1828800" cy="274320"/>
           </a:xfrm>
           <a:prstGeom prst="rect">
@@ -14110,13 +14592,13 @@
       </p:sp>
       <p:sp>
         <p:nvSpPr>
-          <p:cNvPr id="4" name="Text 1"/>
+          <p:cNvPr id="6" name="Text 3"/>
           <p:cNvSpPr txBox="1"/>
           <p:nvPr/>
         </p:nvSpPr>
         <p:spPr>
           <a:xfrm>
-            <a:off x="457200" y="237744"/>
+            <a:off x="457200" y="82296"/>
             <a:ext cx="7132320" cy="548640"/>
           </a:xfrm>
           <a:prstGeom prst="rect">
@@ -14133,9 +14615,9 @@
               <a:buNone/>
             </a:pPr>
             <a:r>
-              <a:rPr lang="en-US" sz="2800" dirty="0">
+              <a:rPr lang="en-US" sz="2600" dirty="0">
                 <a:solidFill>
-                  <a:srgbClr val="000000"/>
+                  <a:srgbClr val="FFFFFF"/>
                 </a:solidFill>
                 <a:latin typeface="HY헤드라인M" pitchFamily="34" charset="0"/>
                 <a:ea typeface="HY헤드라인M" pitchFamily="34" charset="-122"/>
@@ -14143,20 +14625,20 @@
               </a:rPr>
               <a:t>6. 서류 전형 (1차)</a:t>
             </a:r>
-            <a:endParaRPr lang="en-US" sz="2800" dirty="0"/>
+            <a:endParaRPr lang="en-US" sz="2600" dirty="0"/>
           </a:p>
         </p:txBody>
       </p:sp>
       <p:sp>
         <p:nvSpPr>
-          <p:cNvPr id="5" name="Text 2"/>
+          <p:cNvPr id="7" name="Text 4"/>
           <p:cNvSpPr txBox="1"/>
           <p:nvPr/>
         </p:nvSpPr>
         <p:spPr>
           <a:xfrm>
-            <a:off x="5029200" y="329184"/>
-            <a:ext cx="2788920" cy="310896"/>
+            <a:off x="4937760" y="201168"/>
+            <a:ext cx="2880360" cy="310896"/>
           </a:xfrm>
           <a:prstGeom prst="rect">
             <a:avLst/>
@@ -14172,9 +14654,9 @@
               <a:buNone/>
             </a:pPr>
             <a:r>
-              <a:rPr lang="en-US" sz="1200" b="1" dirty="0">
+              <a:rPr lang="en-US" sz="1150" b="1" dirty="0">
                 <a:solidFill>
-                  <a:srgbClr val="000000"/>
+                  <a:srgbClr val="FFFFFF"/>
                 </a:solidFill>
                 <a:latin typeface="맑은 고딕" pitchFamily="34" charset="0"/>
                 <a:ea typeface="맑은 고딕" pitchFamily="34" charset="-122"/>
@@ -14182,13 +14664,13 @@
               </a:rPr>
               <a:t>[ 전형 2단계 / 4단계 ]</a:t>
             </a:r>
-            <a:endParaRPr lang="en-US" sz="1200" dirty="0"/>
+            <a:endParaRPr lang="en-US" sz="1150" dirty="0"/>
           </a:p>
         </p:txBody>
       </p:sp>
       <p:sp>
         <p:nvSpPr>
-          <p:cNvPr id="6" name="Text 3"/>
+          <p:cNvPr id="8" name="Text 5"/>
           <p:cNvSpPr txBox="1"/>
           <p:nvPr/>
         </p:nvSpPr>
@@ -14227,7 +14709,7 @@
       </p:sp>
       <p:sp>
         <p:nvSpPr>
-          <p:cNvPr id="7" name="Text 4"/>
+          <p:cNvPr id="9" name="Text 6"/>
           <p:cNvSpPr txBox="1"/>
           <p:nvPr/>
         </p:nvSpPr>
@@ -14266,7 +14748,7 @@
       </p:sp>
       <p:sp>
         <p:nvSpPr>
-          <p:cNvPr id="8" name="Text 5"/>
+          <p:cNvPr id="10" name="Text 7"/>
           <p:cNvSpPr txBox="1"/>
           <p:nvPr/>
         </p:nvSpPr>
@@ -14308,7 +14790,7 @@
       </p:sp>
       <p:sp>
         <p:nvSpPr>
-          <p:cNvPr id="9" name="Text 6"/>
+          <p:cNvPr id="11" name="Text 8"/>
           <p:cNvSpPr txBox="1"/>
           <p:nvPr/>
         </p:nvSpPr>
@@ -14347,7 +14829,7 @@
       </p:sp>
       <p:sp>
         <p:nvSpPr>
-          <p:cNvPr id="10" name="Text 7"/>
+          <p:cNvPr id="12" name="Text 9"/>
           <p:cNvSpPr txBox="1"/>
           <p:nvPr/>
         </p:nvSpPr>
@@ -14389,7 +14871,7 @@
       </p:sp>
       <p:sp>
         <p:nvSpPr>
-          <p:cNvPr id="11" name="Text 8"/>
+          <p:cNvPr id="13" name="Text 10"/>
           <p:cNvSpPr txBox="1"/>
           <p:nvPr/>
         </p:nvSpPr>
@@ -15432,7 +15914,7 @@
       </p:graphicFrame>
       <p:sp>
         <p:nvSpPr>
-          <p:cNvPr id="13" name="Text 9"/>
+          <p:cNvPr id="15" name="Text 11"/>
           <p:cNvSpPr txBox="1"/>
           <p:nvPr/>
         </p:nvSpPr>
@@ -15471,7 +15953,7 @@
       </p:sp>
       <p:sp>
         <p:nvSpPr>
-          <p:cNvPr id="14" name="Text 10"/>
+          <p:cNvPr id="16" name="Text 12"/>
           <p:cNvSpPr txBox="1"/>
           <p:nvPr/>
         </p:nvSpPr>
@@ -15510,7 +15992,7 @@
       </p:sp>
       <p:sp>
         <p:nvSpPr>
-          <p:cNvPr id="15" name="Text 11"/>
+          <p:cNvPr id="17" name="Text 13"/>
           <p:cNvSpPr txBox="1"/>
           <p:nvPr/>
         </p:nvSpPr>
@@ -15552,7 +16034,7 @@
       </p:sp>
       <p:sp>
         <p:nvSpPr>
-          <p:cNvPr id="16" name="Text 12"/>
+          <p:cNvPr id="18" name="Text 14"/>
           <p:cNvSpPr txBox="1"/>
           <p:nvPr/>
         </p:nvSpPr>
@@ -15591,7 +16073,7 @@
       </p:sp>
       <p:sp>
         <p:nvSpPr>
-          <p:cNvPr id="17" name="Text 13"/>
+          <p:cNvPr id="19" name="Text 15"/>
           <p:cNvSpPr txBox="1"/>
           <p:nvPr/>
         </p:nvSpPr>
@@ -15633,7 +16115,7 @@
       </p:sp>
       <p:sp>
         <p:nvSpPr>
-          <p:cNvPr id="18" name="Text 14"/>
+          <p:cNvPr id="20" name="Text 16"/>
           <p:cNvSpPr txBox="1"/>
           <p:nvPr/>
         </p:nvSpPr>
@@ -15672,7 +16154,7 @@
       </p:sp>
       <p:sp>
         <p:nvSpPr>
-          <p:cNvPr id="19" name="Text 15"/>
+          <p:cNvPr id="21" name="Text 17"/>
           <p:cNvSpPr txBox="1"/>
           <p:nvPr/>
         </p:nvSpPr>
@@ -15744,9 +16226,59 @@
           <a:chExt cx="0" cy="0"/>
         </a:xfrm>
       </p:grpSpPr>
+      <p:sp>
+        <p:nvSpPr>
+          <p:cNvPr id="2" name="Shape 0"/>
+          <p:cNvSpPr/>
+          <p:nvPr/>
+        </p:nvSpPr>
+        <p:spPr>
+          <a:xfrm>
+            <a:off x="0" y="6620256"/>
+            <a:ext cx="9144000" cy="237744"/>
+          </a:xfrm>
+          <a:prstGeom prst="rect">
+            <a:avLst/>
+          </a:prstGeom>
+          <a:solidFill>
+            <a:srgbClr val="4FADD1"/>
+          </a:solidFill>
+          <a:ln w="6350">
+            <a:solidFill>
+              <a:srgbClr val="4FADD1"/>
+            </a:solidFill>
+            <a:prstDash val="solid"/>
+          </a:ln>
+        </p:spPr>
+      </p:sp>
+      <p:sp>
+        <p:nvSpPr>
+          <p:cNvPr id="3" name="Shape 1"/>
+          <p:cNvSpPr/>
+          <p:nvPr/>
+        </p:nvSpPr>
+        <p:spPr>
+          <a:xfrm>
+            <a:off x="0" y="0"/>
+            <a:ext cx="9144000" cy="713232"/>
+          </a:xfrm>
+          <a:prstGeom prst="rect">
+            <a:avLst/>
+          </a:prstGeom>
+          <a:solidFill>
+            <a:srgbClr val="4FADD1"/>
+          </a:solidFill>
+          <a:ln w="6350">
+            <a:solidFill>
+              <a:srgbClr val="4FADD1"/>
+            </a:solidFill>
+            <a:prstDash val="solid"/>
+          </a:ln>
+        </p:spPr>
+      </p:sp>
       <p:pic>
         <p:nvPicPr>
-          <p:cNvPr id="2" name="Image 0" descr="정석항공과학고등학교 교표">    </p:cNvPr>
+          <p:cNvPr id="4" name="Image 0" descr="정석항공과학고등학교 교표">    </p:cNvPr>
           <p:cNvPicPr>
             <a:picLocks noChangeAspect="1"/>
           </p:cNvPicPr>
@@ -15760,7 +16292,7 @@
         </p:blipFill>
         <p:spPr>
           <a:xfrm>
-            <a:off x="7973568" y="256032"/>
+            <a:off x="7973568" y="201168"/>
             <a:ext cx="713232" cy="305410"/>
           </a:xfrm>
           <a:prstGeom prst="rect">
@@ -15770,13 +16302,13 @@
       </p:pic>
       <p:sp>
         <p:nvSpPr>
-          <p:cNvPr id="3" name="Text 0"/>
+          <p:cNvPr id="5" name="Text 2"/>
           <p:cNvSpPr txBox="1"/>
           <p:nvPr/>
         </p:nvSpPr>
         <p:spPr>
           <a:xfrm>
-            <a:off x="3657600" y="6345936"/>
+            <a:off x="3657600" y="6291072"/>
             <a:ext cx="1828800" cy="274320"/>
           </a:xfrm>
           <a:prstGeom prst="rect">
@@ -15809,13 +16341,13 @@
       </p:sp>
       <p:sp>
         <p:nvSpPr>
-          <p:cNvPr id="4" name="Text 1"/>
+          <p:cNvPr id="6" name="Text 3"/>
           <p:cNvSpPr txBox="1"/>
           <p:nvPr/>
         </p:nvSpPr>
         <p:spPr>
           <a:xfrm>
-            <a:off x="457200" y="237744"/>
+            <a:off x="457200" y="82296"/>
             <a:ext cx="7132320" cy="548640"/>
           </a:xfrm>
           <a:prstGeom prst="rect">
@@ -15832,9 +16364,9 @@
               <a:buNone/>
             </a:pPr>
             <a:r>
-              <a:rPr lang="en-US" sz="2800" dirty="0">
+              <a:rPr lang="en-US" sz="2600" dirty="0">
                 <a:solidFill>
-                  <a:srgbClr val="000000"/>
+                  <a:srgbClr val="FFFFFF"/>
                 </a:solidFill>
                 <a:latin typeface="HY헤드라인M" pitchFamily="34" charset="0"/>
                 <a:ea typeface="HY헤드라인M" pitchFamily="34" charset="-122"/>
@@ -15842,20 +16374,20 @@
               </a:rPr>
               <a:t>7. 업무적성 및 심층면접 (2차)</a:t>
             </a:r>
-            <a:endParaRPr lang="en-US" sz="2800" dirty="0"/>
+            <a:endParaRPr lang="en-US" sz="2600" dirty="0"/>
           </a:p>
         </p:txBody>
       </p:sp>
       <p:sp>
         <p:nvSpPr>
-          <p:cNvPr id="5" name="Text 2"/>
+          <p:cNvPr id="7" name="Text 4"/>
           <p:cNvSpPr txBox="1"/>
           <p:nvPr/>
         </p:nvSpPr>
         <p:spPr>
           <a:xfrm>
-            <a:off x="5029200" y="329184"/>
-            <a:ext cx="2788920" cy="310896"/>
+            <a:off x="4937760" y="201168"/>
+            <a:ext cx="2880360" cy="310896"/>
           </a:xfrm>
           <a:prstGeom prst="rect">
             <a:avLst/>
@@ -15871,9 +16403,9 @@
               <a:buNone/>
             </a:pPr>
             <a:r>
-              <a:rPr lang="en-US" sz="1200" b="1" dirty="0">
+              <a:rPr lang="en-US" sz="1150" b="1" dirty="0">
                 <a:solidFill>
-                  <a:srgbClr val="000000"/>
+                  <a:srgbClr val="FFFFFF"/>
                 </a:solidFill>
                 <a:latin typeface="맑은 고딕" pitchFamily="34" charset="0"/>
                 <a:ea typeface="맑은 고딕" pitchFamily="34" charset="-122"/>
@@ -15881,13 +16413,13 @@
               </a:rPr>
               <a:t>[ 전형 3단계 / 4단계 ]</a:t>
             </a:r>
-            <a:endParaRPr lang="en-US" sz="1200" dirty="0"/>
+            <a:endParaRPr lang="en-US" sz="1150" dirty="0"/>
           </a:p>
         </p:txBody>
       </p:sp>
       <p:sp>
         <p:nvSpPr>
-          <p:cNvPr id="6" name="Text 3"/>
+          <p:cNvPr id="8" name="Text 5"/>
           <p:cNvSpPr txBox="1"/>
           <p:nvPr/>
         </p:nvSpPr>
@@ -15926,7 +16458,7 @@
       </p:sp>
       <p:sp>
         <p:nvSpPr>
-          <p:cNvPr id="7" name="Text 4"/>
+          <p:cNvPr id="9" name="Text 6"/>
           <p:cNvSpPr txBox="1"/>
           <p:nvPr/>
         </p:nvSpPr>
@@ -15965,7 +16497,7 @@
       </p:sp>
       <p:sp>
         <p:nvSpPr>
-          <p:cNvPr id="8" name="Text 5"/>
+          <p:cNvPr id="10" name="Text 7"/>
           <p:cNvSpPr txBox="1"/>
           <p:nvPr/>
         </p:nvSpPr>
@@ -16007,7 +16539,7 @@
       </p:sp>
       <p:sp>
         <p:nvSpPr>
-          <p:cNvPr id="9" name="Text 6"/>
+          <p:cNvPr id="11" name="Text 8"/>
           <p:cNvSpPr txBox="1"/>
           <p:nvPr/>
         </p:nvSpPr>
@@ -16046,7 +16578,7 @@
       </p:sp>
       <p:sp>
         <p:nvSpPr>
-          <p:cNvPr id="10" name="Text 7"/>
+          <p:cNvPr id="12" name="Text 9"/>
           <p:cNvSpPr txBox="1"/>
           <p:nvPr/>
         </p:nvSpPr>
@@ -16088,7 +16620,7 @@
       </p:sp>
       <p:sp>
         <p:nvSpPr>
-          <p:cNvPr id="11" name="Text 8"/>
+          <p:cNvPr id="13" name="Text 10"/>
           <p:cNvSpPr txBox="1"/>
           <p:nvPr/>
         </p:nvSpPr>
@@ -17131,7 +17663,7 @@
       </p:graphicFrame>
       <p:sp>
         <p:nvSpPr>
-          <p:cNvPr id="13" name="Text 9"/>
+          <p:cNvPr id="15" name="Text 11"/>
           <p:cNvSpPr txBox="1"/>
           <p:nvPr/>
         </p:nvSpPr>
@@ -17170,7 +17702,7 @@
       </p:sp>
       <p:sp>
         <p:nvSpPr>
-          <p:cNvPr id="14" name="Text 10"/>
+          <p:cNvPr id="16" name="Text 12"/>
           <p:cNvSpPr txBox="1"/>
           <p:nvPr/>
         </p:nvSpPr>
@@ -17209,7 +17741,7 @@
       </p:sp>
       <p:sp>
         <p:nvSpPr>
-          <p:cNvPr id="15" name="Text 11"/>
+          <p:cNvPr id="17" name="Text 13"/>
           <p:cNvSpPr txBox="1"/>
           <p:nvPr/>
         </p:nvSpPr>
@@ -17251,7 +17783,7 @@
       </p:sp>
       <p:sp>
         <p:nvSpPr>
-          <p:cNvPr id="16" name="Text 12"/>
+          <p:cNvPr id="18" name="Text 14"/>
           <p:cNvSpPr txBox="1"/>
           <p:nvPr/>
         </p:nvSpPr>
@@ -17290,7 +17822,7 @@
       </p:sp>
       <p:sp>
         <p:nvSpPr>
-          <p:cNvPr id="17" name="Text 13"/>
+          <p:cNvPr id="19" name="Text 15"/>
           <p:cNvSpPr txBox="1"/>
           <p:nvPr/>
         </p:nvSpPr>
@@ -17362,9 +17894,59 @@
           <a:chExt cx="0" cy="0"/>
         </a:xfrm>
       </p:grpSpPr>
+      <p:sp>
+        <p:nvSpPr>
+          <p:cNvPr id="2" name="Shape 0"/>
+          <p:cNvSpPr/>
+          <p:nvPr/>
+        </p:nvSpPr>
+        <p:spPr>
+          <a:xfrm>
+            <a:off x="0" y="6620256"/>
+            <a:ext cx="9144000" cy="237744"/>
+          </a:xfrm>
+          <a:prstGeom prst="rect">
+            <a:avLst/>
+          </a:prstGeom>
+          <a:solidFill>
+            <a:srgbClr val="4FADD1"/>
+          </a:solidFill>
+          <a:ln w="6350">
+            <a:solidFill>
+              <a:srgbClr val="4FADD1"/>
+            </a:solidFill>
+            <a:prstDash val="solid"/>
+          </a:ln>
+        </p:spPr>
+      </p:sp>
+      <p:sp>
+        <p:nvSpPr>
+          <p:cNvPr id="3" name="Shape 1"/>
+          <p:cNvSpPr/>
+          <p:nvPr/>
+        </p:nvSpPr>
+        <p:spPr>
+          <a:xfrm>
+            <a:off x="0" y="0"/>
+            <a:ext cx="9144000" cy="713232"/>
+          </a:xfrm>
+          <a:prstGeom prst="rect">
+            <a:avLst/>
+          </a:prstGeom>
+          <a:solidFill>
+            <a:srgbClr val="4FADD1"/>
+          </a:solidFill>
+          <a:ln w="6350">
+            <a:solidFill>
+              <a:srgbClr val="4FADD1"/>
+            </a:solidFill>
+            <a:prstDash val="solid"/>
+          </a:ln>
+        </p:spPr>
+      </p:sp>
       <p:pic>
         <p:nvPicPr>
-          <p:cNvPr id="2" name="Image 0" descr="정석항공과학고등학교 교표">    </p:cNvPr>
+          <p:cNvPr id="4" name="Image 0" descr="정석항공과학고등학교 교표">    </p:cNvPr>
           <p:cNvPicPr>
             <a:picLocks noChangeAspect="1"/>
           </p:cNvPicPr>
@@ -17378,7 +17960,7 @@
         </p:blipFill>
         <p:spPr>
           <a:xfrm>
-            <a:off x="7973568" y="256032"/>
+            <a:off x="7973568" y="201168"/>
             <a:ext cx="713232" cy="305410"/>
           </a:xfrm>
           <a:prstGeom prst="rect">
@@ -17388,13 +17970,13 @@
       </p:pic>
       <p:sp>
         <p:nvSpPr>
-          <p:cNvPr id="3" name="Text 0"/>
+          <p:cNvPr id="5" name="Text 2"/>
           <p:cNvSpPr txBox="1"/>
           <p:nvPr/>
         </p:nvSpPr>
         <p:spPr>
           <a:xfrm>
-            <a:off x="3657600" y="6345936"/>
+            <a:off x="3657600" y="6291072"/>
             <a:ext cx="1828800" cy="274320"/>
           </a:xfrm>
           <a:prstGeom prst="rect">
@@ -17427,13 +18009,13 @@
       </p:sp>
       <p:sp>
         <p:nvSpPr>
-          <p:cNvPr id="4" name="Text 1"/>
+          <p:cNvPr id="6" name="Text 3"/>
           <p:cNvSpPr txBox="1"/>
           <p:nvPr/>
         </p:nvSpPr>
         <p:spPr>
           <a:xfrm>
-            <a:off x="457200" y="237744"/>
+            <a:off x="457200" y="82296"/>
             <a:ext cx="7132320" cy="548640"/>
           </a:xfrm>
           <a:prstGeom prst="rect">
@@ -17450,9 +18032,9 @@
               <a:buNone/>
             </a:pPr>
             <a:r>
-              <a:rPr lang="en-US" sz="2800" dirty="0">
+              <a:rPr lang="en-US" sz="2600" dirty="0">
                 <a:solidFill>
-                  <a:srgbClr val="000000"/>
+                  <a:srgbClr val="FFFFFF"/>
                 </a:solidFill>
                 <a:latin typeface="HY헤드라인M" pitchFamily="34" charset="0"/>
                 <a:ea typeface="HY헤드라인M" pitchFamily="34" charset="-122"/>
@@ -17460,20 +18042,20 @@
               </a:rPr>
               <a:t>8. 결격사유 검증</a:t>
             </a:r>
-            <a:endParaRPr lang="en-US" sz="2800" dirty="0"/>
+            <a:endParaRPr lang="en-US" sz="2600" dirty="0"/>
           </a:p>
         </p:txBody>
       </p:sp>
       <p:sp>
         <p:nvSpPr>
-          <p:cNvPr id="5" name="Text 2"/>
+          <p:cNvPr id="7" name="Text 4"/>
           <p:cNvSpPr txBox="1"/>
           <p:nvPr/>
         </p:nvSpPr>
         <p:spPr>
           <a:xfrm>
-            <a:off x="5029200" y="329184"/>
-            <a:ext cx="2788920" cy="310896"/>
+            <a:off x="4937760" y="201168"/>
+            <a:ext cx="2880360" cy="310896"/>
           </a:xfrm>
           <a:prstGeom prst="rect">
             <a:avLst/>
@@ -17489,9 +18071,9 @@
               <a:buNone/>
             </a:pPr>
             <a:r>
-              <a:rPr lang="en-US" sz="1200" b="1" dirty="0">
+              <a:rPr lang="en-US" sz="1150" b="1" dirty="0">
                 <a:solidFill>
-                  <a:srgbClr val="000000"/>
+                  <a:srgbClr val="FFFFFF"/>
                 </a:solidFill>
                 <a:latin typeface="맑은 고딕" pitchFamily="34" charset="0"/>
                 <a:ea typeface="맑은 고딕" pitchFamily="34" charset="-122"/>
@@ -17499,13 +18081,13 @@
               </a:rPr>
               <a:t>[ 전형 4단계 / 4단계 ]</a:t>
             </a:r>
-            <a:endParaRPr lang="en-US" sz="1200" dirty="0"/>
+            <a:endParaRPr lang="en-US" sz="1150" dirty="0"/>
           </a:p>
         </p:txBody>
       </p:sp>
       <p:sp>
         <p:nvSpPr>
-          <p:cNvPr id="6" name="Text 3"/>
+          <p:cNvPr id="8" name="Text 5"/>
           <p:cNvSpPr txBox="1"/>
           <p:nvPr/>
         </p:nvSpPr>
@@ -17544,7 +18126,7 @@
       </p:sp>
       <p:sp>
         <p:nvSpPr>
-          <p:cNvPr id="7" name="Text 4"/>
+          <p:cNvPr id="9" name="Text 6"/>
           <p:cNvSpPr txBox="1"/>
           <p:nvPr/>
         </p:nvSpPr>
@@ -17583,7 +18165,7 @@
       </p:sp>
       <p:sp>
         <p:nvSpPr>
-          <p:cNvPr id="8" name="Text 5"/>
+          <p:cNvPr id="10" name="Text 7"/>
           <p:cNvSpPr txBox="1"/>
           <p:nvPr/>
         </p:nvSpPr>
@@ -17625,7 +18207,7 @@
       </p:sp>
       <p:sp>
         <p:nvSpPr>
-          <p:cNvPr id="9" name="Text 6"/>
+          <p:cNvPr id="11" name="Text 8"/>
           <p:cNvSpPr txBox="1"/>
           <p:nvPr/>
         </p:nvSpPr>
@@ -17664,7 +18246,7 @@
       </p:sp>
       <p:sp>
         <p:nvSpPr>
-          <p:cNvPr id="10" name="Text 7"/>
+          <p:cNvPr id="12" name="Text 9"/>
           <p:cNvSpPr txBox="1"/>
           <p:nvPr/>
         </p:nvSpPr>
@@ -17706,7 +18288,7 @@
       </p:sp>
       <p:sp>
         <p:nvSpPr>
-          <p:cNvPr id="11" name="Text 8"/>
+          <p:cNvPr id="13" name="Text 10"/>
           <p:cNvSpPr txBox="1"/>
           <p:nvPr/>
         </p:nvSpPr>
@@ -18177,7 +18759,7 @@
       </p:graphicFrame>
       <p:sp>
         <p:nvSpPr>
-          <p:cNvPr id="13" name="Text 9"/>
+          <p:cNvPr id="15" name="Text 11"/>
           <p:cNvSpPr txBox="1"/>
           <p:nvPr/>
         </p:nvSpPr>
@@ -18872,7 +19454,7 @@
       </p:graphicFrame>
       <p:sp>
         <p:nvSpPr>
-          <p:cNvPr id="15" name="Text 10"/>
+          <p:cNvPr id="17" name="Text 12"/>
           <p:cNvSpPr txBox="1"/>
           <p:nvPr/>
         </p:nvSpPr>

--- a/docs/2027년_사무직원_채용계획안.pptx
+++ b/docs/2027년_사무직원_채용계획안.pptx
@@ -2070,33 +2070,9 @@
           </a:ln>
         </p:spPr>
       </p:sp>
-      <p:pic>
-        <p:nvPicPr>
-          <p:cNvPr id="4" name="Image 0" descr="정석항공과학고등학교 교표">    </p:cNvPr>
-          <p:cNvPicPr>
-            <a:picLocks noChangeAspect="1"/>
-          </p:cNvPicPr>
-          <p:nvPr/>
-        </p:nvPicPr>
-        <p:blipFill>
-          <a:blip r:embed="rId1"/>
-          <a:stretch>
-            <a:fillRect/>
-          </a:stretch>
-        </p:blipFill>
-        <p:spPr>
-          <a:xfrm>
-            <a:off x="7973568" y="201168"/>
-            <a:ext cx="713232" cy="305410"/>
-          </a:xfrm>
-          <a:prstGeom prst="rect">
-            <a:avLst/>
-          </a:prstGeom>
-        </p:spPr>
-      </p:pic>
-      <p:sp>
-        <p:nvSpPr>
-          <p:cNvPr id="5" name="Text 2"/>
+      <p:sp>
+        <p:nvSpPr>
+          <p:cNvPr id="4" name="Text 2"/>
           <p:cNvSpPr txBox="1"/>
           <p:nvPr/>
         </p:nvSpPr>
@@ -2135,14 +2111,14 @@
       </p:sp>
       <p:sp>
         <p:nvSpPr>
-          <p:cNvPr id="6" name="Text 3"/>
+          <p:cNvPr id="5" name="Text 3"/>
           <p:cNvSpPr txBox="1"/>
           <p:nvPr/>
         </p:nvSpPr>
         <p:spPr>
           <a:xfrm>
             <a:off x="457200" y="82296"/>
-            <a:ext cx="7132320" cy="548640"/>
+            <a:ext cx="5120640" cy="548640"/>
           </a:xfrm>
           <a:prstGeom prst="rect">
             <a:avLst/>
@@ -2174,7 +2150,7 @@
       </p:sp>
       <p:sp>
         <p:nvSpPr>
-          <p:cNvPr id="7" name="Text 4"/>
+          <p:cNvPr id="6" name="Text 4"/>
           <p:cNvSpPr txBox="1"/>
           <p:nvPr/>
         </p:nvSpPr>
@@ -2213,7 +2189,7 @@
       </p:sp>
       <p:sp>
         <p:nvSpPr>
-          <p:cNvPr id="8" name="Text 5"/>
+          <p:cNvPr id="7" name="Text 5"/>
           <p:cNvSpPr txBox="1"/>
           <p:nvPr/>
         </p:nvSpPr>
@@ -2252,7 +2228,7 @@
       </p:sp>
       <p:sp>
         <p:nvSpPr>
-          <p:cNvPr id="9" name="Text 6"/>
+          <p:cNvPr id="8" name="Text 6"/>
           <p:cNvSpPr txBox="1"/>
           <p:nvPr/>
         </p:nvSpPr>
@@ -2294,7 +2270,7 @@
       </p:sp>
       <p:sp>
         <p:nvSpPr>
-          <p:cNvPr id="10" name="Text 7"/>
+          <p:cNvPr id="9" name="Text 7"/>
           <p:cNvSpPr txBox="1"/>
           <p:nvPr/>
         </p:nvSpPr>
@@ -2333,7 +2309,7 @@
       </p:sp>
       <p:sp>
         <p:nvSpPr>
-          <p:cNvPr id="11" name="Text 8"/>
+          <p:cNvPr id="10" name="Text 8"/>
           <p:cNvSpPr txBox="1"/>
           <p:nvPr/>
         </p:nvSpPr>
@@ -2375,7 +2351,7 @@
       </p:sp>
       <p:sp>
         <p:nvSpPr>
-          <p:cNvPr id="12" name="Text 9"/>
+          <p:cNvPr id="11" name="Text 9"/>
           <p:cNvSpPr txBox="1"/>
           <p:nvPr/>
         </p:nvSpPr>
@@ -2414,7 +2390,7 @@
       </p:sp>
       <p:sp>
         <p:nvSpPr>
-          <p:cNvPr id="13" name="Text 10"/>
+          <p:cNvPr id="12" name="Text 10"/>
           <p:cNvSpPr txBox="1"/>
           <p:nvPr/>
         </p:nvSpPr>
@@ -2453,7 +2429,7 @@
       </p:sp>
       <p:sp>
         <p:nvSpPr>
-          <p:cNvPr id="14" name="Text 11"/>
+          <p:cNvPr id="13" name="Text 11"/>
           <p:cNvSpPr txBox="1"/>
           <p:nvPr/>
         </p:nvSpPr>
@@ -2495,7 +2471,7 @@
       </p:sp>
       <p:sp>
         <p:nvSpPr>
-          <p:cNvPr id="15" name="Text 12"/>
+          <p:cNvPr id="14" name="Text 12"/>
           <p:cNvSpPr txBox="1"/>
           <p:nvPr/>
         </p:nvSpPr>
@@ -2534,7 +2510,7 @@
       </p:sp>
       <p:sp>
         <p:nvSpPr>
-          <p:cNvPr id="16" name="Text 13"/>
+          <p:cNvPr id="15" name="Text 13"/>
           <p:cNvSpPr txBox="1"/>
           <p:nvPr/>
         </p:nvSpPr>
@@ -2573,7 +2549,7 @@
       </p:sp>
       <p:sp>
         <p:nvSpPr>
-          <p:cNvPr id="17" name="Text 14"/>
+          <p:cNvPr id="16" name="Text 14"/>
           <p:cNvSpPr txBox="1"/>
           <p:nvPr/>
         </p:nvSpPr>
@@ -2615,7 +2591,7 @@
       </p:sp>
       <p:sp>
         <p:nvSpPr>
-          <p:cNvPr id="18" name="Text 15"/>
+          <p:cNvPr id="17" name="Text 15"/>
           <p:cNvSpPr txBox="1"/>
           <p:nvPr/>
         </p:nvSpPr>
@@ -2734,33 +2710,9 @@
           </a:ln>
         </p:spPr>
       </p:sp>
-      <p:pic>
-        <p:nvPicPr>
-          <p:cNvPr id="4" name="Image 0" descr="정석항공과학고등학교 교표">    </p:cNvPr>
-          <p:cNvPicPr>
-            <a:picLocks noChangeAspect="1"/>
-          </p:cNvPicPr>
-          <p:nvPr/>
-        </p:nvPicPr>
-        <p:blipFill>
-          <a:blip r:embed="rId1"/>
-          <a:stretch>
-            <a:fillRect/>
-          </a:stretch>
-        </p:blipFill>
-        <p:spPr>
-          <a:xfrm>
-            <a:off x="7973568" y="201168"/>
-            <a:ext cx="713232" cy="305410"/>
-          </a:xfrm>
-          <a:prstGeom prst="rect">
-            <a:avLst/>
-          </a:prstGeom>
-        </p:spPr>
-      </p:pic>
-      <p:sp>
-        <p:nvSpPr>
-          <p:cNvPr id="5" name="Text 2"/>
+      <p:sp>
+        <p:nvSpPr>
+          <p:cNvPr id="4" name="Text 2"/>
           <p:cNvSpPr txBox="1"/>
           <p:nvPr/>
         </p:nvSpPr>
@@ -2799,14 +2751,14 @@
       </p:sp>
       <p:sp>
         <p:nvSpPr>
-          <p:cNvPr id="6" name="Text 3"/>
+          <p:cNvPr id="5" name="Text 3"/>
           <p:cNvSpPr txBox="1"/>
           <p:nvPr/>
         </p:nvSpPr>
         <p:spPr>
           <a:xfrm>
             <a:off x="457200" y="82296"/>
-            <a:ext cx="7132320" cy="548640"/>
+            <a:ext cx="5120640" cy="548640"/>
           </a:xfrm>
           <a:prstGeom prst="rect">
             <a:avLst/>
@@ -2838,7 +2790,7 @@
       </p:sp>
       <p:sp>
         <p:nvSpPr>
-          <p:cNvPr id="7" name="Text 4"/>
+          <p:cNvPr id="6" name="Text 4"/>
           <p:cNvSpPr txBox="1"/>
           <p:nvPr/>
         </p:nvSpPr>
@@ -3969,7 +3921,7 @@
       </p:graphicFrame>
       <p:sp>
         <p:nvSpPr>
-          <p:cNvPr id="9" name="Text 5"/>
+          <p:cNvPr id="8" name="Text 5"/>
           <p:cNvSpPr txBox="1"/>
           <p:nvPr/>
         </p:nvSpPr>
@@ -4719,33 +4671,9 @@
           </a:ln>
         </p:spPr>
       </p:sp>
-      <p:pic>
-        <p:nvPicPr>
-          <p:cNvPr id="4" name="Image 0" descr="정석항공과학고등학교 교표">    </p:cNvPr>
-          <p:cNvPicPr>
-            <a:picLocks noChangeAspect="1"/>
-          </p:cNvPicPr>
-          <p:nvPr/>
-        </p:nvPicPr>
-        <p:blipFill>
-          <a:blip r:embed="rId1"/>
-          <a:stretch>
-            <a:fillRect/>
-          </a:stretch>
-        </p:blipFill>
-        <p:spPr>
-          <a:xfrm>
-            <a:off x="7973568" y="201168"/>
-            <a:ext cx="713232" cy="305410"/>
-          </a:xfrm>
-          <a:prstGeom prst="rect">
-            <a:avLst/>
-          </a:prstGeom>
-        </p:spPr>
-      </p:pic>
-      <p:sp>
-        <p:nvSpPr>
-          <p:cNvPr id="5" name="Text 2"/>
+      <p:sp>
+        <p:nvSpPr>
+          <p:cNvPr id="4" name="Text 2"/>
           <p:cNvSpPr txBox="1"/>
           <p:nvPr/>
         </p:nvSpPr>
@@ -4784,14 +4712,14 @@
       </p:sp>
       <p:sp>
         <p:nvSpPr>
-          <p:cNvPr id="6" name="Text 3"/>
+          <p:cNvPr id="5" name="Text 3"/>
           <p:cNvSpPr txBox="1"/>
           <p:nvPr/>
         </p:nvSpPr>
         <p:spPr>
           <a:xfrm>
             <a:off x="457200" y="82296"/>
-            <a:ext cx="7132320" cy="548640"/>
+            <a:ext cx="5120640" cy="548640"/>
           </a:xfrm>
           <a:prstGeom prst="rect">
             <a:avLst/>
@@ -4823,7 +4751,7 @@
       </p:sp>
       <p:sp>
         <p:nvSpPr>
-          <p:cNvPr id="7" name="Text 4"/>
+          <p:cNvPr id="6" name="Text 4"/>
           <p:cNvSpPr txBox="1"/>
           <p:nvPr/>
         </p:nvSpPr>
@@ -4862,7 +4790,7 @@
       </p:sp>
       <p:sp>
         <p:nvSpPr>
-          <p:cNvPr id="8" name="Text 5"/>
+          <p:cNvPr id="7" name="Text 5"/>
           <p:cNvSpPr txBox="1"/>
           <p:nvPr/>
         </p:nvSpPr>
@@ -4901,7 +4829,7 @@
       </p:sp>
       <p:sp>
         <p:nvSpPr>
-          <p:cNvPr id="9" name="Text 6"/>
+          <p:cNvPr id="8" name="Text 6"/>
           <p:cNvSpPr txBox="1"/>
           <p:nvPr/>
         </p:nvSpPr>
@@ -4943,7 +4871,7 @@
       </p:sp>
       <p:sp>
         <p:nvSpPr>
-          <p:cNvPr id="10" name="Text 7"/>
+          <p:cNvPr id="9" name="Text 7"/>
           <p:cNvSpPr txBox="1"/>
           <p:nvPr/>
         </p:nvSpPr>
@@ -4982,7 +4910,7 @@
       </p:sp>
       <p:sp>
         <p:nvSpPr>
-          <p:cNvPr id="11" name="Text 8"/>
+          <p:cNvPr id="10" name="Text 8"/>
           <p:cNvSpPr txBox="1"/>
           <p:nvPr/>
         </p:nvSpPr>
@@ -5021,7 +4949,7 @@
       </p:sp>
       <p:sp>
         <p:nvSpPr>
-          <p:cNvPr id="12" name="Text 9"/>
+          <p:cNvPr id="11" name="Text 9"/>
           <p:cNvSpPr txBox="1"/>
           <p:nvPr/>
         </p:nvSpPr>
@@ -5063,7 +4991,7 @@
       </p:sp>
       <p:sp>
         <p:nvSpPr>
-          <p:cNvPr id="13" name="Text 10"/>
+          <p:cNvPr id="12" name="Text 10"/>
           <p:cNvSpPr txBox="1"/>
           <p:nvPr/>
         </p:nvSpPr>
@@ -5102,7 +5030,7 @@
       </p:sp>
       <p:sp>
         <p:nvSpPr>
-          <p:cNvPr id="14" name="Text 11"/>
+          <p:cNvPr id="13" name="Text 11"/>
           <p:cNvSpPr txBox="1"/>
           <p:nvPr/>
         </p:nvSpPr>
@@ -5144,7 +5072,7 @@
       </p:sp>
       <p:sp>
         <p:nvSpPr>
-          <p:cNvPr id="15" name="Text 12"/>
+          <p:cNvPr id="14" name="Text 12"/>
           <p:cNvSpPr txBox="1"/>
           <p:nvPr/>
         </p:nvSpPr>
@@ -5885,7 +5813,7 @@
       </p:graphicFrame>
       <p:sp>
         <p:nvSpPr>
-          <p:cNvPr id="17" name="Text 13"/>
+          <p:cNvPr id="16" name="Text 13"/>
           <p:cNvSpPr txBox="1"/>
           <p:nvPr/>
         </p:nvSpPr>
@@ -6004,33 +5932,9 @@
           </a:ln>
         </p:spPr>
       </p:sp>
-      <p:pic>
-        <p:nvPicPr>
-          <p:cNvPr id="4" name="Image 0" descr="정석항공과학고등학교 교표">    </p:cNvPr>
-          <p:cNvPicPr>
-            <a:picLocks noChangeAspect="1"/>
-          </p:cNvPicPr>
-          <p:nvPr/>
-        </p:nvPicPr>
-        <p:blipFill>
-          <a:blip r:embed="rId1"/>
-          <a:stretch>
-            <a:fillRect/>
-          </a:stretch>
-        </p:blipFill>
-        <p:spPr>
-          <a:xfrm>
-            <a:off x="7973568" y="201168"/>
-            <a:ext cx="713232" cy="305410"/>
-          </a:xfrm>
-          <a:prstGeom prst="rect">
-            <a:avLst/>
-          </a:prstGeom>
-        </p:spPr>
-      </p:pic>
-      <p:sp>
-        <p:nvSpPr>
-          <p:cNvPr id="5" name="Text 2"/>
+      <p:sp>
+        <p:nvSpPr>
+          <p:cNvPr id="4" name="Text 2"/>
           <p:cNvSpPr txBox="1"/>
           <p:nvPr/>
         </p:nvSpPr>
@@ -6069,14 +5973,14 @@
       </p:sp>
       <p:sp>
         <p:nvSpPr>
-          <p:cNvPr id="6" name="Text 3"/>
+          <p:cNvPr id="5" name="Text 3"/>
           <p:cNvSpPr txBox="1"/>
           <p:nvPr/>
         </p:nvSpPr>
         <p:spPr>
           <a:xfrm>
             <a:off x="457200" y="82296"/>
-            <a:ext cx="7132320" cy="548640"/>
+            <a:ext cx="5120640" cy="548640"/>
           </a:xfrm>
           <a:prstGeom prst="rect">
             <a:avLst/>
@@ -6108,7 +6012,7 @@
       </p:sp>
       <p:sp>
         <p:nvSpPr>
-          <p:cNvPr id="7" name="Text 4"/>
+          <p:cNvPr id="6" name="Text 4"/>
           <p:cNvSpPr txBox="1"/>
           <p:nvPr/>
         </p:nvSpPr>
@@ -6147,7 +6051,7 @@
       </p:sp>
       <p:sp>
         <p:nvSpPr>
-          <p:cNvPr id="8" name="Text 5"/>
+          <p:cNvPr id="7" name="Text 5"/>
           <p:cNvSpPr txBox="1"/>
           <p:nvPr/>
         </p:nvSpPr>
@@ -8800,7 +8704,7 @@
       </p:graphicFrame>
       <p:sp>
         <p:nvSpPr>
-          <p:cNvPr id="10" name="Text 6"/>
+          <p:cNvPr id="9" name="Text 6"/>
           <p:cNvSpPr txBox="1"/>
           <p:nvPr/>
         </p:nvSpPr>
@@ -8839,7 +8743,7 @@
       </p:sp>
       <p:sp>
         <p:nvSpPr>
-          <p:cNvPr id="11" name="Text 7"/>
+          <p:cNvPr id="10" name="Text 7"/>
           <p:cNvSpPr txBox="1"/>
           <p:nvPr/>
         </p:nvSpPr>
@@ -9799,7 +9703,7 @@
       </p:graphicFrame>
       <p:sp>
         <p:nvSpPr>
-          <p:cNvPr id="13" name="Text 8"/>
+          <p:cNvPr id="12" name="Text 8"/>
           <p:cNvSpPr txBox="1"/>
           <p:nvPr/>
         </p:nvSpPr>
@@ -9918,33 +9822,9 @@
           </a:ln>
         </p:spPr>
       </p:sp>
-      <p:pic>
-        <p:nvPicPr>
-          <p:cNvPr id="4" name="Image 0" descr="정석항공과학고등학교 교표">    </p:cNvPr>
-          <p:cNvPicPr>
-            <a:picLocks noChangeAspect="1"/>
-          </p:cNvPicPr>
-          <p:nvPr/>
-        </p:nvPicPr>
-        <p:blipFill>
-          <a:blip r:embed="rId1"/>
-          <a:stretch>
-            <a:fillRect/>
-          </a:stretch>
-        </p:blipFill>
-        <p:spPr>
-          <a:xfrm>
-            <a:off x="7973568" y="201168"/>
-            <a:ext cx="713232" cy="305410"/>
-          </a:xfrm>
-          <a:prstGeom prst="rect">
-            <a:avLst/>
-          </a:prstGeom>
-        </p:spPr>
-      </p:pic>
-      <p:sp>
-        <p:nvSpPr>
-          <p:cNvPr id="5" name="Text 2"/>
+      <p:sp>
+        <p:nvSpPr>
+          <p:cNvPr id="4" name="Text 2"/>
           <p:cNvSpPr txBox="1"/>
           <p:nvPr/>
         </p:nvSpPr>
@@ -9983,14 +9863,14 @@
       </p:sp>
       <p:sp>
         <p:nvSpPr>
-          <p:cNvPr id="6" name="Text 3"/>
+          <p:cNvPr id="5" name="Text 3"/>
           <p:cNvSpPr txBox="1"/>
           <p:nvPr/>
         </p:nvSpPr>
         <p:spPr>
           <a:xfrm>
             <a:off x="457200" y="82296"/>
-            <a:ext cx="7132320" cy="548640"/>
+            <a:ext cx="5120640" cy="548640"/>
           </a:xfrm>
           <a:prstGeom prst="rect">
             <a:avLst/>
@@ -10022,7 +9902,7 @@
       </p:sp>
       <p:sp>
         <p:nvSpPr>
-          <p:cNvPr id="7" name="Text 4"/>
+          <p:cNvPr id="6" name="Text 4"/>
           <p:cNvSpPr txBox="1"/>
           <p:nvPr/>
         </p:nvSpPr>
@@ -10061,7 +9941,7 @@
       </p:sp>
       <p:sp>
         <p:nvSpPr>
-          <p:cNvPr id="8" name="Shape 5"/>
+          <p:cNvPr id="7" name="Shape 5"/>
           <p:cNvSpPr/>
           <p:nvPr/>
         </p:nvSpPr>
@@ -10086,7 +9966,7 @@
       </p:sp>
       <p:sp>
         <p:nvSpPr>
-          <p:cNvPr id="9" name="Text 6"/>
+          <p:cNvPr id="8" name="Text 6"/>
           <p:cNvSpPr txBox="1"/>
           <p:nvPr/>
         </p:nvSpPr>
@@ -10148,7 +10028,7 @@
       </p:sp>
       <p:sp>
         <p:nvSpPr>
-          <p:cNvPr id="10" name="Shape 7"/>
+          <p:cNvPr id="9" name="Shape 7"/>
           <p:cNvSpPr/>
           <p:nvPr/>
         </p:nvSpPr>
@@ -10173,7 +10053,7 @@
       </p:sp>
       <p:sp>
         <p:nvSpPr>
-          <p:cNvPr id="11" name="Text 8"/>
+          <p:cNvPr id="10" name="Text 8"/>
           <p:cNvSpPr txBox="1"/>
           <p:nvPr/>
         </p:nvSpPr>
@@ -10215,7 +10095,7 @@
       </p:sp>
       <p:sp>
         <p:nvSpPr>
-          <p:cNvPr id="12" name="Shape 9"/>
+          <p:cNvPr id="11" name="Shape 9"/>
           <p:cNvSpPr/>
           <p:nvPr/>
         </p:nvSpPr>
@@ -10235,7 +10115,7 @@
       </p:sp>
       <p:sp>
         <p:nvSpPr>
-          <p:cNvPr id="13" name="Shape 10"/>
+          <p:cNvPr id="12" name="Shape 10"/>
           <p:cNvSpPr/>
           <p:nvPr/>
         </p:nvSpPr>
@@ -10260,7 +10140,7 @@
       </p:sp>
       <p:sp>
         <p:nvSpPr>
-          <p:cNvPr id="14" name="Text 11"/>
+          <p:cNvPr id="13" name="Text 11"/>
           <p:cNvSpPr txBox="1"/>
           <p:nvPr/>
         </p:nvSpPr>
@@ -10322,7 +10202,7 @@
       </p:sp>
       <p:sp>
         <p:nvSpPr>
-          <p:cNvPr id="15" name="Shape 12"/>
+          <p:cNvPr id="14" name="Shape 12"/>
           <p:cNvSpPr/>
           <p:nvPr/>
         </p:nvSpPr>
@@ -10347,7 +10227,7 @@
       </p:sp>
       <p:sp>
         <p:nvSpPr>
-          <p:cNvPr id="16" name="Text 13"/>
+          <p:cNvPr id="15" name="Text 13"/>
           <p:cNvSpPr txBox="1"/>
           <p:nvPr/>
         </p:nvSpPr>
@@ -10389,7 +10269,7 @@
       </p:sp>
       <p:sp>
         <p:nvSpPr>
-          <p:cNvPr id="17" name="Shape 14"/>
+          <p:cNvPr id="16" name="Shape 14"/>
           <p:cNvSpPr/>
           <p:nvPr/>
         </p:nvSpPr>
@@ -10409,7 +10289,7 @@
       </p:sp>
       <p:sp>
         <p:nvSpPr>
-          <p:cNvPr id="18" name="Shape 15"/>
+          <p:cNvPr id="17" name="Shape 15"/>
           <p:cNvSpPr/>
           <p:nvPr/>
         </p:nvSpPr>
@@ -10434,7 +10314,7 @@
       </p:sp>
       <p:sp>
         <p:nvSpPr>
-          <p:cNvPr id="19" name="Text 16"/>
+          <p:cNvPr id="18" name="Text 16"/>
           <p:cNvSpPr txBox="1"/>
           <p:nvPr/>
         </p:nvSpPr>
@@ -10516,7 +10396,7 @@
       </p:sp>
       <p:sp>
         <p:nvSpPr>
-          <p:cNvPr id="20" name="Shape 17"/>
+          <p:cNvPr id="19" name="Shape 17"/>
           <p:cNvSpPr/>
           <p:nvPr/>
         </p:nvSpPr>
@@ -10541,7 +10421,7 @@
       </p:sp>
       <p:sp>
         <p:nvSpPr>
-          <p:cNvPr id="21" name="Text 18"/>
+          <p:cNvPr id="20" name="Text 18"/>
           <p:cNvSpPr txBox="1"/>
           <p:nvPr/>
         </p:nvSpPr>
@@ -10583,7 +10463,7 @@
       </p:sp>
       <p:sp>
         <p:nvSpPr>
-          <p:cNvPr id="22" name="Shape 19"/>
+          <p:cNvPr id="21" name="Shape 19"/>
           <p:cNvSpPr/>
           <p:nvPr/>
         </p:nvSpPr>
@@ -10603,7 +10483,7 @@
       </p:sp>
       <p:sp>
         <p:nvSpPr>
-          <p:cNvPr id="23" name="Shape 20"/>
+          <p:cNvPr id="22" name="Shape 20"/>
           <p:cNvSpPr/>
           <p:nvPr/>
         </p:nvSpPr>
@@ -10628,7 +10508,7 @@
       </p:sp>
       <p:sp>
         <p:nvSpPr>
-          <p:cNvPr id="24" name="Text 21"/>
+          <p:cNvPr id="23" name="Text 21"/>
           <p:cNvSpPr txBox="1"/>
           <p:nvPr/>
         </p:nvSpPr>
@@ -10690,7 +10570,7 @@
       </p:sp>
       <p:sp>
         <p:nvSpPr>
-          <p:cNvPr id="25" name="Shape 22"/>
+          <p:cNvPr id="24" name="Shape 22"/>
           <p:cNvSpPr/>
           <p:nvPr/>
         </p:nvSpPr>
@@ -10715,7 +10595,7 @@
       </p:sp>
       <p:sp>
         <p:nvSpPr>
-          <p:cNvPr id="26" name="Text 23"/>
+          <p:cNvPr id="25" name="Text 23"/>
           <p:cNvSpPr txBox="1"/>
           <p:nvPr/>
         </p:nvSpPr>
@@ -10757,7 +10637,7 @@
       </p:sp>
       <p:sp>
         <p:nvSpPr>
-          <p:cNvPr id="27" name="Shape 24"/>
+          <p:cNvPr id="26" name="Shape 24"/>
           <p:cNvSpPr/>
           <p:nvPr/>
         </p:nvSpPr>
@@ -10777,7 +10657,7 @@
       </p:sp>
       <p:sp>
         <p:nvSpPr>
-          <p:cNvPr id="28" name="Shape 25"/>
+          <p:cNvPr id="27" name="Shape 25"/>
           <p:cNvSpPr/>
           <p:nvPr/>
         </p:nvSpPr>
@@ -10802,7 +10682,7 @@
       </p:sp>
       <p:sp>
         <p:nvSpPr>
-          <p:cNvPr id="29" name="Text 26"/>
+          <p:cNvPr id="28" name="Text 26"/>
           <p:cNvSpPr txBox="1"/>
           <p:nvPr/>
         </p:nvSpPr>
@@ -10844,7 +10724,7 @@
       </p:sp>
       <p:sp>
         <p:nvSpPr>
-          <p:cNvPr id="30" name="Shape 27"/>
+          <p:cNvPr id="29" name="Shape 27"/>
           <p:cNvSpPr/>
           <p:nvPr/>
         </p:nvSpPr>
@@ -10869,7 +10749,7 @@
       </p:sp>
       <p:sp>
         <p:nvSpPr>
-          <p:cNvPr id="31" name="Text 28"/>
+          <p:cNvPr id="30" name="Text 28"/>
           <p:cNvSpPr txBox="1"/>
           <p:nvPr/>
         </p:nvSpPr>
@@ -10911,7 +10791,7 @@
       </p:sp>
       <p:sp>
         <p:nvSpPr>
-          <p:cNvPr id="32" name="Text 29"/>
+          <p:cNvPr id="31" name="Text 29"/>
           <p:cNvSpPr txBox="1"/>
           <p:nvPr/>
         </p:nvSpPr>
@@ -11030,33 +10910,9 @@
           </a:ln>
         </p:spPr>
       </p:sp>
-      <p:pic>
-        <p:nvPicPr>
-          <p:cNvPr id="4" name="Image 0" descr="정석항공과학고등학교 교표">    </p:cNvPr>
-          <p:cNvPicPr>
-            <a:picLocks noChangeAspect="1"/>
-          </p:cNvPicPr>
-          <p:nvPr/>
-        </p:nvPicPr>
-        <p:blipFill>
-          <a:blip r:embed="rId1"/>
-          <a:stretch>
-            <a:fillRect/>
-          </a:stretch>
-        </p:blipFill>
-        <p:spPr>
-          <a:xfrm>
-            <a:off x="7973568" y="201168"/>
-            <a:ext cx="713232" cy="305410"/>
-          </a:xfrm>
-          <a:prstGeom prst="rect">
-            <a:avLst/>
-          </a:prstGeom>
-        </p:spPr>
-      </p:pic>
-      <p:sp>
-        <p:nvSpPr>
-          <p:cNvPr id="5" name="Text 2"/>
+      <p:sp>
+        <p:nvSpPr>
+          <p:cNvPr id="4" name="Text 2"/>
           <p:cNvSpPr txBox="1"/>
           <p:nvPr/>
         </p:nvSpPr>
@@ -11095,14 +10951,14 @@
       </p:sp>
       <p:sp>
         <p:nvSpPr>
-          <p:cNvPr id="6" name="Text 3"/>
+          <p:cNvPr id="5" name="Text 3"/>
           <p:cNvSpPr txBox="1"/>
           <p:nvPr/>
         </p:nvSpPr>
         <p:spPr>
           <a:xfrm>
             <a:off x="457200" y="82296"/>
-            <a:ext cx="7132320" cy="548640"/>
+            <a:ext cx="5120640" cy="548640"/>
           </a:xfrm>
           <a:prstGeom prst="rect">
             <a:avLst/>
@@ -11134,7 +10990,7 @@
       </p:sp>
       <p:sp>
         <p:nvSpPr>
-          <p:cNvPr id="7" name="Text 4"/>
+          <p:cNvPr id="6" name="Text 4"/>
           <p:cNvSpPr txBox="1"/>
           <p:nvPr/>
         </p:nvSpPr>
@@ -11173,7 +11029,7 @@
       </p:sp>
       <p:sp>
         <p:nvSpPr>
-          <p:cNvPr id="8" name="Shape 5"/>
+          <p:cNvPr id="7" name="Shape 5"/>
           <p:cNvSpPr/>
           <p:nvPr/>
         </p:nvSpPr>
@@ -11198,7 +11054,7 @@
       </p:sp>
       <p:sp>
         <p:nvSpPr>
-          <p:cNvPr id="9" name="Text 6"/>
+          <p:cNvPr id="8" name="Text 6"/>
           <p:cNvSpPr txBox="1"/>
           <p:nvPr/>
         </p:nvSpPr>
@@ -11240,7 +11096,7 @@
       </p:sp>
       <p:sp>
         <p:nvSpPr>
-          <p:cNvPr id="10" name="Shape 7"/>
+          <p:cNvPr id="9" name="Shape 7"/>
           <p:cNvSpPr/>
           <p:nvPr/>
         </p:nvSpPr>
@@ -11265,7 +11121,7 @@
       </p:sp>
       <p:sp>
         <p:nvSpPr>
-          <p:cNvPr id="11" name="Text 8"/>
+          <p:cNvPr id="10" name="Text 8"/>
           <p:cNvSpPr txBox="1"/>
           <p:nvPr/>
         </p:nvSpPr>
@@ -11307,7 +11163,7 @@
       </p:sp>
       <p:sp>
         <p:nvSpPr>
-          <p:cNvPr id="12" name="Shape 9"/>
+          <p:cNvPr id="11" name="Shape 9"/>
           <p:cNvSpPr/>
           <p:nvPr/>
         </p:nvSpPr>
@@ -11327,7 +11183,7 @@
       </p:sp>
       <p:sp>
         <p:nvSpPr>
-          <p:cNvPr id="13" name="Shape 10"/>
+          <p:cNvPr id="12" name="Shape 10"/>
           <p:cNvSpPr/>
           <p:nvPr/>
         </p:nvSpPr>
@@ -11352,7 +11208,7 @@
       </p:sp>
       <p:sp>
         <p:nvSpPr>
-          <p:cNvPr id="14" name="Text 11"/>
+          <p:cNvPr id="13" name="Text 11"/>
           <p:cNvSpPr txBox="1"/>
           <p:nvPr/>
         </p:nvSpPr>
@@ -11394,7 +11250,7 @@
       </p:sp>
       <p:sp>
         <p:nvSpPr>
-          <p:cNvPr id="15" name="Shape 12"/>
+          <p:cNvPr id="14" name="Shape 12"/>
           <p:cNvSpPr/>
           <p:nvPr/>
         </p:nvSpPr>
@@ -11419,7 +11275,7 @@
       </p:sp>
       <p:sp>
         <p:nvSpPr>
-          <p:cNvPr id="16" name="Text 13"/>
+          <p:cNvPr id="15" name="Text 13"/>
           <p:cNvSpPr txBox="1"/>
           <p:nvPr/>
         </p:nvSpPr>
@@ -11461,7 +11317,7 @@
       </p:sp>
       <p:sp>
         <p:nvSpPr>
-          <p:cNvPr id="17" name="Shape 14"/>
+          <p:cNvPr id="16" name="Shape 14"/>
           <p:cNvSpPr/>
           <p:nvPr/>
         </p:nvSpPr>
@@ -11481,7 +11337,7 @@
       </p:sp>
       <p:sp>
         <p:nvSpPr>
-          <p:cNvPr id="18" name="Shape 15"/>
+          <p:cNvPr id="17" name="Shape 15"/>
           <p:cNvSpPr/>
           <p:nvPr/>
         </p:nvSpPr>
@@ -11506,7 +11362,7 @@
       </p:sp>
       <p:sp>
         <p:nvSpPr>
-          <p:cNvPr id="19" name="Text 16"/>
+          <p:cNvPr id="18" name="Text 16"/>
           <p:cNvSpPr txBox="1"/>
           <p:nvPr/>
         </p:nvSpPr>
@@ -11568,7 +11424,7 @@
       </p:sp>
       <p:sp>
         <p:nvSpPr>
-          <p:cNvPr id="20" name="Shape 17"/>
+          <p:cNvPr id="19" name="Shape 17"/>
           <p:cNvSpPr/>
           <p:nvPr/>
         </p:nvSpPr>
@@ -11593,7 +11449,7 @@
       </p:sp>
       <p:sp>
         <p:nvSpPr>
-          <p:cNvPr id="21" name="Text 18"/>
+          <p:cNvPr id="20" name="Text 18"/>
           <p:cNvSpPr txBox="1"/>
           <p:nvPr/>
         </p:nvSpPr>
@@ -11655,7 +11511,7 @@
       </p:sp>
       <p:sp>
         <p:nvSpPr>
-          <p:cNvPr id="22" name="Shape 19"/>
+          <p:cNvPr id="21" name="Shape 19"/>
           <p:cNvSpPr/>
           <p:nvPr/>
         </p:nvSpPr>
@@ -11675,7 +11531,7 @@
       </p:sp>
       <p:sp>
         <p:nvSpPr>
-          <p:cNvPr id="23" name="Shape 20"/>
+          <p:cNvPr id="22" name="Shape 20"/>
           <p:cNvSpPr/>
           <p:nvPr/>
         </p:nvSpPr>
@@ -11700,7 +11556,7 @@
       </p:sp>
       <p:sp>
         <p:nvSpPr>
-          <p:cNvPr id="24" name="Text 21"/>
+          <p:cNvPr id="23" name="Text 21"/>
           <p:cNvSpPr txBox="1"/>
           <p:nvPr/>
         </p:nvSpPr>
@@ -11742,7 +11598,7 @@
       </p:sp>
       <p:sp>
         <p:nvSpPr>
-          <p:cNvPr id="25" name="Shape 22"/>
+          <p:cNvPr id="24" name="Shape 22"/>
           <p:cNvSpPr/>
           <p:nvPr/>
         </p:nvSpPr>
@@ -11767,7 +11623,7 @@
       </p:sp>
       <p:sp>
         <p:nvSpPr>
-          <p:cNvPr id="26" name="Text 23"/>
+          <p:cNvPr id="25" name="Text 23"/>
           <p:cNvSpPr txBox="1"/>
           <p:nvPr/>
         </p:nvSpPr>
@@ -11829,7 +11685,7 @@
       </p:sp>
       <p:sp>
         <p:nvSpPr>
-          <p:cNvPr id="27" name="Shape 24"/>
+          <p:cNvPr id="26" name="Shape 24"/>
           <p:cNvSpPr/>
           <p:nvPr/>
         </p:nvSpPr>
@@ -11849,7 +11705,7 @@
       </p:sp>
       <p:sp>
         <p:nvSpPr>
-          <p:cNvPr id="28" name="Shape 25"/>
+          <p:cNvPr id="27" name="Shape 25"/>
           <p:cNvSpPr/>
           <p:nvPr/>
         </p:nvSpPr>
@@ -11874,7 +11730,7 @@
       </p:sp>
       <p:sp>
         <p:nvSpPr>
-          <p:cNvPr id="29" name="Text 26"/>
+          <p:cNvPr id="28" name="Text 26"/>
           <p:cNvSpPr txBox="1"/>
           <p:nvPr/>
         </p:nvSpPr>
@@ -11916,7 +11772,7 @@
       </p:sp>
       <p:sp>
         <p:nvSpPr>
-          <p:cNvPr id="30" name="Shape 27"/>
+          <p:cNvPr id="29" name="Shape 27"/>
           <p:cNvSpPr/>
           <p:nvPr/>
         </p:nvSpPr>
@@ -11941,7 +11797,7 @@
       </p:sp>
       <p:sp>
         <p:nvSpPr>
-          <p:cNvPr id="31" name="Text 28"/>
+          <p:cNvPr id="30" name="Text 28"/>
           <p:cNvSpPr txBox="1"/>
           <p:nvPr/>
         </p:nvSpPr>
@@ -11983,7 +11839,7 @@
       </p:sp>
       <p:sp>
         <p:nvSpPr>
-          <p:cNvPr id="32" name="Text 29"/>
+          <p:cNvPr id="31" name="Text 29"/>
           <p:cNvSpPr txBox="1"/>
           <p:nvPr/>
         </p:nvSpPr>
@@ -13206,33 +13062,9 @@
           </a:ln>
         </p:spPr>
       </p:sp>
-      <p:pic>
-        <p:nvPicPr>
-          <p:cNvPr id="4" name="Image 0" descr="정석항공과학고등학교 교표">    </p:cNvPr>
-          <p:cNvPicPr>
-            <a:picLocks noChangeAspect="1"/>
-          </p:cNvPicPr>
-          <p:nvPr/>
-        </p:nvPicPr>
-        <p:blipFill>
-          <a:blip r:embed="rId1"/>
-          <a:stretch>
-            <a:fillRect/>
-          </a:stretch>
-        </p:blipFill>
-        <p:spPr>
-          <a:xfrm>
-            <a:off x="7973568" y="201168"/>
-            <a:ext cx="713232" cy="305410"/>
-          </a:xfrm>
-          <a:prstGeom prst="rect">
-            <a:avLst/>
-          </a:prstGeom>
-        </p:spPr>
-      </p:pic>
-      <p:sp>
-        <p:nvSpPr>
-          <p:cNvPr id="5" name="Text 2"/>
+      <p:sp>
+        <p:nvSpPr>
+          <p:cNvPr id="4" name="Text 2"/>
           <p:cNvSpPr txBox="1"/>
           <p:nvPr/>
         </p:nvSpPr>
@@ -13271,14 +13103,14 @@
       </p:sp>
       <p:sp>
         <p:nvSpPr>
-          <p:cNvPr id="6" name="Text 3"/>
+          <p:cNvPr id="5" name="Text 3"/>
           <p:cNvSpPr txBox="1"/>
           <p:nvPr/>
         </p:nvSpPr>
         <p:spPr>
           <a:xfrm>
             <a:off x="457200" y="82296"/>
-            <a:ext cx="7132320" cy="548640"/>
+            <a:ext cx="5120640" cy="548640"/>
           </a:xfrm>
           <a:prstGeom prst="rect">
             <a:avLst/>
@@ -13310,14 +13142,14 @@
       </p:sp>
       <p:sp>
         <p:nvSpPr>
-          <p:cNvPr id="7" name="Text 4"/>
+          <p:cNvPr id="6" name="Text 4"/>
           <p:cNvSpPr txBox="1"/>
           <p:nvPr/>
         </p:nvSpPr>
         <p:spPr>
           <a:xfrm>
             <a:off x="4937760" y="201168"/>
-            <a:ext cx="2880360" cy="310896"/>
+            <a:ext cx="3749040" cy="310896"/>
           </a:xfrm>
           <a:prstGeom prst="rect">
             <a:avLst/>
@@ -13349,7 +13181,7 @@
       </p:sp>
       <p:sp>
         <p:nvSpPr>
-          <p:cNvPr id="8" name="Text 5"/>
+          <p:cNvPr id="7" name="Text 5"/>
           <p:cNvSpPr txBox="1"/>
           <p:nvPr/>
         </p:nvSpPr>
@@ -13388,7 +13220,7 @@
       </p:sp>
       <p:sp>
         <p:nvSpPr>
-          <p:cNvPr id="9" name="Text 6"/>
+          <p:cNvPr id="8" name="Text 6"/>
           <p:cNvSpPr txBox="1"/>
           <p:nvPr/>
         </p:nvSpPr>
@@ -13427,7 +13259,7 @@
       </p:sp>
       <p:sp>
         <p:nvSpPr>
-          <p:cNvPr id="10" name="Text 7"/>
+          <p:cNvPr id="9" name="Text 7"/>
           <p:cNvSpPr txBox="1"/>
           <p:nvPr/>
         </p:nvSpPr>
@@ -13469,7 +13301,7 @@
       </p:sp>
       <p:sp>
         <p:nvSpPr>
-          <p:cNvPr id="11" name="Text 8"/>
+          <p:cNvPr id="10" name="Text 8"/>
           <p:cNvSpPr txBox="1"/>
           <p:nvPr/>
         </p:nvSpPr>
@@ -13508,7 +13340,7 @@
       </p:sp>
       <p:sp>
         <p:nvSpPr>
-          <p:cNvPr id="12" name="Text 9"/>
+          <p:cNvPr id="11" name="Text 9"/>
           <p:cNvSpPr txBox="1"/>
           <p:nvPr/>
         </p:nvSpPr>
@@ -13550,7 +13382,7 @@
       </p:sp>
       <p:sp>
         <p:nvSpPr>
-          <p:cNvPr id="13" name="Text 10"/>
+          <p:cNvPr id="12" name="Text 10"/>
           <p:cNvSpPr txBox="1"/>
           <p:nvPr/>
         </p:nvSpPr>
@@ -13589,7 +13421,7 @@
       </p:sp>
       <p:sp>
         <p:nvSpPr>
-          <p:cNvPr id="14" name="Text 11"/>
+          <p:cNvPr id="13" name="Text 11"/>
           <p:cNvSpPr txBox="1"/>
           <p:nvPr/>
         </p:nvSpPr>
@@ -13628,7 +13460,7 @@
       </p:sp>
       <p:sp>
         <p:nvSpPr>
-          <p:cNvPr id="15" name="Text 12"/>
+          <p:cNvPr id="14" name="Text 12"/>
           <p:cNvSpPr txBox="1"/>
           <p:nvPr/>
         </p:nvSpPr>
@@ -13670,7 +13502,7 @@
       </p:sp>
       <p:sp>
         <p:nvSpPr>
-          <p:cNvPr id="16" name="Text 13"/>
+          <p:cNvPr id="15" name="Text 13"/>
           <p:cNvSpPr txBox="1"/>
           <p:nvPr/>
         </p:nvSpPr>
@@ -13709,7 +13541,7 @@
       </p:sp>
       <p:sp>
         <p:nvSpPr>
-          <p:cNvPr id="17" name="Text 14"/>
+          <p:cNvPr id="16" name="Text 14"/>
           <p:cNvSpPr txBox="1"/>
           <p:nvPr/>
         </p:nvSpPr>
@@ -14527,33 +14359,9 @@
           </a:ln>
         </p:spPr>
       </p:sp>
-      <p:pic>
-        <p:nvPicPr>
-          <p:cNvPr id="4" name="Image 0" descr="정석항공과학고등학교 교표">    </p:cNvPr>
-          <p:cNvPicPr>
-            <a:picLocks noChangeAspect="1"/>
-          </p:cNvPicPr>
-          <p:nvPr/>
-        </p:nvPicPr>
-        <p:blipFill>
-          <a:blip r:embed="rId1"/>
-          <a:stretch>
-            <a:fillRect/>
-          </a:stretch>
-        </p:blipFill>
-        <p:spPr>
-          <a:xfrm>
-            <a:off x="7973568" y="201168"/>
-            <a:ext cx="713232" cy="305410"/>
-          </a:xfrm>
-          <a:prstGeom prst="rect">
-            <a:avLst/>
-          </a:prstGeom>
-        </p:spPr>
-      </p:pic>
-      <p:sp>
-        <p:nvSpPr>
-          <p:cNvPr id="5" name="Text 2"/>
+      <p:sp>
+        <p:nvSpPr>
+          <p:cNvPr id="4" name="Text 2"/>
           <p:cNvSpPr txBox="1"/>
           <p:nvPr/>
         </p:nvSpPr>
@@ -14592,14 +14400,14 @@
       </p:sp>
       <p:sp>
         <p:nvSpPr>
-          <p:cNvPr id="6" name="Text 3"/>
+          <p:cNvPr id="5" name="Text 3"/>
           <p:cNvSpPr txBox="1"/>
           <p:nvPr/>
         </p:nvSpPr>
         <p:spPr>
           <a:xfrm>
             <a:off x="457200" y="82296"/>
-            <a:ext cx="7132320" cy="548640"/>
+            <a:ext cx="5120640" cy="548640"/>
           </a:xfrm>
           <a:prstGeom prst="rect">
             <a:avLst/>
@@ -14631,14 +14439,14 @@
       </p:sp>
       <p:sp>
         <p:nvSpPr>
-          <p:cNvPr id="7" name="Text 4"/>
+          <p:cNvPr id="6" name="Text 4"/>
           <p:cNvSpPr txBox="1"/>
           <p:nvPr/>
         </p:nvSpPr>
         <p:spPr>
           <a:xfrm>
             <a:off x="4937760" y="201168"/>
-            <a:ext cx="2880360" cy="310896"/>
+            <a:ext cx="3749040" cy="310896"/>
           </a:xfrm>
           <a:prstGeom prst="rect">
             <a:avLst/>
@@ -14670,7 +14478,7 @@
       </p:sp>
       <p:sp>
         <p:nvSpPr>
-          <p:cNvPr id="8" name="Text 5"/>
+          <p:cNvPr id="7" name="Text 5"/>
           <p:cNvSpPr txBox="1"/>
           <p:nvPr/>
         </p:nvSpPr>
@@ -14709,7 +14517,7 @@
       </p:sp>
       <p:sp>
         <p:nvSpPr>
-          <p:cNvPr id="9" name="Text 6"/>
+          <p:cNvPr id="8" name="Text 6"/>
           <p:cNvSpPr txBox="1"/>
           <p:nvPr/>
         </p:nvSpPr>
@@ -14748,7 +14556,7 @@
       </p:sp>
       <p:sp>
         <p:nvSpPr>
-          <p:cNvPr id="10" name="Text 7"/>
+          <p:cNvPr id="9" name="Text 7"/>
           <p:cNvSpPr txBox="1"/>
           <p:nvPr/>
         </p:nvSpPr>
@@ -14790,7 +14598,7 @@
       </p:sp>
       <p:sp>
         <p:nvSpPr>
-          <p:cNvPr id="11" name="Text 8"/>
+          <p:cNvPr id="10" name="Text 8"/>
           <p:cNvSpPr txBox="1"/>
           <p:nvPr/>
         </p:nvSpPr>
@@ -14829,7 +14637,7 @@
       </p:sp>
       <p:sp>
         <p:nvSpPr>
-          <p:cNvPr id="12" name="Text 9"/>
+          <p:cNvPr id="11" name="Text 9"/>
           <p:cNvSpPr txBox="1"/>
           <p:nvPr/>
         </p:nvSpPr>
@@ -14871,7 +14679,7 @@
       </p:sp>
       <p:sp>
         <p:nvSpPr>
-          <p:cNvPr id="13" name="Text 10"/>
+          <p:cNvPr id="12" name="Text 10"/>
           <p:cNvSpPr txBox="1"/>
           <p:nvPr/>
         </p:nvSpPr>
@@ -15914,7 +15722,7 @@
       </p:graphicFrame>
       <p:sp>
         <p:nvSpPr>
-          <p:cNvPr id="15" name="Text 11"/>
+          <p:cNvPr id="14" name="Text 11"/>
           <p:cNvSpPr txBox="1"/>
           <p:nvPr/>
         </p:nvSpPr>
@@ -15953,7 +15761,7 @@
       </p:sp>
       <p:sp>
         <p:nvSpPr>
-          <p:cNvPr id="16" name="Text 12"/>
+          <p:cNvPr id="15" name="Text 12"/>
           <p:cNvSpPr txBox="1"/>
           <p:nvPr/>
         </p:nvSpPr>
@@ -15992,7 +15800,7 @@
       </p:sp>
       <p:sp>
         <p:nvSpPr>
-          <p:cNvPr id="17" name="Text 13"/>
+          <p:cNvPr id="16" name="Text 13"/>
           <p:cNvSpPr txBox="1"/>
           <p:nvPr/>
         </p:nvSpPr>
@@ -16034,7 +15842,7 @@
       </p:sp>
       <p:sp>
         <p:nvSpPr>
-          <p:cNvPr id="18" name="Text 14"/>
+          <p:cNvPr id="17" name="Text 14"/>
           <p:cNvSpPr txBox="1"/>
           <p:nvPr/>
         </p:nvSpPr>
@@ -16073,7 +15881,7 @@
       </p:sp>
       <p:sp>
         <p:nvSpPr>
-          <p:cNvPr id="19" name="Text 15"/>
+          <p:cNvPr id="18" name="Text 15"/>
           <p:cNvSpPr txBox="1"/>
           <p:nvPr/>
         </p:nvSpPr>
@@ -16115,7 +15923,7 @@
       </p:sp>
       <p:sp>
         <p:nvSpPr>
-          <p:cNvPr id="20" name="Text 16"/>
+          <p:cNvPr id="19" name="Text 16"/>
           <p:cNvSpPr txBox="1"/>
           <p:nvPr/>
         </p:nvSpPr>
@@ -16154,7 +15962,7 @@
       </p:sp>
       <p:sp>
         <p:nvSpPr>
-          <p:cNvPr id="21" name="Text 17"/>
+          <p:cNvPr id="20" name="Text 17"/>
           <p:cNvSpPr txBox="1"/>
           <p:nvPr/>
         </p:nvSpPr>
@@ -16276,33 +16084,9 @@
           </a:ln>
         </p:spPr>
       </p:sp>
-      <p:pic>
-        <p:nvPicPr>
-          <p:cNvPr id="4" name="Image 0" descr="정석항공과학고등학교 교표">    </p:cNvPr>
-          <p:cNvPicPr>
-            <a:picLocks noChangeAspect="1"/>
-          </p:cNvPicPr>
-          <p:nvPr/>
-        </p:nvPicPr>
-        <p:blipFill>
-          <a:blip r:embed="rId1"/>
-          <a:stretch>
-            <a:fillRect/>
-          </a:stretch>
-        </p:blipFill>
-        <p:spPr>
-          <a:xfrm>
-            <a:off x="7973568" y="201168"/>
-            <a:ext cx="713232" cy="305410"/>
-          </a:xfrm>
-          <a:prstGeom prst="rect">
-            <a:avLst/>
-          </a:prstGeom>
-        </p:spPr>
-      </p:pic>
-      <p:sp>
-        <p:nvSpPr>
-          <p:cNvPr id="5" name="Text 2"/>
+      <p:sp>
+        <p:nvSpPr>
+          <p:cNvPr id="4" name="Text 2"/>
           <p:cNvSpPr txBox="1"/>
           <p:nvPr/>
         </p:nvSpPr>
@@ -16341,14 +16125,14 @@
       </p:sp>
       <p:sp>
         <p:nvSpPr>
-          <p:cNvPr id="6" name="Text 3"/>
+          <p:cNvPr id="5" name="Text 3"/>
           <p:cNvSpPr txBox="1"/>
           <p:nvPr/>
         </p:nvSpPr>
         <p:spPr>
           <a:xfrm>
             <a:off x="457200" y="82296"/>
-            <a:ext cx="7132320" cy="548640"/>
+            <a:ext cx="5120640" cy="548640"/>
           </a:xfrm>
           <a:prstGeom prst="rect">
             <a:avLst/>
@@ -16380,14 +16164,14 @@
       </p:sp>
       <p:sp>
         <p:nvSpPr>
-          <p:cNvPr id="7" name="Text 4"/>
+          <p:cNvPr id="6" name="Text 4"/>
           <p:cNvSpPr txBox="1"/>
           <p:nvPr/>
         </p:nvSpPr>
         <p:spPr>
           <a:xfrm>
             <a:off x="4937760" y="201168"/>
-            <a:ext cx="2880360" cy="310896"/>
+            <a:ext cx="3749040" cy="310896"/>
           </a:xfrm>
           <a:prstGeom prst="rect">
             <a:avLst/>
@@ -16419,7 +16203,7 @@
       </p:sp>
       <p:sp>
         <p:nvSpPr>
-          <p:cNvPr id="8" name="Text 5"/>
+          <p:cNvPr id="7" name="Text 5"/>
           <p:cNvSpPr txBox="1"/>
           <p:nvPr/>
         </p:nvSpPr>
@@ -16458,7 +16242,7 @@
       </p:sp>
       <p:sp>
         <p:nvSpPr>
-          <p:cNvPr id="9" name="Text 6"/>
+          <p:cNvPr id="8" name="Text 6"/>
           <p:cNvSpPr txBox="1"/>
           <p:nvPr/>
         </p:nvSpPr>
@@ -16497,7 +16281,7 @@
       </p:sp>
       <p:sp>
         <p:nvSpPr>
-          <p:cNvPr id="10" name="Text 7"/>
+          <p:cNvPr id="9" name="Text 7"/>
           <p:cNvSpPr txBox="1"/>
           <p:nvPr/>
         </p:nvSpPr>
@@ -16539,7 +16323,7 @@
       </p:sp>
       <p:sp>
         <p:nvSpPr>
-          <p:cNvPr id="11" name="Text 8"/>
+          <p:cNvPr id="10" name="Text 8"/>
           <p:cNvSpPr txBox="1"/>
           <p:nvPr/>
         </p:nvSpPr>
@@ -16578,7 +16362,7 @@
       </p:sp>
       <p:sp>
         <p:nvSpPr>
-          <p:cNvPr id="12" name="Text 9"/>
+          <p:cNvPr id="11" name="Text 9"/>
           <p:cNvSpPr txBox="1"/>
           <p:nvPr/>
         </p:nvSpPr>
@@ -16620,7 +16404,7 @@
       </p:sp>
       <p:sp>
         <p:nvSpPr>
-          <p:cNvPr id="13" name="Text 10"/>
+          <p:cNvPr id="12" name="Text 10"/>
           <p:cNvSpPr txBox="1"/>
           <p:nvPr/>
         </p:nvSpPr>
@@ -17663,7 +17447,7 @@
       </p:graphicFrame>
       <p:sp>
         <p:nvSpPr>
-          <p:cNvPr id="15" name="Text 11"/>
+          <p:cNvPr id="14" name="Text 11"/>
           <p:cNvSpPr txBox="1"/>
           <p:nvPr/>
         </p:nvSpPr>
@@ -17702,7 +17486,7 @@
       </p:sp>
       <p:sp>
         <p:nvSpPr>
-          <p:cNvPr id="16" name="Text 12"/>
+          <p:cNvPr id="15" name="Text 12"/>
           <p:cNvSpPr txBox="1"/>
           <p:nvPr/>
         </p:nvSpPr>
@@ -17741,7 +17525,7 @@
       </p:sp>
       <p:sp>
         <p:nvSpPr>
-          <p:cNvPr id="17" name="Text 13"/>
+          <p:cNvPr id="16" name="Text 13"/>
           <p:cNvSpPr txBox="1"/>
           <p:nvPr/>
         </p:nvSpPr>
@@ -17783,7 +17567,7 @@
       </p:sp>
       <p:sp>
         <p:nvSpPr>
-          <p:cNvPr id="18" name="Text 14"/>
+          <p:cNvPr id="17" name="Text 14"/>
           <p:cNvSpPr txBox="1"/>
           <p:nvPr/>
         </p:nvSpPr>
@@ -17822,7 +17606,7 @@
       </p:sp>
       <p:sp>
         <p:nvSpPr>
-          <p:cNvPr id="19" name="Text 15"/>
+          <p:cNvPr id="18" name="Text 15"/>
           <p:cNvSpPr txBox="1"/>
           <p:nvPr/>
         </p:nvSpPr>
@@ -17944,33 +17728,9 @@
           </a:ln>
         </p:spPr>
       </p:sp>
-      <p:pic>
-        <p:nvPicPr>
-          <p:cNvPr id="4" name="Image 0" descr="정석항공과학고등학교 교표">    </p:cNvPr>
-          <p:cNvPicPr>
-            <a:picLocks noChangeAspect="1"/>
-          </p:cNvPicPr>
-          <p:nvPr/>
-        </p:nvPicPr>
-        <p:blipFill>
-          <a:blip r:embed="rId1"/>
-          <a:stretch>
-            <a:fillRect/>
-          </a:stretch>
-        </p:blipFill>
-        <p:spPr>
-          <a:xfrm>
-            <a:off x="7973568" y="201168"/>
-            <a:ext cx="713232" cy="305410"/>
-          </a:xfrm>
-          <a:prstGeom prst="rect">
-            <a:avLst/>
-          </a:prstGeom>
-        </p:spPr>
-      </p:pic>
-      <p:sp>
-        <p:nvSpPr>
-          <p:cNvPr id="5" name="Text 2"/>
+      <p:sp>
+        <p:nvSpPr>
+          <p:cNvPr id="4" name="Text 2"/>
           <p:cNvSpPr txBox="1"/>
           <p:nvPr/>
         </p:nvSpPr>
@@ -18009,14 +17769,14 @@
       </p:sp>
       <p:sp>
         <p:nvSpPr>
-          <p:cNvPr id="6" name="Text 3"/>
+          <p:cNvPr id="5" name="Text 3"/>
           <p:cNvSpPr txBox="1"/>
           <p:nvPr/>
         </p:nvSpPr>
         <p:spPr>
           <a:xfrm>
             <a:off x="457200" y="82296"/>
-            <a:ext cx="7132320" cy="548640"/>
+            <a:ext cx="5120640" cy="548640"/>
           </a:xfrm>
           <a:prstGeom prst="rect">
             <a:avLst/>
@@ -18048,14 +17808,14 @@
       </p:sp>
       <p:sp>
         <p:nvSpPr>
-          <p:cNvPr id="7" name="Text 4"/>
+          <p:cNvPr id="6" name="Text 4"/>
           <p:cNvSpPr txBox="1"/>
           <p:nvPr/>
         </p:nvSpPr>
         <p:spPr>
           <a:xfrm>
             <a:off x="4937760" y="201168"/>
-            <a:ext cx="2880360" cy="310896"/>
+            <a:ext cx="3749040" cy="310896"/>
           </a:xfrm>
           <a:prstGeom prst="rect">
             <a:avLst/>
@@ -18087,7 +17847,7 @@
       </p:sp>
       <p:sp>
         <p:nvSpPr>
-          <p:cNvPr id="8" name="Text 5"/>
+          <p:cNvPr id="7" name="Text 5"/>
           <p:cNvSpPr txBox="1"/>
           <p:nvPr/>
         </p:nvSpPr>
@@ -18126,7 +17886,7 @@
       </p:sp>
       <p:sp>
         <p:nvSpPr>
-          <p:cNvPr id="9" name="Text 6"/>
+          <p:cNvPr id="8" name="Text 6"/>
           <p:cNvSpPr txBox="1"/>
           <p:nvPr/>
         </p:nvSpPr>
@@ -18165,7 +17925,7 @@
       </p:sp>
       <p:sp>
         <p:nvSpPr>
-          <p:cNvPr id="10" name="Text 7"/>
+          <p:cNvPr id="9" name="Text 7"/>
           <p:cNvSpPr txBox="1"/>
           <p:nvPr/>
         </p:nvSpPr>
@@ -18207,7 +17967,7 @@
       </p:sp>
       <p:sp>
         <p:nvSpPr>
-          <p:cNvPr id="11" name="Text 8"/>
+          <p:cNvPr id="10" name="Text 8"/>
           <p:cNvSpPr txBox="1"/>
           <p:nvPr/>
         </p:nvSpPr>
@@ -18246,7 +18006,7 @@
       </p:sp>
       <p:sp>
         <p:nvSpPr>
-          <p:cNvPr id="12" name="Text 9"/>
+          <p:cNvPr id="11" name="Text 9"/>
           <p:cNvSpPr txBox="1"/>
           <p:nvPr/>
         </p:nvSpPr>
@@ -18288,7 +18048,7 @@
       </p:sp>
       <p:sp>
         <p:nvSpPr>
-          <p:cNvPr id="13" name="Text 10"/>
+          <p:cNvPr id="12" name="Text 10"/>
           <p:cNvSpPr txBox="1"/>
           <p:nvPr/>
         </p:nvSpPr>
@@ -18759,7 +18519,7 @@
       </p:graphicFrame>
       <p:sp>
         <p:nvSpPr>
-          <p:cNvPr id="15" name="Text 11"/>
+          <p:cNvPr id="14" name="Text 11"/>
           <p:cNvSpPr txBox="1"/>
           <p:nvPr/>
         </p:nvSpPr>
@@ -19454,7 +19214,7 @@
       </p:graphicFrame>
       <p:sp>
         <p:nvSpPr>
-          <p:cNvPr id="17" name="Text 12"/>
+          <p:cNvPr id="16" name="Text 12"/>
           <p:cNvSpPr txBox="1"/>
           <p:nvPr/>
         </p:nvSpPr>

--- a/docs/2027년_사무직원_채용계획안.pptx
+++ b/docs/2027년_사무직원_채용계획안.pptx
@@ -1848,8 +1848,8 @@
         </p:nvSpPr>
         <p:spPr>
           <a:xfrm>
-            <a:off x="457200" y="1929384"/>
-            <a:ext cx="8229600" cy="1929384"/>
+            <a:off x="457200" y="2212848"/>
+            <a:ext cx="8229600" cy="841248"/>
           </a:xfrm>
           <a:prstGeom prst="rect">
             <a:avLst/>
@@ -1872,9 +1872,9 @@
               <a:buNone/>
             </a:pPr>
             <a:r>
-              <a:rPr lang="en-US" sz="3200" dirty="0">
+              <a:rPr lang="en-US" sz="3200" b="1" dirty="0">
                 <a:solidFill>
-                  <a:srgbClr val="000000"/>
+                  <a:srgbClr val="FFFFFF"/>
                 </a:solidFill>
                 <a:latin typeface="HY헤드라인M" pitchFamily="34" charset="0"/>
                 <a:ea typeface="HY헤드라인M" pitchFamily="34" charset="-122"/>
@@ -1894,7 +1894,7 @@
         </p:nvSpPr>
         <p:spPr>
           <a:xfrm>
-            <a:off x="457200" y="4261104"/>
+            <a:off x="457200" y="3127248"/>
             <a:ext cx="8229600" cy="365760"/>
           </a:xfrm>
           <a:prstGeom prst="rect">
@@ -1911,7 +1911,46 @@
               <a:buNone/>
             </a:pPr>
             <a:r>
-              <a:rPr lang="en-US" sz="1600" dirty="0">
+              <a:rPr lang="en-US" sz="1500" dirty="0">
+                <a:solidFill>
+                  <a:srgbClr val="FFFFFF"/>
+                </a:solidFill>
+                <a:latin typeface="맑은 고딕" pitchFamily="34" charset="0"/>
+                <a:ea typeface="맑은 고딕" pitchFamily="34" charset="-122"/>
+                <a:cs typeface="맑은 고딕" pitchFamily="34" charset="-120"/>
+              </a:rPr>
+              <a:t>기술·관리운영직(9급) 1명 공개채용</a:t>
+            </a:r>
+            <a:endParaRPr lang="en-US" sz="1500" dirty="0"/>
+          </a:p>
+        </p:txBody>
+      </p:sp>
+      <p:sp>
+        <p:nvSpPr>
+          <p:cNvPr id="7" name="Text 5"/>
+          <p:cNvSpPr txBox="1"/>
+          <p:nvPr/>
+        </p:nvSpPr>
+        <p:spPr>
+          <a:xfrm>
+            <a:off x="457200" y="4297680"/>
+            <a:ext cx="8229600" cy="402336"/>
+          </a:xfrm>
+          <a:prstGeom prst="rect">
+            <a:avLst/>
+          </a:prstGeom>
+          <a:noFill/>
+          <a:ln/>
+        </p:spPr>
+        <p:txBody>
+          <a:bodyPr wrap="square" lIns="0" tIns="0" rIns="0" bIns="0" rtlCol="0" anchor="ctr"/>
+          <a:lstStyle/>
+          <a:p>
+            <a:pPr eaLnBrk="0" latinLnBrk="0" algn="ctr" indent="0" marL="0">
+              <a:buNone/>
+            </a:pPr>
+            <a:r>
+              <a:rPr lang="en-US" sz="1700" dirty="0">
                 <a:solidFill>
                   <a:srgbClr val="263FFA"/>
                 </a:solidFill>
@@ -1919,15 +1958,15 @@
                 <a:ea typeface="맑은 고딕" pitchFamily="34" charset="-122"/>
                 <a:cs typeface="맑은 고딕" pitchFamily="34" charset="-120"/>
               </a:rPr>
-              <a:t>기술·관리운영직(9급) 1명 공개채용</a:t>
+              <a:t>2026.  9.</a:t>
             </a:r>
-            <a:endParaRPr lang="en-US" sz="1600" dirty="0"/>
+            <a:endParaRPr lang="en-US" sz="1700" dirty="0"/>
           </a:p>
         </p:txBody>
       </p:sp>
       <p:pic>
         <p:nvPicPr>
-          <p:cNvPr id="7" name="Image 0" descr="정석항공과학고등학교 엠블럼">    </p:cNvPr>
+          <p:cNvPr id="8" name="Image 0" descr="정석항공과학고등학교 엠블럼">    </p:cNvPr>
           <p:cNvPicPr>
             <a:picLocks noChangeAspect="1"/>
           </p:cNvPicPr>
@@ -1951,7 +1990,7 @@
       </p:pic>
       <p:sp>
         <p:nvSpPr>
-          <p:cNvPr id="8" name="Text 5"/>
+          <p:cNvPr id="9" name="Text 6"/>
           <p:cNvSpPr txBox="1"/>
           <p:nvPr/>
         </p:nvSpPr>

--- a/docs/2027년_사무직원_채용계획안.pptx
+++ b/docs/2027년_사무직원_채용계획안.pptx
@@ -16,9 +16,10 @@
     <p:sldId id="264" r:id="rId10"/>
     <p:sldId id="265" r:id="rId11"/>
     <p:sldId id="266" r:id="rId12"/>
+    <p:sldId id="267" r:id="rId13"/>
   </p:sldIdLst>
   <p:notesMasterIdLst>
-    <p:notesMasterId r:id="rId13"/>
+    <p:notesMasterId r:id="rId14"/>
   </p:notesMasterIdLst>
   <p:sldSz cx="9144000" cy="6858000"/>
   <p:notesSz cx="6858000" cy="9144000"/>
@@ -600,7 +601,7 @@
           <a:p>
             <a:r>
               <a:rPr lang="en-US" dirty="0"/>
-              <a:t>최종합격 예정자는 2배수 내외로 선정하여 법인에 임용 제청합니다. 채용예정인원이 3명 이하이므로 보훈 가점은 적용하지 않습니다.</a:t>
+              <a:t>최종합격 예정자를 대상으로 채용신체검사, 결격사유·범죄경력 조회, 성범죄 및 아동학대 범죄전력 조회를 실시합니다.</a:t>
             </a:r>
             <a:endParaRPr lang="en-US" dirty="0"/>
           </a:p>
@@ -688,7 +689,7 @@
           <a:p>
             <a:r>
               <a:rPr lang="en-US" dirty="0"/>
-              <a:t>채용 계획 요약: 1명 공개채용, 결원 3명, 배점 100점, 2027년 1월 1일 임용.</a:t>
+              <a:t>최종합격 예정자는 2배수 내외로 선정하여 법인에 임용 제청합니다. 채용예정인원이 3명 이하이므로 보훈 가점은 적용하지 않습니다.</a:t>
             </a:r>
             <a:endParaRPr lang="en-US" dirty="0"/>
           </a:p>
@@ -712,6 +713,94 @@
             <a:fld id="{F7021451-1387-4CA6-816F-3879F97B5CBC}" type="slidenum">
               <a:rPr lang="en-US"/>
               <a:t>11</a:t>
+            </a:fld>
+            <a:endParaRPr lang="en-US"/>
+          </a:p>
+        </p:txBody>
+      </p:sp>
+    </p:spTree>
+    <p:extLst>
+      <p:ext uri="{BB962C8B-B14F-4D97-AF65-F5344CB8AC3E}">
+        <p14:creationId xmlns:p14="http://schemas.microsoft.com/office/powerpoint/2010/main" val="1024086991"/>
+      </p:ext>
+    </p:extLst>
+  </p:cSld>
+  <p:clrMapOvr>
+    <a:masterClrMapping/>
+  </p:clrMapOvr>
+</p:notes>
+</file>
+
+<file path=ppt/notesSlides/notesSlide12.xml><?xml version="1.0" encoding="utf-8"?>
+<p:notes xmlns:a="http://schemas.openxmlformats.org/drawingml/2006/main" xmlns:r="http://schemas.openxmlformats.org/officeDocument/2006/relationships" xmlns:p="http://schemas.openxmlformats.org/presentationml/2006/main">
+  <p:cSld>
+    <p:spTree>
+      <p:nvGrpSpPr>
+        <p:cNvPr id="1" name=""/>
+        <p:cNvGrpSpPr/>
+        <p:nvPr/>
+      </p:nvGrpSpPr>
+      <p:grpSpPr>
+        <a:xfrm>
+          <a:off x="0" y="0"/>
+          <a:ext cx="0" cy="0"/>
+          <a:chOff x="0" y="0"/>
+          <a:chExt cx="0" cy="0"/>
+        </a:xfrm>
+      </p:grpSpPr>
+      <p:sp>
+        <p:nvSpPr>
+          <p:cNvPr id="2" name="Slide Image Placeholder 1"/>
+          <p:cNvSpPr>
+            <a:spLocks noGrp="1" noRot="1" noChangeAspect="1"/>
+          </p:cNvSpPr>
+          <p:nvPr>
+            <p:ph type="sldImg"/>
+          </p:nvPr>
+        </p:nvSpPr>
+        <p:spPr/>
+      </p:sp>
+      <p:sp>
+        <p:nvSpPr>
+          <p:cNvPr id="3" name="Notes Placeholder 2"/>
+          <p:cNvSpPr>
+            <a:spLocks noGrp="1"/>
+          </p:cNvSpPr>
+          <p:nvPr>
+            <p:ph type="body" idx="1"/>
+          </p:nvPr>
+        </p:nvSpPr>
+        <p:spPr/>
+        <p:txBody>
+          <a:bodyPr/>
+          <a:lstStyle/>
+          <a:p>
+            <a:r>
+              <a:rPr lang="en-US" dirty="0"/>
+              <a:t>채용 계획 요약: 1명 공개채용, 결원 3명, 배점 100점, 2027년 1월 1일 임용.</a:t>
+            </a:r>
+            <a:endParaRPr lang="en-US" dirty="0"/>
+          </a:p>
+        </p:txBody>
+      </p:sp>
+      <p:sp>
+        <p:nvSpPr>
+          <p:cNvPr id="4" name="Slide Number Placeholder 3"/>
+          <p:cNvSpPr>
+            <a:spLocks noGrp="1"/>
+          </p:cNvSpPr>
+          <p:nvPr>
+            <p:ph type="sldNum" sz="quarter" idx="10"/>
+          </p:nvPr>
+        </p:nvSpPr>
+        <p:spPr/>
+        <p:txBody>
+          <a:bodyPr/>
+          <a:lstStyle/>
+          <a:p>
+            <a:fld id="{F7021451-1387-4CA6-816F-3879F97B5CBC}" type="slidenum">
+              <a:rPr lang="en-US"/>
+              <a:t>12</a:t>
             </a:fld>
             <a:endParaRPr lang="en-US"/>
           </a:p>
@@ -776,7 +865,7 @@
           <a:p>
             <a:r>
               <a:rPr lang="en-US" dirty="0"/>
-              <a:t>정원 8명 대비 현원 5명, 결원 3명. 그중 1명은 공개채용, 증치 정원 2명은 기간제로 운영합니다.</a:t>
+              <a:t>목차 — 채용 인원 및 사유부터 채용 계획 요약까지 10개 항목으로 구성되며, 5~8은 전형 4단계에 해당합니다.</a:t>
             </a:r>
             <a:endParaRPr lang="en-US" dirty="0"/>
           </a:p>
@@ -864,7 +953,7 @@
           <a:p>
             <a:r>
               <a:rPr lang="en-US" dirty="0"/>
-              <a:t>정원 8명(행정직 4, 기술·관리운영직 2, 증치 2), 현원 5명. 증치 사유는 15학급당 1명, 1,000Kw 이상 1명입니다.</a:t>
+              <a:t>정원 8명 대비 현원 5명, 결원 3명. 그중 1명은 공개채용, 증치 정원 2명은 기간제로 운영합니다.</a:t>
             </a:r>
             <a:endParaRPr lang="en-US" dirty="0"/>
           </a:p>
@@ -952,7 +1041,7 @@
           <a:p>
             <a:r>
               <a:rPr lang="en-US" dirty="0"/>
-              <a:t>전체 채용 일정은 5단계로 진행되며, 2027년 1월 1일 임용으로 마무리됩니다.</a:t>
+              <a:t>정원 8명(행정직 4, 기술·관리운영직 2, 증치 2), 현원 5명. 증치 사유는 15학급당 1명, 1,000Kw 이상 1명입니다.</a:t>
             </a:r>
             <a:endParaRPr lang="en-US" dirty="0"/>
           </a:p>
@@ -1040,7 +1129,7 @@
           <a:p>
             <a:r>
               <a:rPr lang="en-US" dirty="0"/>
-              <a:t>전형은 지원서 접수 → 서류심사(5배수) → 업무적성 및 심층면접(2배수) → 결격사유 검증 → 최종합격자 결정 순으로 진행됩니다.</a:t>
+              <a:t>전체 채용 일정은 5단계로 진행되며, 2027년 1월 1일 임용으로 마무리됩니다.</a:t>
             </a:r>
             <a:endParaRPr lang="en-US" dirty="0"/>
           </a:p>
@@ -1128,7 +1217,7 @@
           <a:p>
             <a:r>
               <a:rPr lang="en-US" dirty="0"/>
-              <a:t>지원 자격은 지방공무원법 제31조 결격사유 비해당, 만 18세 이상 정년 미해당자입니다. 자기소개서는 4개 문항, 800자 이내로 작성합니다.</a:t>
+              <a:t>전형은 지원서 접수 → 서류심사(5배수) → 업무적성 및 심층면접(2배수) → 결격사유 검증 → 최종합격자 결정 순으로 진행됩니다.</a:t>
             </a:r>
             <a:endParaRPr lang="en-US" dirty="0"/>
           </a:p>
@@ -1216,7 +1305,7 @@
           <a:p>
             <a:r>
               <a:rPr lang="en-US" dirty="0"/>
-              <a:t>1차 서류전형은 총 30점 만점, 5배수 내외를 선발합니다. 자기소개서 불성실 작성자는 탈락 기준에 따라 배제됩니다.</a:t>
+              <a:t>지원 자격은 지방공무원법 제31조 결격사유 비해당, 만 18세 이상 정년 미해당자입니다. 자기소개서는 4개 문항, 800자 이내로 작성합니다.</a:t>
             </a:r>
             <a:endParaRPr lang="en-US" dirty="0"/>
           </a:p>
@@ -1304,7 +1393,7 @@
           <a:p>
             <a:r>
               <a:rPr lang="en-US" dirty="0"/>
-              <a:t>2차 면접은 70점 만점이며 2배수 내외를 선발합니다. 1·2차 합산 100점 기준으로 최종 순위를 결정합니다.</a:t>
+              <a:t>1차 서류전형은 총 30점 만점, 5배수 내외를 선발합니다. 자기소개서 불성실 작성자는 탈락 기준에 따라 배제됩니다.</a:t>
             </a:r>
             <a:endParaRPr lang="en-US" dirty="0"/>
           </a:p>
@@ -1392,7 +1481,7 @@
           <a:p>
             <a:r>
               <a:rPr lang="en-US" dirty="0"/>
-              <a:t>최종합격 예정자를 대상으로 채용신체검사, 결격사유·범죄경력 조회, 성범죄 및 아동학대 범죄전력 조회를 실시합니다.</a:t>
+              <a:t>2차 면접은 70점 만점이며 2배수 내외를 선발합니다. 1·2차 합산 100점 기준으로 최종 순위를 결정합니다.</a:t>
             </a:r>
             <a:endParaRPr lang="en-US" dirty="0"/>
           </a:p>
@@ -2181,6 +2270,1611 @@
                 <a:ea typeface="HY헤드라인M" pitchFamily="34" charset="-122"/>
                 <a:cs typeface="HY헤드라인M" pitchFamily="34" charset="-120"/>
               </a:rPr>
+              <a:t>8. 결격사유 검증</a:t>
+            </a:r>
+            <a:endParaRPr lang="en-US" sz="2600" dirty="0"/>
+          </a:p>
+        </p:txBody>
+      </p:sp>
+      <p:sp>
+        <p:nvSpPr>
+          <p:cNvPr id="6" name="Text 4"/>
+          <p:cNvSpPr txBox="1"/>
+          <p:nvPr/>
+        </p:nvSpPr>
+        <p:spPr>
+          <a:xfrm>
+            <a:off x="4937760" y="201168"/>
+            <a:ext cx="3749040" cy="310896"/>
+          </a:xfrm>
+          <a:prstGeom prst="rect">
+            <a:avLst/>
+          </a:prstGeom>
+          <a:noFill/>
+          <a:ln/>
+        </p:spPr>
+        <p:txBody>
+          <a:bodyPr wrap="square" lIns="0" tIns="0" rIns="0" bIns="0" rtlCol="0" anchor="ctr"/>
+          <a:lstStyle/>
+          <a:p>
+            <a:pPr eaLnBrk="0" latinLnBrk="0" algn="r" indent="0" marL="0">
+              <a:buNone/>
+            </a:pPr>
+            <a:r>
+              <a:rPr lang="en-US" sz="1150" b="1" dirty="0">
+                <a:solidFill>
+                  <a:srgbClr val="FFFFFF"/>
+                </a:solidFill>
+                <a:latin typeface="맑은 고딕" pitchFamily="34" charset="0"/>
+                <a:ea typeface="맑은 고딕" pitchFamily="34" charset="-122"/>
+                <a:cs typeface="맑은 고딕" pitchFamily="34" charset="-120"/>
+              </a:rPr>
+              <a:t>[ 전형 4단계 / 4단계 ]</a:t>
+            </a:r>
+            <a:endParaRPr lang="en-US" sz="1150" dirty="0"/>
+          </a:p>
+        </p:txBody>
+      </p:sp>
+      <p:sp>
+        <p:nvSpPr>
+          <p:cNvPr id="7" name="Text 5"/>
+          <p:cNvSpPr txBox="1"/>
+          <p:nvPr/>
+        </p:nvSpPr>
+        <p:spPr>
+          <a:xfrm>
+            <a:off x="457200" y="1042416"/>
+            <a:ext cx="8229600" cy="274320"/>
+          </a:xfrm>
+          <a:prstGeom prst="rect">
+            <a:avLst/>
+          </a:prstGeom>
+          <a:noFill/>
+          <a:ln/>
+        </p:spPr>
+        <p:txBody>
+          <a:bodyPr wrap="square" lIns="0" tIns="0" rIns="0" bIns="0" rtlCol="0" anchor="ctr"/>
+          <a:lstStyle/>
+          <a:p>
+            <a:pPr eaLnBrk="0" latinLnBrk="0" indent="0" marL="0">
+              <a:buNone/>
+            </a:pPr>
+            <a:r>
+              <a:rPr lang="en-US" sz="1400" dirty="0">
+                <a:solidFill>
+                  <a:srgbClr val="000000"/>
+                </a:solidFill>
+                <a:latin typeface="HY동녘B" pitchFamily="34" charset="0"/>
+                <a:ea typeface="HY동녘B" pitchFamily="34" charset="-122"/>
+                <a:cs typeface="HY동녘B" pitchFamily="34" charset="-120"/>
+              </a:rPr>
+              <a:t>■ 검증 대상 및 내용</a:t>
+            </a:r>
+            <a:endParaRPr lang="en-US" sz="1400" dirty="0"/>
+          </a:p>
+        </p:txBody>
+      </p:sp>
+      <p:sp>
+        <p:nvSpPr>
+          <p:cNvPr id="8" name="Text 6"/>
+          <p:cNvSpPr txBox="1"/>
+          <p:nvPr/>
+        </p:nvSpPr>
+        <p:spPr>
+          <a:xfrm>
+            <a:off x="658368" y="1389888"/>
+            <a:ext cx="237744" cy="237744"/>
+          </a:xfrm>
+          <a:prstGeom prst="rect">
+            <a:avLst/>
+          </a:prstGeom>
+          <a:noFill/>
+          <a:ln/>
+        </p:spPr>
+        <p:txBody>
+          <a:bodyPr wrap="square" lIns="0" tIns="0" rIns="0" bIns="0" rtlCol="0" anchor="t"/>
+          <a:lstStyle/>
+          <a:p>
+            <a:pPr eaLnBrk="0" latinLnBrk="0" indent="0" marL="0">
+              <a:buNone/>
+            </a:pPr>
+            <a:r>
+              <a:rPr lang="en-US" sz="1200" dirty="0">
+                <a:solidFill>
+                  <a:srgbClr val="000000"/>
+                </a:solidFill>
+                <a:latin typeface="맑은 고딕" pitchFamily="34" charset="0"/>
+                <a:ea typeface="맑은 고딕" pitchFamily="34" charset="-122"/>
+                <a:cs typeface="맑은 고딕" pitchFamily="34" charset="-120"/>
+              </a:rPr>
+              <a:t>○</a:t>
+            </a:r>
+            <a:endParaRPr lang="en-US" sz="1200" dirty="0"/>
+          </a:p>
+        </p:txBody>
+      </p:sp>
+      <p:sp>
+        <p:nvSpPr>
+          <p:cNvPr id="9" name="Text 7"/>
+          <p:cNvSpPr txBox="1"/>
+          <p:nvPr/>
+        </p:nvSpPr>
+        <p:spPr>
+          <a:xfrm>
+            <a:off x="914400" y="1389888"/>
+            <a:ext cx="7680960" cy="256032"/>
+          </a:xfrm>
+          <a:prstGeom prst="rect">
+            <a:avLst/>
+          </a:prstGeom>
+          <a:noFill/>
+          <a:ln/>
+        </p:spPr>
+        <p:txBody>
+          <a:bodyPr wrap="square" lIns="0" tIns="0" rIns="0" bIns="0" rtlCol="0" anchor="t"/>
+          <a:lstStyle/>
+          <a:p>
+            <a:pPr eaLnBrk="0" latinLnBrk="0" indent="0" marL="0">
+              <a:lnSpc>
+                <a:spcPts val="2000"/>
+              </a:lnSpc>
+              <a:buNone/>
+            </a:pPr>
+            <a:r>
+              <a:rPr lang="en-US" sz="1200" dirty="0">
+                <a:solidFill>
+                  <a:srgbClr val="000000"/>
+                </a:solidFill>
+                <a:latin typeface="맑은 고딕" pitchFamily="34" charset="0"/>
+                <a:ea typeface="맑은 고딕" pitchFamily="34" charset="-122"/>
+                <a:cs typeface="맑은 고딕" pitchFamily="34" charset="-120"/>
+              </a:rPr>
+              <a:t>대상자 : 최종합격 예정자</a:t>
+            </a:r>
+            <a:endParaRPr lang="en-US" sz="1200" dirty="0"/>
+          </a:p>
+        </p:txBody>
+      </p:sp>
+      <p:sp>
+        <p:nvSpPr>
+          <p:cNvPr id="10" name="Text 8"/>
+          <p:cNvSpPr txBox="1"/>
+          <p:nvPr/>
+        </p:nvSpPr>
+        <p:spPr>
+          <a:xfrm>
+            <a:off x="658368" y="1700784"/>
+            <a:ext cx="237744" cy="237744"/>
+          </a:xfrm>
+          <a:prstGeom prst="rect">
+            <a:avLst/>
+          </a:prstGeom>
+          <a:noFill/>
+          <a:ln/>
+        </p:spPr>
+        <p:txBody>
+          <a:bodyPr wrap="square" lIns="0" tIns="0" rIns="0" bIns="0" rtlCol="0" anchor="t"/>
+          <a:lstStyle/>
+          <a:p>
+            <a:pPr eaLnBrk="0" latinLnBrk="0" indent="0" marL="0">
+              <a:buNone/>
+            </a:pPr>
+            <a:r>
+              <a:rPr lang="en-US" sz="1200" dirty="0">
+                <a:solidFill>
+                  <a:srgbClr val="000000"/>
+                </a:solidFill>
+                <a:latin typeface="맑은 고딕" pitchFamily="34" charset="0"/>
+                <a:ea typeface="맑은 고딕" pitchFamily="34" charset="-122"/>
+                <a:cs typeface="맑은 고딕" pitchFamily="34" charset="-120"/>
+              </a:rPr>
+              <a:t>○</a:t>
+            </a:r>
+            <a:endParaRPr lang="en-US" sz="1200" dirty="0"/>
+          </a:p>
+        </p:txBody>
+      </p:sp>
+      <p:sp>
+        <p:nvSpPr>
+          <p:cNvPr id="11" name="Text 9"/>
+          <p:cNvSpPr txBox="1"/>
+          <p:nvPr/>
+        </p:nvSpPr>
+        <p:spPr>
+          <a:xfrm>
+            <a:off x="914400" y="1700784"/>
+            <a:ext cx="7680960" cy="256032"/>
+          </a:xfrm>
+          <a:prstGeom prst="rect">
+            <a:avLst/>
+          </a:prstGeom>
+          <a:noFill/>
+          <a:ln/>
+        </p:spPr>
+        <p:txBody>
+          <a:bodyPr wrap="square" lIns="0" tIns="0" rIns="0" bIns="0" rtlCol="0" anchor="t"/>
+          <a:lstStyle/>
+          <a:p>
+            <a:pPr eaLnBrk="0" latinLnBrk="0" indent="0" marL="0">
+              <a:lnSpc>
+                <a:spcPts val="2000"/>
+              </a:lnSpc>
+              <a:buNone/>
+            </a:pPr>
+            <a:r>
+              <a:rPr lang="en-US" sz="1200" dirty="0">
+                <a:solidFill>
+                  <a:srgbClr val="000000"/>
+                </a:solidFill>
+                <a:latin typeface="맑은 고딕" pitchFamily="34" charset="0"/>
+                <a:ea typeface="맑은 고딕" pitchFamily="34" charset="-122"/>
+                <a:cs typeface="맑은 고딕" pitchFamily="34" charset="-120"/>
+              </a:rPr>
+              <a:t>검증내용 : 임용 결격사유 해당 여부 확인</a:t>
+            </a:r>
+            <a:endParaRPr lang="en-US" sz="1200" dirty="0"/>
+          </a:p>
+        </p:txBody>
+      </p:sp>
+      <p:sp>
+        <p:nvSpPr>
+          <p:cNvPr id="12" name="Text 10"/>
+          <p:cNvSpPr txBox="1"/>
+          <p:nvPr/>
+        </p:nvSpPr>
+        <p:spPr>
+          <a:xfrm>
+            <a:off x="457200" y="2157984"/>
+            <a:ext cx="8229600" cy="274320"/>
+          </a:xfrm>
+          <a:prstGeom prst="rect">
+            <a:avLst/>
+          </a:prstGeom>
+          <a:noFill/>
+          <a:ln/>
+        </p:spPr>
+        <p:txBody>
+          <a:bodyPr wrap="square" lIns="0" tIns="0" rIns="0" bIns="0" rtlCol="0" anchor="ctr"/>
+          <a:lstStyle/>
+          <a:p>
+            <a:pPr eaLnBrk="0" latinLnBrk="0" indent="0" marL="0">
+              <a:buNone/>
+            </a:pPr>
+            <a:r>
+              <a:rPr lang="en-US" sz="1400" dirty="0">
+                <a:solidFill>
+                  <a:srgbClr val="000000"/>
+                </a:solidFill>
+                <a:latin typeface="HY동녘B" pitchFamily="34" charset="0"/>
+                <a:ea typeface="HY동녘B" pitchFamily="34" charset="-122"/>
+                <a:cs typeface="HY동녘B" pitchFamily="34" charset="-120"/>
+              </a:rPr>
+              <a:t>■ 채용신체검사</a:t>
+            </a:r>
+            <a:endParaRPr lang="en-US" sz="1400" dirty="0"/>
+          </a:p>
+        </p:txBody>
+      </p:sp>
+      <p:graphicFrame>
+        <p:nvGraphicFramePr>
+          <p:cNvPr id="11" name="Table 0"/>
+          <p:cNvGraphicFramePr>
+            <a:graphicFrameLocks noGrp="1"/>
+          </p:cNvGraphicFramePr>
+          <p:nvPr>
+            <p:extLst>
+              <p:ext uri="{D42A27DB-BD31-4B8C-83A1-F6EECF244321}">
+                <p14:modId xmlns:p14="http://schemas.microsoft.com/office/powerpoint/2010/main" val="1579011935"/>
+              </p:ext>
+            </p:extLst>
+          </p:nvPr>
+        </p:nvGraphicFramePr>
+        <p:xfrm>
+          <a:off x="914400" y="2523744"/>
+          <a:ext cx="7772400" cy="914400"/>
+        </p:xfrm>
+        <a:graphic>
+          <a:graphicData uri="http://schemas.openxmlformats.org/drawingml/2006/table">
+            <a:tbl>
+              <a:tblPr/>
+              <a:tblGrid>
+                <a:gridCol w="1371600"/>
+                <a:gridCol w="6400800"/>
+              </a:tblGrid>
+              <a:tr h="310896">
+                <a:tc>
+                  <a:txBody>
+                    <a:bodyPr/>
+                    <a:lstStyle/>
+                    <a:p>
+                      <a:pPr eaLnBrk="0" latinLnBrk="0" algn="ctr" indent="0" marL="0">
+                        <a:buNone/>
+                      </a:pPr>
+                      <a:r>
+                        <a:rPr lang="en-US" sz="1050" b="1" dirty="0">
+                          <a:solidFill>
+                            <a:srgbClr val="000000"/>
+                          </a:solidFill>
+                          <a:latin typeface="맑은 고딕" pitchFamily="34" charset="0"/>
+                          <a:ea typeface="맑은 고딕" pitchFamily="34" charset="-122"/>
+                          <a:cs typeface="맑은 고딕" pitchFamily="34" charset="-120"/>
+                        </a:rPr>
+                        <a:t>구분</a:t>
+                      </a:r>
+                      <a:endParaRPr lang="en-US" sz="1050" dirty="0">
+                        <a:latin typeface="맑은 고딕" charset="0"/>
+                        <a:ea typeface="맑은 고딕" charset="0"/>
+                        <a:cs typeface="맑은 고딕" charset="0"/>
+                      </a:endParaRPr>
+                    </a:p>
+                  </a:txBody>
+                  <a:tcPr marL="38100" marR="38100" marT="38100" marB="38100" anchor="ctr">
+                    <a:lnL w="12700" cap="flat" cmpd="sng" algn="ctr">
+                      <a:solidFill>
+                        <a:srgbClr val="000000"/>
+                      </a:solidFill>
+                      <a:prstDash val="solid"/>
+                      <a:round/>
+                      <a:headEnd type="none" w="med" len="med"/>
+                      <a:tailEnd type="none" w="med" len="med"/>
+                    </a:lnL>
+                    <a:lnR w="12700" cap="flat" cmpd="sng" algn="ctr">
+                      <a:solidFill>
+                        <a:srgbClr val="000000"/>
+                      </a:solidFill>
+                      <a:prstDash val="solid"/>
+                      <a:round/>
+                      <a:headEnd type="none" w="med" len="med"/>
+                      <a:tailEnd type="none" w="med" len="med"/>
+                    </a:lnR>
+                    <a:lnT w="12700" cap="flat" cmpd="sng" algn="ctr">
+                      <a:solidFill>
+                        <a:srgbClr val="000000"/>
+                      </a:solidFill>
+                      <a:prstDash val="solid"/>
+                      <a:round/>
+                      <a:headEnd type="none" w="med" len="med"/>
+                      <a:tailEnd type="none" w="med" len="med"/>
+                    </a:lnT>
+                    <a:lnB w="12700" cap="flat" cmpd="sng" algn="ctr">
+                      <a:solidFill>
+                        <a:srgbClr val="000000"/>
+                      </a:solidFill>
+                      <a:prstDash val="solid"/>
+                      <a:round/>
+                      <a:headEnd type="none" w="med" len="med"/>
+                      <a:tailEnd type="none" w="med" len="med"/>
+                    </a:lnB>
+                    <a:solidFill>
+                      <a:srgbClr val="CCFFFF"/>
+                    </a:solidFill>
+                  </a:tcPr>
+                </a:tc>
+                <a:tc>
+                  <a:txBody>
+                    <a:bodyPr/>
+                    <a:lstStyle/>
+                    <a:p>
+                      <a:pPr eaLnBrk="0" latinLnBrk="0" algn="ctr" indent="0" marL="0">
+                        <a:buNone/>
+                      </a:pPr>
+                      <a:r>
+                        <a:rPr lang="en-US" sz="1050" b="1" dirty="0">
+                          <a:solidFill>
+                            <a:srgbClr val="000000"/>
+                          </a:solidFill>
+                          <a:latin typeface="맑은 고딕" pitchFamily="34" charset="0"/>
+                          <a:ea typeface="맑은 고딕" pitchFamily="34" charset="-122"/>
+                          <a:cs typeface="맑은 고딕" pitchFamily="34" charset="-120"/>
+                        </a:rPr>
+                        <a:t>내 용</a:t>
+                      </a:r>
+                      <a:endParaRPr lang="en-US" sz="1050" dirty="0">
+                        <a:latin typeface="맑은 고딕" charset="0"/>
+                        <a:ea typeface="맑은 고딕" charset="0"/>
+                        <a:cs typeface="맑은 고딕" charset="0"/>
+                      </a:endParaRPr>
+                    </a:p>
+                  </a:txBody>
+                  <a:tcPr marL="38100" marR="38100" marT="38100" marB="38100" anchor="ctr">
+                    <a:lnL w="12700" cap="flat" cmpd="sng" algn="ctr">
+                      <a:solidFill>
+                        <a:srgbClr val="000000"/>
+                      </a:solidFill>
+                      <a:prstDash val="solid"/>
+                      <a:round/>
+                      <a:headEnd type="none" w="med" len="med"/>
+                      <a:tailEnd type="none" w="med" len="med"/>
+                    </a:lnL>
+                    <a:lnR w="12700" cap="flat" cmpd="sng" algn="ctr">
+                      <a:solidFill>
+                        <a:srgbClr val="000000"/>
+                      </a:solidFill>
+                      <a:prstDash val="solid"/>
+                      <a:round/>
+                      <a:headEnd type="none" w="med" len="med"/>
+                      <a:tailEnd type="none" w="med" len="med"/>
+                    </a:lnR>
+                    <a:lnT w="12700" cap="flat" cmpd="sng" algn="ctr">
+                      <a:solidFill>
+                        <a:srgbClr val="000000"/>
+                      </a:solidFill>
+                      <a:prstDash val="solid"/>
+                      <a:round/>
+                      <a:headEnd type="none" w="med" len="med"/>
+                      <a:tailEnd type="none" w="med" len="med"/>
+                    </a:lnT>
+                    <a:lnB w="12700" cap="flat" cmpd="sng" algn="ctr">
+                      <a:solidFill>
+                        <a:srgbClr val="000000"/>
+                      </a:solidFill>
+                      <a:prstDash val="solid"/>
+                      <a:round/>
+                      <a:headEnd type="none" w="med" len="med"/>
+                      <a:tailEnd type="none" w="med" len="med"/>
+                    </a:lnB>
+                    <a:solidFill>
+                      <a:srgbClr val="CCFFFF"/>
+                    </a:solidFill>
+                  </a:tcPr>
+                </a:tc>
+              </a:tr>
+              <a:tr h="347472">
+                <a:tc>
+                  <a:txBody>
+                    <a:bodyPr/>
+                    <a:lstStyle/>
+                    <a:p>
+                      <a:pPr eaLnBrk="0" latinLnBrk="0" algn="ctr" indent="0" marL="0">
+                        <a:buNone/>
+                      </a:pPr>
+                      <a:r>
+                        <a:rPr lang="en-US" sz="1050" dirty="0">
+                          <a:solidFill>
+                            <a:srgbClr val="000000"/>
+                          </a:solidFill>
+                          <a:latin typeface="맑은 고딕" pitchFamily="34" charset="0"/>
+                          <a:ea typeface="맑은 고딕" pitchFamily="34" charset="-122"/>
+                          <a:cs typeface="맑은 고딕" pitchFamily="34" charset="-120"/>
+                        </a:rPr>
+                        <a:t>시행근거</a:t>
+                      </a:r>
+                      <a:endParaRPr lang="en-US" sz="1050" dirty="0">
+                        <a:latin typeface="맑은 고딕" charset="0"/>
+                        <a:ea typeface="맑은 고딕" charset="0"/>
+                        <a:cs typeface="맑은 고딕" charset="0"/>
+                      </a:endParaRPr>
+                    </a:p>
+                  </a:txBody>
+                  <a:tcPr marL="38100" marR="38100" marT="38100" marB="38100" anchor="ctr">
+                    <a:lnL w="12700" cap="flat" cmpd="sng" algn="ctr">
+                      <a:solidFill>
+                        <a:srgbClr val="000000"/>
+                      </a:solidFill>
+                      <a:prstDash val="solid"/>
+                      <a:round/>
+                      <a:headEnd type="none" w="med" len="med"/>
+                      <a:tailEnd type="none" w="med" len="med"/>
+                    </a:lnL>
+                    <a:lnR w="12700" cap="flat" cmpd="sng" algn="ctr">
+                      <a:solidFill>
+                        <a:srgbClr val="000000"/>
+                      </a:solidFill>
+                      <a:prstDash val="solid"/>
+                      <a:round/>
+                      <a:headEnd type="none" w="med" len="med"/>
+                      <a:tailEnd type="none" w="med" len="med"/>
+                    </a:lnR>
+                    <a:lnT w="12700" cap="flat" cmpd="sng" algn="ctr">
+                      <a:solidFill>
+                        <a:srgbClr val="000000"/>
+                      </a:solidFill>
+                      <a:prstDash val="solid"/>
+                      <a:round/>
+                      <a:headEnd type="none" w="med" len="med"/>
+                      <a:tailEnd type="none" w="med" len="med"/>
+                    </a:lnT>
+                    <a:lnB w="12700" cap="flat" cmpd="sng" algn="ctr">
+                      <a:solidFill>
+                        <a:srgbClr val="000000"/>
+                      </a:solidFill>
+                      <a:prstDash val="solid"/>
+                      <a:round/>
+                      <a:headEnd type="none" w="med" len="med"/>
+                      <a:tailEnd type="none" w="med" len="med"/>
+                    </a:lnB>
+                  </a:tcPr>
+                </a:tc>
+                <a:tc>
+                  <a:txBody>
+                    <a:bodyPr/>
+                    <a:lstStyle/>
+                    <a:p>
+                      <a:pPr eaLnBrk="0" latinLnBrk="0" algn="l" indent="0" marL="0">
+                        <a:buNone/>
+                      </a:pPr>
+                      <a:r>
+                        <a:rPr lang="en-US" sz="1050" dirty="0">
+                          <a:solidFill>
+                            <a:srgbClr val="000000"/>
+                          </a:solidFill>
+                          <a:latin typeface="맑은 고딕" pitchFamily="34" charset="0"/>
+                          <a:ea typeface="맑은 고딕" pitchFamily="34" charset="-122"/>
+                          <a:cs typeface="맑은 고딕" pitchFamily="34" charset="-120"/>
+                        </a:rPr>
+                        <a:t>사무직원 인사 규정 (신규임용자 구비서류)</a:t>
+                      </a:r>
+                      <a:endParaRPr lang="en-US" sz="1050" dirty="0">
+                        <a:latin typeface="맑은 고딕" charset="0"/>
+                        <a:ea typeface="맑은 고딕" charset="0"/>
+                        <a:cs typeface="맑은 고딕" charset="0"/>
+                      </a:endParaRPr>
+                    </a:p>
+                  </a:txBody>
+                  <a:tcPr marL="38100" marR="38100" marT="38100" marB="38100" anchor="ctr">
+                    <a:lnL w="12700" cap="flat" cmpd="sng" algn="ctr">
+                      <a:solidFill>
+                        <a:srgbClr val="000000"/>
+                      </a:solidFill>
+                      <a:prstDash val="solid"/>
+                      <a:round/>
+                      <a:headEnd type="none" w="med" len="med"/>
+                      <a:tailEnd type="none" w="med" len="med"/>
+                    </a:lnL>
+                    <a:lnR w="12700" cap="flat" cmpd="sng" algn="ctr">
+                      <a:solidFill>
+                        <a:srgbClr val="000000"/>
+                      </a:solidFill>
+                      <a:prstDash val="solid"/>
+                      <a:round/>
+                      <a:headEnd type="none" w="med" len="med"/>
+                      <a:tailEnd type="none" w="med" len="med"/>
+                    </a:lnR>
+                    <a:lnT w="12700" cap="flat" cmpd="sng" algn="ctr">
+                      <a:solidFill>
+                        <a:srgbClr val="000000"/>
+                      </a:solidFill>
+                      <a:prstDash val="solid"/>
+                      <a:round/>
+                      <a:headEnd type="none" w="med" len="med"/>
+                      <a:tailEnd type="none" w="med" len="med"/>
+                    </a:lnT>
+                    <a:lnB w="12700" cap="flat" cmpd="sng" algn="ctr">
+                      <a:solidFill>
+                        <a:srgbClr val="000000"/>
+                      </a:solidFill>
+                      <a:prstDash val="solid"/>
+                      <a:round/>
+                      <a:headEnd type="none" w="med" len="med"/>
+                      <a:tailEnd type="none" w="med" len="med"/>
+                    </a:lnB>
+                  </a:tcPr>
+                </a:tc>
+              </a:tr>
+              <a:tr h="347472">
+                <a:tc>
+                  <a:txBody>
+                    <a:bodyPr/>
+                    <a:lstStyle/>
+                    <a:p>
+                      <a:pPr eaLnBrk="0" latinLnBrk="0" algn="ctr" indent="0" marL="0">
+                        <a:buNone/>
+                      </a:pPr>
+                      <a:r>
+                        <a:rPr lang="en-US" sz="1050" dirty="0">
+                          <a:solidFill>
+                            <a:srgbClr val="000000"/>
+                          </a:solidFill>
+                          <a:latin typeface="맑은 고딕" pitchFamily="34" charset="0"/>
+                          <a:ea typeface="맑은 고딕" pitchFamily="34" charset="-122"/>
+                          <a:cs typeface="맑은 고딕" pitchFamily="34" charset="-120"/>
+                        </a:rPr>
+                        <a:t>검사항목</a:t>
+                      </a:r>
+                      <a:endParaRPr lang="en-US" sz="1050" dirty="0">
+                        <a:latin typeface="맑은 고딕" charset="0"/>
+                        <a:ea typeface="맑은 고딕" charset="0"/>
+                        <a:cs typeface="맑은 고딕" charset="0"/>
+                      </a:endParaRPr>
+                    </a:p>
+                  </a:txBody>
+                  <a:tcPr marL="38100" marR="38100" marT="38100" marB="38100" anchor="ctr">
+                    <a:lnL w="12700" cap="flat" cmpd="sng" algn="ctr">
+                      <a:solidFill>
+                        <a:srgbClr val="000000"/>
+                      </a:solidFill>
+                      <a:prstDash val="solid"/>
+                      <a:round/>
+                      <a:headEnd type="none" w="med" len="med"/>
+                      <a:tailEnd type="none" w="med" len="med"/>
+                    </a:lnL>
+                    <a:lnR w="12700" cap="flat" cmpd="sng" algn="ctr">
+                      <a:solidFill>
+                        <a:srgbClr val="000000"/>
+                      </a:solidFill>
+                      <a:prstDash val="solid"/>
+                      <a:round/>
+                      <a:headEnd type="none" w="med" len="med"/>
+                      <a:tailEnd type="none" w="med" len="med"/>
+                    </a:lnR>
+                    <a:lnT w="12700" cap="flat" cmpd="sng" algn="ctr">
+                      <a:solidFill>
+                        <a:srgbClr val="000000"/>
+                      </a:solidFill>
+                      <a:prstDash val="solid"/>
+                      <a:round/>
+                      <a:headEnd type="none" w="med" len="med"/>
+                      <a:tailEnd type="none" w="med" len="med"/>
+                    </a:lnT>
+                    <a:lnB w="12700" cap="flat" cmpd="sng" algn="ctr">
+                      <a:solidFill>
+                        <a:srgbClr val="000000"/>
+                      </a:solidFill>
+                      <a:prstDash val="solid"/>
+                      <a:round/>
+                      <a:headEnd type="none" w="med" len="med"/>
+                      <a:tailEnd type="none" w="med" len="med"/>
+                    </a:lnB>
+                  </a:tcPr>
+                </a:tc>
+                <a:tc>
+                  <a:txBody>
+                    <a:bodyPr/>
+                    <a:lstStyle/>
+                    <a:p>
+                      <a:pPr eaLnBrk="0" latinLnBrk="0" algn="l" indent="0" marL="0">
+                        <a:buNone/>
+                      </a:pPr>
+                      <a:r>
+                        <a:rPr lang="en-US" sz="1050" dirty="0">
+                          <a:solidFill>
+                            <a:srgbClr val="000000"/>
+                          </a:solidFill>
+                          <a:latin typeface="맑은 고딕" pitchFamily="34" charset="0"/>
+                          <a:ea typeface="맑은 고딕" pitchFamily="34" charset="-122"/>
+                          <a:cs typeface="맑은 고딕" pitchFamily="34" charset="-120"/>
+                        </a:rPr>
+                        <a:t>공무원 채용신체검사 규정 적용</a:t>
+                      </a:r>
+                      <a:endParaRPr lang="en-US" sz="1050" dirty="0">
+                        <a:latin typeface="맑은 고딕" charset="0"/>
+                        <a:ea typeface="맑은 고딕" charset="0"/>
+                        <a:cs typeface="맑은 고딕" charset="0"/>
+                      </a:endParaRPr>
+                    </a:p>
+                  </a:txBody>
+                  <a:tcPr marL="38100" marR="38100" marT="38100" marB="38100" anchor="ctr">
+                    <a:lnL w="12700" cap="flat" cmpd="sng" algn="ctr">
+                      <a:solidFill>
+                        <a:srgbClr val="000000"/>
+                      </a:solidFill>
+                      <a:prstDash val="solid"/>
+                      <a:round/>
+                      <a:headEnd type="none" w="med" len="med"/>
+                      <a:tailEnd type="none" w="med" len="med"/>
+                    </a:lnL>
+                    <a:lnR w="12700" cap="flat" cmpd="sng" algn="ctr">
+                      <a:solidFill>
+                        <a:srgbClr val="000000"/>
+                      </a:solidFill>
+                      <a:prstDash val="solid"/>
+                      <a:round/>
+                      <a:headEnd type="none" w="med" len="med"/>
+                      <a:tailEnd type="none" w="med" len="med"/>
+                    </a:lnR>
+                    <a:lnT w="12700" cap="flat" cmpd="sng" algn="ctr">
+                      <a:solidFill>
+                        <a:srgbClr val="000000"/>
+                      </a:solidFill>
+                      <a:prstDash val="solid"/>
+                      <a:round/>
+                      <a:headEnd type="none" w="med" len="med"/>
+                      <a:tailEnd type="none" w="med" len="med"/>
+                    </a:lnT>
+                    <a:lnB w="12700" cap="flat" cmpd="sng" algn="ctr">
+                      <a:solidFill>
+                        <a:srgbClr val="000000"/>
+                      </a:solidFill>
+                      <a:prstDash val="solid"/>
+                      <a:round/>
+                      <a:headEnd type="none" w="med" len="med"/>
+                      <a:tailEnd type="none" w="med" len="med"/>
+                    </a:lnB>
+                  </a:tcPr>
+                </a:tc>
+              </a:tr>
+            </a:tbl>
+          </a:graphicData>
+        </a:graphic>
+      </p:graphicFrame>
+      <p:sp>
+        <p:nvSpPr>
+          <p:cNvPr id="14" name="Text 11"/>
+          <p:cNvSpPr txBox="1"/>
+          <p:nvPr/>
+        </p:nvSpPr>
+        <p:spPr>
+          <a:xfrm>
+            <a:off x="457200" y="3712464"/>
+            <a:ext cx="8229600" cy="274320"/>
+          </a:xfrm>
+          <a:prstGeom prst="rect">
+            <a:avLst/>
+          </a:prstGeom>
+          <a:noFill/>
+          <a:ln/>
+        </p:spPr>
+        <p:txBody>
+          <a:bodyPr wrap="square" lIns="0" tIns="0" rIns="0" bIns="0" rtlCol="0" anchor="ctr"/>
+          <a:lstStyle/>
+          <a:p>
+            <a:pPr eaLnBrk="0" latinLnBrk="0" indent="0" marL="0">
+              <a:buNone/>
+            </a:pPr>
+            <a:r>
+              <a:rPr lang="en-US" sz="1400" dirty="0">
+                <a:solidFill>
+                  <a:srgbClr val="000000"/>
+                </a:solidFill>
+                <a:latin typeface="HY동녘B" pitchFamily="34" charset="0"/>
+                <a:ea typeface="HY동녘B" pitchFamily="34" charset="-122"/>
+                <a:cs typeface="HY동녘B" pitchFamily="34" charset="-120"/>
+              </a:rPr>
+              <a:t>■ 결격사유조회 및 범죄경력조회</a:t>
+            </a:r>
+            <a:endParaRPr lang="en-US" sz="1400" dirty="0"/>
+          </a:p>
+        </p:txBody>
+      </p:sp>
+      <p:graphicFrame>
+        <p:nvGraphicFramePr>
+          <p:cNvPr id="21" name="Table 1"/>
+          <p:cNvGraphicFramePr>
+            <a:graphicFrameLocks noGrp="1"/>
+          </p:cNvGraphicFramePr>
+          <p:nvPr>
+            <p:extLst>
+              <p:ext uri="{D42A27DB-BD31-4B8C-83A1-F6EECF244321}">
+                <p14:modId xmlns:p14="http://schemas.microsoft.com/office/powerpoint/2010/main" val="1579011935"/>
+              </p:ext>
+            </p:extLst>
+          </p:nvPr>
+        </p:nvGraphicFramePr>
+        <p:xfrm>
+          <a:off x="914400" y="4078224"/>
+          <a:ext cx="7772400" cy="914400"/>
+        </p:xfrm>
+        <a:graphic>
+          <a:graphicData uri="http://schemas.openxmlformats.org/drawingml/2006/table">
+            <a:tbl>
+              <a:tblPr/>
+              <a:tblGrid>
+                <a:gridCol w="2377440"/>
+                <a:gridCol w="3108960"/>
+                <a:gridCol w="2286000"/>
+              </a:tblGrid>
+              <a:tr h="310896">
+                <a:tc>
+                  <a:txBody>
+                    <a:bodyPr/>
+                    <a:lstStyle/>
+                    <a:p>
+                      <a:pPr eaLnBrk="0" latinLnBrk="0" algn="ctr" indent="0" marL="0">
+                        <a:buNone/>
+                      </a:pPr>
+                      <a:r>
+                        <a:rPr lang="en-US" sz="1050" b="1" dirty="0">
+                          <a:solidFill>
+                            <a:srgbClr val="000000"/>
+                          </a:solidFill>
+                          <a:latin typeface="맑은 고딕" pitchFamily="34" charset="0"/>
+                          <a:ea typeface="맑은 고딕" pitchFamily="34" charset="-122"/>
+                          <a:cs typeface="맑은 고딕" pitchFamily="34" charset="-120"/>
+                        </a:rPr>
+                        <a:t>구분</a:t>
+                      </a:r>
+                      <a:endParaRPr lang="en-US" sz="1050" dirty="0">
+                        <a:latin typeface="맑은 고딕" charset="0"/>
+                        <a:ea typeface="맑은 고딕" charset="0"/>
+                        <a:cs typeface="맑은 고딕" charset="0"/>
+                      </a:endParaRPr>
+                    </a:p>
+                  </a:txBody>
+                  <a:tcPr marL="38100" marR="38100" marT="38100" marB="38100" anchor="ctr">
+                    <a:lnL w="12700" cap="flat" cmpd="sng" algn="ctr">
+                      <a:solidFill>
+                        <a:srgbClr val="000000"/>
+                      </a:solidFill>
+                      <a:prstDash val="solid"/>
+                      <a:round/>
+                      <a:headEnd type="none" w="med" len="med"/>
+                      <a:tailEnd type="none" w="med" len="med"/>
+                    </a:lnL>
+                    <a:lnR w="12700" cap="flat" cmpd="sng" algn="ctr">
+                      <a:solidFill>
+                        <a:srgbClr val="000000"/>
+                      </a:solidFill>
+                      <a:prstDash val="solid"/>
+                      <a:round/>
+                      <a:headEnd type="none" w="med" len="med"/>
+                      <a:tailEnd type="none" w="med" len="med"/>
+                    </a:lnR>
+                    <a:lnT w="12700" cap="flat" cmpd="sng" algn="ctr">
+                      <a:solidFill>
+                        <a:srgbClr val="000000"/>
+                      </a:solidFill>
+                      <a:prstDash val="solid"/>
+                      <a:round/>
+                      <a:headEnd type="none" w="med" len="med"/>
+                      <a:tailEnd type="none" w="med" len="med"/>
+                    </a:lnT>
+                    <a:lnB w="12700" cap="flat" cmpd="sng" algn="ctr">
+                      <a:solidFill>
+                        <a:srgbClr val="000000"/>
+                      </a:solidFill>
+                      <a:prstDash val="solid"/>
+                      <a:round/>
+                      <a:headEnd type="none" w="med" len="med"/>
+                      <a:tailEnd type="none" w="med" len="med"/>
+                    </a:lnB>
+                    <a:solidFill>
+                      <a:srgbClr val="CCFFFF"/>
+                    </a:solidFill>
+                  </a:tcPr>
+                </a:tc>
+                <a:tc>
+                  <a:txBody>
+                    <a:bodyPr/>
+                    <a:lstStyle/>
+                    <a:p>
+                      <a:pPr eaLnBrk="0" latinLnBrk="0" algn="ctr" indent="0" marL="0">
+                        <a:buNone/>
+                      </a:pPr>
+                      <a:r>
+                        <a:rPr lang="en-US" sz="1050" b="1" dirty="0">
+                          <a:solidFill>
+                            <a:srgbClr val="000000"/>
+                          </a:solidFill>
+                          <a:latin typeface="맑은 고딕" pitchFamily="34" charset="0"/>
+                          <a:ea typeface="맑은 고딕" pitchFamily="34" charset="-122"/>
+                          <a:cs typeface="맑은 고딕" pitchFamily="34" charset="-120"/>
+                        </a:rPr>
+                        <a:t>근거 법령</a:t>
+                      </a:r>
+                      <a:endParaRPr lang="en-US" sz="1050" dirty="0">
+                        <a:latin typeface="맑은 고딕" charset="0"/>
+                        <a:ea typeface="맑은 고딕" charset="0"/>
+                        <a:cs typeface="맑은 고딕" charset="0"/>
+                      </a:endParaRPr>
+                    </a:p>
+                  </a:txBody>
+                  <a:tcPr marL="38100" marR="38100" marT="38100" marB="38100" anchor="ctr">
+                    <a:lnL w="12700" cap="flat" cmpd="sng" algn="ctr">
+                      <a:solidFill>
+                        <a:srgbClr val="000000"/>
+                      </a:solidFill>
+                      <a:prstDash val="solid"/>
+                      <a:round/>
+                      <a:headEnd type="none" w="med" len="med"/>
+                      <a:tailEnd type="none" w="med" len="med"/>
+                    </a:lnL>
+                    <a:lnR w="12700" cap="flat" cmpd="sng" algn="ctr">
+                      <a:solidFill>
+                        <a:srgbClr val="000000"/>
+                      </a:solidFill>
+                      <a:prstDash val="solid"/>
+                      <a:round/>
+                      <a:headEnd type="none" w="med" len="med"/>
+                      <a:tailEnd type="none" w="med" len="med"/>
+                    </a:lnR>
+                    <a:lnT w="12700" cap="flat" cmpd="sng" algn="ctr">
+                      <a:solidFill>
+                        <a:srgbClr val="000000"/>
+                      </a:solidFill>
+                      <a:prstDash val="solid"/>
+                      <a:round/>
+                      <a:headEnd type="none" w="med" len="med"/>
+                      <a:tailEnd type="none" w="med" len="med"/>
+                    </a:lnT>
+                    <a:lnB w="12700" cap="flat" cmpd="sng" algn="ctr">
+                      <a:solidFill>
+                        <a:srgbClr val="000000"/>
+                      </a:solidFill>
+                      <a:prstDash val="solid"/>
+                      <a:round/>
+                      <a:headEnd type="none" w="med" len="med"/>
+                      <a:tailEnd type="none" w="med" len="med"/>
+                    </a:lnB>
+                    <a:solidFill>
+                      <a:srgbClr val="CCFFFF"/>
+                    </a:solidFill>
+                  </a:tcPr>
+                </a:tc>
+                <a:tc>
+                  <a:txBody>
+                    <a:bodyPr/>
+                    <a:lstStyle/>
+                    <a:p>
+                      <a:pPr eaLnBrk="0" latinLnBrk="0" algn="ctr" indent="0" marL="0">
+                        <a:buNone/>
+                      </a:pPr>
+                      <a:r>
+                        <a:rPr lang="en-US" sz="1050" b="1" dirty="0">
+                          <a:solidFill>
+                            <a:srgbClr val="000000"/>
+                          </a:solidFill>
+                          <a:latin typeface="맑은 고딕" pitchFamily="34" charset="0"/>
+                          <a:ea typeface="맑은 고딕" pitchFamily="34" charset="-122"/>
+                          <a:cs typeface="맑은 고딕" pitchFamily="34" charset="-120"/>
+                        </a:rPr>
+                        <a:t>조회 방법</a:t>
+                      </a:r>
+                      <a:endParaRPr lang="en-US" sz="1050" dirty="0">
+                        <a:latin typeface="맑은 고딕" charset="0"/>
+                        <a:ea typeface="맑은 고딕" charset="0"/>
+                        <a:cs typeface="맑은 고딕" charset="0"/>
+                      </a:endParaRPr>
+                    </a:p>
+                  </a:txBody>
+                  <a:tcPr marL="38100" marR="38100" marT="38100" marB="38100" anchor="ctr">
+                    <a:lnL w="12700" cap="flat" cmpd="sng" algn="ctr">
+                      <a:solidFill>
+                        <a:srgbClr val="000000"/>
+                      </a:solidFill>
+                      <a:prstDash val="solid"/>
+                      <a:round/>
+                      <a:headEnd type="none" w="med" len="med"/>
+                      <a:tailEnd type="none" w="med" len="med"/>
+                    </a:lnL>
+                    <a:lnR w="12700" cap="flat" cmpd="sng" algn="ctr">
+                      <a:solidFill>
+                        <a:srgbClr val="000000"/>
+                      </a:solidFill>
+                      <a:prstDash val="solid"/>
+                      <a:round/>
+                      <a:headEnd type="none" w="med" len="med"/>
+                      <a:tailEnd type="none" w="med" len="med"/>
+                    </a:lnR>
+                    <a:lnT w="12700" cap="flat" cmpd="sng" algn="ctr">
+                      <a:solidFill>
+                        <a:srgbClr val="000000"/>
+                      </a:solidFill>
+                      <a:prstDash val="solid"/>
+                      <a:round/>
+                      <a:headEnd type="none" w="med" len="med"/>
+                      <a:tailEnd type="none" w="med" len="med"/>
+                    </a:lnT>
+                    <a:lnB w="12700" cap="flat" cmpd="sng" algn="ctr">
+                      <a:solidFill>
+                        <a:srgbClr val="000000"/>
+                      </a:solidFill>
+                      <a:prstDash val="solid"/>
+                      <a:round/>
+                      <a:headEnd type="none" w="med" len="med"/>
+                      <a:tailEnd type="none" w="med" len="med"/>
+                    </a:lnB>
+                    <a:solidFill>
+                      <a:srgbClr val="CCFFFF"/>
+                    </a:solidFill>
+                  </a:tcPr>
+                </a:tc>
+              </a:tr>
+              <a:tr h="566928">
+                <a:tc>
+                  <a:txBody>
+                    <a:bodyPr/>
+                    <a:lstStyle/>
+                    <a:p>
+                      <a:pPr eaLnBrk="0" latinLnBrk="0" algn="ctr" indent="0" marL="0">
+                        <a:buNone/>
+                      </a:pPr>
+                      <a:r>
+                        <a:rPr lang="en-US" sz="1050" dirty="0">
+                          <a:solidFill>
+                            <a:srgbClr val="000000"/>
+                          </a:solidFill>
+                          <a:latin typeface="맑은 고딕" pitchFamily="34" charset="0"/>
+                          <a:ea typeface="맑은 고딕" pitchFamily="34" charset="-122"/>
+                          <a:cs typeface="맑은 고딕" pitchFamily="34" charset="-120"/>
+                        </a:rPr>
+                        <a:t>결격사유 조회 및</a:t>
+                      </a:r>
+                      <a:endParaRPr lang="en-US" sz="1050" dirty="0">
+                        <a:latin typeface="맑은 고딕" charset="0"/>
+                        <a:ea typeface="맑은 고딕" charset="0"/>
+                        <a:cs typeface="맑은 고딕" charset="0"/>
+                      </a:endParaRPr>
+                    </a:p>
+                    <a:p>
+                      <a:pPr eaLnBrk="0" latinLnBrk="0" algn="ctr" indent="0" marL="0">
+                        <a:buNone/>
+                      </a:pPr>
+                      <a:r>
+                        <a:rPr lang="en-US" sz="1050" dirty="0">
+                          <a:solidFill>
+                            <a:srgbClr val="000000"/>
+                          </a:solidFill>
+                          <a:latin typeface="맑은 고딕" pitchFamily="34" charset="0"/>
+                          <a:ea typeface="맑은 고딕" pitchFamily="34" charset="-122"/>
+                          <a:cs typeface="맑은 고딕" pitchFamily="34" charset="-120"/>
+                        </a:rPr>
+                        <a:t>범죄경력 조회</a:t>
+                      </a:r>
+                      <a:endParaRPr lang="en-US" sz="1050" dirty="0">
+                        <a:latin typeface="맑은 고딕" charset="0"/>
+                        <a:ea typeface="맑은 고딕" charset="0"/>
+                        <a:cs typeface="맑은 고딕" charset="0"/>
+                      </a:endParaRPr>
+                    </a:p>
+                  </a:txBody>
+                  <a:tcPr marL="38100" marR="38100" marT="38100" marB="38100" anchor="ctr">
+                    <a:lnL w="12700" cap="flat" cmpd="sng" algn="ctr">
+                      <a:solidFill>
+                        <a:srgbClr val="000000"/>
+                      </a:solidFill>
+                      <a:prstDash val="solid"/>
+                      <a:round/>
+                      <a:headEnd type="none" w="med" len="med"/>
+                      <a:tailEnd type="none" w="med" len="med"/>
+                    </a:lnL>
+                    <a:lnR w="12700" cap="flat" cmpd="sng" algn="ctr">
+                      <a:solidFill>
+                        <a:srgbClr val="000000"/>
+                      </a:solidFill>
+                      <a:prstDash val="solid"/>
+                      <a:round/>
+                      <a:headEnd type="none" w="med" len="med"/>
+                      <a:tailEnd type="none" w="med" len="med"/>
+                    </a:lnR>
+                    <a:lnT w="12700" cap="flat" cmpd="sng" algn="ctr">
+                      <a:solidFill>
+                        <a:srgbClr val="000000"/>
+                      </a:solidFill>
+                      <a:prstDash val="solid"/>
+                      <a:round/>
+                      <a:headEnd type="none" w="med" len="med"/>
+                      <a:tailEnd type="none" w="med" len="med"/>
+                    </a:lnT>
+                    <a:lnB w="12700" cap="flat" cmpd="sng" algn="ctr">
+                      <a:solidFill>
+                        <a:srgbClr val="000000"/>
+                      </a:solidFill>
+                      <a:prstDash val="solid"/>
+                      <a:round/>
+                      <a:headEnd type="none" w="med" len="med"/>
+                      <a:tailEnd type="none" w="med" len="med"/>
+                    </a:lnB>
+                  </a:tcPr>
+                </a:tc>
+                <a:tc>
+                  <a:txBody>
+                    <a:bodyPr/>
+                    <a:lstStyle/>
+                    <a:p>
+                      <a:pPr eaLnBrk="0" latinLnBrk="0" algn="l" indent="0" marL="0">
+                        <a:buNone/>
+                      </a:pPr>
+                      <a:r>
+                        <a:rPr lang="en-US" sz="1050" dirty="0">
+                          <a:solidFill>
+                            <a:srgbClr val="000000"/>
+                          </a:solidFill>
+                          <a:latin typeface="맑은 고딕" pitchFamily="34" charset="0"/>
+                          <a:ea typeface="맑은 고딕" pitchFamily="34" charset="-122"/>
+                          <a:cs typeface="맑은 고딕" pitchFamily="34" charset="-120"/>
+                        </a:rPr>
+                        <a:t>「교육공무원법」</a:t>
+                      </a:r>
+                      <a:endParaRPr lang="en-US" sz="1050" dirty="0">
+                        <a:latin typeface="맑은 고딕" charset="0"/>
+                        <a:ea typeface="맑은 고딕" charset="0"/>
+                        <a:cs typeface="맑은 고딕" charset="0"/>
+                      </a:endParaRPr>
+                    </a:p>
+                    <a:p>
+                      <a:pPr eaLnBrk="0" latinLnBrk="0" algn="l" indent="0" marL="0">
+                        <a:buNone/>
+                      </a:pPr>
+                      <a:r>
+                        <a:rPr lang="en-US" sz="1050" dirty="0">
+                          <a:solidFill>
+                            <a:srgbClr val="000000"/>
+                          </a:solidFill>
+                          <a:latin typeface="맑은 고딕" pitchFamily="34" charset="0"/>
+                          <a:ea typeface="맑은 고딕" pitchFamily="34" charset="-122"/>
+                          <a:cs typeface="맑은 고딕" pitchFamily="34" charset="-120"/>
+                        </a:rPr>
+                        <a:t>「사립학교법」</a:t>
+                      </a:r>
+                      <a:endParaRPr lang="en-US" sz="1050" dirty="0">
+                        <a:latin typeface="맑은 고딕" charset="0"/>
+                        <a:ea typeface="맑은 고딕" charset="0"/>
+                        <a:cs typeface="맑은 고딕" charset="0"/>
+                      </a:endParaRPr>
+                    </a:p>
+                  </a:txBody>
+                  <a:tcPr marL="38100" marR="38100" marT="38100" marB="38100" anchor="ctr">
+                    <a:lnL w="12700" cap="flat" cmpd="sng" algn="ctr">
+                      <a:solidFill>
+                        <a:srgbClr val="000000"/>
+                      </a:solidFill>
+                      <a:prstDash val="solid"/>
+                      <a:round/>
+                      <a:headEnd type="none" w="med" len="med"/>
+                      <a:tailEnd type="none" w="med" len="med"/>
+                    </a:lnL>
+                    <a:lnR w="12700" cap="flat" cmpd="sng" algn="ctr">
+                      <a:solidFill>
+                        <a:srgbClr val="000000"/>
+                      </a:solidFill>
+                      <a:prstDash val="solid"/>
+                      <a:round/>
+                      <a:headEnd type="none" w="med" len="med"/>
+                      <a:tailEnd type="none" w="med" len="med"/>
+                    </a:lnR>
+                    <a:lnT w="12700" cap="flat" cmpd="sng" algn="ctr">
+                      <a:solidFill>
+                        <a:srgbClr val="000000"/>
+                      </a:solidFill>
+                      <a:prstDash val="solid"/>
+                      <a:round/>
+                      <a:headEnd type="none" w="med" len="med"/>
+                      <a:tailEnd type="none" w="med" len="med"/>
+                    </a:lnT>
+                    <a:lnB w="12700" cap="flat" cmpd="sng" algn="ctr">
+                      <a:solidFill>
+                        <a:srgbClr val="000000"/>
+                      </a:solidFill>
+                      <a:prstDash val="solid"/>
+                      <a:round/>
+                      <a:headEnd type="none" w="med" len="med"/>
+                      <a:tailEnd type="none" w="med" len="med"/>
+                    </a:lnB>
+                  </a:tcPr>
+                </a:tc>
+                <a:tc rowSpan="2">
+                  <a:txBody>
+                    <a:bodyPr/>
+                    <a:lstStyle/>
+                    <a:p>
+                      <a:pPr eaLnBrk="0" latinLnBrk="0" algn="ctr" indent="0" marL="0">
+                        <a:buNone/>
+                      </a:pPr>
+                      <a:r>
+                        <a:rPr lang="en-US" sz="1050" b="1" dirty="0">
+                          <a:solidFill>
+                            <a:srgbClr val="000000"/>
+                          </a:solidFill>
+                          <a:latin typeface="맑은 고딕" pitchFamily="34" charset="0"/>
+                          <a:ea typeface="맑은 고딕" pitchFamily="34" charset="-122"/>
+                          <a:cs typeface="맑은 고딕" pitchFamily="34" charset="-120"/>
+                        </a:rPr>
+                        <a:t>행정정보</a:t>
+                      </a:r>
+                      <a:endParaRPr lang="en-US" sz="1050" dirty="0">
+                        <a:latin typeface="맑은 고딕" charset="0"/>
+                        <a:ea typeface="맑은 고딕" charset="0"/>
+                        <a:cs typeface="맑은 고딕" charset="0"/>
+                      </a:endParaRPr>
+                    </a:p>
+                    <a:p>
+                      <a:pPr eaLnBrk="0" latinLnBrk="0" algn="ctr" indent="0" marL="0">
+                        <a:buNone/>
+                      </a:pPr>
+                      <a:r>
+                        <a:rPr lang="en-US" sz="1050" b="1" dirty="0">
+                          <a:solidFill>
+                            <a:srgbClr val="000000"/>
+                          </a:solidFill>
+                          <a:latin typeface="맑은 고딕" pitchFamily="34" charset="0"/>
+                          <a:ea typeface="맑은 고딕" pitchFamily="34" charset="-122"/>
+                          <a:cs typeface="맑은 고딕" pitchFamily="34" charset="-120"/>
+                        </a:rPr>
+                        <a:t>공동이용시스템 이용</a:t>
+                      </a:r>
+                      <a:endParaRPr lang="en-US" sz="1050" dirty="0">
+                        <a:latin typeface="맑은 고딕" charset="0"/>
+                        <a:ea typeface="맑은 고딕" charset="0"/>
+                        <a:cs typeface="맑은 고딕" charset="0"/>
+                      </a:endParaRPr>
+                    </a:p>
+                  </a:txBody>
+                  <a:tcPr marL="38100" marR="38100" marT="38100" marB="38100" anchor="ctr">
+                    <a:lnL w="12700" cap="flat" cmpd="sng" algn="ctr">
+                      <a:solidFill>
+                        <a:srgbClr val="000000"/>
+                      </a:solidFill>
+                      <a:prstDash val="solid"/>
+                      <a:round/>
+                      <a:headEnd type="none" w="med" len="med"/>
+                      <a:tailEnd type="none" w="med" len="med"/>
+                    </a:lnL>
+                    <a:lnR w="12700" cap="flat" cmpd="sng" algn="ctr">
+                      <a:solidFill>
+                        <a:srgbClr val="000000"/>
+                      </a:solidFill>
+                      <a:prstDash val="solid"/>
+                      <a:round/>
+                      <a:headEnd type="none" w="med" len="med"/>
+                      <a:tailEnd type="none" w="med" len="med"/>
+                    </a:lnR>
+                    <a:lnT w="12700" cap="flat" cmpd="sng" algn="ctr">
+                      <a:solidFill>
+                        <a:srgbClr val="000000"/>
+                      </a:solidFill>
+                      <a:prstDash val="solid"/>
+                      <a:round/>
+                      <a:headEnd type="none" w="med" len="med"/>
+                      <a:tailEnd type="none" w="med" len="med"/>
+                    </a:lnT>
+                    <a:lnB w="12700" cap="flat" cmpd="sng" algn="ctr">
+                      <a:solidFill>
+                        <a:srgbClr val="000000"/>
+                      </a:solidFill>
+                      <a:prstDash val="solid"/>
+                      <a:round/>
+                      <a:headEnd type="none" w="med" len="med"/>
+                      <a:tailEnd type="none" w="med" len="med"/>
+                    </a:lnB>
+                    <a:solidFill>
+                      <a:srgbClr val="D9F6FF"/>
+                    </a:solidFill>
+                  </a:tcPr>
+                </a:tc>
+              </a:tr>
+              <a:tr h="566928">
+                <a:tc>
+                  <a:txBody>
+                    <a:bodyPr/>
+                    <a:lstStyle/>
+                    <a:p>
+                      <a:pPr eaLnBrk="0" latinLnBrk="0" algn="ctr" indent="0" marL="0">
+                        <a:buNone/>
+                      </a:pPr>
+                      <a:r>
+                        <a:rPr lang="en-US" sz="1050" dirty="0">
+                          <a:solidFill>
+                            <a:srgbClr val="000000"/>
+                          </a:solidFill>
+                          <a:latin typeface="맑은 고딕" pitchFamily="34" charset="0"/>
+                          <a:ea typeface="맑은 고딕" pitchFamily="34" charset="-122"/>
+                          <a:cs typeface="맑은 고딕" pitchFamily="34" charset="-120"/>
+                        </a:rPr>
+                        <a:t>성범죄결격 및</a:t>
+                      </a:r>
+                      <a:endParaRPr lang="en-US" sz="1050" dirty="0">
+                        <a:latin typeface="맑은 고딕" charset="0"/>
+                        <a:ea typeface="맑은 고딕" charset="0"/>
+                        <a:cs typeface="맑은 고딕" charset="0"/>
+                      </a:endParaRPr>
+                    </a:p>
+                    <a:p>
+                      <a:pPr eaLnBrk="0" latinLnBrk="0" algn="ctr" indent="0" marL="0">
+                        <a:buNone/>
+                      </a:pPr>
+                      <a:r>
+                        <a:rPr lang="en-US" sz="1050" dirty="0">
+                          <a:solidFill>
+                            <a:srgbClr val="000000"/>
+                          </a:solidFill>
+                          <a:latin typeface="맑은 고딕" pitchFamily="34" charset="0"/>
+                          <a:ea typeface="맑은 고딕" pitchFamily="34" charset="-122"/>
+                          <a:cs typeface="맑은 고딕" pitchFamily="34" charset="-120"/>
+                        </a:rPr>
+                        <a:t>아동학대 범죄전력 조회</a:t>
+                      </a:r>
+                      <a:endParaRPr lang="en-US" sz="1050" dirty="0">
+                        <a:latin typeface="맑은 고딕" charset="0"/>
+                        <a:ea typeface="맑은 고딕" charset="0"/>
+                        <a:cs typeface="맑은 고딕" charset="0"/>
+                      </a:endParaRPr>
+                    </a:p>
+                  </a:txBody>
+                  <a:tcPr marL="38100" marR="38100" marT="38100" marB="38100" anchor="ctr">
+                    <a:lnL w="12700" cap="flat" cmpd="sng" algn="ctr">
+                      <a:solidFill>
+                        <a:srgbClr val="000000"/>
+                      </a:solidFill>
+                      <a:prstDash val="solid"/>
+                      <a:round/>
+                      <a:headEnd type="none" w="med" len="med"/>
+                      <a:tailEnd type="none" w="med" len="med"/>
+                    </a:lnL>
+                    <a:lnR w="12700" cap="flat" cmpd="sng" algn="ctr">
+                      <a:solidFill>
+                        <a:srgbClr val="000000"/>
+                      </a:solidFill>
+                      <a:prstDash val="solid"/>
+                      <a:round/>
+                      <a:headEnd type="none" w="med" len="med"/>
+                      <a:tailEnd type="none" w="med" len="med"/>
+                    </a:lnR>
+                    <a:lnT w="12700" cap="flat" cmpd="sng" algn="ctr">
+                      <a:solidFill>
+                        <a:srgbClr val="000000"/>
+                      </a:solidFill>
+                      <a:prstDash val="solid"/>
+                      <a:round/>
+                      <a:headEnd type="none" w="med" len="med"/>
+                      <a:tailEnd type="none" w="med" len="med"/>
+                    </a:lnT>
+                    <a:lnB w="12700" cap="flat" cmpd="sng" algn="ctr">
+                      <a:solidFill>
+                        <a:srgbClr val="000000"/>
+                      </a:solidFill>
+                      <a:prstDash val="solid"/>
+                      <a:round/>
+                      <a:headEnd type="none" w="med" len="med"/>
+                      <a:tailEnd type="none" w="med" len="med"/>
+                    </a:lnB>
+                  </a:tcPr>
+                </a:tc>
+                <a:tc>
+                  <a:txBody>
+                    <a:bodyPr/>
+                    <a:lstStyle/>
+                    <a:p>
+                      <a:pPr eaLnBrk="0" latinLnBrk="0" algn="l" indent="0" marL="0">
+                        <a:buNone/>
+                      </a:pPr>
+                      <a:r>
+                        <a:rPr lang="en-US" sz="1050" dirty="0">
+                          <a:solidFill>
+                            <a:srgbClr val="000000"/>
+                          </a:solidFill>
+                          <a:latin typeface="맑은 고딕" pitchFamily="34" charset="0"/>
+                          <a:ea typeface="맑은 고딕" pitchFamily="34" charset="-122"/>
+                          <a:cs typeface="맑은 고딕" pitchFamily="34" charset="-120"/>
+                        </a:rPr>
+                        <a:t>「아동·청소년 성보호에 관한 법률」</a:t>
+                      </a:r>
+                      <a:endParaRPr lang="en-US" sz="1050" dirty="0">
+                        <a:latin typeface="맑은 고딕" charset="0"/>
+                        <a:ea typeface="맑은 고딕" charset="0"/>
+                        <a:cs typeface="맑은 고딕" charset="0"/>
+                      </a:endParaRPr>
+                    </a:p>
+                  </a:txBody>
+                  <a:tcPr marL="38100" marR="38100" marT="38100" marB="38100" anchor="ctr">
+                    <a:lnL w="12700" cap="flat" cmpd="sng" algn="ctr">
+                      <a:solidFill>
+                        <a:srgbClr val="000000"/>
+                      </a:solidFill>
+                      <a:prstDash val="solid"/>
+                      <a:round/>
+                      <a:headEnd type="none" w="med" len="med"/>
+                      <a:tailEnd type="none" w="med" len="med"/>
+                    </a:lnL>
+                    <a:lnR w="12700" cap="flat" cmpd="sng" algn="ctr">
+                      <a:solidFill>
+                        <a:srgbClr val="000000"/>
+                      </a:solidFill>
+                      <a:prstDash val="solid"/>
+                      <a:round/>
+                      <a:headEnd type="none" w="med" len="med"/>
+                      <a:tailEnd type="none" w="med" len="med"/>
+                    </a:lnR>
+                    <a:lnT w="12700" cap="flat" cmpd="sng" algn="ctr">
+                      <a:solidFill>
+                        <a:srgbClr val="000000"/>
+                      </a:solidFill>
+                      <a:prstDash val="solid"/>
+                      <a:round/>
+                      <a:headEnd type="none" w="med" len="med"/>
+                      <a:tailEnd type="none" w="med" len="med"/>
+                    </a:lnT>
+                    <a:lnB w="12700" cap="flat" cmpd="sng" algn="ctr">
+                      <a:solidFill>
+                        <a:srgbClr val="000000"/>
+                      </a:solidFill>
+                      <a:prstDash val="solid"/>
+                      <a:round/>
+                      <a:headEnd type="none" w="med" len="med"/>
+                      <a:tailEnd type="none" w="med" len="med"/>
+                    </a:lnB>
+                  </a:tcPr>
+                </a:tc>
+                <a:tc vMerge="1">
+                  <a:tcPr/>
+                </a:tc>
+              </a:tr>
+            </a:tbl>
+          </a:graphicData>
+        </a:graphic>
+      </p:graphicFrame>
+      <p:sp>
+        <p:nvSpPr>
+          <p:cNvPr id="16" name="Text 12"/>
+          <p:cNvSpPr txBox="1"/>
+          <p:nvPr/>
+        </p:nvSpPr>
+        <p:spPr>
+          <a:xfrm>
+            <a:off x="457200" y="5541264"/>
+            <a:ext cx="8229600" cy="256032"/>
+          </a:xfrm>
+          <a:prstGeom prst="rect">
+            <a:avLst/>
+          </a:prstGeom>
+          <a:noFill/>
+          <a:ln/>
+        </p:spPr>
+        <p:txBody>
+          <a:bodyPr wrap="square" lIns="0" tIns="0" rIns="0" bIns="0" rtlCol="0" anchor="ctr"/>
+          <a:lstStyle/>
+          <a:p>
+            <a:pPr eaLnBrk="0" latinLnBrk="0" indent="0" marL="0">
+              <a:buNone/>
+            </a:pPr>
+            <a:r>
+              <a:rPr lang="en-US" sz="1050" dirty="0">
+                <a:solidFill>
+                  <a:srgbClr val="404040"/>
+                </a:solidFill>
+                <a:latin typeface="맑은 고딕" pitchFamily="34" charset="0"/>
+                <a:ea typeface="맑은 고딕" pitchFamily="34" charset="-122"/>
+                <a:cs typeface="맑은 고딕" pitchFamily="34" charset="-120"/>
+              </a:rPr>
+              <a:t>※ 검증 3종 : 채용신체검사 · 결격사유 조회 · 성범죄 및 아동학대 범죄전력 조회</a:t>
+            </a:r>
+            <a:endParaRPr lang="en-US" sz="1050" dirty="0"/>
+          </a:p>
+        </p:txBody>
+      </p:sp>
+    </p:spTree>
+  </p:cSld>
+  <p:clrMapOvr>
+    <a:masterClrMapping/>
+  </p:clrMapOvr>
+</p:sld>
+</file>
+
+<file path=ppt/slides/slide11.xml><?xml version="1.0" encoding="utf-8"?>
+<p:sld xmlns:a="http://schemas.openxmlformats.org/drawingml/2006/main" xmlns:r="http://schemas.openxmlformats.org/officeDocument/2006/relationships" xmlns:p="http://schemas.openxmlformats.org/presentationml/2006/main">
+  <p:cSld name="Slide 11">
+    <p:bg>
+      <p:bgPr>
+        <a:solidFill>
+          <a:srgbClr val="FFFFFF"/>
+        </a:solidFill>
+      </p:bgPr>
+    </p:bg>
+    <p:spTree>
+      <p:nvGrpSpPr>
+        <p:cNvPr id="1" name=""/>
+        <p:cNvGrpSpPr/>
+        <p:nvPr/>
+      </p:nvGrpSpPr>
+      <p:grpSpPr>
+        <a:xfrm>
+          <a:off x="0" y="0"/>
+          <a:ext cx="0" cy="0"/>
+          <a:chOff x="0" y="0"/>
+          <a:chExt cx="0" cy="0"/>
+        </a:xfrm>
+      </p:grpSpPr>
+      <p:sp>
+        <p:nvSpPr>
+          <p:cNvPr id="2" name="Shape 0"/>
+          <p:cNvSpPr/>
+          <p:nvPr/>
+        </p:nvSpPr>
+        <p:spPr>
+          <a:xfrm>
+            <a:off x="0" y="6620256"/>
+            <a:ext cx="9144000" cy="237744"/>
+          </a:xfrm>
+          <a:prstGeom prst="rect">
+            <a:avLst/>
+          </a:prstGeom>
+          <a:solidFill>
+            <a:srgbClr val="4FADD1"/>
+          </a:solidFill>
+          <a:ln w="6350">
+            <a:solidFill>
+              <a:srgbClr val="4FADD1"/>
+            </a:solidFill>
+            <a:prstDash val="solid"/>
+          </a:ln>
+        </p:spPr>
+      </p:sp>
+      <p:sp>
+        <p:nvSpPr>
+          <p:cNvPr id="3" name="Shape 1"/>
+          <p:cNvSpPr/>
+          <p:nvPr/>
+        </p:nvSpPr>
+        <p:spPr>
+          <a:xfrm>
+            <a:off x="0" y="0"/>
+            <a:ext cx="9144000" cy="713232"/>
+          </a:xfrm>
+          <a:prstGeom prst="rect">
+            <a:avLst/>
+          </a:prstGeom>
+          <a:solidFill>
+            <a:srgbClr val="4FADD1"/>
+          </a:solidFill>
+          <a:ln w="6350">
+            <a:solidFill>
+              <a:srgbClr val="4FADD1"/>
+            </a:solidFill>
+            <a:prstDash val="solid"/>
+          </a:ln>
+        </p:spPr>
+      </p:sp>
+      <p:sp>
+        <p:nvSpPr>
+          <p:cNvPr id="4" name="Text 2"/>
+          <p:cNvSpPr txBox="1"/>
+          <p:nvPr/>
+        </p:nvSpPr>
+        <p:spPr>
+          <a:xfrm>
+            <a:off x="3657600" y="6291072"/>
+            <a:ext cx="1828800" cy="274320"/>
+          </a:xfrm>
+          <a:prstGeom prst="rect">
+            <a:avLst/>
+          </a:prstGeom>
+          <a:noFill/>
+          <a:ln/>
+        </p:spPr>
+        <p:txBody>
+          <a:bodyPr wrap="square" lIns="0" tIns="0" rIns="0" bIns="0" rtlCol="0" anchor="ctr"/>
+          <a:lstStyle/>
+          <a:p>
+            <a:pPr eaLnBrk="0" latinLnBrk="0" algn="ctr" indent="0" marL="0">
+              <a:buNone/>
+            </a:pPr>
+            <a:r>
+              <a:rPr lang="en-US" sz="1100" dirty="0">
+                <a:solidFill>
+                  <a:srgbClr val="000000"/>
+                </a:solidFill>
+                <a:latin typeface="맑은 고딕" pitchFamily="34" charset="0"/>
+                <a:ea typeface="맑은 고딕" pitchFamily="34" charset="-122"/>
+                <a:cs typeface="맑은 고딕" pitchFamily="34" charset="-120"/>
+              </a:rPr>
+              <a:t>- 10 -</a:t>
+            </a:r>
+            <a:endParaRPr lang="en-US" sz="1100" dirty="0"/>
+          </a:p>
+        </p:txBody>
+      </p:sp>
+      <p:sp>
+        <p:nvSpPr>
+          <p:cNvPr id="5" name="Text 3"/>
+          <p:cNvSpPr txBox="1"/>
+          <p:nvPr/>
+        </p:nvSpPr>
+        <p:spPr>
+          <a:xfrm>
+            <a:off x="457200" y="82296"/>
+            <a:ext cx="5120640" cy="548640"/>
+          </a:xfrm>
+          <a:prstGeom prst="rect">
+            <a:avLst/>
+          </a:prstGeom>
+          <a:noFill/>
+          <a:ln/>
+        </p:spPr>
+        <p:txBody>
+          <a:bodyPr wrap="square" lIns="0" tIns="0" rIns="0" bIns="0" rtlCol="0" anchor="ctr"/>
+          <a:lstStyle/>
+          <a:p>
+            <a:pPr eaLnBrk="0" latinLnBrk="0" indent="0" marL="0">
+              <a:buNone/>
+            </a:pPr>
+            <a:r>
+              <a:rPr lang="en-US" sz="2600" dirty="0">
+                <a:solidFill>
+                  <a:srgbClr val="FFFFFF"/>
+                </a:solidFill>
+                <a:latin typeface="HY헤드라인M" pitchFamily="34" charset="0"/>
+                <a:ea typeface="HY헤드라인M" pitchFamily="34" charset="-122"/>
+                <a:cs typeface="HY헤드라인M" pitchFamily="34" charset="-120"/>
+              </a:rPr>
               <a:t>9. 기타 사항</a:t>
             </a:r>
             <a:endParaRPr lang="en-US" sz="2600" dirty="0"/>
@@ -2675,9 +4369,9 @@
 </p:sld>
 </file>
 
-<file path=ppt/slides/slide11.xml><?xml version="1.0" encoding="utf-8"?>
+<file path=ppt/slides/slide12.xml><?xml version="1.0" encoding="utf-8"?>
 <p:sld xmlns:a="http://schemas.openxmlformats.org/drawingml/2006/main" xmlns:r="http://schemas.openxmlformats.org/officeDocument/2006/relationships" xmlns:p="http://schemas.openxmlformats.org/presentationml/2006/main">
-  <p:cSld name="Slide 11">
+  <p:cSld name="Slide 12">
     <p:bg>
       <p:bgPr>
         <a:solidFill>
@@ -2782,7 +4476,7 @@
                 <a:ea typeface="맑은 고딕" pitchFamily="34" charset="-122"/>
                 <a:cs typeface="맑은 고딕" pitchFamily="34" charset="-120"/>
               </a:rPr>
-              <a:t>- 10 -</a:t>
+              <a:t>- 11 -</a:t>
             </a:r>
             <a:endParaRPr lang="en-US" sz="1100" dirty="0"/>
           </a:p>
@@ -2868,7 +4562,7 @@
       </p:sp>
       <p:graphicFrame>
         <p:nvGraphicFramePr>
-          <p:cNvPr id="12" name="Table 0"/>
+          <p:cNvPr id="13" name="Table 0"/>
           <p:cNvGraphicFramePr>
             <a:graphicFrameLocks noGrp="1"/>
           </p:cNvGraphicFramePr>
@@ -3999,7 +5693,7 @@
       </p:sp>
       <p:graphicFrame>
         <p:nvGraphicFramePr>
-          <p:cNvPr id="23" name="Table 1"/>
+          <p:cNvPr id="25" name="Table 1"/>
           <p:cNvGraphicFramePr>
             <a:graphicFrameLocks noGrp="1"/>
           </p:cNvGraphicFramePr>
@@ -4758,6 +6452,712 @@
         <p:spPr>
           <a:xfrm>
             <a:off x="457200" y="82296"/>
+            <a:ext cx="8229600" cy="548640"/>
+          </a:xfrm>
+          <a:prstGeom prst="rect">
+            <a:avLst/>
+          </a:prstGeom>
+          <a:noFill/>
+          <a:ln/>
+        </p:spPr>
+        <p:txBody>
+          <a:bodyPr wrap="square" lIns="0" tIns="0" rIns="0" bIns="0" rtlCol="0" anchor="ctr"/>
+          <a:lstStyle/>
+          <a:p>
+            <a:pPr eaLnBrk="0" latinLnBrk="0" algn="ctr" indent="0" marL="0">
+              <a:buNone/>
+            </a:pPr>
+            <a:r>
+              <a:rPr lang="en-US" sz="2600" dirty="0">
+                <a:solidFill>
+                  <a:srgbClr val="FFFFFF"/>
+                </a:solidFill>
+                <a:latin typeface="HY헤드라인M" pitchFamily="34" charset="0"/>
+                <a:ea typeface="HY헤드라인M" pitchFamily="34" charset="-122"/>
+                <a:cs typeface="HY헤드라인M" pitchFamily="34" charset="-120"/>
+              </a:rPr>
+              <a:t>[ 목     차 ]</a:t>
+            </a:r>
+            <a:endParaRPr lang="en-US" sz="2600" dirty="0"/>
+          </a:p>
+        </p:txBody>
+      </p:sp>
+      <p:sp>
+        <p:nvSpPr>
+          <p:cNvPr id="6" name="Text 4"/>
+          <p:cNvSpPr txBox="1"/>
+          <p:nvPr/>
+        </p:nvSpPr>
+        <p:spPr>
+          <a:xfrm>
+            <a:off x="1645920" y="1298448"/>
+            <a:ext cx="4206240" cy="384048"/>
+          </a:xfrm>
+          <a:prstGeom prst="rect">
+            <a:avLst/>
+          </a:prstGeom>
+          <a:noFill/>
+          <a:ln/>
+        </p:spPr>
+        <p:txBody>
+          <a:bodyPr wrap="square" lIns="0" tIns="0" rIns="0" bIns="0" rtlCol="0" anchor="ctr"/>
+          <a:lstStyle/>
+          <a:p>
+            <a:pPr eaLnBrk="0" latinLnBrk="0" indent="0" marL="0">
+              <a:buNone/>
+            </a:pPr>
+            <a:r>
+              <a:rPr lang="en-US" sz="1800" dirty="0">
+                <a:solidFill>
+                  <a:srgbClr val="000000"/>
+                </a:solidFill>
+                <a:latin typeface="맑은 고딕" pitchFamily="34" charset="0"/>
+                <a:ea typeface="맑은 고딕" pitchFamily="34" charset="-122"/>
+                <a:cs typeface="맑은 고딕" pitchFamily="34" charset="-120"/>
+              </a:rPr>
+              <a:t>1.  채용 인원 및 채용 사유</a:t>
+            </a:r>
+            <a:endParaRPr lang="en-US" sz="1800" dirty="0"/>
+          </a:p>
+        </p:txBody>
+      </p:sp>
+      <p:sp>
+        <p:nvSpPr>
+          <p:cNvPr id="7" name="Text 5"/>
+          <p:cNvSpPr txBox="1"/>
+          <p:nvPr/>
+        </p:nvSpPr>
+        <p:spPr>
+          <a:xfrm>
+            <a:off x="1645920" y="1737360"/>
+            <a:ext cx="4206240" cy="384048"/>
+          </a:xfrm>
+          <a:prstGeom prst="rect">
+            <a:avLst/>
+          </a:prstGeom>
+          <a:noFill/>
+          <a:ln/>
+        </p:spPr>
+        <p:txBody>
+          <a:bodyPr wrap="square" lIns="0" tIns="0" rIns="0" bIns="0" rtlCol="0" anchor="ctr"/>
+          <a:lstStyle/>
+          <a:p>
+            <a:pPr eaLnBrk="0" latinLnBrk="0" indent="0" marL="0">
+              <a:buNone/>
+            </a:pPr>
+            <a:r>
+              <a:rPr lang="en-US" sz="1800" dirty="0">
+                <a:solidFill>
+                  <a:srgbClr val="000000"/>
+                </a:solidFill>
+                <a:latin typeface="맑은 고딕" pitchFamily="34" charset="0"/>
+                <a:ea typeface="맑은 고딕" pitchFamily="34" charset="-122"/>
+                <a:cs typeface="맑은 고딕" pitchFamily="34" charset="-120"/>
+              </a:rPr>
+              <a:t>2.  직원 현황</a:t>
+            </a:r>
+            <a:endParaRPr lang="en-US" sz="1800" dirty="0"/>
+          </a:p>
+        </p:txBody>
+      </p:sp>
+      <p:sp>
+        <p:nvSpPr>
+          <p:cNvPr id="8" name="Text 6"/>
+          <p:cNvSpPr txBox="1"/>
+          <p:nvPr/>
+        </p:nvSpPr>
+        <p:spPr>
+          <a:xfrm>
+            <a:off x="1645920" y="2176272"/>
+            <a:ext cx="4206240" cy="384048"/>
+          </a:xfrm>
+          <a:prstGeom prst="rect">
+            <a:avLst/>
+          </a:prstGeom>
+          <a:noFill/>
+          <a:ln/>
+        </p:spPr>
+        <p:txBody>
+          <a:bodyPr wrap="square" lIns="0" tIns="0" rIns="0" bIns="0" rtlCol="0" anchor="ctr"/>
+          <a:lstStyle/>
+          <a:p>
+            <a:pPr eaLnBrk="0" latinLnBrk="0" indent="0" marL="0">
+              <a:buNone/>
+            </a:pPr>
+            <a:r>
+              <a:rPr lang="en-US" sz="1800" dirty="0">
+                <a:solidFill>
+                  <a:srgbClr val="000000"/>
+                </a:solidFill>
+                <a:latin typeface="맑은 고딕" pitchFamily="34" charset="0"/>
+                <a:ea typeface="맑은 고딕" pitchFamily="34" charset="-122"/>
+                <a:cs typeface="맑은 고딕" pitchFamily="34" charset="-120"/>
+              </a:rPr>
+              <a:t>3.  채용 계획</a:t>
+            </a:r>
+            <a:endParaRPr lang="en-US" sz="1800" dirty="0"/>
+          </a:p>
+        </p:txBody>
+      </p:sp>
+      <p:sp>
+        <p:nvSpPr>
+          <p:cNvPr id="9" name="Text 7"/>
+          <p:cNvSpPr txBox="1"/>
+          <p:nvPr/>
+        </p:nvSpPr>
+        <p:spPr>
+          <a:xfrm>
+            <a:off x="1645920" y="2615184"/>
+            <a:ext cx="4206240" cy="384048"/>
+          </a:xfrm>
+          <a:prstGeom prst="rect">
+            <a:avLst/>
+          </a:prstGeom>
+          <a:noFill/>
+          <a:ln/>
+        </p:spPr>
+        <p:txBody>
+          <a:bodyPr wrap="square" lIns="0" tIns="0" rIns="0" bIns="0" rtlCol="0" anchor="ctr"/>
+          <a:lstStyle/>
+          <a:p>
+            <a:pPr eaLnBrk="0" latinLnBrk="0" indent="0" marL="0">
+              <a:buNone/>
+            </a:pPr>
+            <a:r>
+              <a:rPr lang="en-US" sz="1800" dirty="0">
+                <a:solidFill>
+                  <a:srgbClr val="000000"/>
+                </a:solidFill>
+                <a:latin typeface="맑은 고딕" pitchFamily="34" charset="0"/>
+                <a:ea typeface="맑은 고딕" pitchFamily="34" charset="-122"/>
+                <a:cs typeface="맑은 고딕" pitchFamily="34" charset="-120"/>
+              </a:rPr>
+              <a:t>4.  전형 절차</a:t>
+            </a:r>
+            <a:endParaRPr lang="en-US" sz="1800" dirty="0"/>
+          </a:p>
+        </p:txBody>
+      </p:sp>
+      <p:sp>
+        <p:nvSpPr>
+          <p:cNvPr id="10" name="Text 8"/>
+          <p:cNvSpPr txBox="1"/>
+          <p:nvPr/>
+        </p:nvSpPr>
+        <p:spPr>
+          <a:xfrm>
+            <a:off x="1645920" y="3054096"/>
+            <a:ext cx="4206240" cy="384048"/>
+          </a:xfrm>
+          <a:prstGeom prst="rect">
+            <a:avLst/>
+          </a:prstGeom>
+          <a:noFill/>
+          <a:ln/>
+        </p:spPr>
+        <p:txBody>
+          <a:bodyPr wrap="square" lIns="0" tIns="0" rIns="0" bIns="0" rtlCol="0" anchor="ctr"/>
+          <a:lstStyle/>
+          <a:p>
+            <a:pPr eaLnBrk="0" latinLnBrk="0" indent="0" marL="0">
+              <a:buNone/>
+            </a:pPr>
+            <a:r>
+              <a:rPr lang="en-US" sz="1800" dirty="0">
+                <a:solidFill>
+                  <a:srgbClr val="000000"/>
+                </a:solidFill>
+                <a:latin typeface="맑은 고딕" pitchFamily="34" charset="0"/>
+                <a:ea typeface="맑은 고딕" pitchFamily="34" charset="-122"/>
+                <a:cs typeface="맑은 고딕" pitchFamily="34" charset="-120"/>
+              </a:rPr>
+              <a:t>5.  지원서 접수</a:t>
+            </a:r>
+            <a:endParaRPr lang="en-US" sz="1800" dirty="0"/>
+          </a:p>
+        </p:txBody>
+      </p:sp>
+      <p:sp>
+        <p:nvSpPr>
+          <p:cNvPr id="11" name="Text 9"/>
+          <p:cNvSpPr txBox="1"/>
+          <p:nvPr/>
+        </p:nvSpPr>
+        <p:spPr>
+          <a:xfrm>
+            <a:off x="5852160" y="3054096"/>
+            <a:ext cx="1645920" cy="384048"/>
+          </a:xfrm>
+          <a:prstGeom prst="rect">
+            <a:avLst/>
+          </a:prstGeom>
+          <a:noFill/>
+          <a:ln/>
+        </p:spPr>
+        <p:txBody>
+          <a:bodyPr wrap="square" lIns="0" tIns="0" rIns="0" bIns="0" rtlCol="0" anchor="ctr"/>
+          <a:lstStyle/>
+          <a:p>
+            <a:pPr eaLnBrk="0" latinLnBrk="0" indent="0" marL="0">
+              <a:buNone/>
+            </a:pPr>
+            <a:r>
+              <a:rPr lang="en-US" sz="1200" dirty="0">
+                <a:solidFill>
+                  <a:srgbClr val="404040"/>
+                </a:solidFill>
+                <a:latin typeface="맑은 고딕" pitchFamily="34" charset="0"/>
+                <a:ea typeface="맑은 고딕" pitchFamily="34" charset="-122"/>
+                <a:cs typeface="맑은 고딕" pitchFamily="34" charset="-120"/>
+              </a:rPr>
+              <a:t>[ 전형 1단계 ]</a:t>
+            </a:r>
+            <a:endParaRPr lang="en-US" sz="1200" dirty="0"/>
+          </a:p>
+        </p:txBody>
+      </p:sp>
+      <p:sp>
+        <p:nvSpPr>
+          <p:cNvPr id="12" name="Text 10"/>
+          <p:cNvSpPr txBox="1"/>
+          <p:nvPr/>
+        </p:nvSpPr>
+        <p:spPr>
+          <a:xfrm>
+            <a:off x="1645920" y="3493008"/>
+            <a:ext cx="4206240" cy="384048"/>
+          </a:xfrm>
+          <a:prstGeom prst="rect">
+            <a:avLst/>
+          </a:prstGeom>
+          <a:noFill/>
+          <a:ln/>
+        </p:spPr>
+        <p:txBody>
+          <a:bodyPr wrap="square" lIns="0" tIns="0" rIns="0" bIns="0" rtlCol="0" anchor="ctr"/>
+          <a:lstStyle/>
+          <a:p>
+            <a:pPr eaLnBrk="0" latinLnBrk="0" indent="0" marL="0">
+              <a:buNone/>
+            </a:pPr>
+            <a:r>
+              <a:rPr lang="en-US" sz="1800" dirty="0">
+                <a:solidFill>
+                  <a:srgbClr val="000000"/>
+                </a:solidFill>
+                <a:latin typeface="맑은 고딕" pitchFamily="34" charset="0"/>
+                <a:ea typeface="맑은 고딕" pitchFamily="34" charset="-122"/>
+                <a:cs typeface="맑은 고딕" pitchFamily="34" charset="-120"/>
+              </a:rPr>
+              <a:t>6.  서류 전형 (1차)</a:t>
+            </a:r>
+            <a:endParaRPr lang="en-US" sz="1800" dirty="0"/>
+          </a:p>
+        </p:txBody>
+      </p:sp>
+      <p:sp>
+        <p:nvSpPr>
+          <p:cNvPr id="13" name="Text 11"/>
+          <p:cNvSpPr txBox="1"/>
+          <p:nvPr/>
+        </p:nvSpPr>
+        <p:spPr>
+          <a:xfrm>
+            <a:off x="5852160" y="3493008"/>
+            <a:ext cx="1645920" cy="384048"/>
+          </a:xfrm>
+          <a:prstGeom prst="rect">
+            <a:avLst/>
+          </a:prstGeom>
+          <a:noFill/>
+          <a:ln/>
+        </p:spPr>
+        <p:txBody>
+          <a:bodyPr wrap="square" lIns="0" tIns="0" rIns="0" bIns="0" rtlCol="0" anchor="ctr"/>
+          <a:lstStyle/>
+          <a:p>
+            <a:pPr eaLnBrk="0" latinLnBrk="0" indent="0" marL="0">
+              <a:buNone/>
+            </a:pPr>
+            <a:r>
+              <a:rPr lang="en-US" sz="1200" dirty="0">
+                <a:solidFill>
+                  <a:srgbClr val="404040"/>
+                </a:solidFill>
+                <a:latin typeface="맑은 고딕" pitchFamily="34" charset="0"/>
+                <a:ea typeface="맑은 고딕" pitchFamily="34" charset="-122"/>
+                <a:cs typeface="맑은 고딕" pitchFamily="34" charset="-120"/>
+              </a:rPr>
+              <a:t>[ 전형 2단계 ]</a:t>
+            </a:r>
+            <a:endParaRPr lang="en-US" sz="1200" dirty="0"/>
+          </a:p>
+        </p:txBody>
+      </p:sp>
+      <p:sp>
+        <p:nvSpPr>
+          <p:cNvPr id="14" name="Text 12"/>
+          <p:cNvSpPr txBox="1"/>
+          <p:nvPr/>
+        </p:nvSpPr>
+        <p:spPr>
+          <a:xfrm>
+            <a:off x="1645920" y="3931920"/>
+            <a:ext cx="4206240" cy="384048"/>
+          </a:xfrm>
+          <a:prstGeom prst="rect">
+            <a:avLst/>
+          </a:prstGeom>
+          <a:noFill/>
+          <a:ln/>
+        </p:spPr>
+        <p:txBody>
+          <a:bodyPr wrap="square" lIns="0" tIns="0" rIns="0" bIns="0" rtlCol="0" anchor="ctr"/>
+          <a:lstStyle/>
+          <a:p>
+            <a:pPr eaLnBrk="0" latinLnBrk="0" indent="0" marL="0">
+              <a:buNone/>
+            </a:pPr>
+            <a:r>
+              <a:rPr lang="en-US" sz="1800" dirty="0">
+                <a:solidFill>
+                  <a:srgbClr val="000000"/>
+                </a:solidFill>
+                <a:latin typeface="맑은 고딕" pitchFamily="34" charset="0"/>
+                <a:ea typeface="맑은 고딕" pitchFamily="34" charset="-122"/>
+                <a:cs typeface="맑은 고딕" pitchFamily="34" charset="-120"/>
+              </a:rPr>
+              <a:t>7.  업무적성 및 심층면접 (2차)</a:t>
+            </a:r>
+            <a:endParaRPr lang="en-US" sz="1800" dirty="0"/>
+          </a:p>
+        </p:txBody>
+      </p:sp>
+      <p:sp>
+        <p:nvSpPr>
+          <p:cNvPr id="15" name="Text 13"/>
+          <p:cNvSpPr txBox="1"/>
+          <p:nvPr/>
+        </p:nvSpPr>
+        <p:spPr>
+          <a:xfrm>
+            <a:off x="5852160" y="3931920"/>
+            <a:ext cx="1645920" cy="384048"/>
+          </a:xfrm>
+          <a:prstGeom prst="rect">
+            <a:avLst/>
+          </a:prstGeom>
+          <a:noFill/>
+          <a:ln/>
+        </p:spPr>
+        <p:txBody>
+          <a:bodyPr wrap="square" lIns="0" tIns="0" rIns="0" bIns="0" rtlCol="0" anchor="ctr"/>
+          <a:lstStyle/>
+          <a:p>
+            <a:pPr eaLnBrk="0" latinLnBrk="0" indent="0" marL="0">
+              <a:buNone/>
+            </a:pPr>
+            <a:r>
+              <a:rPr lang="en-US" sz="1200" dirty="0">
+                <a:solidFill>
+                  <a:srgbClr val="404040"/>
+                </a:solidFill>
+                <a:latin typeface="맑은 고딕" pitchFamily="34" charset="0"/>
+                <a:ea typeface="맑은 고딕" pitchFamily="34" charset="-122"/>
+                <a:cs typeface="맑은 고딕" pitchFamily="34" charset="-120"/>
+              </a:rPr>
+              <a:t>[ 전형 3단계 ]</a:t>
+            </a:r>
+            <a:endParaRPr lang="en-US" sz="1200" dirty="0"/>
+          </a:p>
+        </p:txBody>
+      </p:sp>
+      <p:sp>
+        <p:nvSpPr>
+          <p:cNvPr id="16" name="Text 14"/>
+          <p:cNvSpPr txBox="1"/>
+          <p:nvPr/>
+        </p:nvSpPr>
+        <p:spPr>
+          <a:xfrm>
+            <a:off x="1645920" y="4370832"/>
+            <a:ext cx="4206240" cy="384048"/>
+          </a:xfrm>
+          <a:prstGeom prst="rect">
+            <a:avLst/>
+          </a:prstGeom>
+          <a:noFill/>
+          <a:ln/>
+        </p:spPr>
+        <p:txBody>
+          <a:bodyPr wrap="square" lIns="0" tIns="0" rIns="0" bIns="0" rtlCol="0" anchor="ctr"/>
+          <a:lstStyle/>
+          <a:p>
+            <a:pPr eaLnBrk="0" latinLnBrk="0" indent="0" marL="0">
+              <a:buNone/>
+            </a:pPr>
+            <a:r>
+              <a:rPr lang="en-US" sz="1800" dirty="0">
+                <a:solidFill>
+                  <a:srgbClr val="000000"/>
+                </a:solidFill>
+                <a:latin typeface="맑은 고딕" pitchFamily="34" charset="0"/>
+                <a:ea typeface="맑은 고딕" pitchFamily="34" charset="-122"/>
+                <a:cs typeface="맑은 고딕" pitchFamily="34" charset="-120"/>
+              </a:rPr>
+              <a:t>8.  결격사유 검증</a:t>
+            </a:r>
+            <a:endParaRPr lang="en-US" sz="1800" dirty="0"/>
+          </a:p>
+        </p:txBody>
+      </p:sp>
+      <p:sp>
+        <p:nvSpPr>
+          <p:cNvPr id="17" name="Text 15"/>
+          <p:cNvSpPr txBox="1"/>
+          <p:nvPr/>
+        </p:nvSpPr>
+        <p:spPr>
+          <a:xfrm>
+            <a:off x="5852160" y="4370832"/>
+            <a:ext cx="1645920" cy="384048"/>
+          </a:xfrm>
+          <a:prstGeom prst="rect">
+            <a:avLst/>
+          </a:prstGeom>
+          <a:noFill/>
+          <a:ln/>
+        </p:spPr>
+        <p:txBody>
+          <a:bodyPr wrap="square" lIns="0" tIns="0" rIns="0" bIns="0" rtlCol="0" anchor="ctr"/>
+          <a:lstStyle/>
+          <a:p>
+            <a:pPr eaLnBrk="0" latinLnBrk="0" indent="0" marL="0">
+              <a:buNone/>
+            </a:pPr>
+            <a:r>
+              <a:rPr lang="en-US" sz="1200" dirty="0">
+                <a:solidFill>
+                  <a:srgbClr val="404040"/>
+                </a:solidFill>
+                <a:latin typeface="맑은 고딕" pitchFamily="34" charset="0"/>
+                <a:ea typeface="맑은 고딕" pitchFamily="34" charset="-122"/>
+                <a:cs typeface="맑은 고딕" pitchFamily="34" charset="-120"/>
+              </a:rPr>
+              <a:t>[ 전형 4단계 ]</a:t>
+            </a:r>
+            <a:endParaRPr lang="en-US" sz="1200" dirty="0"/>
+          </a:p>
+        </p:txBody>
+      </p:sp>
+      <p:sp>
+        <p:nvSpPr>
+          <p:cNvPr id="18" name="Text 16"/>
+          <p:cNvSpPr txBox="1"/>
+          <p:nvPr/>
+        </p:nvSpPr>
+        <p:spPr>
+          <a:xfrm>
+            <a:off x="1645920" y="4809744"/>
+            <a:ext cx="4206240" cy="384048"/>
+          </a:xfrm>
+          <a:prstGeom prst="rect">
+            <a:avLst/>
+          </a:prstGeom>
+          <a:noFill/>
+          <a:ln/>
+        </p:spPr>
+        <p:txBody>
+          <a:bodyPr wrap="square" lIns="0" tIns="0" rIns="0" bIns="0" rtlCol="0" anchor="ctr"/>
+          <a:lstStyle/>
+          <a:p>
+            <a:pPr eaLnBrk="0" latinLnBrk="0" indent="0" marL="0">
+              <a:buNone/>
+            </a:pPr>
+            <a:r>
+              <a:rPr lang="en-US" sz="1800" dirty="0">
+                <a:solidFill>
+                  <a:srgbClr val="000000"/>
+                </a:solidFill>
+                <a:latin typeface="맑은 고딕" pitchFamily="34" charset="0"/>
+                <a:ea typeface="맑은 고딕" pitchFamily="34" charset="-122"/>
+                <a:cs typeface="맑은 고딕" pitchFamily="34" charset="-120"/>
+              </a:rPr>
+              <a:t>9.  기타 사항</a:t>
+            </a:r>
+            <a:endParaRPr lang="en-US" sz="1800" dirty="0"/>
+          </a:p>
+        </p:txBody>
+      </p:sp>
+      <p:sp>
+        <p:nvSpPr>
+          <p:cNvPr id="19" name="Text 17"/>
+          <p:cNvSpPr txBox="1"/>
+          <p:nvPr/>
+        </p:nvSpPr>
+        <p:spPr>
+          <a:xfrm>
+            <a:off x="1645920" y="5248656"/>
+            <a:ext cx="4206240" cy="384048"/>
+          </a:xfrm>
+          <a:prstGeom prst="rect">
+            <a:avLst/>
+          </a:prstGeom>
+          <a:noFill/>
+          <a:ln/>
+        </p:spPr>
+        <p:txBody>
+          <a:bodyPr wrap="square" lIns="0" tIns="0" rIns="0" bIns="0" rtlCol="0" anchor="ctr"/>
+          <a:lstStyle/>
+          <a:p>
+            <a:pPr eaLnBrk="0" latinLnBrk="0" indent="0" marL="0">
+              <a:buNone/>
+            </a:pPr>
+            <a:r>
+              <a:rPr lang="en-US" sz="1800" dirty="0">
+                <a:solidFill>
+                  <a:srgbClr val="000000"/>
+                </a:solidFill>
+                <a:latin typeface="맑은 고딕" pitchFamily="34" charset="0"/>
+                <a:ea typeface="맑은 고딕" pitchFamily="34" charset="-122"/>
+                <a:cs typeface="맑은 고딕" pitchFamily="34" charset="-120"/>
+              </a:rPr>
+              <a:t>10.  채용 계획 요약</a:t>
+            </a:r>
+            <a:endParaRPr lang="en-US" sz="1800" dirty="0"/>
+          </a:p>
+        </p:txBody>
+      </p:sp>
+    </p:spTree>
+  </p:cSld>
+  <p:clrMapOvr>
+    <a:masterClrMapping/>
+  </p:clrMapOvr>
+</p:sld>
+</file>
+
+<file path=ppt/slides/slide3.xml><?xml version="1.0" encoding="utf-8"?>
+<p:sld xmlns:a="http://schemas.openxmlformats.org/drawingml/2006/main" xmlns:r="http://schemas.openxmlformats.org/officeDocument/2006/relationships" xmlns:p="http://schemas.openxmlformats.org/presentationml/2006/main">
+  <p:cSld name="Slide 3">
+    <p:bg>
+      <p:bgPr>
+        <a:solidFill>
+          <a:srgbClr val="FFFFFF"/>
+        </a:solidFill>
+      </p:bgPr>
+    </p:bg>
+    <p:spTree>
+      <p:nvGrpSpPr>
+        <p:cNvPr id="1" name=""/>
+        <p:cNvGrpSpPr/>
+        <p:nvPr/>
+      </p:nvGrpSpPr>
+      <p:grpSpPr>
+        <a:xfrm>
+          <a:off x="0" y="0"/>
+          <a:ext cx="0" cy="0"/>
+          <a:chOff x="0" y="0"/>
+          <a:chExt cx="0" cy="0"/>
+        </a:xfrm>
+      </p:grpSpPr>
+      <p:sp>
+        <p:nvSpPr>
+          <p:cNvPr id="2" name="Shape 0"/>
+          <p:cNvSpPr/>
+          <p:nvPr/>
+        </p:nvSpPr>
+        <p:spPr>
+          <a:xfrm>
+            <a:off x="0" y="6620256"/>
+            <a:ext cx="9144000" cy="237744"/>
+          </a:xfrm>
+          <a:prstGeom prst="rect">
+            <a:avLst/>
+          </a:prstGeom>
+          <a:solidFill>
+            <a:srgbClr val="4FADD1"/>
+          </a:solidFill>
+          <a:ln w="6350">
+            <a:solidFill>
+              <a:srgbClr val="4FADD1"/>
+            </a:solidFill>
+            <a:prstDash val="solid"/>
+          </a:ln>
+        </p:spPr>
+      </p:sp>
+      <p:sp>
+        <p:nvSpPr>
+          <p:cNvPr id="3" name="Shape 1"/>
+          <p:cNvSpPr/>
+          <p:nvPr/>
+        </p:nvSpPr>
+        <p:spPr>
+          <a:xfrm>
+            <a:off x="0" y="0"/>
+            <a:ext cx="9144000" cy="713232"/>
+          </a:xfrm>
+          <a:prstGeom prst="rect">
+            <a:avLst/>
+          </a:prstGeom>
+          <a:solidFill>
+            <a:srgbClr val="4FADD1"/>
+          </a:solidFill>
+          <a:ln w="6350">
+            <a:solidFill>
+              <a:srgbClr val="4FADD1"/>
+            </a:solidFill>
+            <a:prstDash val="solid"/>
+          </a:ln>
+        </p:spPr>
+      </p:sp>
+      <p:sp>
+        <p:nvSpPr>
+          <p:cNvPr id="4" name="Text 2"/>
+          <p:cNvSpPr txBox="1"/>
+          <p:nvPr/>
+        </p:nvSpPr>
+        <p:spPr>
+          <a:xfrm>
+            <a:off x="3657600" y="6291072"/>
+            <a:ext cx="1828800" cy="274320"/>
+          </a:xfrm>
+          <a:prstGeom prst="rect">
+            <a:avLst/>
+          </a:prstGeom>
+          <a:noFill/>
+          <a:ln/>
+        </p:spPr>
+        <p:txBody>
+          <a:bodyPr wrap="square" lIns="0" tIns="0" rIns="0" bIns="0" rtlCol="0" anchor="ctr"/>
+          <a:lstStyle/>
+          <a:p>
+            <a:pPr eaLnBrk="0" latinLnBrk="0" algn="ctr" indent="0" marL="0">
+              <a:buNone/>
+            </a:pPr>
+            <a:r>
+              <a:rPr lang="en-US" sz="1100" dirty="0">
+                <a:solidFill>
+                  <a:srgbClr val="000000"/>
+                </a:solidFill>
+                <a:latin typeface="맑은 고딕" pitchFamily="34" charset="0"/>
+                <a:ea typeface="맑은 고딕" pitchFamily="34" charset="-122"/>
+                <a:cs typeface="맑은 고딕" pitchFamily="34" charset="-120"/>
+              </a:rPr>
+              <a:t>- 2 -</a:t>
+            </a:r>
+            <a:endParaRPr lang="en-US" sz="1100" dirty="0"/>
+          </a:p>
+        </p:txBody>
+      </p:sp>
+      <p:sp>
+        <p:nvSpPr>
+          <p:cNvPr id="5" name="Text 3"/>
+          <p:cNvSpPr txBox="1"/>
+          <p:nvPr/>
+        </p:nvSpPr>
+        <p:spPr>
+          <a:xfrm>
+            <a:off x="457200" y="82296"/>
             <a:ext cx="5120640" cy="548640"/>
           </a:xfrm>
           <a:prstGeom prst="rect">
@@ -5150,7 +7550,7 @@
       </p:sp>
       <p:graphicFrame>
         <p:nvGraphicFramePr>
-          <p:cNvPr id="3" name="Table 0"/>
+          <p:cNvPr id="4" name="Table 0"/>
           <p:cNvGraphicFramePr>
             <a:graphicFrameLocks noGrp="1"/>
           </p:cNvGraphicFramePr>
@@ -5897,9 +8297,9 @@
 </p:sld>
 </file>
 
-<file path=ppt/slides/slide3.xml><?xml version="1.0" encoding="utf-8"?>
+<file path=ppt/slides/slide4.xml><?xml version="1.0" encoding="utf-8"?>
 <p:sld xmlns:a="http://schemas.openxmlformats.org/drawingml/2006/main" xmlns:r="http://schemas.openxmlformats.org/officeDocument/2006/relationships" xmlns:p="http://schemas.openxmlformats.org/presentationml/2006/main">
-  <p:cSld name="Slide 3">
+  <p:cSld name="Slide 4">
     <p:bg>
       <p:bgPr>
         <a:solidFill>
@@ -6004,7 +8404,7 @@
                 <a:ea typeface="맑은 고딕" pitchFamily="34" charset="-122"/>
                 <a:cs typeface="맑은 고딕" pitchFamily="34" charset="-120"/>
               </a:rPr>
-              <a:t>- 2 -</a:t>
+              <a:t>- 3 -</a:t>
             </a:r>
             <a:endParaRPr lang="en-US" sz="1100" dirty="0"/>
           </a:p>
@@ -6129,7 +8529,7 @@
       </p:sp>
       <p:graphicFrame>
         <p:nvGraphicFramePr>
-          <p:cNvPr id="4" name="Table 0"/>
+          <p:cNvPr id="5" name="Table 0"/>
           <p:cNvGraphicFramePr>
             <a:graphicFrameLocks noGrp="1"/>
           </p:cNvGraphicFramePr>
@@ -8821,7 +11221,7 @@
       </p:sp>
       <p:graphicFrame>
         <p:nvGraphicFramePr>
-          <p:cNvPr id="7" name="Table 1"/>
+          <p:cNvPr id="9" name="Table 1"/>
           <p:cNvGraphicFramePr>
             <a:graphicFrameLocks noGrp="1"/>
           </p:cNvGraphicFramePr>
@@ -9787,9 +12187,9 @@
 </p:sld>
 </file>
 
-<file path=ppt/slides/slide4.xml><?xml version="1.0" encoding="utf-8"?>
+<file path=ppt/slides/slide5.xml><?xml version="1.0" encoding="utf-8"?>
 <p:sld xmlns:a="http://schemas.openxmlformats.org/drawingml/2006/main" xmlns:r="http://schemas.openxmlformats.org/officeDocument/2006/relationships" xmlns:p="http://schemas.openxmlformats.org/presentationml/2006/main">
-  <p:cSld name="Slide 4">
+  <p:cSld name="Slide 5">
     <p:bg>
       <p:bgPr>
         <a:solidFill>
@@ -9894,7 +12294,7 @@
                 <a:ea typeface="맑은 고딕" pitchFamily="34" charset="-122"/>
                 <a:cs typeface="맑은 고딕" pitchFamily="34" charset="-120"/>
               </a:rPr>
-              <a:t>- 3 -</a:t>
+              <a:t>- 4 -</a:t>
             </a:r>
             <a:endParaRPr lang="en-US" sz="1100" dirty="0"/>
           </a:p>
@@ -10875,9 +13275,9 @@
 </p:sld>
 </file>
 
-<file path=ppt/slides/slide5.xml><?xml version="1.0" encoding="utf-8"?>
+<file path=ppt/slides/slide6.xml><?xml version="1.0" encoding="utf-8"?>
 <p:sld xmlns:a="http://schemas.openxmlformats.org/drawingml/2006/main" xmlns:r="http://schemas.openxmlformats.org/officeDocument/2006/relationships" xmlns:p="http://schemas.openxmlformats.org/presentationml/2006/main">
-  <p:cSld name="Slide 5">
+  <p:cSld name="Slide 6">
     <p:bg>
       <p:bgPr>
         <a:solidFill>
@@ -10982,7 +13382,7 @@
                 <a:ea typeface="맑은 고딕" pitchFamily="34" charset="-122"/>
                 <a:cs typeface="맑은 고딕" pitchFamily="34" charset="-120"/>
               </a:rPr>
-              <a:t>- 4 -</a:t>
+              <a:t>- 5 -</a:t>
             </a:r>
             <a:endParaRPr lang="en-US" sz="1100" dirty="0"/>
           </a:p>
@@ -11917,7 +14317,7 @@
       </p:sp>
       <p:graphicFrame>
         <p:nvGraphicFramePr>
-          <p:cNvPr id="6" name="Table 0"/>
+          <p:cNvPr id="7" name="Table 0"/>
           <p:cNvGraphicFramePr>
             <a:graphicFrameLocks noGrp="1"/>
           </p:cNvGraphicFramePr>
@@ -13027,9 +15427,9 @@
 </p:sld>
 </file>
 
-<file path=ppt/slides/slide6.xml><?xml version="1.0" encoding="utf-8"?>
+<file path=ppt/slides/slide7.xml><?xml version="1.0" encoding="utf-8"?>
 <p:sld xmlns:a="http://schemas.openxmlformats.org/drawingml/2006/main" xmlns:r="http://schemas.openxmlformats.org/officeDocument/2006/relationships" xmlns:p="http://schemas.openxmlformats.org/presentationml/2006/main">
-  <p:cSld name="Slide 6">
+  <p:cSld name="Slide 7">
     <p:bg>
       <p:bgPr>
         <a:solidFill>
@@ -13134,7 +15534,7 @@
                 <a:ea typeface="맑은 고딕" pitchFamily="34" charset="-122"/>
                 <a:cs typeface="맑은 고딕" pitchFamily="34" charset="-120"/>
               </a:rPr>
-              <a:t>- 5 -</a:t>
+              <a:t>- 6 -</a:t>
             </a:r>
             <a:endParaRPr lang="en-US" sz="1100" dirty="0"/>
           </a:p>
@@ -13622,7 +16022,7 @@
       </p:sp>
       <p:graphicFrame>
         <p:nvGraphicFramePr>
-          <p:cNvPr id="7" name="Table 0"/>
+          <p:cNvPr id="8" name="Table 0"/>
           <p:cNvGraphicFramePr>
             <a:graphicFrameLocks noGrp="1"/>
           </p:cNvGraphicFramePr>
@@ -14324,9 +16724,9 @@
 </p:sld>
 </file>
 
-<file path=ppt/slides/slide7.xml><?xml version="1.0" encoding="utf-8"?>
+<file path=ppt/slides/slide8.xml><?xml version="1.0" encoding="utf-8"?>
 <p:sld xmlns:a="http://schemas.openxmlformats.org/drawingml/2006/main" xmlns:r="http://schemas.openxmlformats.org/officeDocument/2006/relationships" xmlns:p="http://schemas.openxmlformats.org/presentationml/2006/main">
-  <p:cSld name="Slide 7">
+  <p:cSld name="Slide 8">
     <p:bg>
       <p:bgPr>
         <a:solidFill>
@@ -14431,7 +16831,7 @@
                 <a:ea typeface="맑은 고딕" pitchFamily="34" charset="-122"/>
                 <a:cs typeface="맑은 고딕" pitchFamily="34" charset="-120"/>
               </a:rPr>
-              <a:t>- 6 -</a:t>
+              <a:t>- 7 -</a:t>
             </a:r>
             <a:endParaRPr lang="en-US" sz="1100" dirty="0"/>
           </a:p>
@@ -14711,1731 +17111,6 @@
                 <a:cs typeface="맑은 고딕" pitchFamily="34" charset="-120"/>
               </a:rPr>
               <a:t>심사위원 : 3명 (교장 1명, 행정실장 1명, 외부위원 1명)</a:t>
-            </a:r>
-            <a:endParaRPr lang="en-US" sz="1200" dirty="0"/>
-          </a:p>
-        </p:txBody>
-      </p:sp>
-      <p:sp>
-        <p:nvSpPr>
-          <p:cNvPr id="12" name="Text 10"/>
-          <p:cNvSpPr txBox="1"/>
-          <p:nvPr/>
-        </p:nvSpPr>
-        <p:spPr>
-          <a:xfrm>
-            <a:off x="457200" y="2157984"/>
-            <a:ext cx="8229600" cy="274320"/>
-          </a:xfrm>
-          <a:prstGeom prst="rect">
-            <a:avLst/>
-          </a:prstGeom>
-          <a:noFill/>
-          <a:ln/>
-        </p:spPr>
-        <p:txBody>
-          <a:bodyPr wrap="square" lIns="0" tIns="0" rIns="0" bIns="0" rtlCol="0" anchor="ctr"/>
-          <a:lstStyle/>
-          <a:p>
-            <a:pPr eaLnBrk="0" latinLnBrk="0" indent="0" marL="0">
-              <a:buNone/>
-            </a:pPr>
-            <a:r>
-              <a:rPr lang="en-US" sz="1400" dirty="0">
-                <a:solidFill>
-                  <a:srgbClr val="000000"/>
-                </a:solidFill>
-                <a:latin typeface="HY동녘B" pitchFamily="34" charset="0"/>
-                <a:ea typeface="HY동녘B" pitchFamily="34" charset="-122"/>
-                <a:cs typeface="HY동녘B" pitchFamily="34" charset="-120"/>
-              </a:rPr>
-              <a:t>■ 평가 항목 및 배점</a:t>
-            </a:r>
-            <a:endParaRPr lang="en-US" sz="1400" dirty="0"/>
-          </a:p>
-        </p:txBody>
-      </p:sp>
-      <p:graphicFrame>
-        <p:nvGraphicFramePr>
-          <p:cNvPr id="8" name="Table 0"/>
-          <p:cNvGraphicFramePr>
-            <a:graphicFrameLocks noGrp="1"/>
-          </p:cNvGraphicFramePr>
-          <p:nvPr>
-            <p:extLst>
-              <p:ext uri="{D42A27DB-BD31-4B8C-83A1-F6EECF244321}">
-                <p14:modId xmlns:p14="http://schemas.microsoft.com/office/powerpoint/2010/main" val="1579011935"/>
-              </p:ext>
-            </p:extLst>
-          </p:nvPr>
-        </p:nvGraphicFramePr>
-        <p:xfrm>
-          <a:off x="914400" y="2523744"/>
-          <a:ext cx="6035040" cy="914400"/>
-        </p:xfrm>
-        <a:graphic>
-          <a:graphicData uri="http://schemas.openxmlformats.org/drawingml/2006/table">
-            <a:tbl>
-              <a:tblPr/>
-              <a:tblGrid>
-                <a:gridCol w="3108960"/>
-                <a:gridCol w="1463040"/>
-                <a:gridCol w="1463040"/>
-              </a:tblGrid>
-              <a:tr h="310896">
-                <a:tc>
-                  <a:txBody>
-                    <a:bodyPr/>
-                    <a:lstStyle/>
-                    <a:p>
-                      <a:pPr eaLnBrk="0" latinLnBrk="0" algn="ctr" indent="0" marL="0">
-                        <a:buNone/>
-                      </a:pPr>
-                      <a:r>
-                        <a:rPr lang="en-US" sz="1050" b="1" dirty="0">
-                          <a:solidFill>
-                            <a:srgbClr val="000000"/>
-                          </a:solidFill>
-                          <a:latin typeface="맑은 고딕" pitchFamily="34" charset="0"/>
-                          <a:ea typeface="맑은 고딕" pitchFamily="34" charset="-122"/>
-                          <a:cs typeface="맑은 고딕" pitchFamily="34" charset="-120"/>
-                        </a:rPr>
-                        <a:t>평가항목</a:t>
-                      </a:r>
-                      <a:endParaRPr lang="en-US" sz="1050" dirty="0">
-                        <a:latin typeface="맑은 고딕" charset="0"/>
-                        <a:ea typeface="맑은 고딕" charset="0"/>
-                        <a:cs typeface="맑은 고딕" charset="0"/>
-                      </a:endParaRPr>
-                    </a:p>
-                  </a:txBody>
-                  <a:tcPr marL="38100" marR="38100" marT="38100" marB="38100" anchor="ctr">
-                    <a:lnL w="12700" cap="flat" cmpd="sng" algn="ctr">
-                      <a:solidFill>
-                        <a:srgbClr val="000000"/>
-                      </a:solidFill>
-                      <a:prstDash val="solid"/>
-                      <a:round/>
-                      <a:headEnd type="none" w="med" len="med"/>
-                      <a:tailEnd type="none" w="med" len="med"/>
-                    </a:lnL>
-                    <a:lnR w="12700" cap="flat" cmpd="sng" algn="ctr">
-                      <a:solidFill>
-                        <a:srgbClr val="000000"/>
-                      </a:solidFill>
-                      <a:prstDash val="solid"/>
-                      <a:round/>
-                      <a:headEnd type="none" w="med" len="med"/>
-                      <a:tailEnd type="none" w="med" len="med"/>
-                    </a:lnR>
-                    <a:lnT w="12700" cap="flat" cmpd="sng" algn="ctr">
-                      <a:solidFill>
-                        <a:srgbClr val="000000"/>
-                      </a:solidFill>
-                      <a:prstDash val="solid"/>
-                      <a:round/>
-                      <a:headEnd type="none" w="med" len="med"/>
-                      <a:tailEnd type="none" w="med" len="med"/>
-                    </a:lnT>
-                    <a:lnB w="12700" cap="flat" cmpd="sng" algn="ctr">
-                      <a:solidFill>
-                        <a:srgbClr val="000000"/>
-                      </a:solidFill>
-                      <a:prstDash val="solid"/>
-                      <a:round/>
-                      <a:headEnd type="none" w="med" len="med"/>
-                      <a:tailEnd type="none" w="med" len="med"/>
-                    </a:lnB>
-                    <a:solidFill>
-                      <a:srgbClr val="CCFFFF"/>
-                    </a:solidFill>
-                  </a:tcPr>
-                </a:tc>
-                <a:tc>
-                  <a:txBody>
-                    <a:bodyPr/>
-                    <a:lstStyle/>
-                    <a:p>
-                      <a:pPr eaLnBrk="0" latinLnBrk="0" algn="ctr" indent="0" marL="0">
-                        <a:buNone/>
-                      </a:pPr>
-                      <a:r>
-                        <a:rPr lang="en-US" sz="1050" b="1" dirty="0">
-                          <a:solidFill>
-                            <a:srgbClr val="000000"/>
-                          </a:solidFill>
-                          <a:latin typeface="맑은 고딕" pitchFamily="34" charset="0"/>
-                          <a:ea typeface="맑은 고딕" pitchFamily="34" charset="-122"/>
-                          <a:cs typeface="맑은 고딕" pitchFamily="34" charset="-120"/>
-                        </a:rPr>
-                        <a:t>배 점</a:t>
-                      </a:r>
-                      <a:endParaRPr lang="en-US" sz="1050" dirty="0">
-                        <a:latin typeface="맑은 고딕" charset="0"/>
-                        <a:ea typeface="맑은 고딕" charset="0"/>
-                        <a:cs typeface="맑은 고딕" charset="0"/>
-                      </a:endParaRPr>
-                    </a:p>
-                  </a:txBody>
-                  <a:tcPr marL="38100" marR="38100" marT="38100" marB="38100" anchor="ctr">
-                    <a:lnL w="12700" cap="flat" cmpd="sng" algn="ctr">
-                      <a:solidFill>
-                        <a:srgbClr val="000000"/>
-                      </a:solidFill>
-                      <a:prstDash val="solid"/>
-                      <a:round/>
-                      <a:headEnd type="none" w="med" len="med"/>
-                      <a:tailEnd type="none" w="med" len="med"/>
-                    </a:lnL>
-                    <a:lnR w="12700" cap="flat" cmpd="sng" algn="ctr">
-                      <a:solidFill>
-                        <a:srgbClr val="000000"/>
-                      </a:solidFill>
-                      <a:prstDash val="solid"/>
-                      <a:round/>
-                      <a:headEnd type="none" w="med" len="med"/>
-                      <a:tailEnd type="none" w="med" len="med"/>
-                    </a:lnR>
-                    <a:lnT w="12700" cap="flat" cmpd="sng" algn="ctr">
-                      <a:solidFill>
-                        <a:srgbClr val="000000"/>
-                      </a:solidFill>
-                      <a:prstDash val="solid"/>
-                      <a:round/>
-                      <a:headEnd type="none" w="med" len="med"/>
-                      <a:tailEnd type="none" w="med" len="med"/>
-                    </a:lnT>
-                    <a:lnB w="12700" cap="flat" cmpd="sng" algn="ctr">
-                      <a:solidFill>
-                        <a:srgbClr val="000000"/>
-                      </a:solidFill>
-                      <a:prstDash val="solid"/>
-                      <a:round/>
-                      <a:headEnd type="none" w="med" len="med"/>
-                      <a:tailEnd type="none" w="med" len="med"/>
-                    </a:lnB>
-                    <a:solidFill>
-                      <a:srgbClr val="CCFFFF"/>
-                    </a:solidFill>
-                  </a:tcPr>
-                </a:tc>
-                <a:tc>
-                  <a:txBody>
-                    <a:bodyPr/>
-                    <a:lstStyle/>
-                    <a:p>
-                      <a:pPr eaLnBrk="0" latinLnBrk="0" algn="ctr" indent="0" marL="0">
-                        <a:buNone/>
-                      </a:pPr>
-                      <a:r>
-                        <a:rPr lang="en-US" sz="1050" b="1" dirty="0">
-                          <a:solidFill>
-                            <a:srgbClr val="000000"/>
-                          </a:solidFill>
-                          <a:latin typeface="맑은 고딕" pitchFamily="34" charset="0"/>
-                          <a:ea typeface="맑은 고딕" pitchFamily="34" charset="-122"/>
-                          <a:cs typeface="맑은 고딕" pitchFamily="34" charset="-120"/>
-                        </a:rPr>
-                        <a:t>합격배수</a:t>
-                      </a:r>
-                      <a:endParaRPr lang="en-US" sz="1050" dirty="0">
-                        <a:latin typeface="맑은 고딕" charset="0"/>
-                        <a:ea typeface="맑은 고딕" charset="0"/>
-                        <a:cs typeface="맑은 고딕" charset="0"/>
-                      </a:endParaRPr>
-                    </a:p>
-                  </a:txBody>
-                  <a:tcPr marL="38100" marR="38100" marT="38100" marB="38100" anchor="ctr">
-                    <a:lnL w="12700" cap="flat" cmpd="sng" algn="ctr">
-                      <a:solidFill>
-                        <a:srgbClr val="000000"/>
-                      </a:solidFill>
-                      <a:prstDash val="solid"/>
-                      <a:round/>
-                      <a:headEnd type="none" w="med" len="med"/>
-                      <a:tailEnd type="none" w="med" len="med"/>
-                    </a:lnL>
-                    <a:lnR w="12700" cap="flat" cmpd="sng" algn="ctr">
-                      <a:solidFill>
-                        <a:srgbClr val="000000"/>
-                      </a:solidFill>
-                      <a:prstDash val="solid"/>
-                      <a:round/>
-                      <a:headEnd type="none" w="med" len="med"/>
-                      <a:tailEnd type="none" w="med" len="med"/>
-                    </a:lnR>
-                    <a:lnT w="12700" cap="flat" cmpd="sng" algn="ctr">
-                      <a:solidFill>
-                        <a:srgbClr val="000000"/>
-                      </a:solidFill>
-                      <a:prstDash val="solid"/>
-                      <a:round/>
-                      <a:headEnd type="none" w="med" len="med"/>
-                      <a:tailEnd type="none" w="med" len="med"/>
-                    </a:lnT>
-                    <a:lnB w="12700" cap="flat" cmpd="sng" algn="ctr">
-                      <a:solidFill>
-                        <a:srgbClr val="000000"/>
-                      </a:solidFill>
-                      <a:prstDash val="solid"/>
-                      <a:round/>
-                      <a:headEnd type="none" w="med" len="med"/>
-                      <a:tailEnd type="none" w="med" len="med"/>
-                    </a:lnB>
-                    <a:solidFill>
-                      <a:srgbClr val="CCFFFF"/>
-                    </a:solidFill>
-                  </a:tcPr>
-                </a:tc>
-              </a:tr>
-              <a:tr h="329184">
-                <a:tc>
-                  <a:txBody>
-                    <a:bodyPr/>
-                    <a:lstStyle/>
-                    <a:p>
-                      <a:pPr eaLnBrk="0" latinLnBrk="0" algn="l" indent="0" marL="0">
-                        <a:buNone/>
-                      </a:pPr>
-                      <a:r>
-                        <a:rPr lang="en-US" sz="1050" dirty="0">
-                          <a:solidFill>
-                            <a:srgbClr val="000000"/>
-                          </a:solidFill>
-                          <a:latin typeface="맑은 고딕" pitchFamily="34" charset="0"/>
-                          <a:ea typeface="맑은 고딕" pitchFamily="34" charset="-122"/>
-                          <a:cs typeface="맑은 고딕" pitchFamily="34" charset="-120"/>
-                        </a:rPr>
-                        <a:t>직무전문성</a:t>
-                      </a:r>
-                      <a:endParaRPr lang="en-US" sz="1050" dirty="0">
-                        <a:latin typeface="맑은 고딕" charset="0"/>
-                        <a:ea typeface="맑은 고딕" charset="0"/>
-                        <a:cs typeface="맑은 고딕" charset="0"/>
-                      </a:endParaRPr>
-                    </a:p>
-                  </a:txBody>
-                  <a:tcPr marL="38100" marR="38100" marT="38100" marB="38100" anchor="ctr">
-                    <a:lnL w="12700" cap="flat" cmpd="sng" algn="ctr">
-                      <a:solidFill>
-                        <a:srgbClr val="000000"/>
-                      </a:solidFill>
-                      <a:prstDash val="solid"/>
-                      <a:round/>
-                      <a:headEnd type="none" w="med" len="med"/>
-                      <a:tailEnd type="none" w="med" len="med"/>
-                    </a:lnL>
-                    <a:lnR w="12700" cap="flat" cmpd="sng" algn="ctr">
-                      <a:solidFill>
-                        <a:srgbClr val="000000"/>
-                      </a:solidFill>
-                      <a:prstDash val="solid"/>
-                      <a:round/>
-                      <a:headEnd type="none" w="med" len="med"/>
-                      <a:tailEnd type="none" w="med" len="med"/>
-                    </a:lnR>
-                    <a:lnT w="12700" cap="flat" cmpd="sng" algn="ctr">
-                      <a:solidFill>
-                        <a:srgbClr val="000000"/>
-                      </a:solidFill>
-                      <a:prstDash val="solid"/>
-                      <a:round/>
-                      <a:headEnd type="none" w="med" len="med"/>
-                      <a:tailEnd type="none" w="med" len="med"/>
-                    </a:lnT>
-                    <a:lnB w="12700" cap="flat" cmpd="sng" algn="ctr">
-                      <a:solidFill>
-                        <a:srgbClr val="000000"/>
-                      </a:solidFill>
-                      <a:prstDash val="solid"/>
-                      <a:round/>
-                      <a:headEnd type="none" w="med" len="med"/>
-                      <a:tailEnd type="none" w="med" len="med"/>
-                    </a:lnB>
-                  </a:tcPr>
-                </a:tc>
-                <a:tc>
-                  <a:txBody>
-                    <a:bodyPr/>
-                    <a:lstStyle/>
-                    <a:p>
-                      <a:pPr eaLnBrk="0" latinLnBrk="0" algn="ctr" indent="0" marL="0">
-                        <a:buNone/>
-                      </a:pPr>
-                      <a:r>
-                        <a:rPr lang="en-US" sz="1050" dirty="0">
-                          <a:solidFill>
-                            <a:srgbClr val="000000"/>
-                          </a:solidFill>
-                          <a:latin typeface="맑은 고딕" pitchFamily="34" charset="0"/>
-                          <a:ea typeface="맑은 고딕" pitchFamily="34" charset="-122"/>
-                          <a:cs typeface="맑은 고딕" pitchFamily="34" charset="-120"/>
-                        </a:rPr>
-                        <a:t>10점</a:t>
-                      </a:r>
-                      <a:endParaRPr lang="en-US" sz="1050" dirty="0">
-                        <a:latin typeface="맑은 고딕" charset="0"/>
-                        <a:ea typeface="맑은 고딕" charset="0"/>
-                        <a:cs typeface="맑은 고딕" charset="0"/>
-                      </a:endParaRPr>
-                    </a:p>
-                  </a:txBody>
-                  <a:tcPr marL="38100" marR="38100" marT="38100" marB="38100" anchor="ctr">
-                    <a:lnL w="12700" cap="flat" cmpd="sng" algn="ctr">
-                      <a:solidFill>
-                        <a:srgbClr val="000000"/>
-                      </a:solidFill>
-                      <a:prstDash val="solid"/>
-                      <a:round/>
-                      <a:headEnd type="none" w="med" len="med"/>
-                      <a:tailEnd type="none" w="med" len="med"/>
-                    </a:lnL>
-                    <a:lnR w="12700" cap="flat" cmpd="sng" algn="ctr">
-                      <a:solidFill>
-                        <a:srgbClr val="000000"/>
-                      </a:solidFill>
-                      <a:prstDash val="solid"/>
-                      <a:round/>
-                      <a:headEnd type="none" w="med" len="med"/>
-                      <a:tailEnd type="none" w="med" len="med"/>
-                    </a:lnR>
-                    <a:lnT w="12700" cap="flat" cmpd="sng" algn="ctr">
-                      <a:solidFill>
-                        <a:srgbClr val="000000"/>
-                      </a:solidFill>
-                      <a:prstDash val="solid"/>
-                      <a:round/>
-                      <a:headEnd type="none" w="med" len="med"/>
-                      <a:tailEnd type="none" w="med" len="med"/>
-                    </a:lnT>
-                    <a:lnB w="12700" cap="flat" cmpd="sng" algn="ctr">
-                      <a:solidFill>
-                        <a:srgbClr val="000000"/>
-                      </a:solidFill>
-                      <a:prstDash val="solid"/>
-                      <a:round/>
-                      <a:headEnd type="none" w="med" len="med"/>
-                      <a:tailEnd type="none" w="med" len="med"/>
-                    </a:lnB>
-                  </a:tcPr>
-                </a:tc>
-                <a:tc rowSpan="5">
-                  <a:txBody>
-                    <a:bodyPr/>
-                    <a:lstStyle/>
-                    <a:p>
-                      <a:pPr eaLnBrk="0" latinLnBrk="0" algn="ctr" indent="0" marL="0">
-                        <a:buNone/>
-                      </a:pPr>
-                      <a:r>
-                        <a:rPr lang="en-US" sz="1200" b="1" dirty="0">
-                          <a:solidFill>
-                            <a:srgbClr val="000000"/>
-                          </a:solidFill>
-                          <a:latin typeface="맑은 고딕" pitchFamily="34" charset="0"/>
-                          <a:ea typeface="맑은 고딕" pitchFamily="34" charset="-122"/>
-                          <a:cs typeface="맑은 고딕" pitchFamily="34" charset="-120"/>
-                        </a:rPr>
-                        <a:t>5배수</a:t>
-                      </a:r>
-                      <a:endParaRPr lang="en-US" sz="1200" dirty="0">
-                        <a:latin typeface="맑은 고딕" charset="0"/>
-                        <a:ea typeface="맑은 고딕" charset="0"/>
-                        <a:cs typeface="맑은 고딕" charset="0"/>
-                      </a:endParaRPr>
-                    </a:p>
-                    <a:p>
-                      <a:pPr eaLnBrk="0" latinLnBrk="0" algn="ctr" indent="0" marL="0">
-                        <a:buNone/>
-                      </a:pPr>
-                      <a:r>
-                        <a:rPr lang="en-US" sz="1200" b="1" dirty="0">
-                          <a:solidFill>
-                            <a:srgbClr val="000000"/>
-                          </a:solidFill>
-                          <a:latin typeface="맑은 고딕" pitchFamily="34" charset="0"/>
-                          <a:ea typeface="맑은 고딕" pitchFamily="34" charset="-122"/>
-                          <a:cs typeface="맑은 고딕" pitchFamily="34" charset="-120"/>
-                        </a:rPr>
-                        <a:t>내외</a:t>
-                      </a:r>
-                      <a:endParaRPr lang="en-US" sz="1200" dirty="0">
-                        <a:latin typeface="맑은 고딕" charset="0"/>
-                        <a:ea typeface="맑은 고딕" charset="0"/>
-                        <a:cs typeface="맑은 고딕" charset="0"/>
-                      </a:endParaRPr>
-                    </a:p>
-                  </a:txBody>
-                  <a:tcPr marL="38100" marR="38100" marT="38100" marB="38100" anchor="ctr">
-                    <a:lnL w="12700" cap="flat" cmpd="sng" algn="ctr">
-                      <a:solidFill>
-                        <a:srgbClr val="000000"/>
-                      </a:solidFill>
-                      <a:prstDash val="solid"/>
-                      <a:round/>
-                      <a:headEnd type="none" w="med" len="med"/>
-                      <a:tailEnd type="none" w="med" len="med"/>
-                    </a:lnL>
-                    <a:lnR w="12700" cap="flat" cmpd="sng" algn="ctr">
-                      <a:solidFill>
-                        <a:srgbClr val="000000"/>
-                      </a:solidFill>
-                      <a:prstDash val="solid"/>
-                      <a:round/>
-                      <a:headEnd type="none" w="med" len="med"/>
-                      <a:tailEnd type="none" w="med" len="med"/>
-                    </a:lnR>
-                    <a:lnT w="12700" cap="flat" cmpd="sng" algn="ctr">
-                      <a:solidFill>
-                        <a:srgbClr val="000000"/>
-                      </a:solidFill>
-                      <a:prstDash val="solid"/>
-                      <a:round/>
-                      <a:headEnd type="none" w="med" len="med"/>
-                      <a:tailEnd type="none" w="med" len="med"/>
-                    </a:lnT>
-                    <a:lnB w="12700" cap="flat" cmpd="sng" algn="ctr">
-                      <a:solidFill>
-                        <a:srgbClr val="000000"/>
-                      </a:solidFill>
-                      <a:prstDash val="solid"/>
-                      <a:round/>
-                      <a:headEnd type="none" w="med" len="med"/>
-                      <a:tailEnd type="none" w="med" len="med"/>
-                    </a:lnB>
-                    <a:solidFill>
-                      <a:srgbClr val="D9F6FF"/>
-                    </a:solidFill>
-                  </a:tcPr>
-                </a:tc>
-              </a:tr>
-              <a:tr h="329184">
-                <a:tc>
-                  <a:txBody>
-                    <a:bodyPr/>
-                    <a:lstStyle/>
-                    <a:p>
-                      <a:pPr eaLnBrk="0" latinLnBrk="0" algn="l" indent="0" marL="0">
-                        <a:buNone/>
-                      </a:pPr>
-                      <a:r>
-                        <a:rPr lang="en-US" sz="1050" dirty="0">
-                          <a:solidFill>
-                            <a:srgbClr val="000000"/>
-                          </a:solidFill>
-                          <a:latin typeface="맑은 고딕" pitchFamily="34" charset="0"/>
-                          <a:ea typeface="맑은 고딕" pitchFamily="34" charset="-122"/>
-                          <a:cs typeface="맑은 고딕" pitchFamily="34" charset="-120"/>
-                        </a:rPr>
-                        <a:t>지원동기 및 직업관</a:t>
-                      </a:r>
-                      <a:endParaRPr lang="en-US" sz="1050" dirty="0">
-                        <a:latin typeface="맑은 고딕" charset="0"/>
-                        <a:ea typeface="맑은 고딕" charset="0"/>
-                        <a:cs typeface="맑은 고딕" charset="0"/>
-                      </a:endParaRPr>
-                    </a:p>
-                  </a:txBody>
-                  <a:tcPr marL="38100" marR="38100" marT="38100" marB="38100" anchor="ctr">
-                    <a:lnL w="12700" cap="flat" cmpd="sng" algn="ctr">
-                      <a:solidFill>
-                        <a:srgbClr val="000000"/>
-                      </a:solidFill>
-                      <a:prstDash val="solid"/>
-                      <a:round/>
-                      <a:headEnd type="none" w="med" len="med"/>
-                      <a:tailEnd type="none" w="med" len="med"/>
-                    </a:lnL>
-                    <a:lnR w="12700" cap="flat" cmpd="sng" algn="ctr">
-                      <a:solidFill>
-                        <a:srgbClr val="000000"/>
-                      </a:solidFill>
-                      <a:prstDash val="solid"/>
-                      <a:round/>
-                      <a:headEnd type="none" w="med" len="med"/>
-                      <a:tailEnd type="none" w="med" len="med"/>
-                    </a:lnR>
-                    <a:lnT w="12700" cap="flat" cmpd="sng" algn="ctr">
-                      <a:solidFill>
-                        <a:srgbClr val="000000"/>
-                      </a:solidFill>
-                      <a:prstDash val="solid"/>
-                      <a:round/>
-                      <a:headEnd type="none" w="med" len="med"/>
-                      <a:tailEnd type="none" w="med" len="med"/>
-                    </a:lnT>
-                    <a:lnB w="12700" cap="flat" cmpd="sng" algn="ctr">
-                      <a:solidFill>
-                        <a:srgbClr val="000000"/>
-                      </a:solidFill>
-                      <a:prstDash val="solid"/>
-                      <a:round/>
-                      <a:headEnd type="none" w="med" len="med"/>
-                      <a:tailEnd type="none" w="med" len="med"/>
-                    </a:lnB>
-                  </a:tcPr>
-                </a:tc>
-                <a:tc>
-                  <a:txBody>
-                    <a:bodyPr/>
-                    <a:lstStyle/>
-                    <a:p>
-                      <a:pPr eaLnBrk="0" latinLnBrk="0" algn="ctr" indent="0" marL="0">
-                        <a:buNone/>
-                      </a:pPr>
-                      <a:r>
-                        <a:rPr lang="en-US" sz="1050" dirty="0">
-                          <a:solidFill>
-                            <a:srgbClr val="000000"/>
-                          </a:solidFill>
-                          <a:latin typeface="맑은 고딕" pitchFamily="34" charset="0"/>
-                          <a:ea typeface="맑은 고딕" pitchFamily="34" charset="-122"/>
-                          <a:cs typeface="맑은 고딕" pitchFamily="34" charset="-120"/>
-                        </a:rPr>
-                        <a:t>8점</a:t>
-                      </a:r>
-                      <a:endParaRPr lang="en-US" sz="1050" dirty="0">
-                        <a:latin typeface="맑은 고딕" charset="0"/>
-                        <a:ea typeface="맑은 고딕" charset="0"/>
-                        <a:cs typeface="맑은 고딕" charset="0"/>
-                      </a:endParaRPr>
-                    </a:p>
-                  </a:txBody>
-                  <a:tcPr marL="38100" marR="38100" marT="38100" marB="38100" anchor="ctr">
-                    <a:lnL w="12700" cap="flat" cmpd="sng" algn="ctr">
-                      <a:solidFill>
-                        <a:srgbClr val="000000"/>
-                      </a:solidFill>
-                      <a:prstDash val="solid"/>
-                      <a:round/>
-                      <a:headEnd type="none" w="med" len="med"/>
-                      <a:tailEnd type="none" w="med" len="med"/>
-                    </a:lnL>
-                    <a:lnR w="12700" cap="flat" cmpd="sng" algn="ctr">
-                      <a:solidFill>
-                        <a:srgbClr val="000000"/>
-                      </a:solidFill>
-                      <a:prstDash val="solid"/>
-                      <a:round/>
-                      <a:headEnd type="none" w="med" len="med"/>
-                      <a:tailEnd type="none" w="med" len="med"/>
-                    </a:lnR>
-                    <a:lnT w="12700" cap="flat" cmpd="sng" algn="ctr">
-                      <a:solidFill>
-                        <a:srgbClr val="000000"/>
-                      </a:solidFill>
-                      <a:prstDash val="solid"/>
-                      <a:round/>
-                      <a:headEnd type="none" w="med" len="med"/>
-                      <a:tailEnd type="none" w="med" len="med"/>
-                    </a:lnT>
-                    <a:lnB w="12700" cap="flat" cmpd="sng" algn="ctr">
-                      <a:solidFill>
-                        <a:srgbClr val="000000"/>
-                      </a:solidFill>
-                      <a:prstDash val="solid"/>
-                      <a:round/>
-                      <a:headEnd type="none" w="med" len="med"/>
-                      <a:tailEnd type="none" w="med" len="med"/>
-                    </a:lnB>
-                  </a:tcPr>
-                </a:tc>
-                <a:tc vMerge="1">
-                  <a:tcPr/>
-                </a:tc>
-              </a:tr>
-              <a:tr h="329184">
-                <a:tc>
-                  <a:txBody>
-                    <a:bodyPr/>
-                    <a:lstStyle/>
-                    <a:p>
-                      <a:pPr eaLnBrk="0" latinLnBrk="0" algn="l" indent="0" marL="0">
-                        <a:buNone/>
-                      </a:pPr>
-                      <a:r>
-                        <a:rPr lang="en-US" sz="1050" dirty="0">
-                          <a:solidFill>
-                            <a:srgbClr val="000000"/>
-                          </a:solidFill>
-                          <a:latin typeface="맑은 고딕" pitchFamily="34" charset="0"/>
-                          <a:ea typeface="맑은 고딕" pitchFamily="34" charset="-122"/>
-                          <a:cs typeface="맑은 고딕" pitchFamily="34" charset="-120"/>
-                        </a:rPr>
-                        <a:t>성장과정 및 활동경험</a:t>
-                      </a:r>
-                      <a:endParaRPr lang="en-US" sz="1050" dirty="0">
-                        <a:latin typeface="맑은 고딕" charset="0"/>
-                        <a:ea typeface="맑은 고딕" charset="0"/>
-                        <a:cs typeface="맑은 고딕" charset="0"/>
-                      </a:endParaRPr>
-                    </a:p>
-                  </a:txBody>
-                  <a:tcPr marL="38100" marR="38100" marT="38100" marB="38100" anchor="ctr">
-                    <a:lnL w="12700" cap="flat" cmpd="sng" algn="ctr">
-                      <a:solidFill>
-                        <a:srgbClr val="000000"/>
-                      </a:solidFill>
-                      <a:prstDash val="solid"/>
-                      <a:round/>
-                      <a:headEnd type="none" w="med" len="med"/>
-                      <a:tailEnd type="none" w="med" len="med"/>
-                    </a:lnL>
-                    <a:lnR w="12700" cap="flat" cmpd="sng" algn="ctr">
-                      <a:solidFill>
-                        <a:srgbClr val="000000"/>
-                      </a:solidFill>
-                      <a:prstDash val="solid"/>
-                      <a:round/>
-                      <a:headEnd type="none" w="med" len="med"/>
-                      <a:tailEnd type="none" w="med" len="med"/>
-                    </a:lnR>
-                    <a:lnT w="12700" cap="flat" cmpd="sng" algn="ctr">
-                      <a:solidFill>
-                        <a:srgbClr val="000000"/>
-                      </a:solidFill>
-                      <a:prstDash val="solid"/>
-                      <a:round/>
-                      <a:headEnd type="none" w="med" len="med"/>
-                      <a:tailEnd type="none" w="med" len="med"/>
-                    </a:lnT>
-                    <a:lnB w="12700" cap="flat" cmpd="sng" algn="ctr">
-                      <a:solidFill>
-                        <a:srgbClr val="000000"/>
-                      </a:solidFill>
-                      <a:prstDash val="solid"/>
-                      <a:round/>
-                      <a:headEnd type="none" w="med" len="med"/>
-                      <a:tailEnd type="none" w="med" len="med"/>
-                    </a:lnB>
-                  </a:tcPr>
-                </a:tc>
-                <a:tc>
-                  <a:txBody>
-                    <a:bodyPr/>
-                    <a:lstStyle/>
-                    <a:p>
-                      <a:pPr eaLnBrk="0" latinLnBrk="0" algn="ctr" indent="0" marL="0">
-                        <a:buNone/>
-                      </a:pPr>
-                      <a:r>
-                        <a:rPr lang="en-US" sz="1050" dirty="0">
-                          <a:solidFill>
-                            <a:srgbClr val="000000"/>
-                          </a:solidFill>
-                          <a:latin typeface="맑은 고딕" pitchFamily="34" charset="0"/>
-                          <a:ea typeface="맑은 고딕" pitchFamily="34" charset="-122"/>
-                          <a:cs typeface="맑은 고딕" pitchFamily="34" charset="-120"/>
-                        </a:rPr>
-                        <a:t>6점</a:t>
-                      </a:r>
-                      <a:endParaRPr lang="en-US" sz="1050" dirty="0">
-                        <a:latin typeface="맑은 고딕" charset="0"/>
-                        <a:ea typeface="맑은 고딕" charset="0"/>
-                        <a:cs typeface="맑은 고딕" charset="0"/>
-                      </a:endParaRPr>
-                    </a:p>
-                  </a:txBody>
-                  <a:tcPr marL="38100" marR="38100" marT="38100" marB="38100" anchor="ctr">
-                    <a:lnL w="12700" cap="flat" cmpd="sng" algn="ctr">
-                      <a:solidFill>
-                        <a:srgbClr val="000000"/>
-                      </a:solidFill>
-                      <a:prstDash val="solid"/>
-                      <a:round/>
-                      <a:headEnd type="none" w="med" len="med"/>
-                      <a:tailEnd type="none" w="med" len="med"/>
-                    </a:lnL>
-                    <a:lnR w="12700" cap="flat" cmpd="sng" algn="ctr">
-                      <a:solidFill>
-                        <a:srgbClr val="000000"/>
-                      </a:solidFill>
-                      <a:prstDash val="solid"/>
-                      <a:round/>
-                      <a:headEnd type="none" w="med" len="med"/>
-                      <a:tailEnd type="none" w="med" len="med"/>
-                    </a:lnR>
-                    <a:lnT w="12700" cap="flat" cmpd="sng" algn="ctr">
-                      <a:solidFill>
-                        <a:srgbClr val="000000"/>
-                      </a:solidFill>
-                      <a:prstDash val="solid"/>
-                      <a:round/>
-                      <a:headEnd type="none" w="med" len="med"/>
-                      <a:tailEnd type="none" w="med" len="med"/>
-                    </a:lnT>
-                    <a:lnB w="12700" cap="flat" cmpd="sng" algn="ctr">
-                      <a:solidFill>
-                        <a:srgbClr val="000000"/>
-                      </a:solidFill>
-                      <a:prstDash val="solid"/>
-                      <a:round/>
-                      <a:headEnd type="none" w="med" len="med"/>
-                      <a:tailEnd type="none" w="med" len="med"/>
-                    </a:lnB>
-                  </a:tcPr>
-                </a:tc>
-                <a:tc vMerge="1">
-                  <a:tcPr/>
-                </a:tc>
-              </a:tr>
-              <a:tr h="329184">
-                <a:tc>
-                  <a:txBody>
-                    <a:bodyPr/>
-                    <a:lstStyle/>
-                    <a:p>
-                      <a:pPr eaLnBrk="0" latinLnBrk="0" algn="l" indent="0" marL="0">
-                        <a:buNone/>
-                      </a:pPr>
-                      <a:r>
-                        <a:rPr lang="en-US" sz="1050" dirty="0">
-                          <a:solidFill>
-                            <a:srgbClr val="000000"/>
-                          </a:solidFill>
-                          <a:latin typeface="맑은 고딕" pitchFamily="34" charset="0"/>
-                          <a:ea typeface="맑은 고딕" pitchFamily="34" charset="-122"/>
-                          <a:cs typeface="맑은 고딕" pitchFamily="34" charset="-120"/>
-                        </a:rPr>
-                        <a:t>표현력</a:t>
-                      </a:r>
-                      <a:endParaRPr lang="en-US" sz="1050" dirty="0">
-                        <a:latin typeface="맑은 고딕" charset="0"/>
-                        <a:ea typeface="맑은 고딕" charset="0"/>
-                        <a:cs typeface="맑은 고딕" charset="0"/>
-                      </a:endParaRPr>
-                    </a:p>
-                  </a:txBody>
-                  <a:tcPr marL="38100" marR="38100" marT="38100" marB="38100" anchor="ctr">
-                    <a:lnL w="12700" cap="flat" cmpd="sng" algn="ctr">
-                      <a:solidFill>
-                        <a:srgbClr val="000000"/>
-                      </a:solidFill>
-                      <a:prstDash val="solid"/>
-                      <a:round/>
-                      <a:headEnd type="none" w="med" len="med"/>
-                      <a:tailEnd type="none" w="med" len="med"/>
-                    </a:lnL>
-                    <a:lnR w="12700" cap="flat" cmpd="sng" algn="ctr">
-                      <a:solidFill>
-                        <a:srgbClr val="000000"/>
-                      </a:solidFill>
-                      <a:prstDash val="solid"/>
-                      <a:round/>
-                      <a:headEnd type="none" w="med" len="med"/>
-                      <a:tailEnd type="none" w="med" len="med"/>
-                    </a:lnR>
-                    <a:lnT w="12700" cap="flat" cmpd="sng" algn="ctr">
-                      <a:solidFill>
-                        <a:srgbClr val="000000"/>
-                      </a:solidFill>
-                      <a:prstDash val="solid"/>
-                      <a:round/>
-                      <a:headEnd type="none" w="med" len="med"/>
-                      <a:tailEnd type="none" w="med" len="med"/>
-                    </a:lnT>
-                    <a:lnB w="12700" cap="flat" cmpd="sng" algn="ctr">
-                      <a:solidFill>
-                        <a:srgbClr val="000000"/>
-                      </a:solidFill>
-                      <a:prstDash val="solid"/>
-                      <a:round/>
-                      <a:headEnd type="none" w="med" len="med"/>
-                      <a:tailEnd type="none" w="med" len="med"/>
-                    </a:lnB>
-                  </a:tcPr>
-                </a:tc>
-                <a:tc>
-                  <a:txBody>
-                    <a:bodyPr/>
-                    <a:lstStyle/>
-                    <a:p>
-                      <a:pPr eaLnBrk="0" latinLnBrk="0" algn="ctr" indent="0" marL="0">
-                        <a:buNone/>
-                      </a:pPr>
-                      <a:r>
-                        <a:rPr lang="en-US" sz="1050" dirty="0">
-                          <a:solidFill>
-                            <a:srgbClr val="000000"/>
-                          </a:solidFill>
-                          <a:latin typeface="맑은 고딕" pitchFamily="34" charset="0"/>
-                          <a:ea typeface="맑은 고딕" pitchFamily="34" charset="-122"/>
-                          <a:cs typeface="맑은 고딕" pitchFamily="34" charset="-120"/>
-                        </a:rPr>
-                        <a:t>6점</a:t>
-                      </a:r>
-                      <a:endParaRPr lang="en-US" sz="1050" dirty="0">
-                        <a:latin typeface="맑은 고딕" charset="0"/>
-                        <a:ea typeface="맑은 고딕" charset="0"/>
-                        <a:cs typeface="맑은 고딕" charset="0"/>
-                      </a:endParaRPr>
-                    </a:p>
-                  </a:txBody>
-                  <a:tcPr marL="38100" marR="38100" marT="38100" marB="38100" anchor="ctr">
-                    <a:lnL w="12700" cap="flat" cmpd="sng" algn="ctr">
-                      <a:solidFill>
-                        <a:srgbClr val="000000"/>
-                      </a:solidFill>
-                      <a:prstDash val="solid"/>
-                      <a:round/>
-                      <a:headEnd type="none" w="med" len="med"/>
-                      <a:tailEnd type="none" w="med" len="med"/>
-                    </a:lnL>
-                    <a:lnR w="12700" cap="flat" cmpd="sng" algn="ctr">
-                      <a:solidFill>
-                        <a:srgbClr val="000000"/>
-                      </a:solidFill>
-                      <a:prstDash val="solid"/>
-                      <a:round/>
-                      <a:headEnd type="none" w="med" len="med"/>
-                      <a:tailEnd type="none" w="med" len="med"/>
-                    </a:lnR>
-                    <a:lnT w="12700" cap="flat" cmpd="sng" algn="ctr">
-                      <a:solidFill>
-                        <a:srgbClr val="000000"/>
-                      </a:solidFill>
-                      <a:prstDash val="solid"/>
-                      <a:round/>
-                      <a:headEnd type="none" w="med" len="med"/>
-                      <a:tailEnd type="none" w="med" len="med"/>
-                    </a:lnT>
-                    <a:lnB w="12700" cap="flat" cmpd="sng" algn="ctr">
-                      <a:solidFill>
-                        <a:srgbClr val="000000"/>
-                      </a:solidFill>
-                      <a:prstDash val="solid"/>
-                      <a:round/>
-                      <a:headEnd type="none" w="med" len="med"/>
-                      <a:tailEnd type="none" w="med" len="med"/>
-                    </a:lnB>
-                  </a:tcPr>
-                </a:tc>
-                <a:tc vMerge="1">
-                  <a:tcPr/>
-                </a:tc>
-              </a:tr>
-              <a:tr h="365760">
-                <a:tc>
-                  <a:txBody>
-                    <a:bodyPr/>
-                    <a:lstStyle/>
-                    <a:p>
-                      <a:pPr eaLnBrk="0" latinLnBrk="0" algn="l" indent="0" marL="0">
-                        <a:buNone/>
-                      </a:pPr>
-                      <a:r>
-                        <a:rPr lang="en-US" sz="1050" b="1" dirty="0">
-                          <a:solidFill>
-                            <a:srgbClr val="000000"/>
-                          </a:solidFill>
-                          <a:latin typeface="맑은 고딕" pitchFamily="34" charset="0"/>
-                          <a:ea typeface="맑은 고딕" pitchFamily="34" charset="-122"/>
-                          <a:cs typeface="맑은 고딕" pitchFamily="34" charset="-120"/>
-                        </a:rPr>
-                        <a:t>합계</a:t>
-                      </a:r>
-                      <a:endParaRPr lang="en-US" sz="1050" dirty="0">
-                        <a:latin typeface="맑은 고딕" charset="0"/>
-                        <a:ea typeface="맑은 고딕" charset="0"/>
-                        <a:cs typeface="맑은 고딕" charset="0"/>
-                      </a:endParaRPr>
-                    </a:p>
-                  </a:txBody>
-                  <a:tcPr marL="38100" marR="38100" marT="38100" marB="38100" anchor="ctr">
-                    <a:lnL w="12700" cap="flat" cmpd="sng" algn="ctr">
-                      <a:solidFill>
-                        <a:srgbClr val="000000"/>
-                      </a:solidFill>
-                      <a:prstDash val="solid"/>
-                      <a:round/>
-                      <a:headEnd type="none" w="med" len="med"/>
-                      <a:tailEnd type="none" w="med" len="med"/>
-                    </a:lnL>
-                    <a:lnR w="12700" cap="flat" cmpd="sng" algn="ctr">
-                      <a:solidFill>
-                        <a:srgbClr val="000000"/>
-                      </a:solidFill>
-                      <a:prstDash val="solid"/>
-                      <a:round/>
-                      <a:headEnd type="none" w="med" len="med"/>
-                      <a:tailEnd type="none" w="med" len="med"/>
-                    </a:lnR>
-                    <a:lnT w="12700" cap="flat" cmpd="sng" algn="ctr">
-                      <a:solidFill>
-                        <a:srgbClr val="000000"/>
-                      </a:solidFill>
-                      <a:prstDash val="solid"/>
-                      <a:round/>
-                      <a:headEnd type="none" w="med" len="med"/>
-                      <a:tailEnd type="none" w="med" len="med"/>
-                    </a:lnT>
-                    <a:lnB w="12700" cap="flat" cmpd="sng" algn="ctr">
-                      <a:solidFill>
-                        <a:srgbClr val="000000"/>
-                      </a:solidFill>
-                      <a:prstDash val="solid"/>
-                      <a:round/>
-                      <a:headEnd type="none" w="med" len="med"/>
-                      <a:tailEnd type="none" w="med" len="med"/>
-                    </a:lnB>
-                    <a:solidFill>
-                      <a:srgbClr val="D9F6FF"/>
-                    </a:solidFill>
-                  </a:tcPr>
-                </a:tc>
-                <a:tc>
-                  <a:txBody>
-                    <a:bodyPr/>
-                    <a:lstStyle/>
-                    <a:p>
-                      <a:pPr eaLnBrk="0" latinLnBrk="0" algn="ctr" indent="0" marL="0">
-                        <a:buNone/>
-                      </a:pPr>
-                      <a:r>
-                        <a:rPr lang="en-US" sz="1100" b="1" dirty="0">
-                          <a:solidFill>
-                            <a:srgbClr val="000000"/>
-                          </a:solidFill>
-                          <a:latin typeface="맑은 고딕" pitchFamily="34" charset="0"/>
-                          <a:ea typeface="맑은 고딕" pitchFamily="34" charset="-122"/>
-                          <a:cs typeface="맑은 고딕" pitchFamily="34" charset="-120"/>
-                        </a:rPr>
-                        <a:t>30점</a:t>
-                      </a:r>
-                      <a:endParaRPr lang="en-US" sz="1100" dirty="0">
-                        <a:latin typeface="맑은 고딕" charset="0"/>
-                        <a:ea typeface="맑은 고딕" charset="0"/>
-                        <a:cs typeface="맑은 고딕" charset="0"/>
-                      </a:endParaRPr>
-                    </a:p>
-                  </a:txBody>
-                  <a:tcPr marL="38100" marR="38100" marT="38100" marB="38100" anchor="ctr">
-                    <a:lnL w="12700" cap="flat" cmpd="sng" algn="ctr">
-                      <a:solidFill>
-                        <a:srgbClr val="000000"/>
-                      </a:solidFill>
-                      <a:prstDash val="solid"/>
-                      <a:round/>
-                      <a:headEnd type="none" w="med" len="med"/>
-                      <a:tailEnd type="none" w="med" len="med"/>
-                    </a:lnL>
-                    <a:lnR w="12700" cap="flat" cmpd="sng" algn="ctr">
-                      <a:solidFill>
-                        <a:srgbClr val="000000"/>
-                      </a:solidFill>
-                      <a:prstDash val="solid"/>
-                      <a:round/>
-                      <a:headEnd type="none" w="med" len="med"/>
-                      <a:tailEnd type="none" w="med" len="med"/>
-                    </a:lnR>
-                    <a:lnT w="12700" cap="flat" cmpd="sng" algn="ctr">
-                      <a:solidFill>
-                        <a:srgbClr val="000000"/>
-                      </a:solidFill>
-                      <a:prstDash val="solid"/>
-                      <a:round/>
-                      <a:headEnd type="none" w="med" len="med"/>
-                      <a:tailEnd type="none" w="med" len="med"/>
-                    </a:lnT>
-                    <a:lnB w="12700" cap="flat" cmpd="sng" algn="ctr">
-                      <a:solidFill>
-                        <a:srgbClr val="000000"/>
-                      </a:solidFill>
-                      <a:prstDash val="solid"/>
-                      <a:round/>
-                      <a:headEnd type="none" w="med" len="med"/>
-                      <a:tailEnd type="none" w="med" len="med"/>
-                    </a:lnB>
-                    <a:solidFill>
-                      <a:srgbClr val="D9F6FF"/>
-                    </a:solidFill>
-                  </a:tcPr>
-                </a:tc>
-                <a:tc vMerge="1">
-                  <a:tcPr/>
-                </a:tc>
-              </a:tr>
-            </a:tbl>
-          </a:graphicData>
-        </a:graphic>
-      </p:graphicFrame>
-      <p:sp>
-        <p:nvSpPr>
-          <p:cNvPr id="14" name="Text 11"/>
-          <p:cNvSpPr txBox="1"/>
-          <p:nvPr/>
-        </p:nvSpPr>
-        <p:spPr>
-          <a:xfrm>
-            <a:off x="457200" y="4626864"/>
-            <a:ext cx="8229600" cy="274320"/>
-          </a:xfrm>
-          <a:prstGeom prst="rect">
-            <a:avLst/>
-          </a:prstGeom>
-          <a:noFill/>
-          <a:ln/>
-        </p:spPr>
-        <p:txBody>
-          <a:bodyPr wrap="square" lIns="0" tIns="0" rIns="0" bIns="0" rtlCol="0" anchor="ctr"/>
-          <a:lstStyle/>
-          <a:p>
-            <a:pPr eaLnBrk="0" latinLnBrk="0" indent="0" marL="0">
-              <a:buNone/>
-            </a:pPr>
-            <a:r>
-              <a:rPr lang="en-US" sz="1400" dirty="0">
-                <a:solidFill>
-                  <a:srgbClr val="000000"/>
-                </a:solidFill>
-                <a:latin typeface="HY동녘B" pitchFamily="34" charset="0"/>
-                <a:ea typeface="HY동녘B" pitchFamily="34" charset="-122"/>
-                <a:cs typeface="HY동녘B" pitchFamily="34" charset="-120"/>
-              </a:rPr>
-              <a:t>■ 자기소개서 불성실 작성자 탈락 기준</a:t>
-            </a:r>
-            <a:endParaRPr lang="en-US" sz="1400" dirty="0"/>
-          </a:p>
-        </p:txBody>
-      </p:sp>
-      <p:sp>
-        <p:nvSpPr>
-          <p:cNvPr id="15" name="Text 12"/>
-          <p:cNvSpPr txBox="1"/>
-          <p:nvPr/>
-        </p:nvSpPr>
-        <p:spPr>
-          <a:xfrm>
-            <a:off x="932688" y="4974336"/>
-            <a:ext cx="182880" cy="219456"/>
-          </a:xfrm>
-          <a:prstGeom prst="rect">
-            <a:avLst/>
-          </a:prstGeom>
-          <a:noFill/>
-          <a:ln/>
-        </p:spPr>
-        <p:txBody>
-          <a:bodyPr wrap="square" lIns="0" tIns="0" rIns="0" bIns="0" rtlCol="0" anchor="t"/>
-          <a:lstStyle/>
-          <a:p>
-            <a:pPr eaLnBrk="0" latinLnBrk="0" indent="0" marL="0">
-              <a:buNone/>
-            </a:pPr>
-            <a:r>
-              <a:rPr lang="en-US" sz="1100" dirty="0">
-                <a:solidFill>
-                  <a:srgbClr val="000000"/>
-                </a:solidFill>
-                <a:latin typeface="맑은 고딕" pitchFamily="34" charset="0"/>
-                <a:ea typeface="맑은 고딕" pitchFamily="34" charset="-122"/>
-                <a:cs typeface="맑은 고딕" pitchFamily="34" charset="-120"/>
-              </a:rPr>
-              <a:t>-</a:t>
-            </a:r>
-            <a:endParaRPr lang="en-US" sz="1100" dirty="0"/>
-          </a:p>
-        </p:txBody>
-      </p:sp>
-      <p:sp>
-        <p:nvSpPr>
-          <p:cNvPr id="16" name="Text 13"/>
-          <p:cNvSpPr txBox="1"/>
-          <p:nvPr/>
-        </p:nvSpPr>
-        <p:spPr>
-          <a:xfrm>
-            <a:off x="1133856" y="4974336"/>
-            <a:ext cx="7461504" cy="237744"/>
-          </a:xfrm>
-          <a:prstGeom prst="rect">
-            <a:avLst/>
-          </a:prstGeom>
-          <a:noFill/>
-          <a:ln/>
-        </p:spPr>
-        <p:txBody>
-          <a:bodyPr wrap="square" lIns="0" tIns="0" rIns="0" bIns="0" rtlCol="0" anchor="t"/>
-          <a:lstStyle/>
-          <a:p>
-            <a:pPr eaLnBrk="0" latinLnBrk="0" indent="0" marL="0">
-              <a:lnSpc>
-                <a:spcPts val="1800"/>
-              </a:lnSpc>
-              <a:buNone/>
-            </a:pPr>
-            <a:r>
-              <a:rPr lang="en-US" sz="1100" dirty="0">
-                <a:solidFill>
-                  <a:srgbClr val="000000"/>
-                </a:solidFill>
-                <a:latin typeface="맑은 고딕" pitchFamily="34" charset="0"/>
-                <a:ea typeface="맑은 고딕" pitchFamily="34" charset="-122"/>
-                <a:cs typeface="맑은 고딕" pitchFamily="34" charset="-120"/>
-              </a:rPr>
-              <a:t>문항과 전혀 무관한 내용을 작성</a:t>
-            </a:r>
-            <a:endParaRPr lang="en-US" sz="1100" dirty="0"/>
-          </a:p>
-        </p:txBody>
-      </p:sp>
-      <p:sp>
-        <p:nvSpPr>
-          <p:cNvPr id="17" name="Text 14"/>
-          <p:cNvSpPr txBox="1"/>
-          <p:nvPr/>
-        </p:nvSpPr>
-        <p:spPr>
-          <a:xfrm>
-            <a:off x="932688" y="5248656"/>
-            <a:ext cx="182880" cy="219456"/>
-          </a:xfrm>
-          <a:prstGeom prst="rect">
-            <a:avLst/>
-          </a:prstGeom>
-          <a:noFill/>
-          <a:ln/>
-        </p:spPr>
-        <p:txBody>
-          <a:bodyPr wrap="square" lIns="0" tIns="0" rIns="0" bIns="0" rtlCol="0" anchor="t"/>
-          <a:lstStyle/>
-          <a:p>
-            <a:pPr eaLnBrk="0" latinLnBrk="0" indent="0" marL="0">
-              <a:buNone/>
-            </a:pPr>
-            <a:r>
-              <a:rPr lang="en-US" sz="1100" dirty="0">
-                <a:solidFill>
-                  <a:srgbClr val="000000"/>
-                </a:solidFill>
-                <a:latin typeface="맑은 고딕" pitchFamily="34" charset="0"/>
-                <a:ea typeface="맑은 고딕" pitchFamily="34" charset="-122"/>
-                <a:cs typeface="맑은 고딕" pitchFamily="34" charset="-120"/>
-              </a:rPr>
-              <a:t>-</a:t>
-            </a:r>
-            <a:endParaRPr lang="en-US" sz="1100" dirty="0"/>
-          </a:p>
-        </p:txBody>
-      </p:sp>
-      <p:sp>
-        <p:nvSpPr>
-          <p:cNvPr id="18" name="Text 15"/>
-          <p:cNvSpPr txBox="1"/>
-          <p:nvPr/>
-        </p:nvSpPr>
-        <p:spPr>
-          <a:xfrm>
-            <a:off x="1133856" y="5248656"/>
-            <a:ext cx="7461504" cy="237744"/>
-          </a:xfrm>
-          <a:prstGeom prst="rect">
-            <a:avLst/>
-          </a:prstGeom>
-          <a:noFill/>
-          <a:ln/>
-        </p:spPr>
-        <p:txBody>
-          <a:bodyPr wrap="square" lIns="0" tIns="0" rIns="0" bIns="0" rtlCol="0" anchor="t"/>
-          <a:lstStyle/>
-          <a:p>
-            <a:pPr eaLnBrk="0" latinLnBrk="0" indent="0" marL="0">
-              <a:lnSpc>
-                <a:spcPts val="1800"/>
-              </a:lnSpc>
-              <a:buNone/>
-            </a:pPr>
-            <a:r>
-              <a:rPr lang="en-US" sz="1100" dirty="0">
-                <a:solidFill>
-                  <a:srgbClr val="000000"/>
-                </a:solidFill>
-                <a:latin typeface="맑은 고딕" pitchFamily="34" charset="0"/>
-                <a:ea typeface="맑은 고딕" pitchFamily="34" charset="-122"/>
-                <a:cs typeface="맑은 고딕" pitchFamily="34" charset="-120"/>
-              </a:rPr>
-              <a:t>동일 내용 반복 또는 문항별 50% 미만(약 400자) 작성한 경우</a:t>
-            </a:r>
-            <a:endParaRPr lang="en-US" sz="1100" dirty="0"/>
-          </a:p>
-        </p:txBody>
-      </p:sp>
-      <p:sp>
-        <p:nvSpPr>
-          <p:cNvPr id="19" name="Text 16"/>
-          <p:cNvSpPr txBox="1"/>
-          <p:nvPr/>
-        </p:nvSpPr>
-        <p:spPr>
-          <a:xfrm>
-            <a:off x="932688" y="5522976"/>
-            <a:ext cx="182880" cy="219456"/>
-          </a:xfrm>
-          <a:prstGeom prst="rect">
-            <a:avLst/>
-          </a:prstGeom>
-          <a:noFill/>
-          <a:ln/>
-        </p:spPr>
-        <p:txBody>
-          <a:bodyPr wrap="square" lIns="0" tIns="0" rIns="0" bIns="0" rtlCol="0" anchor="t"/>
-          <a:lstStyle/>
-          <a:p>
-            <a:pPr eaLnBrk="0" latinLnBrk="0" indent="0" marL="0">
-              <a:buNone/>
-            </a:pPr>
-            <a:r>
-              <a:rPr lang="en-US" sz="1100" dirty="0">
-                <a:solidFill>
-                  <a:srgbClr val="000000"/>
-                </a:solidFill>
-                <a:latin typeface="맑은 고딕" pitchFamily="34" charset="0"/>
-                <a:ea typeface="맑은 고딕" pitchFamily="34" charset="-122"/>
-                <a:cs typeface="맑은 고딕" pitchFamily="34" charset="-120"/>
-              </a:rPr>
-              <a:t>-</a:t>
-            </a:r>
-            <a:endParaRPr lang="en-US" sz="1100" dirty="0"/>
-          </a:p>
-        </p:txBody>
-      </p:sp>
-      <p:sp>
-        <p:nvSpPr>
-          <p:cNvPr id="20" name="Text 17"/>
-          <p:cNvSpPr txBox="1"/>
-          <p:nvPr/>
-        </p:nvSpPr>
-        <p:spPr>
-          <a:xfrm>
-            <a:off x="1133856" y="5522976"/>
-            <a:ext cx="7461504" cy="237744"/>
-          </a:xfrm>
-          <a:prstGeom prst="rect">
-            <a:avLst/>
-          </a:prstGeom>
-          <a:noFill/>
-          <a:ln/>
-        </p:spPr>
-        <p:txBody>
-          <a:bodyPr wrap="square" lIns="0" tIns="0" rIns="0" bIns="0" rtlCol="0" anchor="t"/>
-          <a:lstStyle/>
-          <a:p>
-            <a:pPr eaLnBrk="0" latinLnBrk="0" indent="0" marL="0">
-              <a:lnSpc>
-                <a:spcPts val="1800"/>
-              </a:lnSpc>
-              <a:buNone/>
-            </a:pPr>
-            <a:r>
-              <a:rPr lang="en-US" sz="1100" dirty="0">
-                <a:solidFill>
-                  <a:srgbClr val="000000"/>
-                </a:solidFill>
-                <a:latin typeface="맑은 고딕" pitchFamily="34" charset="0"/>
-                <a:ea typeface="맑은 고딕" pitchFamily="34" charset="-122"/>
-                <a:cs typeface="맑은 고딕" pitchFamily="34" charset="-120"/>
-              </a:rPr>
-              <a:t>채용 기관명을 오기재하여 제출한 경우 등</a:t>
-            </a:r>
-            <a:endParaRPr lang="en-US" sz="1100" dirty="0"/>
-          </a:p>
-        </p:txBody>
-      </p:sp>
-    </p:spTree>
-  </p:cSld>
-  <p:clrMapOvr>
-    <a:masterClrMapping/>
-  </p:clrMapOvr>
-</p:sld>
-</file>
-
-<file path=ppt/slides/slide8.xml><?xml version="1.0" encoding="utf-8"?>
-<p:sld xmlns:a="http://schemas.openxmlformats.org/drawingml/2006/main" xmlns:r="http://schemas.openxmlformats.org/officeDocument/2006/relationships" xmlns:p="http://schemas.openxmlformats.org/presentationml/2006/main">
-  <p:cSld name="Slide 8">
-    <p:bg>
-      <p:bgPr>
-        <a:solidFill>
-          <a:srgbClr val="FFFFFF"/>
-        </a:solidFill>
-      </p:bgPr>
-    </p:bg>
-    <p:spTree>
-      <p:nvGrpSpPr>
-        <p:cNvPr id="1" name=""/>
-        <p:cNvGrpSpPr/>
-        <p:nvPr/>
-      </p:nvGrpSpPr>
-      <p:grpSpPr>
-        <a:xfrm>
-          <a:off x="0" y="0"/>
-          <a:ext cx="0" cy="0"/>
-          <a:chOff x="0" y="0"/>
-          <a:chExt cx="0" cy="0"/>
-        </a:xfrm>
-      </p:grpSpPr>
-      <p:sp>
-        <p:nvSpPr>
-          <p:cNvPr id="2" name="Shape 0"/>
-          <p:cNvSpPr/>
-          <p:nvPr/>
-        </p:nvSpPr>
-        <p:spPr>
-          <a:xfrm>
-            <a:off x="0" y="6620256"/>
-            <a:ext cx="9144000" cy="237744"/>
-          </a:xfrm>
-          <a:prstGeom prst="rect">
-            <a:avLst/>
-          </a:prstGeom>
-          <a:solidFill>
-            <a:srgbClr val="4FADD1"/>
-          </a:solidFill>
-          <a:ln w="6350">
-            <a:solidFill>
-              <a:srgbClr val="4FADD1"/>
-            </a:solidFill>
-            <a:prstDash val="solid"/>
-          </a:ln>
-        </p:spPr>
-      </p:sp>
-      <p:sp>
-        <p:nvSpPr>
-          <p:cNvPr id="3" name="Shape 1"/>
-          <p:cNvSpPr/>
-          <p:nvPr/>
-        </p:nvSpPr>
-        <p:spPr>
-          <a:xfrm>
-            <a:off x="0" y="0"/>
-            <a:ext cx="9144000" cy="713232"/>
-          </a:xfrm>
-          <a:prstGeom prst="rect">
-            <a:avLst/>
-          </a:prstGeom>
-          <a:solidFill>
-            <a:srgbClr val="4FADD1"/>
-          </a:solidFill>
-          <a:ln w="6350">
-            <a:solidFill>
-              <a:srgbClr val="4FADD1"/>
-            </a:solidFill>
-            <a:prstDash val="solid"/>
-          </a:ln>
-        </p:spPr>
-      </p:sp>
-      <p:sp>
-        <p:nvSpPr>
-          <p:cNvPr id="4" name="Text 2"/>
-          <p:cNvSpPr txBox="1"/>
-          <p:nvPr/>
-        </p:nvSpPr>
-        <p:spPr>
-          <a:xfrm>
-            <a:off x="3657600" y="6291072"/>
-            <a:ext cx="1828800" cy="274320"/>
-          </a:xfrm>
-          <a:prstGeom prst="rect">
-            <a:avLst/>
-          </a:prstGeom>
-          <a:noFill/>
-          <a:ln/>
-        </p:spPr>
-        <p:txBody>
-          <a:bodyPr wrap="square" lIns="0" tIns="0" rIns="0" bIns="0" rtlCol="0" anchor="ctr"/>
-          <a:lstStyle/>
-          <a:p>
-            <a:pPr eaLnBrk="0" latinLnBrk="0" algn="ctr" indent="0" marL="0">
-              <a:buNone/>
-            </a:pPr>
-            <a:r>
-              <a:rPr lang="en-US" sz="1100" dirty="0">
-                <a:solidFill>
-                  <a:srgbClr val="000000"/>
-                </a:solidFill>
-                <a:latin typeface="맑은 고딕" pitchFamily="34" charset="0"/>
-                <a:ea typeface="맑은 고딕" pitchFamily="34" charset="-122"/>
-                <a:cs typeface="맑은 고딕" pitchFamily="34" charset="-120"/>
-              </a:rPr>
-              <a:t>- 7 -</a:t>
-            </a:r>
-            <a:endParaRPr lang="en-US" sz="1100" dirty="0"/>
-          </a:p>
-        </p:txBody>
-      </p:sp>
-      <p:sp>
-        <p:nvSpPr>
-          <p:cNvPr id="5" name="Text 3"/>
-          <p:cNvSpPr txBox="1"/>
-          <p:nvPr/>
-        </p:nvSpPr>
-        <p:spPr>
-          <a:xfrm>
-            <a:off x="457200" y="82296"/>
-            <a:ext cx="5120640" cy="548640"/>
-          </a:xfrm>
-          <a:prstGeom prst="rect">
-            <a:avLst/>
-          </a:prstGeom>
-          <a:noFill/>
-          <a:ln/>
-        </p:spPr>
-        <p:txBody>
-          <a:bodyPr wrap="square" lIns="0" tIns="0" rIns="0" bIns="0" rtlCol="0" anchor="ctr"/>
-          <a:lstStyle/>
-          <a:p>
-            <a:pPr eaLnBrk="0" latinLnBrk="0" indent="0" marL="0">
-              <a:buNone/>
-            </a:pPr>
-            <a:r>
-              <a:rPr lang="en-US" sz="2600" dirty="0">
-                <a:solidFill>
-                  <a:srgbClr val="FFFFFF"/>
-                </a:solidFill>
-                <a:latin typeface="HY헤드라인M" pitchFamily="34" charset="0"/>
-                <a:ea typeface="HY헤드라인M" pitchFamily="34" charset="-122"/>
-                <a:cs typeface="HY헤드라인M" pitchFamily="34" charset="-120"/>
-              </a:rPr>
-              <a:t>7. 업무적성 및 심층면접 (2차)</a:t>
-            </a:r>
-            <a:endParaRPr lang="en-US" sz="2600" dirty="0"/>
-          </a:p>
-        </p:txBody>
-      </p:sp>
-      <p:sp>
-        <p:nvSpPr>
-          <p:cNvPr id="6" name="Text 4"/>
-          <p:cNvSpPr txBox="1"/>
-          <p:nvPr/>
-        </p:nvSpPr>
-        <p:spPr>
-          <a:xfrm>
-            <a:off x="4937760" y="201168"/>
-            <a:ext cx="3749040" cy="310896"/>
-          </a:xfrm>
-          <a:prstGeom prst="rect">
-            <a:avLst/>
-          </a:prstGeom>
-          <a:noFill/>
-          <a:ln/>
-        </p:spPr>
-        <p:txBody>
-          <a:bodyPr wrap="square" lIns="0" tIns="0" rIns="0" bIns="0" rtlCol="0" anchor="ctr"/>
-          <a:lstStyle/>
-          <a:p>
-            <a:pPr eaLnBrk="0" latinLnBrk="0" algn="r" indent="0" marL="0">
-              <a:buNone/>
-            </a:pPr>
-            <a:r>
-              <a:rPr lang="en-US" sz="1150" b="1" dirty="0">
-                <a:solidFill>
-                  <a:srgbClr val="FFFFFF"/>
-                </a:solidFill>
-                <a:latin typeface="맑은 고딕" pitchFamily="34" charset="0"/>
-                <a:ea typeface="맑은 고딕" pitchFamily="34" charset="-122"/>
-                <a:cs typeface="맑은 고딕" pitchFamily="34" charset="-120"/>
-              </a:rPr>
-              <a:t>[ 전형 3단계 / 4단계 ]</a:t>
-            </a:r>
-            <a:endParaRPr lang="en-US" sz="1150" dirty="0"/>
-          </a:p>
-        </p:txBody>
-      </p:sp>
-      <p:sp>
-        <p:nvSpPr>
-          <p:cNvPr id="7" name="Text 5"/>
-          <p:cNvSpPr txBox="1"/>
-          <p:nvPr/>
-        </p:nvSpPr>
-        <p:spPr>
-          <a:xfrm>
-            <a:off x="457200" y="1042416"/>
-            <a:ext cx="8229600" cy="274320"/>
-          </a:xfrm>
-          <a:prstGeom prst="rect">
-            <a:avLst/>
-          </a:prstGeom>
-          <a:noFill/>
-          <a:ln/>
-        </p:spPr>
-        <p:txBody>
-          <a:bodyPr wrap="square" lIns="0" tIns="0" rIns="0" bIns="0" rtlCol="0" anchor="ctr"/>
-          <a:lstStyle/>
-          <a:p>
-            <a:pPr eaLnBrk="0" latinLnBrk="0" indent="0" marL="0">
-              <a:buNone/>
-            </a:pPr>
-            <a:r>
-              <a:rPr lang="en-US" sz="1400" dirty="0">
-                <a:solidFill>
-                  <a:srgbClr val="000000"/>
-                </a:solidFill>
-                <a:latin typeface="HY동녘B" pitchFamily="34" charset="0"/>
-                <a:ea typeface="HY동녘B" pitchFamily="34" charset="-122"/>
-                <a:cs typeface="HY동녘B" pitchFamily="34" charset="-120"/>
-              </a:rPr>
-              <a:t>■ 평가방법 및 심사위원</a:t>
-            </a:r>
-            <a:endParaRPr lang="en-US" sz="1400" dirty="0"/>
-          </a:p>
-        </p:txBody>
-      </p:sp>
-      <p:sp>
-        <p:nvSpPr>
-          <p:cNvPr id="8" name="Text 6"/>
-          <p:cNvSpPr txBox="1"/>
-          <p:nvPr/>
-        </p:nvSpPr>
-        <p:spPr>
-          <a:xfrm>
-            <a:off x="658368" y="1389888"/>
-            <a:ext cx="237744" cy="237744"/>
-          </a:xfrm>
-          <a:prstGeom prst="rect">
-            <a:avLst/>
-          </a:prstGeom>
-          <a:noFill/>
-          <a:ln/>
-        </p:spPr>
-        <p:txBody>
-          <a:bodyPr wrap="square" lIns="0" tIns="0" rIns="0" bIns="0" rtlCol="0" anchor="t"/>
-          <a:lstStyle/>
-          <a:p>
-            <a:pPr eaLnBrk="0" latinLnBrk="0" indent="0" marL="0">
-              <a:buNone/>
-            </a:pPr>
-            <a:r>
-              <a:rPr lang="en-US" sz="1200" dirty="0">
-                <a:solidFill>
-                  <a:srgbClr val="000000"/>
-                </a:solidFill>
-                <a:latin typeface="맑은 고딕" pitchFamily="34" charset="0"/>
-                <a:ea typeface="맑은 고딕" pitchFamily="34" charset="-122"/>
-                <a:cs typeface="맑은 고딕" pitchFamily="34" charset="-120"/>
-              </a:rPr>
-              <a:t>○</a:t>
-            </a:r>
-            <a:endParaRPr lang="en-US" sz="1200" dirty="0"/>
-          </a:p>
-        </p:txBody>
-      </p:sp>
-      <p:sp>
-        <p:nvSpPr>
-          <p:cNvPr id="9" name="Text 7"/>
-          <p:cNvSpPr txBox="1"/>
-          <p:nvPr/>
-        </p:nvSpPr>
-        <p:spPr>
-          <a:xfrm>
-            <a:off x="914400" y="1389888"/>
-            <a:ext cx="7680960" cy="256032"/>
-          </a:xfrm>
-          <a:prstGeom prst="rect">
-            <a:avLst/>
-          </a:prstGeom>
-          <a:noFill/>
-          <a:ln/>
-        </p:spPr>
-        <p:txBody>
-          <a:bodyPr wrap="square" lIns="0" tIns="0" rIns="0" bIns="0" rtlCol="0" anchor="t"/>
-          <a:lstStyle/>
-          <a:p>
-            <a:pPr eaLnBrk="0" latinLnBrk="0" indent="0" marL="0">
-              <a:lnSpc>
-                <a:spcPts val="2000"/>
-              </a:lnSpc>
-              <a:buNone/>
-            </a:pPr>
-            <a:r>
-              <a:rPr lang="en-US" sz="1200" dirty="0">
-                <a:solidFill>
-                  <a:srgbClr val="000000"/>
-                </a:solidFill>
-                <a:latin typeface="맑은 고딕" pitchFamily="34" charset="0"/>
-                <a:ea typeface="맑은 고딕" pitchFamily="34" charset="-122"/>
-                <a:cs typeface="맑은 고딕" pitchFamily="34" charset="-120"/>
-              </a:rPr>
-              <a:t>평가방법 : 응시원서 및 자기소개서를 기초로 업무 적합성을 종합평가</a:t>
-            </a:r>
-            <a:endParaRPr lang="en-US" sz="1200" dirty="0"/>
-          </a:p>
-        </p:txBody>
-      </p:sp>
-      <p:sp>
-        <p:nvSpPr>
-          <p:cNvPr id="10" name="Text 8"/>
-          <p:cNvSpPr txBox="1"/>
-          <p:nvPr/>
-        </p:nvSpPr>
-        <p:spPr>
-          <a:xfrm>
-            <a:off x="658368" y="1700784"/>
-            <a:ext cx="237744" cy="237744"/>
-          </a:xfrm>
-          <a:prstGeom prst="rect">
-            <a:avLst/>
-          </a:prstGeom>
-          <a:noFill/>
-          <a:ln/>
-        </p:spPr>
-        <p:txBody>
-          <a:bodyPr wrap="square" lIns="0" tIns="0" rIns="0" bIns="0" rtlCol="0" anchor="t"/>
-          <a:lstStyle/>
-          <a:p>
-            <a:pPr eaLnBrk="0" latinLnBrk="0" indent="0" marL="0">
-              <a:buNone/>
-            </a:pPr>
-            <a:r>
-              <a:rPr lang="en-US" sz="1200" dirty="0">
-                <a:solidFill>
-                  <a:srgbClr val="000000"/>
-                </a:solidFill>
-                <a:latin typeface="맑은 고딕" pitchFamily="34" charset="0"/>
-                <a:ea typeface="맑은 고딕" pitchFamily="34" charset="-122"/>
-                <a:cs typeface="맑은 고딕" pitchFamily="34" charset="-120"/>
-              </a:rPr>
-              <a:t>○</a:t>
-            </a:r>
-            <a:endParaRPr lang="en-US" sz="1200" dirty="0"/>
-          </a:p>
-        </p:txBody>
-      </p:sp>
-      <p:sp>
-        <p:nvSpPr>
-          <p:cNvPr id="11" name="Text 9"/>
-          <p:cNvSpPr txBox="1"/>
-          <p:nvPr/>
-        </p:nvSpPr>
-        <p:spPr>
-          <a:xfrm>
-            <a:off x="914400" y="1700784"/>
-            <a:ext cx="7680960" cy="256032"/>
-          </a:xfrm>
-          <a:prstGeom prst="rect">
-            <a:avLst/>
-          </a:prstGeom>
-          <a:noFill/>
-          <a:ln/>
-        </p:spPr>
-        <p:txBody>
-          <a:bodyPr wrap="square" lIns="0" tIns="0" rIns="0" bIns="0" rtlCol="0" anchor="t"/>
-          <a:lstStyle/>
-          <a:p>
-            <a:pPr eaLnBrk="0" latinLnBrk="0" indent="0" marL="0">
-              <a:lnSpc>
-                <a:spcPts val="2000"/>
-              </a:lnSpc>
-              <a:buNone/>
-            </a:pPr>
-            <a:r>
-              <a:rPr lang="en-US" sz="1200" dirty="0">
-                <a:solidFill>
-                  <a:srgbClr val="000000"/>
-                </a:solidFill>
-                <a:latin typeface="맑은 고딕" pitchFamily="34" charset="0"/>
-                <a:ea typeface="맑은 고딕" pitchFamily="34" charset="-122"/>
-                <a:cs typeface="맑은 고딕" pitchFamily="34" charset="-120"/>
-              </a:rPr>
-              <a:t>심사위원 : 3명 (교장 1명, 법인관계자 1명, 외부위원 1명)</a:t>
             </a:r>
             <a:endParaRPr lang="en-US" sz="1200" dirty="0"/>
           </a:p>
@@ -16731,6 +17406,1731 @@
                           <a:ea typeface="맑은 고딕" pitchFamily="34" charset="-122"/>
                           <a:cs typeface="맑은 고딕" pitchFamily="34" charset="-120"/>
                         </a:rPr>
+                        <a:t>직무전문성</a:t>
+                      </a:r>
+                      <a:endParaRPr lang="en-US" sz="1050" dirty="0">
+                        <a:latin typeface="맑은 고딕" charset="0"/>
+                        <a:ea typeface="맑은 고딕" charset="0"/>
+                        <a:cs typeface="맑은 고딕" charset="0"/>
+                      </a:endParaRPr>
+                    </a:p>
+                  </a:txBody>
+                  <a:tcPr marL="38100" marR="38100" marT="38100" marB="38100" anchor="ctr">
+                    <a:lnL w="12700" cap="flat" cmpd="sng" algn="ctr">
+                      <a:solidFill>
+                        <a:srgbClr val="000000"/>
+                      </a:solidFill>
+                      <a:prstDash val="solid"/>
+                      <a:round/>
+                      <a:headEnd type="none" w="med" len="med"/>
+                      <a:tailEnd type="none" w="med" len="med"/>
+                    </a:lnL>
+                    <a:lnR w="12700" cap="flat" cmpd="sng" algn="ctr">
+                      <a:solidFill>
+                        <a:srgbClr val="000000"/>
+                      </a:solidFill>
+                      <a:prstDash val="solid"/>
+                      <a:round/>
+                      <a:headEnd type="none" w="med" len="med"/>
+                      <a:tailEnd type="none" w="med" len="med"/>
+                    </a:lnR>
+                    <a:lnT w="12700" cap="flat" cmpd="sng" algn="ctr">
+                      <a:solidFill>
+                        <a:srgbClr val="000000"/>
+                      </a:solidFill>
+                      <a:prstDash val="solid"/>
+                      <a:round/>
+                      <a:headEnd type="none" w="med" len="med"/>
+                      <a:tailEnd type="none" w="med" len="med"/>
+                    </a:lnT>
+                    <a:lnB w="12700" cap="flat" cmpd="sng" algn="ctr">
+                      <a:solidFill>
+                        <a:srgbClr val="000000"/>
+                      </a:solidFill>
+                      <a:prstDash val="solid"/>
+                      <a:round/>
+                      <a:headEnd type="none" w="med" len="med"/>
+                      <a:tailEnd type="none" w="med" len="med"/>
+                    </a:lnB>
+                  </a:tcPr>
+                </a:tc>
+                <a:tc>
+                  <a:txBody>
+                    <a:bodyPr/>
+                    <a:lstStyle/>
+                    <a:p>
+                      <a:pPr eaLnBrk="0" latinLnBrk="0" algn="ctr" indent="0" marL="0">
+                        <a:buNone/>
+                      </a:pPr>
+                      <a:r>
+                        <a:rPr lang="en-US" sz="1050" dirty="0">
+                          <a:solidFill>
+                            <a:srgbClr val="000000"/>
+                          </a:solidFill>
+                          <a:latin typeface="맑은 고딕" pitchFamily="34" charset="0"/>
+                          <a:ea typeface="맑은 고딕" pitchFamily="34" charset="-122"/>
+                          <a:cs typeface="맑은 고딕" pitchFamily="34" charset="-120"/>
+                        </a:rPr>
+                        <a:t>10점</a:t>
+                      </a:r>
+                      <a:endParaRPr lang="en-US" sz="1050" dirty="0">
+                        <a:latin typeface="맑은 고딕" charset="0"/>
+                        <a:ea typeface="맑은 고딕" charset="0"/>
+                        <a:cs typeface="맑은 고딕" charset="0"/>
+                      </a:endParaRPr>
+                    </a:p>
+                  </a:txBody>
+                  <a:tcPr marL="38100" marR="38100" marT="38100" marB="38100" anchor="ctr">
+                    <a:lnL w="12700" cap="flat" cmpd="sng" algn="ctr">
+                      <a:solidFill>
+                        <a:srgbClr val="000000"/>
+                      </a:solidFill>
+                      <a:prstDash val="solid"/>
+                      <a:round/>
+                      <a:headEnd type="none" w="med" len="med"/>
+                      <a:tailEnd type="none" w="med" len="med"/>
+                    </a:lnL>
+                    <a:lnR w="12700" cap="flat" cmpd="sng" algn="ctr">
+                      <a:solidFill>
+                        <a:srgbClr val="000000"/>
+                      </a:solidFill>
+                      <a:prstDash val="solid"/>
+                      <a:round/>
+                      <a:headEnd type="none" w="med" len="med"/>
+                      <a:tailEnd type="none" w="med" len="med"/>
+                    </a:lnR>
+                    <a:lnT w="12700" cap="flat" cmpd="sng" algn="ctr">
+                      <a:solidFill>
+                        <a:srgbClr val="000000"/>
+                      </a:solidFill>
+                      <a:prstDash val="solid"/>
+                      <a:round/>
+                      <a:headEnd type="none" w="med" len="med"/>
+                      <a:tailEnd type="none" w="med" len="med"/>
+                    </a:lnT>
+                    <a:lnB w="12700" cap="flat" cmpd="sng" algn="ctr">
+                      <a:solidFill>
+                        <a:srgbClr val="000000"/>
+                      </a:solidFill>
+                      <a:prstDash val="solid"/>
+                      <a:round/>
+                      <a:headEnd type="none" w="med" len="med"/>
+                      <a:tailEnd type="none" w="med" len="med"/>
+                    </a:lnB>
+                  </a:tcPr>
+                </a:tc>
+                <a:tc rowSpan="5">
+                  <a:txBody>
+                    <a:bodyPr/>
+                    <a:lstStyle/>
+                    <a:p>
+                      <a:pPr eaLnBrk="0" latinLnBrk="0" algn="ctr" indent="0" marL="0">
+                        <a:buNone/>
+                      </a:pPr>
+                      <a:r>
+                        <a:rPr lang="en-US" sz="1200" b="1" dirty="0">
+                          <a:solidFill>
+                            <a:srgbClr val="000000"/>
+                          </a:solidFill>
+                          <a:latin typeface="맑은 고딕" pitchFamily="34" charset="0"/>
+                          <a:ea typeface="맑은 고딕" pitchFamily="34" charset="-122"/>
+                          <a:cs typeface="맑은 고딕" pitchFamily="34" charset="-120"/>
+                        </a:rPr>
+                        <a:t>5배수</a:t>
+                      </a:r>
+                      <a:endParaRPr lang="en-US" sz="1200" dirty="0">
+                        <a:latin typeface="맑은 고딕" charset="0"/>
+                        <a:ea typeface="맑은 고딕" charset="0"/>
+                        <a:cs typeface="맑은 고딕" charset="0"/>
+                      </a:endParaRPr>
+                    </a:p>
+                    <a:p>
+                      <a:pPr eaLnBrk="0" latinLnBrk="0" algn="ctr" indent="0" marL="0">
+                        <a:buNone/>
+                      </a:pPr>
+                      <a:r>
+                        <a:rPr lang="en-US" sz="1200" b="1" dirty="0">
+                          <a:solidFill>
+                            <a:srgbClr val="000000"/>
+                          </a:solidFill>
+                          <a:latin typeface="맑은 고딕" pitchFamily="34" charset="0"/>
+                          <a:ea typeface="맑은 고딕" pitchFamily="34" charset="-122"/>
+                          <a:cs typeface="맑은 고딕" pitchFamily="34" charset="-120"/>
+                        </a:rPr>
+                        <a:t>내외</a:t>
+                      </a:r>
+                      <a:endParaRPr lang="en-US" sz="1200" dirty="0">
+                        <a:latin typeface="맑은 고딕" charset="0"/>
+                        <a:ea typeface="맑은 고딕" charset="0"/>
+                        <a:cs typeface="맑은 고딕" charset="0"/>
+                      </a:endParaRPr>
+                    </a:p>
+                  </a:txBody>
+                  <a:tcPr marL="38100" marR="38100" marT="38100" marB="38100" anchor="ctr">
+                    <a:lnL w="12700" cap="flat" cmpd="sng" algn="ctr">
+                      <a:solidFill>
+                        <a:srgbClr val="000000"/>
+                      </a:solidFill>
+                      <a:prstDash val="solid"/>
+                      <a:round/>
+                      <a:headEnd type="none" w="med" len="med"/>
+                      <a:tailEnd type="none" w="med" len="med"/>
+                    </a:lnL>
+                    <a:lnR w="12700" cap="flat" cmpd="sng" algn="ctr">
+                      <a:solidFill>
+                        <a:srgbClr val="000000"/>
+                      </a:solidFill>
+                      <a:prstDash val="solid"/>
+                      <a:round/>
+                      <a:headEnd type="none" w="med" len="med"/>
+                      <a:tailEnd type="none" w="med" len="med"/>
+                    </a:lnR>
+                    <a:lnT w="12700" cap="flat" cmpd="sng" algn="ctr">
+                      <a:solidFill>
+                        <a:srgbClr val="000000"/>
+                      </a:solidFill>
+                      <a:prstDash val="solid"/>
+                      <a:round/>
+                      <a:headEnd type="none" w="med" len="med"/>
+                      <a:tailEnd type="none" w="med" len="med"/>
+                    </a:lnT>
+                    <a:lnB w="12700" cap="flat" cmpd="sng" algn="ctr">
+                      <a:solidFill>
+                        <a:srgbClr val="000000"/>
+                      </a:solidFill>
+                      <a:prstDash val="solid"/>
+                      <a:round/>
+                      <a:headEnd type="none" w="med" len="med"/>
+                      <a:tailEnd type="none" w="med" len="med"/>
+                    </a:lnB>
+                    <a:solidFill>
+                      <a:srgbClr val="D9F6FF"/>
+                    </a:solidFill>
+                  </a:tcPr>
+                </a:tc>
+              </a:tr>
+              <a:tr h="329184">
+                <a:tc>
+                  <a:txBody>
+                    <a:bodyPr/>
+                    <a:lstStyle/>
+                    <a:p>
+                      <a:pPr eaLnBrk="0" latinLnBrk="0" algn="l" indent="0" marL="0">
+                        <a:buNone/>
+                      </a:pPr>
+                      <a:r>
+                        <a:rPr lang="en-US" sz="1050" dirty="0">
+                          <a:solidFill>
+                            <a:srgbClr val="000000"/>
+                          </a:solidFill>
+                          <a:latin typeface="맑은 고딕" pitchFamily="34" charset="0"/>
+                          <a:ea typeface="맑은 고딕" pitchFamily="34" charset="-122"/>
+                          <a:cs typeface="맑은 고딕" pitchFamily="34" charset="-120"/>
+                        </a:rPr>
+                        <a:t>지원동기 및 직업관</a:t>
+                      </a:r>
+                      <a:endParaRPr lang="en-US" sz="1050" dirty="0">
+                        <a:latin typeface="맑은 고딕" charset="0"/>
+                        <a:ea typeface="맑은 고딕" charset="0"/>
+                        <a:cs typeface="맑은 고딕" charset="0"/>
+                      </a:endParaRPr>
+                    </a:p>
+                  </a:txBody>
+                  <a:tcPr marL="38100" marR="38100" marT="38100" marB="38100" anchor="ctr">
+                    <a:lnL w="12700" cap="flat" cmpd="sng" algn="ctr">
+                      <a:solidFill>
+                        <a:srgbClr val="000000"/>
+                      </a:solidFill>
+                      <a:prstDash val="solid"/>
+                      <a:round/>
+                      <a:headEnd type="none" w="med" len="med"/>
+                      <a:tailEnd type="none" w="med" len="med"/>
+                    </a:lnL>
+                    <a:lnR w="12700" cap="flat" cmpd="sng" algn="ctr">
+                      <a:solidFill>
+                        <a:srgbClr val="000000"/>
+                      </a:solidFill>
+                      <a:prstDash val="solid"/>
+                      <a:round/>
+                      <a:headEnd type="none" w="med" len="med"/>
+                      <a:tailEnd type="none" w="med" len="med"/>
+                    </a:lnR>
+                    <a:lnT w="12700" cap="flat" cmpd="sng" algn="ctr">
+                      <a:solidFill>
+                        <a:srgbClr val="000000"/>
+                      </a:solidFill>
+                      <a:prstDash val="solid"/>
+                      <a:round/>
+                      <a:headEnd type="none" w="med" len="med"/>
+                      <a:tailEnd type="none" w="med" len="med"/>
+                    </a:lnT>
+                    <a:lnB w="12700" cap="flat" cmpd="sng" algn="ctr">
+                      <a:solidFill>
+                        <a:srgbClr val="000000"/>
+                      </a:solidFill>
+                      <a:prstDash val="solid"/>
+                      <a:round/>
+                      <a:headEnd type="none" w="med" len="med"/>
+                      <a:tailEnd type="none" w="med" len="med"/>
+                    </a:lnB>
+                  </a:tcPr>
+                </a:tc>
+                <a:tc>
+                  <a:txBody>
+                    <a:bodyPr/>
+                    <a:lstStyle/>
+                    <a:p>
+                      <a:pPr eaLnBrk="0" latinLnBrk="0" algn="ctr" indent="0" marL="0">
+                        <a:buNone/>
+                      </a:pPr>
+                      <a:r>
+                        <a:rPr lang="en-US" sz="1050" dirty="0">
+                          <a:solidFill>
+                            <a:srgbClr val="000000"/>
+                          </a:solidFill>
+                          <a:latin typeface="맑은 고딕" pitchFamily="34" charset="0"/>
+                          <a:ea typeface="맑은 고딕" pitchFamily="34" charset="-122"/>
+                          <a:cs typeface="맑은 고딕" pitchFamily="34" charset="-120"/>
+                        </a:rPr>
+                        <a:t>8점</a:t>
+                      </a:r>
+                      <a:endParaRPr lang="en-US" sz="1050" dirty="0">
+                        <a:latin typeface="맑은 고딕" charset="0"/>
+                        <a:ea typeface="맑은 고딕" charset="0"/>
+                        <a:cs typeface="맑은 고딕" charset="0"/>
+                      </a:endParaRPr>
+                    </a:p>
+                  </a:txBody>
+                  <a:tcPr marL="38100" marR="38100" marT="38100" marB="38100" anchor="ctr">
+                    <a:lnL w="12700" cap="flat" cmpd="sng" algn="ctr">
+                      <a:solidFill>
+                        <a:srgbClr val="000000"/>
+                      </a:solidFill>
+                      <a:prstDash val="solid"/>
+                      <a:round/>
+                      <a:headEnd type="none" w="med" len="med"/>
+                      <a:tailEnd type="none" w="med" len="med"/>
+                    </a:lnL>
+                    <a:lnR w="12700" cap="flat" cmpd="sng" algn="ctr">
+                      <a:solidFill>
+                        <a:srgbClr val="000000"/>
+                      </a:solidFill>
+                      <a:prstDash val="solid"/>
+                      <a:round/>
+                      <a:headEnd type="none" w="med" len="med"/>
+                      <a:tailEnd type="none" w="med" len="med"/>
+                    </a:lnR>
+                    <a:lnT w="12700" cap="flat" cmpd="sng" algn="ctr">
+                      <a:solidFill>
+                        <a:srgbClr val="000000"/>
+                      </a:solidFill>
+                      <a:prstDash val="solid"/>
+                      <a:round/>
+                      <a:headEnd type="none" w="med" len="med"/>
+                      <a:tailEnd type="none" w="med" len="med"/>
+                    </a:lnT>
+                    <a:lnB w="12700" cap="flat" cmpd="sng" algn="ctr">
+                      <a:solidFill>
+                        <a:srgbClr val="000000"/>
+                      </a:solidFill>
+                      <a:prstDash val="solid"/>
+                      <a:round/>
+                      <a:headEnd type="none" w="med" len="med"/>
+                      <a:tailEnd type="none" w="med" len="med"/>
+                    </a:lnB>
+                  </a:tcPr>
+                </a:tc>
+                <a:tc vMerge="1">
+                  <a:tcPr/>
+                </a:tc>
+              </a:tr>
+              <a:tr h="329184">
+                <a:tc>
+                  <a:txBody>
+                    <a:bodyPr/>
+                    <a:lstStyle/>
+                    <a:p>
+                      <a:pPr eaLnBrk="0" latinLnBrk="0" algn="l" indent="0" marL="0">
+                        <a:buNone/>
+                      </a:pPr>
+                      <a:r>
+                        <a:rPr lang="en-US" sz="1050" dirty="0">
+                          <a:solidFill>
+                            <a:srgbClr val="000000"/>
+                          </a:solidFill>
+                          <a:latin typeface="맑은 고딕" pitchFamily="34" charset="0"/>
+                          <a:ea typeface="맑은 고딕" pitchFamily="34" charset="-122"/>
+                          <a:cs typeface="맑은 고딕" pitchFamily="34" charset="-120"/>
+                        </a:rPr>
+                        <a:t>성장과정 및 활동경험</a:t>
+                      </a:r>
+                      <a:endParaRPr lang="en-US" sz="1050" dirty="0">
+                        <a:latin typeface="맑은 고딕" charset="0"/>
+                        <a:ea typeface="맑은 고딕" charset="0"/>
+                        <a:cs typeface="맑은 고딕" charset="0"/>
+                      </a:endParaRPr>
+                    </a:p>
+                  </a:txBody>
+                  <a:tcPr marL="38100" marR="38100" marT="38100" marB="38100" anchor="ctr">
+                    <a:lnL w="12700" cap="flat" cmpd="sng" algn="ctr">
+                      <a:solidFill>
+                        <a:srgbClr val="000000"/>
+                      </a:solidFill>
+                      <a:prstDash val="solid"/>
+                      <a:round/>
+                      <a:headEnd type="none" w="med" len="med"/>
+                      <a:tailEnd type="none" w="med" len="med"/>
+                    </a:lnL>
+                    <a:lnR w="12700" cap="flat" cmpd="sng" algn="ctr">
+                      <a:solidFill>
+                        <a:srgbClr val="000000"/>
+                      </a:solidFill>
+                      <a:prstDash val="solid"/>
+                      <a:round/>
+                      <a:headEnd type="none" w="med" len="med"/>
+                      <a:tailEnd type="none" w="med" len="med"/>
+                    </a:lnR>
+                    <a:lnT w="12700" cap="flat" cmpd="sng" algn="ctr">
+                      <a:solidFill>
+                        <a:srgbClr val="000000"/>
+                      </a:solidFill>
+                      <a:prstDash val="solid"/>
+                      <a:round/>
+                      <a:headEnd type="none" w="med" len="med"/>
+                      <a:tailEnd type="none" w="med" len="med"/>
+                    </a:lnT>
+                    <a:lnB w="12700" cap="flat" cmpd="sng" algn="ctr">
+                      <a:solidFill>
+                        <a:srgbClr val="000000"/>
+                      </a:solidFill>
+                      <a:prstDash val="solid"/>
+                      <a:round/>
+                      <a:headEnd type="none" w="med" len="med"/>
+                      <a:tailEnd type="none" w="med" len="med"/>
+                    </a:lnB>
+                  </a:tcPr>
+                </a:tc>
+                <a:tc>
+                  <a:txBody>
+                    <a:bodyPr/>
+                    <a:lstStyle/>
+                    <a:p>
+                      <a:pPr eaLnBrk="0" latinLnBrk="0" algn="ctr" indent="0" marL="0">
+                        <a:buNone/>
+                      </a:pPr>
+                      <a:r>
+                        <a:rPr lang="en-US" sz="1050" dirty="0">
+                          <a:solidFill>
+                            <a:srgbClr val="000000"/>
+                          </a:solidFill>
+                          <a:latin typeface="맑은 고딕" pitchFamily="34" charset="0"/>
+                          <a:ea typeface="맑은 고딕" pitchFamily="34" charset="-122"/>
+                          <a:cs typeface="맑은 고딕" pitchFamily="34" charset="-120"/>
+                        </a:rPr>
+                        <a:t>6점</a:t>
+                      </a:r>
+                      <a:endParaRPr lang="en-US" sz="1050" dirty="0">
+                        <a:latin typeface="맑은 고딕" charset="0"/>
+                        <a:ea typeface="맑은 고딕" charset="0"/>
+                        <a:cs typeface="맑은 고딕" charset="0"/>
+                      </a:endParaRPr>
+                    </a:p>
+                  </a:txBody>
+                  <a:tcPr marL="38100" marR="38100" marT="38100" marB="38100" anchor="ctr">
+                    <a:lnL w="12700" cap="flat" cmpd="sng" algn="ctr">
+                      <a:solidFill>
+                        <a:srgbClr val="000000"/>
+                      </a:solidFill>
+                      <a:prstDash val="solid"/>
+                      <a:round/>
+                      <a:headEnd type="none" w="med" len="med"/>
+                      <a:tailEnd type="none" w="med" len="med"/>
+                    </a:lnL>
+                    <a:lnR w="12700" cap="flat" cmpd="sng" algn="ctr">
+                      <a:solidFill>
+                        <a:srgbClr val="000000"/>
+                      </a:solidFill>
+                      <a:prstDash val="solid"/>
+                      <a:round/>
+                      <a:headEnd type="none" w="med" len="med"/>
+                      <a:tailEnd type="none" w="med" len="med"/>
+                    </a:lnR>
+                    <a:lnT w="12700" cap="flat" cmpd="sng" algn="ctr">
+                      <a:solidFill>
+                        <a:srgbClr val="000000"/>
+                      </a:solidFill>
+                      <a:prstDash val="solid"/>
+                      <a:round/>
+                      <a:headEnd type="none" w="med" len="med"/>
+                      <a:tailEnd type="none" w="med" len="med"/>
+                    </a:lnT>
+                    <a:lnB w="12700" cap="flat" cmpd="sng" algn="ctr">
+                      <a:solidFill>
+                        <a:srgbClr val="000000"/>
+                      </a:solidFill>
+                      <a:prstDash val="solid"/>
+                      <a:round/>
+                      <a:headEnd type="none" w="med" len="med"/>
+                      <a:tailEnd type="none" w="med" len="med"/>
+                    </a:lnB>
+                  </a:tcPr>
+                </a:tc>
+                <a:tc vMerge="1">
+                  <a:tcPr/>
+                </a:tc>
+              </a:tr>
+              <a:tr h="329184">
+                <a:tc>
+                  <a:txBody>
+                    <a:bodyPr/>
+                    <a:lstStyle/>
+                    <a:p>
+                      <a:pPr eaLnBrk="0" latinLnBrk="0" algn="l" indent="0" marL="0">
+                        <a:buNone/>
+                      </a:pPr>
+                      <a:r>
+                        <a:rPr lang="en-US" sz="1050" dirty="0">
+                          <a:solidFill>
+                            <a:srgbClr val="000000"/>
+                          </a:solidFill>
+                          <a:latin typeface="맑은 고딕" pitchFamily="34" charset="0"/>
+                          <a:ea typeface="맑은 고딕" pitchFamily="34" charset="-122"/>
+                          <a:cs typeface="맑은 고딕" pitchFamily="34" charset="-120"/>
+                        </a:rPr>
+                        <a:t>표현력</a:t>
+                      </a:r>
+                      <a:endParaRPr lang="en-US" sz="1050" dirty="0">
+                        <a:latin typeface="맑은 고딕" charset="0"/>
+                        <a:ea typeface="맑은 고딕" charset="0"/>
+                        <a:cs typeface="맑은 고딕" charset="0"/>
+                      </a:endParaRPr>
+                    </a:p>
+                  </a:txBody>
+                  <a:tcPr marL="38100" marR="38100" marT="38100" marB="38100" anchor="ctr">
+                    <a:lnL w="12700" cap="flat" cmpd="sng" algn="ctr">
+                      <a:solidFill>
+                        <a:srgbClr val="000000"/>
+                      </a:solidFill>
+                      <a:prstDash val="solid"/>
+                      <a:round/>
+                      <a:headEnd type="none" w="med" len="med"/>
+                      <a:tailEnd type="none" w="med" len="med"/>
+                    </a:lnL>
+                    <a:lnR w="12700" cap="flat" cmpd="sng" algn="ctr">
+                      <a:solidFill>
+                        <a:srgbClr val="000000"/>
+                      </a:solidFill>
+                      <a:prstDash val="solid"/>
+                      <a:round/>
+                      <a:headEnd type="none" w="med" len="med"/>
+                      <a:tailEnd type="none" w="med" len="med"/>
+                    </a:lnR>
+                    <a:lnT w="12700" cap="flat" cmpd="sng" algn="ctr">
+                      <a:solidFill>
+                        <a:srgbClr val="000000"/>
+                      </a:solidFill>
+                      <a:prstDash val="solid"/>
+                      <a:round/>
+                      <a:headEnd type="none" w="med" len="med"/>
+                      <a:tailEnd type="none" w="med" len="med"/>
+                    </a:lnT>
+                    <a:lnB w="12700" cap="flat" cmpd="sng" algn="ctr">
+                      <a:solidFill>
+                        <a:srgbClr val="000000"/>
+                      </a:solidFill>
+                      <a:prstDash val="solid"/>
+                      <a:round/>
+                      <a:headEnd type="none" w="med" len="med"/>
+                      <a:tailEnd type="none" w="med" len="med"/>
+                    </a:lnB>
+                  </a:tcPr>
+                </a:tc>
+                <a:tc>
+                  <a:txBody>
+                    <a:bodyPr/>
+                    <a:lstStyle/>
+                    <a:p>
+                      <a:pPr eaLnBrk="0" latinLnBrk="0" algn="ctr" indent="0" marL="0">
+                        <a:buNone/>
+                      </a:pPr>
+                      <a:r>
+                        <a:rPr lang="en-US" sz="1050" dirty="0">
+                          <a:solidFill>
+                            <a:srgbClr val="000000"/>
+                          </a:solidFill>
+                          <a:latin typeface="맑은 고딕" pitchFamily="34" charset="0"/>
+                          <a:ea typeface="맑은 고딕" pitchFamily="34" charset="-122"/>
+                          <a:cs typeface="맑은 고딕" pitchFamily="34" charset="-120"/>
+                        </a:rPr>
+                        <a:t>6점</a:t>
+                      </a:r>
+                      <a:endParaRPr lang="en-US" sz="1050" dirty="0">
+                        <a:latin typeface="맑은 고딕" charset="0"/>
+                        <a:ea typeface="맑은 고딕" charset="0"/>
+                        <a:cs typeface="맑은 고딕" charset="0"/>
+                      </a:endParaRPr>
+                    </a:p>
+                  </a:txBody>
+                  <a:tcPr marL="38100" marR="38100" marT="38100" marB="38100" anchor="ctr">
+                    <a:lnL w="12700" cap="flat" cmpd="sng" algn="ctr">
+                      <a:solidFill>
+                        <a:srgbClr val="000000"/>
+                      </a:solidFill>
+                      <a:prstDash val="solid"/>
+                      <a:round/>
+                      <a:headEnd type="none" w="med" len="med"/>
+                      <a:tailEnd type="none" w="med" len="med"/>
+                    </a:lnL>
+                    <a:lnR w="12700" cap="flat" cmpd="sng" algn="ctr">
+                      <a:solidFill>
+                        <a:srgbClr val="000000"/>
+                      </a:solidFill>
+                      <a:prstDash val="solid"/>
+                      <a:round/>
+                      <a:headEnd type="none" w="med" len="med"/>
+                      <a:tailEnd type="none" w="med" len="med"/>
+                    </a:lnR>
+                    <a:lnT w="12700" cap="flat" cmpd="sng" algn="ctr">
+                      <a:solidFill>
+                        <a:srgbClr val="000000"/>
+                      </a:solidFill>
+                      <a:prstDash val="solid"/>
+                      <a:round/>
+                      <a:headEnd type="none" w="med" len="med"/>
+                      <a:tailEnd type="none" w="med" len="med"/>
+                    </a:lnT>
+                    <a:lnB w="12700" cap="flat" cmpd="sng" algn="ctr">
+                      <a:solidFill>
+                        <a:srgbClr val="000000"/>
+                      </a:solidFill>
+                      <a:prstDash val="solid"/>
+                      <a:round/>
+                      <a:headEnd type="none" w="med" len="med"/>
+                      <a:tailEnd type="none" w="med" len="med"/>
+                    </a:lnB>
+                  </a:tcPr>
+                </a:tc>
+                <a:tc vMerge="1">
+                  <a:tcPr/>
+                </a:tc>
+              </a:tr>
+              <a:tr h="365760">
+                <a:tc>
+                  <a:txBody>
+                    <a:bodyPr/>
+                    <a:lstStyle/>
+                    <a:p>
+                      <a:pPr eaLnBrk="0" latinLnBrk="0" algn="l" indent="0" marL="0">
+                        <a:buNone/>
+                      </a:pPr>
+                      <a:r>
+                        <a:rPr lang="en-US" sz="1050" b="1" dirty="0">
+                          <a:solidFill>
+                            <a:srgbClr val="000000"/>
+                          </a:solidFill>
+                          <a:latin typeface="맑은 고딕" pitchFamily="34" charset="0"/>
+                          <a:ea typeface="맑은 고딕" pitchFamily="34" charset="-122"/>
+                          <a:cs typeface="맑은 고딕" pitchFamily="34" charset="-120"/>
+                        </a:rPr>
+                        <a:t>합계</a:t>
+                      </a:r>
+                      <a:endParaRPr lang="en-US" sz="1050" dirty="0">
+                        <a:latin typeface="맑은 고딕" charset="0"/>
+                        <a:ea typeface="맑은 고딕" charset="0"/>
+                        <a:cs typeface="맑은 고딕" charset="0"/>
+                      </a:endParaRPr>
+                    </a:p>
+                  </a:txBody>
+                  <a:tcPr marL="38100" marR="38100" marT="38100" marB="38100" anchor="ctr">
+                    <a:lnL w="12700" cap="flat" cmpd="sng" algn="ctr">
+                      <a:solidFill>
+                        <a:srgbClr val="000000"/>
+                      </a:solidFill>
+                      <a:prstDash val="solid"/>
+                      <a:round/>
+                      <a:headEnd type="none" w="med" len="med"/>
+                      <a:tailEnd type="none" w="med" len="med"/>
+                    </a:lnL>
+                    <a:lnR w="12700" cap="flat" cmpd="sng" algn="ctr">
+                      <a:solidFill>
+                        <a:srgbClr val="000000"/>
+                      </a:solidFill>
+                      <a:prstDash val="solid"/>
+                      <a:round/>
+                      <a:headEnd type="none" w="med" len="med"/>
+                      <a:tailEnd type="none" w="med" len="med"/>
+                    </a:lnR>
+                    <a:lnT w="12700" cap="flat" cmpd="sng" algn="ctr">
+                      <a:solidFill>
+                        <a:srgbClr val="000000"/>
+                      </a:solidFill>
+                      <a:prstDash val="solid"/>
+                      <a:round/>
+                      <a:headEnd type="none" w="med" len="med"/>
+                      <a:tailEnd type="none" w="med" len="med"/>
+                    </a:lnT>
+                    <a:lnB w="12700" cap="flat" cmpd="sng" algn="ctr">
+                      <a:solidFill>
+                        <a:srgbClr val="000000"/>
+                      </a:solidFill>
+                      <a:prstDash val="solid"/>
+                      <a:round/>
+                      <a:headEnd type="none" w="med" len="med"/>
+                      <a:tailEnd type="none" w="med" len="med"/>
+                    </a:lnB>
+                    <a:solidFill>
+                      <a:srgbClr val="D9F6FF"/>
+                    </a:solidFill>
+                  </a:tcPr>
+                </a:tc>
+                <a:tc>
+                  <a:txBody>
+                    <a:bodyPr/>
+                    <a:lstStyle/>
+                    <a:p>
+                      <a:pPr eaLnBrk="0" latinLnBrk="0" algn="ctr" indent="0" marL="0">
+                        <a:buNone/>
+                      </a:pPr>
+                      <a:r>
+                        <a:rPr lang="en-US" sz="1100" b="1" dirty="0">
+                          <a:solidFill>
+                            <a:srgbClr val="000000"/>
+                          </a:solidFill>
+                          <a:latin typeface="맑은 고딕" pitchFamily="34" charset="0"/>
+                          <a:ea typeface="맑은 고딕" pitchFamily="34" charset="-122"/>
+                          <a:cs typeface="맑은 고딕" pitchFamily="34" charset="-120"/>
+                        </a:rPr>
+                        <a:t>30점</a:t>
+                      </a:r>
+                      <a:endParaRPr lang="en-US" sz="1100" dirty="0">
+                        <a:latin typeface="맑은 고딕" charset="0"/>
+                        <a:ea typeface="맑은 고딕" charset="0"/>
+                        <a:cs typeface="맑은 고딕" charset="0"/>
+                      </a:endParaRPr>
+                    </a:p>
+                  </a:txBody>
+                  <a:tcPr marL="38100" marR="38100" marT="38100" marB="38100" anchor="ctr">
+                    <a:lnL w="12700" cap="flat" cmpd="sng" algn="ctr">
+                      <a:solidFill>
+                        <a:srgbClr val="000000"/>
+                      </a:solidFill>
+                      <a:prstDash val="solid"/>
+                      <a:round/>
+                      <a:headEnd type="none" w="med" len="med"/>
+                      <a:tailEnd type="none" w="med" len="med"/>
+                    </a:lnL>
+                    <a:lnR w="12700" cap="flat" cmpd="sng" algn="ctr">
+                      <a:solidFill>
+                        <a:srgbClr val="000000"/>
+                      </a:solidFill>
+                      <a:prstDash val="solid"/>
+                      <a:round/>
+                      <a:headEnd type="none" w="med" len="med"/>
+                      <a:tailEnd type="none" w="med" len="med"/>
+                    </a:lnR>
+                    <a:lnT w="12700" cap="flat" cmpd="sng" algn="ctr">
+                      <a:solidFill>
+                        <a:srgbClr val="000000"/>
+                      </a:solidFill>
+                      <a:prstDash val="solid"/>
+                      <a:round/>
+                      <a:headEnd type="none" w="med" len="med"/>
+                      <a:tailEnd type="none" w="med" len="med"/>
+                    </a:lnT>
+                    <a:lnB w="12700" cap="flat" cmpd="sng" algn="ctr">
+                      <a:solidFill>
+                        <a:srgbClr val="000000"/>
+                      </a:solidFill>
+                      <a:prstDash val="solid"/>
+                      <a:round/>
+                      <a:headEnd type="none" w="med" len="med"/>
+                      <a:tailEnd type="none" w="med" len="med"/>
+                    </a:lnB>
+                    <a:solidFill>
+                      <a:srgbClr val="D9F6FF"/>
+                    </a:solidFill>
+                  </a:tcPr>
+                </a:tc>
+                <a:tc vMerge="1">
+                  <a:tcPr/>
+                </a:tc>
+              </a:tr>
+            </a:tbl>
+          </a:graphicData>
+        </a:graphic>
+      </p:graphicFrame>
+      <p:sp>
+        <p:nvSpPr>
+          <p:cNvPr id="14" name="Text 11"/>
+          <p:cNvSpPr txBox="1"/>
+          <p:nvPr/>
+        </p:nvSpPr>
+        <p:spPr>
+          <a:xfrm>
+            <a:off x="457200" y="4626864"/>
+            <a:ext cx="8229600" cy="274320"/>
+          </a:xfrm>
+          <a:prstGeom prst="rect">
+            <a:avLst/>
+          </a:prstGeom>
+          <a:noFill/>
+          <a:ln/>
+        </p:spPr>
+        <p:txBody>
+          <a:bodyPr wrap="square" lIns="0" tIns="0" rIns="0" bIns="0" rtlCol="0" anchor="ctr"/>
+          <a:lstStyle/>
+          <a:p>
+            <a:pPr eaLnBrk="0" latinLnBrk="0" indent="0" marL="0">
+              <a:buNone/>
+            </a:pPr>
+            <a:r>
+              <a:rPr lang="en-US" sz="1400" dirty="0">
+                <a:solidFill>
+                  <a:srgbClr val="000000"/>
+                </a:solidFill>
+                <a:latin typeface="HY동녘B" pitchFamily="34" charset="0"/>
+                <a:ea typeface="HY동녘B" pitchFamily="34" charset="-122"/>
+                <a:cs typeface="HY동녘B" pitchFamily="34" charset="-120"/>
+              </a:rPr>
+              <a:t>■ 자기소개서 불성실 작성자 탈락 기준</a:t>
+            </a:r>
+            <a:endParaRPr lang="en-US" sz="1400" dirty="0"/>
+          </a:p>
+        </p:txBody>
+      </p:sp>
+      <p:sp>
+        <p:nvSpPr>
+          <p:cNvPr id="15" name="Text 12"/>
+          <p:cNvSpPr txBox="1"/>
+          <p:nvPr/>
+        </p:nvSpPr>
+        <p:spPr>
+          <a:xfrm>
+            <a:off x="932688" y="4974336"/>
+            <a:ext cx="182880" cy="219456"/>
+          </a:xfrm>
+          <a:prstGeom prst="rect">
+            <a:avLst/>
+          </a:prstGeom>
+          <a:noFill/>
+          <a:ln/>
+        </p:spPr>
+        <p:txBody>
+          <a:bodyPr wrap="square" lIns="0" tIns="0" rIns="0" bIns="0" rtlCol="0" anchor="t"/>
+          <a:lstStyle/>
+          <a:p>
+            <a:pPr eaLnBrk="0" latinLnBrk="0" indent="0" marL="0">
+              <a:buNone/>
+            </a:pPr>
+            <a:r>
+              <a:rPr lang="en-US" sz="1100" dirty="0">
+                <a:solidFill>
+                  <a:srgbClr val="000000"/>
+                </a:solidFill>
+                <a:latin typeface="맑은 고딕" pitchFamily="34" charset="0"/>
+                <a:ea typeface="맑은 고딕" pitchFamily="34" charset="-122"/>
+                <a:cs typeface="맑은 고딕" pitchFamily="34" charset="-120"/>
+              </a:rPr>
+              <a:t>-</a:t>
+            </a:r>
+            <a:endParaRPr lang="en-US" sz="1100" dirty="0"/>
+          </a:p>
+        </p:txBody>
+      </p:sp>
+      <p:sp>
+        <p:nvSpPr>
+          <p:cNvPr id="16" name="Text 13"/>
+          <p:cNvSpPr txBox="1"/>
+          <p:nvPr/>
+        </p:nvSpPr>
+        <p:spPr>
+          <a:xfrm>
+            <a:off x="1133856" y="4974336"/>
+            <a:ext cx="7461504" cy="237744"/>
+          </a:xfrm>
+          <a:prstGeom prst="rect">
+            <a:avLst/>
+          </a:prstGeom>
+          <a:noFill/>
+          <a:ln/>
+        </p:spPr>
+        <p:txBody>
+          <a:bodyPr wrap="square" lIns="0" tIns="0" rIns="0" bIns="0" rtlCol="0" anchor="t"/>
+          <a:lstStyle/>
+          <a:p>
+            <a:pPr eaLnBrk="0" latinLnBrk="0" indent="0" marL="0">
+              <a:lnSpc>
+                <a:spcPts val="1800"/>
+              </a:lnSpc>
+              <a:buNone/>
+            </a:pPr>
+            <a:r>
+              <a:rPr lang="en-US" sz="1100" dirty="0">
+                <a:solidFill>
+                  <a:srgbClr val="000000"/>
+                </a:solidFill>
+                <a:latin typeface="맑은 고딕" pitchFamily="34" charset="0"/>
+                <a:ea typeface="맑은 고딕" pitchFamily="34" charset="-122"/>
+                <a:cs typeface="맑은 고딕" pitchFamily="34" charset="-120"/>
+              </a:rPr>
+              <a:t>문항과 전혀 무관한 내용을 작성</a:t>
+            </a:r>
+            <a:endParaRPr lang="en-US" sz="1100" dirty="0"/>
+          </a:p>
+        </p:txBody>
+      </p:sp>
+      <p:sp>
+        <p:nvSpPr>
+          <p:cNvPr id="17" name="Text 14"/>
+          <p:cNvSpPr txBox="1"/>
+          <p:nvPr/>
+        </p:nvSpPr>
+        <p:spPr>
+          <a:xfrm>
+            <a:off x="932688" y="5248656"/>
+            <a:ext cx="182880" cy="219456"/>
+          </a:xfrm>
+          <a:prstGeom prst="rect">
+            <a:avLst/>
+          </a:prstGeom>
+          <a:noFill/>
+          <a:ln/>
+        </p:spPr>
+        <p:txBody>
+          <a:bodyPr wrap="square" lIns="0" tIns="0" rIns="0" bIns="0" rtlCol="0" anchor="t"/>
+          <a:lstStyle/>
+          <a:p>
+            <a:pPr eaLnBrk="0" latinLnBrk="0" indent="0" marL="0">
+              <a:buNone/>
+            </a:pPr>
+            <a:r>
+              <a:rPr lang="en-US" sz="1100" dirty="0">
+                <a:solidFill>
+                  <a:srgbClr val="000000"/>
+                </a:solidFill>
+                <a:latin typeface="맑은 고딕" pitchFamily="34" charset="0"/>
+                <a:ea typeface="맑은 고딕" pitchFamily="34" charset="-122"/>
+                <a:cs typeface="맑은 고딕" pitchFamily="34" charset="-120"/>
+              </a:rPr>
+              <a:t>-</a:t>
+            </a:r>
+            <a:endParaRPr lang="en-US" sz="1100" dirty="0"/>
+          </a:p>
+        </p:txBody>
+      </p:sp>
+      <p:sp>
+        <p:nvSpPr>
+          <p:cNvPr id="18" name="Text 15"/>
+          <p:cNvSpPr txBox="1"/>
+          <p:nvPr/>
+        </p:nvSpPr>
+        <p:spPr>
+          <a:xfrm>
+            <a:off x="1133856" y="5248656"/>
+            <a:ext cx="7461504" cy="237744"/>
+          </a:xfrm>
+          <a:prstGeom prst="rect">
+            <a:avLst/>
+          </a:prstGeom>
+          <a:noFill/>
+          <a:ln/>
+        </p:spPr>
+        <p:txBody>
+          <a:bodyPr wrap="square" lIns="0" tIns="0" rIns="0" bIns="0" rtlCol="0" anchor="t"/>
+          <a:lstStyle/>
+          <a:p>
+            <a:pPr eaLnBrk="0" latinLnBrk="0" indent="0" marL="0">
+              <a:lnSpc>
+                <a:spcPts val="1800"/>
+              </a:lnSpc>
+              <a:buNone/>
+            </a:pPr>
+            <a:r>
+              <a:rPr lang="en-US" sz="1100" dirty="0">
+                <a:solidFill>
+                  <a:srgbClr val="000000"/>
+                </a:solidFill>
+                <a:latin typeface="맑은 고딕" pitchFamily="34" charset="0"/>
+                <a:ea typeface="맑은 고딕" pitchFamily="34" charset="-122"/>
+                <a:cs typeface="맑은 고딕" pitchFamily="34" charset="-120"/>
+              </a:rPr>
+              <a:t>동일 내용 반복 또는 문항별 50% 미만(약 400자) 작성한 경우</a:t>
+            </a:r>
+            <a:endParaRPr lang="en-US" sz="1100" dirty="0"/>
+          </a:p>
+        </p:txBody>
+      </p:sp>
+      <p:sp>
+        <p:nvSpPr>
+          <p:cNvPr id="19" name="Text 16"/>
+          <p:cNvSpPr txBox="1"/>
+          <p:nvPr/>
+        </p:nvSpPr>
+        <p:spPr>
+          <a:xfrm>
+            <a:off x="932688" y="5522976"/>
+            <a:ext cx="182880" cy="219456"/>
+          </a:xfrm>
+          <a:prstGeom prst="rect">
+            <a:avLst/>
+          </a:prstGeom>
+          <a:noFill/>
+          <a:ln/>
+        </p:spPr>
+        <p:txBody>
+          <a:bodyPr wrap="square" lIns="0" tIns="0" rIns="0" bIns="0" rtlCol="0" anchor="t"/>
+          <a:lstStyle/>
+          <a:p>
+            <a:pPr eaLnBrk="0" latinLnBrk="0" indent="0" marL="0">
+              <a:buNone/>
+            </a:pPr>
+            <a:r>
+              <a:rPr lang="en-US" sz="1100" dirty="0">
+                <a:solidFill>
+                  <a:srgbClr val="000000"/>
+                </a:solidFill>
+                <a:latin typeface="맑은 고딕" pitchFamily="34" charset="0"/>
+                <a:ea typeface="맑은 고딕" pitchFamily="34" charset="-122"/>
+                <a:cs typeface="맑은 고딕" pitchFamily="34" charset="-120"/>
+              </a:rPr>
+              <a:t>-</a:t>
+            </a:r>
+            <a:endParaRPr lang="en-US" sz="1100" dirty="0"/>
+          </a:p>
+        </p:txBody>
+      </p:sp>
+      <p:sp>
+        <p:nvSpPr>
+          <p:cNvPr id="20" name="Text 17"/>
+          <p:cNvSpPr txBox="1"/>
+          <p:nvPr/>
+        </p:nvSpPr>
+        <p:spPr>
+          <a:xfrm>
+            <a:off x="1133856" y="5522976"/>
+            <a:ext cx="7461504" cy="237744"/>
+          </a:xfrm>
+          <a:prstGeom prst="rect">
+            <a:avLst/>
+          </a:prstGeom>
+          <a:noFill/>
+          <a:ln/>
+        </p:spPr>
+        <p:txBody>
+          <a:bodyPr wrap="square" lIns="0" tIns="0" rIns="0" bIns="0" rtlCol="0" anchor="t"/>
+          <a:lstStyle/>
+          <a:p>
+            <a:pPr eaLnBrk="0" latinLnBrk="0" indent="0" marL="0">
+              <a:lnSpc>
+                <a:spcPts val="1800"/>
+              </a:lnSpc>
+              <a:buNone/>
+            </a:pPr>
+            <a:r>
+              <a:rPr lang="en-US" sz="1100" dirty="0">
+                <a:solidFill>
+                  <a:srgbClr val="000000"/>
+                </a:solidFill>
+                <a:latin typeface="맑은 고딕" pitchFamily="34" charset="0"/>
+                <a:ea typeface="맑은 고딕" pitchFamily="34" charset="-122"/>
+                <a:cs typeface="맑은 고딕" pitchFamily="34" charset="-120"/>
+              </a:rPr>
+              <a:t>채용 기관명을 오기재하여 제출한 경우 등</a:t>
+            </a:r>
+            <a:endParaRPr lang="en-US" sz="1100" dirty="0"/>
+          </a:p>
+        </p:txBody>
+      </p:sp>
+    </p:spTree>
+  </p:cSld>
+  <p:clrMapOvr>
+    <a:masterClrMapping/>
+  </p:clrMapOvr>
+</p:sld>
+</file>
+
+<file path=ppt/slides/slide9.xml><?xml version="1.0" encoding="utf-8"?>
+<p:sld xmlns:a="http://schemas.openxmlformats.org/drawingml/2006/main" xmlns:r="http://schemas.openxmlformats.org/officeDocument/2006/relationships" xmlns:p="http://schemas.openxmlformats.org/presentationml/2006/main">
+  <p:cSld name="Slide 9">
+    <p:bg>
+      <p:bgPr>
+        <a:solidFill>
+          <a:srgbClr val="FFFFFF"/>
+        </a:solidFill>
+      </p:bgPr>
+    </p:bg>
+    <p:spTree>
+      <p:nvGrpSpPr>
+        <p:cNvPr id="1" name=""/>
+        <p:cNvGrpSpPr/>
+        <p:nvPr/>
+      </p:nvGrpSpPr>
+      <p:grpSpPr>
+        <a:xfrm>
+          <a:off x="0" y="0"/>
+          <a:ext cx="0" cy="0"/>
+          <a:chOff x="0" y="0"/>
+          <a:chExt cx="0" cy="0"/>
+        </a:xfrm>
+      </p:grpSpPr>
+      <p:sp>
+        <p:nvSpPr>
+          <p:cNvPr id="2" name="Shape 0"/>
+          <p:cNvSpPr/>
+          <p:nvPr/>
+        </p:nvSpPr>
+        <p:spPr>
+          <a:xfrm>
+            <a:off x="0" y="6620256"/>
+            <a:ext cx="9144000" cy="237744"/>
+          </a:xfrm>
+          <a:prstGeom prst="rect">
+            <a:avLst/>
+          </a:prstGeom>
+          <a:solidFill>
+            <a:srgbClr val="4FADD1"/>
+          </a:solidFill>
+          <a:ln w="6350">
+            <a:solidFill>
+              <a:srgbClr val="4FADD1"/>
+            </a:solidFill>
+            <a:prstDash val="solid"/>
+          </a:ln>
+        </p:spPr>
+      </p:sp>
+      <p:sp>
+        <p:nvSpPr>
+          <p:cNvPr id="3" name="Shape 1"/>
+          <p:cNvSpPr/>
+          <p:nvPr/>
+        </p:nvSpPr>
+        <p:spPr>
+          <a:xfrm>
+            <a:off x="0" y="0"/>
+            <a:ext cx="9144000" cy="713232"/>
+          </a:xfrm>
+          <a:prstGeom prst="rect">
+            <a:avLst/>
+          </a:prstGeom>
+          <a:solidFill>
+            <a:srgbClr val="4FADD1"/>
+          </a:solidFill>
+          <a:ln w="6350">
+            <a:solidFill>
+              <a:srgbClr val="4FADD1"/>
+            </a:solidFill>
+            <a:prstDash val="solid"/>
+          </a:ln>
+        </p:spPr>
+      </p:sp>
+      <p:sp>
+        <p:nvSpPr>
+          <p:cNvPr id="4" name="Text 2"/>
+          <p:cNvSpPr txBox="1"/>
+          <p:nvPr/>
+        </p:nvSpPr>
+        <p:spPr>
+          <a:xfrm>
+            <a:off x="3657600" y="6291072"/>
+            <a:ext cx="1828800" cy="274320"/>
+          </a:xfrm>
+          <a:prstGeom prst="rect">
+            <a:avLst/>
+          </a:prstGeom>
+          <a:noFill/>
+          <a:ln/>
+        </p:spPr>
+        <p:txBody>
+          <a:bodyPr wrap="square" lIns="0" tIns="0" rIns="0" bIns="0" rtlCol="0" anchor="ctr"/>
+          <a:lstStyle/>
+          <a:p>
+            <a:pPr eaLnBrk="0" latinLnBrk="0" algn="ctr" indent="0" marL="0">
+              <a:buNone/>
+            </a:pPr>
+            <a:r>
+              <a:rPr lang="en-US" sz="1100" dirty="0">
+                <a:solidFill>
+                  <a:srgbClr val="000000"/>
+                </a:solidFill>
+                <a:latin typeface="맑은 고딕" pitchFamily="34" charset="0"/>
+                <a:ea typeface="맑은 고딕" pitchFamily="34" charset="-122"/>
+                <a:cs typeface="맑은 고딕" pitchFamily="34" charset="-120"/>
+              </a:rPr>
+              <a:t>- 8 -</a:t>
+            </a:r>
+            <a:endParaRPr lang="en-US" sz="1100" dirty="0"/>
+          </a:p>
+        </p:txBody>
+      </p:sp>
+      <p:sp>
+        <p:nvSpPr>
+          <p:cNvPr id="5" name="Text 3"/>
+          <p:cNvSpPr txBox="1"/>
+          <p:nvPr/>
+        </p:nvSpPr>
+        <p:spPr>
+          <a:xfrm>
+            <a:off x="457200" y="82296"/>
+            <a:ext cx="5120640" cy="548640"/>
+          </a:xfrm>
+          <a:prstGeom prst="rect">
+            <a:avLst/>
+          </a:prstGeom>
+          <a:noFill/>
+          <a:ln/>
+        </p:spPr>
+        <p:txBody>
+          <a:bodyPr wrap="square" lIns="0" tIns="0" rIns="0" bIns="0" rtlCol="0" anchor="ctr"/>
+          <a:lstStyle/>
+          <a:p>
+            <a:pPr eaLnBrk="0" latinLnBrk="0" indent="0" marL="0">
+              <a:buNone/>
+            </a:pPr>
+            <a:r>
+              <a:rPr lang="en-US" sz="2600" dirty="0">
+                <a:solidFill>
+                  <a:srgbClr val="FFFFFF"/>
+                </a:solidFill>
+                <a:latin typeface="HY헤드라인M" pitchFamily="34" charset="0"/>
+                <a:ea typeface="HY헤드라인M" pitchFamily="34" charset="-122"/>
+                <a:cs typeface="HY헤드라인M" pitchFamily="34" charset="-120"/>
+              </a:rPr>
+              <a:t>7. 업무적성 및 심층면접 (2차)</a:t>
+            </a:r>
+            <a:endParaRPr lang="en-US" sz="2600" dirty="0"/>
+          </a:p>
+        </p:txBody>
+      </p:sp>
+      <p:sp>
+        <p:nvSpPr>
+          <p:cNvPr id="6" name="Text 4"/>
+          <p:cNvSpPr txBox="1"/>
+          <p:nvPr/>
+        </p:nvSpPr>
+        <p:spPr>
+          <a:xfrm>
+            <a:off x="4937760" y="201168"/>
+            <a:ext cx="3749040" cy="310896"/>
+          </a:xfrm>
+          <a:prstGeom prst="rect">
+            <a:avLst/>
+          </a:prstGeom>
+          <a:noFill/>
+          <a:ln/>
+        </p:spPr>
+        <p:txBody>
+          <a:bodyPr wrap="square" lIns="0" tIns="0" rIns="0" bIns="0" rtlCol="0" anchor="ctr"/>
+          <a:lstStyle/>
+          <a:p>
+            <a:pPr eaLnBrk="0" latinLnBrk="0" algn="r" indent="0" marL="0">
+              <a:buNone/>
+            </a:pPr>
+            <a:r>
+              <a:rPr lang="en-US" sz="1150" b="1" dirty="0">
+                <a:solidFill>
+                  <a:srgbClr val="FFFFFF"/>
+                </a:solidFill>
+                <a:latin typeface="맑은 고딕" pitchFamily="34" charset="0"/>
+                <a:ea typeface="맑은 고딕" pitchFamily="34" charset="-122"/>
+                <a:cs typeface="맑은 고딕" pitchFamily="34" charset="-120"/>
+              </a:rPr>
+              <a:t>[ 전형 3단계 / 4단계 ]</a:t>
+            </a:r>
+            <a:endParaRPr lang="en-US" sz="1150" dirty="0"/>
+          </a:p>
+        </p:txBody>
+      </p:sp>
+      <p:sp>
+        <p:nvSpPr>
+          <p:cNvPr id="7" name="Text 5"/>
+          <p:cNvSpPr txBox="1"/>
+          <p:nvPr/>
+        </p:nvSpPr>
+        <p:spPr>
+          <a:xfrm>
+            <a:off x="457200" y="1042416"/>
+            <a:ext cx="8229600" cy="274320"/>
+          </a:xfrm>
+          <a:prstGeom prst="rect">
+            <a:avLst/>
+          </a:prstGeom>
+          <a:noFill/>
+          <a:ln/>
+        </p:spPr>
+        <p:txBody>
+          <a:bodyPr wrap="square" lIns="0" tIns="0" rIns="0" bIns="0" rtlCol="0" anchor="ctr"/>
+          <a:lstStyle/>
+          <a:p>
+            <a:pPr eaLnBrk="0" latinLnBrk="0" indent="0" marL="0">
+              <a:buNone/>
+            </a:pPr>
+            <a:r>
+              <a:rPr lang="en-US" sz="1400" dirty="0">
+                <a:solidFill>
+                  <a:srgbClr val="000000"/>
+                </a:solidFill>
+                <a:latin typeface="HY동녘B" pitchFamily="34" charset="0"/>
+                <a:ea typeface="HY동녘B" pitchFamily="34" charset="-122"/>
+                <a:cs typeface="HY동녘B" pitchFamily="34" charset="-120"/>
+              </a:rPr>
+              <a:t>■ 평가방법 및 심사위원</a:t>
+            </a:r>
+            <a:endParaRPr lang="en-US" sz="1400" dirty="0"/>
+          </a:p>
+        </p:txBody>
+      </p:sp>
+      <p:sp>
+        <p:nvSpPr>
+          <p:cNvPr id="8" name="Text 6"/>
+          <p:cNvSpPr txBox="1"/>
+          <p:nvPr/>
+        </p:nvSpPr>
+        <p:spPr>
+          <a:xfrm>
+            <a:off x="658368" y="1389888"/>
+            <a:ext cx="237744" cy="237744"/>
+          </a:xfrm>
+          <a:prstGeom prst="rect">
+            <a:avLst/>
+          </a:prstGeom>
+          <a:noFill/>
+          <a:ln/>
+        </p:spPr>
+        <p:txBody>
+          <a:bodyPr wrap="square" lIns="0" tIns="0" rIns="0" bIns="0" rtlCol="0" anchor="t"/>
+          <a:lstStyle/>
+          <a:p>
+            <a:pPr eaLnBrk="0" latinLnBrk="0" indent="0" marL="0">
+              <a:buNone/>
+            </a:pPr>
+            <a:r>
+              <a:rPr lang="en-US" sz="1200" dirty="0">
+                <a:solidFill>
+                  <a:srgbClr val="000000"/>
+                </a:solidFill>
+                <a:latin typeface="맑은 고딕" pitchFamily="34" charset="0"/>
+                <a:ea typeface="맑은 고딕" pitchFamily="34" charset="-122"/>
+                <a:cs typeface="맑은 고딕" pitchFamily="34" charset="-120"/>
+              </a:rPr>
+              <a:t>○</a:t>
+            </a:r>
+            <a:endParaRPr lang="en-US" sz="1200" dirty="0"/>
+          </a:p>
+        </p:txBody>
+      </p:sp>
+      <p:sp>
+        <p:nvSpPr>
+          <p:cNvPr id="9" name="Text 7"/>
+          <p:cNvSpPr txBox="1"/>
+          <p:nvPr/>
+        </p:nvSpPr>
+        <p:spPr>
+          <a:xfrm>
+            <a:off x="914400" y="1389888"/>
+            <a:ext cx="7680960" cy="256032"/>
+          </a:xfrm>
+          <a:prstGeom prst="rect">
+            <a:avLst/>
+          </a:prstGeom>
+          <a:noFill/>
+          <a:ln/>
+        </p:spPr>
+        <p:txBody>
+          <a:bodyPr wrap="square" lIns="0" tIns="0" rIns="0" bIns="0" rtlCol="0" anchor="t"/>
+          <a:lstStyle/>
+          <a:p>
+            <a:pPr eaLnBrk="0" latinLnBrk="0" indent="0" marL="0">
+              <a:lnSpc>
+                <a:spcPts val="2000"/>
+              </a:lnSpc>
+              <a:buNone/>
+            </a:pPr>
+            <a:r>
+              <a:rPr lang="en-US" sz="1200" dirty="0">
+                <a:solidFill>
+                  <a:srgbClr val="000000"/>
+                </a:solidFill>
+                <a:latin typeface="맑은 고딕" pitchFamily="34" charset="0"/>
+                <a:ea typeface="맑은 고딕" pitchFamily="34" charset="-122"/>
+                <a:cs typeface="맑은 고딕" pitchFamily="34" charset="-120"/>
+              </a:rPr>
+              <a:t>평가방법 : 응시원서 및 자기소개서를 기초로 업무 적합성을 종합평가</a:t>
+            </a:r>
+            <a:endParaRPr lang="en-US" sz="1200" dirty="0"/>
+          </a:p>
+        </p:txBody>
+      </p:sp>
+      <p:sp>
+        <p:nvSpPr>
+          <p:cNvPr id="10" name="Text 8"/>
+          <p:cNvSpPr txBox="1"/>
+          <p:nvPr/>
+        </p:nvSpPr>
+        <p:spPr>
+          <a:xfrm>
+            <a:off x="658368" y="1700784"/>
+            <a:ext cx="237744" cy="237744"/>
+          </a:xfrm>
+          <a:prstGeom prst="rect">
+            <a:avLst/>
+          </a:prstGeom>
+          <a:noFill/>
+          <a:ln/>
+        </p:spPr>
+        <p:txBody>
+          <a:bodyPr wrap="square" lIns="0" tIns="0" rIns="0" bIns="0" rtlCol="0" anchor="t"/>
+          <a:lstStyle/>
+          <a:p>
+            <a:pPr eaLnBrk="0" latinLnBrk="0" indent="0" marL="0">
+              <a:buNone/>
+            </a:pPr>
+            <a:r>
+              <a:rPr lang="en-US" sz="1200" dirty="0">
+                <a:solidFill>
+                  <a:srgbClr val="000000"/>
+                </a:solidFill>
+                <a:latin typeface="맑은 고딕" pitchFamily="34" charset="0"/>
+                <a:ea typeface="맑은 고딕" pitchFamily="34" charset="-122"/>
+                <a:cs typeface="맑은 고딕" pitchFamily="34" charset="-120"/>
+              </a:rPr>
+              <a:t>○</a:t>
+            </a:r>
+            <a:endParaRPr lang="en-US" sz="1200" dirty="0"/>
+          </a:p>
+        </p:txBody>
+      </p:sp>
+      <p:sp>
+        <p:nvSpPr>
+          <p:cNvPr id="11" name="Text 9"/>
+          <p:cNvSpPr txBox="1"/>
+          <p:nvPr/>
+        </p:nvSpPr>
+        <p:spPr>
+          <a:xfrm>
+            <a:off x="914400" y="1700784"/>
+            <a:ext cx="7680960" cy="256032"/>
+          </a:xfrm>
+          <a:prstGeom prst="rect">
+            <a:avLst/>
+          </a:prstGeom>
+          <a:noFill/>
+          <a:ln/>
+        </p:spPr>
+        <p:txBody>
+          <a:bodyPr wrap="square" lIns="0" tIns="0" rIns="0" bIns="0" rtlCol="0" anchor="t"/>
+          <a:lstStyle/>
+          <a:p>
+            <a:pPr eaLnBrk="0" latinLnBrk="0" indent="0" marL="0">
+              <a:lnSpc>
+                <a:spcPts val="2000"/>
+              </a:lnSpc>
+              <a:buNone/>
+            </a:pPr>
+            <a:r>
+              <a:rPr lang="en-US" sz="1200" dirty="0">
+                <a:solidFill>
+                  <a:srgbClr val="000000"/>
+                </a:solidFill>
+                <a:latin typeface="맑은 고딕" pitchFamily="34" charset="0"/>
+                <a:ea typeface="맑은 고딕" pitchFamily="34" charset="-122"/>
+                <a:cs typeface="맑은 고딕" pitchFamily="34" charset="-120"/>
+              </a:rPr>
+              <a:t>심사위원 : 3명 (교장 1명, 법인관계자 1명, 외부위원 1명)</a:t>
+            </a:r>
+            <a:endParaRPr lang="en-US" sz="1200" dirty="0"/>
+          </a:p>
+        </p:txBody>
+      </p:sp>
+      <p:sp>
+        <p:nvSpPr>
+          <p:cNvPr id="12" name="Text 10"/>
+          <p:cNvSpPr txBox="1"/>
+          <p:nvPr/>
+        </p:nvSpPr>
+        <p:spPr>
+          <a:xfrm>
+            <a:off x="457200" y="2157984"/>
+            <a:ext cx="8229600" cy="274320"/>
+          </a:xfrm>
+          <a:prstGeom prst="rect">
+            <a:avLst/>
+          </a:prstGeom>
+          <a:noFill/>
+          <a:ln/>
+        </p:spPr>
+        <p:txBody>
+          <a:bodyPr wrap="square" lIns="0" tIns="0" rIns="0" bIns="0" rtlCol="0" anchor="ctr"/>
+          <a:lstStyle/>
+          <a:p>
+            <a:pPr eaLnBrk="0" latinLnBrk="0" indent="0" marL="0">
+              <a:buNone/>
+            </a:pPr>
+            <a:r>
+              <a:rPr lang="en-US" sz="1400" dirty="0">
+                <a:solidFill>
+                  <a:srgbClr val="000000"/>
+                </a:solidFill>
+                <a:latin typeface="HY동녘B" pitchFamily="34" charset="0"/>
+                <a:ea typeface="HY동녘B" pitchFamily="34" charset="-122"/>
+                <a:cs typeface="HY동녘B" pitchFamily="34" charset="-120"/>
+              </a:rPr>
+              <a:t>■ 평가 항목 및 배점</a:t>
+            </a:r>
+            <a:endParaRPr lang="en-US" sz="1400" dirty="0"/>
+          </a:p>
+        </p:txBody>
+      </p:sp>
+      <p:graphicFrame>
+        <p:nvGraphicFramePr>
+          <p:cNvPr id="10" name="Table 0"/>
+          <p:cNvGraphicFramePr>
+            <a:graphicFrameLocks noGrp="1"/>
+          </p:cNvGraphicFramePr>
+          <p:nvPr>
+            <p:extLst>
+              <p:ext uri="{D42A27DB-BD31-4B8C-83A1-F6EECF244321}">
+                <p14:modId xmlns:p14="http://schemas.microsoft.com/office/powerpoint/2010/main" val="1579011935"/>
+              </p:ext>
+            </p:extLst>
+          </p:nvPr>
+        </p:nvGraphicFramePr>
+        <p:xfrm>
+          <a:off x="914400" y="2523744"/>
+          <a:ext cx="6035040" cy="914400"/>
+        </p:xfrm>
+        <a:graphic>
+          <a:graphicData uri="http://schemas.openxmlformats.org/drawingml/2006/table">
+            <a:tbl>
+              <a:tblPr/>
+              <a:tblGrid>
+                <a:gridCol w="3108960"/>
+                <a:gridCol w="1463040"/>
+                <a:gridCol w="1463040"/>
+              </a:tblGrid>
+              <a:tr h="310896">
+                <a:tc>
+                  <a:txBody>
+                    <a:bodyPr/>
+                    <a:lstStyle/>
+                    <a:p>
+                      <a:pPr eaLnBrk="0" latinLnBrk="0" algn="ctr" indent="0" marL="0">
+                        <a:buNone/>
+                      </a:pPr>
+                      <a:r>
+                        <a:rPr lang="en-US" sz="1050" b="1" dirty="0">
+                          <a:solidFill>
+                            <a:srgbClr val="000000"/>
+                          </a:solidFill>
+                          <a:latin typeface="맑은 고딕" pitchFamily="34" charset="0"/>
+                          <a:ea typeface="맑은 고딕" pitchFamily="34" charset="-122"/>
+                          <a:cs typeface="맑은 고딕" pitchFamily="34" charset="-120"/>
+                        </a:rPr>
+                        <a:t>평가항목</a:t>
+                      </a:r>
+                      <a:endParaRPr lang="en-US" sz="1050" dirty="0">
+                        <a:latin typeface="맑은 고딕" charset="0"/>
+                        <a:ea typeface="맑은 고딕" charset="0"/>
+                        <a:cs typeface="맑은 고딕" charset="0"/>
+                      </a:endParaRPr>
+                    </a:p>
+                  </a:txBody>
+                  <a:tcPr marL="38100" marR="38100" marT="38100" marB="38100" anchor="ctr">
+                    <a:lnL w="12700" cap="flat" cmpd="sng" algn="ctr">
+                      <a:solidFill>
+                        <a:srgbClr val="000000"/>
+                      </a:solidFill>
+                      <a:prstDash val="solid"/>
+                      <a:round/>
+                      <a:headEnd type="none" w="med" len="med"/>
+                      <a:tailEnd type="none" w="med" len="med"/>
+                    </a:lnL>
+                    <a:lnR w="12700" cap="flat" cmpd="sng" algn="ctr">
+                      <a:solidFill>
+                        <a:srgbClr val="000000"/>
+                      </a:solidFill>
+                      <a:prstDash val="solid"/>
+                      <a:round/>
+                      <a:headEnd type="none" w="med" len="med"/>
+                      <a:tailEnd type="none" w="med" len="med"/>
+                    </a:lnR>
+                    <a:lnT w="12700" cap="flat" cmpd="sng" algn="ctr">
+                      <a:solidFill>
+                        <a:srgbClr val="000000"/>
+                      </a:solidFill>
+                      <a:prstDash val="solid"/>
+                      <a:round/>
+                      <a:headEnd type="none" w="med" len="med"/>
+                      <a:tailEnd type="none" w="med" len="med"/>
+                    </a:lnT>
+                    <a:lnB w="12700" cap="flat" cmpd="sng" algn="ctr">
+                      <a:solidFill>
+                        <a:srgbClr val="000000"/>
+                      </a:solidFill>
+                      <a:prstDash val="solid"/>
+                      <a:round/>
+                      <a:headEnd type="none" w="med" len="med"/>
+                      <a:tailEnd type="none" w="med" len="med"/>
+                    </a:lnB>
+                    <a:solidFill>
+                      <a:srgbClr val="CCFFFF"/>
+                    </a:solidFill>
+                  </a:tcPr>
+                </a:tc>
+                <a:tc>
+                  <a:txBody>
+                    <a:bodyPr/>
+                    <a:lstStyle/>
+                    <a:p>
+                      <a:pPr eaLnBrk="0" latinLnBrk="0" algn="ctr" indent="0" marL="0">
+                        <a:buNone/>
+                      </a:pPr>
+                      <a:r>
+                        <a:rPr lang="en-US" sz="1050" b="1" dirty="0">
+                          <a:solidFill>
+                            <a:srgbClr val="000000"/>
+                          </a:solidFill>
+                          <a:latin typeface="맑은 고딕" pitchFamily="34" charset="0"/>
+                          <a:ea typeface="맑은 고딕" pitchFamily="34" charset="-122"/>
+                          <a:cs typeface="맑은 고딕" pitchFamily="34" charset="-120"/>
+                        </a:rPr>
+                        <a:t>배 점</a:t>
+                      </a:r>
+                      <a:endParaRPr lang="en-US" sz="1050" dirty="0">
+                        <a:latin typeface="맑은 고딕" charset="0"/>
+                        <a:ea typeface="맑은 고딕" charset="0"/>
+                        <a:cs typeface="맑은 고딕" charset="0"/>
+                      </a:endParaRPr>
+                    </a:p>
+                  </a:txBody>
+                  <a:tcPr marL="38100" marR="38100" marT="38100" marB="38100" anchor="ctr">
+                    <a:lnL w="12700" cap="flat" cmpd="sng" algn="ctr">
+                      <a:solidFill>
+                        <a:srgbClr val="000000"/>
+                      </a:solidFill>
+                      <a:prstDash val="solid"/>
+                      <a:round/>
+                      <a:headEnd type="none" w="med" len="med"/>
+                      <a:tailEnd type="none" w="med" len="med"/>
+                    </a:lnL>
+                    <a:lnR w="12700" cap="flat" cmpd="sng" algn="ctr">
+                      <a:solidFill>
+                        <a:srgbClr val="000000"/>
+                      </a:solidFill>
+                      <a:prstDash val="solid"/>
+                      <a:round/>
+                      <a:headEnd type="none" w="med" len="med"/>
+                      <a:tailEnd type="none" w="med" len="med"/>
+                    </a:lnR>
+                    <a:lnT w="12700" cap="flat" cmpd="sng" algn="ctr">
+                      <a:solidFill>
+                        <a:srgbClr val="000000"/>
+                      </a:solidFill>
+                      <a:prstDash val="solid"/>
+                      <a:round/>
+                      <a:headEnd type="none" w="med" len="med"/>
+                      <a:tailEnd type="none" w="med" len="med"/>
+                    </a:lnT>
+                    <a:lnB w="12700" cap="flat" cmpd="sng" algn="ctr">
+                      <a:solidFill>
+                        <a:srgbClr val="000000"/>
+                      </a:solidFill>
+                      <a:prstDash val="solid"/>
+                      <a:round/>
+                      <a:headEnd type="none" w="med" len="med"/>
+                      <a:tailEnd type="none" w="med" len="med"/>
+                    </a:lnB>
+                    <a:solidFill>
+                      <a:srgbClr val="CCFFFF"/>
+                    </a:solidFill>
+                  </a:tcPr>
+                </a:tc>
+                <a:tc>
+                  <a:txBody>
+                    <a:bodyPr/>
+                    <a:lstStyle/>
+                    <a:p>
+                      <a:pPr eaLnBrk="0" latinLnBrk="0" algn="ctr" indent="0" marL="0">
+                        <a:buNone/>
+                      </a:pPr>
+                      <a:r>
+                        <a:rPr lang="en-US" sz="1050" b="1" dirty="0">
+                          <a:solidFill>
+                            <a:srgbClr val="000000"/>
+                          </a:solidFill>
+                          <a:latin typeface="맑은 고딕" pitchFamily="34" charset="0"/>
+                          <a:ea typeface="맑은 고딕" pitchFamily="34" charset="-122"/>
+                          <a:cs typeface="맑은 고딕" pitchFamily="34" charset="-120"/>
+                        </a:rPr>
+                        <a:t>합격배수</a:t>
+                      </a:r>
+                      <a:endParaRPr lang="en-US" sz="1050" dirty="0">
+                        <a:latin typeface="맑은 고딕" charset="0"/>
+                        <a:ea typeface="맑은 고딕" charset="0"/>
+                        <a:cs typeface="맑은 고딕" charset="0"/>
+                      </a:endParaRPr>
+                    </a:p>
+                  </a:txBody>
+                  <a:tcPr marL="38100" marR="38100" marT="38100" marB="38100" anchor="ctr">
+                    <a:lnL w="12700" cap="flat" cmpd="sng" algn="ctr">
+                      <a:solidFill>
+                        <a:srgbClr val="000000"/>
+                      </a:solidFill>
+                      <a:prstDash val="solid"/>
+                      <a:round/>
+                      <a:headEnd type="none" w="med" len="med"/>
+                      <a:tailEnd type="none" w="med" len="med"/>
+                    </a:lnL>
+                    <a:lnR w="12700" cap="flat" cmpd="sng" algn="ctr">
+                      <a:solidFill>
+                        <a:srgbClr val="000000"/>
+                      </a:solidFill>
+                      <a:prstDash val="solid"/>
+                      <a:round/>
+                      <a:headEnd type="none" w="med" len="med"/>
+                      <a:tailEnd type="none" w="med" len="med"/>
+                    </a:lnR>
+                    <a:lnT w="12700" cap="flat" cmpd="sng" algn="ctr">
+                      <a:solidFill>
+                        <a:srgbClr val="000000"/>
+                      </a:solidFill>
+                      <a:prstDash val="solid"/>
+                      <a:round/>
+                      <a:headEnd type="none" w="med" len="med"/>
+                      <a:tailEnd type="none" w="med" len="med"/>
+                    </a:lnT>
+                    <a:lnB w="12700" cap="flat" cmpd="sng" algn="ctr">
+                      <a:solidFill>
+                        <a:srgbClr val="000000"/>
+                      </a:solidFill>
+                      <a:prstDash val="solid"/>
+                      <a:round/>
+                      <a:headEnd type="none" w="med" len="med"/>
+                      <a:tailEnd type="none" w="med" len="med"/>
+                    </a:lnB>
+                    <a:solidFill>
+                      <a:srgbClr val="CCFFFF"/>
+                    </a:solidFill>
+                  </a:tcPr>
+                </a:tc>
+              </a:tr>
+              <a:tr h="329184">
+                <a:tc>
+                  <a:txBody>
+                    <a:bodyPr/>
+                    <a:lstStyle/>
+                    <a:p>
+                      <a:pPr eaLnBrk="0" latinLnBrk="0" algn="l" indent="0" marL="0">
+                        <a:buNone/>
+                      </a:pPr>
+                      <a:r>
+                        <a:rPr lang="en-US" sz="1050" dirty="0">
+                          <a:solidFill>
+                            <a:srgbClr val="000000"/>
+                          </a:solidFill>
+                          <a:latin typeface="맑은 고딕" pitchFamily="34" charset="0"/>
+                          <a:ea typeface="맑은 고딕" pitchFamily="34" charset="-122"/>
+                          <a:cs typeface="맑은 고딕" pitchFamily="34" charset="-120"/>
+                        </a:rPr>
                         <a:t>직무수행능력</a:t>
                       </a:r>
                       <a:endParaRPr lang="en-US" sz="1050" dirty="0">
@@ -17682,1611 +20082,6 @@
               <a:t>최종합격 예정자에 대하여 법인에 임용 제청을 요청함.</a:t>
             </a:r>
             <a:endParaRPr lang="en-US" sz="1100" dirty="0"/>
-          </a:p>
-        </p:txBody>
-      </p:sp>
-    </p:spTree>
-  </p:cSld>
-  <p:clrMapOvr>
-    <a:masterClrMapping/>
-  </p:clrMapOvr>
-</p:sld>
-</file>
-
-<file path=ppt/slides/slide9.xml><?xml version="1.0" encoding="utf-8"?>
-<p:sld xmlns:a="http://schemas.openxmlformats.org/drawingml/2006/main" xmlns:r="http://schemas.openxmlformats.org/officeDocument/2006/relationships" xmlns:p="http://schemas.openxmlformats.org/presentationml/2006/main">
-  <p:cSld name="Slide 9">
-    <p:bg>
-      <p:bgPr>
-        <a:solidFill>
-          <a:srgbClr val="FFFFFF"/>
-        </a:solidFill>
-      </p:bgPr>
-    </p:bg>
-    <p:spTree>
-      <p:nvGrpSpPr>
-        <p:cNvPr id="1" name=""/>
-        <p:cNvGrpSpPr/>
-        <p:nvPr/>
-      </p:nvGrpSpPr>
-      <p:grpSpPr>
-        <a:xfrm>
-          <a:off x="0" y="0"/>
-          <a:ext cx="0" cy="0"/>
-          <a:chOff x="0" y="0"/>
-          <a:chExt cx="0" cy="0"/>
-        </a:xfrm>
-      </p:grpSpPr>
-      <p:sp>
-        <p:nvSpPr>
-          <p:cNvPr id="2" name="Shape 0"/>
-          <p:cNvSpPr/>
-          <p:nvPr/>
-        </p:nvSpPr>
-        <p:spPr>
-          <a:xfrm>
-            <a:off x="0" y="6620256"/>
-            <a:ext cx="9144000" cy="237744"/>
-          </a:xfrm>
-          <a:prstGeom prst="rect">
-            <a:avLst/>
-          </a:prstGeom>
-          <a:solidFill>
-            <a:srgbClr val="4FADD1"/>
-          </a:solidFill>
-          <a:ln w="6350">
-            <a:solidFill>
-              <a:srgbClr val="4FADD1"/>
-            </a:solidFill>
-            <a:prstDash val="solid"/>
-          </a:ln>
-        </p:spPr>
-      </p:sp>
-      <p:sp>
-        <p:nvSpPr>
-          <p:cNvPr id="3" name="Shape 1"/>
-          <p:cNvSpPr/>
-          <p:nvPr/>
-        </p:nvSpPr>
-        <p:spPr>
-          <a:xfrm>
-            <a:off x="0" y="0"/>
-            <a:ext cx="9144000" cy="713232"/>
-          </a:xfrm>
-          <a:prstGeom prst="rect">
-            <a:avLst/>
-          </a:prstGeom>
-          <a:solidFill>
-            <a:srgbClr val="4FADD1"/>
-          </a:solidFill>
-          <a:ln w="6350">
-            <a:solidFill>
-              <a:srgbClr val="4FADD1"/>
-            </a:solidFill>
-            <a:prstDash val="solid"/>
-          </a:ln>
-        </p:spPr>
-      </p:sp>
-      <p:sp>
-        <p:nvSpPr>
-          <p:cNvPr id="4" name="Text 2"/>
-          <p:cNvSpPr txBox="1"/>
-          <p:nvPr/>
-        </p:nvSpPr>
-        <p:spPr>
-          <a:xfrm>
-            <a:off x="3657600" y="6291072"/>
-            <a:ext cx="1828800" cy="274320"/>
-          </a:xfrm>
-          <a:prstGeom prst="rect">
-            <a:avLst/>
-          </a:prstGeom>
-          <a:noFill/>
-          <a:ln/>
-        </p:spPr>
-        <p:txBody>
-          <a:bodyPr wrap="square" lIns="0" tIns="0" rIns="0" bIns="0" rtlCol="0" anchor="ctr"/>
-          <a:lstStyle/>
-          <a:p>
-            <a:pPr eaLnBrk="0" latinLnBrk="0" algn="ctr" indent="0" marL="0">
-              <a:buNone/>
-            </a:pPr>
-            <a:r>
-              <a:rPr lang="en-US" sz="1100" dirty="0">
-                <a:solidFill>
-                  <a:srgbClr val="000000"/>
-                </a:solidFill>
-                <a:latin typeface="맑은 고딕" pitchFamily="34" charset="0"/>
-                <a:ea typeface="맑은 고딕" pitchFamily="34" charset="-122"/>
-                <a:cs typeface="맑은 고딕" pitchFamily="34" charset="-120"/>
-              </a:rPr>
-              <a:t>- 8 -</a:t>
-            </a:r>
-            <a:endParaRPr lang="en-US" sz="1100" dirty="0"/>
-          </a:p>
-        </p:txBody>
-      </p:sp>
-      <p:sp>
-        <p:nvSpPr>
-          <p:cNvPr id="5" name="Text 3"/>
-          <p:cNvSpPr txBox="1"/>
-          <p:nvPr/>
-        </p:nvSpPr>
-        <p:spPr>
-          <a:xfrm>
-            <a:off x="457200" y="82296"/>
-            <a:ext cx="5120640" cy="548640"/>
-          </a:xfrm>
-          <a:prstGeom prst="rect">
-            <a:avLst/>
-          </a:prstGeom>
-          <a:noFill/>
-          <a:ln/>
-        </p:spPr>
-        <p:txBody>
-          <a:bodyPr wrap="square" lIns="0" tIns="0" rIns="0" bIns="0" rtlCol="0" anchor="ctr"/>
-          <a:lstStyle/>
-          <a:p>
-            <a:pPr eaLnBrk="0" latinLnBrk="0" indent="0" marL="0">
-              <a:buNone/>
-            </a:pPr>
-            <a:r>
-              <a:rPr lang="en-US" sz="2600" dirty="0">
-                <a:solidFill>
-                  <a:srgbClr val="FFFFFF"/>
-                </a:solidFill>
-                <a:latin typeface="HY헤드라인M" pitchFamily="34" charset="0"/>
-                <a:ea typeface="HY헤드라인M" pitchFamily="34" charset="-122"/>
-                <a:cs typeface="HY헤드라인M" pitchFamily="34" charset="-120"/>
-              </a:rPr>
-              <a:t>8. 결격사유 검증</a:t>
-            </a:r>
-            <a:endParaRPr lang="en-US" sz="2600" dirty="0"/>
-          </a:p>
-        </p:txBody>
-      </p:sp>
-      <p:sp>
-        <p:nvSpPr>
-          <p:cNvPr id="6" name="Text 4"/>
-          <p:cNvSpPr txBox="1"/>
-          <p:nvPr/>
-        </p:nvSpPr>
-        <p:spPr>
-          <a:xfrm>
-            <a:off x="4937760" y="201168"/>
-            <a:ext cx="3749040" cy="310896"/>
-          </a:xfrm>
-          <a:prstGeom prst="rect">
-            <a:avLst/>
-          </a:prstGeom>
-          <a:noFill/>
-          <a:ln/>
-        </p:spPr>
-        <p:txBody>
-          <a:bodyPr wrap="square" lIns="0" tIns="0" rIns="0" bIns="0" rtlCol="0" anchor="ctr"/>
-          <a:lstStyle/>
-          <a:p>
-            <a:pPr eaLnBrk="0" latinLnBrk="0" algn="r" indent="0" marL="0">
-              <a:buNone/>
-            </a:pPr>
-            <a:r>
-              <a:rPr lang="en-US" sz="1150" b="1" dirty="0">
-                <a:solidFill>
-                  <a:srgbClr val="FFFFFF"/>
-                </a:solidFill>
-                <a:latin typeface="맑은 고딕" pitchFamily="34" charset="0"/>
-                <a:ea typeface="맑은 고딕" pitchFamily="34" charset="-122"/>
-                <a:cs typeface="맑은 고딕" pitchFamily="34" charset="-120"/>
-              </a:rPr>
-              <a:t>[ 전형 4단계 / 4단계 ]</a:t>
-            </a:r>
-            <a:endParaRPr lang="en-US" sz="1150" dirty="0"/>
-          </a:p>
-        </p:txBody>
-      </p:sp>
-      <p:sp>
-        <p:nvSpPr>
-          <p:cNvPr id="7" name="Text 5"/>
-          <p:cNvSpPr txBox="1"/>
-          <p:nvPr/>
-        </p:nvSpPr>
-        <p:spPr>
-          <a:xfrm>
-            <a:off x="457200" y="1042416"/>
-            <a:ext cx="8229600" cy="274320"/>
-          </a:xfrm>
-          <a:prstGeom prst="rect">
-            <a:avLst/>
-          </a:prstGeom>
-          <a:noFill/>
-          <a:ln/>
-        </p:spPr>
-        <p:txBody>
-          <a:bodyPr wrap="square" lIns="0" tIns="0" rIns="0" bIns="0" rtlCol="0" anchor="ctr"/>
-          <a:lstStyle/>
-          <a:p>
-            <a:pPr eaLnBrk="0" latinLnBrk="0" indent="0" marL="0">
-              <a:buNone/>
-            </a:pPr>
-            <a:r>
-              <a:rPr lang="en-US" sz="1400" dirty="0">
-                <a:solidFill>
-                  <a:srgbClr val="000000"/>
-                </a:solidFill>
-                <a:latin typeface="HY동녘B" pitchFamily="34" charset="0"/>
-                <a:ea typeface="HY동녘B" pitchFamily="34" charset="-122"/>
-                <a:cs typeface="HY동녘B" pitchFamily="34" charset="-120"/>
-              </a:rPr>
-              <a:t>■ 검증 대상 및 내용</a:t>
-            </a:r>
-            <a:endParaRPr lang="en-US" sz="1400" dirty="0"/>
-          </a:p>
-        </p:txBody>
-      </p:sp>
-      <p:sp>
-        <p:nvSpPr>
-          <p:cNvPr id="8" name="Text 6"/>
-          <p:cNvSpPr txBox="1"/>
-          <p:nvPr/>
-        </p:nvSpPr>
-        <p:spPr>
-          <a:xfrm>
-            <a:off x="658368" y="1389888"/>
-            <a:ext cx="237744" cy="237744"/>
-          </a:xfrm>
-          <a:prstGeom prst="rect">
-            <a:avLst/>
-          </a:prstGeom>
-          <a:noFill/>
-          <a:ln/>
-        </p:spPr>
-        <p:txBody>
-          <a:bodyPr wrap="square" lIns="0" tIns="0" rIns="0" bIns="0" rtlCol="0" anchor="t"/>
-          <a:lstStyle/>
-          <a:p>
-            <a:pPr eaLnBrk="0" latinLnBrk="0" indent="0" marL="0">
-              <a:buNone/>
-            </a:pPr>
-            <a:r>
-              <a:rPr lang="en-US" sz="1200" dirty="0">
-                <a:solidFill>
-                  <a:srgbClr val="000000"/>
-                </a:solidFill>
-                <a:latin typeface="맑은 고딕" pitchFamily="34" charset="0"/>
-                <a:ea typeface="맑은 고딕" pitchFamily="34" charset="-122"/>
-                <a:cs typeface="맑은 고딕" pitchFamily="34" charset="-120"/>
-              </a:rPr>
-              <a:t>○</a:t>
-            </a:r>
-            <a:endParaRPr lang="en-US" sz="1200" dirty="0"/>
-          </a:p>
-        </p:txBody>
-      </p:sp>
-      <p:sp>
-        <p:nvSpPr>
-          <p:cNvPr id="9" name="Text 7"/>
-          <p:cNvSpPr txBox="1"/>
-          <p:nvPr/>
-        </p:nvSpPr>
-        <p:spPr>
-          <a:xfrm>
-            <a:off x="914400" y="1389888"/>
-            <a:ext cx="7680960" cy="256032"/>
-          </a:xfrm>
-          <a:prstGeom prst="rect">
-            <a:avLst/>
-          </a:prstGeom>
-          <a:noFill/>
-          <a:ln/>
-        </p:spPr>
-        <p:txBody>
-          <a:bodyPr wrap="square" lIns="0" tIns="0" rIns="0" bIns="0" rtlCol="0" anchor="t"/>
-          <a:lstStyle/>
-          <a:p>
-            <a:pPr eaLnBrk="0" latinLnBrk="0" indent="0" marL="0">
-              <a:lnSpc>
-                <a:spcPts val="2000"/>
-              </a:lnSpc>
-              <a:buNone/>
-            </a:pPr>
-            <a:r>
-              <a:rPr lang="en-US" sz="1200" dirty="0">
-                <a:solidFill>
-                  <a:srgbClr val="000000"/>
-                </a:solidFill>
-                <a:latin typeface="맑은 고딕" pitchFamily="34" charset="0"/>
-                <a:ea typeface="맑은 고딕" pitchFamily="34" charset="-122"/>
-                <a:cs typeface="맑은 고딕" pitchFamily="34" charset="-120"/>
-              </a:rPr>
-              <a:t>대상자 : 최종합격 예정자</a:t>
-            </a:r>
-            <a:endParaRPr lang="en-US" sz="1200" dirty="0"/>
-          </a:p>
-        </p:txBody>
-      </p:sp>
-      <p:sp>
-        <p:nvSpPr>
-          <p:cNvPr id="10" name="Text 8"/>
-          <p:cNvSpPr txBox="1"/>
-          <p:nvPr/>
-        </p:nvSpPr>
-        <p:spPr>
-          <a:xfrm>
-            <a:off x="658368" y="1700784"/>
-            <a:ext cx="237744" cy="237744"/>
-          </a:xfrm>
-          <a:prstGeom prst="rect">
-            <a:avLst/>
-          </a:prstGeom>
-          <a:noFill/>
-          <a:ln/>
-        </p:spPr>
-        <p:txBody>
-          <a:bodyPr wrap="square" lIns="0" tIns="0" rIns="0" bIns="0" rtlCol="0" anchor="t"/>
-          <a:lstStyle/>
-          <a:p>
-            <a:pPr eaLnBrk="0" latinLnBrk="0" indent="0" marL="0">
-              <a:buNone/>
-            </a:pPr>
-            <a:r>
-              <a:rPr lang="en-US" sz="1200" dirty="0">
-                <a:solidFill>
-                  <a:srgbClr val="000000"/>
-                </a:solidFill>
-                <a:latin typeface="맑은 고딕" pitchFamily="34" charset="0"/>
-                <a:ea typeface="맑은 고딕" pitchFamily="34" charset="-122"/>
-                <a:cs typeface="맑은 고딕" pitchFamily="34" charset="-120"/>
-              </a:rPr>
-              <a:t>○</a:t>
-            </a:r>
-            <a:endParaRPr lang="en-US" sz="1200" dirty="0"/>
-          </a:p>
-        </p:txBody>
-      </p:sp>
-      <p:sp>
-        <p:nvSpPr>
-          <p:cNvPr id="11" name="Text 9"/>
-          <p:cNvSpPr txBox="1"/>
-          <p:nvPr/>
-        </p:nvSpPr>
-        <p:spPr>
-          <a:xfrm>
-            <a:off x="914400" y="1700784"/>
-            <a:ext cx="7680960" cy="256032"/>
-          </a:xfrm>
-          <a:prstGeom prst="rect">
-            <a:avLst/>
-          </a:prstGeom>
-          <a:noFill/>
-          <a:ln/>
-        </p:spPr>
-        <p:txBody>
-          <a:bodyPr wrap="square" lIns="0" tIns="0" rIns="0" bIns="0" rtlCol="0" anchor="t"/>
-          <a:lstStyle/>
-          <a:p>
-            <a:pPr eaLnBrk="0" latinLnBrk="0" indent="0" marL="0">
-              <a:lnSpc>
-                <a:spcPts val="2000"/>
-              </a:lnSpc>
-              <a:buNone/>
-            </a:pPr>
-            <a:r>
-              <a:rPr lang="en-US" sz="1200" dirty="0">
-                <a:solidFill>
-                  <a:srgbClr val="000000"/>
-                </a:solidFill>
-                <a:latin typeface="맑은 고딕" pitchFamily="34" charset="0"/>
-                <a:ea typeface="맑은 고딕" pitchFamily="34" charset="-122"/>
-                <a:cs typeface="맑은 고딕" pitchFamily="34" charset="-120"/>
-              </a:rPr>
-              <a:t>검증내용 : 임용 결격사유 해당 여부 확인</a:t>
-            </a:r>
-            <a:endParaRPr lang="en-US" sz="1200" dirty="0"/>
-          </a:p>
-        </p:txBody>
-      </p:sp>
-      <p:sp>
-        <p:nvSpPr>
-          <p:cNvPr id="12" name="Text 10"/>
-          <p:cNvSpPr txBox="1"/>
-          <p:nvPr/>
-        </p:nvSpPr>
-        <p:spPr>
-          <a:xfrm>
-            <a:off x="457200" y="2157984"/>
-            <a:ext cx="8229600" cy="274320"/>
-          </a:xfrm>
-          <a:prstGeom prst="rect">
-            <a:avLst/>
-          </a:prstGeom>
-          <a:noFill/>
-          <a:ln/>
-        </p:spPr>
-        <p:txBody>
-          <a:bodyPr wrap="square" lIns="0" tIns="0" rIns="0" bIns="0" rtlCol="0" anchor="ctr"/>
-          <a:lstStyle/>
-          <a:p>
-            <a:pPr eaLnBrk="0" latinLnBrk="0" indent="0" marL="0">
-              <a:buNone/>
-            </a:pPr>
-            <a:r>
-              <a:rPr lang="en-US" sz="1400" dirty="0">
-                <a:solidFill>
-                  <a:srgbClr val="000000"/>
-                </a:solidFill>
-                <a:latin typeface="HY동녘B" pitchFamily="34" charset="0"/>
-                <a:ea typeface="HY동녘B" pitchFamily="34" charset="-122"/>
-                <a:cs typeface="HY동녘B" pitchFamily="34" charset="-120"/>
-              </a:rPr>
-              <a:t>■ 채용신체검사</a:t>
-            </a:r>
-            <a:endParaRPr lang="en-US" sz="1400" dirty="0"/>
-          </a:p>
-        </p:txBody>
-      </p:sp>
-      <p:graphicFrame>
-        <p:nvGraphicFramePr>
-          <p:cNvPr id="10" name="Table 0"/>
-          <p:cNvGraphicFramePr>
-            <a:graphicFrameLocks noGrp="1"/>
-          </p:cNvGraphicFramePr>
-          <p:nvPr>
-            <p:extLst>
-              <p:ext uri="{D42A27DB-BD31-4B8C-83A1-F6EECF244321}">
-                <p14:modId xmlns:p14="http://schemas.microsoft.com/office/powerpoint/2010/main" val="1579011935"/>
-              </p:ext>
-            </p:extLst>
-          </p:nvPr>
-        </p:nvGraphicFramePr>
-        <p:xfrm>
-          <a:off x="914400" y="2523744"/>
-          <a:ext cx="7772400" cy="914400"/>
-        </p:xfrm>
-        <a:graphic>
-          <a:graphicData uri="http://schemas.openxmlformats.org/drawingml/2006/table">
-            <a:tbl>
-              <a:tblPr/>
-              <a:tblGrid>
-                <a:gridCol w="1371600"/>
-                <a:gridCol w="6400800"/>
-              </a:tblGrid>
-              <a:tr h="310896">
-                <a:tc>
-                  <a:txBody>
-                    <a:bodyPr/>
-                    <a:lstStyle/>
-                    <a:p>
-                      <a:pPr eaLnBrk="0" latinLnBrk="0" algn="ctr" indent="0" marL="0">
-                        <a:buNone/>
-                      </a:pPr>
-                      <a:r>
-                        <a:rPr lang="en-US" sz="1050" b="1" dirty="0">
-                          <a:solidFill>
-                            <a:srgbClr val="000000"/>
-                          </a:solidFill>
-                          <a:latin typeface="맑은 고딕" pitchFamily="34" charset="0"/>
-                          <a:ea typeface="맑은 고딕" pitchFamily="34" charset="-122"/>
-                          <a:cs typeface="맑은 고딕" pitchFamily="34" charset="-120"/>
-                        </a:rPr>
-                        <a:t>구분</a:t>
-                      </a:r>
-                      <a:endParaRPr lang="en-US" sz="1050" dirty="0">
-                        <a:latin typeface="맑은 고딕" charset="0"/>
-                        <a:ea typeface="맑은 고딕" charset="0"/>
-                        <a:cs typeface="맑은 고딕" charset="0"/>
-                      </a:endParaRPr>
-                    </a:p>
-                  </a:txBody>
-                  <a:tcPr marL="38100" marR="38100" marT="38100" marB="38100" anchor="ctr">
-                    <a:lnL w="12700" cap="flat" cmpd="sng" algn="ctr">
-                      <a:solidFill>
-                        <a:srgbClr val="000000"/>
-                      </a:solidFill>
-                      <a:prstDash val="solid"/>
-                      <a:round/>
-                      <a:headEnd type="none" w="med" len="med"/>
-                      <a:tailEnd type="none" w="med" len="med"/>
-                    </a:lnL>
-                    <a:lnR w="12700" cap="flat" cmpd="sng" algn="ctr">
-                      <a:solidFill>
-                        <a:srgbClr val="000000"/>
-                      </a:solidFill>
-                      <a:prstDash val="solid"/>
-                      <a:round/>
-                      <a:headEnd type="none" w="med" len="med"/>
-                      <a:tailEnd type="none" w="med" len="med"/>
-                    </a:lnR>
-                    <a:lnT w="12700" cap="flat" cmpd="sng" algn="ctr">
-                      <a:solidFill>
-                        <a:srgbClr val="000000"/>
-                      </a:solidFill>
-                      <a:prstDash val="solid"/>
-                      <a:round/>
-                      <a:headEnd type="none" w="med" len="med"/>
-                      <a:tailEnd type="none" w="med" len="med"/>
-                    </a:lnT>
-                    <a:lnB w="12700" cap="flat" cmpd="sng" algn="ctr">
-                      <a:solidFill>
-                        <a:srgbClr val="000000"/>
-                      </a:solidFill>
-                      <a:prstDash val="solid"/>
-                      <a:round/>
-                      <a:headEnd type="none" w="med" len="med"/>
-                      <a:tailEnd type="none" w="med" len="med"/>
-                    </a:lnB>
-                    <a:solidFill>
-                      <a:srgbClr val="CCFFFF"/>
-                    </a:solidFill>
-                  </a:tcPr>
-                </a:tc>
-                <a:tc>
-                  <a:txBody>
-                    <a:bodyPr/>
-                    <a:lstStyle/>
-                    <a:p>
-                      <a:pPr eaLnBrk="0" latinLnBrk="0" algn="ctr" indent="0" marL="0">
-                        <a:buNone/>
-                      </a:pPr>
-                      <a:r>
-                        <a:rPr lang="en-US" sz="1050" b="1" dirty="0">
-                          <a:solidFill>
-                            <a:srgbClr val="000000"/>
-                          </a:solidFill>
-                          <a:latin typeface="맑은 고딕" pitchFamily="34" charset="0"/>
-                          <a:ea typeface="맑은 고딕" pitchFamily="34" charset="-122"/>
-                          <a:cs typeface="맑은 고딕" pitchFamily="34" charset="-120"/>
-                        </a:rPr>
-                        <a:t>내 용</a:t>
-                      </a:r>
-                      <a:endParaRPr lang="en-US" sz="1050" dirty="0">
-                        <a:latin typeface="맑은 고딕" charset="0"/>
-                        <a:ea typeface="맑은 고딕" charset="0"/>
-                        <a:cs typeface="맑은 고딕" charset="0"/>
-                      </a:endParaRPr>
-                    </a:p>
-                  </a:txBody>
-                  <a:tcPr marL="38100" marR="38100" marT="38100" marB="38100" anchor="ctr">
-                    <a:lnL w="12700" cap="flat" cmpd="sng" algn="ctr">
-                      <a:solidFill>
-                        <a:srgbClr val="000000"/>
-                      </a:solidFill>
-                      <a:prstDash val="solid"/>
-                      <a:round/>
-                      <a:headEnd type="none" w="med" len="med"/>
-                      <a:tailEnd type="none" w="med" len="med"/>
-                    </a:lnL>
-                    <a:lnR w="12700" cap="flat" cmpd="sng" algn="ctr">
-                      <a:solidFill>
-                        <a:srgbClr val="000000"/>
-                      </a:solidFill>
-                      <a:prstDash val="solid"/>
-                      <a:round/>
-                      <a:headEnd type="none" w="med" len="med"/>
-                      <a:tailEnd type="none" w="med" len="med"/>
-                    </a:lnR>
-                    <a:lnT w="12700" cap="flat" cmpd="sng" algn="ctr">
-                      <a:solidFill>
-                        <a:srgbClr val="000000"/>
-                      </a:solidFill>
-                      <a:prstDash val="solid"/>
-                      <a:round/>
-                      <a:headEnd type="none" w="med" len="med"/>
-                      <a:tailEnd type="none" w="med" len="med"/>
-                    </a:lnT>
-                    <a:lnB w="12700" cap="flat" cmpd="sng" algn="ctr">
-                      <a:solidFill>
-                        <a:srgbClr val="000000"/>
-                      </a:solidFill>
-                      <a:prstDash val="solid"/>
-                      <a:round/>
-                      <a:headEnd type="none" w="med" len="med"/>
-                      <a:tailEnd type="none" w="med" len="med"/>
-                    </a:lnB>
-                    <a:solidFill>
-                      <a:srgbClr val="CCFFFF"/>
-                    </a:solidFill>
-                  </a:tcPr>
-                </a:tc>
-              </a:tr>
-              <a:tr h="347472">
-                <a:tc>
-                  <a:txBody>
-                    <a:bodyPr/>
-                    <a:lstStyle/>
-                    <a:p>
-                      <a:pPr eaLnBrk="0" latinLnBrk="0" algn="ctr" indent="0" marL="0">
-                        <a:buNone/>
-                      </a:pPr>
-                      <a:r>
-                        <a:rPr lang="en-US" sz="1050" dirty="0">
-                          <a:solidFill>
-                            <a:srgbClr val="000000"/>
-                          </a:solidFill>
-                          <a:latin typeface="맑은 고딕" pitchFamily="34" charset="0"/>
-                          <a:ea typeface="맑은 고딕" pitchFamily="34" charset="-122"/>
-                          <a:cs typeface="맑은 고딕" pitchFamily="34" charset="-120"/>
-                        </a:rPr>
-                        <a:t>시행근거</a:t>
-                      </a:r>
-                      <a:endParaRPr lang="en-US" sz="1050" dirty="0">
-                        <a:latin typeface="맑은 고딕" charset="0"/>
-                        <a:ea typeface="맑은 고딕" charset="0"/>
-                        <a:cs typeface="맑은 고딕" charset="0"/>
-                      </a:endParaRPr>
-                    </a:p>
-                  </a:txBody>
-                  <a:tcPr marL="38100" marR="38100" marT="38100" marB="38100" anchor="ctr">
-                    <a:lnL w="12700" cap="flat" cmpd="sng" algn="ctr">
-                      <a:solidFill>
-                        <a:srgbClr val="000000"/>
-                      </a:solidFill>
-                      <a:prstDash val="solid"/>
-                      <a:round/>
-                      <a:headEnd type="none" w="med" len="med"/>
-                      <a:tailEnd type="none" w="med" len="med"/>
-                    </a:lnL>
-                    <a:lnR w="12700" cap="flat" cmpd="sng" algn="ctr">
-                      <a:solidFill>
-                        <a:srgbClr val="000000"/>
-                      </a:solidFill>
-                      <a:prstDash val="solid"/>
-                      <a:round/>
-                      <a:headEnd type="none" w="med" len="med"/>
-                      <a:tailEnd type="none" w="med" len="med"/>
-                    </a:lnR>
-                    <a:lnT w="12700" cap="flat" cmpd="sng" algn="ctr">
-                      <a:solidFill>
-                        <a:srgbClr val="000000"/>
-                      </a:solidFill>
-                      <a:prstDash val="solid"/>
-                      <a:round/>
-                      <a:headEnd type="none" w="med" len="med"/>
-                      <a:tailEnd type="none" w="med" len="med"/>
-                    </a:lnT>
-                    <a:lnB w="12700" cap="flat" cmpd="sng" algn="ctr">
-                      <a:solidFill>
-                        <a:srgbClr val="000000"/>
-                      </a:solidFill>
-                      <a:prstDash val="solid"/>
-                      <a:round/>
-                      <a:headEnd type="none" w="med" len="med"/>
-                      <a:tailEnd type="none" w="med" len="med"/>
-                    </a:lnB>
-                  </a:tcPr>
-                </a:tc>
-                <a:tc>
-                  <a:txBody>
-                    <a:bodyPr/>
-                    <a:lstStyle/>
-                    <a:p>
-                      <a:pPr eaLnBrk="0" latinLnBrk="0" algn="l" indent="0" marL="0">
-                        <a:buNone/>
-                      </a:pPr>
-                      <a:r>
-                        <a:rPr lang="en-US" sz="1050" dirty="0">
-                          <a:solidFill>
-                            <a:srgbClr val="000000"/>
-                          </a:solidFill>
-                          <a:latin typeface="맑은 고딕" pitchFamily="34" charset="0"/>
-                          <a:ea typeface="맑은 고딕" pitchFamily="34" charset="-122"/>
-                          <a:cs typeface="맑은 고딕" pitchFamily="34" charset="-120"/>
-                        </a:rPr>
-                        <a:t>사무직원 인사 규정 (신규임용자 구비서류)</a:t>
-                      </a:r>
-                      <a:endParaRPr lang="en-US" sz="1050" dirty="0">
-                        <a:latin typeface="맑은 고딕" charset="0"/>
-                        <a:ea typeface="맑은 고딕" charset="0"/>
-                        <a:cs typeface="맑은 고딕" charset="0"/>
-                      </a:endParaRPr>
-                    </a:p>
-                  </a:txBody>
-                  <a:tcPr marL="38100" marR="38100" marT="38100" marB="38100" anchor="ctr">
-                    <a:lnL w="12700" cap="flat" cmpd="sng" algn="ctr">
-                      <a:solidFill>
-                        <a:srgbClr val="000000"/>
-                      </a:solidFill>
-                      <a:prstDash val="solid"/>
-                      <a:round/>
-                      <a:headEnd type="none" w="med" len="med"/>
-                      <a:tailEnd type="none" w="med" len="med"/>
-                    </a:lnL>
-                    <a:lnR w="12700" cap="flat" cmpd="sng" algn="ctr">
-                      <a:solidFill>
-                        <a:srgbClr val="000000"/>
-                      </a:solidFill>
-                      <a:prstDash val="solid"/>
-                      <a:round/>
-                      <a:headEnd type="none" w="med" len="med"/>
-                      <a:tailEnd type="none" w="med" len="med"/>
-                    </a:lnR>
-                    <a:lnT w="12700" cap="flat" cmpd="sng" algn="ctr">
-                      <a:solidFill>
-                        <a:srgbClr val="000000"/>
-                      </a:solidFill>
-                      <a:prstDash val="solid"/>
-                      <a:round/>
-                      <a:headEnd type="none" w="med" len="med"/>
-                      <a:tailEnd type="none" w="med" len="med"/>
-                    </a:lnT>
-                    <a:lnB w="12700" cap="flat" cmpd="sng" algn="ctr">
-                      <a:solidFill>
-                        <a:srgbClr val="000000"/>
-                      </a:solidFill>
-                      <a:prstDash val="solid"/>
-                      <a:round/>
-                      <a:headEnd type="none" w="med" len="med"/>
-                      <a:tailEnd type="none" w="med" len="med"/>
-                    </a:lnB>
-                  </a:tcPr>
-                </a:tc>
-              </a:tr>
-              <a:tr h="347472">
-                <a:tc>
-                  <a:txBody>
-                    <a:bodyPr/>
-                    <a:lstStyle/>
-                    <a:p>
-                      <a:pPr eaLnBrk="0" latinLnBrk="0" algn="ctr" indent="0" marL="0">
-                        <a:buNone/>
-                      </a:pPr>
-                      <a:r>
-                        <a:rPr lang="en-US" sz="1050" dirty="0">
-                          <a:solidFill>
-                            <a:srgbClr val="000000"/>
-                          </a:solidFill>
-                          <a:latin typeface="맑은 고딕" pitchFamily="34" charset="0"/>
-                          <a:ea typeface="맑은 고딕" pitchFamily="34" charset="-122"/>
-                          <a:cs typeface="맑은 고딕" pitchFamily="34" charset="-120"/>
-                        </a:rPr>
-                        <a:t>검사항목</a:t>
-                      </a:r>
-                      <a:endParaRPr lang="en-US" sz="1050" dirty="0">
-                        <a:latin typeface="맑은 고딕" charset="0"/>
-                        <a:ea typeface="맑은 고딕" charset="0"/>
-                        <a:cs typeface="맑은 고딕" charset="0"/>
-                      </a:endParaRPr>
-                    </a:p>
-                  </a:txBody>
-                  <a:tcPr marL="38100" marR="38100" marT="38100" marB="38100" anchor="ctr">
-                    <a:lnL w="12700" cap="flat" cmpd="sng" algn="ctr">
-                      <a:solidFill>
-                        <a:srgbClr val="000000"/>
-                      </a:solidFill>
-                      <a:prstDash val="solid"/>
-                      <a:round/>
-                      <a:headEnd type="none" w="med" len="med"/>
-                      <a:tailEnd type="none" w="med" len="med"/>
-                    </a:lnL>
-                    <a:lnR w="12700" cap="flat" cmpd="sng" algn="ctr">
-                      <a:solidFill>
-                        <a:srgbClr val="000000"/>
-                      </a:solidFill>
-                      <a:prstDash val="solid"/>
-                      <a:round/>
-                      <a:headEnd type="none" w="med" len="med"/>
-                      <a:tailEnd type="none" w="med" len="med"/>
-                    </a:lnR>
-                    <a:lnT w="12700" cap="flat" cmpd="sng" algn="ctr">
-                      <a:solidFill>
-                        <a:srgbClr val="000000"/>
-                      </a:solidFill>
-                      <a:prstDash val="solid"/>
-                      <a:round/>
-                      <a:headEnd type="none" w="med" len="med"/>
-                      <a:tailEnd type="none" w="med" len="med"/>
-                    </a:lnT>
-                    <a:lnB w="12700" cap="flat" cmpd="sng" algn="ctr">
-                      <a:solidFill>
-                        <a:srgbClr val="000000"/>
-                      </a:solidFill>
-                      <a:prstDash val="solid"/>
-                      <a:round/>
-                      <a:headEnd type="none" w="med" len="med"/>
-                      <a:tailEnd type="none" w="med" len="med"/>
-                    </a:lnB>
-                  </a:tcPr>
-                </a:tc>
-                <a:tc>
-                  <a:txBody>
-                    <a:bodyPr/>
-                    <a:lstStyle/>
-                    <a:p>
-                      <a:pPr eaLnBrk="0" latinLnBrk="0" algn="l" indent="0" marL="0">
-                        <a:buNone/>
-                      </a:pPr>
-                      <a:r>
-                        <a:rPr lang="en-US" sz="1050" dirty="0">
-                          <a:solidFill>
-                            <a:srgbClr val="000000"/>
-                          </a:solidFill>
-                          <a:latin typeface="맑은 고딕" pitchFamily="34" charset="0"/>
-                          <a:ea typeface="맑은 고딕" pitchFamily="34" charset="-122"/>
-                          <a:cs typeface="맑은 고딕" pitchFamily="34" charset="-120"/>
-                        </a:rPr>
-                        <a:t>공무원 채용신체검사 규정 적용</a:t>
-                      </a:r>
-                      <a:endParaRPr lang="en-US" sz="1050" dirty="0">
-                        <a:latin typeface="맑은 고딕" charset="0"/>
-                        <a:ea typeface="맑은 고딕" charset="0"/>
-                        <a:cs typeface="맑은 고딕" charset="0"/>
-                      </a:endParaRPr>
-                    </a:p>
-                  </a:txBody>
-                  <a:tcPr marL="38100" marR="38100" marT="38100" marB="38100" anchor="ctr">
-                    <a:lnL w="12700" cap="flat" cmpd="sng" algn="ctr">
-                      <a:solidFill>
-                        <a:srgbClr val="000000"/>
-                      </a:solidFill>
-                      <a:prstDash val="solid"/>
-                      <a:round/>
-                      <a:headEnd type="none" w="med" len="med"/>
-                      <a:tailEnd type="none" w="med" len="med"/>
-                    </a:lnL>
-                    <a:lnR w="12700" cap="flat" cmpd="sng" algn="ctr">
-                      <a:solidFill>
-                        <a:srgbClr val="000000"/>
-                      </a:solidFill>
-                      <a:prstDash val="solid"/>
-                      <a:round/>
-                      <a:headEnd type="none" w="med" len="med"/>
-                      <a:tailEnd type="none" w="med" len="med"/>
-                    </a:lnR>
-                    <a:lnT w="12700" cap="flat" cmpd="sng" algn="ctr">
-                      <a:solidFill>
-                        <a:srgbClr val="000000"/>
-                      </a:solidFill>
-                      <a:prstDash val="solid"/>
-                      <a:round/>
-                      <a:headEnd type="none" w="med" len="med"/>
-                      <a:tailEnd type="none" w="med" len="med"/>
-                    </a:lnT>
-                    <a:lnB w="12700" cap="flat" cmpd="sng" algn="ctr">
-                      <a:solidFill>
-                        <a:srgbClr val="000000"/>
-                      </a:solidFill>
-                      <a:prstDash val="solid"/>
-                      <a:round/>
-                      <a:headEnd type="none" w="med" len="med"/>
-                      <a:tailEnd type="none" w="med" len="med"/>
-                    </a:lnB>
-                  </a:tcPr>
-                </a:tc>
-              </a:tr>
-            </a:tbl>
-          </a:graphicData>
-        </a:graphic>
-      </p:graphicFrame>
-      <p:sp>
-        <p:nvSpPr>
-          <p:cNvPr id="14" name="Text 11"/>
-          <p:cNvSpPr txBox="1"/>
-          <p:nvPr/>
-        </p:nvSpPr>
-        <p:spPr>
-          <a:xfrm>
-            <a:off x="457200" y="3712464"/>
-            <a:ext cx="8229600" cy="274320"/>
-          </a:xfrm>
-          <a:prstGeom prst="rect">
-            <a:avLst/>
-          </a:prstGeom>
-          <a:noFill/>
-          <a:ln/>
-        </p:spPr>
-        <p:txBody>
-          <a:bodyPr wrap="square" lIns="0" tIns="0" rIns="0" bIns="0" rtlCol="0" anchor="ctr"/>
-          <a:lstStyle/>
-          <a:p>
-            <a:pPr eaLnBrk="0" latinLnBrk="0" indent="0" marL="0">
-              <a:buNone/>
-            </a:pPr>
-            <a:r>
-              <a:rPr lang="en-US" sz="1400" dirty="0">
-                <a:solidFill>
-                  <a:srgbClr val="000000"/>
-                </a:solidFill>
-                <a:latin typeface="HY동녘B" pitchFamily="34" charset="0"/>
-                <a:ea typeface="HY동녘B" pitchFamily="34" charset="-122"/>
-                <a:cs typeface="HY동녘B" pitchFamily="34" charset="-120"/>
-              </a:rPr>
-              <a:t>■ 결격사유조회 및 범죄경력조회</a:t>
-            </a:r>
-            <a:endParaRPr lang="en-US" sz="1400" dirty="0"/>
-          </a:p>
-        </p:txBody>
-      </p:sp>
-      <p:graphicFrame>
-        <p:nvGraphicFramePr>
-          <p:cNvPr id="19" name="Table 1"/>
-          <p:cNvGraphicFramePr>
-            <a:graphicFrameLocks noGrp="1"/>
-          </p:cNvGraphicFramePr>
-          <p:nvPr>
-            <p:extLst>
-              <p:ext uri="{D42A27DB-BD31-4B8C-83A1-F6EECF244321}">
-                <p14:modId xmlns:p14="http://schemas.microsoft.com/office/powerpoint/2010/main" val="1579011935"/>
-              </p:ext>
-            </p:extLst>
-          </p:nvPr>
-        </p:nvGraphicFramePr>
-        <p:xfrm>
-          <a:off x="914400" y="4078224"/>
-          <a:ext cx="7772400" cy="914400"/>
-        </p:xfrm>
-        <a:graphic>
-          <a:graphicData uri="http://schemas.openxmlformats.org/drawingml/2006/table">
-            <a:tbl>
-              <a:tblPr/>
-              <a:tblGrid>
-                <a:gridCol w="2377440"/>
-                <a:gridCol w="3108960"/>
-                <a:gridCol w="2286000"/>
-              </a:tblGrid>
-              <a:tr h="310896">
-                <a:tc>
-                  <a:txBody>
-                    <a:bodyPr/>
-                    <a:lstStyle/>
-                    <a:p>
-                      <a:pPr eaLnBrk="0" latinLnBrk="0" algn="ctr" indent="0" marL="0">
-                        <a:buNone/>
-                      </a:pPr>
-                      <a:r>
-                        <a:rPr lang="en-US" sz="1050" b="1" dirty="0">
-                          <a:solidFill>
-                            <a:srgbClr val="000000"/>
-                          </a:solidFill>
-                          <a:latin typeface="맑은 고딕" pitchFamily="34" charset="0"/>
-                          <a:ea typeface="맑은 고딕" pitchFamily="34" charset="-122"/>
-                          <a:cs typeface="맑은 고딕" pitchFamily="34" charset="-120"/>
-                        </a:rPr>
-                        <a:t>구분</a:t>
-                      </a:r>
-                      <a:endParaRPr lang="en-US" sz="1050" dirty="0">
-                        <a:latin typeface="맑은 고딕" charset="0"/>
-                        <a:ea typeface="맑은 고딕" charset="0"/>
-                        <a:cs typeface="맑은 고딕" charset="0"/>
-                      </a:endParaRPr>
-                    </a:p>
-                  </a:txBody>
-                  <a:tcPr marL="38100" marR="38100" marT="38100" marB="38100" anchor="ctr">
-                    <a:lnL w="12700" cap="flat" cmpd="sng" algn="ctr">
-                      <a:solidFill>
-                        <a:srgbClr val="000000"/>
-                      </a:solidFill>
-                      <a:prstDash val="solid"/>
-                      <a:round/>
-                      <a:headEnd type="none" w="med" len="med"/>
-                      <a:tailEnd type="none" w="med" len="med"/>
-                    </a:lnL>
-                    <a:lnR w="12700" cap="flat" cmpd="sng" algn="ctr">
-                      <a:solidFill>
-                        <a:srgbClr val="000000"/>
-                      </a:solidFill>
-                      <a:prstDash val="solid"/>
-                      <a:round/>
-                      <a:headEnd type="none" w="med" len="med"/>
-                      <a:tailEnd type="none" w="med" len="med"/>
-                    </a:lnR>
-                    <a:lnT w="12700" cap="flat" cmpd="sng" algn="ctr">
-                      <a:solidFill>
-                        <a:srgbClr val="000000"/>
-                      </a:solidFill>
-                      <a:prstDash val="solid"/>
-                      <a:round/>
-                      <a:headEnd type="none" w="med" len="med"/>
-                      <a:tailEnd type="none" w="med" len="med"/>
-                    </a:lnT>
-                    <a:lnB w="12700" cap="flat" cmpd="sng" algn="ctr">
-                      <a:solidFill>
-                        <a:srgbClr val="000000"/>
-                      </a:solidFill>
-                      <a:prstDash val="solid"/>
-                      <a:round/>
-                      <a:headEnd type="none" w="med" len="med"/>
-                      <a:tailEnd type="none" w="med" len="med"/>
-                    </a:lnB>
-                    <a:solidFill>
-                      <a:srgbClr val="CCFFFF"/>
-                    </a:solidFill>
-                  </a:tcPr>
-                </a:tc>
-                <a:tc>
-                  <a:txBody>
-                    <a:bodyPr/>
-                    <a:lstStyle/>
-                    <a:p>
-                      <a:pPr eaLnBrk="0" latinLnBrk="0" algn="ctr" indent="0" marL="0">
-                        <a:buNone/>
-                      </a:pPr>
-                      <a:r>
-                        <a:rPr lang="en-US" sz="1050" b="1" dirty="0">
-                          <a:solidFill>
-                            <a:srgbClr val="000000"/>
-                          </a:solidFill>
-                          <a:latin typeface="맑은 고딕" pitchFamily="34" charset="0"/>
-                          <a:ea typeface="맑은 고딕" pitchFamily="34" charset="-122"/>
-                          <a:cs typeface="맑은 고딕" pitchFamily="34" charset="-120"/>
-                        </a:rPr>
-                        <a:t>근거 법령</a:t>
-                      </a:r>
-                      <a:endParaRPr lang="en-US" sz="1050" dirty="0">
-                        <a:latin typeface="맑은 고딕" charset="0"/>
-                        <a:ea typeface="맑은 고딕" charset="0"/>
-                        <a:cs typeface="맑은 고딕" charset="0"/>
-                      </a:endParaRPr>
-                    </a:p>
-                  </a:txBody>
-                  <a:tcPr marL="38100" marR="38100" marT="38100" marB="38100" anchor="ctr">
-                    <a:lnL w="12700" cap="flat" cmpd="sng" algn="ctr">
-                      <a:solidFill>
-                        <a:srgbClr val="000000"/>
-                      </a:solidFill>
-                      <a:prstDash val="solid"/>
-                      <a:round/>
-                      <a:headEnd type="none" w="med" len="med"/>
-                      <a:tailEnd type="none" w="med" len="med"/>
-                    </a:lnL>
-                    <a:lnR w="12700" cap="flat" cmpd="sng" algn="ctr">
-                      <a:solidFill>
-                        <a:srgbClr val="000000"/>
-                      </a:solidFill>
-                      <a:prstDash val="solid"/>
-                      <a:round/>
-                      <a:headEnd type="none" w="med" len="med"/>
-                      <a:tailEnd type="none" w="med" len="med"/>
-                    </a:lnR>
-                    <a:lnT w="12700" cap="flat" cmpd="sng" algn="ctr">
-                      <a:solidFill>
-                        <a:srgbClr val="000000"/>
-                      </a:solidFill>
-                      <a:prstDash val="solid"/>
-                      <a:round/>
-                      <a:headEnd type="none" w="med" len="med"/>
-                      <a:tailEnd type="none" w="med" len="med"/>
-                    </a:lnT>
-                    <a:lnB w="12700" cap="flat" cmpd="sng" algn="ctr">
-                      <a:solidFill>
-                        <a:srgbClr val="000000"/>
-                      </a:solidFill>
-                      <a:prstDash val="solid"/>
-                      <a:round/>
-                      <a:headEnd type="none" w="med" len="med"/>
-                      <a:tailEnd type="none" w="med" len="med"/>
-                    </a:lnB>
-                    <a:solidFill>
-                      <a:srgbClr val="CCFFFF"/>
-                    </a:solidFill>
-                  </a:tcPr>
-                </a:tc>
-                <a:tc>
-                  <a:txBody>
-                    <a:bodyPr/>
-                    <a:lstStyle/>
-                    <a:p>
-                      <a:pPr eaLnBrk="0" latinLnBrk="0" algn="ctr" indent="0" marL="0">
-                        <a:buNone/>
-                      </a:pPr>
-                      <a:r>
-                        <a:rPr lang="en-US" sz="1050" b="1" dirty="0">
-                          <a:solidFill>
-                            <a:srgbClr val="000000"/>
-                          </a:solidFill>
-                          <a:latin typeface="맑은 고딕" pitchFamily="34" charset="0"/>
-                          <a:ea typeface="맑은 고딕" pitchFamily="34" charset="-122"/>
-                          <a:cs typeface="맑은 고딕" pitchFamily="34" charset="-120"/>
-                        </a:rPr>
-                        <a:t>조회 방법</a:t>
-                      </a:r>
-                      <a:endParaRPr lang="en-US" sz="1050" dirty="0">
-                        <a:latin typeface="맑은 고딕" charset="0"/>
-                        <a:ea typeface="맑은 고딕" charset="0"/>
-                        <a:cs typeface="맑은 고딕" charset="0"/>
-                      </a:endParaRPr>
-                    </a:p>
-                  </a:txBody>
-                  <a:tcPr marL="38100" marR="38100" marT="38100" marB="38100" anchor="ctr">
-                    <a:lnL w="12700" cap="flat" cmpd="sng" algn="ctr">
-                      <a:solidFill>
-                        <a:srgbClr val="000000"/>
-                      </a:solidFill>
-                      <a:prstDash val="solid"/>
-                      <a:round/>
-                      <a:headEnd type="none" w="med" len="med"/>
-                      <a:tailEnd type="none" w="med" len="med"/>
-                    </a:lnL>
-                    <a:lnR w="12700" cap="flat" cmpd="sng" algn="ctr">
-                      <a:solidFill>
-                        <a:srgbClr val="000000"/>
-                      </a:solidFill>
-                      <a:prstDash val="solid"/>
-                      <a:round/>
-                      <a:headEnd type="none" w="med" len="med"/>
-                      <a:tailEnd type="none" w="med" len="med"/>
-                    </a:lnR>
-                    <a:lnT w="12700" cap="flat" cmpd="sng" algn="ctr">
-                      <a:solidFill>
-                        <a:srgbClr val="000000"/>
-                      </a:solidFill>
-                      <a:prstDash val="solid"/>
-                      <a:round/>
-                      <a:headEnd type="none" w="med" len="med"/>
-                      <a:tailEnd type="none" w="med" len="med"/>
-                    </a:lnT>
-                    <a:lnB w="12700" cap="flat" cmpd="sng" algn="ctr">
-                      <a:solidFill>
-                        <a:srgbClr val="000000"/>
-                      </a:solidFill>
-                      <a:prstDash val="solid"/>
-                      <a:round/>
-                      <a:headEnd type="none" w="med" len="med"/>
-                      <a:tailEnd type="none" w="med" len="med"/>
-                    </a:lnB>
-                    <a:solidFill>
-                      <a:srgbClr val="CCFFFF"/>
-                    </a:solidFill>
-                  </a:tcPr>
-                </a:tc>
-              </a:tr>
-              <a:tr h="566928">
-                <a:tc>
-                  <a:txBody>
-                    <a:bodyPr/>
-                    <a:lstStyle/>
-                    <a:p>
-                      <a:pPr eaLnBrk="0" latinLnBrk="0" algn="ctr" indent="0" marL="0">
-                        <a:buNone/>
-                      </a:pPr>
-                      <a:r>
-                        <a:rPr lang="en-US" sz="1050" dirty="0">
-                          <a:solidFill>
-                            <a:srgbClr val="000000"/>
-                          </a:solidFill>
-                          <a:latin typeface="맑은 고딕" pitchFamily="34" charset="0"/>
-                          <a:ea typeface="맑은 고딕" pitchFamily="34" charset="-122"/>
-                          <a:cs typeface="맑은 고딕" pitchFamily="34" charset="-120"/>
-                        </a:rPr>
-                        <a:t>결격사유 조회 및</a:t>
-                      </a:r>
-                      <a:endParaRPr lang="en-US" sz="1050" dirty="0">
-                        <a:latin typeface="맑은 고딕" charset="0"/>
-                        <a:ea typeface="맑은 고딕" charset="0"/>
-                        <a:cs typeface="맑은 고딕" charset="0"/>
-                      </a:endParaRPr>
-                    </a:p>
-                    <a:p>
-                      <a:pPr eaLnBrk="0" latinLnBrk="0" algn="ctr" indent="0" marL="0">
-                        <a:buNone/>
-                      </a:pPr>
-                      <a:r>
-                        <a:rPr lang="en-US" sz="1050" dirty="0">
-                          <a:solidFill>
-                            <a:srgbClr val="000000"/>
-                          </a:solidFill>
-                          <a:latin typeface="맑은 고딕" pitchFamily="34" charset="0"/>
-                          <a:ea typeface="맑은 고딕" pitchFamily="34" charset="-122"/>
-                          <a:cs typeface="맑은 고딕" pitchFamily="34" charset="-120"/>
-                        </a:rPr>
-                        <a:t>범죄경력 조회</a:t>
-                      </a:r>
-                      <a:endParaRPr lang="en-US" sz="1050" dirty="0">
-                        <a:latin typeface="맑은 고딕" charset="0"/>
-                        <a:ea typeface="맑은 고딕" charset="0"/>
-                        <a:cs typeface="맑은 고딕" charset="0"/>
-                      </a:endParaRPr>
-                    </a:p>
-                  </a:txBody>
-                  <a:tcPr marL="38100" marR="38100" marT="38100" marB="38100" anchor="ctr">
-                    <a:lnL w="12700" cap="flat" cmpd="sng" algn="ctr">
-                      <a:solidFill>
-                        <a:srgbClr val="000000"/>
-                      </a:solidFill>
-                      <a:prstDash val="solid"/>
-                      <a:round/>
-                      <a:headEnd type="none" w="med" len="med"/>
-                      <a:tailEnd type="none" w="med" len="med"/>
-                    </a:lnL>
-                    <a:lnR w="12700" cap="flat" cmpd="sng" algn="ctr">
-                      <a:solidFill>
-                        <a:srgbClr val="000000"/>
-                      </a:solidFill>
-                      <a:prstDash val="solid"/>
-                      <a:round/>
-                      <a:headEnd type="none" w="med" len="med"/>
-                      <a:tailEnd type="none" w="med" len="med"/>
-                    </a:lnR>
-                    <a:lnT w="12700" cap="flat" cmpd="sng" algn="ctr">
-                      <a:solidFill>
-                        <a:srgbClr val="000000"/>
-                      </a:solidFill>
-                      <a:prstDash val="solid"/>
-                      <a:round/>
-                      <a:headEnd type="none" w="med" len="med"/>
-                      <a:tailEnd type="none" w="med" len="med"/>
-                    </a:lnT>
-                    <a:lnB w="12700" cap="flat" cmpd="sng" algn="ctr">
-                      <a:solidFill>
-                        <a:srgbClr val="000000"/>
-                      </a:solidFill>
-                      <a:prstDash val="solid"/>
-                      <a:round/>
-                      <a:headEnd type="none" w="med" len="med"/>
-                      <a:tailEnd type="none" w="med" len="med"/>
-                    </a:lnB>
-                  </a:tcPr>
-                </a:tc>
-                <a:tc>
-                  <a:txBody>
-                    <a:bodyPr/>
-                    <a:lstStyle/>
-                    <a:p>
-                      <a:pPr eaLnBrk="0" latinLnBrk="0" algn="l" indent="0" marL="0">
-                        <a:buNone/>
-                      </a:pPr>
-                      <a:r>
-                        <a:rPr lang="en-US" sz="1050" dirty="0">
-                          <a:solidFill>
-                            <a:srgbClr val="000000"/>
-                          </a:solidFill>
-                          <a:latin typeface="맑은 고딕" pitchFamily="34" charset="0"/>
-                          <a:ea typeface="맑은 고딕" pitchFamily="34" charset="-122"/>
-                          <a:cs typeface="맑은 고딕" pitchFamily="34" charset="-120"/>
-                        </a:rPr>
-                        <a:t>「교육공무원법」</a:t>
-                      </a:r>
-                      <a:endParaRPr lang="en-US" sz="1050" dirty="0">
-                        <a:latin typeface="맑은 고딕" charset="0"/>
-                        <a:ea typeface="맑은 고딕" charset="0"/>
-                        <a:cs typeface="맑은 고딕" charset="0"/>
-                      </a:endParaRPr>
-                    </a:p>
-                    <a:p>
-                      <a:pPr eaLnBrk="0" latinLnBrk="0" algn="l" indent="0" marL="0">
-                        <a:buNone/>
-                      </a:pPr>
-                      <a:r>
-                        <a:rPr lang="en-US" sz="1050" dirty="0">
-                          <a:solidFill>
-                            <a:srgbClr val="000000"/>
-                          </a:solidFill>
-                          <a:latin typeface="맑은 고딕" pitchFamily="34" charset="0"/>
-                          <a:ea typeface="맑은 고딕" pitchFamily="34" charset="-122"/>
-                          <a:cs typeface="맑은 고딕" pitchFamily="34" charset="-120"/>
-                        </a:rPr>
-                        <a:t>「사립학교법」</a:t>
-                      </a:r>
-                      <a:endParaRPr lang="en-US" sz="1050" dirty="0">
-                        <a:latin typeface="맑은 고딕" charset="0"/>
-                        <a:ea typeface="맑은 고딕" charset="0"/>
-                        <a:cs typeface="맑은 고딕" charset="0"/>
-                      </a:endParaRPr>
-                    </a:p>
-                  </a:txBody>
-                  <a:tcPr marL="38100" marR="38100" marT="38100" marB="38100" anchor="ctr">
-                    <a:lnL w="12700" cap="flat" cmpd="sng" algn="ctr">
-                      <a:solidFill>
-                        <a:srgbClr val="000000"/>
-                      </a:solidFill>
-                      <a:prstDash val="solid"/>
-                      <a:round/>
-                      <a:headEnd type="none" w="med" len="med"/>
-                      <a:tailEnd type="none" w="med" len="med"/>
-                    </a:lnL>
-                    <a:lnR w="12700" cap="flat" cmpd="sng" algn="ctr">
-                      <a:solidFill>
-                        <a:srgbClr val="000000"/>
-                      </a:solidFill>
-                      <a:prstDash val="solid"/>
-                      <a:round/>
-                      <a:headEnd type="none" w="med" len="med"/>
-                      <a:tailEnd type="none" w="med" len="med"/>
-                    </a:lnR>
-                    <a:lnT w="12700" cap="flat" cmpd="sng" algn="ctr">
-                      <a:solidFill>
-                        <a:srgbClr val="000000"/>
-                      </a:solidFill>
-                      <a:prstDash val="solid"/>
-                      <a:round/>
-                      <a:headEnd type="none" w="med" len="med"/>
-                      <a:tailEnd type="none" w="med" len="med"/>
-                    </a:lnT>
-                    <a:lnB w="12700" cap="flat" cmpd="sng" algn="ctr">
-                      <a:solidFill>
-                        <a:srgbClr val="000000"/>
-                      </a:solidFill>
-                      <a:prstDash val="solid"/>
-                      <a:round/>
-                      <a:headEnd type="none" w="med" len="med"/>
-                      <a:tailEnd type="none" w="med" len="med"/>
-                    </a:lnB>
-                  </a:tcPr>
-                </a:tc>
-                <a:tc rowSpan="2">
-                  <a:txBody>
-                    <a:bodyPr/>
-                    <a:lstStyle/>
-                    <a:p>
-                      <a:pPr eaLnBrk="0" latinLnBrk="0" algn="ctr" indent="0" marL="0">
-                        <a:buNone/>
-                      </a:pPr>
-                      <a:r>
-                        <a:rPr lang="en-US" sz="1050" b="1" dirty="0">
-                          <a:solidFill>
-                            <a:srgbClr val="000000"/>
-                          </a:solidFill>
-                          <a:latin typeface="맑은 고딕" pitchFamily="34" charset="0"/>
-                          <a:ea typeface="맑은 고딕" pitchFamily="34" charset="-122"/>
-                          <a:cs typeface="맑은 고딕" pitchFamily="34" charset="-120"/>
-                        </a:rPr>
-                        <a:t>행정정보</a:t>
-                      </a:r>
-                      <a:endParaRPr lang="en-US" sz="1050" dirty="0">
-                        <a:latin typeface="맑은 고딕" charset="0"/>
-                        <a:ea typeface="맑은 고딕" charset="0"/>
-                        <a:cs typeface="맑은 고딕" charset="0"/>
-                      </a:endParaRPr>
-                    </a:p>
-                    <a:p>
-                      <a:pPr eaLnBrk="0" latinLnBrk="0" algn="ctr" indent="0" marL="0">
-                        <a:buNone/>
-                      </a:pPr>
-                      <a:r>
-                        <a:rPr lang="en-US" sz="1050" b="1" dirty="0">
-                          <a:solidFill>
-                            <a:srgbClr val="000000"/>
-                          </a:solidFill>
-                          <a:latin typeface="맑은 고딕" pitchFamily="34" charset="0"/>
-                          <a:ea typeface="맑은 고딕" pitchFamily="34" charset="-122"/>
-                          <a:cs typeface="맑은 고딕" pitchFamily="34" charset="-120"/>
-                        </a:rPr>
-                        <a:t>공동이용시스템 이용</a:t>
-                      </a:r>
-                      <a:endParaRPr lang="en-US" sz="1050" dirty="0">
-                        <a:latin typeface="맑은 고딕" charset="0"/>
-                        <a:ea typeface="맑은 고딕" charset="0"/>
-                        <a:cs typeface="맑은 고딕" charset="0"/>
-                      </a:endParaRPr>
-                    </a:p>
-                  </a:txBody>
-                  <a:tcPr marL="38100" marR="38100" marT="38100" marB="38100" anchor="ctr">
-                    <a:lnL w="12700" cap="flat" cmpd="sng" algn="ctr">
-                      <a:solidFill>
-                        <a:srgbClr val="000000"/>
-                      </a:solidFill>
-                      <a:prstDash val="solid"/>
-                      <a:round/>
-                      <a:headEnd type="none" w="med" len="med"/>
-                      <a:tailEnd type="none" w="med" len="med"/>
-                    </a:lnL>
-                    <a:lnR w="12700" cap="flat" cmpd="sng" algn="ctr">
-                      <a:solidFill>
-                        <a:srgbClr val="000000"/>
-                      </a:solidFill>
-                      <a:prstDash val="solid"/>
-                      <a:round/>
-                      <a:headEnd type="none" w="med" len="med"/>
-                      <a:tailEnd type="none" w="med" len="med"/>
-                    </a:lnR>
-                    <a:lnT w="12700" cap="flat" cmpd="sng" algn="ctr">
-                      <a:solidFill>
-                        <a:srgbClr val="000000"/>
-                      </a:solidFill>
-                      <a:prstDash val="solid"/>
-                      <a:round/>
-                      <a:headEnd type="none" w="med" len="med"/>
-                      <a:tailEnd type="none" w="med" len="med"/>
-                    </a:lnT>
-                    <a:lnB w="12700" cap="flat" cmpd="sng" algn="ctr">
-                      <a:solidFill>
-                        <a:srgbClr val="000000"/>
-                      </a:solidFill>
-                      <a:prstDash val="solid"/>
-                      <a:round/>
-                      <a:headEnd type="none" w="med" len="med"/>
-                      <a:tailEnd type="none" w="med" len="med"/>
-                    </a:lnB>
-                    <a:solidFill>
-                      <a:srgbClr val="D9F6FF"/>
-                    </a:solidFill>
-                  </a:tcPr>
-                </a:tc>
-              </a:tr>
-              <a:tr h="566928">
-                <a:tc>
-                  <a:txBody>
-                    <a:bodyPr/>
-                    <a:lstStyle/>
-                    <a:p>
-                      <a:pPr eaLnBrk="0" latinLnBrk="0" algn="ctr" indent="0" marL="0">
-                        <a:buNone/>
-                      </a:pPr>
-                      <a:r>
-                        <a:rPr lang="en-US" sz="1050" dirty="0">
-                          <a:solidFill>
-                            <a:srgbClr val="000000"/>
-                          </a:solidFill>
-                          <a:latin typeface="맑은 고딕" pitchFamily="34" charset="0"/>
-                          <a:ea typeface="맑은 고딕" pitchFamily="34" charset="-122"/>
-                          <a:cs typeface="맑은 고딕" pitchFamily="34" charset="-120"/>
-                        </a:rPr>
-                        <a:t>성범죄결격 및</a:t>
-                      </a:r>
-                      <a:endParaRPr lang="en-US" sz="1050" dirty="0">
-                        <a:latin typeface="맑은 고딕" charset="0"/>
-                        <a:ea typeface="맑은 고딕" charset="0"/>
-                        <a:cs typeface="맑은 고딕" charset="0"/>
-                      </a:endParaRPr>
-                    </a:p>
-                    <a:p>
-                      <a:pPr eaLnBrk="0" latinLnBrk="0" algn="ctr" indent="0" marL="0">
-                        <a:buNone/>
-                      </a:pPr>
-                      <a:r>
-                        <a:rPr lang="en-US" sz="1050" dirty="0">
-                          <a:solidFill>
-                            <a:srgbClr val="000000"/>
-                          </a:solidFill>
-                          <a:latin typeface="맑은 고딕" pitchFamily="34" charset="0"/>
-                          <a:ea typeface="맑은 고딕" pitchFamily="34" charset="-122"/>
-                          <a:cs typeface="맑은 고딕" pitchFamily="34" charset="-120"/>
-                        </a:rPr>
-                        <a:t>아동학대 범죄전력 조회</a:t>
-                      </a:r>
-                      <a:endParaRPr lang="en-US" sz="1050" dirty="0">
-                        <a:latin typeface="맑은 고딕" charset="0"/>
-                        <a:ea typeface="맑은 고딕" charset="0"/>
-                        <a:cs typeface="맑은 고딕" charset="0"/>
-                      </a:endParaRPr>
-                    </a:p>
-                  </a:txBody>
-                  <a:tcPr marL="38100" marR="38100" marT="38100" marB="38100" anchor="ctr">
-                    <a:lnL w="12700" cap="flat" cmpd="sng" algn="ctr">
-                      <a:solidFill>
-                        <a:srgbClr val="000000"/>
-                      </a:solidFill>
-                      <a:prstDash val="solid"/>
-                      <a:round/>
-                      <a:headEnd type="none" w="med" len="med"/>
-                      <a:tailEnd type="none" w="med" len="med"/>
-                    </a:lnL>
-                    <a:lnR w="12700" cap="flat" cmpd="sng" algn="ctr">
-                      <a:solidFill>
-                        <a:srgbClr val="000000"/>
-                      </a:solidFill>
-                      <a:prstDash val="solid"/>
-                      <a:round/>
-                      <a:headEnd type="none" w="med" len="med"/>
-                      <a:tailEnd type="none" w="med" len="med"/>
-                    </a:lnR>
-                    <a:lnT w="12700" cap="flat" cmpd="sng" algn="ctr">
-                      <a:solidFill>
-                        <a:srgbClr val="000000"/>
-                      </a:solidFill>
-                      <a:prstDash val="solid"/>
-                      <a:round/>
-                      <a:headEnd type="none" w="med" len="med"/>
-                      <a:tailEnd type="none" w="med" len="med"/>
-                    </a:lnT>
-                    <a:lnB w="12700" cap="flat" cmpd="sng" algn="ctr">
-                      <a:solidFill>
-                        <a:srgbClr val="000000"/>
-                      </a:solidFill>
-                      <a:prstDash val="solid"/>
-                      <a:round/>
-                      <a:headEnd type="none" w="med" len="med"/>
-                      <a:tailEnd type="none" w="med" len="med"/>
-                    </a:lnB>
-                  </a:tcPr>
-                </a:tc>
-                <a:tc>
-                  <a:txBody>
-                    <a:bodyPr/>
-                    <a:lstStyle/>
-                    <a:p>
-                      <a:pPr eaLnBrk="0" latinLnBrk="0" algn="l" indent="0" marL="0">
-                        <a:buNone/>
-                      </a:pPr>
-                      <a:r>
-                        <a:rPr lang="en-US" sz="1050" dirty="0">
-                          <a:solidFill>
-                            <a:srgbClr val="000000"/>
-                          </a:solidFill>
-                          <a:latin typeface="맑은 고딕" pitchFamily="34" charset="0"/>
-                          <a:ea typeface="맑은 고딕" pitchFamily="34" charset="-122"/>
-                          <a:cs typeface="맑은 고딕" pitchFamily="34" charset="-120"/>
-                        </a:rPr>
-                        <a:t>「아동·청소년 성보호에 관한 법률」</a:t>
-                      </a:r>
-                      <a:endParaRPr lang="en-US" sz="1050" dirty="0">
-                        <a:latin typeface="맑은 고딕" charset="0"/>
-                        <a:ea typeface="맑은 고딕" charset="0"/>
-                        <a:cs typeface="맑은 고딕" charset="0"/>
-                      </a:endParaRPr>
-                    </a:p>
-                  </a:txBody>
-                  <a:tcPr marL="38100" marR="38100" marT="38100" marB="38100" anchor="ctr">
-                    <a:lnL w="12700" cap="flat" cmpd="sng" algn="ctr">
-                      <a:solidFill>
-                        <a:srgbClr val="000000"/>
-                      </a:solidFill>
-                      <a:prstDash val="solid"/>
-                      <a:round/>
-                      <a:headEnd type="none" w="med" len="med"/>
-                      <a:tailEnd type="none" w="med" len="med"/>
-                    </a:lnL>
-                    <a:lnR w="12700" cap="flat" cmpd="sng" algn="ctr">
-                      <a:solidFill>
-                        <a:srgbClr val="000000"/>
-                      </a:solidFill>
-                      <a:prstDash val="solid"/>
-                      <a:round/>
-                      <a:headEnd type="none" w="med" len="med"/>
-                      <a:tailEnd type="none" w="med" len="med"/>
-                    </a:lnR>
-                    <a:lnT w="12700" cap="flat" cmpd="sng" algn="ctr">
-                      <a:solidFill>
-                        <a:srgbClr val="000000"/>
-                      </a:solidFill>
-                      <a:prstDash val="solid"/>
-                      <a:round/>
-                      <a:headEnd type="none" w="med" len="med"/>
-                      <a:tailEnd type="none" w="med" len="med"/>
-                    </a:lnT>
-                    <a:lnB w="12700" cap="flat" cmpd="sng" algn="ctr">
-                      <a:solidFill>
-                        <a:srgbClr val="000000"/>
-                      </a:solidFill>
-                      <a:prstDash val="solid"/>
-                      <a:round/>
-                      <a:headEnd type="none" w="med" len="med"/>
-                      <a:tailEnd type="none" w="med" len="med"/>
-                    </a:lnB>
-                  </a:tcPr>
-                </a:tc>
-                <a:tc vMerge="1">
-                  <a:tcPr/>
-                </a:tc>
-              </a:tr>
-            </a:tbl>
-          </a:graphicData>
-        </a:graphic>
-      </p:graphicFrame>
-      <p:sp>
-        <p:nvSpPr>
-          <p:cNvPr id="16" name="Text 12"/>
-          <p:cNvSpPr txBox="1"/>
-          <p:nvPr/>
-        </p:nvSpPr>
-        <p:spPr>
-          <a:xfrm>
-            <a:off x="457200" y="5541264"/>
-            <a:ext cx="8229600" cy="256032"/>
-          </a:xfrm>
-          <a:prstGeom prst="rect">
-            <a:avLst/>
-          </a:prstGeom>
-          <a:noFill/>
-          <a:ln/>
-        </p:spPr>
-        <p:txBody>
-          <a:bodyPr wrap="square" lIns="0" tIns="0" rIns="0" bIns="0" rtlCol="0" anchor="ctr"/>
-          <a:lstStyle/>
-          <a:p>
-            <a:pPr eaLnBrk="0" latinLnBrk="0" indent="0" marL="0">
-              <a:buNone/>
-            </a:pPr>
-            <a:r>
-              <a:rPr lang="en-US" sz="1050" dirty="0">
-                <a:solidFill>
-                  <a:srgbClr val="404040"/>
-                </a:solidFill>
-                <a:latin typeface="맑은 고딕" pitchFamily="34" charset="0"/>
-                <a:ea typeface="맑은 고딕" pitchFamily="34" charset="-122"/>
-                <a:cs typeface="맑은 고딕" pitchFamily="34" charset="-120"/>
-              </a:rPr>
-              <a:t>※ 검증 3종 : 채용신체검사 · 결격사유 조회 · 성범죄 및 아동학대 범죄전력 조회</a:t>
-            </a:r>
-            <a:endParaRPr lang="en-US" sz="1050" dirty="0"/>
           </a:p>
         </p:txBody>
       </p:sp>

--- a/docs/2027년_사무직원_채용계획안.pptx
+++ b/docs/2027년_사무직원_채용계획안.pptx
@@ -2206,45 +2206,6 @@
         </p:nvSpPr>
         <p:spPr>
           <a:xfrm>
-            <a:off x="3657600" y="6291072"/>
-            <a:ext cx="1828800" cy="274320"/>
-          </a:xfrm>
-          <a:prstGeom prst="rect">
-            <a:avLst/>
-          </a:prstGeom>
-          <a:noFill/>
-          <a:ln/>
-        </p:spPr>
-        <p:txBody>
-          <a:bodyPr wrap="square" lIns="0" tIns="0" rIns="0" bIns="0" rtlCol="0" anchor="ctr"/>
-          <a:lstStyle/>
-          <a:p>
-            <a:pPr eaLnBrk="0" latinLnBrk="0" algn="ctr" indent="0" marL="0">
-              <a:buNone/>
-            </a:pPr>
-            <a:r>
-              <a:rPr lang="en-US" sz="1100" dirty="0">
-                <a:solidFill>
-                  <a:srgbClr val="000000"/>
-                </a:solidFill>
-                <a:latin typeface="맑은 고딕" pitchFamily="34" charset="0"/>
-                <a:ea typeface="맑은 고딕" pitchFamily="34" charset="-122"/>
-                <a:cs typeface="맑은 고딕" pitchFamily="34" charset="-120"/>
-              </a:rPr>
-              <a:t>- 9 -</a:t>
-            </a:r>
-            <a:endParaRPr lang="en-US" sz="1100" dirty="0"/>
-          </a:p>
-        </p:txBody>
-      </p:sp>
-      <p:sp>
-        <p:nvSpPr>
-          <p:cNvPr id="5" name="Text 3"/>
-          <p:cNvSpPr txBox="1"/>
-          <p:nvPr/>
-        </p:nvSpPr>
-        <p:spPr>
-          <a:xfrm>
             <a:off x="457200" y="82296"/>
             <a:ext cx="5120640" cy="548640"/>
           </a:xfrm>
@@ -2278,7 +2239,7 @@
       </p:sp>
       <p:sp>
         <p:nvSpPr>
-          <p:cNvPr id="6" name="Text 4"/>
+          <p:cNvPr id="5" name="Text 3"/>
           <p:cNvSpPr txBox="1"/>
           <p:nvPr/>
         </p:nvSpPr>
@@ -2317,7 +2278,7 @@
       </p:sp>
       <p:sp>
         <p:nvSpPr>
-          <p:cNvPr id="7" name="Text 5"/>
+          <p:cNvPr id="6" name="Text 4"/>
           <p:cNvSpPr txBox="1"/>
           <p:nvPr/>
         </p:nvSpPr>
@@ -2356,7 +2317,7 @@
       </p:sp>
       <p:sp>
         <p:nvSpPr>
-          <p:cNvPr id="8" name="Text 6"/>
+          <p:cNvPr id="7" name="Text 5"/>
           <p:cNvSpPr txBox="1"/>
           <p:nvPr/>
         </p:nvSpPr>
@@ -2395,7 +2356,7 @@
       </p:sp>
       <p:sp>
         <p:nvSpPr>
-          <p:cNvPr id="9" name="Text 7"/>
+          <p:cNvPr id="8" name="Text 6"/>
           <p:cNvSpPr txBox="1"/>
           <p:nvPr/>
         </p:nvSpPr>
@@ -2437,7 +2398,7 @@
       </p:sp>
       <p:sp>
         <p:nvSpPr>
-          <p:cNvPr id="10" name="Text 8"/>
+          <p:cNvPr id="9" name="Text 7"/>
           <p:cNvSpPr txBox="1"/>
           <p:nvPr/>
         </p:nvSpPr>
@@ -2476,7 +2437,7 @@
       </p:sp>
       <p:sp>
         <p:nvSpPr>
-          <p:cNvPr id="11" name="Text 9"/>
+          <p:cNvPr id="10" name="Text 8"/>
           <p:cNvSpPr txBox="1"/>
           <p:nvPr/>
         </p:nvSpPr>
@@ -2518,7 +2479,7 @@
       </p:sp>
       <p:sp>
         <p:nvSpPr>
-          <p:cNvPr id="12" name="Text 10"/>
+          <p:cNvPr id="11" name="Text 9"/>
           <p:cNvSpPr txBox="1"/>
           <p:nvPr/>
         </p:nvSpPr>
@@ -2989,7 +2950,7 @@
       </p:graphicFrame>
       <p:sp>
         <p:nvSpPr>
-          <p:cNvPr id="14" name="Text 11"/>
+          <p:cNvPr id="13" name="Text 10"/>
           <p:cNvSpPr txBox="1"/>
           <p:nvPr/>
         </p:nvSpPr>
@@ -3684,7 +3645,7 @@
       </p:graphicFrame>
       <p:sp>
         <p:nvSpPr>
-          <p:cNvPr id="16" name="Text 12"/>
+          <p:cNvPr id="15" name="Text 11"/>
           <p:cNvSpPr txBox="1"/>
           <p:nvPr/>
         </p:nvSpPr>
@@ -3721,6 +3682,45 @@
           </a:p>
         </p:txBody>
       </p:sp>
+      <p:sp>
+        <p:nvSpPr>
+          <p:cNvPr id="17" name="Text 12"/>
+          <p:cNvSpPr txBox="1"/>
+          <p:nvPr/>
+        </p:nvSpPr>
+        <p:spPr>
+          <a:xfrm>
+            <a:off x="3657600" y="6291072"/>
+            <a:ext cx="1828800" cy="274320"/>
+          </a:xfrm>
+          <a:prstGeom prst="rect">
+            <a:avLst/>
+          </a:prstGeom>
+          <a:noFill/>
+          <a:ln/>
+        </p:spPr>
+        <p:txBody>
+          <a:bodyPr wrap="square" lIns="0" tIns="0" rIns="0" bIns="0" rtlCol="0" anchor="ctr"/>
+          <a:lstStyle/>
+          <a:p>
+            <a:pPr eaLnBrk="0" latinLnBrk="0" algn="ctr" indent="0" marL="0">
+              <a:buNone/>
+            </a:pPr>
+            <a:r>
+              <a:rPr lang="en-US" sz="1100" dirty="0">
+                <a:solidFill>
+                  <a:srgbClr val="000000"/>
+                </a:solidFill>
+                <a:latin typeface="맑은 고딕" pitchFamily="34" charset="0"/>
+                <a:ea typeface="맑은 고딕" pitchFamily="34" charset="-122"/>
+                <a:cs typeface="맑은 고딕" pitchFamily="34" charset="-120"/>
+              </a:rPr>
+              <a:t>8 / 10</a:t>
+            </a:r>
+            <a:endParaRPr lang="en-US" sz="1100" dirty="0"/>
+          </a:p>
+        </p:txBody>
+      </p:sp>
     </p:spTree>
   </p:cSld>
   <p:clrMapOvr>
@@ -3811,45 +3811,6 @@
         </p:nvSpPr>
         <p:spPr>
           <a:xfrm>
-            <a:off x="3657600" y="6291072"/>
-            <a:ext cx="1828800" cy="274320"/>
-          </a:xfrm>
-          <a:prstGeom prst="rect">
-            <a:avLst/>
-          </a:prstGeom>
-          <a:noFill/>
-          <a:ln/>
-        </p:spPr>
-        <p:txBody>
-          <a:bodyPr wrap="square" lIns="0" tIns="0" rIns="0" bIns="0" rtlCol="0" anchor="ctr"/>
-          <a:lstStyle/>
-          <a:p>
-            <a:pPr eaLnBrk="0" latinLnBrk="0" algn="ctr" indent="0" marL="0">
-              <a:buNone/>
-            </a:pPr>
-            <a:r>
-              <a:rPr lang="en-US" sz="1100" dirty="0">
-                <a:solidFill>
-                  <a:srgbClr val="000000"/>
-                </a:solidFill>
-                <a:latin typeface="맑은 고딕" pitchFamily="34" charset="0"/>
-                <a:ea typeface="맑은 고딕" pitchFamily="34" charset="-122"/>
-                <a:cs typeface="맑은 고딕" pitchFamily="34" charset="-120"/>
-              </a:rPr>
-              <a:t>- 10 -</a:t>
-            </a:r>
-            <a:endParaRPr lang="en-US" sz="1100" dirty="0"/>
-          </a:p>
-        </p:txBody>
-      </p:sp>
-      <p:sp>
-        <p:nvSpPr>
-          <p:cNvPr id="5" name="Text 3"/>
-          <p:cNvSpPr txBox="1"/>
-          <p:nvPr/>
-        </p:nvSpPr>
-        <p:spPr>
-          <a:xfrm>
             <a:off x="457200" y="82296"/>
             <a:ext cx="5120640" cy="548640"/>
           </a:xfrm>
@@ -3883,7 +3844,7 @@
       </p:sp>
       <p:sp>
         <p:nvSpPr>
-          <p:cNvPr id="6" name="Text 4"/>
+          <p:cNvPr id="5" name="Text 3"/>
           <p:cNvSpPr txBox="1"/>
           <p:nvPr/>
         </p:nvSpPr>
@@ -3922,7 +3883,7 @@
       </p:sp>
       <p:sp>
         <p:nvSpPr>
-          <p:cNvPr id="7" name="Text 5"/>
+          <p:cNvPr id="6" name="Text 4"/>
           <p:cNvSpPr txBox="1"/>
           <p:nvPr/>
         </p:nvSpPr>
@@ -3961,7 +3922,7 @@
       </p:sp>
       <p:sp>
         <p:nvSpPr>
-          <p:cNvPr id="8" name="Text 6"/>
+          <p:cNvPr id="7" name="Text 5"/>
           <p:cNvSpPr txBox="1"/>
           <p:nvPr/>
         </p:nvSpPr>
@@ -4003,7 +3964,7 @@
       </p:sp>
       <p:sp>
         <p:nvSpPr>
-          <p:cNvPr id="9" name="Text 7"/>
+          <p:cNvPr id="8" name="Text 6"/>
           <p:cNvSpPr txBox="1"/>
           <p:nvPr/>
         </p:nvSpPr>
@@ -4042,7 +4003,7 @@
       </p:sp>
       <p:sp>
         <p:nvSpPr>
-          <p:cNvPr id="10" name="Text 8"/>
+          <p:cNvPr id="9" name="Text 7"/>
           <p:cNvSpPr txBox="1"/>
           <p:nvPr/>
         </p:nvSpPr>
@@ -4084,7 +4045,7 @@
       </p:sp>
       <p:sp>
         <p:nvSpPr>
-          <p:cNvPr id="11" name="Text 9"/>
+          <p:cNvPr id="10" name="Text 8"/>
           <p:cNvSpPr txBox="1"/>
           <p:nvPr/>
         </p:nvSpPr>
@@ -4123,7 +4084,7 @@
       </p:sp>
       <p:sp>
         <p:nvSpPr>
-          <p:cNvPr id="12" name="Text 10"/>
+          <p:cNvPr id="11" name="Text 9"/>
           <p:cNvSpPr txBox="1"/>
           <p:nvPr/>
         </p:nvSpPr>
@@ -4162,7 +4123,7 @@
       </p:sp>
       <p:sp>
         <p:nvSpPr>
-          <p:cNvPr id="13" name="Text 11"/>
+          <p:cNvPr id="12" name="Text 10"/>
           <p:cNvSpPr txBox="1"/>
           <p:nvPr/>
         </p:nvSpPr>
@@ -4204,7 +4165,7 @@
       </p:sp>
       <p:sp>
         <p:nvSpPr>
-          <p:cNvPr id="14" name="Text 12"/>
+          <p:cNvPr id="13" name="Text 11"/>
           <p:cNvSpPr txBox="1"/>
           <p:nvPr/>
         </p:nvSpPr>
@@ -4243,7 +4204,7 @@
       </p:sp>
       <p:sp>
         <p:nvSpPr>
-          <p:cNvPr id="15" name="Text 13"/>
+          <p:cNvPr id="14" name="Text 12"/>
           <p:cNvSpPr txBox="1"/>
           <p:nvPr/>
         </p:nvSpPr>
@@ -4282,7 +4243,7 @@
       </p:sp>
       <p:sp>
         <p:nvSpPr>
-          <p:cNvPr id="16" name="Text 14"/>
+          <p:cNvPr id="15" name="Text 13"/>
           <p:cNvSpPr txBox="1"/>
           <p:nvPr/>
         </p:nvSpPr>
@@ -4324,7 +4285,7 @@
       </p:sp>
       <p:sp>
         <p:nvSpPr>
-          <p:cNvPr id="17" name="Text 15"/>
+          <p:cNvPr id="16" name="Text 14"/>
           <p:cNvSpPr txBox="1"/>
           <p:nvPr/>
         </p:nvSpPr>
@@ -4361,6 +4322,45 @@
           </a:p>
         </p:txBody>
       </p:sp>
+      <p:sp>
+        <p:nvSpPr>
+          <p:cNvPr id="18" name="Text 15"/>
+          <p:cNvSpPr txBox="1"/>
+          <p:nvPr/>
+        </p:nvSpPr>
+        <p:spPr>
+          <a:xfrm>
+            <a:off x="3657600" y="6291072"/>
+            <a:ext cx="1828800" cy="274320"/>
+          </a:xfrm>
+          <a:prstGeom prst="rect">
+            <a:avLst/>
+          </a:prstGeom>
+          <a:noFill/>
+          <a:ln/>
+        </p:spPr>
+        <p:txBody>
+          <a:bodyPr wrap="square" lIns="0" tIns="0" rIns="0" bIns="0" rtlCol="0" anchor="ctr"/>
+          <a:lstStyle/>
+          <a:p>
+            <a:pPr eaLnBrk="0" latinLnBrk="0" algn="ctr" indent="0" marL="0">
+              <a:buNone/>
+            </a:pPr>
+            <a:r>
+              <a:rPr lang="en-US" sz="1100" dirty="0">
+                <a:solidFill>
+                  <a:srgbClr val="000000"/>
+                </a:solidFill>
+                <a:latin typeface="맑은 고딕" pitchFamily="34" charset="0"/>
+                <a:ea typeface="맑은 고딕" pitchFamily="34" charset="-122"/>
+                <a:cs typeface="맑은 고딕" pitchFamily="34" charset="-120"/>
+              </a:rPr>
+              <a:t>9 / 10</a:t>
+            </a:r>
+            <a:endParaRPr lang="en-US" sz="1100" dirty="0"/>
+          </a:p>
+        </p:txBody>
+      </p:sp>
     </p:spTree>
   </p:cSld>
   <p:clrMapOvr>
@@ -4451,45 +4451,6 @@
         </p:nvSpPr>
         <p:spPr>
           <a:xfrm>
-            <a:off x="3657600" y="6291072"/>
-            <a:ext cx="1828800" cy="274320"/>
-          </a:xfrm>
-          <a:prstGeom prst="rect">
-            <a:avLst/>
-          </a:prstGeom>
-          <a:noFill/>
-          <a:ln/>
-        </p:spPr>
-        <p:txBody>
-          <a:bodyPr wrap="square" lIns="0" tIns="0" rIns="0" bIns="0" rtlCol="0" anchor="ctr"/>
-          <a:lstStyle/>
-          <a:p>
-            <a:pPr eaLnBrk="0" latinLnBrk="0" algn="ctr" indent="0" marL="0">
-              <a:buNone/>
-            </a:pPr>
-            <a:r>
-              <a:rPr lang="en-US" sz="1100" dirty="0">
-                <a:solidFill>
-                  <a:srgbClr val="000000"/>
-                </a:solidFill>
-                <a:latin typeface="맑은 고딕" pitchFamily="34" charset="0"/>
-                <a:ea typeface="맑은 고딕" pitchFamily="34" charset="-122"/>
-                <a:cs typeface="맑은 고딕" pitchFamily="34" charset="-120"/>
-              </a:rPr>
-              <a:t>- 11 -</a:t>
-            </a:r>
-            <a:endParaRPr lang="en-US" sz="1100" dirty="0"/>
-          </a:p>
-        </p:txBody>
-      </p:sp>
-      <p:sp>
-        <p:nvSpPr>
-          <p:cNvPr id="5" name="Text 3"/>
-          <p:cNvSpPr txBox="1"/>
-          <p:nvPr/>
-        </p:nvSpPr>
-        <p:spPr>
-          <a:xfrm>
             <a:off x="457200" y="82296"/>
             <a:ext cx="5120640" cy="548640"/>
           </a:xfrm>
@@ -4523,7 +4484,7 @@
       </p:sp>
       <p:sp>
         <p:nvSpPr>
-          <p:cNvPr id="6" name="Text 4"/>
+          <p:cNvPr id="5" name="Text 3"/>
           <p:cNvSpPr txBox="1"/>
           <p:nvPr/>
         </p:nvSpPr>
@@ -5654,7 +5615,7 @@
       </p:graphicFrame>
       <p:sp>
         <p:nvSpPr>
-          <p:cNvPr id="8" name="Text 5"/>
+          <p:cNvPr id="7" name="Text 4"/>
           <p:cNvSpPr txBox="1"/>
           <p:nvPr/>
         </p:nvSpPr>
@@ -6322,6 +6283,45 @@
           </a:graphicData>
         </a:graphic>
       </p:graphicFrame>
+      <p:sp>
+        <p:nvSpPr>
+          <p:cNvPr id="10" name="Text 5"/>
+          <p:cNvSpPr txBox="1"/>
+          <p:nvPr/>
+        </p:nvSpPr>
+        <p:spPr>
+          <a:xfrm>
+            <a:off x="3657600" y="6291072"/>
+            <a:ext cx="1828800" cy="274320"/>
+          </a:xfrm>
+          <a:prstGeom prst="rect">
+            <a:avLst/>
+          </a:prstGeom>
+          <a:noFill/>
+          <a:ln/>
+        </p:spPr>
+        <p:txBody>
+          <a:bodyPr wrap="square" lIns="0" tIns="0" rIns="0" bIns="0" rtlCol="0" anchor="ctr"/>
+          <a:lstStyle/>
+          <a:p>
+            <a:pPr eaLnBrk="0" latinLnBrk="0" algn="ctr" indent="0" marL="0">
+              <a:buNone/>
+            </a:pPr>
+            <a:r>
+              <a:rPr lang="en-US" sz="1100" dirty="0">
+                <a:solidFill>
+                  <a:srgbClr val="000000"/>
+                </a:solidFill>
+                <a:latin typeface="맑은 고딕" pitchFamily="34" charset="0"/>
+                <a:ea typeface="맑은 고딕" pitchFamily="34" charset="-122"/>
+                <a:cs typeface="맑은 고딕" pitchFamily="34" charset="-120"/>
+              </a:rPr>
+              <a:t>10 / 10</a:t>
+            </a:r>
+            <a:endParaRPr lang="en-US" sz="1100" dirty="0"/>
+          </a:p>
+        </p:txBody>
+      </p:sp>
     </p:spTree>
   </p:cSld>
   <p:clrMapOvr>
@@ -6412,45 +6412,6 @@
         </p:nvSpPr>
         <p:spPr>
           <a:xfrm>
-            <a:off x="3657600" y="6291072"/>
-            <a:ext cx="1828800" cy="274320"/>
-          </a:xfrm>
-          <a:prstGeom prst="rect">
-            <a:avLst/>
-          </a:prstGeom>
-          <a:noFill/>
-          <a:ln/>
-        </p:spPr>
-        <p:txBody>
-          <a:bodyPr wrap="square" lIns="0" tIns="0" rIns="0" bIns="0" rtlCol="0" anchor="ctr"/>
-          <a:lstStyle/>
-          <a:p>
-            <a:pPr eaLnBrk="0" latinLnBrk="0" algn="ctr" indent="0" marL="0">
-              <a:buNone/>
-            </a:pPr>
-            <a:r>
-              <a:rPr lang="en-US" sz="1100" dirty="0">
-                <a:solidFill>
-                  <a:srgbClr val="000000"/>
-                </a:solidFill>
-                <a:latin typeface="맑은 고딕" pitchFamily="34" charset="0"/>
-                <a:ea typeface="맑은 고딕" pitchFamily="34" charset="-122"/>
-                <a:cs typeface="맑은 고딕" pitchFamily="34" charset="-120"/>
-              </a:rPr>
-              <a:t>- 1 -</a:t>
-            </a:r>
-            <a:endParaRPr lang="en-US" sz="1100" dirty="0"/>
-          </a:p>
-        </p:txBody>
-      </p:sp>
-      <p:sp>
-        <p:nvSpPr>
-          <p:cNvPr id="5" name="Text 3"/>
-          <p:cNvSpPr txBox="1"/>
-          <p:nvPr/>
-        </p:nvSpPr>
-        <p:spPr>
-          <a:xfrm>
             <a:off x="457200" y="82296"/>
             <a:ext cx="8229600" cy="548640"/>
           </a:xfrm>
@@ -6484,7 +6445,7 @@
       </p:sp>
       <p:sp>
         <p:nvSpPr>
-          <p:cNvPr id="6" name="Text 4"/>
+          <p:cNvPr id="5" name="Text 3"/>
           <p:cNvSpPr txBox="1"/>
           <p:nvPr/>
         </p:nvSpPr>
@@ -6523,7 +6484,7 @@
       </p:sp>
       <p:sp>
         <p:nvSpPr>
-          <p:cNvPr id="7" name="Text 5"/>
+          <p:cNvPr id="6" name="Text 4"/>
           <p:cNvSpPr txBox="1"/>
           <p:nvPr/>
         </p:nvSpPr>
@@ -6562,7 +6523,7 @@
       </p:sp>
       <p:sp>
         <p:nvSpPr>
-          <p:cNvPr id="8" name="Text 6"/>
+          <p:cNvPr id="7" name="Text 5"/>
           <p:cNvSpPr txBox="1"/>
           <p:nvPr/>
         </p:nvSpPr>
@@ -6601,7 +6562,7 @@
       </p:sp>
       <p:sp>
         <p:nvSpPr>
-          <p:cNvPr id="9" name="Text 7"/>
+          <p:cNvPr id="8" name="Text 6"/>
           <p:cNvSpPr txBox="1"/>
           <p:nvPr/>
         </p:nvSpPr>
@@ -6640,7 +6601,7 @@
       </p:sp>
       <p:sp>
         <p:nvSpPr>
-          <p:cNvPr id="10" name="Text 8"/>
+          <p:cNvPr id="9" name="Text 7"/>
           <p:cNvSpPr txBox="1"/>
           <p:nvPr/>
         </p:nvSpPr>
@@ -6679,7 +6640,7 @@
       </p:sp>
       <p:sp>
         <p:nvSpPr>
-          <p:cNvPr id="11" name="Text 9"/>
+          <p:cNvPr id="10" name="Text 8"/>
           <p:cNvSpPr txBox="1"/>
           <p:nvPr/>
         </p:nvSpPr>
@@ -6718,7 +6679,7 @@
       </p:sp>
       <p:sp>
         <p:nvSpPr>
-          <p:cNvPr id="12" name="Text 10"/>
+          <p:cNvPr id="11" name="Text 9"/>
           <p:cNvSpPr txBox="1"/>
           <p:nvPr/>
         </p:nvSpPr>
@@ -6757,7 +6718,7 @@
       </p:sp>
       <p:sp>
         <p:nvSpPr>
-          <p:cNvPr id="13" name="Text 11"/>
+          <p:cNvPr id="12" name="Text 10"/>
           <p:cNvSpPr txBox="1"/>
           <p:nvPr/>
         </p:nvSpPr>
@@ -6796,7 +6757,7 @@
       </p:sp>
       <p:sp>
         <p:nvSpPr>
-          <p:cNvPr id="14" name="Text 12"/>
+          <p:cNvPr id="13" name="Text 11"/>
           <p:cNvSpPr txBox="1"/>
           <p:nvPr/>
         </p:nvSpPr>
@@ -6835,7 +6796,7 @@
       </p:sp>
       <p:sp>
         <p:nvSpPr>
-          <p:cNvPr id="15" name="Text 13"/>
+          <p:cNvPr id="14" name="Text 12"/>
           <p:cNvSpPr txBox="1"/>
           <p:nvPr/>
         </p:nvSpPr>
@@ -6874,7 +6835,7 @@
       </p:sp>
       <p:sp>
         <p:nvSpPr>
-          <p:cNvPr id="16" name="Text 14"/>
+          <p:cNvPr id="15" name="Text 13"/>
           <p:cNvSpPr txBox="1"/>
           <p:nvPr/>
         </p:nvSpPr>
@@ -6913,7 +6874,7 @@
       </p:sp>
       <p:sp>
         <p:nvSpPr>
-          <p:cNvPr id="17" name="Text 15"/>
+          <p:cNvPr id="16" name="Text 14"/>
           <p:cNvSpPr txBox="1"/>
           <p:nvPr/>
         </p:nvSpPr>
@@ -6952,7 +6913,7 @@
       </p:sp>
       <p:sp>
         <p:nvSpPr>
-          <p:cNvPr id="18" name="Text 16"/>
+          <p:cNvPr id="17" name="Text 15"/>
           <p:cNvSpPr txBox="1"/>
           <p:nvPr/>
         </p:nvSpPr>
@@ -6991,7 +6952,7 @@
       </p:sp>
       <p:sp>
         <p:nvSpPr>
-          <p:cNvPr id="19" name="Text 17"/>
+          <p:cNvPr id="18" name="Text 16"/>
           <p:cNvSpPr txBox="1"/>
           <p:nvPr/>
         </p:nvSpPr>
@@ -7118,45 +7079,6 @@
         </p:nvSpPr>
         <p:spPr>
           <a:xfrm>
-            <a:off x="3657600" y="6291072"/>
-            <a:ext cx="1828800" cy="274320"/>
-          </a:xfrm>
-          <a:prstGeom prst="rect">
-            <a:avLst/>
-          </a:prstGeom>
-          <a:noFill/>
-          <a:ln/>
-        </p:spPr>
-        <p:txBody>
-          <a:bodyPr wrap="square" lIns="0" tIns="0" rIns="0" bIns="0" rtlCol="0" anchor="ctr"/>
-          <a:lstStyle/>
-          <a:p>
-            <a:pPr eaLnBrk="0" latinLnBrk="0" algn="ctr" indent="0" marL="0">
-              <a:buNone/>
-            </a:pPr>
-            <a:r>
-              <a:rPr lang="en-US" sz="1100" dirty="0">
-                <a:solidFill>
-                  <a:srgbClr val="000000"/>
-                </a:solidFill>
-                <a:latin typeface="맑은 고딕" pitchFamily="34" charset="0"/>
-                <a:ea typeface="맑은 고딕" pitchFamily="34" charset="-122"/>
-                <a:cs typeface="맑은 고딕" pitchFamily="34" charset="-120"/>
-              </a:rPr>
-              <a:t>- 2 -</a:t>
-            </a:r>
-            <a:endParaRPr lang="en-US" sz="1100" dirty="0"/>
-          </a:p>
-        </p:txBody>
-      </p:sp>
-      <p:sp>
-        <p:nvSpPr>
-          <p:cNvPr id="5" name="Text 3"/>
-          <p:cNvSpPr txBox="1"/>
-          <p:nvPr/>
-        </p:nvSpPr>
-        <p:spPr>
-          <a:xfrm>
             <a:off x="457200" y="82296"/>
             <a:ext cx="5120640" cy="548640"/>
           </a:xfrm>
@@ -7190,7 +7112,7 @@
       </p:sp>
       <p:sp>
         <p:nvSpPr>
-          <p:cNvPr id="6" name="Text 4"/>
+          <p:cNvPr id="5" name="Text 3"/>
           <p:cNvSpPr txBox="1"/>
           <p:nvPr/>
         </p:nvSpPr>
@@ -7229,7 +7151,7 @@
       </p:sp>
       <p:sp>
         <p:nvSpPr>
-          <p:cNvPr id="7" name="Text 5"/>
+          <p:cNvPr id="6" name="Text 4"/>
           <p:cNvSpPr txBox="1"/>
           <p:nvPr/>
         </p:nvSpPr>
@@ -7268,7 +7190,7 @@
       </p:sp>
       <p:sp>
         <p:nvSpPr>
-          <p:cNvPr id="8" name="Text 6"/>
+          <p:cNvPr id="7" name="Text 5"/>
           <p:cNvSpPr txBox="1"/>
           <p:nvPr/>
         </p:nvSpPr>
@@ -7310,7 +7232,7 @@
       </p:sp>
       <p:sp>
         <p:nvSpPr>
-          <p:cNvPr id="9" name="Text 7"/>
+          <p:cNvPr id="8" name="Text 6"/>
           <p:cNvSpPr txBox="1"/>
           <p:nvPr/>
         </p:nvSpPr>
@@ -7349,7 +7271,7 @@
       </p:sp>
       <p:sp>
         <p:nvSpPr>
-          <p:cNvPr id="10" name="Text 8"/>
+          <p:cNvPr id="9" name="Text 7"/>
           <p:cNvSpPr txBox="1"/>
           <p:nvPr/>
         </p:nvSpPr>
@@ -7388,7 +7310,7 @@
       </p:sp>
       <p:sp>
         <p:nvSpPr>
-          <p:cNvPr id="11" name="Text 9"/>
+          <p:cNvPr id="10" name="Text 8"/>
           <p:cNvSpPr txBox="1"/>
           <p:nvPr/>
         </p:nvSpPr>
@@ -7430,7 +7352,7 @@
       </p:sp>
       <p:sp>
         <p:nvSpPr>
-          <p:cNvPr id="12" name="Text 10"/>
+          <p:cNvPr id="11" name="Text 9"/>
           <p:cNvSpPr txBox="1"/>
           <p:nvPr/>
         </p:nvSpPr>
@@ -7469,7 +7391,7 @@
       </p:sp>
       <p:sp>
         <p:nvSpPr>
-          <p:cNvPr id="13" name="Text 11"/>
+          <p:cNvPr id="12" name="Text 10"/>
           <p:cNvSpPr txBox="1"/>
           <p:nvPr/>
         </p:nvSpPr>
@@ -7511,7 +7433,7 @@
       </p:sp>
       <p:sp>
         <p:nvSpPr>
-          <p:cNvPr id="14" name="Text 12"/>
+          <p:cNvPr id="13" name="Text 11"/>
           <p:cNvSpPr txBox="1"/>
           <p:nvPr/>
         </p:nvSpPr>
@@ -8252,7 +8174,7 @@
       </p:graphicFrame>
       <p:sp>
         <p:nvSpPr>
-          <p:cNvPr id="16" name="Text 13"/>
+          <p:cNvPr id="15" name="Text 12"/>
           <p:cNvSpPr txBox="1"/>
           <p:nvPr/>
         </p:nvSpPr>
@@ -8289,6 +8211,45 @@
           </a:p>
         </p:txBody>
       </p:sp>
+      <p:sp>
+        <p:nvSpPr>
+          <p:cNvPr id="17" name="Text 13"/>
+          <p:cNvSpPr txBox="1"/>
+          <p:nvPr/>
+        </p:nvSpPr>
+        <p:spPr>
+          <a:xfrm>
+            <a:off x="3657600" y="6291072"/>
+            <a:ext cx="1828800" cy="274320"/>
+          </a:xfrm>
+          <a:prstGeom prst="rect">
+            <a:avLst/>
+          </a:prstGeom>
+          <a:noFill/>
+          <a:ln/>
+        </p:spPr>
+        <p:txBody>
+          <a:bodyPr wrap="square" lIns="0" tIns="0" rIns="0" bIns="0" rtlCol="0" anchor="ctr"/>
+          <a:lstStyle/>
+          <a:p>
+            <a:pPr eaLnBrk="0" latinLnBrk="0" algn="ctr" indent="0" marL="0">
+              <a:buNone/>
+            </a:pPr>
+            <a:r>
+              <a:rPr lang="en-US" sz="1100" dirty="0">
+                <a:solidFill>
+                  <a:srgbClr val="000000"/>
+                </a:solidFill>
+                <a:latin typeface="맑은 고딕" pitchFamily="34" charset="0"/>
+                <a:ea typeface="맑은 고딕" pitchFamily="34" charset="-122"/>
+                <a:cs typeface="맑은 고딕" pitchFamily="34" charset="-120"/>
+              </a:rPr>
+              <a:t>1 / 10</a:t>
+            </a:r>
+            <a:endParaRPr lang="en-US" sz="1100" dirty="0"/>
+          </a:p>
+        </p:txBody>
+      </p:sp>
     </p:spTree>
   </p:cSld>
   <p:clrMapOvr>
@@ -8379,45 +8340,6 @@
         </p:nvSpPr>
         <p:spPr>
           <a:xfrm>
-            <a:off x="3657600" y="6291072"/>
-            <a:ext cx="1828800" cy="274320"/>
-          </a:xfrm>
-          <a:prstGeom prst="rect">
-            <a:avLst/>
-          </a:prstGeom>
-          <a:noFill/>
-          <a:ln/>
-        </p:spPr>
-        <p:txBody>
-          <a:bodyPr wrap="square" lIns="0" tIns="0" rIns="0" bIns="0" rtlCol="0" anchor="ctr"/>
-          <a:lstStyle/>
-          <a:p>
-            <a:pPr eaLnBrk="0" latinLnBrk="0" algn="ctr" indent="0" marL="0">
-              <a:buNone/>
-            </a:pPr>
-            <a:r>
-              <a:rPr lang="en-US" sz="1100" dirty="0">
-                <a:solidFill>
-                  <a:srgbClr val="000000"/>
-                </a:solidFill>
-                <a:latin typeface="맑은 고딕" pitchFamily="34" charset="0"/>
-                <a:ea typeface="맑은 고딕" pitchFamily="34" charset="-122"/>
-                <a:cs typeface="맑은 고딕" pitchFamily="34" charset="-120"/>
-              </a:rPr>
-              <a:t>- 3 -</a:t>
-            </a:r>
-            <a:endParaRPr lang="en-US" sz="1100" dirty="0"/>
-          </a:p>
-        </p:txBody>
-      </p:sp>
-      <p:sp>
-        <p:nvSpPr>
-          <p:cNvPr id="5" name="Text 3"/>
-          <p:cNvSpPr txBox="1"/>
-          <p:nvPr/>
-        </p:nvSpPr>
-        <p:spPr>
-          <a:xfrm>
             <a:off x="457200" y="82296"/>
             <a:ext cx="5120640" cy="548640"/>
           </a:xfrm>
@@ -8451,7 +8373,7 @@
       </p:sp>
       <p:sp>
         <p:nvSpPr>
-          <p:cNvPr id="6" name="Text 4"/>
+          <p:cNvPr id="5" name="Text 3"/>
           <p:cNvSpPr txBox="1"/>
           <p:nvPr/>
         </p:nvSpPr>
@@ -8490,7 +8412,7 @@
       </p:sp>
       <p:sp>
         <p:nvSpPr>
-          <p:cNvPr id="7" name="Text 5"/>
+          <p:cNvPr id="6" name="Text 4"/>
           <p:cNvSpPr txBox="1"/>
           <p:nvPr/>
         </p:nvSpPr>
@@ -11143,7 +11065,7 @@
       </p:graphicFrame>
       <p:sp>
         <p:nvSpPr>
-          <p:cNvPr id="9" name="Text 6"/>
+          <p:cNvPr id="8" name="Text 5"/>
           <p:cNvSpPr txBox="1"/>
           <p:nvPr/>
         </p:nvSpPr>
@@ -11182,7 +11104,7 @@
       </p:sp>
       <p:sp>
         <p:nvSpPr>
-          <p:cNvPr id="10" name="Text 7"/>
+          <p:cNvPr id="9" name="Text 6"/>
           <p:cNvSpPr txBox="1"/>
           <p:nvPr/>
         </p:nvSpPr>
@@ -12142,7 +12064,7 @@
       </p:graphicFrame>
       <p:sp>
         <p:nvSpPr>
-          <p:cNvPr id="12" name="Text 8"/>
+          <p:cNvPr id="11" name="Text 7"/>
           <p:cNvSpPr txBox="1"/>
           <p:nvPr/>
         </p:nvSpPr>
@@ -12179,6 +12101,45 @@
           </a:p>
         </p:txBody>
       </p:sp>
+      <p:sp>
+        <p:nvSpPr>
+          <p:cNvPr id="13" name="Text 8"/>
+          <p:cNvSpPr txBox="1"/>
+          <p:nvPr/>
+        </p:nvSpPr>
+        <p:spPr>
+          <a:xfrm>
+            <a:off x="3657600" y="6291072"/>
+            <a:ext cx="1828800" cy="274320"/>
+          </a:xfrm>
+          <a:prstGeom prst="rect">
+            <a:avLst/>
+          </a:prstGeom>
+          <a:noFill/>
+          <a:ln/>
+        </p:spPr>
+        <p:txBody>
+          <a:bodyPr wrap="square" lIns="0" tIns="0" rIns="0" bIns="0" rtlCol="0" anchor="ctr"/>
+          <a:lstStyle/>
+          <a:p>
+            <a:pPr eaLnBrk="0" latinLnBrk="0" algn="ctr" indent="0" marL="0">
+              <a:buNone/>
+            </a:pPr>
+            <a:r>
+              <a:rPr lang="en-US" sz="1100" dirty="0">
+                <a:solidFill>
+                  <a:srgbClr val="000000"/>
+                </a:solidFill>
+                <a:latin typeface="맑은 고딕" pitchFamily="34" charset="0"/>
+                <a:ea typeface="맑은 고딕" pitchFamily="34" charset="-122"/>
+                <a:cs typeface="맑은 고딕" pitchFamily="34" charset="-120"/>
+              </a:rPr>
+              <a:t>2 / 10</a:t>
+            </a:r>
+            <a:endParaRPr lang="en-US" sz="1100" dirty="0"/>
+          </a:p>
+        </p:txBody>
+      </p:sp>
     </p:spTree>
   </p:cSld>
   <p:clrMapOvr>
@@ -12269,45 +12230,6 @@
         </p:nvSpPr>
         <p:spPr>
           <a:xfrm>
-            <a:off x="3657600" y="6291072"/>
-            <a:ext cx="1828800" cy="274320"/>
-          </a:xfrm>
-          <a:prstGeom prst="rect">
-            <a:avLst/>
-          </a:prstGeom>
-          <a:noFill/>
-          <a:ln/>
-        </p:spPr>
-        <p:txBody>
-          <a:bodyPr wrap="square" lIns="0" tIns="0" rIns="0" bIns="0" rtlCol="0" anchor="ctr"/>
-          <a:lstStyle/>
-          <a:p>
-            <a:pPr eaLnBrk="0" latinLnBrk="0" algn="ctr" indent="0" marL="0">
-              <a:buNone/>
-            </a:pPr>
-            <a:r>
-              <a:rPr lang="en-US" sz="1100" dirty="0">
-                <a:solidFill>
-                  <a:srgbClr val="000000"/>
-                </a:solidFill>
-                <a:latin typeface="맑은 고딕" pitchFamily="34" charset="0"/>
-                <a:ea typeface="맑은 고딕" pitchFamily="34" charset="-122"/>
-                <a:cs typeface="맑은 고딕" pitchFamily="34" charset="-120"/>
-              </a:rPr>
-              <a:t>- 4 -</a:t>
-            </a:r>
-            <a:endParaRPr lang="en-US" sz="1100" dirty="0"/>
-          </a:p>
-        </p:txBody>
-      </p:sp>
-      <p:sp>
-        <p:nvSpPr>
-          <p:cNvPr id="5" name="Text 3"/>
-          <p:cNvSpPr txBox="1"/>
-          <p:nvPr/>
-        </p:nvSpPr>
-        <p:spPr>
-          <a:xfrm>
             <a:off x="457200" y="82296"/>
             <a:ext cx="5120640" cy="548640"/>
           </a:xfrm>
@@ -12341,7 +12263,7 @@
       </p:sp>
       <p:sp>
         <p:nvSpPr>
-          <p:cNvPr id="6" name="Text 4"/>
+          <p:cNvPr id="5" name="Text 3"/>
           <p:cNvSpPr txBox="1"/>
           <p:nvPr/>
         </p:nvSpPr>
@@ -12380,7 +12302,7 @@
       </p:sp>
       <p:sp>
         <p:nvSpPr>
-          <p:cNvPr id="7" name="Shape 5"/>
+          <p:cNvPr id="6" name="Shape 4"/>
           <p:cNvSpPr/>
           <p:nvPr/>
         </p:nvSpPr>
@@ -12405,7 +12327,7 @@
       </p:sp>
       <p:sp>
         <p:nvSpPr>
-          <p:cNvPr id="8" name="Text 6"/>
+          <p:cNvPr id="7" name="Text 5"/>
           <p:cNvSpPr txBox="1"/>
           <p:nvPr/>
         </p:nvSpPr>
@@ -12467,7 +12389,7 @@
       </p:sp>
       <p:sp>
         <p:nvSpPr>
-          <p:cNvPr id="9" name="Shape 7"/>
+          <p:cNvPr id="8" name="Shape 6"/>
           <p:cNvSpPr/>
           <p:nvPr/>
         </p:nvSpPr>
@@ -12492,7 +12414,7 @@
       </p:sp>
       <p:sp>
         <p:nvSpPr>
-          <p:cNvPr id="10" name="Text 8"/>
+          <p:cNvPr id="9" name="Text 7"/>
           <p:cNvSpPr txBox="1"/>
           <p:nvPr/>
         </p:nvSpPr>
@@ -12534,7 +12456,7 @@
       </p:sp>
       <p:sp>
         <p:nvSpPr>
-          <p:cNvPr id="11" name="Shape 9"/>
+          <p:cNvPr id="10" name="Shape 8"/>
           <p:cNvSpPr/>
           <p:nvPr/>
         </p:nvSpPr>
@@ -12554,7 +12476,7 @@
       </p:sp>
       <p:sp>
         <p:nvSpPr>
-          <p:cNvPr id="12" name="Shape 10"/>
+          <p:cNvPr id="11" name="Shape 9"/>
           <p:cNvSpPr/>
           <p:nvPr/>
         </p:nvSpPr>
@@ -12579,7 +12501,7 @@
       </p:sp>
       <p:sp>
         <p:nvSpPr>
-          <p:cNvPr id="13" name="Text 11"/>
+          <p:cNvPr id="12" name="Text 10"/>
           <p:cNvSpPr txBox="1"/>
           <p:nvPr/>
         </p:nvSpPr>
@@ -12641,7 +12563,7 @@
       </p:sp>
       <p:sp>
         <p:nvSpPr>
-          <p:cNvPr id="14" name="Shape 12"/>
+          <p:cNvPr id="13" name="Shape 11"/>
           <p:cNvSpPr/>
           <p:nvPr/>
         </p:nvSpPr>
@@ -12666,7 +12588,7 @@
       </p:sp>
       <p:sp>
         <p:nvSpPr>
-          <p:cNvPr id="15" name="Text 13"/>
+          <p:cNvPr id="14" name="Text 12"/>
           <p:cNvSpPr txBox="1"/>
           <p:nvPr/>
         </p:nvSpPr>
@@ -12708,7 +12630,7 @@
       </p:sp>
       <p:sp>
         <p:nvSpPr>
-          <p:cNvPr id="16" name="Shape 14"/>
+          <p:cNvPr id="15" name="Shape 13"/>
           <p:cNvSpPr/>
           <p:nvPr/>
         </p:nvSpPr>
@@ -12728,7 +12650,7 @@
       </p:sp>
       <p:sp>
         <p:nvSpPr>
-          <p:cNvPr id="17" name="Shape 15"/>
+          <p:cNvPr id="16" name="Shape 14"/>
           <p:cNvSpPr/>
           <p:nvPr/>
         </p:nvSpPr>
@@ -12753,7 +12675,7 @@
       </p:sp>
       <p:sp>
         <p:nvSpPr>
-          <p:cNvPr id="18" name="Text 16"/>
+          <p:cNvPr id="17" name="Text 15"/>
           <p:cNvSpPr txBox="1"/>
           <p:nvPr/>
         </p:nvSpPr>
@@ -12835,7 +12757,7 @@
       </p:sp>
       <p:sp>
         <p:nvSpPr>
-          <p:cNvPr id="19" name="Shape 17"/>
+          <p:cNvPr id="18" name="Shape 16"/>
           <p:cNvSpPr/>
           <p:nvPr/>
         </p:nvSpPr>
@@ -12860,7 +12782,7 @@
       </p:sp>
       <p:sp>
         <p:nvSpPr>
-          <p:cNvPr id="20" name="Text 18"/>
+          <p:cNvPr id="19" name="Text 17"/>
           <p:cNvSpPr txBox="1"/>
           <p:nvPr/>
         </p:nvSpPr>
@@ -12902,7 +12824,7 @@
       </p:sp>
       <p:sp>
         <p:nvSpPr>
-          <p:cNvPr id="21" name="Shape 19"/>
+          <p:cNvPr id="20" name="Shape 18"/>
           <p:cNvSpPr/>
           <p:nvPr/>
         </p:nvSpPr>
@@ -12922,7 +12844,7 @@
       </p:sp>
       <p:sp>
         <p:nvSpPr>
-          <p:cNvPr id="22" name="Shape 20"/>
+          <p:cNvPr id="21" name="Shape 19"/>
           <p:cNvSpPr/>
           <p:nvPr/>
         </p:nvSpPr>
@@ -12947,7 +12869,7 @@
       </p:sp>
       <p:sp>
         <p:nvSpPr>
-          <p:cNvPr id="23" name="Text 21"/>
+          <p:cNvPr id="22" name="Text 20"/>
           <p:cNvSpPr txBox="1"/>
           <p:nvPr/>
         </p:nvSpPr>
@@ -13009,7 +12931,7 @@
       </p:sp>
       <p:sp>
         <p:nvSpPr>
-          <p:cNvPr id="24" name="Shape 22"/>
+          <p:cNvPr id="23" name="Shape 21"/>
           <p:cNvSpPr/>
           <p:nvPr/>
         </p:nvSpPr>
@@ -13034,7 +12956,7 @@
       </p:sp>
       <p:sp>
         <p:nvSpPr>
-          <p:cNvPr id="25" name="Text 23"/>
+          <p:cNvPr id="24" name="Text 22"/>
           <p:cNvSpPr txBox="1"/>
           <p:nvPr/>
         </p:nvSpPr>
@@ -13076,7 +12998,7 @@
       </p:sp>
       <p:sp>
         <p:nvSpPr>
-          <p:cNvPr id="26" name="Shape 24"/>
+          <p:cNvPr id="25" name="Shape 23"/>
           <p:cNvSpPr/>
           <p:nvPr/>
         </p:nvSpPr>
@@ -13096,7 +13018,7 @@
       </p:sp>
       <p:sp>
         <p:nvSpPr>
-          <p:cNvPr id="27" name="Shape 25"/>
+          <p:cNvPr id="26" name="Shape 24"/>
           <p:cNvSpPr/>
           <p:nvPr/>
         </p:nvSpPr>
@@ -13121,7 +13043,7 @@
       </p:sp>
       <p:sp>
         <p:nvSpPr>
-          <p:cNvPr id="28" name="Text 26"/>
+          <p:cNvPr id="27" name="Text 25"/>
           <p:cNvSpPr txBox="1"/>
           <p:nvPr/>
         </p:nvSpPr>
@@ -13163,7 +13085,7 @@
       </p:sp>
       <p:sp>
         <p:nvSpPr>
-          <p:cNvPr id="29" name="Shape 27"/>
+          <p:cNvPr id="28" name="Shape 26"/>
           <p:cNvSpPr/>
           <p:nvPr/>
         </p:nvSpPr>
@@ -13188,7 +13110,7 @@
       </p:sp>
       <p:sp>
         <p:nvSpPr>
-          <p:cNvPr id="30" name="Text 28"/>
+          <p:cNvPr id="29" name="Text 27"/>
           <p:cNvSpPr txBox="1"/>
           <p:nvPr/>
         </p:nvSpPr>
@@ -13230,7 +13152,7 @@
       </p:sp>
       <p:sp>
         <p:nvSpPr>
-          <p:cNvPr id="31" name="Text 29"/>
+          <p:cNvPr id="30" name="Text 28"/>
           <p:cNvSpPr txBox="1"/>
           <p:nvPr/>
         </p:nvSpPr>
@@ -13267,6 +13189,45 @@
           </a:p>
         </p:txBody>
       </p:sp>
+      <p:sp>
+        <p:nvSpPr>
+          <p:cNvPr id="32" name="Text 29"/>
+          <p:cNvSpPr txBox="1"/>
+          <p:nvPr/>
+        </p:nvSpPr>
+        <p:spPr>
+          <a:xfrm>
+            <a:off x="3657600" y="6291072"/>
+            <a:ext cx="1828800" cy="274320"/>
+          </a:xfrm>
+          <a:prstGeom prst="rect">
+            <a:avLst/>
+          </a:prstGeom>
+          <a:noFill/>
+          <a:ln/>
+        </p:spPr>
+        <p:txBody>
+          <a:bodyPr wrap="square" lIns="0" tIns="0" rIns="0" bIns="0" rtlCol="0" anchor="ctr"/>
+          <a:lstStyle/>
+          <a:p>
+            <a:pPr eaLnBrk="0" latinLnBrk="0" algn="ctr" indent="0" marL="0">
+              <a:buNone/>
+            </a:pPr>
+            <a:r>
+              <a:rPr lang="en-US" sz="1100" dirty="0">
+                <a:solidFill>
+                  <a:srgbClr val="000000"/>
+                </a:solidFill>
+                <a:latin typeface="맑은 고딕" pitchFamily="34" charset="0"/>
+                <a:ea typeface="맑은 고딕" pitchFamily="34" charset="-122"/>
+                <a:cs typeface="맑은 고딕" pitchFamily="34" charset="-120"/>
+              </a:rPr>
+              <a:t>3 / 10</a:t>
+            </a:r>
+            <a:endParaRPr lang="en-US" sz="1100" dirty="0"/>
+          </a:p>
+        </p:txBody>
+      </p:sp>
     </p:spTree>
   </p:cSld>
   <p:clrMapOvr>
@@ -13357,45 +13318,6 @@
         </p:nvSpPr>
         <p:spPr>
           <a:xfrm>
-            <a:off x="3657600" y="6291072"/>
-            <a:ext cx="1828800" cy="274320"/>
-          </a:xfrm>
-          <a:prstGeom prst="rect">
-            <a:avLst/>
-          </a:prstGeom>
-          <a:noFill/>
-          <a:ln/>
-        </p:spPr>
-        <p:txBody>
-          <a:bodyPr wrap="square" lIns="0" tIns="0" rIns="0" bIns="0" rtlCol="0" anchor="ctr"/>
-          <a:lstStyle/>
-          <a:p>
-            <a:pPr eaLnBrk="0" latinLnBrk="0" algn="ctr" indent="0" marL="0">
-              <a:buNone/>
-            </a:pPr>
-            <a:r>
-              <a:rPr lang="en-US" sz="1100" dirty="0">
-                <a:solidFill>
-                  <a:srgbClr val="000000"/>
-                </a:solidFill>
-                <a:latin typeface="맑은 고딕" pitchFamily="34" charset="0"/>
-                <a:ea typeface="맑은 고딕" pitchFamily="34" charset="-122"/>
-                <a:cs typeface="맑은 고딕" pitchFamily="34" charset="-120"/>
-              </a:rPr>
-              <a:t>- 5 -</a:t>
-            </a:r>
-            <a:endParaRPr lang="en-US" sz="1100" dirty="0"/>
-          </a:p>
-        </p:txBody>
-      </p:sp>
-      <p:sp>
-        <p:nvSpPr>
-          <p:cNvPr id="5" name="Text 3"/>
-          <p:cNvSpPr txBox="1"/>
-          <p:nvPr/>
-        </p:nvSpPr>
-        <p:spPr>
-          <a:xfrm>
             <a:off x="457200" y="82296"/>
             <a:ext cx="5120640" cy="548640"/>
           </a:xfrm>
@@ -13429,7 +13351,7 @@
       </p:sp>
       <p:sp>
         <p:nvSpPr>
-          <p:cNvPr id="6" name="Text 4"/>
+          <p:cNvPr id="5" name="Text 3"/>
           <p:cNvSpPr txBox="1"/>
           <p:nvPr/>
         </p:nvSpPr>
@@ -13468,7 +13390,7 @@
       </p:sp>
       <p:sp>
         <p:nvSpPr>
-          <p:cNvPr id="7" name="Shape 5"/>
+          <p:cNvPr id="6" name="Shape 4"/>
           <p:cNvSpPr/>
           <p:nvPr/>
         </p:nvSpPr>
@@ -13493,7 +13415,7 @@
       </p:sp>
       <p:sp>
         <p:nvSpPr>
-          <p:cNvPr id="8" name="Text 6"/>
+          <p:cNvPr id="7" name="Text 5"/>
           <p:cNvSpPr txBox="1"/>
           <p:nvPr/>
         </p:nvSpPr>
@@ -13535,7 +13457,7 @@
       </p:sp>
       <p:sp>
         <p:nvSpPr>
-          <p:cNvPr id="9" name="Shape 7"/>
+          <p:cNvPr id="8" name="Shape 6"/>
           <p:cNvSpPr/>
           <p:nvPr/>
         </p:nvSpPr>
@@ -13560,7 +13482,7 @@
       </p:sp>
       <p:sp>
         <p:nvSpPr>
-          <p:cNvPr id="10" name="Text 8"/>
+          <p:cNvPr id="9" name="Text 7"/>
           <p:cNvSpPr txBox="1"/>
           <p:nvPr/>
         </p:nvSpPr>
@@ -13602,7 +13524,7 @@
       </p:sp>
       <p:sp>
         <p:nvSpPr>
-          <p:cNvPr id="11" name="Shape 9"/>
+          <p:cNvPr id="10" name="Shape 8"/>
           <p:cNvSpPr/>
           <p:nvPr/>
         </p:nvSpPr>
@@ -13622,7 +13544,7 @@
       </p:sp>
       <p:sp>
         <p:nvSpPr>
-          <p:cNvPr id="12" name="Shape 10"/>
+          <p:cNvPr id="11" name="Shape 9"/>
           <p:cNvSpPr/>
           <p:nvPr/>
         </p:nvSpPr>
@@ -13647,7 +13569,7 @@
       </p:sp>
       <p:sp>
         <p:nvSpPr>
-          <p:cNvPr id="13" name="Text 11"/>
+          <p:cNvPr id="12" name="Text 10"/>
           <p:cNvSpPr txBox="1"/>
           <p:nvPr/>
         </p:nvSpPr>
@@ -13689,7 +13611,7 @@
       </p:sp>
       <p:sp>
         <p:nvSpPr>
-          <p:cNvPr id="14" name="Shape 12"/>
+          <p:cNvPr id="13" name="Shape 11"/>
           <p:cNvSpPr/>
           <p:nvPr/>
         </p:nvSpPr>
@@ -13714,7 +13636,7 @@
       </p:sp>
       <p:sp>
         <p:nvSpPr>
-          <p:cNvPr id="15" name="Text 13"/>
+          <p:cNvPr id="14" name="Text 12"/>
           <p:cNvSpPr txBox="1"/>
           <p:nvPr/>
         </p:nvSpPr>
@@ -13756,7 +13678,7 @@
       </p:sp>
       <p:sp>
         <p:nvSpPr>
-          <p:cNvPr id="16" name="Shape 14"/>
+          <p:cNvPr id="15" name="Shape 13"/>
           <p:cNvSpPr/>
           <p:nvPr/>
         </p:nvSpPr>
@@ -13776,7 +13698,7 @@
       </p:sp>
       <p:sp>
         <p:nvSpPr>
-          <p:cNvPr id="17" name="Shape 15"/>
+          <p:cNvPr id="16" name="Shape 14"/>
           <p:cNvSpPr/>
           <p:nvPr/>
         </p:nvSpPr>
@@ -13801,7 +13723,7 @@
       </p:sp>
       <p:sp>
         <p:nvSpPr>
-          <p:cNvPr id="18" name="Text 16"/>
+          <p:cNvPr id="17" name="Text 15"/>
           <p:cNvSpPr txBox="1"/>
           <p:nvPr/>
         </p:nvSpPr>
@@ -13863,7 +13785,7 @@
       </p:sp>
       <p:sp>
         <p:nvSpPr>
-          <p:cNvPr id="19" name="Shape 17"/>
+          <p:cNvPr id="18" name="Shape 16"/>
           <p:cNvSpPr/>
           <p:nvPr/>
         </p:nvSpPr>
@@ -13888,7 +13810,7 @@
       </p:sp>
       <p:sp>
         <p:nvSpPr>
-          <p:cNvPr id="20" name="Text 18"/>
+          <p:cNvPr id="19" name="Text 17"/>
           <p:cNvSpPr txBox="1"/>
           <p:nvPr/>
         </p:nvSpPr>
@@ -13950,7 +13872,7 @@
       </p:sp>
       <p:sp>
         <p:nvSpPr>
-          <p:cNvPr id="21" name="Shape 19"/>
+          <p:cNvPr id="20" name="Shape 18"/>
           <p:cNvSpPr/>
           <p:nvPr/>
         </p:nvSpPr>
@@ -13970,7 +13892,7 @@
       </p:sp>
       <p:sp>
         <p:nvSpPr>
-          <p:cNvPr id="22" name="Shape 20"/>
+          <p:cNvPr id="21" name="Shape 19"/>
           <p:cNvSpPr/>
           <p:nvPr/>
         </p:nvSpPr>
@@ -13995,7 +13917,7 @@
       </p:sp>
       <p:sp>
         <p:nvSpPr>
-          <p:cNvPr id="23" name="Text 21"/>
+          <p:cNvPr id="22" name="Text 20"/>
           <p:cNvSpPr txBox="1"/>
           <p:nvPr/>
         </p:nvSpPr>
@@ -14037,7 +13959,7 @@
       </p:sp>
       <p:sp>
         <p:nvSpPr>
-          <p:cNvPr id="24" name="Shape 22"/>
+          <p:cNvPr id="23" name="Shape 21"/>
           <p:cNvSpPr/>
           <p:nvPr/>
         </p:nvSpPr>
@@ -14062,7 +13984,7 @@
       </p:sp>
       <p:sp>
         <p:nvSpPr>
-          <p:cNvPr id="25" name="Text 23"/>
+          <p:cNvPr id="24" name="Text 22"/>
           <p:cNvSpPr txBox="1"/>
           <p:nvPr/>
         </p:nvSpPr>
@@ -14124,7 +14046,7 @@
       </p:sp>
       <p:sp>
         <p:nvSpPr>
-          <p:cNvPr id="26" name="Shape 24"/>
+          <p:cNvPr id="25" name="Shape 23"/>
           <p:cNvSpPr/>
           <p:nvPr/>
         </p:nvSpPr>
@@ -14144,7 +14066,7 @@
       </p:sp>
       <p:sp>
         <p:nvSpPr>
-          <p:cNvPr id="27" name="Shape 25"/>
+          <p:cNvPr id="26" name="Shape 24"/>
           <p:cNvSpPr/>
           <p:nvPr/>
         </p:nvSpPr>
@@ -14169,7 +14091,7 @@
       </p:sp>
       <p:sp>
         <p:nvSpPr>
-          <p:cNvPr id="28" name="Text 26"/>
+          <p:cNvPr id="27" name="Text 25"/>
           <p:cNvSpPr txBox="1"/>
           <p:nvPr/>
         </p:nvSpPr>
@@ -14211,7 +14133,7 @@
       </p:sp>
       <p:sp>
         <p:nvSpPr>
-          <p:cNvPr id="29" name="Shape 27"/>
+          <p:cNvPr id="28" name="Shape 26"/>
           <p:cNvSpPr/>
           <p:nvPr/>
         </p:nvSpPr>
@@ -14236,7 +14158,7 @@
       </p:sp>
       <p:sp>
         <p:nvSpPr>
-          <p:cNvPr id="30" name="Text 28"/>
+          <p:cNvPr id="29" name="Text 27"/>
           <p:cNvSpPr txBox="1"/>
           <p:nvPr/>
         </p:nvSpPr>
@@ -14278,7 +14200,7 @@
       </p:sp>
       <p:sp>
         <p:nvSpPr>
-          <p:cNvPr id="31" name="Text 29"/>
+          <p:cNvPr id="30" name="Text 28"/>
           <p:cNvSpPr txBox="1"/>
           <p:nvPr/>
         </p:nvSpPr>
@@ -15419,6 +15341,45 @@
           </a:graphicData>
         </a:graphic>
       </p:graphicFrame>
+      <p:sp>
+        <p:nvSpPr>
+          <p:cNvPr id="33" name="Text 29"/>
+          <p:cNvSpPr txBox="1"/>
+          <p:nvPr/>
+        </p:nvSpPr>
+        <p:spPr>
+          <a:xfrm>
+            <a:off x="3657600" y="6291072"/>
+            <a:ext cx="1828800" cy="274320"/>
+          </a:xfrm>
+          <a:prstGeom prst="rect">
+            <a:avLst/>
+          </a:prstGeom>
+          <a:noFill/>
+          <a:ln/>
+        </p:spPr>
+        <p:txBody>
+          <a:bodyPr wrap="square" lIns="0" tIns="0" rIns="0" bIns="0" rtlCol="0" anchor="ctr"/>
+          <a:lstStyle/>
+          <a:p>
+            <a:pPr eaLnBrk="0" latinLnBrk="0" algn="ctr" indent="0" marL="0">
+              <a:buNone/>
+            </a:pPr>
+            <a:r>
+              <a:rPr lang="en-US" sz="1100" dirty="0">
+                <a:solidFill>
+                  <a:srgbClr val="000000"/>
+                </a:solidFill>
+                <a:latin typeface="맑은 고딕" pitchFamily="34" charset="0"/>
+                <a:ea typeface="맑은 고딕" pitchFamily="34" charset="-122"/>
+                <a:cs typeface="맑은 고딕" pitchFamily="34" charset="-120"/>
+              </a:rPr>
+              <a:t>4 / 10</a:t>
+            </a:r>
+            <a:endParaRPr lang="en-US" sz="1100" dirty="0"/>
+          </a:p>
+        </p:txBody>
+      </p:sp>
     </p:spTree>
   </p:cSld>
   <p:clrMapOvr>
@@ -15509,45 +15470,6 @@
         </p:nvSpPr>
         <p:spPr>
           <a:xfrm>
-            <a:off x="3657600" y="6291072"/>
-            <a:ext cx="1828800" cy="274320"/>
-          </a:xfrm>
-          <a:prstGeom prst="rect">
-            <a:avLst/>
-          </a:prstGeom>
-          <a:noFill/>
-          <a:ln/>
-        </p:spPr>
-        <p:txBody>
-          <a:bodyPr wrap="square" lIns="0" tIns="0" rIns="0" bIns="0" rtlCol="0" anchor="ctr"/>
-          <a:lstStyle/>
-          <a:p>
-            <a:pPr eaLnBrk="0" latinLnBrk="0" algn="ctr" indent="0" marL="0">
-              <a:buNone/>
-            </a:pPr>
-            <a:r>
-              <a:rPr lang="en-US" sz="1100" dirty="0">
-                <a:solidFill>
-                  <a:srgbClr val="000000"/>
-                </a:solidFill>
-                <a:latin typeface="맑은 고딕" pitchFamily="34" charset="0"/>
-                <a:ea typeface="맑은 고딕" pitchFamily="34" charset="-122"/>
-                <a:cs typeface="맑은 고딕" pitchFamily="34" charset="-120"/>
-              </a:rPr>
-              <a:t>- 6 -</a:t>
-            </a:r>
-            <a:endParaRPr lang="en-US" sz="1100" dirty="0"/>
-          </a:p>
-        </p:txBody>
-      </p:sp>
-      <p:sp>
-        <p:nvSpPr>
-          <p:cNvPr id="5" name="Text 3"/>
-          <p:cNvSpPr txBox="1"/>
-          <p:nvPr/>
-        </p:nvSpPr>
-        <p:spPr>
-          <a:xfrm>
             <a:off x="457200" y="82296"/>
             <a:ext cx="5120640" cy="548640"/>
           </a:xfrm>
@@ -15581,7 +15503,7 @@
       </p:sp>
       <p:sp>
         <p:nvSpPr>
-          <p:cNvPr id="6" name="Text 4"/>
+          <p:cNvPr id="5" name="Text 3"/>
           <p:cNvSpPr txBox="1"/>
           <p:nvPr/>
         </p:nvSpPr>
@@ -15620,7 +15542,7 @@
       </p:sp>
       <p:sp>
         <p:nvSpPr>
-          <p:cNvPr id="7" name="Text 5"/>
+          <p:cNvPr id="6" name="Text 4"/>
           <p:cNvSpPr txBox="1"/>
           <p:nvPr/>
         </p:nvSpPr>
@@ -15659,7 +15581,7 @@
       </p:sp>
       <p:sp>
         <p:nvSpPr>
-          <p:cNvPr id="8" name="Text 6"/>
+          <p:cNvPr id="7" name="Text 5"/>
           <p:cNvSpPr txBox="1"/>
           <p:nvPr/>
         </p:nvSpPr>
@@ -15698,7 +15620,7 @@
       </p:sp>
       <p:sp>
         <p:nvSpPr>
-          <p:cNvPr id="9" name="Text 7"/>
+          <p:cNvPr id="8" name="Text 6"/>
           <p:cNvSpPr txBox="1"/>
           <p:nvPr/>
         </p:nvSpPr>
@@ -15740,7 +15662,7 @@
       </p:sp>
       <p:sp>
         <p:nvSpPr>
-          <p:cNvPr id="10" name="Text 8"/>
+          <p:cNvPr id="9" name="Text 7"/>
           <p:cNvSpPr txBox="1"/>
           <p:nvPr/>
         </p:nvSpPr>
@@ -15779,7 +15701,7 @@
       </p:sp>
       <p:sp>
         <p:nvSpPr>
-          <p:cNvPr id="11" name="Text 9"/>
+          <p:cNvPr id="10" name="Text 8"/>
           <p:cNvSpPr txBox="1"/>
           <p:nvPr/>
         </p:nvSpPr>
@@ -15821,7 +15743,7 @@
       </p:sp>
       <p:sp>
         <p:nvSpPr>
-          <p:cNvPr id="12" name="Text 10"/>
+          <p:cNvPr id="11" name="Text 9"/>
           <p:cNvSpPr txBox="1"/>
           <p:nvPr/>
         </p:nvSpPr>
@@ -15860,7 +15782,7 @@
       </p:sp>
       <p:sp>
         <p:nvSpPr>
-          <p:cNvPr id="13" name="Text 11"/>
+          <p:cNvPr id="12" name="Text 10"/>
           <p:cNvSpPr txBox="1"/>
           <p:nvPr/>
         </p:nvSpPr>
@@ -15899,7 +15821,7 @@
       </p:sp>
       <p:sp>
         <p:nvSpPr>
-          <p:cNvPr id="14" name="Text 12"/>
+          <p:cNvPr id="13" name="Text 11"/>
           <p:cNvSpPr txBox="1"/>
           <p:nvPr/>
         </p:nvSpPr>
@@ -15941,7 +15863,7 @@
       </p:sp>
       <p:sp>
         <p:nvSpPr>
-          <p:cNvPr id="15" name="Text 13"/>
+          <p:cNvPr id="14" name="Text 12"/>
           <p:cNvSpPr txBox="1"/>
           <p:nvPr/>
         </p:nvSpPr>
@@ -15980,7 +15902,7 @@
       </p:sp>
       <p:sp>
         <p:nvSpPr>
-          <p:cNvPr id="16" name="Text 14"/>
+          <p:cNvPr id="15" name="Text 13"/>
           <p:cNvSpPr txBox="1"/>
           <p:nvPr/>
         </p:nvSpPr>
@@ -16716,6 +16638,45 @@
           </a:graphicData>
         </a:graphic>
       </p:graphicFrame>
+      <p:sp>
+        <p:nvSpPr>
+          <p:cNvPr id="18" name="Text 14"/>
+          <p:cNvSpPr txBox="1"/>
+          <p:nvPr/>
+        </p:nvSpPr>
+        <p:spPr>
+          <a:xfrm>
+            <a:off x="3657600" y="6291072"/>
+            <a:ext cx="1828800" cy="274320"/>
+          </a:xfrm>
+          <a:prstGeom prst="rect">
+            <a:avLst/>
+          </a:prstGeom>
+          <a:noFill/>
+          <a:ln/>
+        </p:spPr>
+        <p:txBody>
+          <a:bodyPr wrap="square" lIns="0" tIns="0" rIns="0" bIns="0" rtlCol="0" anchor="ctr"/>
+          <a:lstStyle/>
+          <a:p>
+            <a:pPr eaLnBrk="0" latinLnBrk="0" algn="ctr" indent="0" marL="0">
+              <a:buNone/>
+            </a:pPr>
+            <a:r>
+              <a:rPr lang="en-US" sz="1100" dirty="0">
+                <a:solidFill>
+                  <a:srgbClr val="000000"/>
+                </a:solidFill>
+                <a:latin typeface="맑은 고딕" pitchFamily="34" charset="0"/>
+                <a:ea typeface="맑은 고딕" pitchFamily="34" charset="-122"/>
+                <a:cs typeface="맑은 고딕" pitchFamily="34" charset="-120"/>
+              </a:rPr>
+              <a:t>5 / 10</a:t>
+            </a:r>
+            <a:endParaRPr lang="en-US" sz="1100" dirty="0"/>
+          </a:p>
+        </p:txBody>
+      </p:sp>
     </p:spTree>
   </p:cSld>
   <p:clrMapOvr>
@@ -16806,45 +16767,6 @@
         </p:nvSpPr>
         <p:spPr>
           <a:xfrm>
-            <a:off x="3657600" y="6291072"/>
-            <a:ext cx="1828800" cy="274320"/>
-          </a:xfrm>
-          <a:prstGeom prst="rect">
-            <a:avLst/>
-          </a:prstGeom>
-          <a:noFill/>
-          <a:ln/>
-        </p:spPr>
-        <p:txBody>
-          <a:bodyPr wrap="square" lIns="0" tIns="0" rIns="0" bIns="0" rtlCol="0" anchor="ctr"/>
-          <a:lstStyle/>
-          <a:p>
-            <a:pPr eaLnBrk="0" latinLnBrk="0" algn="ctr" indent="0" marL="0">
-              <a:buNone/>
-            </a:pPr>
-            <a:r>
-              <a:rPr lang="en-US" sz="1100" dirty="0">
-                <a:solidFill>
-                  <a:srgbClr val="000000"/>
-                </a:solidFill>
-                <a:latin typeface="맑은 고딕" pitchFamily="34" charset="0"/>
-                <a:ea typeface="맑은 고딕" pitchFamily="34" charset="-122"/>
-                <a:cs typeface="맑은 고딕" pitchFamily="34" charset="-120"/>
-              </a:rPr>
-              <a:t>- 7 -</a:t>
-            </a:r>
-            <a:endParaRPr lang="en-US" sz="1100" dirty="0"/>
-          </a:p>
-        </p:txBody>
-      </p:sp>
-      <p:sp>
-        <p:nvSpPr>
-          <p:cNvPr id="5" name="Text 3"/>
-          <p:cNvSpPr txBox="1"/>
-          <p:nvPr/>
-        </p:nvSpPr>
-        <p:spPr>
-          <a:xfrm>
             <a:off x="457200" y="82296"/>
             <a:ext cx="5120640" cy="548640"/>
           </a:xfrm>
@@ -16878,7 +16800,7 @@
       </p:sp>
       <p:sp>
         <p:nvSpPr>
-          <p:cNvPr id="6" name="Text 4"/>
+          <p:cNvPr id="5" name="Text 3"/>
           <p:cNvSpPr txBox="1"/>
           <p:nvPr/>
         </p:nvSpPr>
@@ -16917,7 +16839,7 @@
       </p:sp>
       <p:sp>
         <p:nvSpPr>
-          <p:cNvPr id="7" name="Text 5"/>
+          <p:cNvPr id="6" name="Text 4"/>
           <p:cNvSpPr txBox="1"/>
           <p:nvPr/>
         </p:nvSpPr>
@@ -16956,7 +16878,7 @@
       </p:sp>
       <p:sp>
         <p:nvSpPr>
-          <p:cNvPr id="8" name="Text 6"/>
+          <p:cNvPr id="7" name="Text 5"/>
           <p:cNvSpPr txBox="1"/>
           <p:nvPr/>
         </p:nvSpPr>
@@ -16995,7 +16917,7 @@
       </p:sp>
       <p:sp>
         <p:nvSpPr>
-          <p:cNvPr id="9" name="Text 7"/>
+          <p:cNvPr id="8" name="Text 6"/>
           <p:cNvSpPr txBox="1"/>
           <p:nvPr/>
         </p:nvSpPr>
@@ -17037,7 +16959,7 @@
       </p:sp>
       <p:sp>
         <p:nvSpPr>
-          <p:cNvPr id="10" name="Text 8"/>
+          <p:cNvPr id="9" name="Text 7"/>
           <p:cNvSpPr txBox="1"/>
           <p:nvPr/>
         </p:nvSpPr>
@@ -17076,7 +16998,7 @@
       </p:sp>
       <p:sp>
         <p:nvSpPr>
-          <p:cNvPr id="11" name="Text 9"/>
+          <p:cNvPr id="10" name="Text 8"/>
           <p:cNvSpPr txBox="1"/>
           <p:nvPr/>
         </p:nvSpPr>
@@ -17118,7 +17040,7 @@
       </p:sp>
       <p:sp>
         <p:nvSpPr>
-          <p:cNvPr id="12" name="Text 10"/>
+          <p:cNvPr id="11" name="Text 9"/>
           <p:cNvSpPr txBox="1"/>
           <p:nvPr/>
         </p:nvSpPr>
@@ -18161,7 +18083,7 @@
       </p:graphicFrame>
       <p:sp>
         <p:nvSpPr>
-          <p:cNvPr id="14" name="Text 11"/>
+          <p:cNvPr id="13" name="Text 10"/>
           <p:cNvSpPr txBox="1"/>
           <p:nvPr/>
         </p:nvSpPr>
@@ -18200,7 +18122,7 @@
       </p:sp>
       <p:sp>
         <p:nvSpPr>
-          <p:cNvPr id="15" name="Text 12"/>
+          <p:cNvPr id="14" name="Text 11"/>
           <p:cNvSpPr txBox="1"/>
           <p:nvPr/>
         </p:nvSpPr>
@@ -18239,7 +18161,7 @@
       </p:sp>
       <p:sp>
         <p:nvSpPr>
-          <p:cNvPr id="16" name="Text 13"/>
+          <p:cNvPr id="15" name="Text 12"/>
           <p:cNvSpPr txBox="1"/>
           <p:nvPr/>
         </p:nvSpPr>
@@ -18281,7 +18203,7 @@
       </p:sp>
       <p:sp>
         <p:nvSpPr>
-          <p:cNvPr id="17" name="Text 14"/>
+          <p:cNvPr id="16" name="Text 13"/>
           <p:cNvSpPr txBox="1"/>
           <p:nvPr/>
         </p:nvSpPr>
@@ -18320,7 +18242,7 @@
       </p:sp>
       <p:sp>
         <p:nvSpPr>
-          <p:cNvPr id="18" name="Text 15"/>
+          <p:cNvPr id="17" name="Text 14"/>
           <p:cNvSpPr txBox="1"/>
           <p:nvPr/>
         </p:nvSpPr>
@@ -18362,7 +18284,7 @@
       </p:sp>
       <p:sp>
         <p:nvSpPr>
-          <p:cNvPr id="19" name="Text 16"/>
+          <p:cNvPr id="18" name="Text 15"/>
           <p:cNvSpPr txBox="1"/>
           <p:nvPr/>
         </p:nvSpPr>
@@ -18401,7 +18323,7 @@
       </p:sp>
       <p:sp>
         <p:nvSpPr>
-          <p:cNvPr id="20" name="Text 17"/>
+          <p:cNvPr id="19" name="Text 16"/>
           <p:cNvSpPr txBox="1"/>
           <p:nvPr/>
         </p:nvSpPr>
@@ -18441,6 +18363,45 @@
           </a:p>
         </p:txBody>
       </p:sp>
+      <p:sp>
+        <p:nvSpPr>
+          <p:cNvPr id="21" name="Text 17"/>
+          <p:cNvSpPr txBox="1"/>
+          <p:nvPr/>
+        </p:nvSpPr>
+        <p:spPr>
+          <a:xfrm>
+            <a:off x="3657600" y="6291072"/>
+            <a:ext cx="1828800" cy="274320"/>
+          </a:xfrm>
+          <a:prstGeom prst="rect">
+            <a:avLst/>
+          </a:prstGeom>
+          <a:noFill/>
+          <a:ln/>
+        </p:spPr>
+        <p:txBody>
+          <a:bodyPr wrap="square" lIns="0" tIns="0" rIns="0" bIns="0" rtlCol="0" anchor="ctr"/>
+          <a:lstStyle/>
+          <a:p>
+            <a:pPr eaLnBrk="0" latinLnBrk="0" algn="ctr" indent="0" marL="0">
+              <a:buNone/>
+            </a:pPr>
+            <a:r>
+              <a:rPr lang="en-US" sz="1100" dirty="0">
+                <a:solidFill>
+                  <a:srgbClr val="000000"/>
+                </a:solidFill>
+                <a:latin typeface="맑은 고딕" pitchFamily="34" charset="0"/>
+                <a:ea typeface="맑은 고딕" pitchFamily="34" charset="-122"/>
+                <a:cs typeface="맑은 고딕" pitchFamily="34" charset="-120"/>
+              </a:rPr>
+              <a:t>6 / 10</a:t>
+            </a:r>
+            <a:endParaRPr lang="en-US" sz="1100" dirty="0"/>
+          </a:p>
+        </p:txBody>
+      </p:sp>
     </p:spTree>
   </p:cSld>
   <p:clrMapOvr>
@@ -18531,45 +18492,6 @@
         </p:nvSpPr>
         <p:spPr>
           <a:xfrm>
-            <a:off x="3657600" y="6291072"/>
-            <a:ext cx="1828800" cy="274320"/>
-          </a:xfrm>
-          <a:prstGeom prst="rect">
-            <a:avLst/>
-          </a:prstGeom>
-          <a:noFill/>
-          <a:ln/>
-        </p:spPr>
-        <p:txBody>
-          <a:bodyPr wrap="square" lIns="0" tIns="0" rIns="0" bIns="0" rtlCol="0" anchor="ctr"/>
-          <a:lstStyle/>
-          <a:p>
-            <a:pPr eaLnBrk="0" latinLnBrk="0" algn="ctr" indent="0" marL="0">
-              <a:buNone/>
-            </a:pPr>
-            <a:r>
-              <a:rPr lang="en-US" sz="1100" dirty="0">
-                <a:solidFill>
-                  <a:srgbClr val="000000"/>
-                </a:solidFill>
-                <a:latin typeface="맑은 고딕" pitchFamily="34" charset="0"/>
-                <a:ea typeface="맑은 고딕" pitchFamily="34" charset="-122"/>
-                <a:cs typeface="맑은 고딕" pitchFamily="34" charset="-120"/>
-              </a:rPr>
-              <a:t>- 8 -</a:t>
-            </a:r>
-            <a:endParaRPr lang="en-US" sz="1100" dirty="0"/>
-          </a:p>
-        </p:txBody>
-      </p:sp>
-      <p:sp>
-        <p:nvSpPr>
-          <p:cNvPr id="5" name="Text 3"/>
-          <p:cNvSpPr txBox="1"/>
-          <p:nvPr/>
-        </p:nvSpPr>
-        <p:spPr>
-          <a:xfrm>
             <a:off x="457200" y="82296"/>
             <a:ext cx="5120640" cy="548640"/>
           </a:xfrm>
@@ -18603,7 +18525,7 @@
       </p:sp>
       <p:sp>
         <p:nvSpPr>
-          <p:cNvPr id="6" name="Text 4"/>
+          <p:cNvPr id="5" name="Text 3"/>
           <p:cNvSpPr txBox="1"/>
           <p:nvPr/>
         </p:nvSpPr>
@@ -18642,7 +18564,7 @@
       </p:sp>
       <p:sp>
         <p:nvSpPr>
-          <p:cNvPr id="7" name="Text 5"/>
+          <p:cNvPr id="6" name="Text 4"/>
           <p:cNvSpPr txBox="1"/>
           <p:nvPr/>
         </p:nvSpPr>
@@ -18681,7 +18603,7 @@
       </p:sp>
       <p:sp>
         <p:nvSpPr>
-          <p:cNvPr id="8" name="Text 6"/>
+          <p:cNvPr id="7" name="Text 5"/>
           <p:cNvSpPr txBox="1"/>
           <p:nvPr/>
         </p:nvSpPr>
@@ -18720,7 +18642,7 @@
       </p:sp>
       <p:sp>
         <p:nvSpPr>
-          <p:cNvPr id="9" name="Text 7"/>
+          <p:cNvPr id="8" name="Text 6"/>
           <p:cNvSpPr txBox="1"/>
           <p:nvPr/>
         </p:nvSpPr>
@@ -18762,7 +18684,7 @@
       </p:sp>
       <p:sp>
         <p:nvSpPr>
-          <p:cNvPr id="10" name="Text 8"/>
+          <p:cNvPr id="9" name="Text 7"/>
           <p:cNvSpPr txBox="1"/>
           <p:nvPr/>
         </p:nvSpPr>
@@ -18801,7 +18723,7 @@
       </p:sp>
       <p:sp>
         <p:nvSpPr>
-          <p:cNvPr id="11" name="Text 9"/>
+          <p:cNvPr id="10" name="Text 8"/>
           <p:cNvSpPr txBox="1"/>
           <p:nvPr/>
         </p:nvSpPr>
@@ -18843,7 +18765,7 @@
       </p:sp>
       <p:sp>
         <p:nvSpPr>
-          <p:cNvPr id="12" name="Text 10"/>
+          <p:cNvPr id="11" name="Text 9"/>
           <p:cNvSpPr txBox="1"/>
           <p:nvPr/>
         </p:nvSpPr>
@@ -19886,7 +19808,7 @@
       </p:graphicFrame>
       <p:sp>
         <p:nvSpPr>
-          <p:cNvPr id="14" name="Text 11"/>
+          <p:cNvPr id="13" name="Text 10"/>
           <p:cNvSpPr txBox="1"/>
           <p:nvPr/>
         </p:nvSpPr>
@@ -19925,7 +19847,7 @@
       </p:sp>
       <p:sp>
         <p:nvSpPr>
-          <p:cNvPr id="15" name="Text 12"/>
+          <p:cNvPr id="14" name="Text 11"/>
           <p:cNvSpPr txBox="1"/>
           <p:nvPr/>
         </p:nvSpPr>
@@ -19964,7 +19886,7 @@
       </p:sp>
       <p:sp>
         <p:nvSpPr>
-          <p:cNvPr id="16" name="Text 13"/>
+          <p:cNvPr id="15" name="Text 12"/>
           <p:cNvSpPr txBox="1"/>
           <p:nvPr/>
         </p:nvSpPr>
@@ -20006,7 +19928,7 @@
       </p:sp>
       <p:sp>
         <p:nvSpPr>
-          <p:cNvPr id="17" name="Text 14"/>
+          <p:cNvPr id="16" name="Text 13"/>
           <p:cNvSpPr txBox="1"/>
           <p:nvPr/>
         </p:nvSpPr>
@@ -20045,7 +19967,7 @@
       </p:sp>
       <p:sp>
         <p:nvSpPr>
-          <p:cNvPr id="18" name="Text 15"/>
+          <p:cNvPr id="17" name="Text 14"/>
           <p:cNvSpPr txBox="1"/>
           <p:nvPr/>
         </p:nvSpPr>
@@ -20080,6 +20002,45 @@
                 <a:cs typeface="맑은 고딕" pitchFamily="34" charset="-120"/>
               </a:rPr>
               <a:t>최종합격 예정자에 대하여 법인에 임용 제청을 요청함.</a:t>
+            </a:r>
+            <a:endParaRPr lang="en-US" sz="1100" dirty="0"/>
+          </a:p>
+        </p:txBody>
+      </p:sp>
+      <p:sp>
+        <p:nvSpPr>
+          <p:cNvPr id="19" name="Text 15"/>
+          <p:cNvSpPr txBox="1"/>
+          <p:nvPr/>
+        </p:nvSpPr>
+        <p:spPr>
+          <a:xfrm>
+            <a:off x="3657600" y="6291072"/>
+            <a:ext cx="1828800" cy="274320"/>
+          </a:xfrm>
+          <a:prstGeom prst="rect">
+            <a:avLst/>
+          </a:prstGeom>
+          <a:noFill/>
+          <a:ln/>
+        </p:spPr>
+        <p:txBody>
+          <a:bodyPr wrap="square" lIns="0" tIns="0" rIns="0" bIns="0" rtlCol="0" anchor="ctr"/>
+          <a:lstStyle/>
+          <a:p>
+            <a:pPr eaLnBrk="0" latinLnBrk="0" algn="ctr" indent="0" marL="0">
+              <a:buNone/>
+            </a:pPr>
+            <a:r>
+              <a:rPr lang="en-US" sz="1100" dirty="0">
+                <a:solidFill>
+                  <a:srgbClr val="000000"/>
+                </a:solidFill>
+                <a:latin typeface="맑은 고딕" pitchFamily="34" charset="0"/>
+                <a:ea typeface="맑은 고딕" pitchFamily="34" charset="-122"/>
+                <a:cs typeface="맑은 고딕" pitchFamily="34" charset="-120"/>
+              </a:rPr>
+              <a:t>7 / 10</a:t>
             </a:r>
             <a:endParaRPr lang="en-US" sz="1100" dirty="0"/>
           </a:p>

--- a/docs/2027년_사무직원_채용계획안.pptx
+++ b/docs/2027년_사무직원_채용계획안.pptx
@@ -6443,16 +6443,2211 @@
           </a:p>
         </p:txBody>
       </p:sp>
+      <p:graphicFrame>
+        <p:nvGraphicFramePr>
+          <p:cNvPr id="3" name="Table 0"/>
+          <p:cNvGraphicFramePr>
+            <a:graphicFrameLocks noGrp="1"/>
+          </p:cNvGraphicFramePr>
+          <p:nvPr>
+            <p:extLst>
+              <p:ext uri="{D42A27DB-BD31-4B8C-83A1-F6EECF244321}">
+                <p14:modId xmlns:p14="http://schemas.microsoft.com/office/powerpoint/2010/main" val="1579011935"/>
+              </p:ext>
+            </p:extLst>
+          </p:nvPr>
+        </p:nvGraphicFramePr>
+        <p:xfrm>
+          <a:off x="1005840" y="1188720"/>
+          <a:ext cx="7132320" cy="914400"/>
+        </p:xfrm>
+        <a:graphic>
+          <a:graphicData uri="http://schemas.openxmlformats.org/drawingml/2006/table">
+            <a:tbl>
+              <a:tblPr/>
+              <a:tblGrid>
+                <a:gridCol w="822960"/>
+                <a:gridCol w="4206240"/>
+                <a:gridCol w="2103120"/>
+              </a:tblGrid>
+              <a:tr h="329184">
+                <a:tc>
+                  <a:txBody>
+                    <a:bodyPr/>
+                    <a:lstStyle/>
+                    <a:p>
+                      <a:pPr eaLnBrk="0" latinLnBrk="0" algn="ctr" indent="0" marL="0">
+                        <a:buNone/>
+                      </a:pPr>
+                      <a:r>
+                        <a:rPr lang="en-US" sz="1050" b="1" dirty="0">
+                          <a:solidFill>
+                            <a:srgbClr val="000000"/>
+                          </a:solidFill>
+                          <a:latin typeface="맑은 고딕" pitchFamily="34" charset="0"/>
+                          <a:ea typeface="맑은 고딕" pitchFamily="34" charset="-122"/>
+                          <a:cs typeface="맑은 고딕" pitchFamily="34" charset="-120"/>
+                        </a:rPr>
+                        <a:t>구분</a:t>
+                      </a:r>
+                      <a:endParaRPr lang="en-US" sz="1050" dirty="0">
+                        <a:latin typeface="맑은 고딕" charset="0"/>
+                        <a:ea typeface="맑은 고딕" charset="0"/>
+                        <a:cs typeface="맑은 고딕" charset="0"/>
+                      </a:endParaRPr>
+                    </a:p>
+                  </a:txBody>
+                  <a:tcPr marL="38100" marR="38100" marT="38100" marB="38100" anchor="ctr">
+                    <a:lnL w="12700" cap="flat" cmpd="sng" algn="ctr">
+                      <a:solidFill>
+                        <a:srgbClr val="000000"/>
+                      </a:solidFill>
+                      <a:prstDash val="solid"/>
+                      <a:round/>
+                      <a:headEnd type="none" w="med" len="med"/>
+                      <a:tailEnd type="none" w="med" len="med"/>
+                    </a:lnL>
+                    <a:lnR w="12700" cap="flat" cmpd="sng" algn="ctr">
+                      <a:solidFill>
+                        <a:srgbClr val="000000"/>
+                      </a:solidFill>
+                      <a:prstDash val="solid"/>
+                      <a:round/>
+                      <a:headEnd type="none" w="med" len="med"/>
+                      <a:tailEnd type="none" w="med" len="med"/>
+                    </a:lnR>
+                    <a:lnT w="12700" cap="flat" cmpd="sng" algn="ctr">
+                      <a:solidFill>
+                        <a:srgbClr val="000000"/>
+                      </a:solidFill>
+                      <a:prstDash val="solid"/>
+                      <a:round/>
+                      <a:headEnd type="none" w="med" len="med"/>
+                      <a:tailEnd type="none" w="med" len="med"/>
+                    </a:lnT>
+                    <a:lnB w="12700" cap="flat" cmpd="sng" algn="ctr">
+                      <a:solidFill>
+                        <a:srgbClr val="000000"/>
+                      </a:solidFill>
+                      <a:prstDash val="solid"/>
+                      <a:round/>
+                      <a:headEnd type="none" w="med" len="med"/>
+                      <a:tailEnd type="none" w="med" len="med"/>
+                    </a:lnB>
+                    <a:solidFill>
+                      <a:srgbClr val="CCFFFF"/>
+                    </a:solidFill>
+                  </a:tcPr>
+                </a:tc>
+                <a:tc>
+                  <a:txBody>
+                    <a:bodyPr/>
+                    <a:lstStyle/>
+                    <a:p>
+                      <a:pPr eaLnBrk="0" latinLnBrk="0" algn="ctr" indent="0" marL="0">
+                        <a:buNone/>
+                      </a:pPr>
+                      <a:r>
+                        <a:rPr lang="en-US" sz="1050" b="1" dirty="0">
+                          <a:solidFill>
+                            <a:srgbClr val="000000"/>
+                          </a:solidFill>
+                          <a:latin typeface="맑은 고딕" pitchFamily="34" charset="0"/>
+                          <a:ea typeface="맑은 고딕" pitchFamily="34" charset="-122"/>
+                          <a:cs typeface="맑은 고딕" pitchFamily="34" charset="-120"/>
+                        </a:rPr>
+                        <a:t>항  목</a:t>
+                      </a:r>
+                      <a:endParaRPr lang="en-US" sz="1050" dirty="0">
+                        <a:latin typeface="맑은 고딕" charset="0"/>
+                        <a:ea typeface="맑은 고딕" charset="0"/>
+                        <a:cs typeface="맑은 고딕" charset="0"/>
+                      </a:endParaRPr>
+                    </a:p>
+                  </a:txBody>
+                  <a:tcPr marL="38100" marR="38100" marT="38100" marB="38100" anchor="ctr">
+                    <a:lnL w="12700" cap="flat" cmpd="sng" algn="ctr">
+                      <a:solidFill>
+                        <a:srgbClr val="000000"/>
+                      </a:solidFill>
+                      <a:prstDash val="solid"/>
+                      <a:round/>
+                      <a:headEnd type="none" w="med" len="med"/>
+                      <a:tailEnd type="none" w="med" len="med"/>
+                    </a:lnL>
+                    <a:lnR w="12700" cap="flat" cmpd="sng" algn="ctr">
+                      <a:solidFill>
+                        <a:srgbClr val="000000"/>
+                      </a:solidFill>
+                      <a:prstDash val="solid"/>
+                      <a:round/>
+                      <a:headEnd type="none" w="med" len="med"/>
+                      <a:tailEnd type="none" w="med" len="med"/>
+                    </a:lnR>
+                    <a:lnT w="12700" cap="flat" cmpd="sng" algn="ctr">
+                      <a:solidFill>
+                        <a:srgbClr val="000000"/>
+                      </a:solidFill>
+                      <a:prstDash val="solid"/>
+                      <a:round/>
+                      <a:headEnd type="none" w="med" len="med"/>
+                      <a:tailEnd type="none" w="med" len="med"/>
+                    </a:lnT>
+                    <a:lnB w="12700" cap="flat" cmpd="sng" algn="ctr">
+                      <a:solidFill>
+                        <a:srgbClr val="000000"/>
+                      </a:solidFill>
+                      <a:prstDash val="solid"/>
+                      <a:round/>
+                      <a:headEnd type="none" w="med" len="med"/>
+                      <a:tailEnd type="none" w="med" len="med"/>
+                    </a:lnB>
+                    <a:solidFill>
+                      <a:srgbClr val="CCFFFF"/>
+                    </a:solidFill>
+                  </a:tcPr>
+                </a:tc>
+                <a:tc>
+                  <a:txBody>
+                    <a:bodyPr/>
+                    <a:lstStyle/>
+                    <a:p>
+                      <a:pPr eaLnBrk="0" latinLnBrk="0" algn="ctr" indent="0" marL="0">
+                        <a:buNone/>
+                      </a:pPr>
+                      <a:r>
+                        <a:rPr lang="en-US" sz="1050" b="1" dirty="0">
+                          <a:solidFill>
+                            <a:srgbClr val="000000"/>
+                          </a:solidFill>
+                          <a:latin typeface="맑은 고딕" pitchFamily="34" charset="0"/>
+                          <a:ea typeface="맑은 고딕" pitchFamily="34" charset="-122"/>
+                          <a:cs typeface="맑은 고딕" pitchFamily="34" charset="-120"/>
+                        </a:rPr>
+                        <a:t>비고</a:t>
+                      </a:r>
+                      <a:endParaRPr lang="en-US" sz="1050" dirty="0">
+                        <a:latin typeface="맑은 고딕" charset="0"/>
+                        <a:ea typeface="맑은 고딕" charset="0"/>
+                        <a:cs typeface="맑은 고딕" charset="0"/>
+                      </a:endParaRPr>
+                    </a:p>
+                  </a:txBody>
+                  <a:tcPr marL="38100" marR="38100" marT="38100" marB="38100" anchor="ctr">
+                    <a:lnL w="12700" cap="flat" cmpd="sng" algn="ctr">
+                      <a:solidFill>
+                        <a:srgbClr val="000000"/>
+                      </a:solidFill>
+                      <a:prstDash val="solid"/>
+                      <a:round/>
+                      <a:headEnd type="none" w="med" len="med"/>
+                      <a:tailEnd type="none" w="med" len="med"/>
+                    </a:lnL>
+                    <a:lnR w="12700" cap="flat" cmpd="sng" algn="ctr">
+                      <a:solidFill>
+                        <a:srgbClr val="000000"/>
+                      </a:solidFill>
+                      <a:prstDash val="solid"/>
+                      <a:round/>
+                      <a:headEnd type="none" w="med" len="med"/>
+                      <a:tailEnd type="none" w="med" len="med"/>
+                    </a:lnR>
+                    <a:lnT w="12700" cap="flat" cmpd="sng" algn="ctr">
+                      <a:solidFill>
+                        <a:srgbClr val="000000"/>
+                      </a:solidFill>
+                      <a:prstDash val="solid"/>
+                      <a:round/>
+                      <a:headEnd type="none" w="med" len="med"/>
+                      <a:tailEnd type="none" w="med" len="med"/>
+                    </a:lnT>
+                    <a:lnB w="12700" cap="flat" cmpd="sng" algn="ctr">
+                      <a:solidFill>
+                        <a:srgbClr val="000000"/>
+                      </a:solidFill>
+                      <a:prstDash val="solid"/>
+                      <a:round/>
+                      <a:headEnd type="none" w="med" len="med"/>
+                      <a:tailEnd type="none" w="med" len="med"/>
+                    </a:lnB>
+                    <a:solidFill>
+                      <a:srgbClr val="CCFFFF"/>
+                    </a:solidFill>
+                  </a:tcPr>
+                </a:tc>
+              </a:tr>
+              <a:tr h="402336">
+                <a:tc>
+                  <a:txBody>
+                    <a:bodyPr/>
+                    <a:lstStyle/>
+                    <a:p>
+                      <a:pPr eaLnBrk="0" latinLnBrk="0" algn="ctr" indent="0" marL="0">
+                        <a:buNone/>
+                      </a:pPr>
+                      <a:r>
+                        <a:rPr lang="en-US" sz="1200" b="1" dirty="0">
+                          <a:solidFill>
+                            <a:srgbClr val="000000"/>
+                          </a:solidFill>
+                          <a:latin typeface="맑은 고딕" pitchFamily="34" charset="0"/>
+                          <a:ea typeface="맑은 고딕" pitchFamily="34" charset="-122"/>
+                          <a:cs typeface="맑은 고딕" pitchFamily="34" charset="-120"/>
+                        </a:rPr>
+                        <a:t>1</a:t>
+                      </a:r>
+                      <a:endParaRPr lang="en-US" sz="1200" dirty="0">
+                        <a:latin typeface="맑은 고딕" charset="0"/>
+                        <a:ea typeface="맑은 고딕" charset="0"/>
+                        <a:cs typeface="맑은 고딕" charset="0"/>
+                      </a:endParaRPr>
+                    </a:p>
+                  </a:txBody>
+                  <a:tcPr marL="38100" marR="38100" marT="38100" marB="38100" anchor="ctr">
+                    <a:lnL w="12700" cap="flat" cmpd="sng" algn="ctr">
+                      <a:solidFill>
+                        <a:srgbClr val="000000"/>
+                      </a:solidFill>
+                      <a:prstDash val="solid"/>
+                      <a:round/>
+                      <a:headEnd type="none" w="med" len="med"/>
+                      <a:tailEnd type="none" w="med" len="med"/>
+                    </a:lnL>
+                    <a:lnR w="12700" cap="flat" cmpd="sng" algn="ctr">
+                      <a:solidFill>
+                        <a:srgbClr val="000000"/>
+                      </a:solidFill>
+                      <a:prstDash val="solid"/>
+                      <a:round/>
+                      <a:headEnd type="none" w="med" len="med"/>
+                      <a:tailEnd type="none" w="med" len="med"/>
+                    </a:lnR>
+                    <a:lnT w="12700" cap="flat" cmpd="sng" algn="ctr">
+                      <a:solidFill>
+                        <a:srgbClr val="000000"/>
+                      </a:solidFill>
+                      <a:prstDash val="solid"/>
+                      <a:round/>
+                      <a:headEnd type="none" w="med" len="med"/>
+                      <a:tailEnd type="none" w="med" len="med"/>
+                    </a:lnT>
+                    <a:lnB w="12700" cap="flat" cmpd="sng" algn="ctr">
+                      <a:solidFill>
+                        <a:srgbClr val="000000"/>
+                      </a:solidFill>
+                      <a:prstDash val="solid"/>
+                      <a:round/>
+                      <a:headEnd type="none" w="med" len="med"/>
+                      <a:tailEnd type="none" w="med" len="med"/>
+                    </a:lnB>
+                    <a:solidFill>
+                      <a:srgbClr val="D9F6FF"/>
+                    </a:solidFill>
+                  </a:tcPr>
+                </a:tc>
+                <a:tc>
+                  <a:txBody>
+                    <a:bodyPr/>
+                    <a:lstStyle/>
+                    <a:p>
+                      <a:pPr eaLnBrk="0" latinLnBrk="0" algn="l" indent="0" marL="0">
+                        <a:buNone/>
+                      </a:pPr>
+                      <a:r>
+                        <a:rPr lang="en-US" sz="1300" dirty="0">
+                          <a:solidFill>
+                            <a:srgbClr val="000000"/>
+                          </a:solidFill>
+                          <a:latin typeface="맑은 고딕" pitchFamily="34" charset="0"/>
+                          <a:ea typeface="맑은 고딕" pitchFamily="34" charset="-122"/>
+                          <a:cs typeface="맑은 고딕" pitchFamily="34" charset="-120"/>
+                        </a:rPr>
+                        <a:t>채용 인원 및 채용 사유</a:t>
+                      </a:r>
+                      <a:endParaRPr lang="en-US" sz="1300" dirty="0">
+                        <a:latin typeface="맑은 고딕" charset="0"/>
+                        <a:ea typeface="맑은 고딕" charset="0"/>
+                        <a:cs typeface="맑은 고딕" charset="0"/>
+                      </a:endParaRPr>
+                    </a:p>
+                  </a:txBody>
+                  <a:tcPr marL="38100" marR="38100" marT="38100" marB="38100" anchor="ctr">
+                    <a:lnL w="12700" cap="flat" cmpd="sng" algn="ctr">
+                      <a:solidFill>
+                        <a:srgbClr val="000000"/>
+                      </a:solidFill>
+                      <a:prstDash val="solid"/>
+                      <a:round/>
+                      <a:headEnd type="none" w="med" len="med"/>
+                      <a:tailEnd type="none" w="med" len="med"/>
+                    </a:lnL>
+                    <a:lnR w="12700" cap="flat" cmpd="sng" algn="ctr">
+                      <a:solidFill>
+                        <a:srgbClr val="000000"/>
+                      </a:solidFill>
+                      <a:prstDash val="solid"/>
+                      <a:round/>
+                      <a:headEnd type="none" w="med" len="med"/>
+                      <a:tailEnd type="none" w="med" len="med"/>
+                    </a:lnR>
+                    <a:lnT w="12700" cap="flat" cmpd="sng" algn="ctr">
+                      <a:solidFill>
+                        <a:srgbClr val="000000"/>
+                      </a:solidFill>
+                      <a:prstDash val="solid"/>
+                      <a:round/>
+                      <a:headEnd type="none" w="med" len="med"/>
+                      <a:tailEnd type="none" w="med" len="med"/>
+                    </a:lnT>
+                    <a:lnB w="12700" cap="flat" cmpd="sng" algn="ctr">
+                      <a:solidFill>
+                        <a:srgbClr val="000000"/>
+                      </a:solidFill>
+                      <a:prstDash val="solid"/>
+                      <a:round/>
+                      <a:headEnd type="none" w="med" len="med"/>
+                      <a:tailEnd type="none" w="med" len="med"/>
+                    </a:lnB>
+                  </a:tcPr>
+                </a:tc>
+                <a:tc>
+                  <a:txBody>
+                    <a:bodyPr/>
+                    <a:lstStyle/>
+                    <a:p>
+                      <a:pPr eaLnBrk="0" latinLnBrk="0" algn="ctr" indent="0" marL="0">
+                        <a:buNone/>
+                      </a:pPr>
+                      <a:endParaRPr lang="en-US" sz="1050" dirty="0">
+                        <a:latin typeface="맑은 고딕" charset="0"/>
+                        <a:ea typeface="맑은 고딕" charset="0"/>
+                        <a:cs typeface="맑은 고딕" charset="0"/>
+                      </a:endParaRPr>
+                    </a:p>
+                  </a:txBody>
+                  <a:tcPr marL="38100" marR="38100" marT="38100" marB="38100" anchor="ctr">
+                    <a:lnL w="12700" cap="flat" cmpd="sng" algn="ctr">
+                      <a:solidFill>
+                        <a:srgbClr val="000000"/>
+                      </a:solidFill>
+                      <a:prstDash val="solid"/>
+                      <a:round/>
+                      <a:headEnd type="none" w="med" len="med"/>
+                      <a:tailEnd type="none" w="med" len="med"/>
+                    </a:lnL>
+                    <a:lnR w="12700" cap="flat" cmpd="sng" algn="ctr">
+                      <a:solidFill>
+                        <a:srgbClr val="000000"/>
+                      </a:solidFill>
+                      <a:prstDash val="solid"/>
+                      <a:round/>
+                      <a:headEnd type="none" w="med" len="med"/>
+                      <a:tailEnd type="none" w="med" len="med"/>
+                    </a:lnR>
+                    <a:lnT w="12700" cap="flat" cmpd="sng" algn="ctr">
+                      <a:solidFill>
+                        <a:srgbClr val="000000"/>
+                      </a:solidFill>
+                      <a:prstDash val="solid"/>
+                      <a:round/>
+                      <a:headEnd type="none" w="med" len="med"/>
+                      <a:tailEnd type="none" w="med" len="med"/>
+                    </a:lnT>
+                    <a:lnB w="12700" cap="flat" cmpd="sng" algn="ctr">
+                      <a:solidFill>
+                        <a:srgbClr val="000000"/>
+                      </a:solidFill>
+                      <a:prstDash val="solid"/>
+                      <a:round/>
+                      <a:headEnd type="none" w="med" len="med"/>
+                      <a:tailEnd type="none" w="med" len="med"/>
+                    </a:lnB>
+                  </a:tcPr>
+                </a:tc>
+              </a:tr>
+              <a:tr h="402336">
+                <a:tc>
+                  <a:txBody>
+                    <a:bodyPr/>
+                    <a:lstStyle/>
+                    <a:p>
+                      <a:pPr eaLnBrk="0" latinLnBrk="0" algn="ctr" indent="0" marL="0">
+                        <a:buNone/>
+                      </a:pPr>
+                      <a:r>
+                        <a:rPr lang="en-US" sz="1200" b="1" dirty="0">
+                          <a:solidFill>
+                            <a:srgbClr val="000000"/>
+                          </a:solidFill>
+                          <a:latin typeface="맑은 고딕" pitchFamily="34" charset="0"/>
+                          <a:ea typeface="맑은 고딕" pitchFamily="34" charset="-122"/>
+                          <a:cs typeface="맑은 고딕" pitchFamily="34" charset="-120"/>
+                        </a:rPr>
+                        <a:t>2</a:t>
+                      </a:r>
+                      <a:endParaRPr lang="en-US" sz="1200" dirty="0">
+                        <a:latin typeface="맑은 고딕" charset="0"/>
+                        <a:ea typeface="맑은 고딕" charset="0"/>
+                        <a:cs typeface="맑은 고딕" charset="0"/>
+                      </a:endParaRPr>
+                    </a:p>
+                  </a:txBody>
+                  <a:tcPr marL="38100" marR="38100" marT="38100" marB="38100" anchor="ctr">
+                    <a:lnL w="12700" cap="flat" cmpd="sng" algn="ctr">
+                      <a:solidFill>
+                        <a:srgbClr val="000000"/>
+                      </a:solidFill>
+                      <a:prstDash val="solid"/>
+                      <a:round/>
+                      <a:headEnd type="none" w="med" len="med"/>
+                      <a:tailEnd type="none" w="med" len="med"/>
+                    </a:lnL>
+                    <a:lnR w="12700" cap="flat" cmpd="sng" algn="ctr">
+                      <a:solidFill>
+                        <a:srgbClr val="000000"/>
+                      </a:solidFill>
+                      <a:prstDash val="solid"/>
+                      <a:round/>
+                      <a:headEnd type="none" w="med" len="med"/>
+                      <a:tailEnd type="none" w="med" len="med"/>
+                    </a:lnR>
+                    <a:lnT w="12700" cap="flat" cmpd="sng" algn="ctr">
+                      <a:solidFill>
+                        <a:srgbClr val="000000"/>
+                      </a:solidFill>
+                      <a:prstDash val="solid"/>
+                      <a:round/>
+                      <a:headEnd type="none" w="med" len="med"/>
+                      <a:tailEnd type="none" w="med" len="med"/>
+                    </a:lnT>
+                    <a:lnB w="12700" cap="flat" cmpd="sng" algn="ctr">
+                      <a:solidFill>
+                        <a:srgbClr val="000000"/>
+                      </a:solidFill>
+                      <a:prstDash val="solid"/>
+                      <a:round/>
+                      <a:headEnd type="none" w="med" len="med"/>
+                      <a:tailEnd type="none" w="med" len="med"/>
+                    </a:lnB>
+                    <a:solidFill>
+                      <a:srgbClr val="D9F6FF"/>
+                    </a:solidFill>
+                  </a:tcPr>
+                </a:tc>
+                <a:tc>
+                  <a:txBody>
+                    <a:bodyPr/>
+                    <a:lstStyle/>
+                    <a:p>
+                      <a:pPr eaLnBrk="0" latinLnBrk="0" algn="l" indent="0" marL="0">
+                        <a:buNone/>
+                      </a:pPr>
+                      <a:r>
+                        <a:rPr lang="en-US" sz="1300" dirty="0">
+                          <a:solidFill>
+                            <a:srgbClr val="000000"/>
+                          </a:solidFill>
+                          <a:latin typeface="맑은 고딕" pitchFamily="34" charset="0"/>
+                          <a:ea typeface="맑은 고딕" pitchFamily="34" charset="-122"/>
+                          <a:cs typeface="맑은 고딕" pitchFamily="34" charset="-120"/>
+                        </a:rPr>
+                        <a:t>직원 현황</a:t>
+                      </a:r>
+                      <a:endParaRPr lang="en-US" sz="1300" dirty="0">
+                        <a:latin typeface="맑은 고딕" charset="0"/>
+                        <a:ea typeface="맑은 고딕" charset="0"/>
+                        <a:cs typeface="맑은 고딕" charset="0"/>
+                      </a:endParaRPr>
+                    </a:p>
+                  </a:txBody>
+                  <a:tcPr marL="38100" marR="38100" marT="38100" marB="38100" anchor="ctr">
+                    <a:lnL w="12700" cap="flat" cmpd="sng" algn="ctr">
+                      <a:solidFill>
+                        <a:srgbClr val="000000"/>
+                      </a:solidFill>
+                      <a:prstDash val="solid"/>
+                      <a:round/>
+                      <a:headEnd type="none" w="med" len="med"/>
+                      <a:tailEnd type="none" w="med" len="med"/>
+                    </a:lnL>
+                    <a:lnR w="12700" cap="flat" cmpd="sng" algn="ctr">
+                      <a:solidFill>
+                        <a:srgbClr val="000000"/>
+                      </a:solidFill>
+                      <a:prstDash val="solid"/>
+                      <a:round/>
+                      <a:headEnd type="none" w="med" len="med"/>
+                      <a:tailEnd type="none" w="med" len="med"/>
+                    </a:lnR>
+                    <a:lnT w="12700" cap="flat" cmpd="sng" algn="ctr">
+                      <a:solidFill>
+                        <a:srgbClr val="000000"/>
+                      </a:solidFill>
+                      <a:prstDash val="solid"/>
+                      <a:round/>
+                      <a:headEnd type="none" w="med" len="med"/>
+                      <a:tailEnd type="none" w="med" len="med"/>
+                    </a:lnT>
+                    <a:lnB w="12700" cap="flat" cmpd="sng" algn="ctr">
+                      <a:solidFill>
+                        <a:srgbClr val="000000"/>
+                      </a:solidFill>
+                      <a:prstDash val="solid"/>
+                      <a:round/>
+                      <a:headEnd type="none" w="med" len="med"/>
+                      <a:tailEnd type="none" w="med" len="med"/>
+                    </a:lnB>
+                  </a:tcPr>
+                </a:tc>
+                <a:tc>
+                  <a:txBody>
+                    <a:bodyPr/>
+                    <a:lstStyle/>
+                    <a:p>
+                      <a:pPr eaLnBrk="0" latinLnBrk="0" algn="ctr" indent="0" marL="0">
+                        <a:buNone/>
+                      </a:pPr>
+                      <a:endParaRPr lang="en-US" sz="1050" dirty="0">
+                        <a:latin typeface="맑은 고딕" charset="0"/>
+                        <a:ea typeface="맑은 고딕" charset="0"/>
+                        <a:cs typeface="맑은 고딕" charset="0"/>
+                      </a:endParaRPr>
+                    </a:p>
+                  </a:txBody>
+                  <a:tcPr marL="38100" marR="38100" marT="38100" marB="38100" anchor="ctr">
+                    <a:lnL w="12700" cap="flat" cmpd="sng" algn="ctr">
+                      <a:solidFill>
+                        <a:srgbClr val="000000"/>
+                      </a:solidFill>
+                      <a:prstDash val="solid"/>
+                      <a:round/>
+                      <a:headEnd type="none" w="med" len="med"/>
+                      <a:tailEnd type="none" w="med" len="med"/>
+                    </a:lnL>
+                    <a:lnR w="12700" cap="flat" cmpd="sng" algn="ctr">
+                      <a:solidFill>
+                        <a:srgbClr val="000000"/>
+                      </a:solidFill>
+                      <a:prstDash val="solid"/>
+                      <a:round/>
+                      <a:headEnd type="none" w="med" len="med"/>
+                      <a:tailEnd type="none" w="med" len="med"/>
+                    </a:lnR>
+                    <a:lnT w="12700" cap="flat" cmpd="sng" algn="ctr">
+                      <a:solidFill>
+                        <a:srgbClr val="000000"/>
+                      </a:solidFill>
+                      <a:prstDash val="solid"/>
+                      <a:round/>
+                      <a:headEnd type="none" w="med" len="med"/>
+                      <a:tailEnd type="none" w="med" len="med"/>
+                    </a:lnT>
+                    <a:lnB w="12700" cap="flat" cmpd="sng" algn="ctr">
+                      <a:solidFill>
+                        <a:srgbClr val="000000"/>
+                      </a:solidFill>
+                      <a:prstDash val="solid"/>
+                      <a:round/>
+                      <a:headEnd type="none" w="med" len="med"/>
+                      <a:tailEnd type="none" w="med" len="med"/>
+                    </a:lnB>
+                  </a:tcPr>
+                </a:tc>
+              </a:tr>
+              <a:tr h="402336">
+                <a:tc>
+                  <a:txBody>
+                    <a:bodyPr/>
+                    <a:lstStyle/>
+                    <a:p>
+                      <a:pPr eaLnBrk="0" latinLnBrk="0" algn="ctr" indent="0" marL="0">
+                        <a:buNone/>
+                      </a:pPr>
+                      <a:r>
+                        <a:rPr lang="en-US" sz="1200" b="1" dirty="0">
+                          <a:solidFill>
+                            <a:srgbClr val="000000"/>
+                          </a:solidFill>
+                          <a:latin typeface="맑은 고딕" pitchFamily="34" charset="0"/>
+                          <a:ea typeface="맑은 고딕" pitchFamily="34" charset="-122"/>
+                          <a:cs typeface="맑은 고딕" pitchFamily="34" charset="-120"/>
+                        </a:rPr>
+                        <a:t>3</a:t>
+                      </a:r>
+                      <a:endParaRPr lang="en-US" sz="1200" dirty="0">
+                        <a:latin typeface="맑은 고딕" charset="0"/>
+                        <a:ea typeface="맑은 고딕" charset="0"/>
+                        <a:cs typeface="맑은 고딕" charset="0"/>
+                      </a:endParaRPr>
+                    </a:p>
+                  </a:txBody>
+                  <a:tcPr marL="38100" marR="38100" marT="38100" marB="38100" anchor="ctr">
+                    <a:lnL w="12700" cap="flat" cmpd="sng" algn="ctr">
+                      <a:solidFill>
+                        <a:srgbClr val="000000"/>
+                      </a:solidFill>
+                      <a:prstDash val="solid"/>
+                      <a:round/>
+                      <a:headEnd type="none" w="med" len="med"/>
+                      <a:tailEnd type="none" w="med" len="med"/>
+                    </a:lnL>
+                    <a:lnR w="12700" cap="flat" cmpd="sng" algn="ctr">
+                      <a:solidFill>
+                        <a:srgbClr val="000000"/>
+                      </a:solidFill>
+                      <a:prstDash val="solid"/>
+                      <a:round/>
+                      <a:headEnd type="none" w="med" len="med"/>
+                      <a:tailEnd type="none" w="med" len="med"/>
+                    </a:lnR>
+                    <a:lnT w="12700" cap="flat" cmpd="sng" algn="ctr">
+                      <a:solidFill>
+                        <a:srgbClr val="000000"/>
+                      </a:solidFill>
+                      <a:prstDash val="solid"/>
+                      <a:round/>
+                      <a:headEnd type="none" w="med" len="med"/>
+                      <a:tailEnd type="none" w="med" len="med"/>
+                    </a:lnT>
+                    <a:lnB w="12700" cap="flat" cmpd="sng" algn="ctr">
+                      <a:solidFill>
+                        <a:srgbClr val="000000"/>
+                      </a:solidFill>
+                      <a:prstDash val="solid"/>
+                      <a:round/>
+                      <a:headEnd type="none" w="med" len="med"/>
+                      <a:tailEnd type="none" w="med" len="med"/>
+                    </a:lnB>
+                    <a:solidFill>
+                      <a:srgbClr val="D9F6FF"/>
+                    </a:solidFill>
+                  </a:tcPr>
+                </a:tc>
+                <a:tc>
+                  <a:txBody>
+                    <a:bodyPr/>
+                    <a:lstStyle/>
+                    <a:p>
+                      <a:pPr eaLnBrk="0" latinLnBrk="0" algn="l" indent="0" marL="0">
+                        <a:buNone/>
+                      </a:pPr>
+                      <a:r>
+                        <a:rPr lang="en-US" sz="1300" dirty="0">
+                          <a:solidFill>
+                            <a:srgbClr val="000000"/>
+                          </a:solidFill>
+                          <a:latin typeface="맑은 고딕" pitchFamily="34" charset="0"/>
+                          <a:ea typeface="맑은 고딕" pitchFamily="34" charset="-122"/>
+                          <a:cs typeface="맑은 고딕" pitchFamily="34" charset="-120"/>
+                        </a:rPr>
+                        <a:t>채용 계획</a:t>
+                      </a:r>
+                      <a:endParaRPr lang="en-US" sz="1300" dirty="0">
+                        <a:latin typeface="맑은 고딕" charset="0"/>
+                        <a:ea typeface="맑은 고딕" charset="0"/>
+                        <a:cs typeface="맑은 고딕" charset="0"/>
+                      </a:endParaRPr>
+                    </a:p>
+                  </a:txBody>
+                  <a:tcPr marL="38100" marR="38100" marT="38100" marB="38100" anchor="ctr">
+                    <a:lnL w="12700" cap="flat" cmpd="sng" algn="ctr">
+                      <a:solidFill>
+                        <a:srgbClr val="000000"/>
+                      </a:solidFill>
+                      <a:prstDash val="solid"/>
+                      <a:round/>
+                      <a:headEnd type="none" w="med" len="med"/>
+                      <a:tailEnd type="none" w="med" len="med"/>
+                    </a:lnL>
+                    <a:lnR w="12700" cap="flat" cmpd="sng" algn="ctr">
+                      <a:solidFill>
+                        <a:srgbClr val="000000"/>
+                      </a:solidFill>
+                      <a:prstDash val="solid"/>
+                      <a:round/>
+                      <a:headEnd type="none" w="med" len="med"/>
+                      <a:tailEnd type="none" w="med" len="med"/>
+                    </a:lnR>
+                    <a:lnT w="12700" cap="flat" cmpd="sng" algn="ctr">
+                      <a:solidFill>
+                        <a:srgbClr val="000000"/>
+                      </a:solidFill>
+                      <a:prstDash val="solid"/>
+                      <a:round/>
+                      <a:headEnd type="none" w="med" len="med"/>
+                      <a:tailEnd type="none" w="med" len="med"/>
+                    </a:lnT>
+                    <a:lnB w="12700" cap="flat" cmpd="sng" algn="ctr">
+                      <a:solidFill>
+                        <a:srgbClr val="000000"/>
+                      </a:solidFill>
+                      <a:prstDash val="solid"/>
+                      <a:round/>
+                      <a:headEnd type="none" w="med" len="med"/>
+                      <a:tailEnd type="none" w="med" len="med"/>
+                    </a:lnB>
+                  </a:tcPr>
+                </a:tc>
+                <a:tc>
+                  <a:txBody>
+                    <a:bodyPr/>
+                    <a:lstStyle/>
+                    <a:p>
+                      <a:pPr eaLnBrk="0" latinLnBrk="0" algn="ctr" indent="0" marL="0">
+                        <a:buNone/>
+                      </a:pPr>
+                      <a:endParaRPr lang="en-US" sz="1050" dirty="0">
+                        <a:latin typeface="맑은 고딕" charset="0"/>
+                        <a:ea typeface="맑은 고딕" charset="0"/>
+                        <a:cs typeface="맑은 고딕" charset="0"/>
+                      </a:endParaRPr>
+                    </a:p>
+                  </a:txBody>
+                  <a:tcPr marL="38100" marR="38100" marT="38100" marB="38100" anchor="ctr">
+                    <a:lnL w="12700" cap="flat" cmpd="sng" algn="ctr">
+                      <a:solidFill>
+                        <a:srgbClr val="000000"/>
+                      </a:solidFill>
+                      <a:prstDash val="solid"/>
+                      <a:round/>
+                      <a:headEnd type="none" w="med" len="med"/>
+                      <a:tailEnd type="none" w="med" len="med"/>
+                    </a:lnL>
+                    <a:lnR w="12700" cap="flat" cmpd="sng" algn="ctr">
+                      <a:solidFill>
+                        <a:srgbClr val="000000"/>
+                      </a:solidFill>
+                      <a:prstDash val="solid"/>
+                      <a:round/>
+                      <a:headEnd type="none" w="med" len="med"/>
+                      <a:tailEnd type="none" w="med" len="med"/>
+                    </a:lnR>
+                    <a:lnT w="12700" cap="flat" cmpd="sng" algn="ctr">
+                      <a:solidFill>
+                        <a:srgbClr val="000000"/>
+                      </a:solidFill>
+                      <a:prstDash val="solid"/>
+                      <a:round/>
+                      <a:headEnd type="none" w="med" len="med"/>
+                      <a:tailEnd type="none" w="med" len="med"/>
+                    </a:lnT>
+                    <a:lnB w="12700" cap="flat" cmpd="sng" algn="ctr">
+                      <a:solidFill>
+                        <a:srgbClr val="000000"/>
+                      </a:solidFill>
+                      <a:prstDash val="solid"/>
+                      <a:round/>
+                      <a:headEnd type="none" w="med" len="med"/>
+                      <a:tailEnd type="none" w="med" len="med"/>
+                    </a:lnB>
+                  </a:tcPr>
+                </a:tc>
+              </a:tr>
+              <a:tr h="402336">
+                <a:tc>
+                  <a:txBody>
+                    <a:bodyPr/>
+                    <a:lstStyle/>
+                    <a:p>
+                      <a:pPr eaLnBrk="0" latinLnBrk="0" algn="ctr" indent="0" marL="0">
+                        <a:buNone/>
+                      </a:pPr>
+                      <a:r>
+                        <a:rPr lang="en-US" sz="1200" b="1" dirty="0">
+                          <a:solidFill>
+                            <a:srgbClr val="000000"/>
+                          </a:solidFill>
+                          <a:latin typeface="맑은 고딕" pitchFamily="34" charset="0"/>
+                          <a:ea typeface="맑은 고딕" pitchFamily="34" charset="-122"/>
+                          <a:cs typeface="맑은 고딕" pitchFamily="34" charset="-120"/>
+                        </a:rPr>
+                        <a:t>4</a:t>
+                      </a:r>
+                      <a:endParaRPr lang="en-US" sz="1200" dirty="0">
+                        <a:latin typeface="맑은 고딕" charset="0"/>
+                        <a:ea typeface="맑은 고딕" charset="0"/>
+                        <a:cs typeface="맑은 고딕" charset="0"/>
+                      </a:endParaRPr>
+                    </a:p>
+                  </a:txBody>
+                  <a:tcPr marL="38100" marR="38100" marT="38100" marB="38100" anchor="ctr">
+                    <a:lnL w="12700" cap="flat" cmpd="sng" algn="ctr">
+                      <a:solidFill>
+                        <a:srgbClr val="000000"/>
+                      </a:solidFill>
+                      <a:prstDash val="solid"/>
+                      <a:round/>
+                      <a:headEnd type="none" w="med" len="med"/>
+                      <a:tailEnd type="none" w="med" len="med"/>
+                    </a:lnL>
+                    <a:lnR w="12700" cap="flat" cmpd="sng" algn="ctr">
+                      <a:solidFill>
+                        <a:srgbClr val="000000"/>
+                      </a:solidFill>
+                      <a:prstDash val="solid"/>
+                      <a:round/>
+                      <a:headEnd type="none" w="med" len="med"/>
+                      <a:tailEnd type="none" w="med" len="med"/>
+                    </a:lnR>
+                    <a:lnT w="12700" cap="flat" cmpd="sng" algn="ctr">
+                      <a:solidFill>
+                        <a:srgbClr val="000000"/>
+                      </a:solidFill>
+                      <a:prstDash val="solid"/>
+                      <a:round/>
+                      <a:headEnd type="none" w="med" len="med"/>
+                      <a:tailEnd type="none" w="med" len="med"/>
+                    </a:lnT>
+                    <a:lnB w="12700" cap="flat" cmpd="sng" algn="ctr">
+                      <a:solidFill>
+                        <a:srgbClr val="000000"/>
+                      </a:solidFill>
+                      <a:prstDash val="solid"/>
+                      <a:round/>
+                      <a:headEnd type="none" w="med" len="med"/>
+                      <a:tailEnd type="none" w="med" len="med"/>
+                    </a:lnB>
+                    <a:solidFill>
+                      <a:srgbClr val="D9F6FF"/>
+                    </a:solidFill>
+                  </a:tcPr>
+                </a:tc>
+                <a:tc>
+                  <a:txBody>
+                    <a:bodyPr/>
+                    <a:lstStyle/>
+                    <a:p>
+                      <a:pPr eaLnBrk="0" latinLnBrk="0" algn="l" indent="0" marL="0">
+                        <a:buNone/>
+                      </a:pPr>
+                      <a:r>
+                        <a:rPr lang="en-US" sz="1300" dirty="0">
+                          <a:solidFill>
+                            <a:srgbClr val="000000"/>
+                          </a:solidFill>
+                          <a:latin typeface="맑은 고딕" pitchFamily="34" charset="0"/>
+                          <a:ea typeface="맑은 고딕" pitchFamily="34" charset="-122"/>
+                          <a:cs typeface="맑은 고딕" pitchFamily="34" charset="-120"/>
+                        </a:rPr>
+                        <a:t>전형 절차</a:t>
+                      </a:r>
+                      <a:endParaRPr lang="en-US" sz="1300" dirty="0">
+                        <a:latin typeface="맑은 고딕" charset="0"/>
+                        <a:ea typeface="맑은 고딕" charset="0"/>
+                        <a:cs typeface="맑은 고딕" charset="0"/>
+                      </a:endParaRPr>
+                    </a:p>
+                  </a:txBody>
+                  <a:tcPr marL="38100" marR="38100" marT="38100" marB="38100" anchor="ctr">
+                    <a:lnL w="12700" cap="flat" cmpd="sng" algn="ctr">
+                      <a:solidFill>
+                        <a:srgbClr val="000000"/>
+                      </a:solidFill>
+                      <a:prstDash val="solid"/>
+                      <a:round/>
+                      <a:headEnd type="none" w="med" len="med"/>
+                      <a:tailEnd type="none" w="med" len="med"/>
+                    </a:lnL>
+                    <a:lnR w="12700" cap="flat" cmpd="sng" algn="ctr">
+                      <a:solidFill>
+                        <a:srgbClr val="000000"/>
+                      </a:solidFill>
+                      <a:prstDash val="solid"/>
+                      <a:round/>
+                      <a:headEnd type="none" w="med" len="med"/>
+                      <a:tailEnd type="none" w="med" len="med"/>
+                    </a:lnR>
+                    <a:lnT w="12700" cap="flat" cmpd="sng" algn="ctr">
+                      <a:solidFill>
+                        <a:srgbClr val="000000"/>
+                      </a:solidFill>
+                      <a:prstDash val="solid"/>
+                      <a:round/>
+                      <a:headEnd type="none" w="med" len="med"/>
+                      <a:tailEnd type="none" w="med" len="med"/>
+                    </a:lnT>
+                    <a:lnB w="12700" cap="flat" cmpd="sng" algn="ctr">
+                      <a:solidFill>
+                        <a:srgbClr val="000000"/>
+                      </a:solidFill>
+                      <a:prstDash val="solid"/>
+                      <a:round/>
+                      <a:headEnd type="none" w="med" len="med"/>
+                      <a:tailEnd type="none" w="med" len="med"/>
+                    </a:lnB>
+                  </a:tcPr>
+                </a:tc>
+                <a:tc>
+                  <a:txBody>
+                    <a:bodyPr/>
+                    <a:lstStyle/>
+                    <a:p>
+                      <a:pPr eaLnBrk="0" latinLnBrk="0" algn="ctr" indent="0" marL="0">
+                        <a:buNone/>
+                      </a:pPr>
+                      <a:endParaRPr lang="en-US" sz="1050" dirty="0">
+                        <a:latin typeface="맑은 고딕" charset="0"/>
+                        <a:ea typeface="맑은 고딕" charset="0"/>
+                        <a:cs typeface="맑은 고딕" charset="0"/>
+                      </a:endParaRPr>
+                    </a:p>
+                  </a:txBody>
+                  <a:tcPr marL="38100" marR="38100" marT="38100" marB="38100" anchor="ctr">
+                    <a:lnL w="12700" cap="flat" cmpd="sng" algn="ctr">
+                      <a:solidFill>
+                        <a:srgbClr val="000000"/>
+                      </a:solidFill>
+                      <a:prstDash val="solid"/>
+                      <a:round/>
+                      <a:headEnd type="none" w="med" len="med"/>
+                      <a:tailEnd type="none" w="med" len="med"/>
+                    </a:lnL>
+                    <a:lnR w="12700" cap="flat" cmpd="sng" algn="ctr">
+                      <a:solidFill>
+                        <a:srgbClr val="000000"/>
+                      </a:solidFill>
+                      <a:prstDash val="solid"/>
+                      <a:round/>
+                      <a:headEnd type="none" w="med" len="med"/>
+                      <a:tailEnd type="none" w="med" len="med"/>
+                    </a:lnR>
+                    <a:lnT w="12700" cap="flat" cmpd="sng" algn="ctr">
+                      <a:solidFill>
+                        <a:srgbClr val="000000"/>
+                      </a:solidFill>
+                      <a:prstDash val="solid"/>
+                      <a:round/>
+                      <a:headEnd type="none" w="med" len="med"/>
+                      <a:tailEnd type="none" w="med" len="med"/>
+                    </a:lnT>
+                    <a:lnB w="12700" cap="flat" cmpd="sng" algn="ctr">
+                      <a:solidFill>
+                        <a:srgbClr val="000000"/>
+                      </a:solidFill>
+                      <a:prstDash val="solid"/>
+                      <a:round/>
+                      <a:headEnd type="none" w="med" len="med"/>
+                      <a:tailEnd type="none" w="med" len="med"/>
+                    </a:lnB>
+                  </a:tcPr>
+                </a:tc>
+              </a:tr>
+              <a:tr h="402336">
+                <a:tc>
+                  <a:txBody>
+                    <a:bodyPr/>
+                    <a:lstStyle/>
+                    <a:p>
+                      <a:pPr eaLnBrk="0" latinLnBrk="0" algn="ctr" indent="0" marL="0">
+                        <a:buNone/>
+                      </a:pPr>
+                      <a:r>
+                        <a:rPr lang="en-US" sz="1200" b="1" dirty="0">
+                          <a:solidFill>
+                            <a:srgbClr val="000000"/>
+                          </a:solidFill>
+                          <a:latin typeface="맑은 고딕" pitchFamily="34" charset="0"/>
+                          <a:ea typeface="맑은 고딕" pitchFamily="34" charset="-122"/>
+                          <a:cs typeface="맑은 고딕" pitchFamily="34" charset="-120"/>
+                        </a:rPr>
+                        <a:t>5</a:t>
+                      </a:r>
+                      <a:endParaRPr lang="en-US" sz="1200" dirty="0">
+                        <a:latin typeface="맑은 고딕" charset="0"/>
+                        <a:ea typeface="맑은 고딕" charset="0"/>
+                        <a:cs typeface="맑은 고딕" charset="0"/>
+                      </a:endParaRPr>
+                    </a:p>
+                  </a:txBody>
+                  <a:tcPr marL="38100" marR="38100" marT="38100" marB="38100" anchor="ctr">
+                    <a:lnL w="12700" cap="flat" cmpd="sng" algn="ctr">
+                      <a:solidFill>
+                        <a:srgbClr val="000000"/>
+                      </a:solidFill>
+                      <a:prstDash val="solid"/>
+                      <a:round/>
+                      <a:headEnd type="none" w="med" len="med"/>
+                      <a:tailEnd type="none" w="med" len="med"/>
+                    </a:lnL>
+                    <a:lnR w="12700" cap="flat" cmpd="sng" algn="ctr">
+                      <a:solidFill>
+                        <a:srgbClr val="000000"/>
+                      </a:solidFill>
+                      <a:prstDash val="solid"/>
+                      <a:round/>
+                      <a:headEnd type="none" w="med" len="med"/>
+                      <a:tailEnd type="none" w="med" len="med"/>
+                    </a:lnR>
+                    <a:lnT w="12700" cap="flat" cmpd="sng" algn="ctr">
+                      <a:solidFill>
+                        <a:srgbClr val="000000"/>
+                      </a:solidFill>
+                      <a:prstDash val="solid"/>
+                      <a:round/>
+                      <a:headEnd type="none" w="med" len="med"/>
+                      <a:tailEnd type="none" w="med" len="med"/>
+                    </a:lnT>
+                    <a:lnB w="12700" cap="flat" cmpd="sng" algn="ctr">
+                      <a:solidFill>
+                        <a:srgbClr val="000000"/>
+                      </a:solidFill>
+                      <a:prstDash val="solid"/>
+                      <a:round/>
+                      <a:headEnd type="none" w="med" len="med"/>
+                      <a:tailEnd type="none" w="med" len="med"/>
+                    </a:lnB>
+                    <a:solidFill>
+                      <a:srgbClr val="D9F6FF"/>
+                    </a:solidFill>
+                  </a:tcPr>
+                </a:tc>
+                <a:tc>
+                  <a:txBody>
+                    <a:bodyPr/>
+                    <a:lstStyle/>
+                    <a:p>
+                      <a:pPr eaLnBrk="0" latinLnBrk="0" algn="l" indent="0" marL="0">
+                        <a:buNone/>
+                      </a:pPr>
+                      <a:r>
+                        <a:rPr lang="en-US" sz="1300" dirty="0">
+                          <a:solidFill>
+                            <a:srgbClr val="000000"/>
+                          </a:solidFill>
+                          <a:latin typeface="맑은 고딕" pitchFamily="34" charset="0"/>
+                          <a:ea typeface="맑은 고딕" pitchFamily="34" charset="-122"/>
+                          <a:cs typeface="맑은 고딕" pitchFamily="34" charset="-120"/>
+                        </a:rPr>
+                        <a:t>지원서 접수</a:t>
+                      </a:r>
+                      <a:endParaRPr lang="en-US" sz="1300" dirty="0">
+                        <a:latin typeface="맑은 고딕" charset="0"/>
+                        <a:ea typeface="맑은 고딕" charset="0"/>
+                        <a:cs typeface="맑은 고딕" charset="0"/>
+                      </a:endParaRPr>
+                    </a:p>
+                  </a:txBody>
+                  <a:tcPr marL="38100" marR="38100" marT="38100" marB="38100" anchor="ctr">
+                    <a:lnL w="12700" cap="flat" cmpd="sng" algn="ctr">
+                      <a:solidFill>
+                        <a:srgbClr val="000000"/>
+                      </a:solidFill>
+                      <a:prstDash val="solid"/>
+                      <a:round/>
+                      <a:headEnd type="none" w="med" len="med"/>
+                      <a:tailEnd type="none" w="med" len="med"/>
+                    </a:lnL>
+                    <a:lnR w="12700" cap="flat" cmpd="sng" algn="ctr">
+                      <a:solidFill>
+                        <a:srgbClr val="000000"/>
+                      </a:solidFill>
+                      <a:prstDash val="solid"/>
+                      <a:round/>
+                      <a:headEnd type="none" w="med" len="med"/>
+                      <a:tailEnd type="none" w="med" len="med"/>
+                    </a:lnR>
+                    <a:lnT w="12700" cap="flat" cmpd="sng" algn="ctr">
+                      <a:solidFill>
+                        <a:srgbClr val="000000"/>
+                      </a:solidFill>
+                      <a:prstDash val="solid"/>
+                      <a:round/>
+                      <a:headEnd type="none" w="med" len="med"/>
+                      <a:tailEnd type="none" w="med" len="med"/>
+                    </a:lnT>
+                    <a:lnB w="12700" cap="flat" cmpd="sng" algn="ctr">
+                      <a:solidFill>
+                        <a:srgbClr val="000000"/>
+                      </a:solidFill>
+                      <a:prstDash val="solid"/>
+                      <a:round/>
+                      <a:headEnd type="none" w="med" len="med"/>
+                      <a:tailEnd type="none" w="med" len="med"/>
+                    </a:lnB>
+                    <a:solidFill>
+                      <a:srgbClr val="EFF9FC"/>
+                    </a:solidFill>
+                  </a:tcPr>
+                </a:tc>
+                <a:tc>
+                  <a:txBody>
+                    <a:bodyPr/>
+                    <a:lstStyle/>
+                    <a:p>
+                      <a:pPr eaLnBrk="0" latinLnBrk="0" algn="ctr" indent="0" marL="0">
+                        <a:buNone/>
+                      </a:pPr>
+                      <a:r>
+                        <a:rPr lang="en-US" sz="1050" dirty="0">
+                          <a:solidFill>
+                            <a:srgbClr val="404040"/>
+                          </a:solidFill>
+                          <a:latin typeface="맑은 고딕" pitchFamily="34" charset="0"/>
+                          <a:ea typeface="맑은 고딕" pitchFamily="34" charset="-122"/>
+                          <a:cs typeface="맑은 고딕" pitchFamily="34" charset="-120"/>
+                        </a:rPr>
+                        <a:t>전형 1단계</a:t>
+                      </a:r>
+                      <a:endParaRPr lang="en-US" sz="1050" dirty="0">
+                        <a:latin typeface="맑은 고딕" charset="0"/>
+                        <a:ea typeface="맑은 고딕" charset="0"/>
+                        <a:cs typeface="맑은 고딕" charset="0"/>
+                      </a:endParaRPr>
+                    </a:p>
+                  </a:txBody>
+                  <a:tcPr marL="38100" marR="38100" marT="38100" marB="38100" anchor="ctr">
+                    <a:lnL w="12700" cap="flat" cmpd="sng" algn="ctr">
+                      <a:solidFill>
+                        <a:srgbClr val="000000"/>
+                      </a:solidFill>
+                      <a:prstDash val="solid"/>
+                      <a:round/>
+                      <a:headEnd type="none" w="med" len="med"/>
+                      <a:tailEnd type="none" w="med" len="med"/>
+                    </a:lnL>
+                    <a:lnR w="12700" cap="flat" cmpd="sng" algn="ctr">
+                      <a:solidFill>
+                        <a:srgbClr val="000000"/>
+                      </a:solidFill>
+                      <a:prstDash val="solid"/>
+                      <a:round/>
+                      <a:headEnd type="none" w="med" len="med"/>
+                      <a:tailEnd type="none" w="med" len="med"/>
+                    </a:lnR>
+                    <a:lnT w="12700" cap="flat" cmpd="sng" algn="ctr">
+                      <a:solidFill>
+                        <a:srgbClr val="000000"/>
+                      </a:solidFill>
+                      <a:prstDash val="solid"/>
+                      <a:round/>
+                      <a:headEnd type="none" w="med" len="med"/>
+                      <a:tailEnd type="none" w="med" len="med"/>
+                    </a:lnT>
+                    <a:lnB w="12700" cap="flat" cmpd="sng" algn="ctr">
+                      <a:solidFill>
+                        <a:srgbClr val="000000"/>
+                      </a:solidFill>
+                      <a:prstDash val="solid"/>
+                      <a:round/>
+                      <a:headEnd type="none" w="med" len="med"/>
+                      <a:tailEnd type="none" w="med" len="med"/>
+                    </a:lnB>
+                    <a:solidFill>
+                      <a:srgbClr val="EFF9FC"/>
+                    </a:solidFill>
+                  </a:tcPr>
+                </a:tc>
+              </a:tr>
+              <a:tr h="402336">
+                <a:tc>
+                  <a:txBody>
+                    <a:bodyPr/>
+                    <a:lstStyle/>
+                    <a:p>
+                      <a:pPr eaLnBrk="0" latinLnBrk="0" algn="ctr" indent="0" marL="0">
+                        <a:buNone/>
+                      </a:pPr>
+                      <a:r>
+                        <a:rPr lang="en-US" sz="1200" b="1" dirty="0">
+                          <a:solidFill>
+                            <a:srgbClr val="000000"/>
+                          </a:solidFill>
+                          <a:latin typeface="맑은 고딕" pitchFamily="34" charset="0"/>
+                          <a:ea typeface="맑은 고딕" pitchFamily="34" charset="-122"/>
+                          <a:cs typeface="맑은 고딕" pitchFamily="34" charset="-120"/>
+                        </a:rPr>
+                        <a:t>6</a:t>
+                      </a:r>
+                      <a:endParaRPr lang="en-US" sz="1200" dirty="0">
+                        <a:latin typeface="맑은 고딕" charset="0"/>
+                        <a:ea typeface="맑은 고딕" charset="0"/>
+                        <a:cs typeface="맑은 고딕" charset="0"/>
+                      </a:endParaRPr>
+                    </a:p>
+                  </a:txBody>
+                  <a:tcPr marL="38100" marR="38100" marT="38100" marB="38100" anchor="ctr">
+                    <a:lnL w="12700" cap="flat" cmpd="sng" algn="ctr">
+                      <a:solidFill>
+                        <a:srgbClr val="000000"/>
+                      </a:solidFill>
+                      <a:prstDash val="solid"/>
+                      <a:round/>
+                      <a:headEnd type="none" w="med" len="med"/>
+                      <a:tailEnd type="none" w="med" len="med"/>
+                    </a:lnL>
+                    <a:lnR w="12700" cap="flat" cmpd="sng" algn="ctr">
+                      <a:solidFill>
+                        <a:srgbClr val="000000"/>
+                      </a:solidFill>
+                      <a:prstDash val="solid"/>
+                      <a:round/>
+                      <a:headEnd type="none" w="med" len="med"/>
+                      <a:tailEnd type="none" w="med" len="med"/>
+                    </a:lnR>
+                    <a:lnT w="12700" cap="flat" cmpd="sng" algn="ctr">
+                      <a:solidFill>
+                        <a:srgbClr val="000000"/>
+                      </a:solidFill>
+                      <a:prstDash val="solid"/>
+                      <a:round/>
+                      <a:headEnd type="none" w="med" len="med"/>
+                      <a:tailEnd type="none" w="med" len="med"/>
+                    </a:lnT>
+                    <a:lnB w="12700" cap="flat" cmpd="sng" algn="ctr">
+                      <a:solidFill>
+                        <a:srgbClr val="000000"/>
+                      </a:solidFill>
+                      <a:prstDash val="solid"/>
+                      <a:round/>
+                      <a:headEnd type="none" w="med" len="med"/>
+                      <a:tailEnd type="none" w="med" len="med"/>
+                    </a:lnB>
+                    <a:solidFill>
+                      <a:srgbClr val="D9F6FF"/>
+                    </a:solidFill>
+                  </a:tcPr>
+                </a:tc>
+                <a:tc>
+                  <a:txBody>
+                    <a:bodyPr/>
+                    <a:lstStyle/>
+                    <a:p>
+                      <a:pPr eaLnBrk="0" latinLnBrk="0" algn="l" indent="0" marL="0">
+                        <a:buNone/>
+                      </a:pPr>
+                      <a:r>
+                        <a:rPr lang="en-US" sz="1300" dirty="0">
+                          <a:solidFill>
+                            <a:srgbClr val="000000"/>
+                          </a:solidFill>
+                          <a:latin typeface="맑은 고딕" pitchFamily="34" charset="0"/>
+                          <a:ea typeface="맑은 고딕" pitchFamily="34" charset="-122"/>
+                          <a:cs typeface="맑은 고딕" pitchFamily="34" charset="-120"/>
+                        </a:rPr>
+                        <a:t>서류 전형 (1차)</a:t>
+                      </a:r>
+                      <a:endParaRPr lang="en-US" sz="1300" dirty="0">
+                        <a:latin typeface="맑은 고딕" charset="0"/>
+                        <a:ea typeface="맑은 고딕" charset="0"/>
+                        <a:cs typeface="맑은 고딕" charset="0"/>
+                      </a:endParaRPr>
+                    </a:p>
+                  </a:txBody>
+                  <a:tcPr marL="38100" marR="38100" marT="38100" marB="38100" anchor="ctr">
+                    <a:lnL w="12700" cap="flat" cmpd="sng" algn="ctr">
+                      <a:solidFill>
+                        <a:srgbClr val="000000"/>
+                      </a:solidFill>
+                      <a:prstDash val="solid"/>
+                      <a:round/>
+                      <a:headEnd type="none" w="med" len="med"/>
+                      <a:tailEnd type="none" w="med" len="med"/>
+                    </a:lnL>
+                    <a:lnR w="12700" cap="flat" cmpd="sng" algn="ctr">
+                      <a:solidFill>
+                        <a:srgbClr val="000000"/>
+                      </a:solidFill>
+                      <a:prstDash val="solid"/>
+                      <a:round/>
+                      <a:headEnd type="none" w="med" len="med"/>
+                      <a:tailEnd type="none" w="med" len="med"/>
+                    </a:lnR>
+                    <a:lnT w="12700" cap="flat" cmpd="sng" algn="ctr">
+                      <a:solidFill>
+                        <a:srgbClr val="000000"/>
+                      </a:solidFill>
+                      <a:prstDash val="solid"/>
+                      <a:round/>
+                      <a:headEnd type="none" w="med" len="med"/>
+                      <a:tailEnd type="none" w="med" len="med"/>
+                    </a:lnT>
+                    <a:lnB w="12700" cap="flat" cmpd="sng" algn="ctr">
+                      <a:solidFill>
+                        <a:srgbClr val="000000"/>
+                      </a:solidFill>
+                      <a:prstDash val="solid"/>
+                      <a:round/>
+                      <a:headEnd type="none" w="med" len="med"/>
+                      <a:tailEnd type="none" w="med" len="med"/>
+                    </a:lnB>
+                    <a:solidFill>
+                      <a:srgbClr val="EFF9FC"/>
+                    </a:solidFill>
+                  </a:tcPr>
+                </a:tc>
+                <a:tc>
+                  <a:txBody>
+                    <a:bodyPr/>
+                    <a:lstStyle/>
+                    <a:p>
+                      <a:pPr eaLnBrk="0" latinLnBrk="0" algn="ctr" indent="0" marL="0">
+                        <a:buNone/>
+                      </a:pPr>
+                      <a:r>
+                        <a:rPr lang="en-US" sz="1050" dirty="0">
+                          <a:solidFill>
+                            <a:srgbClr val="404040"/>
+                          </a:solidFill>
+                          <a:latin typeface="맑은 고딕" pitchFamily="34" charset="0"/>
+                          <a:ea typeface="맑은 고딕" pitchFamily="34" charset="-122"/>
+                          <a:cs typeface="맑은 고딕" pitchFamily="34" charset="-120"/>
+                        </a:rPr>
+                        <a:t>전형 2단계</a:t>
+                      </a:r>
+                      <a:endParaRPr lang="en-US" sz="1050" dirty="0">
+                        <a:latin typeface="맑은 고딕" charset="0"/>
+                        <a:ea typeface="맑은 고딕" charset="0"/>
+                        <a:cs typeface="맑은 고딕" charset="0"/>
+                      </a:endParaRPr>
+                    </a:p>
+                  </a:txBody>
+                  <a:tcPr marL="38100" marR="38100" marT="38100" marB="38100" anchor="ctr">
+                    <a:lnL w="12700" cap="flat" cmpd="sng" algn="ctr">
+                      <a:solidFill>
+                        <a:srgbClr val="000000"/>
+                      </a:solidFill>
+                      <a:prstDash val="solid"/>
+                      <a:round/>
+                      <a:headEnd type="none" w="med" len="med"/>
+                      <a:tailEnd type="none" w="med" len="med"/>
+                    </a:lnL>
+                    <a:lnR w="12700" cap="flat" cmpd="sng" algn="ctr">
+                      <a:solidFill>
+                        <a:srgbClr val="000000"/>
+                      </a:solidFill>
+                      <a:prstDash val="solid"/>
+                      <a:round/>
+                      <a:headEnd type="none" w="med" len="med"/>
+                      <a:tailEnd type="none" w="med" len="med"/>
+                    </a:lnR>
+                    <a:lnT w="12700" cap="flat" cmpd="sng" algn="ctr">
+                      <a:solidFill>
+                        <a:srgbClr val="000000"/>
+                      </a:solidFill>
+                      <a:prstDash val="solid"/>
+                      <a:round/>
+                      <a:headEnd type="none" w="med" len="med"/>
+                      <a:tailEnd type="none" w="med" len="med"/>
+                    </a:lnT>
+                    <a:lnB w="12700" cap="flat" cmpd="sng" algn="ctr">
+                      <a:solidFill>
+                        <a:srgbClr val="000000"/>
+                      </a:solidFill>
+                      <a:prstDash val="solid"/>
+                      <a:round/>
+                      <a:headEnd type="none" w="med" len="med"/>
+                      <a:tailEnd type="none" w="med" len="med"/>
+                    </a:lnB>
+                    <a:solidFill>
+                      <a:srgbClr val="EFF9FC"/>
+                    </a:solidFill>
+                  </a:tcPr>
+                </a:tc>
+              </a:tr>
+              <a:tr h="402336">
+                <a:tc>
+                  <a:txBody>
+                    <a:bodyPr/>
+                    <a:lstStyle/>
+                    <a:p>
+                      <a:pPr eaLnBrk="0" latinLnBrk="0" algn="ctr" indent="0" marL="0">
+                        <a:buNone/>
+                      </a:pPr>
+                      <a:r>
+                        <a:rPr lang="en-US" sz="1200" b="1" dirty="0">
+                          <a:solidFill>
+                            <a:srgbClr val="000000"/>
+                          </a:solidFill>
+                          <a:latin typeface="맑은 고딕" pitchFamily="34" charset="0"/>
+                          <a:ea typeface="맑은 고딕" pitchFamily="34" charset="-122"/>
+                          <a:cs typeface="맑은 고딕" pitchFamily="34" charset="-120"/>
+                        </a:rPr>
+                        <a:t>7</a:t>
+                      </a:r>
+                      <a:endParaRPr lang="en-US" sz="1200" dirty="0">
+                        <a:latin typeface="맑은 고딕" charset="0"/>
+                        <a:ea typeface="맑은 고딕" charset="0"/>
+                        <a:cs typeface="맑은 고딕" charset="0"/>
+                      </a:endParaRPr>
+                    </a:p>
+                  </a:txBody>
+                  <a:tcPr marL="38100" marR="38100" marT="38100" marB="38100" anchor="ctr">
+                    <a:lnL w="12700" cap="flat" cmpd="sng" algn="ctr">
+                      <a:solidFill>
+                        <a:srgbClr val="000000"/>
+                      </a:solidFill>
+                      <a:prstDash val="solid"/>
+                      <a:round/>
+                      <a:headEnd type="none" w="med" len="med"/>
+                      <a:tailEnd type="none" w="med" len="med"/>
+                    </a:lnL>
+                    <a:lnR w="12700" cap="flat" cmpd="sng" algn="ctr">
+                      <a:solidFill>
+                        <a:srgbClr val="000000"/>
+                      </a:solidFill>
+                      <a:prstDash val="solid"/>
+                      <a:round/>
+                      <a:headEnd type="none" w="med" len="med"/>
+                      <a:tailEnd type="none" w="med" len="med"/>
+                    </a:lnR>
+                    <a:lnT w="12700" cap="flat" cmpd="sng" algn="ctr">
+                      <a:solidFill>
+                        <a:srgbClr val="000000"/>
+                      </a:solidFill>
+                      <a:prstDash val="solid"/>
+                      <a:round/>
+                      <a:headEnd type="none" w="med" len="med"/>
+                      <a:tailEnd type="none" w="med" len="med"/>
+                    </a:lnT>
+                    <a:lnB w="12700" cap="flat" cmpd="sng" algn="ctr">
+                      <a:solidFill>
+                        <a:srgbClr val="000000"/>
+                      </a:solidFill>
+                      <a:prstDash val="solid"/>
+                      <a:round/>
+                      <a:headEnd type="none" w="med" len="med"/>
+                      <a:tailEnd type="none" w="med" len="med"/>
+                    </a:lnB>
+                    <a:solidFill>
+                      <a:srgbClr val="D9F6FF"/>
+                    </a:solidFill>
+                  </a:tcPr>
+                </a:tc>
+                <a:tc>
+                  <a:txBody>
+                    <a:bodyPr/>
+                    <a:lstStyle/>
+                    <a:p>
+                      <a:pPr eaLnBrk="0" latinLnBrk="0" algn="l" indent="0" marL="0">
+                        <a:buNone/>
+                      </a:pPr>
+                      <a:r>
+                        <a:rPr lang="en-US" sz="1300" dirty="0">
+                          <a:solidFill>
+                            <a:srgbClr val="000000"/>
+                          </a:solidFill>
+                          <a:latin typeface="맑은 고딕" pitchFamily="34" charset="0"/>
+                          <a:ea typeface="맑은 고딕" pitchFamily="34" charset="-122"/>
+                          <a:cs typeface="맑은 고딕" pitchFamily="34" charset="-120"/>
+                        </a:rPr>
+                        <a:t>업무적성 및 심층면접 (2차)</a:t>
+                      </a:r>
+                      <a:endParaRPr lang="en-US" sz="1300" dirty="0">
+                        <a:latin typeface="맑은 고딕" charset="0"/>
+                        <a:ea typeface="맑은 고딕" charset="0"/>
+                        <a:cs typeface="맑은 고딕" charset="0"/>
+                      </a:endParaRPr>
+                    </a:p>
+                  </a:txBody>
+                  <a:tcPr marL="38100" marR="38100" marT="38100" marB="38100" anchor="ctr">
+                    <a:lnL w="12700" cap="flat" cmpd="sng" algn="ctr">
+                      <a:solidFill>
+                        <a:srgbClr val="000000"/>
+                      </a:solidFill>
+                      <a:prstDash val="solid"/>
+                      <a:round/>
+                      <a:headEnd type="none" w="med" len="med"/>
+                      <a:tailEnd type="none" w="med" len="med"/>
+                    </a:lnL>
+                    <a:lnR w="12700" cap="flat" cmpd="sng" algn="ctr">
+                      <a:solidFill>
+                        <a:srgbClr val="000000"/>
+                      </a:solidFill>
+                      <a:prstDash val="solid"/>
+                      <a:round/>
+                      <a:headEnd type="none" w="med" len="med"/>
+                      <a:tailEnd type="none" w="med" len="med"/>
+                    </a:lnR>
+                    <a:lnT w="12700" cap="flat" cmpd="sng" algn="ctr">
+                      <a:solidFill>
+                        <a:srgbClr val="000000"/>
+                      </a:solidFill>
+                      <a:prstDash val="solid"/>
+                      <a:round/>
+                      <a:headEnd type="none" w="med" len="med"/>
+                      <a:tailEnd type="none" w="med" len="med"/>
+                    </a:lnT>
+                    <a:lnB w="12700" cap="flat" cmpd="sng" algn="ctr">
+                      <a:solidFill>
+                        <a:srgbClr val="000000"/>
+                      </a:solidFill>
+                      <a:prstDash val="solid"/>
+                      <a:round/>
+                      <a:headEnd type="none" w="med" len="med"/>
+                      <a:tailEnd type="none" w="med" len="med"/>
+                    </a:lnB>
+                    <a:solidFill>
+                      <a:srgbClr val="EFF9FC"/>
+                    </a:solidFill>
+                  </a:tcPr>
+                </a:tc>
+                <a:tc>
+                  <a:txBody>
+                    <a:bodyPr/>
+                    <a:lstStyle/>
+                    <a:p>
+                      <a:pPr eaLnBrk="0" latinLnBrk="0" algn="ctr" indent="0" marL="0">
+                        <a:buNone/>
+                      </a:pPr>
+                      <a:r>
+                        <a:rPr lang="en-US" sz="1050" dirty="0">
+                          <a:solidFill>
+                            <a:srgbClr val="404040"/>
+                          </a:solidFill>
+                          <a:latin typeface="맑은 고딕" pitchFamily="34" charset="0"/>
+                          <a:ea typeface="맑은 고딕" pitchFamily="34" charset="-122"/>
+                          <a:cs typeface="맑은 고딕" pitchFamily="34" charset="-120"/>
+                        </a:rPr>
+                        <a:t>전형 3단계</a:t>
+                      </a:r>
+                      <a:endParaRPr lang="en-US" sz="1050" dirty="0">
+                        <a:latin typeface="맑은 고딕" charset="0"/>
+                        <a:ea typeface="맑은 고딕" charset="0"/>
+                        <a:cs typeface="맑은 고딕" charset="0"/>
+                      </a:endParaRPr>
+                    </a:p>
+                  </a:txBody>
+                  <a:tcPr marL="38100" marR="38100" marT="38100" marB="38100" anchor="ctr">
+                    <a:lnL w="12700" cap="flat" cmpd="sng" algn="ctr">
+                      <a:solidFill>
+                        <a:srgbClr val="000000"/>
+                      </a:solidFill>
+                      <a:prstDash val="solid"/>
+                      <a:round/>
+                      <a:headEnd type="none" w="med" len="med"/>
+                      <a:tailEnd type="none" w="med" len="med"/>
+                    </a:lnL>
+                    <a:lnR w="12700" cap="flat" cmpd="sng" algn="ctr">
+                      <a:solidFill>
+                        <a:srgbClr val="000000"/>
+                      </a:solidFill>
+                      <a:prstDash val="solid"/>
+                      <a:round/>
+                      <a:headEnd type="none" w="med" len="med"/>
+                      <a:tailEnd type="none" w="med" len="med"/>
+                    </a:lnR>
+                    <a:lnT w="12700" cap="flat" cmpd="sng" algn="ctr">
+                      <a:solidFill>
+                        <a:srgbClr val="000000"/>
+                      </a:solidFill>
+                      <a:prstDash val="solid"/>
+                      <a:round/>
+                      <a:headEnd type="none" w="med" len="med"/>
+                      <a:tailEnd type="none" w="med" len="med"/>
+                    </a:lnT>
+                    <a:lnB w="12700" cap="flat" cmpd="sng" algn="ctr">
+                      <a:solidFill>
+                        <a:srgbClr val="000000"/>
+                      </a:solidFill>
+                      <a:prstDash val="solid"/>
+                      <a:round/>
+                      <a:headEnd type="none" w="med" len="med"/>
+                      <a:tailEnd type="none" w="med" len="med"/>
+                    </a:lnB>
+                    <a:solidFill>
+                      <a:srgbClr val="EFF9FC"/>
+                    </a:solidFill>
+                  </a:tcPr>
+                </a:tc>
+              </a:tr>
+              <a:tr h="402336">
+                <a:tc>
+                  <a:txBody>
+                    <a:bodyPr/>
+                    <a:lstStyle/>
+                    <a:p>
+                      <a:pPr eaLnBrk="0" latinLnBrk="0" algn="ctr" indent="0" marL="0">
+                        <a:buNone/>
+                      </a:pPr>
+                      <a:r>
+                        <a:rPr lang="en-US" sz="1200" b="1" dirty="0">
+                          <a:solidFill>
+                            <a:srgbClr val="000000"/>
+                          </a:solidFill>
+                          <a:latin typeface="맑은 고딕" pitchFamily="34" charset="0"/>
+                          <a:ea typeface="맑은 고딕" pitchFamily="34" charset="-122"/>
+                          <a:cs typeface="맑은 고딕" pitchFamily="34" charset="-120"/>
+                        </a:rPr>
+                        <a:t>8</a:t>
+                      </a:r>
+                      <a:endParaRPr lang="en-US" sz="1200" dirty="0">
+                        <a:latin typeface="맑은 고딕" charset="0"/>
+                        <a:ea typeface="맑은 고딕" charset="0"/>
+                        <a:cs typeface="맑은 고딕" charset="0"/>
+                      </a:endParaRPr>
+                    </a:p>
+                  </a:txBody>
+                  <a:tcPr marL="38100" marR="38100" marT="38100" marB="38100" anchor="ctr">
+                    <a:lnL w="12700" cap="flat" cmpd="sng" algn="ctr">
+                      <a:solidFill>
+                        <a:srgbClr val="000000"/>
+                      </a:solidFill>
+                      <a:prstDash val="solid"/>
+                      <a:round/>
+                      <a:headEnd type="none" w="med" len="med"/>
+                      <a:tailEnd type="none" w="med" len="med"/>
+                    </a:lnL>
+                    <a:lnR w="12700" cap="flat" cmpd="sng" algn="ctr">
+                      <a:solidFill>
+                        <a:srgbClr val="000000"/>
+                      </a:solidFill>
+                      <a:prstDash val="solid"/>
+                      <a:round/>
+                      <a:headEnd type="none" w="med" len="med"/>
+                      <a:tailEnd type="none" w="med" len="med"/>
+                    </a:lnR>
+                    <a:lnT w="12700" cap="flat" cmpd="sng" algn="ctr">
+                      <a:solidFill>
+                        <a:srgbClr val="000000"/>
+                      </a:solidFill>
+                      <a:prstDash val="solid"/>
+                      <a:round/>
+                      <a:headEnd type="none" w="med" len="med"/>
+                      <a:tailEnd type="none" w="med" len="med"/>
+                    </a:lnT>
+                    <a:lnB w="12700" cap="flat" cmpd="sng" algn="ctr">
+                      <a:solidFill>
+                        <a:srgbClr val="000000"/>
+                      </a:solidFill>
+                      <a:prstDash val="solid"/>
+                      <a:round/>
+                      <a:headEnd type="none" w="med" len="med"/>
+                      <a:tailEnd type="none" w="med" len="med"/>
+                    </a:lnB>
+                    <a:solidFill>
+                      <a:srgbClr val="D9F6FF"/>
+                    </a:solidFill>
+                  </a:tcPr>
+                </a:tc>
+                <a:tc>
+                  <a:txBody>
+                    <a:bodyPr/>
+                    <a:lstStyle/>
+                    <a:p>
+                      <a:pPr eaLnBrk="0" latinLnBrk="0" algn="l" indent="0" marL="0">
+                        <a:buNone/>
+                      </a:pPr>
+                      <a:r>
+                        <a:rPr lang="en-US" sz="1300" dirty="0">
+                          <a:solidFill>
+                            <a:srgbClr val="000000"/>
+                          </a:solidFill>
+                          <a:latin typeface="맑은 고딕" pitchFamily="34" charset="0"/>
+                          <a:ea typeface="맑은 고딕" pitchFamily="34" charset="-122"/>
+                          <a:cs typeface="맑은 고딕" pitchFamily="34" charset="-120"/>
+                        </a:rPr>
+                        <a:t>결격사유 검증</a:t>
+                      </a:r>
+                      <a:endParaRPr lang="en-US" sz="1300" dirty="0">
+                        <a:latin typeface="맑은 고딕" charset="0"/>
+                        <a:ea typeface="맑은 고딕" charset="0"/>
+                        <a:cs typeface="맑은 고딕" charset="0"/>
+                      </a:endParaRPr>
+                    </a:p>
+                  </a:txBody>
+                  <a:tcPr marL="38100" marR="38100" marT="38100" marB="38100" anchor="ctr">
+                    <a:lnL w="12700" cap="flat" cmpd="sng" algn="ctr">
+                      <a:solidFill>
+                        <a:srgbClr val="000000"/>
+                      </a:solidFill>
+                      <a:prstDash val="solid"/>
+                      <a:round/>
+                      <a:headEnd type="none" w="med" len="med"/>
+                      <a:tailEnd type="none" w="med" len="med"/>
+                    </a:lnL>
+                    <a:lnR w="12700" cap="flat" cmpd="sng" algn="ctr">
+                      <a:solidFill>
+                        <a:srgbClr val="000000"/>
+                      </a:solidFill>
+                      <a:prstDash val="solid"/>
+                      <a:round/>
+                      <a:headEnd type="none" w="med" len="med"/>
+                      <a:tailEnd type="none" w="med" len="med"/>
+                    </a:lnR>
+                    <a:lnT w="12700" cap="flat" cmpd="sng" algn="ctr">
+                      <a:solidFill>
+                        <a:srgbClr val="000000"/>
+                      </a:solidFill>
+                      <a:prstDash val="solid"/>
+                      <a:round/>
+                      <a:headEnd type="none" w="med" len="med"/>
+                      <a:tailEnd type="none" w="med" len="med"/>
+                    </a:lnT>
+                    <a:lnB w="12700" cap="flat" cmpd="sng" algn="ctr">
+                      <a:solidFill>
+                        <a:srgbClr val="000000"/>
+                      </a:solidFill>
+                      <a:prstDash val="solid"/>
+                      <a:round/>
+                      <a:headEnd type="none" w="med" len="med"/>
+                      <a:tailEnd type="none" w="med" len="med"/>
+                    </a:lnB>
+                    <a:solidFill>
+                      <a:srgbClr val="EFF9FC"/>
+                    </a:solidFill>
+                  </a:tcPr>
+                </a:tc>
+                <a:tc>
+                  <a:txBody>
+                    <a:bodyPr/>
+                    <a:lstStyle/>
+                    <a:p>
+                      <a:pPr eaLnBrk="0" latinLnBrk="0" algn="ctr" indent="0" marL="0">
+                        <a:buNone/>
+                      </a:pPr>
+                      <a:r>
+                        <a:rPr lang="en-US" sz="1050" dirty="0">
+                          <a:solidFill>
+                            <a:srgbClr val="404040"/>
+                          </a:solidFill>
+                          <a:latin typeface="맑은 고딕" pitchFamily="34" charset="0"/>
+                          <a:ea typeface="맑은 고딕" pitchFamily="34" charset="-122"/>
+                          <a:cs typeface="맑은 고딕" pitchFamily="34" charset="-120"/>
+                        </a:rPr>
+                        <a:t>전형 4단계</a:t>
+                      </a:r>
+                      <a:endParaRPr lang="en-US" sz="1050" dirty="0">
+                        <a:latin typeface="맑은 고딕" charset="0"/>
+                        <a:ea typeface="맑은 고딕" charset="0"/>
+                        <a:cs typeface="맑은 고딕" charset="0"/>
+                      </a:endParaRPr>
+                    </a:p>
+                  </a:txBody>
+                  <a:tcPr marL="38100" marR="38100" marT="38100" marB="38100" anchor="ctr">
+                    <a:lnL w="12700" cap="flat" cmpd="sng" algn="ctr">
+                      <a:solidFill>
+                        <a:srgbClr val="000000"/>
+                      </a:solidFill>
+                      <a:prstDash val="solid"/>
+                      <a:round/>
+                      <a:headEnd type="none" w="med" len="med"/>
+                      <a:tailEnd type="none" w="med" len="med"/>
+                    </a:lnL>
+                    <a:lnR w="12700" cap="flat" cmpd="sng" algn="ctr">
+                      <a:solidFill>
+                        <a:srgbClr val="000000"/>
+                      </a:solidFill>
+                      <a:prstDash val="solid"/>
+                      <a:round/>
+                      <a:headEnd type="none" w="med" len="med"/>
+                      <a:tailEnd type="none" w="med" len="med"/>
+                    </a:lnR>
+                    <a:lnT w="12700" cap="flat" cmpd="sng" algn="ctr">
+                      <a:solidFill>
+                        <a:srgbClr val="000000"/>
+                      </a:solidFill>
+                      <a:prstDash val="solid"/>
+                      <a:round/>
+                      <a:headEnd type="none" w="med" len="med"/>
+                      <a:tailEnd type="none" w="med" len="med"/>
+                    </a:lnT>
+                    <a:lnB w="12700" cap="flat" cmpd="sng" algn="ctr">
+                      <a:solidFill>
+                        <a:srgbClr val="000000"/>
+                      </a:solidFill>
+                      <a:prstDash val="solid"/>
+                      <a:round/>
+                      <a:headEnd type="none" w="med" len="med"/>
+                      <a:tailEnd type="none" w="med" len="med"/>
+                    </a:lnB>
+                    <a:solidFill>
+                      <a:srgbClr val="EFF9FC"/>
+                    </a:solidFill>
+                  </a:tcPr>
+                </a:tc>
+              </a:tr>
+              <a:tr h="402336">
+                <a:tc>
+                  <a:txBody>
+                    <a:bodyPr/>
+                    <a:lstStyle/>
+                    <a:p>
+                      <a:pPr eaLnBrk="0" latinLnBrk="0" algn="ctr" indent="0" marL="0">
+                        <a:buNone/>
+                      </a:pPr>
+                      <a:r>
+                        <a:rPr lang="en-US" sz="1200" b="1" dirty="0">
+                          <a:solidFill>
+                            <a:srgbClr val="000000"/>
+                          </a:solidFill>
+                          <a:latin typeface="맑은 고딕" pitchFamily="34" charset="0"/>
+                          <a:ea typeface="맑은 고딕" pitchFamily="34" charset="-122"/>
+                          <a:cs typeface="맑은 고딕" pitchFamily="34" charset="-120"/>
+                        </a:rPr>
+                        <a:t>9</a:t>
+                      </a:r>
+                      <a:endParaRPr lang="en-US" sz="1200" dirty="0">
+                        <a:latin typeface="맑은 고딕" charset="0"/>
+                        <a:ea typeface="맑은 고딕" charset="0"/>
+                        <a:cs typeface="맑은 고딕" charset="0"/>
+                      </a:endParaRPr>
+                    </a:p>
+                  </a:txBody>
+                  <a:tcPr marL="38100" marR="38100" marT="38100" marB="38100" anchor="ctr">
+                    <a:lnL w="12700" cap="flat" cmpd="sng" algn="ctr">
+                      <a:solidFill>
+                        <a:srgbClr val="000000"/>
+                      </a:solidFill>
+                      <a:prstDash val="solid"/>
+                      <a:round/>
+                      <a:headEnd type="none" w="med" len="med"/>
+                      <a:tailEnd type="none" w="med" len="med"/>
+                    </a:lnL>
+                    <a:lnR w="12700" cap="flat" cmpd="sng" algn="ctr">
+                      <a:solidFill>
+                        <a:srgbClr val="000000"/>
+                      </a:solidFill>
+                      <a:prstDash val="solid"/>
+                      <a:round/>
+                      <a:headEnd type="none" w="med" len="med"/>
+                      <a:tailEnd type="none" w="med" len="med"/>
+                    </a:lnR>
+                    <a:lnT w="12700" cap="flat" cmpd="sng" algn="ctr">
+                      <a:solidFill>
+                        <a:srgbClr val="000000"/>
+                      </a:solidFill>
+                      <a:prstDash val="solid"/>
+                      <a:round/>
+                      <a:headEnd type="none" w="med" len="med"/>
+                      <a:tailEnd type="none" w="med" len="med"/>
+                    </a:lnT>
+                    <a:lnB w="12700" cap="flat" cmpd="sng" algn="ctr">
+                      <a:solidFill>
+                        <a:srgbClr val="000000"/>
+                      </a:solidFill>
+                      <a:prstDash val="solid"/>
+                      <a:round/>
+                      <a:headEnd type="none" w="med" len="med"/>
+                      <a:tailEnd type="none" w="med" len="med"/>
+                    </a:lnB>
+                    <a:solidFill>
+                      <a:srgbClr val="D9F6FF"/>
+                    </a:solidFill>
+                  </a:tcPr>
+                </a:tc>
+                <a:tc>
+                  <a:txBody>
+                    <a:bodyPr/>
+                    <a:lstStyle/>
+                    <a:p>
+                      <a:pPr eaLnBrk="0" latinLnBrk="0" algn="l" indent="0" marL="0">
+                        <a:buNone/>
+                      </a:pPr>
+                      <a:r>
+                        <a:rPr lang="en-US" sz="1300" dirty="0">
+                          <a:solidFill>
+                            <a:srgbClr val="000000"/>
+                          </a:solidFill>
+                          <a:latin typeface="맑은 고딕" pitchFamily="34" charset="0"/>
+                          <a:ea typeface="맑은 고딕" pitchFamily="34" charset="-122"/>
+                          <a:cs typeface="맑은 고딕" pitchFamily="34" charset="-120"/>
+                        </a:rPr>
+                        <a:t>기타 사항</a:t>
+                      </a:r>
+                      <a:endParaRPr lang="en-US" sz="1300" dirty="0">
+                        <a:latin typeface="맑은 고딕" charset="0"/>
+                        <a:ea typeface="맑은 고딕" charset="0"/>
+                        <a:cs typeface="맑은 고딕" charset="0"/>
+                      </a:endParaRPr>
+                    </a:p>
+                  </a:txBody>
+                  <a:tcPr marL="38100" marR="38100" marT="38100" marB="38100" anchor="ctr">
+                    <a:lnL w="12700" cap="flat" cmpd="sng" algn="ctr">
+                      <a:solidFill>
+                        <a:srgbClr val="000000"/>
+                      </a:solidFill>
+                      <a:prstDash val="solid"/>
+                      <a:round/>
+                      <a:headEnd type="none" w="med" len="med"/>
+                      <a:tailEnd type="none" w="med" len="med"/>
+                    </a:lnL>
+                    <a:lnR w="12700" cap="flat" cmpd="sng" algn="ctr">
+                      <a:solidFill>
+                        <a:srgbClr val="000000"/>
+                      </a:solidFill>
+                      <a:prstDash val="solid"/>
+                      <a:round/>
+                      <a:headEnd type="none" w="med" len="med"/>
+                      <a:tailEnd type="none" w="med" len="med"/>
+                    </a:lnR>
+                    <a:lnT w="12700" cap="flat" cmpd="sng" algn="ctr">
+                      <a:solidFill>
+                        <a:srgbClr val="000000"/>
+                      </a:solidFill>
+                      <a:prstDash val="solid"/>
+                      <a:round/>
+                      <a:headEnd type="none" w="med" len="med"/>
+                      <a:tailEnd type="none" w="med" len="med"/>
+                    </a:lnT>
+                    <a:lnB w="12700" cap="flat" cmpd="sng" algn="ctr">
+                      <a:solidFill>
+                        <a:srgbClr val="000000"/>
+                      </a:solidFill>
+                      <a:prstDash val="solid"/>
+                      <a:round/>
+                      <a:headEnd type="none" w="med" len="med"/>
+                      <a:tailEnd type="none" w="med" len="med"/>
+                    </a:lnB>
+                  </a:tcPr>
+                </a:tc>
+                <a:tc>
+                  <a:txBody>
+                    <a:bodyPr/>
+                    <a:lstStyle/>
+                    <a:p>
+                      <a:pPr eaLnBrk="0" latinLnBrk="0" algn="ctr" indent="0" marL="0">
+                        <a:buNone/>
+                      </a:pPr>
+                      <a:endParaRPr lang="en-US" sz="1050" dirty="0">
+                        <a:latin typeface="맑은 고딕" charset="0"/>
+                        <a:ea typeface="맑은 고딕" charset="0"/>
+                        <a:cs typeface="맑은 고딕" charset="0"/>
+                      </a:endParaRPr>
+                    </a:p>
+                  </a:txBody>
+                  <a:tcPr marL="38100" marR="38100" marT="38100" marB="38100" anchor="ctr">
+                    <a:lnL w="12700" cap="flat" cmpd="sng" algn="ctr">
+                      <a:solidFill>
+                        <a:srgbClr val="000000"/>
+                      </a:solidFill>
+                      <a:prstDash val="solid"/>
+                      <a:round/>
+                      <a:headEnd type="none" w="med" len="med"/>
+                      <a:tailEnd type="none" w="med" len="med"/>
+                    </a:lnL>
+                    <a:lnR w="12700" cap="flat" cmpd="sng" algn="ctr">
+                      <a:solidFill>
+                        <a:srgbClr val="000000"/>
+                      </a:solidFill>
+                      <a:prstDash val="solid"/>
+                      <a:round/>
+                      <a:headEnd type="none" w="med" len="med"/>
+                      <a:tailEnd type="none" w="med" len="med"/>
+                    </a:lnR>
+                    <a:lnT w="12700" cap="flat" cmpd="sng" algn="ctr">
+                      <a:solidFill>
+                        <a:srgbClr val="000000"/>
+                      </a:solidFill>
+                      <a:prstDash val="solid"/>
+                      <a:round/>
+                      <a:headEnd type="none" w="med" len="med"/>
+                      <a:tailEnd type="none" w="med" len="med"/>
+                    </a:lnT>
+                    <a:lnB w="12700" cap="flat" cmpd="sng" algn="ctr">
+                      <a:solidFill>
+                        <a:srgbClr val="000000"/>
+                      </a:solidFill>
+                      <a:prstDash val="solid"/>
+                      <a:round/>
+                      <a:headEnd type="none" w="med" len="med"/>
+                      <a:tailEnd type="none" w="med" len="med"/>
+                    </a:lnB>
+                  </a:tcPr>
+                </a:tc>
+              </a:tr>
+              <a:tr h="402336">
+                <a:tc>
+                  <a:txBody>
+                    <a:bodyPr/>
+                    <a:lstStyle/>
+                    <a:p>
+                      <a:pPr eaLnBrk="0" latinLnBrk="0" algn="ctr" indent="0" marL="0">
+                        <a:buNone/>
+                      </a:pPr>
+                      <a:r>
+                        <a:rPr lang="en-US" sz="1200" b="1" dirty="0">
+                          <a:solidFill>
+                            <a:srgbClr val="000000"/>
+                          </a:solidFill>
+                          <a:latin typeface="맑은 고딕" pitchFamily="34" charset="0"/>
+                          <a:ea typeface="맑은 고딕" pitchFamily="34" charset="-122"/>
+                          <a:cs typeface="맑은 고딕" pitchFamily="34" charset="-120"/>
+                        </a:rPr>
+                        <a:t>10</a:t>
+                      </a:r>
+                      <a:endParaRPr lang="en-US" sz="1200" dirty="0">
+                        <a:latin typeface="맑은 고딕" charset="0"/>
+                        <a:ea typeface="맑은 고딕" charset="0"/>
+                        <a:cs typeface="맑은 고딕" charset="0"/>
+                      </a:endParaRPr>
+                    </a:p>
+                  </a:txBody>
+                  <a:tcPr marL="38100" marR="38100" marT="38100" marB="38100" anchor="ctr">
+                    <a:lnL w="12700" cap="flat" cmpd="sng" algn="ctr">
+                      <a:solidFill>
+                        <a:srgbClr val="000000"/>
+                      </a:solidFill>
+                      <a:prstDash val="solid"/>
+                      <a:round/>
+                      <a:headEnd type="none" w="med" len="med"/>
+                      <a:tailEnd type="none" w="med" len="med"/>
+                    </a:lnL>
+                    <a:lnR w="12700" cap="flat" cmpd="sng" algn="ctr">
+                      <a:solidFill>
+                        <a:srgbClr val="000000"/>
+                      </a:solidFill>
+                      <a:prstDash val="solid"/>
+                      <a:round/>
+                      <a:headEnd type="none" w="med" len="med"/>
+                      <a:tailEnd type="none" w="med" len="med"/>
+                    </a:lnR>
+                    <a:lnT w="12700" cap="flat" cmpd="sng" algn="ctr">
+                      <a:solidFill>
+                        <a:srgbClr val="000000"/>
+                      </a:solidFill>
+                      <a:prstDash val="solid"/>
+                      <a:round/>
+                      <a:headEnd type="none" w="med" len="med"/>
+                      <a:tailEnd type="none" w="med" len="med"/>
+                    </a:lnT>
+                    <a:lnB w="12700" cap="flat" cmpd="sng" algn="ctr">
+                      <a:solidFill>
+                        <a:srgbClr val="000000"/>
+                      </a:solidFill>
+                      <a:prstDash val="solid"/>
+                      <a:round/>
+                      <a:headEnd type="none" w="med" len="med"/>
+                      <a:tailEnd type="none" w="med" len="med"/>
+                    </a:lnB>
+                    <a:solidFill>
+                      <a:srgbClr val="D9F6FF"/>
+                    </a:solidFill>
+                  </a:tcPr>
+                </a:tc>
+                <a:tc>
+                  <a:txBody>
+                    <a:bodyPr/>
+                    <a:lstStyle/>
+                    <a:p>
+                      <a:pPr eaLnBrk="0" latinLnBrk="0" algn="l" indent="0" marL="0">
+                        <a:buNone/>
+                      </a:pPr>
+                      <a:r>
+                        <a:rPr lang="en-US" sz="1300" dirty="0">
+                          <a:solidFill>
+                            <a:srgbClr val="000000"/>
+                          </a:solidFill>
+                          <a:latin typeface="맑은 고딕" pitchFamily="34" charset="0"/>
+                          <a:ea typeface="맑은 고딕" pitchFamily="34" charset="-122"/>
+                          <a:cs typeface="맑은 고딕" pitchFamily="34" charset="-120"/>
+                        </a:rPr>
+                        <a:t>채용 계획 요약</a:t>
+                      </a:r>
+                      <a:endParaRPr lang="en-US" sz="1300" dirty="0">
+                        <a:latin typeface="맑은 고딕" charset="0"/>
+                        <a:ea typeface="맑은 고딕" charset="0"/>
+                        <a:cs typeface="맑은 고딕" charset="0"/>
+                      </a:endParaRPr>
+                    </a:p>
+                  </a:txBody>
+                  <a:tcPr marL="38100" marR="38100" marT="38100" marB="38100" anchor="ctr">
+                    <a:lnL w="12700" cap="flat" cmpd="sng" algn="ctr">
+                      <a:solidFill>
+                        <a:srgbClr val="000000"/>
+                      </a:solidFill>
+                      <a:prstDash val="solid"/>
+                      <a:round/>
+                      <a:headEnd type="none" w="med" len="med"/>
+                      <a:tailEnd type="none" w="med" len="med"/>
+                    </a:lnL>
+                    <a:lnR w="12700" cap="flat" cmpd="sng" algn="ctr">
+                      <a:solidFill>
+                        <a:srgbClr val="000000"/>
+                      </a:solidFill>
+                      <a:prstDash val="solid"/>
+                      <a:round/>
+                      <a:headEnd type="none" w="med" len="med"/>
+                      <a:tailEnd type="none" w="med" len="med"/>
+                    </a:lnR>
+                    <a:lnT w="12700" cap="flat" cmpd="sng" algn="ctr">
+                      <a:solidFill>
+                        <a:srgbClr val="000000"/>
+                      </a:solidFill>
+                      <a:prstDash val="solid"/>
+                      <a:round/>
+                      <a:headEnd type="none" w="med" len="med"/>
+                      <a:tailEnd type="none" w="med" len="med"/>
+                    </a:lnT>
+                    <a:lnB w="12700" cap="flat" cmpd="sng" algn="ctr">
+                      <a:solidFill>
+                        <a:srgbClr val="000000"/>
+                      </a:solidFill>
+                      <a:prstDash val="solid"/>
+                      <a:round/>
+                      <a:headEnd type="none" w="med" len="med"/>
+                      <a:tailEnd type="none" w="med" len="med"/>
+                    </a:lnB>
+                  </a:tcPr>
+                </a:tc>
+                <a:tc>
+                  <a:txBody>
+                    <a:bodyPr/>
+                    <a:lstStyle/>
+                    <a:p>
+                      <a:pPr eaLnBrk="0" latinLnBrk="0" algn="ctr" indent="0" marL="0">
+                        <a:buNone/>
+                      </a:pPr>
+                      <a:endParaRPr lang="en-US" sz="1050" dirty="0">
+                        <a:latin typeface="맑은 고딕" charset="0"/>
+                        <a:ea typeface="맑은 고딕" charset="0"/>
+                        <a:cs typeface="맑은 고딕" charset="0"/>
+                      </a:endParaRPr>
+                    </a:p>
+                  </a:txBody>
+                  <a:tcPr marL="38100" marR="38100" marT="38100" marB="38100" anchor="ctr">
+                    <a:lnL w="12700" cap="flat" cmpd="sng" algn="ctr">
+                      <a:solidFill>
+                        <a:srgbClr val="000000"/>
+                      </a:solidFill>
+                      <a:prstDash val="solid"/>
+                      <a:round/>
+                      <a:headEnd type="none" w="med" len="med"/>
+                      <a:tailEnd type="none" w="med" len="med"/>
+                    </a:lnL>
+                    <a:lnR w="12700" cap="flat" cmpd="sng" algn="ctr">
+                      <a:solidFill>
+                        <a:srgbClr val="000000"/>
+                      </a:solidFill>
+                      <a:prstDash val="solid"/>
+                      <a:round/>
+                      <a:headEnd type="none" w="med" len="med"/>
+                      <a:tailEnd type="none" w="med" len="med"/>
+                    </a:lnR>
+                    <a:lnT w="12700" cap="flat" cmpd="sng" algn="ctr">
+                      <a:solidFill>
+                        <a:srgbClr val="000000"/>
+                      </a:solidFill>
+                      <a:prstDash val="solid"/>
+                      <a:round/>
+                      <a:headEnd type="none" w="med" len="med"/>
+                      <a:tailEnd type="none" w="med" len="med"/>
+                    </a:lnT>
+                    <a:lnB w="12700" cap="flat" cmpd="sng" algn="ctr">
+                      <a:solidFill>
+                        <a:srgbClr val="000000"/>
+                      </a:solidFill>
+                      <a:prstDash val="solid"/>
+                      <a:round/>
+                      <a:headEnd type="none" w="med" len="med"/>
+                      <a:tailEnd type="none" w="med" len="med"/>
+                    </a:lnB>
+                  </a:tcPr>
+                </a:tc>
+              </a:tr>
+            </a:tbl>
+          </a:graphicData>
+        </a:graphic>
+      </p:graphicFrame>
       <p:sp>
         <p:nvSpPr>
-          <p:cNvPr id="5" name="Text 3"/>
+          <p:cNvPr id="6" name="Text 3"/>
           <p:cNvSpPr txBox="1"/>
           <p:nvPr/>
         </p:nvSpPr>
         <p:spPr>
           <a:xfrm>
-            <a:off x="1645920" y="1298448"/>
-            <a:ext cx="4206240" cy="384048"/>
+            <a:off x="1005840" y="5669280"/>
+            <a:ext cx="7132320" cy="256032"/>
           </a:xfrm>
           <a:prstGeom prst="rect">
             <a:avLst/>
@@ -6468,202 +8663,7 @@
               <a:buNone/>
             </a:pPr>
             <a:r>
-              <a:rPr lang="en-US" sz="1800" dirty="0">
-                <a:solidFill>
-                  <a:srgbClr val="000000"/>
-                </a:solidFill>
-                <a:latin typeface="맑은 고딕" pitchFamily="34" charset="0"/>
-                <a:ea typeface="맑은 고딕" pitchFamily="34" charset="-122"/>
-                <a:cs typeface="맑은 고딕" pitchFamily="34" charset="-120"/>
-              </a:rPr>
-              <a:t>1.  채용 인원 및 채용 사유</a:t>
-            </a:r>
-            <a:endParaRPr lang="en-US" sz="1800" dirty="0"/>
-          </a:p>
-        </p:txBody>
-      </p:sp>
-      <p:sp>
-        <p:nvSpPr>
-          <p:cNvPr id="6" name="Text 4"/>
-          <p:cNvSpPr txBox="1"/>
-          <p:nvPr/>
-        </p:nvSpPr>
-        <p:spPr>
-          <a:xfrm>
-            <a:off x="1645920" y="1737360"/>
-            <a:ext cx="4206240" cy="384048"/>
-          </a:xfrm>
-          <a:prstGeom prst="rect">
-            <a:avLst/>
-          </a:prstGeom>
-          <a:noFill/>
-          <a:ln/>
-        </p:spPr>
-        <p:txBody>
-          <a:bodyPr wrap="square" lIns="0" tIns="0" rIns="0" bIns="0" rtlCol="0" anchor="ctr"/>
-          <a:lstStyle/>
-          <a:p>
-            <a:pPr eaLnBrk="0" latinLnBrk="0" indent="0" marL="0">
-              <a:buNone/>
-            </a:pPr>
-            <a:r>
-              <a:rPr lang="en-US" sz="1800" dirty="0">
-                <a:solidFill>
-                  <a:srgbClr val="000000"/>
-                </a:solidFill>
-                <a:latin typeface="맑은 고딕" pitchFamily="34" charset="0"/>
-                <a:ea typeface="맑은 고딕" pitchFamily="34" charset="-122"/>
-                <a:cs typeface="맑은 고딕" pitchFamily="34" charset="-120"/>
-              </a:rPr>
-              <a:t>2.  직원 현황</a:t>
-            </a:r>
-            <a:endParaRPr lang="en-US" sz="1800" dirty="0"/>
-          </a:p>
-        </p:txBody>
-      </p:sp>
-      <p:sp>
-        <p:nvSpPr>
-          <p:cNvPr id="7" name="Text 5"/>
-          <p:cNvSpPr txBox="1"/>
-          <p:nvPr/>
-        </p:nvSpPr>
-        <p:spPr>
-          <a:xfrm>
-            <a:off x="1645920" y="2176272"/>
-            <a:ext cx="4206240" cy="384048"/>
-          </a:xfrm>
-          <a:prstGeom prst="rect">
-            <a:avLst/>
-          </a:prstGeom>
-          <a:noFill/>
-          <a:ln/>
-        </p:spPr>
-        <p:txBody>
-          <a:bodyPr wrap="square" lIns="0" tIns="0" rIns="0" bIns="0" rtlCol="0" anchor="ctr"/>
-          <a:lstStyle/>
-          <a:p>
-            <a:pPr eaLnBrk="0" latinLnBrk="0" indent="0" marL="0">
-              <a:buNone/>
-            </a:pPr>
-            <a:r>
-              <a:rPr lang="en-US" sz="1800" dirty="0">
-                <a:solidFill>
-                  <a:srgbClr val="000000"/>
-                </a:solidFill>
-                <a:latin typeface="맑은 고딕" pitchFamily="34" charset="0"/>
-                <a:ea typeface="맑은 고딕" pitchFamily="34" charset="-122"/>
-                <a:cs typeface="맑은 고딕" pitchFamily="34" charset="-120"/>
-              </a:rPr>
-              <a:t>3.  채용 계획</a:t>
-            </a:r>
-            <a:endParaRPr lang="en-US" sz="1800" dirty="0"/>
-          </a:p>
-        </p:txBody>
-      </p:sp>
-      <p:sp>
-        <p:nvSpPr>
-          <p:cNvPr id="8" name="Text 6"/>
-          <p:cNvSpPr txBox="1"/>
-          <p:nvPr/>
-        </p:nvSpPr>
-        <p:spPr>
-          <a:xfrm>
-            <a:off x="1645920" y="2615184"/>
-            <a:ext cx="4206240" cy="384048"/>
-          </a:xfrm>
-          <a:prstGeom prst="rect">
-            <a:avLst/>
-          </a:prstGeom>
-          <a:noFill/>
-          <a:ln/>
-        </p:spPr>
-        <p:txBody>
-          <a:bodyPr wrap="square" lIns="0" tIns="0" rIns="0" bIns="0" rtlCol="0" anchor="ctr"/>
-          <a:lstStyle/>
-          <a:p>
-            <a:pPr eaLnBrk="0" latinLnBrk="0" indent="0" marL="0">
-              <a:buNone/>
-            </a:pPr>
-            <a:r>
-              <a:rPr lang="en-US" sz="1800" dirty="0">
-                <a:solidFill>
-                  <a:srgbClr val="000000"/>
-                </a:solidFill>
-                <a:latin typeface="맑은 고딕" pitchFamily="34" charset="0"/>
-                <a:ea typeface="맑은 고딕" pitchFamily="34" charset="-122"/>
-                <a:cs typeface="맑은 고딕" pitchFamily="34" charset="-120"/>
-              </a:rPr>
-              <a:t>4.  전형 절차</a:t>
-            </a:r>
-            <a:endParaRPr lang="en-US" sz="1800" dirty="0"/>
-          </a:p>
-        </p:txBody>
-      </p:sp>
-      <p:sp>
-        <p:nvSpPr>
-          <p:cNvPr id="9" name="Text 7"/>
-          <p:cNvSpPr txBox="1"/>
-          <p:nvPr/>
-        </p:nvSpPr>
-        <p:spPr>
-          <a:xfrm>
-            <a:off x="1645920" y="3054096"/>
-            <a:ext cx="4206240" cy="384048"/>
-          </a:xfrm>
-          <a:prstGeom prst="rect">
-            <a:avLst/>
-          </a:prstGeom>
-          <a:noFill/>
-          <a:ln/>
-        </p:spPr>
-        <p:txBody>
-          <a:bodyPr wrap="square" lIns="0" tIns="0" rIns="0" bIns="0" rtlCol="0" anchor="ctr"/>
-          <a:lstStyle/>
-          <a:p>
-            <a:pPr eaLnBrk="0" latinLnBrk="0" indent="0" marL="0">
-              <a:buNone/>
-            </a:pPr>
-            <a:r>
-              <a:rPr lang="en-US" sz="1800" dirty="0">
-                <a:solidFill>
-                  <a:srgbClr val="000000"/>
-                </a:solidFill>
-                <a:latin typeface="맑은 고딕" pitchFamily="34" charset="0"/>
-                <a:ea typeface="맑은 고딕" pitchFamily="34" charset="-122"/>
-                <a:cs typeface="맑은 고딕" pitchFamily="34" charset="-120"/>
-              </a:rPr>
-              <a:t>5.  지원서 접수</a:t>
-            </a:r>
-            <a:endParaRPr lang="en-US" sz="1800" dirty="0"/>
-          </a:p>
-        </p:txBody>
-      </p:sp>
-      <p:sp>
-        <p:nvSpPr>
-          <p:cNvPr id="10" name="Text 8"/>
-          <p:cNvSpPr txBox="1"/>
-          <p:nvPr/>
-        </p:nvSpPr>
-        <p:spPr>
-          <a:xfrm>
-            <a:off x="5852160" y="3054096"/>
-            <a:ext cx="1645920" cy="384048"/>
-          </a:xfrm>
-          <a:prstGeom prst="rect">
-            <a:avLst/>
-          </a:prstGeom>
-          <a:noFill/>
-          <a:ln/>
-        </p:spPr>
-        <p:txBody>
-          <a:bodyPr wrap="square" lIns="0" tIns="0" rIns="0" bIns="0" rtlCol="0" anchor="ctr"/>
-          <a:lstStyle/>
-          <a:p>
-            <a:pPr eaLnBrk="0" latinLnBrk="0" indent="0" marL="0">
-              <a:buNone/>
-            </a:pPr>
-            <a:r>
-              <a:rPr lang="en-US" sz="1200" dirty="0">
+              <a:rPr lang="en-US" sz="1050" dirty="0">
                 <a:solidFill>
                   <a:srgbClr val="404040"/>
                 </a:solidFill>
@@ -6671,321 +8671,9 @@
                 <a:ea typeface="맑은 고딕" pitchFamily="34" charset="-122"/>
                 <a:cs typeface="맑은 고딕" pitchFamily="34" charset="-120"/>
               </a:rPr>
-              <a:t>[ 전형 1단계 ]</a:t>
+              <a:t>※ 5 ~ 8은 전형 4단계에 해당함</a:t>
             </a:r>
-            <a:endParaRPr lang="en-US" sz="1200" dirty="0"/>
-          </a:p>
-        </p:txBody>
-      </p:sp>
-      <p:sp>
-        <p:nvSpPr>
-          <p:cNvPr id="11" name="Text 9"/>
-          <p:cNvSpPr txBox="1"/>
-          <p:nvPr/>
-        </p:nvSpPr>
-        <p:spPr>
-          <a:xfrm>
-            <a:off x="1645920" y="3493008"/>
-            <a:ext cx="4206240" cy="384048"/>
-          </a:xfrm>
-          <a:prstGeom prst="rect">
-            <a:avLst/>
-          </a:prstGeom>
-          <a:noFill/>
-          <a:ln/>
-        </p:spPr>
-        <p:txBody>
-          <a:bodyPr wrap="square" lIns="0" tIns="0" rIns="0" bIns="0" rtlCol="0" anchor="ctr"/>
-          <a:lstStyle/>
-          <a:p>
-            <a:pPr eaLnBrk="0" latinLnBrk="0" indent="0" marL="0">
-              <a:buNone/>
-            </a:pPr>
-            <a:r>
-              <a:rPr lang="en-US" sz="1800" dirty="0">
-                <a:solidFill>
-                  <a:srgbClr val="000000"/>
-                </a:solidFill>
-                <a:latin typeface="맑은 고딕" pitchFamily="34" charset="0"/>
-                <a:ea typeface="맑은 고딕" pitchFamily="34" charset="-122"/>
-                <a:cs typeface="맑은 고딕" pitchFamily="34" charset="-120"/>
-              </a:rPr>
-              <a:t>6.  서류 전형 (1차)</a:t>
-            </a:r>
-            <a:endParaRPr lang="en-US" sz="1800" dirty="0"/>
-          </a:p>
-        </p:txBody>
-      </p:sp>
-      <p:sp>
-        <p:nvSpPr>
-          <p:cNvPr id="12" name="Text 10"/>
-          <p:cNvSpPr txBox="1"/>
-          <p:nvPr/>
-        </p:nvSpPr>
-        <p:spPr>
-          <a:xfrm>
-            <a:off x="5852160" y="3493008"/>
-            <a:ext cx="1645920" cy="384048"/>
-          </a:xfrm>
-          <a:prstGeom prst="rect">
-            <a:avLst/>
-          </a:prstGeom>
-          <a:noFill/>
-          <a:ln/>
-        </p:spPr>
-        <p:txBody>
-          <a:bodyPr wrap="square" lIns="0" tIns="0" rIns="0" bIns="0" rtlCol="0" anchor="ctr"/>
-          <a:lstStyle/>
-          <a:p>
-            <a:pPr eaLnBrk="0" latinLnBrk="0" indent="0" marL="0">
-              <a:buNone/>
-            </a:pPr>
-            <a:r>
-              <a:rPr lang="en-US" sz="1200" dirty="0">
-                <a:solidFill>
-                  <a:srgbClr val="404040"/>
-                </a:solidFill>
-                <a:latin typeface="맑은 고딕" pitchFamily="34" charset="0"/>
-                <a:ea typeface="맑은 고딕" pitchFamily="34" charset="-122"/>
-                <a:cs typeface="맑은 고딕" pitchFamily="34" charset="-120"/>
-              </a:rPr>
-              <a:t>[ 전형 2단계 ]</a:t>
-            </a:r>
-            <a:endParaRPr lang="en-US" sz="1200" dirty="0"/>
-          </a:p>
-        </p:txBody>
-      </p:sp>
-      <p:sp>
-        <p:nvSpPr>
-          <p:cNvPr id="13" name="Text 11"/>
-          <p:cNvSpPr txBox="1"/>
-          <p:nvPr/>
-        </p:nvSpPr>
-        <p:spPr>
-          <a:xfrm>
-            <a:off x="1645920" y="3931920"/>
-            <a:ext cx="4206240" cy="384048"/>
-          </a:xfrm>
-          <a:prstGeom prst="rect">
-            <a:avLst/>
-          </a:prstGeom>
-          <a:noFill/>
-          <a:ln/>
-        </p:spPr>
-        <p:txBody>
-          <a:bodyPr wrap="square" lIns="0" tIns="0" rIns="0" bIns="0" rtlCol="0" anchor="ctr"/>
-          <a:lstStyle/>
-          <a:p>
-            <a:pPr eaLnBrk="0" latinLnBrk="0" indent="0" marL="0">
-              <a:buNone/>
-            </a:pPr>
-            <a:r>
-              <a:rPr lang="en-US" sz="1800" dirty="0">
-                <a:solidFill>
-                  <a:srgbClr val="000000"/>
-                </a:solidFill>
-                <a:latin typeface="맑은 고딕" pitchFamily="34" charset="0"/>
-                <a:ea typeface="맑은 고딕" pitchFamily="34" charset="-122"/>
-                <a:cs typeface="맑은 고딕" pitchFamily="34" charset="-120"/>
-              </a:rPr>
-              <a:t>7.  업무적성 및 심층면접 (2차)</a:t>
-            </a:r>
-            <a:endParaRPr lang="en-US" sz="1800" dirty="0"/>
-          </a:p>
-        </p:txBody>
-      </p:sp>
-      <p:sp>
-        <p:nvSpPr>
-          <p:cNvPr id="14" name="Text 12"/>
-          <p:cNvSpPr txBox="1"/>
-          <p:nvPr/>
-        </p:nvSpPr>
-        <p:spPr>
-          <a:xfrm>
-            <a:off x="5852160" y="3931920"/>
-            <a:ext cx="1645920" cy="384048"/>
-          </a:xfrm>
-          <a:prstGeom prst="rect">
-            <a:avLst/>
-          </a:prstGeom>
-          <a:noFill/>
-          <a:ln/>
-        </p:spPr>
-        <p:txBody>
-          <a:bodyPr wrap="square" lIns="0" tIns="0" rIns="0" bIns="0" rtlCol="0" anchor="ctr"/>
-          <a:lstStyle/>
-          <a:p>
-            <a:pPr eaLnBrk="0" latinLnBrk="0" indent="0" marL="0">
-              <a:buNone/>
-            </a:pPr>
-            <a:r>
-              <a:rPr lang="en-US" sz="1200" dirty="0">
-                <a:solidFill>
-                  <a:srgbClr val="404040"/>
-                </a:solidFill>
-                <a:latin typeface="맑은 고딕" pitchFamily="34" charset="0"/>
-                <a:ea typeface="맑은 고딕" pitchFamily="34" charset="-122"/>
-                <a:cs typeface="맑은 고딕" pitchFamily="34" charset="-120"/>
-              </a:rPr>
-              <a:t>[ 전형 3단계 ]</a:t>
-            </a:r>
-            <a:endParaRPr lang="en-US" sz="1200" dirty="0"/>
-          </a:p>
-        </p:txBody>
-      </p:sp>
-      <p:sp>
-        <p:nvSpPr>
-          <p:cNvPr id="15" name="Text 13"/>
-          <p:cNvSpPr txBox="1"/>
-          <p:nvPr/>
-        </p:nvSpPr>
-        <p:spPr>
-          <a:xfrm>
-            <a:off x="1645920" y="4370832"/>
-            <a:ext cx="4206240" cy="384048"/>
-          </a:xfrm>
-          <a:prstGeom prst="rect">
-            <a:avLst/>
-          </a:prstGeom>
-          <a:noFill/>
-          <a:ln/>
-        </p:spPr>
-        <p:txBody>
-          <a:bodyPr wrap="square" lIns="0" tIns="0" rIns="0" bIns="0" rtlCol="0" anchor="ctr"/>
-          <a:lstStyle/>
-          <a:p>
-            <a:pPr eaLnBrk="0" latinLnBrk="0" indent="0" marL="0">
-              <a:buNone/>
-            </a:pPr>
-            <a:r>
-              <a:rPr lang="en-US" sz="1800" dirty="0">
-                <a:solidFill>
-                  <a:srgbClr val="000000"/>
-                </a:solidFill>
-                <a:latin typeface="맑은 고딕" pitchFamily="34" charset="0"/>
-                <a:ea typeface="맑은 고딕" pitchFamily="34" charset="-122"/>
-                <a:cs typeface="맑은 고딕" pitchFamily="34" charset="-120"/>
-              </a:rPr>
-              <a:t>8.  결격사유 검증</a:t>
-            </a:r>
-            <a:endParaRPr lang="en-US" sz="1800" dirty="0"/>
-          </a:p>
-        </p:txBody>
-      </p:sp>
-      <p:sp>
-        <p:nvSpPr>
-          <p:cNvPr id="16" name="Text 14"/>
-          <p:cNvSpPr txBox="1"/>
-          <p:nvPr/>
-        </p:nvSpPr>
-        <p:spPr>
-          <a:xfrm>
-            <a:off x="5852160" y="4370832"/>
-            <a:ext cx="1645920" cy="384048"/>
-          </a:xfrm>
-          <a:prstGeom prst="rect">
-            <a:avLst/>
-          </a:prstGeom>
-          <a:noFill/>
-          <a:ln/>
-        </p:spPr>
-        <p:txBody>
-          <a:bodyPr wrap="square" lIns="0" tIns="0" rIns="0" bIns="0" rtlCol="0" anchor="ctr"/>
-          <a:lstStyle/>
-          <a:p>
-            <a:pPr eaLnBrk="0" latinLnBrk="0" indent="0" marL="0">
-              <a:buNone/>
-            </a:pPr>
-            <a:r>
-              <a:rPr lang="en-US" sz="1200" dirty="0">
-                <a:solidFill>
-                  <a:srgbClr val="404040"/>
-                </a:solidFill>
-                <a:latin typeface="맑은 고딕" pitchFamily="34" charset="0"/>
-                <a:ea typeface="맑은 고딕" pitchFamily="34" charset="-122"/>
-                <a:cs typeface="맑은 고딕" pitchFamily="34" charset="-120"/>
-              </a:rPr>
-              <a:t>[ 전형 4단계 ]</a:t>
-            </a:r>
-            <a:endParaRPr lang="en-US" sz="1200" dirty="0"/>
-          </a:p>
-        </p:txBody>
-      </p:sp>
-      <p:sp>
-        <p:nvSpPr>
-          <p:cNvPr id="17" name="Text 15"/>
-          <p:cNvSpPr txBox="1"/>
-          <p:nvPr/>
-        </p:nvSpPr>
-        <p:spPr>
-          <a:xfrm>
-            <a:off x="1645920" y="4809744"/>
-            <a:ext cx="4206240" cy="384048"/>
-          </a:xfrm>
-          <a:prstGeom prst="rect">
-            <a:avLst/>
-          </a:prstGeom>
-          <a:noFill/>
-          <a:ln/>
-        </p:spPr>
-        <p:txBody>
-          <a:bodyPr wrap="square" lIns="0" tIns="0" rIns="0" bIns="0" rtlCol="0" anchor="ctr"/>
-          <a:lstStyle/>
-          <a:p>
-            <a:pPr eaLnBrk="0" latinLnBrk="0" indent="0" marL="0">
-              <a:buNone/>
-            </a:pPr>
-            <a:r>
-              <a:rPr lang="en-US" sz="1800" dirty="0">
-                <a:solidFill>
-                  <a:srgbClr val="000000"/>
-                </a:solidFill>
-                <a:latin typeface="맑은 고딕" pitchFamily="34" charset="0"/>
-                <a:ea typeface="맑은 고딕" pitchFamily="34" charset="-122"/>
-                <a:cs typeface="맑은 고딕" pitchFamily="34" charset="-120"/>
-              </a:rPr>
-              <a:t>9.  기타 사항</a:t>
-            </a:r>
-            <a:endParaRPr lang="en-US" sz="1800" dirty="0"/>
-          </a:p>
-        </p:txBody>
-      </p:sp>
-      <p:sp>
-        <p:nvSpPr>
-          <p:cNvPr id="18" name="Text 16"/>
-          <p:cNvSpPr txBox="1"/>
-          <p:nvPr/>
-        </p:nvSpPr>
-        <p:spPr>
-          <a:xfrm>
-            <a:off x="1645920" y="5248656"/>
-            <a:ext cx="4206240" cy="384048"/>
-          </a:xfrm>
-          <a:prstGeom prst="rect">
-            <a:avLst/>
-          </a:prstGeom>
-          <a:noFill/>
-          <a:ln/>
-        </p:spPr>
-        <p:txBody>
-          <a:bodyPr wrap="square" lIns="0" tIns="0" rIns="0" bIns="0" rtlCol="0" anchor="ctr"/>
-          <a:lstStyle/>
-          <a:p>
-            <a:pPr eaLnBrk="0" latinLnBrk="0" indent="0" marL="0">
-              <a:buNone/>
-            </a:pPr>
-            <a:r>
-              <a:rPr lang="en-US" sz="1800" dirty="0">
-                <a:solidFill>
-                  <a:srgbClr val="000000"/>
-                </a:solidFill>
-                <a:latin typeface="맑은 고딕" pitchFamily="34" charset="0"/>
-                <a:ea typeface="맑은 고딕" pitchFamily="34" charset="-122"/>
-                <a:cs typeface="맑은 고딕" pitchFamily="34" charset="-120"/>
-              </a:rPr>
-              <a:t>10.  채용 계획 요약</a:t>
-            </a:r>
-            <a:endParaRPr lang="en-US" sz="1800" dirty="0"/>
+            <a:endParaRPr lang="en-US" sz="1050" dirty="0"/>
           </a:p>
         </p:txBody>
       </p:sp>

--- a/docs/2027년_사무직원_채용계획안.pptx
+++ b/docs/2027년_사무직원_채용계획안.pptx
@@ -6443,2211 +6443,1002 @@
           </a:p>
         </p:txBody>
       </p:sp>
-      <p:graphicFrame>
-        <p:nvGraphicFramePr>
-          <p:cNvPr id="3" name="Table 0"/>
-          <p:cNvGraphicFramePr>
-            <a:graphicFrameLocks noGrp="1"/>
-          </p:cNvGraphicFramePr>
-          <p:nvPr>
-            <p:extLst>
-              <p:ext uri="{D42A27DB-BD31-4B8C-83A1-F6EECF244321}">
-                <p14:modId xmlns:p14="http://schemas.microsoft.com/office/powerpoint/2010/main" val="1579011935"/>
-              </p:ext>
-            </p:extLst>
-          </p:nvPr>
-        </p:nvGraphicFramePr>
-        <p:xfrm>
-          <a:off x="1005840" y="1188720"/>
-          <a:ext cx="7132320" cy="914400"/>
-        </p:xfrm>
-        <a:graphic>
-          <a:graphicData uri="http://schemas.openxmlformats.org/drawingml/2006/table">
-            <a:tbl>
-              <a:tblPr/>
-              <a:tblGrid>
-                <a:gridCol w="822960"/>
-                <a:gridCol w="4206240"/>
-                <a:gridCol w="2103120"/>
-              </a:tblGrid>
-              <a:tr h="329184">
-                <a:tc>
-                  <a:txBody>
-                    <a:bodyPr/>
-                    <a:lstStyle/>
-                    <a:p>
-                      <a:pPr eaLnBrk="0" latinLnBrk="0" algn="ctr" indent="0" marL="0">
-                        <a:buNone/>
-                      </a:pPr>
-                      <a:r>
-                        <a:rPr lang="en-US" sz="1050" b="1" dirty="0">
-                          <a:solidFill>
-                            <a:srgbClr val="000000"/>
-                          </a:solidFill>
-                          <a:latin typeface="맑은 고딕" pitchFamily="34" charset="0"/>
-                          <a:ea typeface="맑은 고딕" pitchFamily="34" charset="-122"/>
-                          <a:cs typeface="맑은 고딕" pitchFamily="34" charset="-120"/>
-                        </a:rPr>
-                        <a:t>구분</a:t>
-                      </a:r>
-                      <a:endParaRPr lang="en-US" sz="1050" dirty="0">
-                        <a:latin typeface="맑은 고딕" charset="0"/>
-                        <a:ea typeface="맑은 고딕" charset="0"/>
-                        <a:cs typeface="맑은 고딕" charset="0"/>
-                      </a:endParaRPr>
-                    </a:p>
-                  </a:txBody>
-                  <a:tcPr marL="38100" marR="38100" marT="38100" marB="38100" anchor="ctr">
-                    <a:lnL w="12700" cap="flat" cmpd="sng" algn="ctr">
-                      <a:solidFill>
-                        <a:srgbClr val="000000"/>
-                      </a:solidFill>
-                      <a:prstDash val="solid"/>
-                      <a:round/>
-                      <a:headEnd type="none" w="med" len="med"/>
-                      <a:tailEnd type="none" w="med" len="med"/>
-                    </a:lnL>
-                    <a:lnR w="12700" cap="flat" cmpd="sng" algn="ctr">
-                      <a:solidFill>
-                        <a:srgbClr val="000000"/>
-                      </a:solidFill>
-                      <a:prstDash val="solid"/>
-                      <a:round/>
-                      <a:headEnd type="none" w="med" len="med"/>
-                      <a:tailEnd type="none" w="med" len="med"/>
-                    </a:lnR>
-                    <a:lnT w="12700" cap="flat" cmpd="sng" algn="ctr">
-                      <a:solidFill>
-                        <a:srgbClr val="000000"/>
-                      </a:solidFill>
-                      <a:prstDash val="solid"/>
-                      <a:round/>
-                      <a:headEnd type="none" w="med" len="med"/>
-                      <a:tailEnd type="none" w="med" len="med"/>
-                    </a:lnT>
-                    <a:lnB w="12700" cap="flat" cmpd="sng" algn="ctr">
-                      <a:solidFill>
-                        <a:srgbClr val="000000"/>
-                      </a:solidFill>
-                      <a:prstDash val="solid"/>
-                      <a:round/>
-                      <a:headEnd type="none" w="med" len="med"/>
-                      <a:tailEnd type="none" w="med" len="med"/>
-                    </a:lnB>
-                    <a:solidFill>
-                      <a:srgbClr val="CCFFFF"/>
-                    </a:solidFill>
-                  </a:tcPr>
-                </a:tc>
-                <a:tc>
-                  <a:txBody>
-                    <a:bodyPr/>
-                    <a:lstStyle/>
-                    <a:p>
-                      <a:pPr eaLnBrk="0" latinLnBrk="0" algn="ctr" indent="0" marL="0">
-                        <a:buNone/>
-                      </a:pPr>
-                      <a:r>
-                        <a:rPr lang="en-US" sz="1050" b="1" dirty="0">
-                          <a:solidFill>
-                            <a:srgbClr val="000000"/>
-                          </a:solidFill>
-                          <a:latin typeface="맑은 고딕" pitchFamily="34" charset="0"/>
-                          <a:ea typeface="맑은 고딕" pitchFamily="34" charset="-122"/>
-                          <a:cs typeface="맑은 고딕" pitchFamily="34" charset="-120"/>
-                        </a:rPr>
-                        <a:t>항  목</a:t>
-                      </a:r>
-                      <a:endParaRPr lang="en-US" sz="1050" dirty="0">
-                        <a:latin typeface="맑은 고딕" charset="0"/>
-                        <a:ea typeface="맑은 고딕" charset="0"/>
-                        <a:cs typeface="맑은 고딕" charset="0"/>
-                      </a:endParaRPr>
-                    </a:p>
-                  </a:txBody>
-                  <a:tcPr marL="38100" marR="38100" marT="38100" marB="38100" anchor="ctr">
-                    <a:lnL w="12700" cap="flat" cmpd="sng" algn="ctr">
-                      <a:solidFill>
-                        <a:srgbClr val="000000"/>
-                      </a:solidFill>
-                      <a:prstDash val="solid"/>
-                      <a:round/>
-                      <a:headEnd type="none" w="med" len="med"/>
-                      <a:tailEnd type="none" w="med" len="med"/>
-                    </a:lnL>
-                    <a:lnR w="12700" cap="flat" cmpd="sng" algn="ctr">
-                      <a:solidFill>
-                        <a:srgbClr val="000000"/>
-                      </a:solidFill>
-                      <a:prstDash val="solid"/>
-                      <a:round/>
-                      <a:headEnd type="none" w="med" len="med"/>
-                      <a:tailEnd type="none" w="med" len="med"/>
-                    </a:lnR>
-                    <a:lnT w="12700" cap="flat" cmpd="sng" algn="ctr">
-                      <a:solidFill>
-                        <a:srgbClr val="000000"/>
-                      </a:solidFill>
-                      <a:prstDash val="solid"/>
-                      <a:round/>
-                      <a:headEnd type="none" w="med" len="med"/>
-                      <a:tailEnd type="none" w="med" len="med"/>
-                    </a:lnT>
-                    <a:lnB w="12700" cap="flat" cmpd="sng" algn="ctr">
-                      <a:solidFill>
-                        <a:srgbClr val="000000"/>
-                      </a:solidFill>
-                      <a:prstDash val="solid"/>
-                      <a:round/>
-                      <a:headEnd type="none" w="med" len="med"/>
-                      <a:tailEnd type="none" w="med" len="med"/>
-                    </a:lnB>
-                    <a:solidFill>
-                      <a:srgbClr val="CCFFFF"/>
-                    </a:solidFill>
-                  </a:tcPr>
-                </a:tc>
-                <a:tc>
-                  <a:txBody>
-                    <a:bodyPr/>
-                    <a:lstStyle/>
-                    <a:p>
-                      <a:pPr eaLnBrk="0" latinLnBrk="0" algn="ctr" indent="0" marL="0">
-                        <a:buNone/>
-                      </a:pPr>
-                      <a:r>
-                        <a:rPr lang="en-US" sz="1050" b="1" dirty="0">
-                          <a:solidFill>
-                            <a:srgbClr val="000000"/>
-                          </a:solidFill>
-                          <a:latin typeface="맑은 고딕" pitchFamily="34" charset="0"/>
-                          <a:ea typeface="맑은 고딕" pitchFamily="34" charset="-122"/>
-                          <a:cs typeface="맑은 고딕" pitchFamily="34" charset="-120"/>
-                        </a:rPr>
-                        <a:t>비고</a:t>
-                      </a:r>
-                      <a:endParaRPr lang="en-US" sz="1050" dirty="0">
-                        <a:latin typeface="맑은 고딕" charset="0"/>
-                        <a:ea typeface="맑은 고딕" charset="0"/>
-                        <a:cs typeface="맑은 고딕" charset="0"/>
-                      </a:endParaRPr>
-                    </a:p>
-                  </a:txBody>
-                  <a:tcPr marL="38100" marR="38100" marT="38100" marB="38100" anchor="ctr">
-                    <a:lnL w="12700" cap="flat" cmpd="sng" algn="ctr">
-                      <a:solidFill>
-                        <a:srgbClr val="000000"/>
-                      </a:solidFill>
-                      <a:prstDash val="solid"/>
-                      <a:round/>
-                      <a:headEnd type="none" w="med" len="med"/>
-                      <a:tailEnd type="none" w="med" len="med"/>
-                    </a:lnL>
-                    <a:lnR w="12700" cap="flat" cmpd="sng" algn="ctr">
-                      <a:solidFill>
-                        <a:srgbClr val="000000"/>
-                      </a:solidFill>
-                      <a:prstDash val="solid"/>
-                      <a:round/>
-                      <a:headEnd type="none" w="med" len="med"/>
-                      <a:tailEnd type="none" w="med" len="med"/>
-                    </a:lnR>
-                    <a:lnT w="12700" cap="flat" cmpd="sng" algn="ctr">
-                      <a:solidFill>
-                        <a:srgbClr val="000000"/>
-                      </a:solidFill>
-                      <a:prstDash val="solid"/>
-                      <a:round/>
-                      <a:headEnd type="none" w="med" len="med"/>
-                      <a:tailEnd type="none" w="med" len="med"/>
-                    </a:lnT>
-                    <a:lnB w="12700" cap="flat" cmpd="sng" algn="ctr">
-                      <a:solidFill>
-                        <a:srgbClr val="000000"/>
-                      </a:solidFill>
-                      <a:prstDash val="solid"/>
-                      <a:round/>
-                      <a:headEnd type="none" w="med" len="med"/>
-                      <a:tailEnd type="none" w="med" len="med"/>
-                    </a:lnB>
-                    <a:solidFill>
-                      <a:srgbClr val="CCFFFF"/>
-                    </a:solidFill>
-                  </a:tcPr>
-                </a:tc>
-              </a:tr>
-              <a:tr h="402336">
-                <a:tc>
-                  <a:txBody>
-                    <a:bodyPr/>
-                    <a:lstStyle/>
-                    <a:p>
-                      <a:pPr eaLnBrk="0" latinLnBrk="0" algn="ctr" indent="0" marL="0">
-                        <a:buNone/>
-                      </a:pPr>
-                      <a:r>
-                        <a:rPr lang="en-US" sz="1200" b="1" dirty="0">
-                          <a:solidFill>
-                            <a:srgbClr val="000000"/>
-                          </a:solidFill>
-                          <a:latin typeface="맑은 고딕" pitchFamily="34" charset="0"/>
-                          <a:ea typeface="맑은 고딕" pitchFamily="34" charset="-122"/>
-                          <a:cs typeface="맑은 고딕" pitchFamily="34" charset="-120"/>
-                        </a:rPr>
-                        <a:t>1</a:t>
-                      </a:r>
-                      <a:endParaRPr lang="en-US" sz="1200" dirty="0">
-                        <a:latin typeface="맑은 고딕" charset="0"/>
-                        <a:ea typeface="맑은 고딕" charset="0"/>
-                        <a:cs typeface="맑은 고딕" charset="0"/>
-                      </a:endParaRPr>
-                    </a:p>
-                  </a:txBody>
-                  <a:tcPr marL="38100" marR="38100" marT="38100" marB="38100" anchor="ctr">
-                    <a:lnL w="12700" cap="flat" cmpd="sng" algn="ctr">
-                      <a:solidFill>
-                        <a:srgbClr val="000000"/>
-                      </a:solidFill>
-                      <a:prstDash val="solid"/>
-                      <a:round/>
-                      <a:headEnd type="none" w="med" len="med"/>
-                      <a:tailEnd type="none" w="med" len="med"/>
-                    </a:lnL>
-                    <a:lnR w="12700" cap="flat" cmpd="sng" algn="ctr">
-                      <a:solidFill>
-                        <a:srgbClr val="000000"/>
-                      </a:solidFill>
-                      <a:prstDash val="solid"/>
-                      <a:round/>
-                      <a:headEnd type="none" w="med" len="med"/>
-                      <a:tailEnd type="none" w="med" len="med"/>
-                    </a:lnR>
-                    <a:lnT w="12700" cap="flat" cmpd="sng" algn="ctr">
-                      <a:solidFill>
-                        <a:srgbClr val="000000"/>
-                      </a:solidFill>
-                      <a:prstDash val="solid"/>
-                      <a:round/>
-                      <a:headEnd type="none" w="med" len="med"/>
-                      <a:tailEnd type="none" w="med" len="med"/>
-                    </a:lnT>
-                    <a:lnB w="12700" cap="flat" cmpd="sng" algn="ctr">
-                      <a:solidFill>
-                        <a:srgbClr val="000000"/>
-                      </a:solidFill>
-                      <a:prstDash val="solid"/>
-                      <a:round/>
-                      <a:headEnd type="none" w="med" len="med"/>
-                      <a:tailEnd type="none" w="med" len="med"/>
-                    </a:lnB>
-                    <a:solidFill>
-                      <a:srgbClr val="D9F6FF"/>
-                    </a:solidFill>
-                  </a:tcPr>
-                </a:tc>
-                <a:tc>
-                  <a:txBody>
-                    <a:bodyPr/>
-                    <a:lstStyle/>
-                    <a:p>
-                      <a:pPr eaLnBrk="0" latinLnBrk="0" algn="l" indent="0" marL="0">
-                        <a:buNone/>
-                      </a:pPr>
-                      <a:r>
-                        <a:rPr lang="en-US" sz="1300" dirty="0">
-                          <a:solidFill>
-                            <a:srgbClr val="000000"/>
-                          </a:solidFill>
-                          <a:latin typeface="맑은 고딕" pitchFamily="34" charset="0"/>
-                          <a:ea typeface="맑은 고딕" pitchFamily="34" charset="-122"/>
-                          <a:cs typeface="맑은 고딕" pitchFamily="34" charset="-120"/>
-                        </a:rPr>
-                        <a:t>채용 인원 및 채용 사유</a:t>
-                      </a:r>
-                      <a:endParaRPr lang="en-US" sz="1300" dirty="0">
-                        <a:latin typeface="맑은 고딕" charset="0"/>
-                        <a:ea typeface="맑은 고딕" charset="0"/>
-                        <a:cs typeface="맑은 고딕" charset="0"/>
-                      </a:endParaRPr>
-                    </a:p>
-                  </a:txBody>
-                  <a:tcPr marL="38100" marR="38100" marT="38100" marB="38100" anchor="ctr">
-                    <a:lnL w="12700" cap="flat" cmpd="sng" algn="ctr">
-                      <a:solidFill>
-                        <a:srgbClr val="000000"/>
-                      </a:solidFill>
-                      <a:prstDash val="solid"/>
-                      <a:round/>
-                      <a:headEnd type="none" w="med" len="med"/>
-                      <a:tailEnd type="none" w="med" len="med"/>
-                    </a:lnL>
-                    <a:lnR w="12700" cap="flat" cmpd="sng" algn="ctr">
-                      <a:solidFill>
-                        <a:srgbClr val="000000"/>
-                      </a:solidFill>
-                      <a:prstDash val="solid"/>
-                      <a:round/>
-                      <a:headEnd type="none" w="med" len="med"/>
-                      <a:tailEnd type="none" w="med" len="med"/>
-                    </a:lnR>
-                    <a:lnT w="12700" cap="flat" cmpd="sng" algn="ctr">
-                      <a:solidFill>
-                        <a:srgbClr val="000000"/>
-                      </a:solidFill>
-                      <a:prstDash val="solid"/>
-                      <a:round/>
-                      <a:headEnd type="none" w="med" len="med"/>
-                      <a:tailEnd type="none" w="med" len="med"/>
-                    </a:lnT>
-                    <a:lnB w="12700" cap="flat" cmpd="sng" algn="ctr">
-                      <a:solidFill>
-                        <a:srgbClr val="000000"/>
-                      </a:solidFill>
-                      <a:prstDash val="solid"/>
-                      <a:round/>
-                      <a:headEnd type="none" w="med" len="med"/>
-                      <a:tailEnd type="none" w="med" len="med"/>
-                    </a:lnB>
-                  </a:tcPr>
-                </a:tc>
-                <a:tc>
-                  <a:txBody>
-                    <a:bodyPr/>
-                    <a:lstStyle/>
-                    <a:p>
-                      <a:pPr eaLnBrk="0" latinLnBrk="0" algn="ctr" indent="0" marL="0">
-                        <a:buNone/>
-                      </a:pPr>
-                      <a:endParaRPr lang="en-US" sz="1050" dirty="0">
-                        <a:latin typeface="맑은 고딕" charset="0"/>
-                        <a:ea typeface="맑은 고딕" charset="0"/>
-                        <a:cs typeface="맑은 고딕" charset="0"/>
-                      </a:endParaRPr>
-                    </a:p>
-                  </a:txBody>
-                  <a:tcPr marL="38100" marR="38100" marT="38100" marB="38100" anchor="ctr">
-                    <a:lnL w="12700" cap="flat" cmpd="sng" algn="ctr">
-                      <a:solidFill>
-                        <a:srgbClr val="000000"/>
-                      </a:solidFill>
-                      <a:prstDash val="solid"/>
-                      <a:round/>
-                      <a:headEnd type="none" w="med" len="med"/>
-                      <a:tailEnd type="none" w="med" len="med"/>
-                    </a:lnL>
-                    <a:lnR w="12700" cap="flat" cmpd="sng" algn="ctr">
-                      <a:solidFill>
-                        <a:srgbClr val="000000"/>
-                      </a:solidFill>
-                      <a:prstDash val="solid"/>
-                      <a:round/>
-                      <a:headEnd type="none" w="med" len="med"/>
-                      <a:tailEnd type="none" w="med" len="med"/>
-                    </a:lnR>
-                    <a:lnT w="12700" cap="flat" cmpd="sng" algn="ctr">
-                      <a:solidFill>
-                        <a:srgbClr val="000000"/>
-                      </a:solidFill>
-                      <a:prstDash val="solid"/>
-                      <a:round/>
-                      <a:headEnd type="none" w="med" len="med"/>
-                      <a:tailEnd type="none" w="med" len="med"/>
-                    </a:lnT>
-                    <a:lnB w="12700" cap="flat" cmpd="sng" algn="ctr">
-                      <a:solidFill>
-                        <a:srgbClr val="000000"/>
-                      </a:solidFill>
-                      <a:prstDash val="solid"/>
-                      <a:round/>
-                      <a:headEnd type="none" w="med" len="med"/>
-                      <a:tailEnd type="none" w="med" len="med"/>
-                    </a:lnB>
-                  </a:tcPr>
-                </a:tc>
-              </a:tr>
-              <a:tr h="402336">
-                <a:tc>
-                  <a:txBody>
-                    <a:bodyPr/>
-                    <a:lstStyle/>
-                    <a:p>
-                      <a:pPr eaLnBrk="0" latinLnBrk="0" algn="ctr" indent="0" marL="0">
-                        <a:buNone/>
-                      </a:pPr>
-                      <a:r>
-                        <a:rPr lang="en-US" sz="1200" b="1" dirty="0">
-                          <a:solidFill>
-                            <a:srgbClr val="000000"/>
-                          </a:solidFill>
-                          <a:latin typeface="맑은 고딕" pitchFamily="34" charset="0"/>
-                          <a:ea typeface="맑은 고딕" pitchFamily="34" charset="-122"/>
-                          <a:cs typeface="맑은 고딕" pitchFamily="34" charset="-120"/>
-                        </a:rPr>
-                        <a:t>2</a:t>
-                      </a:r>
-                      <a:endParaRPr lang="en-US" sz="1200" dirty="0">
-                        <a:latin typeface="맑은 고딕" charset="0"/>
-                        <a:ea typeface="맑은 고딕" charset="0"/>
-                        <a:cs typeface="맑은 고딕" charset="0"/>
-                      </a:endParaRPr>
-                    </a:p>
-                  </a:txBody>
-                  <a:tcPr marL="38100" marR="38100" marT="38100" marB="38100" anchor="ctr">
-                    <a:lnL w="12700" cap="flat" cmpd="sng" algn="ctr">
-                      <a:solidFill>
-                        <a:srgbClr val="000000"/>
-                      </a:solidFill>
-                      <a:prstDash val="solid"/>
-                      <a:round/>
-                      <a:headEnd type="none" w="med" len="med"/>
-                      <a:tailEnd type="none" w="med" len="med"/>
-                    </a:lnL>
-                    <a:lnR w="12700" cap="flat" cmpd="sng" algn="ctr">
-                      <a:solidFill>
-                        <a:srgbClr val="000000"/>
-                      </a:solidFill>
-                      <a:prstDash val="solid"/>
-                      <a:round/>
-                      <a:headEnd type="none" w="med" len="med"/>
-                      <a:tailEnd type="none" w="med" len="med"/>
-                    </a:lnR>
-                    <a:lnT w="12700" cap="flat" cmpd="sng" algn="ctr">
-                      <a:solidFill>
-                        <a:srgbClr val="000000"/>
-                      </a:solidFill>
-                      <a:prstDash val="solid"/>
-                      <a:round/>
-                      <a:headEnd type="none" w="med" len="med"/>
-                      <a:tailEnd type="none" w="med" len="med"/>
-                    </a:lnT>
-                    <a:lnB w="12700" cap="flat" cmpd="sng" algn="ctr">
-                      <a:solidFill>
-                        <a:srgbClr val="000000"/>
-                      </a:solidFill>
-                      <a:prstDash val="solid"/>
-                      <a:round/>
-                      <a:headEnd type="none" w="med" len="med"/>
-                      <a:tailEnd type="none" w="med" len="med"/>
-                    </a:lnB>
-                    <a:solidFill>
-                      <a:srgbClr val="D9F6FF"/>
-                    </a:solidFill>
-                  </a:tcPr>
-                </a:tc>
-                <a:tc>
-                  <a:txBody>
-                    <a:bodyPr/>
-                    <a:lstStyle/>
-                    <a:p>
-                      <a:pPr eaLnBrk="0" latinLnBrk="0" algn="l" indent="0" marL="0">
-                        <a:buNone/>
-                      </a:pPr>
-                      <a:r>
-                        <a:rPr lang="en-US" sz="1300" dirty="0">
-                          <a:solidFill>
-                            <a:srgbClr val="000000"/>
-                          </a:solidFill>
-                          <a:latin typeface="맑은 고딕" pitchFamily="34" charset="0"/>
-                          <a:ea typeface="맑은 고딕" pitchFamily="34" charset="-122"/>
-                          <a:cs typeface="맑은 고딕" pitchFamily="34" charset="-120"/>
-                        </a:rPr>
-                        <a:t>직원 현황</a:t>
-                      </a:r>
-                      <a:endParaRPr lang="en-US" sz="1300" dirty="0">
-                        <a:latin typeface="맑은 고딕" charset="0"/>
-                        <a:ea typeface="맑은 고딕" charset="0"/>
-                        <a:cs typeface="맑은 고딕" charset="0"/>
-                      </a:endParaRPr>
-                    </a:p>
-                  </a:txBody>
-                  <a:tcPr marL="38100" marR="38100" marT="38100" marB="38100" anchor="ctr">
-                    <a:lnL w="12700" cap="flat" cmpd="sng" algn="ctr">
-                      <a:solidFill>
-                        <a:srgbClr val="000000"/>
-                      </a:solidFill>
-                      <a:prstDash val="solid"/>
-                      <a:round/>
-                      <a:headEnd type="none" w="med" len="med"/>
-                      <a:tailEnd type="none" w="med" len="med"/>
-                    </a:lnL>
-                    <a:lnR w="12700" cap="flat" cmpd="sng" algn="ctr">
-                      <a:solidFill>
-                        <a:srgbClr val="000000"/>
-                      </a:solidFill>
-                      <a:prstDash val="solid"/>
-                      <a:round/>
-                      <a:headEnd type="none" w="med" len="med"/>
-                      <a:tailEnd type="none" w="med" len="med"/>
-                    </a:lnR>
-                    <a:lnT w="12700" cap="flat" cmpd="sng" algn="ctr">
-                      <a:solidFill>
-                        <a:srgbClr val="000000"/>
-                      </a:solidFill>
-                      <a:prstDash val="solid"/>
-                      <a:round/>
-                      <a:headEnd type="none" w="med" len="med"/>
-                      <a:tailEnd type="none" w="med" len="med"/>
-                    </a:lnT>
-                    <a:lnB w="12700" cap="flat" cmpd="sng" algn="ctr">
-                      <a:solidFill>
-                        <a:srgbClr val="000000"/>
-                      </a:solidFill>
-                      <a:prstDash val="solid"/>
-                      <a:round/>
-                      <a:headEnd type="none" w="med" len="med"/>
-                      <a:tailEnd type="none" w="med" len="med"/>
-                    </a:lnB>
-                  </a:tcPr>
-                </a:tc>
-                <a:tc>
-                  <a:txBody>
-                    <a:bodyPr/>
-                    <a:lstStyle/>
-                    <a:p>
-                      <a:pPr eaLnBrk="0" latinLnBrk="0" algn="ctr" indent="0" marL="0">
-                        <a:buNone/>
-                      </a:pPr>
-                      <a:endParaRPr lang="en-US" sz="1050" dirty="0">
-                        <a:latin typeface="맑은 고딕" charset="0"/>
-                        <a:ea typeface="맑은 고딕" charset="0"/>
-                        <a:cs typeface="맑은 고딕" charset="0"/>
-                      </a:endParaRPr>
-                    </a:p>
-                  </a:txBody>
-                  <a:tcPr marL="38100" marR="38100" marT="38100" marB="38100" anchor="ctr">
-                    <a:lnL w="12700" cap="flat" cmpd="sng" algn="ctr">
-                      <a:solidFill>
-                        <a:srgbClr val="000000"/>
-                      </a:solidFill>
-                      <a:prstDash val="solid"/>
-                      <a:round/>
-                      <a:headEnd type="none" w="med" len="med"/>
-                      <a:tailEnd type="none" w="med" len="med"/>
-                    </a:lnL>
-                    <a:lnR w="12700" cap="flat" cmpd="sng" algn="ctr">
-                      <a:solidFill>
-                        <a:srgbClr val="000000"/>
-                      </a:solidFill>
-                      <a:prstDash val="solid"/>
-                      <a:round/>
-                      <a:headEnd type="none" w="med" len="med"/>
-                      <a:tailEnd type="none" w="med" len="med"/>
-                    </a:lnR>
-                    <a:lnT w="12700" cap="flat" cmpd="sng" algn="ctr">
-                      <a:solidFill>
-                        <a:srgbClr val="000000"/>
-                      </a:solidFill>
-                      <a:prstDash val="solid"/>
-                      <a:round/>
-                      <a:headEnd type="none" w="med" len="med"/>
-                      <a:tailEnd type="none" w="med" len="med"/>
-                    </a:lnT>
-                    <a:lnB w="12700" cap="flat" cmpd="sng" algn="ctr">
-                      <a:solidFill>
-                        <a:srgbClr val="000000"/>
-                      </a:solidFill>
-                      <a:prstDash val="solid"/>
-                      <a:round/>
-                      <a:headEnd type="none" w="med" len="med"/>
-                      <a:tailEnd type="none" w="med" len="med"/>
-                    </a:lnB>
-                  </a:tcPr>
-                </a:tc>
-              </a:tr>
-              <a:tr h="402336">
-                <a:tc>
-                  <a:txBody>
-                    <a:bodyPr/>
-                    <a:lstStyle/>
-                    <a:p>
-                      <a:pPr eaLnBrk="0" latinLnBrk="0" algn="ctr" indent="0" marL="0">
-                        <a:buNone/>
-                      </a:pPr>
-                      <a:r>
-                        <a:rPr lang="en-US" sz="1200" b="1" dirty="0">
-                          <a:solidFill>
-                            <a:srgbClr val="000000"/>
-                          </a:solidFill>
-                          <a:latin typeface="맑은 고딕" pitchFamily="34" charset="0"/>
-                          <a:ea typeface="맑은 고딕" pitchFamily="34" charset="-122"/>
-                          <a:cs typeface="맑은 고딕" pitchFamily="34" charset="-120"/>
-                        </a:rPr>
-                        <a:t>3</a:t>
-                      </a:r>
-                      <a:endParaRPr lang="en-US" sz="1200" dirty="0">
-                        <a:latin typeface="맑은 고딕" charset="0"/>
-                        <a:ea typeface="맑은 고딕" charset="0"/>
-                        <a:cs typeface="맑은 고딕" charset="0"/>
-                      </a:endParaRPr>
-                    </a:p>
-                  </a:txBody>
-                  <a:tcPr marL="38100" marR="38100" marT="38100" marB="38100" anchor="ctr">
-                    <a:lnL w="12700" cap="flat" cmpd="sng" algn="ctr">
-                      <a:solidFill>
-                        <a:srgbClr val="000000"/>
-                      </a:solidFill>
-                      <a:prstDash val="solid"/>
-                      <a:round/>
-                      <a:headEnd type="none" w="med" len="med"/>
-                      <a:tailEnd type="none" w="med" len="med"/>
-                    </a:lnL>
-                    <a:lnR w="12700" cap="flat" cmpd="sng" algn="ctr">
-                      <a:solidFill>
-                        <a:srgbClr val="000000"/>
-                      </a:solidFill>
-                      <a:prstDash val="solid"/>
-                      <a:round/>
-                      <a:headEnd type="none" w="med" len="med"/>
-                      <a:tailEnd type="none" w="med" len="med"/>
-                    </a:lnR>
-                    <a:lnT w="12700" cap="flat" cmpd="sng" algn="ctr">
-                      <a:solidFill>
-                        <a:srgbClr val="000000"/>
-                      </a:solidFill>
-                      <a:prstDash val="solid"/>
-                      <a:round/>
-                      <a:headEnd type="none" w="med" len="med"/>
-                      <a:tailEnd type="none" w="med" len="med"/>
-                    </a:lnT>
-                    <a:lnB w="12700" cap="flat" cmpd="sng" algn="ctr">
-                      <a:solidFill>
-                        <a:srgbClr val="000000"/>
-                      </a:solidFill>
-                      <a:prstDash val="solid"/>
-                      <a:round/>
-                      <a:headEnd type="none" w="med" len="med"/>
-                      <a:tailEnd type="none" w="med" len="med"/>
-                    </a:lnB>
-                    <a:solidFill>
-                      <a:srgbClr val="D9F6FF"/>
-                    </a:solidFill>
-                  </a:tcPr>
-                </a:tc>
-                <a:tc>
-                  <a:txBody>
-                    <a:bodyPr/>
-                    <a:lstStyle/>
-                    <a:p>
-                      <a:pPr eaLnBrk="0" latinLnBrk="0" algn="l" indent="0" marL="0">
-                        <a:buNone/>
-                      </a:pPr>
-                      <a:r>
-                        <a:rPr lang="en-US" sz="1300" dirty="0">
-                          <a:solidFill>
-                            <a:srgbClr val="000000"/>
-                          </a:solidFill>
-                          <a:latin typeface="맑은 고딕" pitchFamily="34" charset="0"/>
-                          <a:ea typeface="맑은 고딕" pitchFamily="34" charset="-122"/>
-                          <a:cs typeface="맑은 고딕" pitchFamily="34" charset="-120"/>
-                        </a:rPr>
-                        <a:t>채용 계획</a:t>
-                      </a:r>
-                      <a:endParaRPr lang="en-US" sz="1300" dirty="0">
-                        <a:latin typeface="맑은 고딕" charset="0"/>
-                        <a:ea typeface="맑은 고딕" charset="0"/>
-                        <a:cs typeface="맑은 고딕" charset="0"/>
-                      </a:endParaRPr>
-                    </a:p>
-                  </a:txBody>
-                  <a:tcPr marL="38100" marR="38100" marT="38100" marB="38100" anchor="ctr">
-                    <a:lnL w="12700" cap="flat" cmpd="sng" algn="ctr">
-                      <a:solidFill>
-                        <a:srgbClr val="000000"/>
-                      </a:solidFill>
-                      <a:prstDash val="solid"/>
-                      <a:round/>
-                      <a:headEnd type="none" w="med" len="med"/>
-                      <a:tailEnd type="none" w="med" len="med"/>
-                    </a:lnL>
-                    <a:lnR w="12700" cap="flat" cmpd="sng" algn="ctr">
-                      <a:solidFill>
-                        <a:srgbClr val="000000"/>
-                      </a:solidFill>
-                      <a:prstDash val="solid"/>
-                      <a:round/>
-                      <a:headEnd type="none" w="med" len="med"/>
-                      <a:tailEnd type="none" w="med" len="med"/>
-                    </a:lnR>
-                    <a:lnT w="12700" cap="flat" cmpd="sng" algn="ctr">
-                      <a:solidFill>
-                        <a:srgbClr val="000000"/>
-                      </a:solidFill>
-                      <a:prstDash val="solid"/>
-                      <a:round/>
-                      <a:headEnd type="none" w="med" len="med"/>
-                      <a:tailEnd type="none" w="med" len="med"/>
-                    </a:lnT>
-                    <a:lnB w="12700" cap="flat" cmpd="sng" algn="ctr">
-                      <a:solidFill>
-                        <a:srgbClr val="000000"/>
-                      </a:solidFill>
-                      <a:prstDash val="solid"/>
-                      <a:round/>
-                      <a:headEnd type="none" w="med" len="med"/>
-                      <a:tailEnd type="none" w="med" len="med"/>
-                    </a:lnB>
-                  </a:tcPr>
-                </a:tc>
-                <a:tc>
-                  <a:txBody>
-                    <a:bodyPr/>
-                    <a:lstStyle/>
-                    <a:p>
-                      <a:pPr eaLnBrk="0" latinLnBrk="0" algn="ctr" indent="0" marL="0">
-                        <a:buNone/>
-                      </a:pPr>
-                      <a:endParaRPr lang="en-US" sz="1050" dirty="0">
-                        <a:latin typeface="맑은 고딕" charset="0"/>
-                        <a:ea typeface="맑은 고딕" charset="0"/>
-                        <a:cs typeface="맑은 고딕" charset="0"/>
-                      </a:endParaRPr>
-                    </a:p>
-                  </a:txBody>
-                  <a:tcPr marL="38100" marR="38100" marT="38100" marB="38100" anchor="ctr">
-                    <a:lnL w="12700" cap="flat" cmpd="sng" algn="ctr">
-                      <a:solidFill>
-                        <a:srgbClr val="000000"/>
-                      </a:solidFill>
-                      <a:prstDash val="solid"/>
-                      <a:round/>
-                      <a:headEnd type="none" w="med" len="med"/>
-                      <a:tailEnd type="none" w="med" len="med"/>
-                    </a:lnL>
-                    <a:lnR w="12700" cap="flat" cmpd="sng" algn="ctr">
-                      <a:solidFill>
-                        <a:srgbClr val="000000"/>
-                      </a:solidFill>
-                      <a:prstDash val="solid"/>
-                      <a:round/>
-                      <a:headEnd type="none" w="med" len="med"/>
-                      <a:tailEnd type="none" w="med" len="med"/>
-                    </a:lnR>
-                    <a:lnT w="12700" cap="flat" cmpd="sng" algn="ctr">
-                      <a:solidFill>
-                        <a:srgbClr val="000000"/>
-                      </a:solidFill>
-                      <a:prstDash val="solid"/>
-                      <a:round/>
-                      <a:headEnd type="none" w="med" len="med"/>
-                      <a:tailEnd type="none" w="med" len="med"/>
-                    </a:lnT>
-                    <a:lnB w="12700" cap="flat" cmpd="sng" algn="ctr">
-                      <a:solidFill>
-                        <a:srgbClr val="000000"/>
-                      </a:solidFill>
-                      <a:prstDash val="solid"/>
-                      <a:round/>
-                      <a:headEnd type="none" w="med" len="med"/>
-                      <a:tailEnd type="none" w="med" len="med"/>
-                    </a:lnB>
-                  </a:tcPr>
-                </a:tc>
-              </a:tr>
-              <a:tr h="402336">
-                <a:tc>
-                  <a:txBody>
-                    <a:bodyPr/>
-                    <a:lstStyle/>
-                    <a:p>
-                      <a:pPr eaLnBrk="0" latinLnBrk="0" algn="ctr" indent="0" marL="0">
-                        <a:buNone/>
-                      </a:pPr>
-                      <a:r>
-                        <a:rPr lang="en-US" sz="1200" b="1" dirty="0">
-                          <a:solidFill>
-                            <a:srgbClr val="000000"/>
-                          </a:solidFill>
-                          <a:latin typeface="맑은 고딕" pitchFamily="34" charset="0"/>
-                          <a:ea typeface="맑은 고딕" pitchFamily="34" charset="-122"/>
-                          <a:cs typeface="맑은 고딕" pitchFamily="34" charset="-120"/>
-                        </a:rPr>
-                        <a:t>4</a:t>
-                      </a:r>
-                      <a:endParaRPr lang="en-US" sz="1200" dirty="0">
-                        <a:latin typeface="맑은 고딕" charset="0"/>
-                        <a:ea typeface="맑은 고딕" charset="0"/>
-                        <a:cs typeface="맑은 고딕" charset="0"/>
-                      </a:endParaRPr>
-                    </a:p>
-                  </a:txBody>
-                  <a:tcPr marL="38100" marR="38100" marT="38100" marB="38100" anchor="ctr">
-                    <a:lnL w="12700" cap="flat" cmpd="sng" algn="ctr">
-                      <a:solidFill>
-                        <a:srgbClr val="000000"/>
-                      </a:solidFill>
-                      <a:prstDash val="solid"/>
-                      <a:round/>
-                      <a:headEnd type="none" w="med" len="med"/>
-                      <a:tailEnd type="none" w="med" len="med"/>
-                    </a:lnL>
-                    <a:lnR w="12700" cap="flat" cmpd="sng" algn="ctr">
-                      <a:solidFill>
-                        <a:srgbClr val="000000"/>
-                      </a:solidFill>
-                      <a:prstDash val="solid"/>
-                      <a:round/>
-                      <a:headEnd type="none" w="med" len="med"/>
-                      <a:tailEnd type="none" w="med" len="med"/>
-                    </a:lnR>
-                    <a:lnT w="12700" cap="flat" cmpd="sng" algn="ctr">
-                      <a:solidFill>
-                        <a:srgbClr val="000000"/>
-                      </a:solidFill>
-                      <a:prstDash val="solid"/>
-                      <a:round/>
-                      <a:headEnd type="none" w="med" len="med"/>
-                      <a:tailEnd type="none" w="med" len="med"/>
-                    </a:lnT>
-                    <a:lnB w="12700" cap="flat" cmpd="sng" algn="ctr">
-                      <a:solidFill>
-                        <a:srgbClr val="000000"/>
-                      </a:solidFill>
-                      <a:prstDash val="solid"/>
-                      <a:round/>
-                      <a:headEnd type="none" w="med" len="med"/>
-                      <a:tailEnd type="none" w="med" len="med"/>
-                    </a:lnB>
-                    <a:solidFill>
-                      <a:srgbClr val="D9F6FF"/>
-                    </a:solidFill>
-                  </a:tcPr>
-                </a:tc>
-                <a:tc>
-                  <a:txBody>
-                    <a:bodyPr/>
-                    <a:lstStyle/>
-                    <a:p>
-                      <a:pPr eaLnBrk="0" latinLnBrk="0" algn="l" indent="0" marL="0">
-                        <a:buNone/>
-                      </a:pPr>
-                      <a:r>
-                        <a:rPr lang="en-US" sz="1300" dirty="0">
-                          <a:solidFill>
-                            <a:srgbClr val="000000"/>
-                          </a:solidFill>
-                          <a:latin typeface="맑은 고딕" pitchFamily="34" charset="0"/>
-                          <a:ea typeface="맑은 고딕" pitchFamily="34" charset="-122"/>
-                          <a:cs typeface="맑은 고딕" pitchFamily="34" charset="-120"/>
-                        </a:rPr>
-                        <a:t>전형 절차</a:t>
-                      </a:r>
-                      <a:endParaRPr lang="en-US" sz="1300" dirty="0">
-                        <a:latin typeface="맑은 고딕" charset="0"/>
-                        <a:ea typeface="맑은 고딕" charset="0"/>
-                        <a:cs typeface="맑은 고딕" charset="0"/>
-                      </a:endParaRPr>
-                    </a:p>
-                  </a:txBody>
-                  <a:tcPr marL="38100" marR="38100" marT="38100" marB="38100" anchor="ctr">
-                    <a:lnL w="12700" cap="flat" cmpd="sng" algn="ctr">
-                      <a:solidFill>
-                        <a:srgbClr val="000000"/>
-                      </a:solidFill>
-                      <a:prstDash val="solid"/>
-                      <a:round/>
-                      <a:headEnd type="none" w="med" len="med"/>
-                      <a:tailEnd type="none" w="med" len="med"/>
-                    </a:lnL>
-                    <a:lnR w="12700" cap="flat" cmpd="sng" algn="ctr">
-                      <a:solidFill>
-                        <a:srgbClr val="000000"/>
-                      </a:solidFill>
-                      <a:prstDash val="solid"/>
-                      <a:round/>
-                      <a:headEnd type="none" w="med" len="med"/>
-                      <a:tailEnd type="none" w="med" len="med"/>
-                    </a:lnR>
-                    <a:lnT w="12700" cap="flat" cmpd="sng" algn="ctr">
-                      <a:solidFill>
-                        <a:srgbClr val="000000"/>
-                      </a:solidFill>
-                      <a:prstDash val="solid"/>
-                      <a:round/>
-                      <a:headEnd type="none" w="med" len="med"/>
-                      <a:tailEnd type="none" w="med" len="med"/>
-                    </a:lnT>
-                    <a:lnB w="12700" cap="flat" cmpd="sng" algn="ctr">
-                      <a:solidFill>
-                        <a:srgbClr val="000000"/>
-                      </a:solidFill>
-                      <a:prstDash val="solid"/>
-                      <a:round/>
-                      <a:headEnd type="none" w="med" len="med"/>
-                      <a:tailEnd type="none" w="med" len="med"/>
-                    </a:lnB>
-                  </a:tcPr>
-                </a:tc>
-                <a:tc>
-                  <a:txBody>
-                    <a:bodyPr/>
-                    <a:lstStyle/>
-                    <a:p>
-                      <a:pPr eaLnBrk="0" latinLnBrk="0" algn="ctr" indent="0" marL="0">
-                        <a:buNone/>
-                      </a:pPr>
-                      <a:endParaRPr lang="en-US" sz="1050" dirty="0">
-                        <a:latin typeface="맑은 고딕" charset="0"/>
-                        <a:ea typeface="맑은 고딕" charset="0"/>
-                        <a:cs typeface="맑은 고딕" charset="0"/>
-                      </a:endParaRPr>
-                    </a:p>
-                  </a:txBody>
-                  <a:tcPr marL="38100" marR="38100" marT="38100" marB="38100" anchor="ctr">
-                    <a:lnL w="12700" cap="flat" cmpd="sng" algn="ctr">
-                      <a:solidFill>
-                        <a:srgbClr val="000000"/>
-                      </a:solidFill>
-                      <a:prstDash val="solid"/>
-                      <a:round/>
-                      <a:headEnd type="none" w="med" len="med"/>
-                      <a:tailEnd type="none" w="med" len="med"/>
-                    </a:lnL>
-                    <a:lnR w="12700" cap="flat" cmpd="sng" algn="ctr">
-                      <a:solidFill>
-                        <a:srgbClr val="000000"/>
-                      </a:solidFill>
-                      <a:prstDash val="solid"/>
-                      <a:round/>
-                      <a:headEnd type="none" w="med" len="med"/>
-                      <a:tailEnd type="none" w="med" len="med"/>
-                    </a:lnR>
-                    <a:lnT w="12700" cap="flat" cmpd="sng" algn="ctr">
-                      <a:solidFill>
-                        <a:srgbClr val="000000"/>
-                      </a:solidFill>
-                      <a:prstDash val="solid"/>
-                      <a:round/>
-                      <a:headEnd type="none" w="med" len="med"/>
-                      <a:tailEnd type="none" w="med" len="med"/>
-                    </a:lnT>
-                    <a:lnB w="12700" cap="flat" cmpd="sng" algn="ctr">
-                      <a:solidFill>
-                        <a:srgbClr val="000000"/>
-                      </a:solidFill>
-                      <a:prstDash val="solid"/>
-                      <a:round/>
-                      <a:headEnd type="none" w="med" len="med"/>
-                      <a:tailEnd type="none" w="med" len="med"/>
-                    </a:lnB>
-                  </a:tcPr>
-                </a:tc>
-              </a:tr>
-              <a:tr h="402336">
-                <a:tc>
-                  <a:txBody>
-                    <a:bodyPr/>
-                    <a:lstStyle/>
-                    <a:p>
-                      <a:pPr eaLnBrk="0" latinLnBrk="0" algn="ctr" indent="0" marL="0">
-                        <a:buNone/>
-                      </a:pPr>
-                      <a:r>
-                        <a:rPr lang="en-US" sz="1200" b="1" dirty="0">
-                          <a:solidFill>
-                            <a:srgbClr val="000000"/>
-                          </a:solidFill>
-                          <a:latin typeface="맑은 고딕" pitchFamily="34" charset="0"/>
-                          <a:ea typeface="맑은 고딕" pitchFamily="34" charset="-122"/>
-                          <a:cs typeface="맑은 고딕" pitchFamily="34" charset="-120"/>
-                        </a:rPr>
-                        <a:t>5</a:t>
-                      </a:r>
-                      <a:endParaRPr lang="en-US" sz="1200" dirty="0">
-                        <a:latin typeface="맑은 고딕" charset="0"/>
-                        <a:ea typeface="맑은 고딕" charset="0"/>
-                        <a:cs typeface="맑은 고딕" charset="0"/>
-                      </a:endParaRPr>
-                    </a:p>
-                  </a:txBody>
-                  <a:tcPr marL="38100" marR="38100" marT="38100" marB="38100" anchor="ctr">
-                    <a:lnL w="12700" cap="flat" cmpd="sng" algn="ctr">
-                      <a:solidFill>
-                        <a:srgbClr val="000000"/>
-                      </a:solidFill>
-                      <a:prstDash val="solid"/>
-                      <a:round/>
-                      <a:headEnd type="none" w="med" len="med"/>
-                      <a:tailEnd type="none" w="med" len="med"/>
-                    </a:lnL>
-                    <a:lnR w="12700" cap="flat" cmpd="sng" algn="ctr">
-                      <a:solidFill>
-                        <a:srgbClr val="000000"/>
-                      </a:solidFill>
-                      <a:prstDash val="solid"/>
-                      <a:round/>
-                      <a:headEnd type="none" w="med" len="med"/>
-                      <a:tailEnd type="none" w="med" len="med"/>
-                    </a:lnR>
-                    <a:lnT w="12700" cap="flat" cmpd="sng" algn="ctr">
-                      <a:solidFill>
-                        <a:srgbClr val="000000"/>
-                      </a:solidFill>
-                      <a:prstDash val="solid"/>
-                      <a:round/>
-                      <a:headEnd type="none" w="med" len="med"/>
-                      <a:tailEnd type="none" w="med" len="med"/>
-                    </a:lnT>
-                    <a:lnB w="12700" cap="flat" cmpd="sng" algn="ctr">
-                      <a:solidFill>
-                        <a:srgbClr val="000000"/>
-                      </a:solidFill>
-                      <a:prstDash val="solid"/>
-                      <a:round/>
-                      <a:headEnd type="none" w="med" len="med"/>
-                      <a:tailEnd type="none" w="med" len="med"/>
-                    </a:lnB>
-                    <a:solidFill>
-                      <a:srgbClr val="D9F6FF"/>
-                    </a:solidFill>
-                  </a:tcPr>
-                </a:tc>
-                <a:tc>
-                  <a:txBody>
-                    <a:bodyPr/>
-                    <a:lstStyle/>
-                    <a:p>
-                      <a:pPr eaLnBrk="0" latinLnBrk="0" algn="l" indent="0" marL="0">
-                        <a:buNone/>
-                      </a:pPr>
-                      <a:r>
-                        <a:rPr lang="en-US" sz="1300" dirty="0">
-                          <a:solidFill>
-                            <a:srgbClr val="000000"/>
-                          </a:solidFill>
-                          <a:latin typeface="맑은 고딕" pitchFamily="34" charset="0"/>
-                          <a:ea typeface="맑은 고딕" pitchFamily="34" charset="-122"/>
-                          <a:cs typeface="맑은 고딕" pitchFamily="34" charset="-120"/>
-                        </a:rPr>
-                        <a:t>지원서 접수</a:t>
-                      </a:r>
-                      <a:endParaRPr lang="en-US" sz="1300" dirty="0">
-                        <a:latin typeface="맑은 고딕" charset="0"/>
-                        <a:ea typeface="맑은 고딕" charset="0"/>
-                        <a:cs typeface="맑은 고딕" charset="0"/>
-                      </a:endParaRPr>
-                    </a:p>
-                  </a:txBody>
-                  <a:tcPr marL="38100" marR="38100" marT="38100" marB="38100" anchor="ctr">
-                    <a:lnL w="12700" cap="flat" cmpd="sng" algn="ctr">
-                      <a:solidFill>
-                        <a:srgbClr val="000000"/>
-                      </a:solidFill>
-                      <a:prstDash val="solid"/>
-                      <a:round/>
-                      <a:headEnd type="none" w="med" len="med"/>
-                      <a:tailEnd type="none" w="med" len="med"/>
-                    </a:lnL>
-                    <a:lnR w="12700" cap="flat" cmpd="sng" algn="ctr">
-                      <a:solidFill>
-                        <a:srgbClr val="000000"/>
-                      </a:solidFill>
-                      <a:prstDash val="solid"/>
-                      <a:round/>
-                      <a:headEnd type="none" w="med" len="med"/>
-                      <a:tailEnd type="none" w="med" len="med"/>
-                    </a:lnR>
-                    <a:lnT w="12700" cap="flat" cmpd="sng" algn="ctr">
-                      <a:solidFill>
-                        <a:srgbClr val="000000"/>
-                      </a:solidFill>
-                      <a:prstDash val="solid"/>
-                      <a:round/>
-                      <a:headEnd type="none" w="med" len="med"/>
-                      <a:tailEnd type="none" w="med" len="med"/>
-                    </a:lnT>
-                    <a:lnB w="12700" cap="flat" cmpd="sng" algn="ctr">
-                      <a:solidFill>
-                        <a:srgbClr val="000000"/>
-                      </a:solidFill>
-                      <a:prstDash val="solid"/>
-                      <a:round/>
-                      <a:headEnd type="none" w="med" len="med"/>
-                      <a:tailEnd type="none" w="med" len="med"/>
-                    </a:lnB>
-                    <a:solidFill>
-                      <a:srgbClr val="EFF9FC"/>
-                    </a:solidFill>
-                  </a:tcPr>
-                </a:tc>
-                <a:tc>
-                  <a:txBody>
-                    <a:bodyPr/>
-                    <a:lstStyle/>
-                    <a:p>
-                      <a:pPr eaLnBrk="0" latinLnBrk="0" algn="ctr" indent="0" marL="0">
-                        <a:buNone/>
-                      </a:pPr>
-                      <a:r>
-                        <a:rPr lang="en-US" sz="1050" dirty="0">
-                          <a:solidFill>
-                            <a:srgbClr val="404040"/>
-                          </a:solidFill>
-                          <a:latin typeface="맑은 고딕" pitchFamily="34" charset="0"/>
-                          <a:ea typeface="맑은 고딕" pitchFamily="34" charset="-122"/>
-                          <a:cs typeface="맑은 고딕" pitchFamily="34" charset="-120"/>
-                        </a:rPr>
-                        <a:t>전형 1단계</a:t>
-                      </a:r>
-                      <a:endParaRPr lang="en-US" sz="1050" dirty="0">
-                        <a:latin typeface="맑은 고딕" charset="0"/>
-                        <a:ea typeface="맑은 고딕" charset="0"/>
-                        <a:cs typeface="맑은 고딕" charset="0"/>
-                      </a:endParaRPr>
-                    </a:p>
-                  </a:txBody>
-                  <a:tcPr marL="38100" marR="38100" marT="38100" marB="38100" anchor="ctr">
-                    <a:lnL w="12700" cap="flat" cmpd="sng" algn="ctr">
-                      <a:solidFill>
-                        <a:srgbClr val="000000"/>
-                      </a:solidFill>
-                      <a:prstDash val="solid"/>
-                      <a:round/>
-                      <a:headEnd type="none" w="med" len="med"/>
-                      <a:tailEnd type="none" w="med" len="med"/>
-                    </a:lnL>
-                    <a:lnR w="12700" cap="flat" cmpd="sng" algn="ctr">
-                      <a:solidFill>
-                        <a:srgbClr val="000000"/>
-                      </a:solidFill>
-                      <a:prstDash val="solid"/>
-                      <a:round/>
-                      <a:headEnd type="none" w="med" len="med"/>
-                      <a:tailEnd type="none" w="med" len="med"/>
-                    </a:lnR>
-                    <a:lnT w="12700" cap="flat" cmpd="sng" algn="ctr">
-                      <a:solidFill>
-                        <a:srgbClr val="000000"/>
-                      </a:solidFill>
-                      <a:prstDash val="solid"/>
-                      <a:round/>
-                      <a:headEnd type="none" w="med" len="med"/>
-                      <a:tailEnd type="none" w="med" len="med"/>
-                    </a:lnT>
-                    <a:lnB w="12700" cap="flat" cmpd="sng" algn="ctr">
-                      <a:solidFill>
-                        <a:srgbClr val="000000"/>
-                      </a:solidFill>
-                      <a:prstDash val="solid"/>
-                      <a:round/>
-                      <a:headEnd type="none" w="med" len="med"/>
-                      <a:tailEnd type="none" w="med" len="med"/>
-                    </a:lnB>
-                    <a:solidFill>
-                      <a:srgbClr val="EFF9FC"/>
-                    </a:solidFill>
-                  </a:tcPr>
-                </a:tc>
-              </a:tr>
-              <a:tr h="402336">
-                <a:tc>
-                  <a:txBody>
-                    <a:bodyPr/>
-                    <a:lstStyle/>
-                    <a:p>
-                      <a:pPr eaLnBrk="0" latinLnBrk="0" algn="ctr" indent="0" marL="0">
-                        <a:buNone/>
-                      </a:pPr>
-                      <a:r>
-                        <a:rPr lang="en-US" sz="1200" b="1" dirty="0">
-                          <a:solidFill>
-                            <a:srgbClr val="000000"/>
-                          </a:solidFill>
-                          <a:latin typeface="맑은 고딕" pitchFamily="34" charset="0"/>
-                          <a:ea typeface="맑은 고딕" pitchFamily="34" charset="-122"/>
-                          <a:cs typeface="맑은 고딕" pitchFamily="34" charset="-120"/>
-                        </a:rPr>
-                        <a:t>6</a:t>
-                      </a:r>
-                      <a:endParaRPr lang="en-US" sz="1200" dirty="0">
-                        <a:latin typeface="맑은 고딕" charset="0"/>
-                        <a:ea typeface="맑은 고딕" charset="0"/>
-                        <a:cs typeface="맑은 고딕" charset="0"/>
-                      </a:endParaRPr>
-                    </a:p>
-                  </a:txBody>
-                  <a:tcPr marL="38100" marR="38100" marT="38100" marB="38100" anchor="ctr">
-                    <a:lnL w="12700" cap="flat" cmpd="sng" algn="ctr">
-                      <a:solidFill>
-                        <a:srgbClr val="000000"/>
-                      </a:solidFill>
-                      <a:prstDash val="solid"/>
-                      <a:round/>
-                      <a:headEnd type="none" w="med" len="med"/>
-                      <a:tailEnd type="none" w="med" len="med"/>
-                    </a:lnL>
-                    <a:lnR w="12700" cap="flat" cmpd="sng" algn="ctr">
-                      <a:solidFill>
-                        <a:srgbClr val="000000"/>
-                      </a:solidFill>
-                      <a:prstDash val="solid"/>
-                      <a:round/>
-                      <a:headEnd type="none" w="med" len="med"/>
-                      <a:tailEnd type="none" w="med" len="med"/>
-                    </a:lnR>
-                    <a:lnT w="12700" cap="flat" cmpd="sng" algn="ctr">
-                      <a:solidFill>
-                        <a:srgbClr val="000000"/>
-                      </a:solidFill>
-                      <a:prstDash val="solid"/>
-                      <a:round/>
-                      <a:headEnd type="none" w="med" len="med"/>
-                      <a:tailEnd type="none" w="med" len="med"/>
-                    </a:lnT>
-                    <a:lnB w="12700" cap="flat" cmpd="sng" algn="ctr">
-                      <a:solidFill>
-                        <a:srgbClr val="000000"/>
-                      </a:solidFill>
-                      <a:prstDash val="solid"/>
-                      <a:round/>
-                      <a:headEnd type="none" w="med" len="med"/>
-                      <a:tailEnd type="none" w="med" len="med"/>
-                    </a:lnB>
-                    <a:solidFill>
-                      <a:srgbClr val="D9F6FF"/>
-                    </a:solidFill>
-                  </a:tcPr>
-                </a:tc>
-                <a:tc>
-                  <a:txBody>
-                    <a:bodyPr/>
-                    <a:lstStyle/>
-                    <a:p>
-                      <a:pPr eaLnBrk="0" latinLnBrk="0" algn="l" indent="0" marL="0">
-                        <a:buNone/>
-                      </a:pPr>
-                      <a:r>
-                        <a:rPr lang="en-US" sz="1300" dirty="0">
-                          <a:solidFill>
-                            <a:srgbClr val="000000"/>
-                          </a:solidFill>
-                          <a:latin typeface="맑은 고딕" pitchFamily="34" charset="0"/>
-                          <a:ea typeface="맑은 고딕" pitchFamily="34" charset="-122"/>
-                          <a:cs typeface="맑은 고딕" pitchFamily="34" charset="-120"/>
-                        </a:rPr>
-                        <a:t>서류 전형 (1차)</a:t>
-                      </a:r>
-                      <a:endParaRPr lang="en-US" sz="1300" dirty="0">
-                        <a:latin typeface="맑은 고딕" charset="0"/>
-                        <a:ea typeface="맑은 고딕" charset="0"/>
-                        <a:cs typeface="맑은 고딕" charset="0"/>
-                      </a:endParaRPr>
-                    </a:p>
-                  </a:txBody>
-                  <a:tcPr marL="38100" marR="38100" marT="38100" marB="38100" anchor="ctr">
-                    <a:lnL w="12700" cap="flat" cmpd="sng" algn="ctr">
-                      <a:solidFill>
-                        <a:srgbClr val="000000"/>
-                      </a:solidFill>
-                      <a:prstDash val="solid"/>
-                      <a:round/>
-                      <a:headEnd type="none" w="med" len="med"/>
-                      <a:tailEnd type="none" w="med" len="med"/>
-                    </a:lnL>
-                    <a:lnR w="12700" cap="flat" cmpd="sng" algn="ctr">
-                      <a:solidFill>
-                        <a:srgbClr val="000000"/>
-                      </a:solidFill>
-                      <a:prstDash val="solid"/>
-                      <a:round/>
-                      <a:headEnd type="none" w="med" len="med"/>
-                      <a:tailEnd type="none" w="med" len="med"/>
-                    </a:lnR>
-                    <a:lnT w="12700" cap="flat" cmpd="sng" algn="ctr">
-                      <a:solidFill>
-                        <a:srgbClr val="000000"/>
-                      </a:solidFill>
-                      <a:prstDash val="solid"/>
-                      <a:round/>
-                      <a:headEnd type="none" w="med" len="med"/>
-                      <a:tailEnd type="none" w="med" len="med"/>
-                    </a:lnT>
-                    <a:lnB w="12700" cap="flat" cmpd="sng" algn="ctr">
-                      <a:solidFill>
-                        <a:srgbClr val="000000"/>
-                      </a:solidFill>
-                      <a:prstDash val="solid"/>
-                      <a:round/>
-                      <a:headEnd type="none" w="med" len="med"/>
-                      <a:tailEnd type="none" w="med" len="med"/>
-                    </a:lnB>
-                    <a:solidFill>
-                      <a:srgbClr val="EFF9FC"/>
-                    </a:solidFill>
-                  </a:tcPr>
-                </a:tc>
-                <a:tc>
-                  <a:txBody>
-                    <a:bodyPr/>
-                    <a:lstStyle/>
-                    <a:p>
-                      <a:pPr eaLnBrk="0" latinLnBrk="0" algn="ctr" indent="0" marL="0">
-                        <a:buNone/>
-                      </a:pPr>
-                      <a:r>
-                        <a:rPr lang="en-US" sz="1050" dirty="0">
-                          <a:solidFill>
-                            <a:srgbClr val="404040"/>
-                          </a:solidFill>
-                          <a:latin typeface="맑은 고딕" pitchFamily="34" charset="0"/>
-                          <a:ea typeface="맑은 고딕" pitchFamily="34" charset="-122"/>
-                          <a:cs typeface="맑은 고딕" pitchFamily="34" charset="-120"/>
-                        </a:rPr>
-                        <a:t>전형 2단계</a:t>
-                      </a:r>
-                      <a:endParaRPr lang="en-US" sz="1050" dirty="0">
-                        <a:latin typeface="맑은 고딕" charset="0"/>
-                        <a:ea typeface="맑은 고딕" charset="0"/>
-                        <a:cs typeface="맑은 고딕" charset="0"/>
-                      </a:endParaRPr>
-                    </a:p>
-                  </a:txBody>
-                  <a:tcPr marL="38100" marR="38100" marT="38100" marB="38100" anchor="ctr">
-                    <a:lnL w="12700" cap="flat" cmpd="sng" algn="ctr">
-                      <a:solidFill>
-                        <a:srgbClr val="000000"/>
-                      </a:solidFill>
-                      <a:prstDash val="solid"/>
-                      <a:round/>
-                      <a:headEnd type="none" w="med" len="med"/>
-                      <a:tailEnd type="none" w="med" len="med"/>
-                    </a:lnL>
-                    <a:lnR w="12700" cap="flat" cmpd="sng" algn="ctr">
-                      <a:solidFill>
-                        <a:srgbClr val="000000"/>
-                      </a:solidFill>
-                      <a:prstDash val="solid"/>
-                      <a:round/>
-                      <a:headEnd type="none" w="med" len="med"/>
-                      <a:tailEnd type="none" w="med" len="med"/>
-                    </a:lnR>
-                    <a:lnT w="12700" cap="flat" cmpd="sng" algn="ctr">
-                      <a:solidFill>
-                        <a:srgbClr val="000000"/>
-                      </a:solidFill>
-                      <a:prstDash val="solid"/>
-                      <a:round/>
-                      <a:headEnd type="none" w="med" len="med"/>
-                      <a:tailEnd type="none" w="med" len="med"/>
-                    </a:lnT>
-                    <a:lnB w="12700" cap="flat" cmpd="sng" algn="ctr">
-                      <a:solidFill>
-                        <a:srgbClr val="000000"/>
-                      </a:solidFill>
-                      <a:prstDash val="solid"/>
-                      <a:round/>
-                      <a:headEnd type="none" w="med" len="med"/>
-                      <a:tailEnd type="none" w="med" len="med"/>
-                    </a:lnB>
-                    <a:solidFill>
-                      <a:srgbClr val="EFF9FC"/>
-                    </a:solidFill>
-                  </a:tcPr>
-                </a:tc>
-              </a:tr>
-              <a:tr h="402336">
-                <a:tc>
-                  <a:txBody>
-                    <a:bodyPr/>
-                    <a:lstStyle/>
-                    <a:p>
-                      <a:pPr eaLnBrk="0" latinLnBrk="0" algn="ctr" indent="0" marL="0">
-                        <a:buNone/>
-                      </a:pPr>
-                      <a:r>
-                        <a:rPr lang="en-US" sz="1200" b="1" dirty="0">
-                          <a:solidFill>
-                            <a:srgbClr val="000000"/>
-                          </a:solidFill>
-                          <a:latin typeface="맑은 고딕" pitchFamily="34" charset="0"/>
-                          <a:ea typeface="맑은 고딕" pitchFamily="34" charset="-122"/>
-                          <a:cs typeface="맑은 고딕" pitchFamily="34" charset="-120"/>
-                        </a:rPr>
-                        <a:t>7</a:t>
-                      </a:r>
-                      <a:endParaRPr lang="en-US" sz="1200" dirty="0">
-                        <a:latin typeface="맑은 고딕" charset="0"/>
-                        <a:ea typeface="맑은 고딕" charset="0"/>
-                        <a:cs typeface="맑은 고딕" charset="0"/>
-                      </a:endParaRPr>
-                    </a:p>
-                  </a:txBody>
-                  <a:tcPr marL="38100" marR="38100" marT="38100" marB="38100" anchor="ctr">
-                    <a:lnL w="12700" cap="flat" cmpd="sng" algn="ctr">
-                      <a:solidFill>
-                        <a:srgbClr val="000000"/>
-                      </a:solidFill>
-                      <a:prstDash val="solid"/>
-                      <a:round/>
-                      <a:headEnd type="none" w="med" len="med"/>
-                      <a:tailEnd type="none" w="med" len="med"/>
-                    </a:lnL>
-                    <a:lnR w="12700" cap="flat" cmpd="sng" algn="ctr">
-                      <a:solidFill>
-                        <a:srgbClr val="000000"/>
-                      </a:solidFill>
-                      <a:prstDash val="solid"/>
-                      <a:round/>
-                      <a:headEnd type="none" w="med" len="med"/>
-                      <a:tailEnd type="none" w="med" len="med"/>
-                    </a:lnR>
-                    <a:lnT w="12700" cap="flat" cmpd="sng" algn="ctr">
-                      <a:solidFill>
-                        <a:srgbClr val="000000"/>
-                      </a:solidFill>
-                      <a:prstDash val="solid"/>
-                      <a:round/>
-                      <a:headEnd type="none" w="med" len="med"/>
-                      <a:tailEnd type="none" w="med" len="med"/>
-                    </a:lnT>
-                    <a:lnB w="12700" cap="flat" cmpd="sng" algn="ctr">
-                      <a:solidFill>
-                        <a:srgbClr val="000000"/>
-                      </a:solidFill>
-                      <a:prstDash val="solid"/>
-                      <a:round/>
-                      <a:headEnd type="none" w="med" len="med"/>
-                      <a:tailEnd type="none" w="med" len="med"/>
-                    </a:lnB>
-                    <a:solidFill>
-                      <a:srgbClr val="D9F6FF"/>
-                    </a:solidFill>
-                  </a:tcPr>
-                </a:tc>
-                <a:tc>
-                  <a:txBody>
-                    <a:bodyPr/>
-                    <a:lstStyle/>
-                    <a:p>
-                      <a:pPr eaLnBrk="0" latinLnBrk="0" algn="l" indent="0" marL="0">
-                        <a:buNone/>
-                      </a:pPr>
-                      <a:r>
-                        <a:rPr lang="en-US" sz="1300" dirty="0">
-                          <a:solidFill>
-                            <a:srgbClr val="000000"/>
-                          </a:solidFill>
-                          <a:latin typeface="맑은 고딕" pitchFamily="34" charset="0"/>
-                          <a:ea typeface="맑은 고딕" pitchFamily="34" charset="-122"/>
-                          <a:cs typeface="맑은 고딕" pitchFamily="34" charset="-120"/>
-                        </a:rPr>
-                        <a:t>업무적성 및 심층면접 (2차)</a:t>
-                      </a:r>
-                      <a:endParaRPr lang="en-US" sz="1300" dirty="0">
-                        <a:latin typeface="맑은 고딕" charset="0"/>
-                        <a:ea typeface="맑은 고딕" charset="0"/>
-                        <a:cs typeface="맑은 고딕" charset="0"/>
-                      </a:endParaRPr>
-                    </a:p>
-                  </a:txBody>
-                  <a:tcPr marL="38100" marR="38100" marT="38100" marB="38100" anchor="ctr">
-                    <a:lnL w="12700" cap="flat" cmpd="sng" algn="ctr">
-                      <a:solidFill>
-                        <a:srgbClr val="000000"/>
-                      </a:solidFill>
-                      <a:prstDash val="solid"/>
-                      <a:round/>
-                      <a:headEnd type="none" w="med" len="med"/>
-                      <a:tailEnd type="none" w="med" len="med"/>
-                    </a:lnL>
-                    <a:lnR w="12700" cap="flat" cmpd="sng" algn="ctr">
-                      <a:solidFill>
-                        <a:srgbClr val="000000"/>
-                      </a:solidFill>
-                      <a:prstDash val="solid"/>
-                      <a:round/>
-                      <a:headEnd type="none" w="med" len="med"/>
-                      <a:tailEnd type="none" w="med" len="med"/>
-                    </a:lnR>
-                    <a:lnT w="12700" cap="flat" cmpd="sng" algn="ctr">
-                      <a:solidFill>
-                        <a:srgbClr val="000000"/>
-                      </a:solidFill>
-                      <a:prstDash val="solid"/>
-                      <a:round/>
-                      <a:headEnd type="none" w="med" len="med"/>
-                      <a:tailEnd type="none" w="med" len="med"/>
-                    </a:lnT>
-                    <a:lnB w="12700" cap="flat" cmpd="sng" algn="ctr">
-                      <a:solidFill>
-                        <a:srgbClr val="000000"/>
-                      </a:solidFill>
-                      <a:prstDash val="solid"/>
-                      <a:round/>
-                      <a:headEnd type="none" w="med" len="med"/>
-                      <a:tailEnd type="none" w="med" len="med"/>
-                    </a:lnB>
-                    <a:solidFill>
-                      <a:srgbClr val="EFF9FC"/>
-                    </a:solidFill>
-                  </a:tcPr>
-                </a:tc>
-                <a:tc>
-                  <a:txBody>
-                    <a:bodyPr/>
-                    <a:lstStyle/>
-                    <a:p>
-                      <a:pPr eaLnBrk="0" latinLnBrk="0" algn="ctr" indent="0" marL="0">
-                        <a:buNone/>
-                      </a:pPr>
-                      <a:r>
-                        <a:rPr lang="en-US" sz="1050" dirty="0">
-                          <a:solidFill>
-                            <a:srgbClr val="404040"/>
-                          </a:solidFill>
-                          <a:latin typeface="맑은 고딕" pitchFamily="34" charset="0"/>
-                          <a:ea typeface="맑은 고딕" pitchFamily="34" charset="-122"/>
-                          <a:cs typeface="맑은 고딕" pitchFamily="34" charset="-120"/>
-                        </a:rPr>
-                        <a:t>전형 3단계</a:t>
-                      </a:r>
-                      <a:endParaRPr lang="en-US" sz="1050" dirty="0">
-                        <a:latin typeface="맑은 고딕" charset="0"/>
-                        <a:ea typeface="맑은 고딕" charset="0"/>
-                        <a:cs typeface="맑은 고딕" charset="0"/>
-                      </a:endParaRPr>
-                    </a:p>
-                  </a:txBody>
-                  <a:tcPr marL="38100" marR="38100" marT="38100" marB="38100" anchor="ctr">
-                    <a:lnL w="12700" cap="flat" cmpd="sng" algn="ctr">
-                      <a:solidFill>
-                        <a:srgbClr val="000000"/>
-                      </a:solidFill>
-                      <a:prstDash val="solid"/>
-                      <a:round/>
-                      <a:headEnd type="none" w="med" len="med"/>
-                      <a:tailEnd type="none" w="med" len="med"/>
-                    </a:lnL>
-                    <a:lnR w="12700" cap="flat" cmpd="sng" algn="ctr">
-                      <a:solidFill>
-                        <a:srgbClr val="000000"/>
-                      </a:solidFill>
-                      <a:prstDash val="solid"/>
-                      <a:round/>
-                      <a:headEnd type="none" w="med" len="med"/>
-                      <a:tailEnd type="none" w="med" len="med"/>
-                    </a:lnR>
-                    <a:lnT w="12700" cap="flat" cmpd="sng" algn="ctr">
-                      <a:solidFill>
-                        <a:srgbClr val="000000"/>
-                      </a:solidFill>
-                      <a:prstDash val="solid"/>
-                      <a:round/>
-                      <a:headEnd type="none" w="med" len="med"/>
-                      <a:tailEnd type="none" w="med" len="med"/>
-                    </a:lnT>
-                    <a:lnB w="12700" cap="flat" cmpd="sng" algn="ctr">
-                      <a:solidFill>
-                        <a:srgbClr val="000000"/>
-                      </a:solidFill>
-                      <a:prstDash val="solid"/>
-                      <a:round/>
-                      <a:headEnd type="none" w="med" len="med"/>
-                      <a:tailEnd type="none" w="med" len="med"/>
-                    </a:lnB>
-                    <a:solidFill>
-                      <a:srgbClr val="EFF9FC"/>
-                    </a:solidFill>
-                  </a:tcPr>
-                </a:tc>
-              </a:tr>
-              <a:tr h="402336">
-                <a:tc>
-                  <a:txBody>
-                    <a:bodyPr/>
-                    <a:lstStyle/>
-                    <a:p>
-                      <a:pPr eaLnBrk="0" latinLnBrk="0" algn="ctr" indent="0" marL="0">
-                        <a:buNone/>
-                      </a:pPr>
-                      <a:r>
-                        <a:rPr lang="en-US" sz="1200" b="1" dirty="0">
-                          <a:solidFill>
-                            <a:srgbClr val="000000"/>
-                          </a:solidFill>
-                          <a:latin typeface="맑은 고딕" pitchFamily="34" charset="0"/>
-                          <a:ea typeface="맑은 고딕" pitchFamily="34" charset="-122"/>
-                          <a:cs typeface="맑은 고딕" pitchFamily="34" charset="-120"/>
-                        </a:rPr>
-                        <a:t>8</a:t>
-                      </a:r>
-                      <a:endParaRPr lang="en-US" sz="1200" dirty="0">
-                        <a:latin typeface="맑은 고딕" charset="0"/>
-                        <a:ea typeface="맑은 고딕" charset="0"/>
-                        <a:cs typeface="맑은 고딕" charset="0"/>
-                      </a:endParaRPr>
-                    </a:p>
-                  </a:txBody>
-                  <a:tcPr marL="38100" marR="38100" marT="38100" marB="38100" anchor="ctr">
-                    <a:lnL w="12700" cap="flat" cmpd="sng" algn="ctr">
-                      <a:solidFill>
-                        <a:srgbClr val="000000"/>
-                      </a:solidFill>
-                      <a:prstDash val="solid"/>
-                      <a:round/>
-                      <a:headEnd type="none" w="med" len="med"/>
-                      <a:tailEnd type="none" w="med" len="med"/>
-                    </a:lnL>
-                    <a:lnR w="12700" cap="flat" cmpd="sng" algn="ctr">
-                      <a:solidFill>
-                        <a:srgbClr val="000000"/>
-                      </a:solidFill>
-                      <a:prstDash val="solid"/>
-                      <a:round/>
-                      <a:headEnd type="none" w="med" len="med"/>
-                      <a:tailEnd type="none" w="med" len="med"/>
-                    </a:lnR>
-                    <a:lnT w="12700" cap="flat" cmpd="sng" algn="ctr">
-                      <a:solidFill>
-                        <a:srgbClr val="000000"/>
-                      </a:solidFill>
-                      <a:prstDash val="solid"/>
-                      <a:round/>
-                      <a:headEnd type="none" w="med" len="med"/>
-                      <a:tailEnd type="none" w="med" len="med"/>
-                    </a:lnT>
-                    <a:lnB w="12700" cap="flat" cmpd="sng" algn="ctr">
-                      <a:solidFill>
-                        <a:srgbClr val="000000"/>
-                      </a:solidFill>
-                      <a:prstDash val="solid"/>
-                      <a:round/>
-                      <a:headEnd type="none" w="med" len="med"/>
-                      <a:tailEnd type="none" w="med" len="med"/>
-                    </a:lnB>
-                    <a:solidFill>
-                      <a:srgbClr val="D9F6FF"/>
-                    </a:solidFill>
-                  </a:tcPr>
-                </a:tc>
-                <a:tc>
-                  <a:txBody>
-                    <a:bodyPr/>
-                    <a:lstStyle/>
-                    <a:p>
-                      <a:pPr eaLnBrk="0" latinLnBrk="0" algn="l" indent="0" marL="0">
-                        <a:buNone/>
-                      </a:pPr>
-                      <a:r>
-                        <a:rPr lang="en-US" sz="1300" dirty="0">
-                          <a:solidFill>
-                            <a:srgbClr val="000000"/>
-                          </a:solidFill>
-                          <a:latin typeface="맑은 고딕" pitchFamily="34" charset="0"/>
-                          <a:ea typeface="맑은 고딕" pitchFamily="34" charset="-122"/>
-                          <a:cs typeface="맑은 고딕" pitchFamily="34" charset="-120"/>
-                        </a:rPr>
-                        <a:t>결격사유 검증</a:t>
-                      </a:r>
-                      <a:endParaRPr lang="en-US" sz="1300" dirty="0">
-                        <a:latin typeface="맑은 고딕" charset="0"/>
-                        <a:ea typeface="맑은 고딕" charset="0"/>
-                        <a:cs typeface="맑은 고딕" charset="0"/>
-                      </a:endParaRPr>
-                    </a:p>
-                  </a:txBody>
-                  <a:tcPr marL="38100" marR="38100" marT="38100" marB="38100" anchor="ctr">
-                    <a:lnL w="12700" cap="flat" cmpd="sng" algn="ctr">
-                      <a:solidFill>
-                        <a:srgbClr val="000000"/>
-                      </a:solidFill>
-                      <a:prstDash val="solid"/>
-                      <a:round/>
-                      <a:headEnd type="none" w="med" len="med"/>
-                      <a:tailEnd type="none" w="med" len="med"/>
-                    </a:lnL>
-                    <a:lnR w="12700" cap="flat" cmpd="sng" algn="ctr">
-                      <a:solidFill>
-                        <a:srgbClr val="000000"/>
-                      </a:solidFill>
-                      <a:prstDash val="solid"/>
-                      <a:round/>
-                      <a:headEnd type="none" w="med" len="med"/>
-                      <a:tailEnd type="none" w="med" len="med"/>
-                    </a:lnR>
-                    <a:lnT w="12700" cap="flat" cmpd="sng" algn="ctr">
-                      <a:solidFill>
-                        <a:srgbClr val="000000"/>
-                      </a:solidFill>
-                      <a:prstDash val="solid"/>
-                      <a:round/>
-                      <a:headEnd type="none" w="med" len="med"/>
-                      <a:tailEnd type="none" w="med" len="med"/>
-                    </a:lnT>
-                    <a:lnB w="12700" cap="flat" cmpd="sng" algn="ctr">
-                      <a:solidFill>
-                        <a:srgbClr val="000000"/>
-                      </a:solidFill>
-                      <a:prstDash val="solid"/>
-                      <a:round/>
-                      <a:headEnd type="none" w="med" len="med"/>
-                      <a:tailEnd type="none" w="med" len="med"/>
-                    </a:lnB>
-                    <a:solidFill>
-                      <a:srgbClr val="EFF9FC"/>
-                    </a:solidFill>
-                  </a:tcPr>
-                </a:tc>
-                <a:tc>
-                  <a:txBody>
-                    <a:bodyPr/>
-                    <a:lstStyle/>
-                    <a:p>
-                      <a:pPr eaLnBrk="0" latinLnBrk="0" algn="ctr" indent="0" marL="0">
-                        <a:buNone/>
-                      </a:pPr>
-                      <a:r>
-                        <a:rPr lang="en-US" sz="1050" dirty="0">
-                          <a:solidFill>
-                            <a:srgbClr val="404040"/>
-                          </a:solidFill>
-                          <a:latin typeface="맑은 고딕" pitchFamily="34" charset="0"/>
-                          <a:ea typeface="맑은 고딕" pitchFamily="34" charset="-122"/>
-                          <a:cs typeface="맑은 고딕" pitchFamily="34" charset="-120"/>
-                        </a:rPr>
-                        <a:t>전형 4단계</a:t>
-                      </a:r>
-                      <a:endParaRPr lang="en-US" sz="1050" dirty="0">
-                        <a:latin typeface="맑은 고딕" charset="0"/>
-                        <a:ea typeface="맑은 고딕" charset="0"/>
-                        <a:cs typeface="맑은 고딕" charset="0"/>
-                      </a:endParaRPr>
-                    </a:p>
-                  </a:txBody>
-                  <a:tcPr marL="38100" marR="38100" marT="38100" marB="38100" anchor="ctr">
-                    <a:lnL w="12700" cap="flat" cmpd="sng" algn="ctr">
-                      <a:solidFill>
-                        <a:srgbClr val="000000"/>
-                      </a:solidFill>
-                      <a:prstDash val="solid"/>
-                      <a:round/>
-                      <a:headEnd type="none" w="med" len="med"/>
-                      <a:tailEnd type="none" w="med" len="med"/>
-                    </a:lnL>
-                    <a:lnR w="12700" cap="flat" cmpd="sng" algn="ctr">
-                      <a:solidFill>
-                        <a:srgbClr val="000000"/>
-                      </a:solidFill>
-                      <a:prstDash val="solid"/>
-                      <a:round/>
-                      <a:headEnd type="none" w="med" len="med"/>
-                      <a:tailEnd type="none" w="med" len="med"/>
-                    </a:lnR>
-                    <a:lnT w="12700" cap="flat" cmpd="sng" algn="ctr">
-                      <a:solidFill>
-                        <a:srgbClr val="000000"/>
-                      </a:solidFill>
-                      <a:prstDash val="solid"/>
-                      <a:round/>
-                      <a:headEnd type="none" w="med" len="med"/>
-                      <a:tailEnd type="none" w="med" len="med"/>
-                    </a:lnT>
-                    <a:lnB w="12700" cap="flat" cmpd="sng" algn="ctr">
-                      <a:solidFill>
-                        <a:srgbClr val="000000"/>
-                      </a:solidFill>
-                      <a:prstDash val="solid"/>
-                      <a:round/>
-                      <a:headEnd type="none" w="med" len="med"/>
-                      <a:tailEnd type="none" w="med" len="med"/>
-                    </a:lnB>
-                    <a:solidFill>
-                      <a:srgbClr val="EFF9FC"/>
-                    </a:solidFill>
-                  </a:tcPr>
-                </a:tc>
-              </a:tr>
-              <a:tr h="402336">
-                <a:tc>
-                  <a:txBody>
-                    <a:bodyPr/>
-                    <a:lstStyle/>
-                    <a:p>
-                      <a:pPr eaLnBrk="0" latinLnBrk="0" algn="ctr" indent="0" marL="0">
-                        <a:buNone/>
-                      </a:pPr>
-                      <a:r>
-                        <a:rPr lang="en-US" sz="1200" b="1" dirty="0">
-                          <a:solidFill>
-                            <a:srgbClr val="000000"/>
-                          </a:solidFill>
-                          <a:latin typeface="맑은 고딕" pitchFamily="34" charset="0"/>
-                          <a:ea typeface="맑은 고딕" pitchFamily="34" charset="-122"/>
-                          <a:cs typeface="맑은 고딕" pitchFamily="34" charset="-120"/>
-                        </a:rPr>
-                        <a:t>9</a:t>
-                      </a:r>
-                      <a:endParaRPr lang="en-US" sz="1200" dirty="0">
-                        <a:latin typeface="맑은 고딕" charset="0"/>
-                        <a:ea typeface="맑은 고딕" charset="0"/>
-                        <a:cs typeface="맑은 고딕" charset="0"/>
-                      </a:endParaRPr>
-                    </a:p>
-                  </a:txBody>
-                  <a:tcPr marL="38100" marR="38100" marT="38100" marB="38100" anchor="ctr">
-                    <a:lnL w="12700" cap="flat" cmpd="sng" algn="ctr">
-                      <a:solidFill>
-                        <a:srgbClr val="000000"/>
-                      </a:solidFill>
-                      <a:prstDash val="solid"/>
-                      <a:round/>
-                      <a:headEnd type="none" w="med" len="med"/>
-                      <a:tailEnd type="none" w="med" len="med"/>
-                    </a:lnL>
-                    <a:lnR w="12700" cap="flat" cmpd="sng" algn="ctr">
-                      <a:solidFill>
-                        <a:srgbClr val="000000"/>
-                      </a:solidFill>
-                      <a:prstDash val="solid"/>
-                      <a:round/>
-                      <a:headEnd type="none" w="med" len="med"/>
-                      <a:tailEnd type="none" w="med" len="med"/>
-                    </a:lnR>
-                    <a:lnT w="12700" cap="flat" cmpd="sng" algn="ctr">
-                      <a:solidFill>
-                        <a:srgbClr val="000000"/>
-                      </a:solidFill>
-                      <a:prstDash val="solid"/>
-                      <a:round/>
-                      <a:headEnd type="none" w="med" len="med"/>
-                      <a:tailEnd type="none" w="med" len="med"/>
-                    </a:lnT>
-                    <a:lnB w="12700" cap="flat" cmpd="sng" algn="ctr">
-                      <a:solidFill>
-                        <a:srgbClr val="000000"/>
-                      </a:solidFill>
-                      <a:prstDash val="solid"/>
-                      <a:round/>
-                      <a:headEnd type="none" w="med" len="med"/>
-                      <a:tailEnd type="none" w="med" len="med"/>
-                    </a:lnB>
-                    <a:solidFill>
-                      <a:srgbClr val="D9F6FF"/>
-                    </a:solidFill>
-                  </a:tcPr>
-                </a:tc>
-                <a:tc>
-                  <a:txBody>
-                    <a:bodyPr/>
-                    <a:lstStyle/>
-                    <a:p>
-                      <a:pPr eaLnBrk="0" latinLnBrk="0" algn="l" indent="0" marL="0">
-                        <a:buNone/>
-                      </a:pPr>
-                      <a:r>
-                        <a:rPr lang="en-US" sz="1300" dirty="0">
-                          <a:solidFill>
-                            <a:srgbClr val="000000"/>
-                          </a:solidFill>
-                          <a:latin typeface="맑은 고딕" pitchFamily="34" charset="0"/>
-                          <a:ea typeface="맑은 고딕" pitchFamily="34" charset="-122"/>
-                          <a:cs typeface="맑은 고딕" pitchFamily="34" charset="-120"/>
-                        </a:rPr>
-                        <a:t>기타 사항</a:t>
-                      </a:r>
-                      <a:endParaRPr lang="en-US" sz="1300" dirty="0">
-                        <a:latin typeface="맑은 고딕" charset="0"/>
-                        <a:ea typeface="맑은 고딕" charset="0"/>
-                        <a:cs typeface="맑은 고딕" charset="0"/>
-                      </a:endParaRPr>
-                    </a:p>
-                  </a:txBody>
-                  <a:tcPr marL="38100" marR="38100" marT="38100" marB="38100" anchor="ctr">
-                    <a:lnL w="12700" cap="flat" cmpd="sng" algn="ctr">
-                      <a:solidFill>
-                        <a:srgbClr val="000000"/>
-                      </a:solidFill>
-                      <a:prstDash val="solid"/>
-                      <a:round/>
-                      <a:headEnd type="none" w="med" len="med"/>
-                      <a:tailEnd type="none" w="med" len="med"/>
-                    </a:lnL>
-                    <a:lnR w="12700" cap="flat" cmpd="sng" algn="ctr">
-                      <a:solidFill>
-                        <a:srgbClr val="000000"/>
-                      </a:solidFill>
-                      <a:prstDash val="solid"/>
-                      <a:round/>
-                      <a:headEnd type="none" w="med" len="med"/>
-                      <a:tailEnd type="none" w="med" len="med"/>
-                    </a:lnR>
-                    <a:lnT w="12700" cap="flat" cmpd="sng" algn="ctr">
-                      <a:solidFill>
-                        <a:srgbClr val="000000"/>
-                      </a:solidFill>
-                      <a:prstDash val="solid"/>
-                      <a:round/>
-                      <a:headEnd type="none" w="med" len="med"/>
-                      <a:tailEnd type="none" w="med" len="med"/>
-                    </a:lnT>
-                    <a:lnB w="12700" cap="flat" cmpd="sng" algn="ctr">
-                      <a:solidFill>
-                        <a:srgbClr val="000000"/>
-                      </a:solidFill>
-                      <a:prstDash val="solid"/>
-                      <a:round/>
-                      <a:headEnd type="none" w="med" len="med"/>
-                      <a:tailEnd type="none" w="med" len="med"/>
-                    </a:lnB>
-                  </a:tcPr>
-                </a:tc>
-                <a:tc>
-                  <a:txBody>
-                    <a:bodyPr/>
-                    <a:lstStyle/>
-                    <a:p>
-                      <a:pPr eaLnBrk="0" latinLnBrk="0" algn="ctr" indent="0" marL="0">
-                        <a:buNone/>
-                      </a:pPr>
-                      <a:endParaRPr lang="en-US" sz="1050" dirty="0">
-                        <a:latin typeface="맑은 고딕" charset="0"/>
-                        <a:ea typeface="맑은 고딕" charset="0"/>
-                        <a:cs typeface="맑은 고딕" charset="0"/>
-                      </a:endParaRPr>
-                    </a:p>
-                  </a:txBody>
-                  <a:tcPr marL="38100" marR="38100" marT="38100" marB="38100" anchor="ctr">
-                    <a:lnL w="12700" cap="flat" cmpd="sng" algn="ctr">
-                      <a:solidFill>
-                        <a:srgbClr val="000000"/>
-                      </a:solidFill>
-                      <a:prstDash val="solid"/>
-                      <a:round/>
-                      <a:headEnd type="none" w="med" len="med"/>
-                      <a:tailEnd type="none" w="med" len="med"/>
-                    </a:lnL>
-                    <a:lnR w="12700" cap="flat" cmpd="sng" algn="ctr">
-                      <a:solidFill>
-                        <a:srgbClr val="000000"/>
-                      </a:solidFill>
-                      <a:prstDash val="solid"/>
-                      <a:round/>
-                      <a:headEnd type="none" w="med" len="med"/>
-                      <a:tailEnd type="none" w="med" len="med"/>
-                    </a:lnR>
-                    <a:lnT w="12700" cap="flat" cmpd="sng" algn="ctr">
-                      <a:solidFill>
-                        <a:srgbClr val="000000"/>
-                      </a:solidFill>
-                      <a:prstDash val="solid"/>
-                      <a:round/>
-                      <a:headEnd type="none" w="med" len="med"/>
-                      <a:tailEnd type="none" w="med" len="med"/>
-                    </a:lnT>
-                    <a:lnB w="12700" cap="flat" cmpd="sng" algn="ctr">
-                      <a:solidFill>
-                        <a:srgbClr val="000000"/>
-                      </a:solidFill>
-                      <a:prstDash val="solid"/>
-                      <a:round/>
-                      <a:headEnd type="none" w="med" len="med"/>
-                      <a:tailEnd type="none" w="med" len="med"/>
-                    </a:lnB>
-                  </a:tcPr>
-                </a:tc>
-              </a:tr>
-              <a:tr h="402336">
-                <a:tc>
-                  <a:txBody>
-                    <a:bodyPr/>
-                    <a:lstStyle/>
-                    <a:p>
-                      <a:pPr eaLnBrk="0" latinLnBrk="0" algn="ctr" indent="0" marL="0">
-                        <a:buNone/>
-                      </a:pPr>
-                      <a:r>
-                        <a:rPr lang="en-US" sz="1200" b="1" dirty="0">
-                          <a:solidFill>
-                            <a:srgbClr val="000000"/>
-                          </a:solidFill>
-                          <a:latin typeface="맑은 고딕" pitchFamily="34" charset="0"/>
-                          <a:ea typeface="맑은 고딕" pitchFamily="34" charset="-122"/>
-                          <a:cs typeface="맑은 고딕" pitchFamily="34" charset="-120"/>
-                        </a:rPr>
-                        <a:t>10</a:t>
-                      </a:r>
-                      <a:endParaRPr lang="en-US" sz="1200" dirty="0">
-                        <a:latin typeface="맑은 고딕" charset="0"/>
-                        <a:ea typeface="맑은 고딕" charset="0"/>
-                        <a:cs typeface="맑은 고딕" charset="0"/>
-                      </a:endParaRPr>
-                    </a:p>
-                  </a:txBody>
-                  <a:tcPr marL="38100" marR="38100" marT="38100" marB="38100" anchor="ctr">
-                    <a:lnL w="12700" cap="flat" cmpd="sng" algn="ctr">
-                      <a:solidFill>
-                        <a:srgbClr val="000000"/>
-                      </a:solidFill>
-                      <a:prstDash val="solid"/>
-                      <a:round/>
-                      <a:headEnd type="none" w="med" len="med"/>
-                      <a:tailEnd type="none" w="med" len="med"/>
-                    </a:lnL>
-                    <a:lnR w="12700" cap="flat" cmpd="sng" algn="ctr">
-                      <a:solidFill>
-                        <a:srgbClr val="000000"/>
-                      </a:solidFill>
-                      <a:prstDash val="solid"/>
-                      <a:round/>
-                      <a:headEnd type="none" w="med" len="med"/>
-                      <a:tailEnd type="none" w="med" len="med"/>
-                    </a:lnR>
-                    <a:lnT w="12700" cap="flat" cmpd="sng" algn="ctr">
-                      <a:solidFill>
-                        <a:srgbClr val="000000"/>
-                      </a:solidFill>
-                      <a:prstDash val="solid"/>
-                      <a:round/>
-                      <a:headEnd type="none" w="med" len="med"/>
-                      <a:tailEnd type="none" w="med" len="med"/>
-                    </a:lnT>
-                    <a:lnB w="12700" cap="flat" cmpd="sng" algn="ctr">
-                      <a:solidFill>
-                        <a:srgbClr val="000000"/>
-                      </a:solidFill>
-                      <a:prstDash val="solid"/>
-                      <a:round/>
-                      <a:headEnd type="none" w="med" len="med"/>
-                      <a:tailEnd type="none" w="med" len="med"/>
-                    </a:lnB>
-                    <a:solidFill>
-                      <a:srgbClr val="D9F6FF"/>
-                    </a:solidFill>
-                  </a:tcPr>
-                </a:tc>
-                <a:tc>
-                  <a:txBody>
-                    <a:bodyPr/>
-                    <a:lstStyle/>
-                    <a:p>
-                      <a:pPr eaLnBrk="0" latinLnBrk="0" algn="l" indent="0" marL="0">
-                        <a:buNone/>
-                      </a:pPr>
-                      <a:r>
-                        <a:rPr lang="en-US" sz="1300" dirty="0">
-                          <a:solidFill>
-                            <a:srgbClr val="000000"/>
-                          </a:solidFill>
-                          <a:latin typeface="맑은 고딕" pitchFamily="34" charset="0"/>
-                          <a:ea typeface="맑은 고딕" pitchFamily="34" charset="-122"/>
-                          <a:cs typeface="맑은 고딕" pitchFamily="34" charset="-120"/>
-                        </a:rPr>
-                        <a:t>채용 계획 요약</a:t>
-                      </a:r>
-                      <a:endParaRPr lang="en-US" sz="1300" dirty="0">
-                        <a:latin typeface="맑은 고딕" charset="0"/>
-                        <a:ea typeface="맑은 고딕" charset="0"/>
-                        <a:cs typeface="맑은 고딕" charset="0"/>
-                      </a:endParaRPr>
-                    </a:p>
-                  </a:txBody>
-                  <a:tcPr marL="38100" marR="38100" marT="38100" marB="38100" anchor="ctr">
-                    <a:lnL w="12700" cap="flat" cmpd="sng" algn="ctr">
-                      <a:solidFill>
-                        <a:srgbClr val="000000"/>
-                      </a:solidFill>
-                      <a:prstDash val="solid"/>
-                      <a:round/>
-                      <a:headEnd type="none" w="med" len="med"/>
-                      <a:tailEnd type="none" w="med" len="med"/>
-                    </a:lnL>
-                    <a:lnR w="12700" cap="flat" cmpd="sng" algn="ctr">
-                      <a:solidFill>
-                        <a:srgbClr val="000000"/>
-                      </a:solidFill>
-                      <a:prstDash val="solid"/>
-                      <a:round/>
-                      <a:headEnd type="none" w="med" len="med"/>
-                      <a:tailEnd type="none" w="med" len="med"/>
-                    </a:lnR>
-                    <a:lnT w="12700" cap="flat" cmpd="sng" algn="ctr">
-                      <a:solidFill>
-                        <a:srgbClr val="000000"/>
-                      </a:solidFill>
-                      <a:prstDash val="solid"/>
-                      <a:round/>
-                      <a:headEnd type="none" w="med" len="med"/>
-                      <a:tailEnd type="none" w="med" len="med"/>
-                    </a:lnT>
-                    <a:lnB w="12700" cap="flat" cmpd="sng" algn="ctr">
-                      <a:solidFill>
-                        <a:srgbClr val="000000"/>
-                      </a:solidFill>
-                      <a:prstDash val="solid"/>
-                      <a:round/>
-                      <a:headEnd type="none" w="med" len="med"/>
-                      <a:tailEnd type="none" w="med" len="med"/>
-                    </a:lnB>
-                  </a:tcPr>
-                </a:tc>
-                <a:tc>
-                  <a:txBody>
-                    <a:bodyPr/>
-                    <a:lstStyle/>
-                    <a:p>
-                      <a:pPr eaLnBrk="0" latinLnBrk="0" algn="ctr" indent="0" marL="0">
-                        <a:buNone/>
-                      </a:pPr>
-                      <a:endParaRPr lang="en-US" sz="1050" dirty="0">
-                        <a:latin typeface="맑은 고딕" charset="0"/>
-                        <a:ea typeface="맑은 고딕" charset="0"/>
-                        <a:cs typeface="맑은 고딕" charset="0"/>
-                      </a:endParaRPr>
-                    </a:p>
-                  </a:txBody>
-                  <a:tcPr marL="38100" marR="38100" marT="38100" marB="38100" anchor="ctr">
-                    <a:lnL w="12700" cap="flat" cmpd="sng" algn="ctr">
-                      <a:solidFill>
-                        <a:srgbClr val="000000"/>
-                      </a:solidFill>
-                      <a:prstDash val="solid"/>
-                      <a:round/>
-                      <a:headEnd type="none" w="med" len="med"/>
-                      <a:tailEnd type="none" w="med" len="med"/>
-                    </a:lnL>
-                    <a:lnR w="12700" cap="flat" cmpd="sng" algn="ctr">
-                      <a:solidFill>
-                        <a:srgbClr val="000000"/>
-                      </a:solidFill>
-                      <a:prstDash val="solid"/>
-                      <a:round/>
-                      <a:headEnd type="none" w="med" len="med"/>
-                      <a:tailEnd type="none" w="med" len="med"/>
-                    </a:lnR>
-                    <a:lnT w="12700" cap="flat" cmpd="sng" algn="ctr">
-                      <a:solidFill>
-                        <a:srgbClr val="000000"/>
-                      </a:solidFill>
-                      <a:prstDash val="solid"/>
-                      <a:round/>
-                      <a:headEnd type="none" w="med" len="med"/>
-                      <a:tailEnd type="none" w="med" len="med"/>
-                    </a:lnT>
-                    <a:lnB w="12700" cap="flat" cmpd="sng" algn="ctr">
-                      <a:solidFill>
-                        <a:srgbClr val="000000"/>
-                      </a:solidFill>
-                      <a:prstDash val="solid"/>
-                      <a:round/>
-                      <a:headEnd type="none" w="med" len="med"/>
-                      <a:tailEnd type="none" w="med" len="med"/>
-                    </a:lnB>
-                  </a:tcPr>
-                </a:tc>
-              </a:tr>
-            </a:tbl>
-          </a:graphicData>
-        </a:graphic>
-      </p:graphicFrame>
-      <p:sp>
-        <p:nvSpPr>
-          <p:cNvPr id="6" name="Text 3"/>
+      <p:sp>
+        <p:nvSpPr>
+          <p:cNvPr id="5" name="Shape 3"/>
+          <p:cNvSpPr/>
+          <p:nvPr/>
+        </p:nvSpPr>
+        <p:spPr>
+          <a:xfrm>
+            <a:off x="1051560" y="1188720"/>
+            <a:ext cx="7040880" cy="4443984"/>
+          </a:xfrm>
+          <a:prstGeom prst="rect">
+            <a:avLst/>
+          </a:prstGeom>
+          <a:solidFill>
+            <a:srgbClr val="FFFFFF"/>
+          </a:solidFill>
+          <a:ln w="12700">
+            <a:solidFill>
+              <a:srgbClr val="000000"/>
+            </a:solidFill>
+            <a:prstDash val="solid"/>
+          </a:ln>
+        </p:spPr>
+      </p:sp>
+      <p:sp>
+        <p:nvSpPr>
+          <p:cNvPr id="6" name="Shape 4"/>
+          <p:cNvSpPr/>
+          <p:nvPr/>
+        </p:nvSpPr>
+        <p:spPr>
+          <a:xfrm>
+            <a:off x="1069848" y="2944368"/>
+            <a:ext cx="7004304" cy="1609344"/>
+          </a:xfrm>
+          <a:prstGeom prst="rect">
+            <a:avLst/>
+          </a:prstGeom>
+          <a:solidFill>
+            <a:srgbClr val="EFF9FC"/>
+          </a:solidFill>
+          <a:ln w="6350">
+            <a:solidFill>
+              <a:srgbClr val="EFF9FC"/>
+            </a:solidFill>
+            <a:prstDash val="solid"/>
+          </a:ln>
+        </p:spPr>
+      </p:sp>
+      <p:sp>
+        <p:nvSpPr>
+          <p:cNvPr id="7" name="Text 5"/>
           <p:cNvSpPr txBox="1"/>
           <p:nvPr/>
         </p:nvSpPr>
         <p:spPr>
           <a:xfrm>
-            <a:off x="1005840" y="5669280"/>
-            <a:ext cx="7132320" cy="256032"/>
+            <a:off x="1325880" y="1389888"/>
+            <a:ext cx="502920" cy="365760"/>
+          </a:xfrm>
+          <a:prstGeom prst="rect">
+            <a:avLst/>
+          </a:prstGeom>
+          <a:noFill/>
+          <a:ln/>
+        </p:spPr>
+        <p:txBody>
+          <a:bodyPr wrap="square" lIns="0" tIns="0" rIns="0" bIns="0" rtlCol="0" anchor="ctr"/>
+          <a:lstStyle/>
+          <a:p>
+            <a:pPr eaLnBrk="0" latinLnBrk="0" algn="r" indent="0" marL="0">
+              <a:buNone/>
+            </a:pPr>
+            <a:r>
+              <a:rPr lang="en-US" sz="1600" dirty="0">
+                <a:solidFill>
+                  <a:srgbClr val="000000"/>
+                </a:solidFill>
+                <a:latin typeface="맑은 고딕" pitchFamily="34" charset="0"/>
+                <a:ea typeface="맑은 고딕" pitchFamily="34" charset="-122"/>
+                <a:cs typeface="맑은 고딕" pitchFamily="34" charset="-120"/>
+              </a:rPr>
+              <a:t>1.</a:t>
+            </a:r>
+            <a:endParaRPr lang="en-US" sz="1600" dirty="0"/>
+          </a:p>
+        </p:txBody>
+      </p:sp>
+      <p:sp>
+        <p:nvSpPr>
+          <p:cNvPr id="8" name="Text 6"/>
+          <p:cNvSpPr txBox="1"/>
+          <p:nvPr/>
+        </p:nvSpPr>
+        <p:spPr>
+          <a:xfrm>
+            <a:off x="1965960" y="1389888"/>
+            <a:ext cx="4023360" cy="365760"/>
+          </a:xfrm>
+          <a:prstGeom prst="rect">
+            <a:avLst/>
+          </a:prstGeom>
+          <a:noFill/>
+          <a:ln/>
+        </p:spPr>
+        <p:txBody>
+          <a:bodyPr wrap="square" lIns="0" tIns="0" rIns="0" bIns="0" rtlCol="0" anchor="ctr"/>
+          <a:lstStyle/>
+          <a:p>
+            <a:pPr eaLnBrk="0" latinLnBrk="0" indent="0" marL="0">
+              <a:buNone/>
+            </a:pPr>
+            <a:r>
+              <a:rPr lang="en-US" sz="1600" dirty="0">
+                <a:solidFill>
+                  <a:srgbClr val="000000"/>
+                </a:solidFill>
+                <a:latin typeface="맑은 고딕" pitchFamily="34" charset="0"/>
+                <a:ea typeface="맑은 고딕" pitchFamily="34" charset="-122"/>
+                <a:cs typeface="맑은 고딕" pitchFamily="34" charset="-120"/>
+              </a:rPr>
+              <a:t>채용 인원 및 채용 사유</a:t>
+            </a:r>
+            <a:endParaRPr lang="en-US" sz="1600" dirty="0"/>
+          </a:p>
+        </p:txBody>
+      </p:sp>
+      <p:sp>
+        <p:nvSpPr>
+          <p:cNvPr id="9" name="Text 7"/>
+          <p:cNvSpPr txBox="1"/>
+          <p:nvPr/>
+        </p:nvSpPr>
+        <p:spPr>
+          <a:xfrm>
+            <a:off x="1325880" y="1792224"/>
+            <a:ext cx="502920" cy="365760"/>
+          </a:xfrm>
+          <a:prstGeom prst="rect">
+            <a:avLst/>
+          </a:prstGeom>
+          <a:noFill/>
+          <a:ln/>
+        </p:spPr>
+        <p:txBody>
+          <a:bodyPr wrap="square" lIns="0" tIns="0" rIns="0" bIns="0" rtlCol="0" anchor="ctr"/>
+          <a:lstStyle/>
+          <a:p>
+            <a:pPr eaLnBrk="0" latinLnBrk="0" algn="r" indent="0" marL="0">
+              <a:buNone/>
+            </a:pPr>
+            <a:r>
+              <a:rPr lang="en-US" sz="1600" dirty="0">
+                <a:solidFill>
+                  <a:srgbClr val="000000"/>
+                </a:solidFill>
+                <a:latin typeface="맑은 고딕" pitchFamily="34" charset="0"/>
+                <a:ea typeface="맑은 고딕" pitchFamily="34" charset="-122"/>
+                <a:cs typeface="맑은 고딕" pitchFamily="34" charset="-120"/>
+              </a:rPr>
+              <a:t>2.</a:t>
+            </a:r>
+            <a:endParaRPr lang="en-US" sz="1600" dirty="0"/>
+          </a:p>
+        </p:txBody>
+      </p:sp>
+      <p:sp>
+        <p:nvSpPr>
+          <p:cNvPr id="10" name="Text 8"/>
+          <p:cNvSpPr txBox="1"/>
+          <p:nvPr/>
+        </p:nvSpPr>
+        <p:spPr>
+          <a:xfrm>
+            <a:off x="1965960" y="1792224"/>
+            <a:ext cx="4023360" cy="365760"/>
+          </a:xfrm>
+          <a:prstGeom prst="rect">
+            <a:avLst/>
+          </a:prstGeom>
+          <a:noFill/>
+          <a:ln/>
+        </p:spPr>
+        <p:txBody>
+          <a:bodyPr wrap="square" lIns="0" tIns="0" rIns="0" bIns="0" rtlCol="0" anchor="ctr"/>
+          <a:lstStyle/>
+          <a:p>
+            <a:pPr eaLnBrk="0" latinLnBrk="0" indent="0" marL="0">
+              <a:buNone/>
+            </a:pPr>
+            <a:r>
+              <a:rPr lang="en-US" sz="1600" dirty="0">
+                <a:solidFill>
+                  <a:srgbClr val="000000"/>
+                </a:solidFill>
+                <a:latin typeface="맑은 고딕" pitchFamily="34" charset="0"/>
+                <a:ea typeface="맑은 고딕" pitchFamily="34" charset="-122"/>
+                <a:cs typeface="맑은 고딕" pitchFamily="34" charset="-120"/>
+              </a:rPr>
+              <a:t>직원 현황</a:t>
+            </a:r>
+            <a:endParaRPr lang="en-US" sz="1600" dirty="0"/>
+          </a:p>
+        </p:txBody>
+      </p:sp>
+      <p:sp>
+        <p:nvSpPr>
+          <p:cNvPr id="11" name="Text 9"/>
+          <p:cNvSpPr txBox="1"/>
+          <p:nvPr/>
+        </p:nvSpPr>
+        <p:spPr>
+          <a:xfrm>
+            <a:off x="1325880" y="2194560"/>
+            <a:ext cx="502920" cy="365760"/>
+          </a:xfrm>
+          <a:prstGeom prst="rect">
+            <a:avLst/>
+          </a:prstGeom>
+          <a:noFill/>
+          <a:ln/>
+        </p:spPr>
+        <p:txBody>
+          <a:bodyPr wrap="square" lIns="0" tIns="0" rIns="0" bIns="0" rtlCol="0" anchor="ctr"/>
+          <a:lstStyle/>
+          <a:p>
+            <a:pPr eaLnBrk="0" latinLnBrk="0" algn="r" indent="0" marL="0">
+              <a:buNone/>
+            </a:pPr>
+            <a:r>
+              <a:rPr lang="en-US" sz="1600" dirty="0">
+                <a:solidFill>
+                  <a:srgbClr val="000000"/>
+                </a:solidFill>
+                <a:latin typeface="맑은 고딕" pitchFamily="34" charset="0"/>
+                <a:ea typeface="맑은 고딕" pitchFamily="34" charset="-122"/>
+                <a:cs typeface="맑은 고딕" pitchFamily="34" charset="-120"/>
+              </a:rPr>
+              <a:t>3.</a:t>
+            </a:r>
+            <a:endParaRPr lang="en-US" sz="1600" dirty="0"/>
+          </a:p>
+        </p:txBody>
+      </p:sp>
+      <p:sp>
+        <p:nvSpPr>
+          <p:cNvPr id="12" name="Text 10"/>
+          <p:cNvSpPr txBox="1"/>
+          <p:nvPr/>
+        </p:nvSpPr>
+        <p:spPr>
+          <a:xfrm>
+            <a:off x="1965960" y="2194560"/>
+            <a:ext cx="4023360" cy="365760"/>
+          </a:xfrm>
+          <a:prstGeom prst="rect">
+            <a:avLst/>
+          </a:prstGeom>
+          <a:noFill/>
+          <a:ln/>
+        </p:spPr>
+        <p:txBody>
+          <a:bodyPr wrap="square" lIns="0" tIns="0" rIns="0" bIns="0" rtlCol="0" anchor="ctr"/>
+          <a:lstStyle/>
+          <a:p>
+            <a:pPr eaLnBrk="0" latinLnBrk="0" indent="0" marL="0">
+              <a:buNone/>
+            </a:pPr>
+            <a:r>
+              <a:rPr lang="en-US" sz="1600" dirty="0">
+                <a:solidFill>
+                  <a:srgbClr val="000000"/>
+                </a:solidFill>
+                <a:latin typeface="맑은 고딕" pitchFamily="34" charset="0"/>
+                <a:ea typeface="맑은 고딕" pitchFamily="34" charset="-122"/>
+                <a:cs typeface="맑은 고딕" pitchFamily="34" charset="-120"/>
+              </a:rPr>
+              <a:t>채용 계획</a:t>
+            </a:r>
+            <a:endParaRPr lang="en-US" sz="1600" dirty="0"/>
+          </a:p>
+        </p:txBody>
+      </p:sp>
+      <p:sp>
+        <p:nvSpPr>
+          <p:cNvPr id="13" name="Text 11"/>
+          <p:cNvSpPr txBox="1"/>
+          <p:nvPr/>
+        </p:nvSpPr>
+        <p:spPr>
+          <a:xfrm>
+            <a:off x="1325880" y="2596896"/>
+            <a:ext cx="502920" cy="365760"/>
+          </a:xfrm>
+          <a:prstGeom prst="rect">
+            <a:avLst/>
+          </a:prstGeom>
+          <a:noFill/>
+          <a:ln/>
+        </p:spPr>
+        <p:txBody>
+          <a:bodyPr wrap="square" lIns="0" tIns="0" rIns="0" bIns="0" rtlCol="0" anchor="ctr"/>
+          <a:lstStyle/>
+          <a:p>
+            <a:pPr eaLnBrk="0" latinLnBrk="0" algn="r" indent="0" marL="0">
+              <a:buNone/>
+            </a:pPr>
+            <a:r>
+              <a:rPr lang="en-US" sz="1600" dirty="0">
+                <a:solidFill>
+                  <a:srgbClr val="000000"/>
+                </a:solidFill>
+                <a:latin typeface="맑은 고딕" pitchFamily="34" charset="0"/>
+                <a:ea typeface="맑은 고딕" pitchFamily="34" charset="-122"/>
+                <a:cs typeface="맑은 고딕" pitchFamily="34" charset="-120"/>
+              </a:rPr>
+              <a:t>4.</a:t>
+            </a:r>
+            <a:endParaRPr lang="en-US" sz="1600" dirty="0"/>
+          </a:p>
+        </p:txBody>
+      </p:sp>
+      <p:sp>
+        <p:nvSpPr>
+          <p:cNvPr id="14" name="Text 12"/>
+          <p:cNvSpPr txBox="1"/>
+          <p:nvPr/>
+        </p:nvSpPr>
+        <p:spPr>
+          <a:xfrm>
+            <a:off x="1965960" y="2596896"/>
+            <a:ext cx="4023360" cy="365760"/>
+          </a:xfrm>
+          <a:prstGeom prst="rect">
+            <a:avLst/>
+          </a:prstGeom>
+          <a:noFill/>
+          <a:ln/>
+        </p:spPr>
+        <p:txBody>
+          <a:bodyPr wrap="square" lIns="0" tIns="0" rIns="0" bIns="0" rtlCol="0" anchor="ctr"/>
+          <a:lstStyle/>
+          <a:p>
+            <a:pPr eaLnBrk="0" latinLnBrk="0" indent="0" marL="0">
+              <a:buNone/>
+            </a:pPr>
+            <a:r>
+              <a:rPr lang="en-US" sz="1600" dirty="0">
+                <a:solidFill>
+                  <a:srgbClr val="000000"/>
+                </a:solidFill>
+                <a:latin typeface="맑은 고딕" pitchFamily="34" charset="0"/>
+                <a:ea typeface="맑은 고딕" pitchFamily="34" charset="-122"/>
+                <a:cs typeface="맑은 고딕" pitchFamily="34" charset="-120"/>
+              </a:rPr>
+              <a:t>전형 절차</a:t>
+            </a:r>
+            <a:endParaRPr lang="en-US" sz="1600" dirty="0"/>
+          </a:p>
+        </p:txBody>
+      </p:sp>
+      <p:sp>
+        <p:nvSpPr>
+          <p:cNvPr id="15" name="Text 13"/>
+          <p:cNvSpPr txBox="1"/>
+          <p:nvPr/>
+        </p:nvSpPr>
+        <p:spPr>
+          <a:xfrm>
+            <a:off x="1325880" y="2999232"/>
+            <a:ext cx="502920" cy="365760"/>
+          </a:xfrm>
+          <a:prstGeom prst="rect">
+            <a:avLst/>
+          </a:prstGeom>
+          <a:noFill/>
+          <a:ln/>
+        </p:spPr>
+        <p:txBody>
+          <a:bodyPr wrap="square" lIns="0" tIns="0" rIns="0" bIns="0" rtlCol="0" anchor="ctr"/>
+          <a:lstStyle/>
+          <a:p>
+            <a:pPr eaLnBrk="0" latinLnBrk="0" algn="r" indent="0" marL="0">
+              <a:buNone/>
+            </a:pPr>
+            <a:r>
+              <a:rPr lang="en-US" sz="1600" dirty="0">
+                <a:solidFill>
+                  <a:srgbClr val="000000"/>
+                </a:solidFill>
+                <a:latin typeface="맑은 고딕" pitchFamily="34" charset="0"/>
+                <a:ea typeface="맑은 고딕" pitchFamily="34" charset="-122"/>
+                <a:cs typeface="맑은 고딕" pitchFamily="34" charset="-120"/>
+              </a:rPr>
+              <a:t>5.</a:t>
+            </a:r>
+            <a:endParaRPr lang="en-US" sz="1600" dirty="0"/>
+          </a:p>
+        </p:txBody>
+      </p:sp>
+      <p:sp>
+        <p:nvSpPr>
+          <p:cNvPr id="16" name="Text 14"/>
+          <p:cNvSpPr txBox="1"/>
+          <p:nvPr/>
+        </p:nvSpPr>
+        <p:spPr>
+          <a:xfrm>
+            <a:off x="1965960" y="2999232"/>
+            <a:ext cx="4023360" cy="365760"/>
+          </a:xfrm>
+          <a:prstGeom prst="rect">
+            <a:avLst/>
+          </a:prstGeom>
+          <a:noFill/>
+          <a:ln/>
+        </p:spPr>
+        <p:txBody>
+          <a:bodyPr wrap="square" lIns="0" tIns="0" rIns="0" bIns="0" rtlCol="0" anchor="ctr"/>
+          <a:lstStyle/>
+          <a:p>
+            <a:pPr eaLnBrk="0" latinLnBrk="0" indent="0" marL="0">
+              <a:buNone/>
+            </a:pPr>
+            <a:r>
+              <a:rPr lang="en-US" sz="1600" dirty="0">
+                <a:solidFill>
+                  <a:srgbClr val="000000"/>
+                </a:solidFill>
+                <a:latin typeface="맑은 고딕" pitchFamily="34" charset="0"/>
+                <a:ea typeface="맑은 고딕" pitchFamily="34" charset="-122"/>
+                <a:cs typeface="맑은 고딕" pitchFamily="34" charset="-120"/>
+              </a:rPr>
+              <a:t>지원서 접수</a:t>
+            </a:r>
+            <a:endParaRPr lang="en-US" sz="1600" dirty="0"/>
+          </a:p>
+        </p:txBody>
+      </p:sp>
+      <p:sp>
+        <p:nvSpPr>
+          <p:cNvPr id="17" name="Text 15"/>
+          <p:cNvSpPr txBox="1"/>
+          <p:nvPr/>
+        </p:nvSpPr>
+        <p:spPr>
+          <a:xfrm>
+            <a:off x="6035040" y="2999232"/>
+            <a:ext cx="1828800" cy="365760"/>
+          </a:xfrm>
+          <a:prstGeom prst="rect">
+            <a:avLst/>
+          </a:prstGeom>
+          <a:noFill/>
+          <a:ln/>
+        </p:spPr>
+        <p:txBody>
+          <a:bodyPr wrap="square" lIns="0" tIns="0" rIns="0" bIns="0" rtlCol="0" anchor="ctr"/>
+          <a:lstStyle/>
+          <a:p>
+            <a:pPr eaLnBrk="0" latinLnBrk="0" indent="0" marL="0">
+              <a:buNone/>
+            </a:pPr>
+            <a:r>
+              <a:rPr lang="en-US" sz="1150" dirty="0">
+                <a:solidFill>
+                  <a:srgbClr val="404040"/>
+                </a:solidFill>
+                <a:latin typeface="맑은 고딕" pitchFamily="34" charset="0"/>
+                <a:ea typeface="맑은 고딕" pitchFamily="34" charset="-122"/>
+                <a:cs typeface="맑은 고딕" pitchFamily="34" charset="-120"/>
+              </a:rPr>
+              <a:t>[ 전형 1단계 ]</a:t>
+            </a:r>
+            <a:endParaRPr lang="en-US" sz="1150" dirty="0"/>
+          </a:p>
+        </p:txBody>
+      </p:sp>
+      <p:sp>
+        <p:nvSpPr>
+          <p:cNvPr id="18" name="Text 16"/>
+          <p:cNvSpPr txBox="1"/>
+          <p:nvPr/>
+        </p:nvSpPr>
+        <p:spPr>
+          <a:xfrm>
+            <a:off x="1325880" y="3401568"/>
+            <a:ext cx="502920" cy="365760"/>
+          </a:xfrm>
+          <a:prstGeom prst="rect">
+            <a:avLst/>
+          </a:prstGeom>
+          <a:noFill/>
+          <a:ln/>
+        </p:spPr>
+        <p:txBody>
+          <a:bodyPr wrap="square" lIns="0" tIns="0" rIns="0" bIns="0" rtlCol="0" anchor="ctr"/>
+          <a:lstStyle/>
+          <a:p>
+            <a:pPr eaLnBrk="0" latinLnBrk="0" algn="r" indent="0" marL="0">
+              <a:buNone/>
+            </a:pPr>
+            <a:r>
+              <a:rPr lang="en-US" sz="1600" dirty="0">
+                <a:solidFill>
+                  <a:srgbClr val="000000"/>
+                </a:solidFill>
+                <a:latin typeface="맑은 고딕" pitchFamily="34" charset="0"/>
+                <a:ea typeface="맑은 고딕" pitchFamily="34" charset="-122"/>
+                <a:cs typeface="맑은 고딕" pitchFamily="34" charset="-120"/>
+              </a:rPr>
+              <a:t>6.</a:t>
+            </a:r>
+            <a:endParaRPr lang="en-US" sz="1600" dirty="0"/>
+          </a:p>
+        </p:txBody>
+      </p:sp>
+      <p:sp>
+        <p:nvSpPr>
+          <p:cNvPr id="19" name="Text 17"/>
+          <p:cNvSpPr txBox="1"/>
+          <p:nvPr/>
+        </p:nvSpPr>
+        <p:spPr>
+          <a:xfrm>
+            <a:off x="1965960" y="3401568"/>
+            <a:ext cx="4023360" cy="365760"/>
+          </a:xfrm>
+          <a:prstGeom prst="rect">
+            <a:avLst/>
+          </a:prstGeom>
+          <a:noFill/>
+          <a:ln/>
+        </p:spPr>
+        <p:txBody>
+          <a:bodyPr wrap="square" lIns="0" tIns="0" rIns="0" bIns="0" rtlCol="0" anchor="ctr"/>
+          <a:lstStyle/>
+          <a:p>
+            <a:pPr eaLnBrk="0" latinLnBrk="0" indent="0" marL="0">
+              <a:buNone/>
+            </a:pPr>
+            <a:r>
+              <a:rPr lang="en-US" sz="1600" dirty="0">
+                <a:solidFill>
+                  <a:srgbClr val="000000"/>
+                </a:solidFill>
+                <a:latin typeface="맑은 고딕" pitchFamily="34" charset="0"/>
+                <a:ea typeface="맑은 고딕" pitchFamily="34" charset="-122"/>
+                <a:cs typeface="맑은 고딕" pitchFamily="34" charset="-120"/>
+              </a:rPr>
+              <a:t>서류 전형 (1차)</a:t>
+            </a:r>
+            <a:endParaRPr lang="en-US" sz="1600" dirty="0"/>
+          </a:p>
+        </p:txBody>
+      </p:sp>
+      <p:sp>
+        <p:nvSpPr>
+          <p:cNvPr id="20" name="Text 18"/>
+          <p:cNvSpPr txBox="1"/>
+          <p:nvPr/>
+        </p:nvSpPr>
+        <p:spPr>
+          <a:xfrm>
+            <a:off x="6035040" y="3401568"/>
+            <a:ext cx="1828800" cy="365760"/>
+          </a:xfrm>
+          <a:prstGeom prst="rect">
+            <a:avLst/>
+          </a:prstGeom>
+          <a:noFill/>
+          <a:ln/>
+        </p:spPr>
+        <p:txBody>
+          <a:bodyPr wrap="square" lIns="0" tIns="0" rIns="0" bIns="0" rtlCol="0" anchor="ctr"/>
+          <a:lstStyle/>
+          <a:p>
+            <a:pPr eaLnBrk="0" latinLnBrk="0" indent="0" marL="0">
+              <a:buNone/>
+            </a:pPr>
+            <a:r>
+              <a:rPr lang="en-US" sz="1150" dirty="0">
+                <a:solidFill>
+                  <a:srgbClr val="404040"/>
+                </a:solidFill>
+                <a:latin typeface="맑은 고딕" pitchFamily="34" charset="0"/>
+                <a:ea typeface="맑은 고딕" pitchFamily="34" charset="-122"/>
+                <a:cs typeface="맑은 고딕" pitchFamily="34" charset="-120"/>
+              </a:rPr>
+              <a:t>[ 전형 2단계 ]</a:t>
+            </a:r>
+            <a:endParaRPr lang="en-US" sz="1150" dirty="0"/>
+          </a:p>
+        </p:txBody>
+      </p:sp>
+      <p:sp>
+        <p:nvSpPr>
+          <p:cNvPr id="21" name="Text 19"/>
+          <p:cNvSpPr txBox="1"/>
+          <p:nvPr/>
+        </p:nvSpPr>
+        <p:spPr>
+          <a:xfrm>
+            <a:off x="1325880" y="3803904"/>
+            <a:ext cx="502920" cy="365760"/>
+          </a:xfrm>
+          <a:prstGeom prst="rect">
+            <a:avLst/>
+          </a:prstGeom>
+          <a:noFill/>
+          <a:ln/>
+        </p:spPr>
+        <p:txBody>
+          <a:bodyPr wrap="square" lIns="0" tIns="0" rIns="0" bIns="0" rtlCol="0" anchor="ctr"/>
+          <a:lstStyle/>
+          <a:p>
+            <a:pPr eaLnBrk="0" latinLnBrk="0" algn="r" indent="0" marL="0">
+              <a:buNone/>
+            </a:pPr>
+            <a:r>
+              <a:rPr lang="en-US" sz="1600" dirty="0">
+                <a:solidFill>
+                  <a:srgbClr val="000000"/>
+                </a:solidFill>
+                <a:latin typeface="맑은 고딕" pitchFamily="34" charset="0"/>
+                <a:ea typeface="맑은 고딕" pitchFamily="34" charset="-122"/>
+                <a:cs typeface="맑은 고딕" pitchFamily="34" charset="-120"/>
+              </a:rPr>
+              <a:t>7.</a:t>
+            </a:r>
+            <a:endParaRPr lang="en-US" sz="1600" dirty="0"/>
+          </a:p>
+        </p:txBody>
+      </p:sp>
+      <p:sp>
+        <p:nvSpPr>
+          <p:cNvPr id="22" name="Text 20"/>
+          <p:cNvSpPr txBox="1"/>
+          <p:nvPr/>
+        </p:nvSpPr>
+        <p:spPr>
+          <a:xfrm>
+            <a:off x="1965960" y="3803904"/>
+            <a:ext cx="4023360" cy="365760"/>
+          </a:xfrm>
+          <a:prstGeom prst="rect">
+            <a:avLst/>
+          </a:prstGeom>
+          <a:noFill/>
+          <a:ln/>
+        </p:spPr>
+        <p:txBody>
+          <a:bodyPr wrap="square" lIns="0" tIns="0" rIns="0" bIns="0" rtlCol="0" anchor="ctr"/>
+          <a:lstStyle/>
+          <a:p>
+            <a:pPr eaLnBrk="0" latinLnBrk="0" indent="0" marL="0">
+              <a:buNone/>
+            </a:pPr>
+            <a:r>
+              <a:rPr lang="en-US" sz="1600" dirty="0">
+                <a:solidFill>
+                  <a:srgbClr val="000000"/>
+                </a:solidFill>
+                <a:latin typeface="맑은 고딕" pitchFamily="34" charset="0"/>
+                <a:ea typeface="맑은 고딕" pitchFamily="34" charset="-122"/>
+                <a:cs typeface="맑은 고딕" pitchFamily="34" charset="-120"/>
+              </a:rPr>
+              <a:t>업무적성 및 심층면접 (2차)</a:t>
+            </a:r>
+            <a:endParaRPr lang="en-US" sz="1600" dirty="0"/>
+          </a:p>
+        </p:txBody>
+      </p:sp>
+      <p:sp>
+        <p:nvSpPr>
+          <p:cNvPr id="23" name="Text 21"/>
+          <p:cNvSpPr txBox="1"/>
+          <p:nvPr/>
+        </p:nvSpPr>
+        <p:spPr>
+          <a:xfrm>
+            <a:off x="6035040" y="3803904"/>
+            <a:ext cx="1828800" cy="365760"/>
+          </a:xfrm>
+          <a:prstGeom prst="rect">
+            <a:avLst/>
+          </a:prstGeom>
+          <a:noFill/>
+          <a:ln/>
+        </p:spPr>
+        <p:txBody>
+          <a:bodyPr wrap="square" lIns="0" tIns="0" rIns="0" bIns="0" rtlCol="0" anchor="ctr"/>
+          <a:lstStyle/>
+          <a:p>
+            <a:pPr eaLnBrk="0" latinLnBrk="0" indent="0" marL="0">
+              <a:buNone/>
+            </a:pPr>
+            <a:r>
+              <a:rPr lang="en-US" sz="1150" dirty="0">
+                <a:solidFill>
+                  <a:srgbClr val="404040"/>
+                </a:solidFill>
+                <a:latin typeface="맑은 고딕" pitchFamily="34" charset="0"/>
+                <a:ea typeface="맑은 고딕" pitchFamily="34" charset="-122"/>
+                <a:cs typeface="맑은 고딕" pitchFamily="34" charset="-120"/>
+              </a:rPr>
+              <a:t>[ 전형 3단계 ]</a:t>
+            </a:r>
+            <a:endParaRPr lang="en-US" sz="1150" dirty="0"/>
+          </a:p>
+        </p:txBody>
+      </p:sp>
+      <p:sp>
+        <p:nvSpPr>
+          <p:cNvPr id="24" name="Text 22"/>
+          <p:cNvSpPr txBox="1"/>
+          <p:nvPr/>
+        </p:nvSpPr>
+        <p:spPr>
+          <a:xfrm>
+            <a:off x="1325880" y="4206240"/>
+            <a:ext cx="502920" cy="365760"/>
+          </a:xfrm>
+          <a:prstGeom prst="rect">
+            <a:avLst/>
+          </a:prstGeom>
+          <a:noFill/>
+          <a:ln/>
+        </p:spPr>
+        <p:txBody>
+          <a:bodyPr wrap="square" lIns="0" tIns="0" rIns="0" bIns="0" rtlCol="0" anchor="ctr"/>
+          <a:lstStyle/>
+          <a:p>
+            <a:pPr eaLnBrk="0" latinLnBrk="0" algn="r" indent="0" marL="0">
+              <a:buNone/>
+            </a:pPr>
+            <a:r>
+              <a:rPr lang="en-US" sz="1600" dirty="0">
+                <a:solidFill>
+                  <a:srgbClr val="000000"/>
+                </a:solidFill>
+                <a:latin typeface="맑은 고딕" pitchFamily="34" charset="0"/>
+                <a:ea typeface="맑은 고딕" pitchFamily="34" charset="-122"/>
+                <a:cs typeface="맑은 고딕" pitchFamily="34" charset="-120"/>
+              </a:rPr>
+              <a:t>8.</a:t>
+            </a:r>
+            <a:endParaRPr lang="en-US" sz="1600" dirty="0"/>
+          </a:p>
+        </p:txBody>
+      </p:sp>
+      <p:sp>
+        <p:nvSpPr>
+          <p:cNvPr id="25" name="Text 23"/>
+          <p:cNvSpPr txBox="1"/>
+          <p:nvPr/>
+        </p:nvSpPr>
+        <p:spPr>
+          <a:xfrm>
+            <a:off x="1965960" y="4206240"/>
+            <a:ext cx="4023360" cy="365760"/>
+          </a:xfrm>
+          <a:prstGeom prst="rect">
+            <a:avLst/>
+          </a:prstGeom>
+          <a:noFill/>
+          <a:ln/>
+        </p:spPr>
+        <p:txBody>
+          <a:bodyPr wrap="square" lIns="0" tIns="0" rIns="0" bIns="0" rtlCol="0" anchor="ctr"/>
+          <a:lstStyle/>
+          <a:p>
+            <a:pPr eaLnBrk="0" latinLnBrk="0" indent="0" marL="0">
+              <a:buNone/>
+            </a:pPr>
+            <a:r>
+              <a:rPr lang="en-US" sz="1600" dirty="0">
+                <a:solidFill>
+                  <a:srgbClr val="000000"/>
+                </a:solidFill>
+                <a:latin typeface="맑은 고딕" pitchFamily="34" charset="0"/>
+                <a:ea typeface="맑은 고딕" pitchFamily="34" charset="-122"/>
+                <a:cs typeface="맑은 고딕" pitchFamily="34" charset="-120"/>
+              </a:rPr>
+              <a:t>결격사유 검증</a:t>
+            </a:r>
+            <a:endParaRPr lang="en-US" sz="1600" dirty="0"/>
+          </a:p>
+        </p:txBody>
+      </p:sp>
+      <p:sp>
+        <p:nvSpPr>
+          <p:cNvPr id="26" name="Text 24"/>
+          <p:cNvSpPr txBox="1"/>
+          <p:nvPr/>
+        </p:nvSpPr>
+        <p:spPr>
+          <a:xfrm>
+            <a:off x="6035040" y="4206240"/>
+            <a:ext cx="1828800" cy="365760"/>
+          </a:xfrm>
+          <a:prstGeom prst="rect">
+            <a:avLst/>
+          </a:prstGeom>
+          <a:noFill/>
+          <a:ln/>
+        </p:spPr>
+        <p:txBody>
+          <a:bodyPr wrap="square" lIns="0" tIns="0" rIns="0" bIns="0" rtlCol="0" anchor="ctr"/>
+          <a:lstStyle/>
+          <a:p>
+            <a:pPr eaLnBrk="0" latinLnBrk="0" indent="0" marL="0">
+              <a:buNone/>
+            </a:pPr>
+            <a:r>
+              <a:rPr lang="en-US" sz="1150" dirty="0">
+                <a:solidFill>
+                  <a:srgbClr val="404040"/>
+                </a:solidFill>
+                <a:latin typeface="맑은 고딕" pitchFamily="34" charset="0"/>
+                <a:ea typeface="맑은 고딕" pitchFamily="34" charset="-122"/>
+                <a:cs typeface="맑은 고딕" pitchFamily="34" charset="-120"/>
+              </a:rPr>
+              <a:t>[ 전형 4단계 ]</a:t>
+            </a:r>
+            <a:endParaRPr lang="en-US" sz="1150" dirty="0"/>
+          </a:p>
+        </p:txBody>
+      </p:sp>
+      <p:sp>
+        <p:nvSpPr>
+          <p:cNvPr id="27" name="Text 25"/>
+          <p:cNvSpPr txBox="1"/>
+          <p:nvPr/>
+        </p:nvSpPr>
+        <p:spPr>
+          <a:xfrm>
+            <a:off x="1325880" y="4608576"/>
+            <a:ext cx="502920" cy="365760"/>
+          </a:xfrm>
+          <a:prstGeom prst="rect">
+            <a:avLst/>
+          </a:prstGeom>
+          <a:noFill/>
+          <a:ln/>
+        </p:spPr>
+        <p:txBody>
+          <a:bodyPr wrap="square" lIns="0" tIns="0" rIns="0" bIns="0" rtlCol="0" anchor="ctr"/>
+          <a:lstStyle/>
+          <a:p>
+            <a:pPr eaLnBrk="0" latinLnBrk="0" algn="r" indent="0" marL="0">
+              <a:buNone/>
+            </a:pPr>
+            <a:r>
+              <a:rPr lang="en-US" sz="1600" dirty="0">
+                <a:solidFill>
+                  <a:srgbClr val="000000"/>
+                </a:solidFill>
+                <a:latin typeface="맑은 고딕" pitchFamily="34" charset="0"/>
+                <a:ea typeface="맑은 고딕" pitchFamily="34" charset="-122"/>
+                <a:cs typeface="맑은 고딕" pitchFamily="34" charset="-120"/>
+              </a:rPr>
+              <a:t>9.</a:t>
+            </a:r>
+            <a:endParaRPr lang="en-US" sz="1600" dirty="0"/>
+          </a:p>
+        </p:txBody>
+      </p:sp>
+      <p:sp>
+        <p:nvSpPr>
+          <p:cNvPr id="28" name="Text 26"/>
+          <p:cNvSpPr txBox="1"/>
+          <p:nvPr/>
+        </p:nvSpPr>
+        <p:spPr>
+          <a:xfrm>
+            <a:off x="1965960" y="4608576"/>
+            <a:ext cx="4023360" cy="365760"/>
+          </a:xfrm>
+          <a:prstGeom prst="rect">
+            <a:avLst/>
+          </a:prstGeom>
+          <a:noFill/>
+          <a:ln/>
+        </p:spPr>
+        <p:txBody>
+          <a:bodyPr wrap="square" lIns="0" tIns="0" rIns="0" bIns="0" rtlCol="0" anchor="ctr"/>
+          <a:lstStyle/>
+          <a:p>
+            <a:pPr eaLnBrk="0" latinLnBrk="0" indent="0" marL="0">
+              <a:buNone/>
+            </a:pPr>
+            <a:r>
+              <a:rPr lang="en-US" sz="1600" dirty="0">
+                <a:solidFill>
+                  <a:srgbClr val="000000"/>
+                </a:solidFill>
+                <a:latin typeface="맑은 고딕" pitchFamily="34" charset="0"/>
+                <a:ea typeface="맑은 고딕" pitchFamily="34" charset="-122"/>
+                <a:cs typeface="맑은 고딕" pitchFamily="34" charset="-120"/>
+              </a:rPr>
+              <a:t>기타 사항</a:t>
+            </a:r>
+            <a:endParaRPr lang="en-US" sz="1600" dirty="0"/>
+          </a:p>
+        </p:txBody>
+      </p:sp>
+      <p:sp>
+        <p:nvSpPr>
+          <p:cNvPr id="29" name="Text 27"/>
+          <p:cNvSpPr txBox="1"/>
+          <p:nvPr/>
+        </p:nvSpPr>
+        <p:spPr>
+          <a:xfrm>
+            <a:off x="1325880" y="5010912"/>
+            <a:ext cx="502920" cy="365760"/>
+          </a:xfrm>
+          <a:prstGeom prst="rect">
+            <a:avLst/>
+          </a:prstGeom>
+          <a:noFill/>
+          <a:ln/>
+        </p:spPr>
+        <p:txBody>
+          <a:bodyPr wrap="square" lIns="0" tIns="0" rIns="0" bIns="0" rtlCol="0" anchor="ctr"/>
+          <a:lstStyle/>
+          <a:p>
+            <a:pPr eaLnBrk="0" latinLnBrk="0" algn="r" indent="0" marL="0">
+              <a:buNone/>
+            </a:pPr>
+            <a:r>
+              <a:rPr lang="en-US" sz="1600" dirty="0">
+                <a:solidFill>
+                  <a:srgbClr val="000000"/>
+                </a:solidFill>
+                <a:latin typeface="맑은 고딕" pitchFamily="34" charset="0"/>
+                <a:ea typeface="맑은 고딕" pitchFamily="34" charset="-122"/>
+                <a:cs typeface="맑은 고딕" pitchFamily="34" charset="-120"/>
+              </a:rPr>
+              <a:t>10.</a:t>
+            </a:r>
+            <a:endParaRPr lang="en-US" sz="1600" dirty="0"/>
+          </a:p>
+        </p:txBody>
+      </p:sp>
+      <p:sp>
+        <p:nvSpPr>
+          <p:cNvPr id="30" name="Text 28"/>
+          <p:cNvSpPr txBox="1"/>
+          <p:nvPr/>
+        </p:nvSpPr>
+        <p:spPr>
+          <a:xfrm>
+            <a:off x="1965960" y="5010912"/>
+            <a:ext cx="4023360" cy="365760"/>
+          </a:xfrm>
+          <a:prstGeom prst="rect">
+            <a:avLst/>
+          </a:prstGeom>
+          <a:noFill/>
+          <a:ln/>
+        </p:spPr>
+        <p:txBody>
+          <a:bodyPr wrap="square" lIns="0" tIns="0" rIns="0" bIns="0" rtlCol="0" anchor="ctr"/>
+          <a:lstStyle/>
+          <a:p>
+            <a:pPr eaLnBrk="0" latinLnBrk="0" indent="0" marL="0">
+              <a:buNone/>
+            </a:pPr>
+            <a:r>
+              <a:rPr lang="en-US" sz="1600" dirty="0">
+                <a:solidFill>
+                  <a:srgbClr val="000000"/>
+                </a:solidFill>
+                <a:latin typeface="맑은 고딕" pitchFamily="34" charset="0"/>
+                <a:ea typeface="맑은 고딕" pitchFamily="34" charset="-122"/>
+                <a:cs typeface="맑은 고딕" pitchFamily="34" charset="-120"/>
+              </a:rPr>
+              <a:t>채용 계획 요약</a:t>
+            </a:r>
+            <a:endParaRPr lang="en-US" sz="1600" dirty="0"/>
+          </a:p>
+        </p:txBody>
+      </p:sp>
+      <p:sp>
+        <p:nvSpPr>
+          <p:cNvPr id="31" name="Text 29"/>
+          <p:cNvSpPr txBox="1"/>
+          <p:nvPr/>
+        </p:nvSpPr>
+        <p:spPr>
+          <a:xfrm>
+            <a:off x="1051560" y="5760720"/>
+            <a:ext cx="7040880" cy="256032"/>
           </a:xfrm>
           <a:prstGeom prst="rect">
             <a:avLst/>

--- a/docs/2027년_사무직원_채용계획안.pptx
+++ b/docs/2027년_사무직원_채용계획안.pptx
@@ -2735,14 +2735,8 @@
                       <a:headEnd type="none" w="med" len="med"/>
                       <a:tailEnd type="none" w="med" len="med"/>
                     </a:lnT>
-                    <a:lnB w="12700" cap="flat" cmpd="sng" algn="ctr">
-                      <a:solidFill>
-                        <a:srgbClr val="000000"/>
-                      </a:solidFill>
-                      <a:prstDash val="solid"/>
-                      <a:round/>
-                      <a:headEnd type="none" w="med" len="med"/>
-                      <a:tailEnd type="none" w="med" len="med"/>
+                    <a:lnB w="0" cap="flat" cmpd="sng" algn="ctr">
+                      <a:noFill/>
                     </a:lnB>
                   </a:tcPr>
                 </a:tc>
@@ -2800,14 +2794,8 @@
                       <a:headEnd type="none" w="med" len="med"/>
                       <a:tailEnd type="none" w="med" len="med"/>
                     </a:lnT>
-                    <a:lnB w="12700" cap="flat" cmpd="sng" algn="ctr">
-                      <a:solidFill>
-                        <a:srgbClr val="000000"/>
-                      </a:solidFill>
-                      <a:prstDash val="solid"/>
-                      <a:round/>
-                      <a:headEnd type="none" w="med" len="med"/>
-                      <a:tailEnd type="none" w="med" len="med"/>
+                    <a:lnB w="0" cap="flat" cmpd="sng" algn="ctr">
+                      <a:noFill/>
                     </a:lnB>
                   </a:tcPr>
                 </a:tc>
@@ -2858,14 +2846,8 @@
                       <a:headEnd type="none" w="med" len="med"/>
                       <a:tailEnd type="none" w="med" len="med"/>
                     </a:lnR>
-                    <a:lnT w="12700" cap="flat" cmpd="sng" algn="ctr">
-                      <a:solidFill>
-                        <a:srgbClr val="000000"/>
-                      </a:solidFill>
-                      <a:prstDash val="solid"/>
-                      <a:round/>
-                      <a:headEnd type="none" w="med" len="med"/>
-                      <a:tailEnd type="none" w="med" len="med"/>
+                    <a:lnT w="0" cap="flat" cmpd="sng" algn="ctr">
+                      <a:noFill/>
                     </a:lnT>
                     <a:lnB w="12700" cap="flat" cmpd="sng" algn="ctr">
                       <a:solidFill>
@@ -2923,14 +2905,8 @@
                       <a:headEnd type="none" w="med" len="med"/>
                       <a:tailEnd type="none" w="med" len="med"/>
                     </a:lnR>
-                    <a:lnT w="12700" cap="flat" cmpd="sng" algn="ctr">
-                      <a:solidFill>
-                        <a:srgbClr val="000000"/>
-                      </a:solidFill>
-                      <a:prstDash val="solid"/>
-                      <a:round/>
-                      <a:headEnd type="none" w="med" len="med"/>
-                      <a:tailEnd type="none" w="med" len="med"/>
+                    <a:lnT w="0" cap="flat" cmpd="sng" algn="ctr">
+                      <a:noFill/>
                     </a:lnT>
                     <a:lnB w="12700" cap="flat" cmpd="sng" algn="ctr">
                       <a:solidFill>
@@ -2950,7 +2926,30 @@
       </p:graphicFrame>
       <p:sp>
         <p:nvSpPr>
-          <p:cNvPr id="13" name="Text 10"/>
+          <p:cNvPr id="13" name="Shape 10"/>
+          <p:cNvSpPr/>
+          <p:nvPr/>
+        </p:nvSpPr>
+        <p:spPr>
+          <a:xfrm>
+            <a:off x="914400" y="3182112"/>
+            <a:ext cx="7772400" cy="0"/>
+          </a:xfrm>
+          <a:prstGeom prst="line">
+            <a:avLst/>
+          </a:prstGeom>
+          <a:noFill/>
+          <a:ln w="12700">
+            <a:solidFill>
+              <a:srgbClr val="000000"/>
+            </a:solidFill>
+            <a:prstDash val="dash"/>
+          </a:ln>
+        </p:spPr>
+      </p:sp>
+      <p:sp>
+        <p:nvSpPr>
+          <p:cNvPr id="14" name="Text 11"/>
           <p:cNvSpPr txBox="1"/>
           <p:nvPr/>
         </p:nvSpPr>
@@ -3296,14 +3295,8 @@
                       <a:headEnd type="none" w="med" len="med"/>
                       <a:tailEnd type="none" w="med" len="med"/>
                     </a:lnT>
-                    <a:lnB w="12700" cap="flat" cmpd="sng" algn="ctr">
-                      <a:solidFill>
-                        <a:srgbClr val="000000"/>
-                      </a:solidFill>
-                      <a:prstDash val="solid"/>
-                      <a:round/>
-                      <a:headEnd type="none" w="med" len="med"/>
-                      <a:tailEnd type="none" w="med" len="med"/>
+                    <a:lnB w="0" cap="flat" cmpd="sng" algn="ctr">
+                      <a:noFill/>
                     </a:lnB>
                   </a:tcPr>
                 </a:tc>
@@ -3382,14 +3375,8 @@
                       <a:headEnd type="none" w="med" len="med"/>
                       <a:tailEnd type="none" w="med" len="med"/>
                     </a:lnT>
-                    <a:lnB w="12700" cap="flat" cmpd="sng" algn="ctr">
-                      <a:solidFill>
-                        <a:srgbClr val="000000"/>
-                      </a:solidFill>
-                      <a:prstDash val="solid"/>
-                      <a:round/>
-                      <a:headEnd type="none" w="med" len="med"/>
-                      <a:tailEnd type="none" w="med" len="med"/>
+                    <a:lnB w="0" cap="flat" cmpd="sng" algn="ctr">
+                      <a:noFill/>
                     </a:lnB>
                   </a:tcPr>
                 </a:tc>
@@ -3550,14 +3537,8 @@
                       <a:headEnd type="none" w="med" len="med"/>
                       <a:tailEnd type="none" w="med" len="med"/>
                     </a:lnR>
-                    <a:lnT w="12700" cap="flat" cmpd="sng" algn="ctr">
-                      <a:solidFill>
-                        <a:srgbClr val="000000"/>
-                      </a:solidFill>
-                      <a:prstDash val="solid"/>
-                      <a:round/>
-                      <a:headEnd type="none" w="med" len="med"/>
-                      <a:tailEnd type="none" w="med" len="med"/>
+                    <a:lnT w="0" cap="flat" cmpd="sng" algn="ctr">
+                      <a:noFill/>
                     </a:lnT>
                     <a:lnB w="12700" cap="flat" cmpd="sng" algn="ctr">
                       <a:solidFill>
@@ -3615,14 +3596,8 @@
                       <a:headEnd type="none" w="med" len="med"/>
                       <a:tailEnd type="none" w="med" len="med"/>
                     </a:lnR>
-                    <a:lnT w="12700" cap="flat" cmpd="sng" algn="ctr">
-                      <a:solidFill>
-                        <a:srgbClr val="000000"/>
-                      </a:solidFill>
-                      <a:prstDash val="solid"/>
-                      <a:round/>
-                      <a:headEnd type="none" w="med" len="med"/>
-                      <a:tailEnd type="none" w="med" len="med"/>
+                    <a:lnT w="0" cap="flat" cmpd="sng" algn="ctr">
+                      <a:noFill/>
                     </a:lnT>
                     <a:lnB w="12700" cap="flat" cmpd="sng" algn="ctr">
                       <a:solidFill>
@@ -3645,7 +3620,30 @@
       </p:graphicFrame>
       <p:sp>
         <p:nvSpPr>
-          <p:cNvPr id="15" name="Text 11"/>
+          <p:cNvPr id="16" name="Shape 12"/>
+          <p:cNvSpPr/>
+          <p:nvPr/>
+        </p:nvSpPr>
+        <p:spPr>
+          <a:xfrm>
+            <a:off x="914400" y="4956048"/>
+            <a:ext cx="5486400" cy="0"/>
+          </a:xfrm>
+          <a:prstGeom prst="line">
+            <a:avLst/>
+          </a:prstGeom>
+          <a:noFill/>
+          <a:ln w="12700">
+            <a:solidFill>
+              <a:srgbClr val="000000"/>
+            </a:solidFill>
+            <a:prstDash val="dash"/>
+          </a:ln>
+        </p:spPr>
+      </p:sp>
+      <p:sp>
+        <p:nvSpPr>
+          <p:cNvPr id="17" name="Text 13"/>
           <p:cNvSpPr txBox="1"/>
           <p:nvPr/>
         </p:nvSpPr>
@@ -3684,7 +3682,7 @@
       </p:sp>
       <p:sp>
         <p:nvSpPr>
-          <p:cNvPr id="17" name="Text 12"/>
+          <p:cNvPr id="19" name="Text 14"/>
           <p:cNvSpPr txBox="1"/>
           <p:nvPr/>
         </p:nvSpPr>
@@ -4740,14 +4738,8 @@
                       <a:headEnd type="none" w="med" len="med"/>
                       <a:tailEnd type="none" w="med" len="med"/>
                     </a:lnT>
-                    <a:lnB w="12700" cap="flat" cmpd="sng" algn="ctr">
-                      <a:solidFill>
-                        <a:srgbClr val="000000"/>
-                      </a:solidFill>
-                      <a:prstDash val="solid"/>
-                      <a:round/>
-                      <a:headEnd type="none" w="med" len="med"/>
-                      <a:tailEnd type="none" w="med" len="med"/>
+                    <a:lnB w="0" cap="flat" cmpd="sng" algn="ctr">
+                      <a:noFill/>
                     </a:lnB>
                   </a:tcPr>
                 </a:tc>
@@ -4805,14 +4797,8 @@
                       <a:headEnd type="none" w="med" len="med"/>
                       <a:tailEnd type="none" w="med" len="med"/>
                     </a:lnT>
-                    <a:lnB w="12700" cap="flat" cmpd="sng" algn="ctr">
-                      <a:solidFill>
-                        <a:srgbClr val="000000"/>
-                      </a:solidFill>
-                      <a:prstDash val="solid"/>
-                      <a:round/>
-                      <a:headEnd type="none" w="med" len="med"/>
-                      <a:tailEnd type="none" w="med" len="med"/>
+                    <a:lnB w="0" cap="flat" cmpd="sng" algn="ctr">
+                      <a:noFill/>
                     </a:lnB>
                   </a:tcPr>
                 </a:tc>
@@ -4863,23 +4849,11 @@
                       <a:headEnd type="none" w="med" len="med"/>
                       <a:tailEnd type="none" w="med" len="med"/>
                     </a:lnR>
-                    <a:lnT w="12700" cap="flat" cmpd="sng" algn="ctr">
-                      <a:solidFill>
-                        <a:srgbClr val="000000"/>
-                      </a:solidFill>
-                      <a:prstDash val="solid"/>
-                      <a:round/>
-                      <a:headEnd type="none" w="med" len="med"/>
-                      <a:tailEnd type="none" w="med" len="med"/>
+                    <a:lnT w="0" cap="flat" cmpd="sng" algn="ctr">
+                      <a:noFill/>
                     </a:lnT>
-                    <a:lnB w="12700" cap="flat" cmpd="sng" algn="ctr">
-                      <a:solidFill>
-                        <a:srgbClr val="000000"/>
-                      </a:solidFill>
-                      <a:prstDash val="solid"/>
-                      <a:round/>
-                      <a:headEnd type="none" w="med" len="med"/>
-                      <a:tailEnd type="none" w="med" len="med"/>
+                    <a:lnB w="0" cap="flat" cmpd="sng" algn="ctr">
+                      <a:noFill/>
                     </a:lnB>
                   </a:tcPr>
                 </a:tc>
@@ -4928,23 +4902,11 @@
                       <a:headEnd type="none" w="med" len="med"/>
                       <a:tailEnd type="none" w="med" len="med"/>
                     </a:lnR>
-                    <a:lnT w="12700" cap="flat" cmpd="sng" algn="ctr">
-                      <a:solidFill>
-                        <a:srgbClr val="000000"/>
-                      </a:solidFill>
-                      <a:prstDash val="solid"/>
-                      <a:round/>
-                      <a:headEnd type="none" w="med" len="med"/>
-                      <a:tailEnd type="none" w="med" len="med"/>
+                    <a:lnT w="0" cap="flat" cmpd="sng" algn="ctr">
+                      <a:noFill/>
                     </a:lnT>
-                    <a:lnB w="12700" cap="flat" cmpd="sng" algn="ctr">
-                      <a:solidFill>
-                        <a:srgbClr val="000000"/>
-                      </a:solidFill>
-                      <a:prstDash val="solid"/>
-                      <a:round/>
-                      <a:headEnd type="none" w="med" len="med"/>
-                      <a:tailEnd type="none" w="med" len="med"/>
+                    <a:lnB w="0" cap="flat" cmpd="sng" algn="ctr">
+                      <a:noFill/>
                     </a:lnB>
                   </a:tcPr>
                 </a:tc>
@@ -4995,23 +4957,11 @@
                       <a:headEnd type="none" w="med" len="med"/>
                       <a:tailEnd type="none" w="med" len="med"/>
                     </a:lnR>
-                    <a:lnT w="12700" cap="flat" cmpd="sng" algn="ctr">
-                      <a:solidFill>
-                        <a:srgbClr val="000000"/>
-                      </a:solidFill>
-                      <a:prstDash val="solid"/>
-                      <a:round/>
-                      <a:headEnd type="none" w="med" len="med"/>
-                      <a:tailEnd type="none" w="med" len="med"/>
+                    <a:lnT w="0" cap="flat" cmpd="sng" algn="ctr">
+                      <a:noFill/>
                     </a:lnT>
-                    <a:lnB w="12700" cap="flat" cmpd="sng" algn="ctr">
-                      <a:solidFill>
-                        <a:srgbClr val="000000"/>
-                      </a:solidFill>
-                      <a:prstDash val="solid"/>
-                      <a:round/>
-                      <a:headEnd type="none" w="med" len="med"/>
-                      <a:tailEnd type="none" w="med" len="med"/>
+                    <a:lnB w="0" cap="flat" cmpd="sng" algn="ctr">
+                      <a:noFill/>
                     </a:lnB>
                   </a:tcPr>
                 </a:tc>
@@ -5060,23 +5010,11 @@
                       <a:headEnd type="none" w="med" len="med"/>
                       <a:tailEnd type="none" w="med" len="med"/>
                     </a:lnR>
-                    <a:lnT w="12700" cap="flat" cmpd="sng" algn="ctr">
-                      <a:solidFill>
-                        <a:srgbClr val="000000"/>
-                      </a:solidFill>
-                      <a:prstDash val="solid"/>
-                      <a:round/>
-                      <a:headEnd type="none" w="med" len="med"/>
-                      <a:tailEnd type="none" w="med" len="med"/>
+                    <a:lnT w="0" cap="flat" cmpd="sng" algn="ctr">
+                      <a:noFill/>
                     </a:lnT>
-                    <a:lnB w="12700" cap="flat" cmpd="sng" algn="ctr">
-                      <a:solidFill>
-                        <a:srgbClr val="000000"/>
-                      </a:solidFill>
-                      <a:prstDash val="solid"/>
-                      <a:round/>
-                      <a:headEnd type="none" w="med" len="med"/>
-                      <a:tailEnd type="none" w="med" len="med"/>
+                    <a:lnB w="0" cap="flat" cmpd="sng" algn="ctr">
+                      <a:noFill/>
                     </a:lnB>
                   </a:tcPr>
                 </a:tc>
@@ -5127,23 +5065,11 @@
                       <a:headEnd type="none" w="med" len="med"/>
                       <a:tailEnd type="none" w="med" len="med"/>
                     </a:lnR>
-                    <a:lnT w="12700" cap="flat" cmpd="sng" algn="ctr">
-                      <a:solidFill>
-                        <a:srgbClr val="000000"/>
-                      </a:solidFill>
-                      <a:prstDash val="solid"/>
-                      <a:round/>
-                      <a:headEnd type="none" w="med" len="med"/>
-                      <a:tailEnd type="none" w="med" len="med"/>
+                    <a:lnT w="0" cap="flat" cmpd="sng" algn="ctr">
+                      <a:noFill/>
                     </a:lnT>
-                    <a:lnB w="12700" cap="flat" cmpd="sng" algn="ctr">
-                      <a:solidFill>
-                        <a:srgbClr val="000000"/>
-                      </a:solidFill>
-                      <a:prstDash val="solid"/>
-                      <a:round/>
-                      <a:headEnd type="none" w="med" len="med"/>
-                      <a:tailEnd type="none" w="med" len="med"/>
+                    <a:lnB w="0" cap="flat" cmpd="sng" algn="ctr">
+                      <a:noFill/>
                     </a:lnB>
                   </a:tcPr>
                 </a:tc>
@@ -5192,23 +5118,11 @@
                       <a:headEnd type="none" w="med" len="med"/>
                       <a:tailEnd type="none" w="med" len="med"/>
                     </a:lnR>
-                    <a:lnT w="12700" cap="flat" cmpd="sng" algn="ctr">
-                      <a:solidFill>
-                        <a:srgbClr val="000000"/>
-                      </a:solidFill>
-                      <a:prstDash val="solid"/>
-                      <a:round/>
-                      <a:headEnd type="none" w="med" len="med"/>
-                      <a:tailEnd type="none" w="med" len="med"/>
+                    <a:lnT w="0" cap="flat" cmpd="sng" algn="ctr">
+                      <a:noFill/>
                     </a:lnT>
-                    <a:lnB w="12700" cap="flat" cmpd="sng" algn="ctr">
-                      <a:solidFill>
-                        <a:srgbClr val="000000"/>
-                      </a:solidFill>
-                      <a:prstDash val="solid"/>
-                      <a:round/>
-                      <a:headEnd type="none" w="med" len="med"/>
-                      <a:tailEnd type="none" w="med" len="med"/>
+                    <a:lnB w="0" cap="flat" cmpd="sng" algn="ctr">
+                      <a:noFill/>
                     </a:lnB>
                   </a:tcPr>
                 </a:tc>
@@ -5259,23 +5173,11 @@
                       <a:headEnd type="none" w="med" len="med"/>
                       <a:tailEnd type="none" w="med" len="med"/>
                     </a:lnR>
-                    <a:lnT w="12700" cap="flat" cmpd="sng" algn="ctr">
-                      <a:solidFill>
-                        <a:srgbClr val="000000"/>
-                      </a:solidFill>
-                      <a:prstDash val="solid"/>
-                      <a:round/>
-                      <a:headEnd type="none" w="med" len="med"/>
-                      <a:tailEnd type="none" w="med" len="med"/>
+                    <a:lnT w="0" cap="flat" cmpd="sng" algn="ctr">
+                      <a:noFill/>
                     </a:lnT>
-                    <a:lnB w="12700" cap="flat" cmpd="sng" algn="ctr">
-                      <a:solidFill>
-                        <a:srgbClr val="000000"/>
-                      </a:solidFill>
-                      <a:prstDash val="solid"/>
-                      <a:round/>
-                      <a:headEnd type="none" w="med" len="med"/>
-                      <a:tailEnd type="none" w="med" len="med"/>
+                    <a:lnB w="0" cap="flat" cmpd="sng" algn="ctr">
+                      <a:noFill/>
                     </a:lnB>
                   </a:tcPr>
                 </a:tc>
@@ -5324,23 +5226,11 @@
                       <a:headEnd type="none" w="med" len="med"/>
                       <a:tailEnd type="none" w="med" len="med"/>
                     </a:lnR>
-                    <a:lnT w="12700" cap="flat" cmpd="sng" algn="ctr">
-                      <a:solidFill>
-                        <a:srgbClr val="000000"/>
-                      </a:solidFill>
-                      <a:prstDash val="solid"/>
-                      <a:round/>
-                      <a:headEnd type="none" w="med" len="med"/>
-                      <a:tailEnd type="none" w="med" len="med"/>
+                    <a:lnT w="0" cap="flat" cmpd="sng" algn="ctr">
+                      <a:noFill/>
                     </a:lnT>
-                    <a:lnB w="12700" cap="flat" cmpd="sng" algn="ctr">
-                      <a:solidFill>
-                        <a:srgbClr val="000000"/>
-                      </a:solidFill>
-                      <a:prstDash val="solid"/>
-                      <a:round/>
-                      <a:headEnd type="none" w="med" len="med"/>
-                      <a:tailEnd type="none" w="med" len="med"/>
+                    <a:lnB w="0" cap="flat" cmpd="sng" algn="ctr">
+                      <a:noFill/>
                     </a:lnB>
                   </a:tcPr>
                 </a:tc>
@@ -5391,23 +5281,11 @@
                       <a:headEnd type="none" w="med" len="med"/>
                       <a:tailEnd type="none" w="med" len="med"/>
                     </a:lnR>
-                    <a:lnT w="12700" cap="flat" cmpd="sng" algn="ctr">
-                      <a:solidFill>
-                        <a:srgbClr val="000000"/>
-                      </a:solidFill>
-                      <a:prstDash val="solid"/>
-                      <a:round/>
-                      <a:headEnd type="none" w="med" len="med"/>
-                      <a:tailEnd type="none" w="med" len="med"/>
+                    <a:lnT w="0" cap="flat" cmpd="sng" algn="ctr">
+                      <a:noFill/>
                     </a:lnT>
-                    <a:lnB w="12700" cap="flat" cmpd="sng" algn="ctr">
-                      <a:solidFill>
-                        <a:srgbClr val="000000"/>
-                      </a:solidFill>
-                      <a:prstDash val="solid"/>
-                      <a:round/>
-                      <a:headEnd type="none" w="med" len="med"/>
-                      <a:tailEnd type="none" w="med" len="med"/>
+                    <a:lnB w="0" cap="flat" cmpd="sng" algn="ctr">
+                      <a:noFill/>
                     </a:lnB>
                   </a:tcPr>
                 </a:tc>
@@ -5456,23 +5334,11 @@
                       <a:headEnd type="none" w="med" len="med"/>
                       <a:tailEnd type="none" w="med" len="med"/>
                     </a:lnR>
-                    <a:lnT w="12700" cap="flat" cmpd="sng" algn="ctr">
-                      <a:solidFill>
-                        <a:srgbClr val="000000"/>
-                      </a:solidFill>
-                      <a:prstDash val="solid"/>
-                      <a:round/>
-                      <a:headEnd type="none" w="med" len="med"/>
-                      <a:tailEnd type="none" w="med" len="med"/>
+                    <a:lnT w="0" cap="flat" cmpd="sng" algn="ctr">
+                      <a:noFill/>
                     </a:lnT>
-                    <a:lnB w="12700" cap="flat" cmpd="sng" algn="ctr">
-                      <a:solidFill>
-                        <a:srgbClr val="000000"/>
-                      </a:solidFill>
-                      <a:prstDash val="solid"/>
-                      <a:round/>
-                      <a:headEnd type="none" w="med" len="med"/>
-                      <a:tailEnd type="none" w="med" len="med"/>
+                    <a:lnB w="0" cap="flat" cmpd="sng" algn="ctr">
+                      <a:noFill/>
                     </a:lnB>
                   </a:tcPr>
                 </a:tc>
@@ -5523,14 +5389,8 @@
                       <a:headEnd type="none" w="med" len="med"/>
                       <a:tailEnd type="none" w="med" len="med"/>
                     </a:lnR>
-                    <a:lnT w="12700" cap="flat" cmpd="sng" algn="ctr">
-                      <a:solidFill>
-                        <a:srgbClr val="000000"/>
-                      </a:solidFill>
-                      <a:prstDash val="solid"/>
-                      <a:round/>
-                      <a:headEnd type="none" w="med" len="med"/>
-                      <a:tailEnd type="none" w="med" len="med"/>
+                    <a:lnT w="0" cap="flat" cmpd="sng" algn="ctr">
+                      <a:noFill/>
                     </a:lnT>
                     <a:lnB w="12700" cap="flat" cmpd="sng" algn="ctr">
                       <a:solidFill>
@@ -5588,14 +5448,8 @@
                       <a:headEnd type="none" w="med" len="med"/>
                       <a:tailEnd type="none" w="med" len="med"/>
                     </a:lnR>
-                    <a:lnT w="12700" cap="flat" cmpd="sng" algn="ctr">
-                      <a:solidFill>
-                        <a:srgbClr val="000000"/>
-                      </a:solidFill>
-                      <a:prstDash val="solid"/>
-                      <a:round/>
-                      <a:headEnd type="none" w="med" len="med"/>
-                      <a:tailEnd type="none" w="med" len="med"/>
+                    <a:lnT w="0" cap="flat" cmpd="sng" algn="ctr">
+                      <a:noFill/>
                     </a:lnT>
                     <a:lnB w="12700" cap="flat" cmpd="sng" algn="ctr">
                       <a:solidFill>
@@ -5615,7 +5469,145 @@
       </p:graphicFrame>
       <p:sp>
         <p:nvSpPr>
-          <p:cNvPr id="7" name="Text 4"/>
+          <p:cNvPr id="7" name="Shape 4"/>
+          <p:cNvSpPr/>
+          <p:nvPr/>
+        </p:nvSpPr>
+        <p:spPr>
+          <a:xfrm>
+            <a:off x="457200" y="2103120"/>
+            <a:ext cx="8229600" cy="0"/>
+          </a:xfrm>
+          <a:prstGeom prst="line">
+            <a:avLst/>
+          </a:prstGeom>
+          <a:noFill/>
+          <a:ln w="12700">
+            <a:solidFill>
+              <a:srgbClr val="000000"/>
+            </a:solidFill>
+            <a:prstDash val="dash"/>
+          </a:ln>
+        </p:spPr>
+      </p:sp>
+      <p:sp>
+        <p:nvSpPr>
+          <p:cNvPr id="8" name="Shape 5"/>
+          <p:cNvSpPr/>
+          <p:nvPr/>
+        </p:nvSpPr>
+        <p:spPr>
+          <a:xfrm>
+            <a:off x="457200" y="2487168"/>
+            <a:ext cx="8229600" cy="0"/>
+          </a:xfrm>
+          <a:prstGeom prst="line">
+            <a:avLst/>
+          </a:prstGeom>
+          <a:noFill/>
+          <a:ln w="12700">
+            <a:solidFill>
+              <a:srgbClr val="000000"/>
+            </a:solidFill>
+            <a:prstDash val="dash"/>
+          </a:ln>
+        </p:spPr>
+      </p:sp>
+      <p:sp>
+        <p:nvSpPr>
+          <p:cNvPr id="9" name="Shape 6"/>
+          <p:cNvSpPr/>
+          <p:nvPr/>
+        </p:nvSpPr>
+        <p:spPr>
+          <a:xfrm>
+            <a:off x="457200" y="2871216"/>
+            <a:ext cx="8229600" cy="0"/>
+          </a:xfrm>
+          <a:prstGeom prst="line">
+            <a:avLst/>
+          </a:prstGeom>
+          <a:noFill/>
+          <a:ln w="12700">
+            <a:solidFill>
+              <a:srgbClr val="000000"/>
+            </a:solidFill>
+            <a:prstDash val="dash"/>
+          </a:ln>
+        </p:spPr>
+      </p:sp>
+      <p:sp>
+        <p:nvSpPr>
+          <p:cNvPr id="10" name="Shape 7"/>
+          <p:cNvSpPr/>
+          <p:nvPr/>
+        </p:nvSpPr>
+        <p:spPr>
+          <a:xfrm>
+            <a:off x="457200" y="3255264"/>
+            <a:ext cx="8229600" cy="0"/>
+          </a:xfrm>
+          <a:prstGeom prst="line">
+            <a:avLst/>
+          </a:prstGeom>
+          <a:noFill/>
+          <a:ln w="12700">
+            <a:solidFill>
+              <a:srgbClr val="000000"/>
+            </a:solidFill>
+            <a:prstDash val="dash"/>
+          </a:ln>
+        </p:spPr>
+      </p:sp>
+      <p:sp>
+        <p:nvSpPr>
+          <p:cNvPr id="11" name="Shape 8"/>
+          <p:cNvSpPr/>
+          <p:nvPr/>
+        </p:nvSpPr>
+        <p:spPr>
+          <a:xfrm>
+            <a:off x="457200" y="3639312"/>
+            <a:ext cx="8229600" cy="0"/>
+          </a:xfrm>
+          <a:prstGeom prst="line">
+            <a:avLst/>
+          </a:prstGeom>
+          <a:noFill/>
+          <a:ln w="12700">
+            <a:solidFill>
+              <a:srgbClr val="000000"/>
+            </a:solidFill>
+            <a:prstDash val="dash"/>
+          </a:ln>
+        </p:spPr>
+      </p:sp>
+      <p:sp>
+        <p:nvSpPr>
+          <p:cNvPr id="12" name="Shape 9"/>
+          <p:cNvSpPr/>
+          <p:nvPr/>
+        </p:nvSpPr>
+        <p:spPr>
+          <a:xfrm>
+            <a:off x="457200" y="4023360"/>
+            <a:ext cx="8229600" cy="0"/>
+          </a:xfrm>
+          <a:prstGeom prst="line">
+            <a:avLst/>
+          </a:prstGeom>
+          <a:noFill/>
+          <a:ln w="12700">
+            <a:solidFill>
+              <a:srgbClr val="000000"/>
+            </a:solidFill>
+            <a:prstDash val="dash"/>
+          </a:ln>
+        </p:spPr>
+      </p:sp>
+      <p:sp>
+        <p:nvSpPr>
+          <p:cNvPr id="13" name="Text 10"/>
           <p:cNvSpPr txBox="1"/>
           <p:nvPr/>
         </p:nvSpPr>
@@ -6285,7 +6277,7 @@
       </p:graphicFrame>
       <p:sp>
         <p:nvSpPr>
-          <p:cNvPr id="10" name="Text 5"/>
+          <p:cNvPr id="16" name="Text 11"/>
           <p:cNvSpPr txBox="1"/>
           <p:nvPr/>
         </p:nvSpPr>
@@ -10202,14 +10194,8 @@
                       <a:headEnd type="none" w="med" len="med"/>
                       <a:tailEnd type="none" w="med" len="med"/>
                     </a:lnT>
-                    <a:lnB w="12700" cap="flat" cmpd="sng" algn="ctr">
-                      <a:solidFill>
-                        <a:srgbClr val="000000"/>
-                      </a:solidFill>
-                      <a:prstDash val="solid"/>
-                      <a:round/>
-                      <a:headEnd type="none" w="med" len="med"/>
-                      <a:tailEnd type="none" w="med" len="med"/>
+                    <a:lnB w="0" cap="flat" cmpd="sng" algn="ctr">
+                      <a:noFill/>
                     </a:lnB>
                   </a:tcPr>
                 </a:tc>
@@ -10267,14 +10253,8 @@
                       <a:headEnd type="none" w="med" len="med"/>
                       <a:tailEnd type="none" w="med" len="med"/>
                     </a:lnT>
-                    <a:lnB w="12700" cap="flat" cmpd="sng" algn="ctr">
-                      <a:solidFill>
-                        <a:srgbClr val="000000"/>
-                      </a:solidFill>
-                      <a:prstDash val="solid"/>
-                      <a:round/>
-                      <a:headEnd type="none" w="med" len="med"/>
-                      <a:tailEnd type="none" w="med" len="med"/>
+                    <a:lnB w="0" cap="flat" cmpd="sng" algn="ctr">
+                      <a:noFill/>
                     </a:lnB>
                   </a:tcPr>
                 </a:tc>
@@ -10332,14 +10312,8 @@
                       <a:headEnd type="none" w="med" len="med"/>
                       <a:tailEnd type="none" w="med" len="med"/>
                     </a:lnT>
-                    <a:lnB w="12700" cap="flat" cmpd="sng" algn="ctr">
-                      <a:solidFill>
-                        <a:srgbClr val="000000"/>
-                      </a:solidFill>
-                      <a:prstDash val="solid"/>
-                      <a:round/>
-                      <a:headEnd type="none" w="med" len="med"/>
-                      <a:tailEnd type="none" w="med" len="med"/>
+                    <a:lnB w="0" cap="flat" cmpd="sng" algn="ctr">
+                      <a:noFill/>
                     </a:lnB>
                   </a:tcPr>
                 </a:tc>
@@ -10397,14 +10371,8 @@
                       <a:headEnd type="none" w="med" len="med"/>
                       <a:tailEnd type="none" w="med" len="med"/>
                     </a:lnT>
-                    <a:lnB w="12700" cap="flat" cmpd="sng" algn="ctr">
-                      <a:solidFill>
-                        <a:srgbClr val="000000"/>
-                      </a:solidFill>
-                      <a:prstDash val="solid"/>
-                      <a:round/>
-                      <a:headEnd type="none" w="med" len="med"/>
-                      <a:tailEnd type="none" w="med" len="med"/>
+                    <a:lnB w="0" cap="flat" cmpd="sng" algn="ctr">
+                      <a:noFill/>
                     </a:lnB>
                   </a:tcPr>
                 </a:tc>
@@ -10462,14 +10430,8 @@
                       <a:headEnd type="none" w="med" len="med"/>
                       <a:tailEnd type="none" w="med" len="med"/>
                     </a:lnT>
-                    <a:lnB w="12700" cap="flat" cmpd="sng" algn="ctr">
-                      <a:solidFill>
-                        <a:srgbClr val="000000"/>
-                      </a:solidFill>
-                      <a:prstDash val="solid"/>
-                      <a:round/>
-                      <a:headEnd type="none" w="med" len="med"/>
-                      <a:tailEnd type="none" w="med" len="med"/>
+                    <a:lnB w="0" cap="flat" cmpd="sng" algn="ctr">
+                      <a:noFill/>
                     </a:lnB>
                   </a:tcPr>
                 </a:tc>
@@ -10527,14 +10489,8 @@
                       <a:headEnd type="none" w="med" len="med"/>
                       <a:tailEnd type="none" w="med" len="med"/>
                     </a:lnT>
-                    <a:lnB w="12700" cap="flat" cmpd="sng" algn="ctr">
-                      <a:solidFill>
-                        <a:srgbClr val="000000"/>
-                      </a:solidFill>
-                      <a:prstDash val="solid"/>
-                      <a:round/>
-                      <a:headEnd type="none" w="med" len="med"/>
-                      <a:tailEnd type="none" w="med" len="med"/>
+                    <a:lnB w="0" cap="flat" cmpd="sng" algn="ctr">
+                      <a:noFill/>
                     </a:lnB>
                   </a:tcPr>
                 </a:tc>
@@ -10592,14 +10548,8 @@
                       <a:headEnd type="none" w="med" len="med"/>
                       <a:tailEnd type="none" w="med" len="med"/>
                     </a:lnT>
-                    <a:lnB w="12700" cap="flat" cmpd="sng" algn="ctr">
-                      <a:solidFill>
-                        <a:srgbClr val="000000"/>
-                      </a:solidFill>
-                      <a:prstDash val="solid"/>
-                      <a:round/>
-                      <a:headEnd type="none" w="med" len="med"/>
-                      <a:tailEnd type="none" w="med" len="med"/>
+                    <a:lnB w="0" cap="flat" cmpd="sng" algn="ctr">
+                      <a:noFill/>
                     </a:lnB>
                   </a:tcPr>
                 </a:tc>
@@ -10657,14 +10607,8 @@
                       <a:headEnd type="none" w="med" len="med"/>
                       <a:tailEnd type="none" w="med" len="med"/>
                     </a:lnT>
-                    <a:lnB w="12700" cap="flat" cmpd="sng" algn="ctr">
-                      <a:solidFill>
-                        <a:srgbClr val="000000"/>
-                      </a:solidFill>
-                      <a:prstDash val="solid"/>
-                      <a:round/>
-                      <a:headEnd type="none" w="med" len="med"/>
-                      <a:tailEnd type="none" w="med" len="med"/>
+                    <a:lnB w="0" cap="flat" cmpd="sng" algn="ctr">
+                      <a:noFill/>
                     </a:lnB>
                   </a:tcPr>
                 </a:tc>
@@ -10722,14 +10666,8 @@
                       <a:headEnd type="none" w="med" len="med"/>
                       <a:tailEnd type="none" w="med" len="med"/>
                     </a:lnT>
-                    <a:lnB w="12700" cap="flat" cmpd="sng" algn="ctr">
-                      <a:solidFill>
-                        <a:srgbClr val="000000"/>
-                      </a:solidFill>
-                      <a:prstDash val="solid"/>
-                      <a:round/>
-                      <a:headEnd type="none" w="med" len="med"/>
-                      <a:tailEnd type="none" w="med" len="med"/>
+                    <a:lnB w="0" cap="flat" cmpd="sng" algn="ctr">
+                      <a:noFill/>
                     </a:lnB>
                   </a:tcPr>
                 </a:tc>
@@ -10999,14 +10937,8 @@
                       <a:headEnd type="none" w="med" len="med"/>
                       <a:tailEnd type="none" w="med" len="med"/>
                     </a:lnR>
-                    <a:lnT w="12700" cap="flat" cmpd="sng" algn="ctr">
-                      <a:solidFill>
-                        <a:srgbClr val="000000"/>
-                      </a:solidFill>
-                      <a:prstDash val="solid"/>
-                      <a:round/>
-                      <a:headEnd type="none" w="med" len="med"/>
-                      <a:tailEnd type="none" w="med" len="med"/>
+                    <a:lnT w="0" cap="flat" cmpd="sng" algn="ctr">
+                      <a:noFill/>
                     </a:lnT>
                     <a:lnB w="12700" cap="flat" cmpd="sng" algn="ctr">
                       <a:solidFill>
@@ -11053,14 +10985,8 @@
                       <a:headEnd type="none" w="med" len="med"/>
                       <a:tailEnd type="none" w="med" len="med"/>
                     </a:lnR>
-                    <a:lnT w="12700" cap="flat" cmpd="sng" algn="ctr">
-                      <a:solidFill>
-                        <a:srgbClr val="000000"/>
-                      </a:solidFill>
-                      <a:prstDash val="solid"/>
-                      <a:round/>
-                      <a:headEnd type="none" w="med" len="med"/>
-                      <a:tailEnd type="none" w="med" len="med"/>
+                    <a:lnT w="0" cap="flat" cmpd="sng" algn="ctr">
+                      <a:noFill/>
                     </a:lnT>
                     <a:lnB w="12700" cap="flat" cmpd="sng" algn="ctr">
                       <a:solidFill>
@@ -11118,14 +11044,8 @@
                       <a:headEnd type="none" w="med" len="med"/>
                       <a:tailEnd type="none" w="med" len="med"/>
                     </a:lnR>
-                    <a:lnT w="12700" cap="flat" cmpd="sng" algn="ctr">
-                      <a:solidFill>
-                        <a:srgbClr val="000000"/>
-                      </a:solidFill>
-                      <a:prstDash val="solid"/>
-                      <a:round/>
-                      <a:headEnd type="none" w="med" len="med"/>
-                      <a:tailEnd type="none" w="med" len="med"/>
+                    <a:lnT w="0" cap="flat" cmpd="sng" algn="ctr">
+                      <a:noFill/>
                     </a:lnT>
                     <a:lnB w="12700" cap="flat" cmpd="sng" algn="ctr">
                       <a:solidFill>
@@ -11183,14 +11103,8 @@
                       <a:headEnd type="none" w="med" len="med"/>
                       <a:tailEnd type="none" w="med" len="med"/>
                     </a:lnR>
-                    <a:lnT w="12700" cap="flat" cmpd="sng" algn="ctr">
-                      <a:solidFill>
-                        <a:srgbClr val="000000"/>
-                      </a:solidFill>
-                      <a:prstDash val="solid"/>
-                      <a:round/>
-                      <a:headEnd type="none" w="med" len="med"/>
-                      <a:tailEnd type="none" w="med" len="med"/>
+                    <a:lnT w="0" cap="flat" cmpd="sng" algn="ctr">
+                      <a:noFill/>
                     </a:lnT>
                     <a:lnB w="12700" cap="flat" cmpd="sng" algn="ctr">
                       <a:solidFill>
@@ -11248,14 +11162,8 @@
                       <a:headEnd type="none" w="med" len="med"/>
                       <a:tailEnd type="none" w="med" len="med"/>
                     </a:lnR>
-                    <a:lnT w="12700" cap="flat" cmpd="sng" algn="ctr">
-                      <a:solidFill>
-                        <a:srgbClr val="000000"/>
-                      </a:solidFill>
-                      <a:prstDash val="solid"/>
-                      <a:round/>
-                      <a:headEnd type="none" w="med" len="med"/>
-                      <a:tailEnd type="none" w="med" len="med"/>
+                    <a:lnT w="0" cap="flat" cmpd="sng" algn="ctr">
+                      <a:noFill/>
                     </a:lnT>
                     <a:lnB w="12700" cap="flat" cmpd="sng" algn="ctr">
                       <a:solidFill>
@@ -11313,14 +11221,8 @@
                       <a:headEnd type="none" w="med" len="med"/>
                       <a:tailEnd type="none" w="med" len="med"/>
                     </a:lnR>
-                    <a:lnT w="12700" cap="flat" cmpd="sng" algn="ctr">
-                      <a:solidFill>
-                        <a:srgbClr val="000000"/>
-                      </a:solidFill>
-                      <a:prstDash val="solid"/>
-                      <a:round/>
-                      <a:headEnd type="none" w="med" len="med"/>
-                      <a:tailEnd type="none" w="med" len="med"/>
+                    <a:lnT w="0" cap="flat" cmpd="sng" algn="ctr">
+                      <a:noFill/>
                     </a:lnT>
                     <a:lnB w="12700" cap="flat" cmpd="sng" algn="ctr">
                       <a:solidFill>
@@ -11378,14 +11280,8 @@
                       <a:headEnd type="none" w="med" len="med"/>
                       <a:tailEnd type="none" w="med" len="med"/>
                     </a:lnR>
-                    <a:lnT w="12700" cap="flat" cmpd="sng" algn="ctr">
-                      <a:solidFill>
-                        <a:srgbClr val="000000"/>
-                      </a:solidFill>
-                      <a:prstDash val="solid"/>
-                      <a:round/>
-                      <a:headEnd type="none" w="med" len="med"/>
-                      <a:tailEnd type="none" w="med" len="med"/>
+                    <a:lnT w="0" cap="flat" cmpd="sng" algn="ctr">
+                      <a:noFill/>
                     </a:lnT>
                     <a:lnB w="12700" cap="flat" cmpd="sng" algn="ctr">
                       <a:solidFill>
@@ -11443,14 +11339,8 @@
                       <a:headEnd type="none" w="med" len="med"/>
                       <a:tailEnd type="none" w="med" len="med"/>
                     </a:lnR>
-                    <a:lnT w="12700" cap="flat" cmpd="sng" algn="ctr">
-                      <a:solidFill>
-                        <a:srgbClr val="000000"/>
-                      </a:solidFill>
-                      <a:prstDash val="solid"/>
-                      <a:round/>
-                      <a:headEnd type="none" w="med" len="med"/>
-                      <a:tailEnd type="none" w="med" len="med"/>
+                    <a:lnT w="0" cap="flat" cmpd="sng" algn="ctr">
+                      <a:noFill/>
                     </a:lnT>
                     <a:lnB w="12700" cap="flat" cmpd="sng" algn="ctr">
                       <a:solidFill>
@@ -11508,14 +11398,8 @@
                       <a:headEnd type="none" w="med" len="med"/>
                       <a:tailEnd type="none" w="med" len="med"/>
                     </a:lnR>
-                    <a:lnT w="12700" cap="flat" cmpd="sng" algn="ctr">
-                      <a:solidFill>
-                        <a:srgbClr val="000000"/>
-                      </a:solidFill>
-                      <a:prstDash val="solid"/>
-                      <a:round/>
-                      <a:headEnd type="none" w="med" len="med"/>
-                      <a:tailEnd type="none" w="med" len="med"/>
+                    <a:lnT w="0" cap="flat" cmpd="sng" algn="ctr">
+                      <a:noFill/>
                     </a:lnT>
                     <a:lnB w="12700" cap="flat" cmpd="sng" algn="ctr">
                       <a:solidFill>
@@ -11544,7 +11428,30 @@
       </p:graphicFrame>
       <p:sp>
         <p:nvSpPr>
-          <p:cNvPr id="8" name="Text 5"/>
+          <p:cNvPr id="8" name="Shape 5"/>
+          <p:cNvSpPr/>
+          <p:nvPr/>
+        </p:nvSpPr>
+        <p:spPr>
+          <a:xfrm>
+            <a:off x="1371600" y="2761488"/>
+            <a:ext cx="4912431" cy="0"/>
+          </a:xfrm>
+          <a:prstGeom prst="line">
+            <a:avLst/>
+          </a:prstGeom>
+          <a:noFill/>
+          <a:ln w="12700">
+            <a:solidFill>
+              <a:srgbClr val="000000"/>
+            </a:solidFill>
+            <a:prstDash val="dash"/>
+          </a:ln>
+        </p:spPr>
+      </p:sp>
+      <p:sp>
+        <p:nvSpPr>
+          <p:cNvPr id="9" name="Text 6"/>
           <p:cNvSpPr txBox="1"/>
           <p:nvPr/>
         </p:nvSpPr>
@@ -11583,7 +11490,7 @@
       </p:sp>
       <p:sp>
         <p:nvSpPr>
-          <p:cNvPr id="9" name="Text 6"/>
+          <p:cNvPr id="10" name="Text 7"/>
           <p:cNvSpPr txBox="1"/>
           <p:nvPr/>
         </p:nvSpPr>
@@ -12543,7 +12450,7 @@
       </p:graphicFrame>
       <p:sp>
         <p:nvSpPr>
-          <p:cNvPr id="11" name="Text 7"/>
+          <p:cNvPr id="12" name="Text 8"/>
           <p:cNvSpPr txBox="1"/>
           <p:nvPr/>
         </p:nvSpPr>
@@ -12582,7 +12489,7 @@
       </p:sp>
       <p:sp>
         <p:nvSpPr>
-          <p:cNvPr id="13" name="Text 8"/>
+          <p:cNvPr id="14" name="Text 9"/>
           <p:cNvSpPr txBox="1"/>
           <p:nvPr/>
         </p:nvSpPr>
@@ -15073,14 +14980,8 @@
                       <a:headEnd type="none" w="med" len="med"/>
                       <a:tailEnd type="none" w="med" len="med"/>
                     </a:lnT>
-                    <a:lnB w="12700" cap="flat" cmpd="sng" algn="ctr">
-                      <a:solidFill>
-                        <a:srgbClr val="000000"/>
-                      </a:solidFill>
-                      <a:prstDash val="solid"/>
-                      <a:round/>
-                      <a:headEnd type="none" w="med" len="med"/>
-                      <a:tailEnd type="none" w="med" len="med"/>
+                    <a:lnB w="0" cap="flat" cmpd="sng" algn="ctr">
+                      <a:noFill/>
                     </a:lnB>
                   </a:tcPr>
                 </a:tc>
@@ -15138,14 +15039,8 @@
                       <a:headEnd type="none" w="med" len="med"/>
                       <a:tailEnd type="none" w="med" len="med"/>
                     </a:lnT>
-                    <a:lnB w="12700" cap="flat" cmpd="sng" algn="ctr">
-                      <a:solidFill>
-                        <a:srgbClr val="000000"/>
-                      </a:solidFill>
-                      <a:prstDash val="solid"/>
-                      <a:round/>
-                      <a:headEnd type="none" w="med" len="med"/>
-                      <a:tailEnd type="none" w="med" len="med"/>
+                    <a:lnB w="0" cap="flat" cmpd="sng" algn="ctr">
+                      <a:noFill/>
                     </a:lnB>
                   </a:tcPr>
                 </a:tc>
@@ -15203,14 +15098,8 @@
                       <a:headEnd type="none" w="med" len="med"/>
                       <a:tailEnd type="none" w="med" len="med"/>
                     </a:lnT>
-                    <a:lnB w="12700" cap="flat" cmpd="sng" algn="ctr">
-                      <a:solidFill>
-                        <a:srgbClr val="000000"/>
-                      </a:solidFill>
-                      <a:prstDash val="solid"/>
-                      <a:round/>
-                      <a:headEnd type="none" w="med" len="med"/>
-                      <a:tailEnd type="none" w="med" len="med"/>
+                    <a:lnB w="0" cap="flat" cmpd="sng" algn="ctr">
+                      <a:noFill/>
                     </a:lnB>
                   </a:tcPr>
                 </a:tc>
@@ -15268,14 +15157,8 @@
                       <a:headEnd type="none" w="med" len="med"/>
                       <a:tailEnd type="none" w="med" len="med"/>
                     </a:lnT>
-                    <a:lnB w="12700" cap="flat" cmpd="sng" algn="ctr">
-                      <a:solidFill>
-                        <a:srgbClr val="000000"/>
-                      </a:solidFill>
-                      <a:prstDash val="solid"/>
-                      <a:round/>
-                      <a:headEnd type="none" w="med" len="med"/>
-                      <a:tailEnd type="none" w="med" len="med"/>
+                    <a:lnB w="0" cap="flat" cmpd="sng" algn="ctr">
+                      <a:noFill/>
                     </a:lnB>
                   </a:tcPr>
                 </a:tc>
@@ -15326,14 +15209,8 @@
                       <a:headEnd type="none" w="med" len="med"/>
                       <a:tailEnd type="none" w="med" len="med"/>
                     </a:lnR>
-                    <a:lnT w="12700" cap="flat" cmpd="sng" algn="ctr">
-                      <a:solidFill>
-                        <a:srgbClr val="000000"/>
-                      </a:solidFill>
-                      <a:prstDash val="solid"/>
-                      <a:round/>
-                      <a:headEnd type="none" w="med" len="med"/>
-                      <a:tailEnd type="none" w="med" len="med"/>
+                    <a:lnT w="0" cap="flat" cmpd="sng" algn="ctr">
+                      <a:noFill/>
                     </a:lnT>
                     <a:lnB w="12700" cap="flat" cmpd="sng" algn="ctr">
                       <a:solidFill>
@@ -15391,14 +15268,8 @@
                       <a:headEnd type="none" w="med" len="med"/>
                       <a:tailEnd type="none" w="med" len="med"/>
                     </a:lnR>
-                    <a:lnT w="12700" cap="flat" cmpd="sng" algn="ctr">
-                      <a:solidFill>
-                        <a:srgbClr val="000000"/>
-                      </a:solidFill>
-                      <a:prstDash val="solid"/>
-                      <a:round/>
-                      <a:headEnd type="none" w="med" len="med"/>
-                      <a:tailEnd type="none" w="med" len="med"/>
+                    <a:lnT w="0" cap="flat" cmpd="sng" algn="ctr">
+                      <a:noFill/>
                     </a:lnT>
                     <a:lnB w="12700" cap="flat" cmpd="sng" algn="ctr">
                       <a:solidFill>
@@ -15456,14 +15327,8 @@
                       <a:headEnd type="none" w="med" len="med"/>
                       <a:tailEnd type="none" w="med" len="med"/>
                     </a:lnR>
-                    <a:lnT w="12700" cap="flat" cmpd="sng" algn="ctr">
-                      <a:solidFill>
-                        <a:srgbClr val="000000"/>
-                      </a:solidFill>
-                      <a:prstDash val="solid"/>
-                      <a:round/>
-                      <a:headEnd type="none" w="med" len="med"/>
-                      <a:tailEnd type="none" w="med" len="med"/>
+                    <a:lnT w="0" cap="flat" cmpd="sng" algn="ctr">
+                      <a:noFill/>
                     </a:lnT>
                     <a:lnB w="12700" cap="flat" cmpd="sng" algn="ctr">
                       <a:solidFill>
@@ -15521,14 +15386,8 @@
                       <a:headEnd type="none" w="med" len="med"/>
                       <a:tailEnd type="none" w="med" len="med"/>
                     </a:lnR>
-                    <a:lnT w="12700" cap="flat" cmpd="sng" algn="ctr">
-                      <a:solidFill>
-                        <a:srgbClr val="000000"/>
-                      </a:solidFill>
-                      <a:prstDash val="solid"/>
-                      <a:round/>
-                      <a:headEnd type="none" w="med" len="med"/>
-                      <a:tailEnd type="none" w="med" len="med"/>
+                    <a:lnT w="0" cap="flat" cmpd="sng" algn="ctr">
+                      <a:noFill/>
                     </a:lnT>
                     <a:lnB w="12700" cap="flat" cmpd="sng" algn="ctr">
                       <a:solidFill>
@@ -15822,7 +15681,30 @@
       </p:graphicFrame>
       <p:sp>
         <p:nvSpPr>
-          <p:cNvPr id="33" name="Text 29"/>
+          <p:cNvPr id="32" name="Shape 29"/>
+          <p:cNvSpPr/>
+          <p:nvPr/>
+        </p:nvSpPr>
+        <p:spPr>
+          <a:xfrm>
+            <a:off x="457200" y="4937760"/>
+            <a:ext cx="8229600" cy="0"/>
+          </a:xfrm>
+          <a:prstGeom prst="line">
+            <a:avLst/>
+          </a:prstGeom>
+          <a:noFill/>
+          <a:ln w="12700">
+            <a:solidFill>
+              <a:srgbClr val="000000"/>
+            </a:solidFill>
+            <a:prstDash val="dash"/>
+          </a:ln>
+        </p:spPr>
+      </p:sp>
+      <p:sp>
+        <p:nvSpPr>
+          <p:cNvPr id="34" name="Text 30"/>
           <p:cNvSpPr txBox="1"/>
           <p:nvPr/>
         </p:nvSpPr>
@@ -16640,14 +16522,8 @@
                       <a:headEnd type="none" w="med" len="med"/>
                       <a:tailEnd type="none" w="med" len="med"/>
                     </a:lnT>
-                    <a:lnB w="12700" cap="flat" cmpd="sng" algn="ctr">
-                      <a:solidFill>
-                        <a:srgbClr val="000000"/>
-                      </a:solidFill>
-                      <a:prstDash val="solid"/>
-                      <a:round/>
-                      <a:headEnd type="none" w="med" len="med"/>
-                      <a:tailEnd type="none" w="med" len="med"/>
+                    <a:lnB w="0" cap="flat" cmpd="sng" algn="ctr">
+                      <a:noFill/>
                     </a:lnB>
                   </a:tcPr>
                 </a:tc>
@@ -16705,14 +16581,8 @@
                       <a:headEnd type="none" w="med" len="med"/>
                       <a:tailEnd type="none" w="med" len="med"/>
                     </a:lnT>
-                    <a:lnB w="12700" cap="flat" cmpd="sng" algn="ctr">
-                      <a:solidFill>
-                        <a:srgbClr val="000000"/>
-                      </a:solidFill>
-                      <a:prstDash val="solid"/>
-                      <a:round/>
-                      <a:headEnd type="none" w="med" len="med"/>
-                      <a:tailEnd type="none" w="med" len="med"/>
+                    <a:lnB w="0" cap="flat" cmpd="sng" algn="ctr">
+                      <a:noFill/>
                     </a:lnB>
                   </a:tcPr>
                 </a:tc>
@@ -16763,23 +16633,11 @@
                       <a:headEnd type="none" w="med" len="med"/>
                       <a:tailEnd type="none" w="med" len="med"/>
                     </a:lnR>
-                    <a:lnT w="12700" cap="flat" cmpd="sng" algn="ctr">
-                      <a:solidFill>
-                        <a:srgbClr val="000000"/>
-                      </a:solidFill>
-                      <a:prstDash val="solid"/>
-                      <a:round/>
-                      <a:headEnd type="none" w="med" len="med"/>
-                      <a:tailEnd type="none" w="med" len="med"/>
+                    <a:lnT w="0" cap="flat" cmpd="sng" algn="ctr">
+                      <a:noFill/>
                     </a:lnT>
-                    <a:lnB w="12700" cap="flat" cmpd="sng" algn="ctr">
-                      <a:solidFill>
-                        <a:srgbClr val="000000"/>
-                      </a:solidFill>
-                      <a:prstDash val="solid"/>
-                      <a:round/>
-                      <a:headEnd type="none" w="med" len="med"/>
-                      <a:tailEnd type="none" w="med" len="med"/>
+                    <a:lnB w="0" cap="flat" cmpd="sng" algn="ctr">
+                      <a:noFill/>
                     </a:lnB>
                   </a:tcPr>
                 </a:tc>
@@ -16828,23 +16686,11 @@
                       <a:headEnd type="none" w="med" len="med"/>
                       <a:tailEnd type="none" w="med" len="med"/>
                     </a:lnR>
-                    <a:lnT w="12700" cap="flat" cmpd="sng" algn="ctr">
-                      <a:solidFill>
-                        <a:srgbClr val="000000"/>
-                      </a:solidFill>
-                      <a:prstDash val="solid"/>
-                      <a:round/>
-                      <a:headEnd type="none" w="med" len="med"/>
-                      <a:tailEnd type="none" w="med" len="med"/>
+                    <a:lnT w="0" cap="flat" cmpd="sng" algn="ctr">
+                      <a:noFill/>
                     </a:lnT>
-                    <a:lnB w="12700" cap="flat" cmpd="sng" algn="ctr">
-                      <a:solidFill>
-                        <a:srgbClr val="000000"/>
-                      </a:solidFill>
-                      <a:prstDash val="solid"/>
-                      <a:round/>
-                      <a:headEnd type="none" w="med" len="med"/>
-                      <a:tailEnd type="none" w="med" len="med"/>
+                    <a:lnB w="0" cap="flat" cmpd="sng" algn="ctr">
+                      <a:noFill/>
                     </a:lnB>
                   </a:tcPr>
                 </a:tc>
@@ -16895,23 +16741,11 @@
                       <a:headEnd type="none" w="med" len="med"/>
                       <a:tailEnd type="none" w="med" len="med"/>
                     </a:lnR>
-                    <a:lnT w="12700" cap="flat" cmpd="sng" algn="ctr">
-                      <a:solidFill>
-                        <a:srgbClr val="000000"/>
-                      </a:solidFill>
-                      <a:prstDash val="solid"/>
-                      <a:round/>
-                      <a:headEnd type="none" w="med" len="med"/>
-                      <a:tailEnd type="none" w="med" len="med"/>
+                    <a:lnT w="0" cap="flat" cmpd="sng" algn="ctr">
+                      <a:noFill/>
                     </a:lnT>
-                    <a:lnB w="12700" cap="flat" cmpd="sng" algn="ctr">
-                      <a:solidFill>
-                        <a:srgbClr val="000000"/>
-                      </a:solidFill>
-                      <a:prstDash val="solid"/>
-                      <a:round/>
-                      <a:headEnd type="none" w="med" len="med"/>
-                      <a:tailEnd type="none" w="med" len="med"/>
+                    <a:lnB w="0" cap="flat" cmpd="sng" algn="ctr">
+                      <a:noFill/>
                     </a:lnB>
                   </a:tcPr>
                 </a:tc>
@@ -16960,23 +16794,11 @@
                       <a:headEnd type="none" w="med" len="med"/>
                       <a:tailEnd type="none" w="med" len="med"/>
                     </a:lnR>
-                    <a:lnT w="12700" cap="flat" cmpd="sng" algn="ctr">
-                      <a:solidFill>
-                        <a:srgbClr val="000000"/>
-                      </a:solidFill>
-                      <a:prstDash val="solid"/>
-                      <a:round/>
-                      <a:headEnd type="none" w="med" len="med"/>
-                      <a:tailEnd type="none" w="med" len="med"/>
+                    <a:lnT w="0" cap="flat" cmpd="sng" algn="ctr">
+                      <a:noFill/>
                     </a:lnT>
-                    <a:lnB w="12700" cap="flat" cmpd="sng" algn="ctr">
-                      <a:solidFill>
-                        <a:srgbClr val="000000"/>
-                      </a:solidFill>
-                      <a:prstDash val="solid"/>
-                      <a:round/>
-                      <a:headEnd type="none" w="med" len="med"/>
-                      <a:tailEnd type="none" w="med" len="med"/>
+                    <a:lnB w="0" cap="flat" cmpd="sng" algn="ctr">
+                      <a:noFill/>
                     </a:lnB>
                   </a:tcPr>
                 </a:tc>
@@ -17027,14 +16849,8 @@
                       <a:headEnd type="none" w="med" len="med"/>
                       <a:tailEnd type="none" w="med" len="med"/>
                     </a:lnR>
-                    <a:lnT w="12700" cap="flat" cmpd="sng" algn="ctr">
-                      <a:solidFill>
-                        <a:srgbClr val="000000"/>
-                      </a:solidFill>
-                      <a:prstDash val="solid"/>
-                      <a:round/>
-                      <a:headEnd type="none" w="med" len="med"/>
-                      <a:tailEnd type="none" w="med" len="med"/>
+                    <a:lnT w="0" cap="flat" cmpd="sng" algn="ctr">
+                      <a:noFill/>
                     </a:lnT>
                     <a:lnB w="12700" cap="flat" cmpd="sng" algn="ctr">
                       <a:solidFill>
@@ -17092,14 +16908,8 @@
                       <a:headEnd type="none" w="med" len="med"/>
                       <a:tailEnd type="none" w="med" len="med"/>
                     </a:lnR>
-                    <a:lnT w="12700" cap="flat" cmpd="sng" algn="ctr">
-                      <a:solidFill>
-                        <a:srgbClr val="000000"/>
-                      </a:solidFill>
-                      <a:prstDash val="solid"/>
-                      <a:round/>
-                      <a:headEnd type="none" w="med" len="med"/>
-                      <a:tailEnd type="none" w="med" len="med"/>
+                    <a:lnT w="0" cap="flat" cmpd="sng" algn="ctr">
+                      <a:noFill/>
                     </a:lnT>
                     <a:lnB w="12700" cap="flat" cmpd="sng" algn="ctr">
                       <a:solidFill>
@@ -17119,7 +16929,76 @@
       </p:graphicFrame>
       <p:sp>
         <p:nvSpPr>
-          <p:cNvPr id="18" name="Text 14"/>
+          <p:cNvPr id="17" name="Shape 14"/>
+          <p:cNvSpPr/>
+          <p:nvPr/>
+        </p:nvSpPr>
+        <p:spPr>
+          <a:xfrm>
+            <a:off x="914400" y="4096512"/>
+            <a:ext cx="7772400" cy="0"/>
+          </a:xfrm>
+          <a:prstGeom prst="line">
+            <a:avLst/>
+          </a:prstGeom>
+          <a:noFill/>
+          <a:ln w="12700">
+            <a:solidFill>
+              <a:srgbClr val="000000"/>
+            </a:solidFill>
+            <a:prstDash val="dash"/>
+          </a:ln>
+        </p:spPr>
+      </p:sp>
+      <p:sp>
+        <p:nvSpPr>
+          <p:cNvPr id="18" name="Shape 15"/>
+          <p:cNvSpPr/>
+          <p:nvPr/>
+        </p:nvSpPr>
+        <p:spPr>
+          <a:xfrm>
+            <a:off x="914400" y="4498848"/>
+            <a:ext cx="7772400" cy="0"/>
+          </a:xfrm>
+          <a:prstGeom prst="line">
+            <a:avLst/>
+          </a:prstGeom>
+          <a:noFill/>
+          <a:ln w="12700">
+            <a:solidFill>
+              <a:srgbClr val="000000"/>
+            </a:solidFill>
+            <a:prstDash val="dash"/>
+          </a:ln>
+        </p:spPr>
+      </p:sp>
+      <p:sp>
+        <p:nvSpPr>
+          <p:cNvPr id="19" name="Shape 16"/>
+          <p:cNvSpPr/>
+          <p:nvPr/>
+        </p:nvSpPr>
+        <p:spPr>
+          <a:xfrm>
+            <a:off x="914400" y="4864608"/>
+            <a:ext cx="7772400" cy="0"/>
+          </a:xfrm>
+          <a:prstGeom prst="line">
+            <a:avLst/>
+          </a:prstGeom>
+          <a:noFill/>
+          <a:ln w="12700">
+            <a:solidFill>
+              <a:srgbClr val="000000"/>
+            </a:solidFill>
+            <a:prstDash val="dash"/>
+          </a:ln>
+        </p:spPr>
+      </p:sp>
+      <p:sp>
+        <p:nvSpPr>
+          <p:cNvPr id="21" name="Text 17"/>
           <p:cNvSpPr txBox="1"/>
           <p:nvPr/>
         </p:nvSpPr>
@@ -17844,14 +17723,8 @@
                       <a:headEnd type="none" w="med" len="med"/>
                       <a:tailEnd type="none" w="med" len="med"/>
                     </a:lnT>
-                    <a:lnB w="12700" cap="flat" cmpd="sng" algn="ctr">
-                      <a:solidFill>
-                        <a:srgbClr val="000000"/>
-                      </a:solidFill>
-                      <a:prstDash val="solid"/>
-                      <a:round/>
-                      <a:headEnd type="none" w="med" len="med"/>
-                      <a:tailEnd type="none" w="med" len="med"/>
+                    <a:lnB w="0" cap="flat" cmpd="sng" algn="ctr">
+                      <a:noFill/>
                     </a:lnB>
                   </a:tcPr>
                 </a:tc>
@@ -17909,14 +17782,8 @@
                       <a:headEnd type="none" w="med" len="med"/>
                       <a:tailEnd type="none" w="med" len="med"/>
                     </a:lnT>
-                    <a:lnB w="12700" cap="flat" cmpd="sng" algn="ctr">
-                      <a:solidFill>
-                        <a:srgbClr val="000000"/>
-                      </a:solidFill>
-                      <a:prstDash val="solid"/>
-                      <a:round/>
-                      <a:headEnd type="none" w="med" len="med"/>
-                      <a:tailEnd type="none" w="med" len="med"/>
+                    <a:lnB w="0" cap="flat" cmpd="sng" algn="ctr">
+                      <a:noFill/>
                     </a:lnB>
                   </a:tcPr>
                 </a:tc>
@@ -18056,23 +17923,11 @@
                       <a:headEnd type="none" w="med" len="med"/>
                       <a:tailEnd type="none" w="med" len="med"/>
                     </a:lnR>
-                    <a:lnT w="12700" cap="flat" cmpd="sng" algn="ctr">
-                      <a:solidFill>
-                        <a:srgbClr val="000000"/>
-                      </a:solidFill>
-                      <a:prstDash val="solid"/>
-                      <a:round/>
-                      <a:headEnd type="none" w="med" len="med"/>
-                      <a:tailEnd type="none" w="med" len="med"/>
+                    <a:lnT w="0" cap="flat" cmpd="sng" algn="ctr">
+                      <a:noFill/>
                     </a:lnT>
-                    <a:lnB w="12700" cap="flat" cmpd="sng" algn="ctr">
-                      <a:solidFill>
-                        <a:srgbClr val="000000"/>
-                      </a:solidFill>
-                      <a:prstDash val="solid"/>
-                      <a:round/>
-                      <a:headEnd type="none" w="med" len="med"/>
-                      <a:tailEnd type="none" w="med" len="med"/>
+                    <a:lnB w="0" cap="flat" cmpd="sng" algn="ctr">
+                      <a:noFill/>
                     </a:lnB>
                   </a:tcPr>
                 </a:tc>
@@ -18121,23 +17976,11 @@
                       <a:headEnd type="none" w="med" len="med"/>
                       <a:tailEnd type="none" w="med" len="med"/>
                     </a:lnR>
-                    <a:lnT w="12700" cap="flat" cmpd="sng" algn="ctr">
-                      <a:solidFill>
-                        <a:srgbClr val="000000"/>
-                      </a:solidFill>
-                      <a:prstDash val="solid"/>
-                      <a:round/>
-                      <a:headEnd type="none" w="med" len="med"/>
-                      <a:tailEnd type="none" w="med" len="med"/>
+                    <a:lnT w="0" cap="flat" cmpd="sng" algn="ctr">
+                      <a:noFill/>
                     </a:lnT>
-                    <a:lnB w="12700" cap="flat" cmpd="sng" algn="ctr">
-                      <a:solidFill>
-                        <a:srgbClr val="000000"/>
-                      </a:solidFill>
-                      <a:prstDash val="solid"/>
-                      <a:round/>
-                      <a:headEnd type="none" w="med" len="med"/>
-                      <a:tailEnd type="none" w="med" len="med"/>
+                    <a:lnB w="0" cap="flat" cmpd="sng" algn="ctr">
+                      <a:noFill/>
                     </a:lnB>
                   </a:tcPr>
                 </a:tc>
@@ -18191,23 +18034,11 @@
                       <a:headEnd type="none" w="med" len="med"/>
                       <a:tailEnd type="none" w="med" len="med"/>
                     </a:lnR>
-                    <a:lnT w="12700" cap="flat" cmpd="sng" algn="ctr">
-                      <a:solidFill>
-                        <a:srgbClr val="000000"/>
-                      </a:solidFill>
-                      <a:prstDash val="solid"/>
-                      <a:round/>
-                      <a:headEnd type="none" w="med" len="med"/>
-                      <a:tailEnd type="none" w="med" len="med"/>
+                    <a:lnT w="0" cap="flat" cmpd="sng" algn="ctr">
+                      <a:noFill/>
                     </a:lnT>
-                    <a:lnB w="12700" cap="flat" cmpd="sng" algn="ctr">
-                      <a:solidFill>
-                        <a:srgbClr val="000000"/>
-                      </a:solidFill>
-                      <a:prstDash val="solid"/>
-                      <a:round/>
-                      <a:headEnd type="none" w="med" len="med"/>
-                      <a:tailEnd type="none" w="med" len="med"/>
+                    <a:lnB w="0" cap="flat" cmpd="sng" algn="ctr">
+                      <a:noFill/>
                     </a:lnB>
                   </a:tcPr>
                 </a:tc>
@@ -18256,23 +18087,11 @@
                       <a:headEnd type="none" w="med" len="med"/>
                       <a:tailEnd type="none" w="med" len="med"/>
                     </a:lnR>
-                    <a:lnT w="12700" cap="flat" cmpd="sng" algn="ctr">
-                      <a:solidFill>
-                        <a:srgbClr val="000000"/>
-                      </a:solidFill>
-                      <a:prstDash val="solid"/>
-                      <a:round/>
-                      <a:headEnd type="none" w="med" len="med"/>
-                      <a:tailEnd type="none" w="med" len="med"/>
+                    <a:lnT w="0" cap="flat" cmpd="sng" algn="ctr">
+                      <a:noFill/>
                     </a:lnT>
-                    <a:lnB w="12700" cap="flat" cmpd="sng" algn="ctr">
-                      <a:solidFill>
-                        <a:srgbClr val="000000"/>
-                      </a:solidFill>
-                      <a:prstDash val="solid"/>
-                      <a:round/>
-                      <a:headEnd type="none" w="med" len="med"/>
-                      <a:tailEnd type="none" w="med" len="med"/>
+                    <a:lnB w="0" cap="flat" cmpd="sng" algn="ctr">
+                      <a:noFill/>
                     </a:lnB>
                   </a:tcPr>
                 </a:tc>
@@ -18326,14 +18145,8 @@
                       <a:headEnd type="none" w="med" len="med"/>
                       <a:tailEnd type="none" w="med" len="med"/>
                     </a:lnR>
-                    <a:lnT w="12700" cap="flat" cmpd="sng" algn="ctr">
-                      <a:solidFill>
-                        <a:srgbClr val="000000"/>
-                      </a:solidFill>
-                      <a:prstDash val="solid"/>
-                      <a:round/>
-                      <a:headEnd type="none" w="med" len="med"/>
-                      <a:tailEnd type="none" w="med" len="med"/>
+                    <a:lnT w="0" cap="flat" cmpd="sng" algn="ctr">
+                      <a:noFill/>
                     </a:lnT>
                     <a:lnB w="12700" cap="flat" cmpd="sng" algn="ctr">
                       <a:solidFill>
@@ -18391,14 +18204,8 @@
                       <a:headEnd type="none" w="med" len="med"/>
                       <a:tailEnd type="none" w="med" len="med"/>
                     </a:lnR>
-                    <a:lnT w="12700" cap="flat" cmpd="sng" algn="ctr">
-                      <a:solidFill>
-                        <a:srgbClr val="000000"/>
-                      </a:solidFill>
-                      <a:prstDash val="solid"/>
-                      <a:round/>
-                      <a:headEnd type="none" w="med" len="med"/>
-                      <a:tailEnd type="none" w="med" len="med"/>
+                    <a:lnT w="0" cap="flat" cmpd="sng" algn="ctr">
+                      <a:noFill/>
                     </a:lnT>
                     <a:lnB w="12700" cap="flat" cmpd="sng" algn="ctr">
                       <a:solidFill>
@@ -18562,7 +18369,76 @@
       </p:graphicFrame>
       <p:sp>
         <p:nvSpPr>
-          <p:cNvPr id="13" name="Text 10"/>
+          <p:cNvPr id="13" name="Shape 10"/>
+          <p:cNvSpPr/>
+          <p:nvPr/>
+        </p:nvSpPr>
+        <p:spPr>
+          <a:xfrm>
+            <a:off x="914400" y="3163824"/>
+            <a:ext cx="4572000" cy="0"/>
+          </a:xfrm>
+          <a:prstGeom prst="line">
+            <a:avLst/>
+          </a:prstGeom>
+          <a:noFill/>
+          <a:ln w="12700">
+            <a:solidFill>
+              <a:srgbClr val="000000"/>
+            </a:solidFill>
+            <a:prstDash val="dash"/>
+          </a:ln>
+        </p:spPr>
+      </p:sp>
+      <p:sp>
+        <p:nvSpPr>
+          <p:cNvPr id="14" name="Shape 11"/>
+          <p:cNvSpPr/>
+          <p:nvPr/>
+        </p:nvSpPr>
+        <p:spPr>
+          <a:xfrm>
+            <a:off x="914400" y="3493008"/>
+            <a:ext cx="4572000" cy="0"/>
+          </a:xfrm>
+          <a:prstGeom prst="line">
+            <a:avLst/>
+          </a:prstGeom>
+          <a:noFill/>
+          <a:ln w="12700">
+            <a:solidFill>
+              <a:srgbClr val="000000"/>
+            </a:solidFill>
+            <a:prstDash val="dash"/>
+          </a:ln>
+        </p:spPr>
+      </p:sp>
+      <p:sp>
+        <p:nvSpPr>
+          <p:cNvPr id="15" name="Shape 12"/>
+          <p:cNvSpPr/>
+          <p:nvPr/>
+        </p:nvSpPr>
+        <p:spPr>
+          <a:xfrm>
+            <a:off x="914400" y="3822192"/>
+            <a:ext cx="4572000" cy="0"/>
+          </a:xfrm>
+          <a:prstGeom prst="line">
+            <a:avLst/>
+          </a:prstGeom>
+          <a:noFill/>
+          <a:ln w="12700">
+            <a:solidFill>
+              <a:srgbClr val="000000"/>
+            </a:solidFill>
+            <a:prstDash val="dash"/>
+          </a:ln>
+        </p:spPr>
+      </p:sp>
+      <p:sp>
+        <p:nvSpPr>
+          <p:cNvPr id="16" name="Text 13"/>
           <p:cNvSpPr txBox="1"/>
           <p:nvPr/>
         </p:nvSpPr>
@@ -18601,7 +18477,7 @@
       </p:sp>
       <p:sp>
         <p:nvSpPr>
-          <p:cNvPr id="14" name="Text 11"/>
+          <p:cNvPr id="17" name="Text 14"/>
           <p:cNvSpPr txBox="1"/>
           <p:nvPr/>
         </p:nvSpPr>
@@ -18640,7 +18516,7 @@
       </p:sp>
       <p:sp>
         <p:nvSpPr>
-          <p:cNvPr id="15" name="Text 12"/>
+          <p:cNvPr id="18" name="Text 15"/>
           <p:cNvSpPr txBox="1"/>
           <p:nvPr/>
         </p:nvSpPr>
@@ -18682,7 +18558,7 @@
       </p:sp>
       <p:sp>
         <p:nvSpPr>
-          <p:cNvPr id="16" name="Text 13"/>
+          <p:cNvPr id="19" name="Text 16"/>
           <p:cNvSpPr txBox="1"/>
           <p:nvPr/>
         </p:nvSpPr>
@@ -18721,7 +18597,7 @@
       </p:sp>
       <p:sp>
         <p:nvSpPr>
-          <p:cNvPr id="17" name="Text 14"/>
+          <p:cNvPr id="20" name="Text 17"/>
           <p:cNvSpPr txBox="1"/>
           <p:nvPr/>
         </p:nvSpPr>
@@ -18763,7 +18639,7 @@
       </p:sp>
       <p:sp>
         <p:nvSpPr>
-          <p:cNvPr id="18" name="Text 15"/>
+          <p:cNvPr id="21" name="Text 18"/>
           <p:cNvSpPr txBox="1"/>
           <p:nvPr/>
         </p:nvSpPr>
@@ -18802,7 +18678,7 @@
       </p:sp>
       <p:sp>
         <p:nvSpPr>
-          <p:cNvPr id="19" name="Text 16"/>
+          <p:cNvPr id="22" name="Text 19"/>
           <p:cNvSpPr txBox="1"/>
           <p:nvPr/>
         </p:nvSpPr>
@@ -18844,7 +18720,7 @@
       </p:sp>
       <p:sp>
         <p:nvSpPr>
-          <p:cNvPr id="21" name="Text 17"/>
+          <p:cNvPr id="24" name="Text 20"/>
           <p:cNvSpPr txBox="1"/>
           <p:nvPr/>
         </p:nvSpPr>
@@ -19569,14 +19445,8 @@
                       <a:headEnd type="none" w="med" len="med"/>
                       <a:tailEnd type="none" w="med" len="med"/>
                     </a:lnT>
-                    <a:lnB w="12700" cap="flat" cmpd="sng" algn="ctr">
-                      <a:solidFill>
-                        <a:srgbClr val="000000"/>
-                      </a:solidFill>
-                      <a:prstDash val="solid"/>
-                      <a:round/>
-                      <a:headEnd type="none" w="med" len="med"/>
-                      <a:tailEnd type="none" w="med" len="med"/>
+                    <a:lnB w="0" cap="flat" cmpd="sng" algn="ctr">
+                      <a:noFill/>
                     </a:lnB>
                   </a:tcPr>
                 </a:tc>
@@ -19634,14 +19504,8 @@
                       <a:headEnd type="none" w="med" len="med"/>
                       <a:tailEnd type="none" w="med" len="med"/>
                     </a:lnT>
-                    <a:lnB w="12700" cap="flat" cmpd="sng" algn="ctr">
-                      <a:solidFill>
-                        <a:srgbClr val="000000"/>
-                      </a:solidFill>
-                      <a:prstDash val="solid"/>
-                      <a:round/>
-                      <a:headEnd type="none" w="med" len="med"/>
-                      <a:tailEnd type="none" w="med" len="med"/>
+                    <a:lnB w="0" cap="flat" cmpd="sng" algn="ctr">
+                      <a:noFill/>
                     </a:lnB>
                   </a:tcPr>
                 </a:tc>
@@ -19781,23 +19645,11 @@
                       <a:headEnd type="none" w="med" len="med"/>
                       <a:tailEnd type="none" w="med" len="med"/>
                     </a:lnR>
-                    <a:lnT w="12700" cap="flat" cmpd="sng" algn="ctr">
-                      <a:solidFill>
-                        <a:srgbClr val="000000"/>
-                      </a:solidFill>
-                      <a:prstDash val="solid"/>
-                      <a:round/>
-                      <a:headEnd type="none" w="med" len="med"/>
-                      <a:tailEnd type="none" w="med" len="med"/>
+                    <a:lnT w="0" cap="flat" cmpd="sng" algn="ctr">
+                      <a:noFill/>
                     </a:lnT>
-                    <a:lnB w="12700" cap="flat" cmpd="sng" algn="ctr">
-                      <a:solidFill>
-                        <a:srgbClr val="000000"/>
-                      </a:solidFill>
-                      <a:prstDash val="solid"/>
-                      <a:round/>
-                      <a:headEnd type="none" w="med" len="med"/>
-                      <a:tailEnd type="none" w="med" len="med"/>
+                    <a:lnB w="0" cap="flat" cmpd="sng" algn="ctr">
+                      <a:noFill/>
                     </a:lnB>
                   </a:tcPr>
                 </a:tc>
@@ -19846,23 +19698,11 @@
                       <a:headEnd type="none" w="med" len="med"/>
                       <a:tailEnd type="none" w="med" len="med"/>
                     </a:lnR>
-                    <a:lnT w="12700" cap="flat" cmpd="sng" algn="ctr">
-                      <a:solidFill>
-                        <a:srgbClr val="000000"/>
-                      </a:solidFill>
-                      <a:prstDash val="solid"/>
-                      <a:round/>
-                      <a:headEnd type="none" w="med" len="med"/>
-                      <a:tailEnd type="none" w="med" len="med"/>
+                    <a:lnT w="0" cap="flat" cmpd="sng" algn="ctr">
+                      <a:noFill/>
                     </a:lnT>
-                    <a:lnB w="12700" cap="flat" cmpd="sng" algn="ctr">
-                      <a:solidFill>
-                        <a:srgbClr val="000000"/>
-                      </a:solidFill>
-                      <a:prstDash val="solid"/>
-                      <a:round/>
-                      <a:headEnd type="none" w="med" len="med"/>
-                      <a:tailEnd type="none" w="med" len="med"/>
+                    <a:lnB w="0" cap="flat" cmpd="sng" algn="ctr">
+                      <a:noFill/>
                     </a:lnB>
                   </a:tcPr>
                 </a:tc>
@@ -19916,23 +19756,11 @@
                       <a:headEnd type="none" w="med" len="med"/>
                       <a:tailEnd type="none" w="med" len="med"/>
                     </a:lnR>
-                    <a:lnT w="12700" cap="flat" cmpd="sng" algn="ctr">
-                      <a:solidFill>
-                        <a:srgbClr val="000000"/>
-                      </a:solidFill>
-                      <a:prstDash val="solid"/>
-                      <a:round/>
-                      <a:headEnd type="none" w="med" len="med"/>
-                      <a:tailEnd type="none" w="med" len="med"/>
+                    <a:lnT w="0" cap="flat" cmpd="sng" algn="ctr">
+                      <a:noFill/>
                     </a:lnT>
-                    <a:lnB w="12700" cap="flat" cmpd="sng" algn="ctr">
-                      <a:solidFill>
-                        <a:srgbClr val="000000"/>
-                      </a:solidFill>
-                      <a:prstDash val="solid"/>
-                      <a:round/>
-                      <a:headEnd type="none" w="med" len="med"/>
-                      <a:tailEnd type="none" w="med" len="med"/>
+                    <a:lnB w="0" cap="flat" cmpd="sng" algn="ctr">
+                      <a:noFill/>
                     </a:lnB>
                   </a:tcPr>
                 </a:tc>
@@ -19981,23 +19809,11 @@
                       <a:headEnd type="none" w="med" len="med"/>
                       <a:tailEnd type="none" w="med" len="med"/>
                     </a:lnR>
-                    <a:lnT w="12700" cap="flat" cmpd="sng" algn="ctr">
-                      <a:solidFill>
-                        <a:srgbClr val="000000"/>
-                      </a:solidFill>
-                      <a:prstDash val="solid"/>
-                      <a:round/>
-                      <a:headEnd type="none" w="med" len="med"/>
-                      <a:tailEnd type="none" w="med" len="med"/>
+                    <a:lnT w="0" cap="flat" cmpd="sng" algn="ctr">
+                      <a:noFill/>
                     </a:lnT>
-                    <a:lnB w="12700" cap="flat" cmpd="sng" algn="ctr">
-                      <a:solidFill>
-                        <a:srgbClr val="000000"/>
-                      </a:solidFill>
-                      <a:prstDash val="solid"/>
-                      <a:round/>
-                      <a:headEnd type="none" w="med" len="med"/>
-                      <a:tailEnd type="none" w="med" len="med"/>
+                    <a:lnB w="0" cap="flat" cmpd="sng" algn="ctr">
+                      <a:noFill/>
                     </a:lnB>
                   </a:tcPr>
                 </a:tc>
@@ -20051,14 +19867,8 @@
                       <a:headEnd type="none" w="med" len="med"/>
                       <a:tailEnd type="none" w="med" len="med"/>
                     </a:lnR>
-                    <a:lnT w="12700" cap="flat" cmpd="sng" algn="ctr">
-                      <a:solidFill>
-                        <a:srgbClr val="000000"/>
-                      </a:solidFill>
-                      <a:prstDash val="solid"/>
-                      <a:round/>
-                      <a:headEnd type="none" w="med" len="med"/>
-                      <a:tailEnd type="none" w="med" len="med"/>
+                    <a:lnT w="0" cap="flat" cmpd="sng" algn="ctr">
+                      <a:noFill/>
                     </a:lnT>
                     <a:lnB w="12700" cap="flat" cmpd="sng" algn="ctr">
                       <a:solidFill>
@@ -20116,14 +19926,8 @@
                       <a:headEnd type="none" w="med" len="med"/>
                       <a:tailEnd type="none" w="med" len="med"/>
                     </a:lnR>
-                    <a:lnT w="12700" cap="flat" cmpd="sng" algn="ctr">
-                      <a:solidFill>
-                        <a:srgbClr val="000000"/>
-                      </a:solidFill>
-                      <a:prstDash val="solid"/>
-                      <a:round/>
-                      <a:headEnd type="none" w="med" len="med"/>
-                      <a:tailEnd type="none" w="med" len="med"/>
+                    <a:lnT w="0" cap="flat" cmpd="sng" algn="ctr">
+                      <a:noFill/>
                     </a:lnT>
                     <a:lnB w="12700" cap="flat" cmpd="sng" algn="ctr">
                       <a:solidFill>
@@ -20287,7 +20091,76 @@
       </p:graphicFrame>
       <p:sp>
         <p:nvSpPr>
-          <p:cNvPr id="13" name="Text 10"/>
+          <p:cNvPr id="13" name="Shape 10"/>
+          <p:cNvSpPr/>
+          <p:nvPr/>
+        </p:nvSpPr>
+        <p:spPr>
+          <a:xfrm>
+            <a:off x="914400" y="3163824"/>
+            <a:ext cx="4572000" cy="0"/>
+          </a:xfrm>
+          <a:prstGeom prst="line">
+            <a:avLst/>
+          </a:prstGeom>
+          <a:noFill/>
+          <a:ln w="12700">
+            <a:solidFill>
+              <a:srgbClr val="000000"/>
+            </a:solidFill>
+            <a:prstDash val="dash"/>
+          </a:ln>
+        </p:spPr>
+      </p:sp>
+      <p:sp>
+        <p:nvSpPr>
+          <p:cNvPr id="14" name="Shape 11"/>
+          <p:cNvSpPr/>
+          <p:nvPr/>
+        </p:nvSpPr>
+        <p:spPr>
+          <a:xfrm>
+            <a:off x="914400" y="3493008"/>
+            <a:ext cx="4572000" cy="0"/>
+          </a:xfrm>
+          <a:prstGeom prst="line">
+            <a:avLst/>
+          </a:prstGeom>
+          <a:noFill/>
+          <a:ln w="12700">
+            <a:solidFill>
+              <a:srgbClr val="000000"/>
+            </a:solidFill>
+            <a:prstDash val="dash"/>
+          </a:ln>
+        </p:spPr>
+      </p:sp>
+      <p:sp>
+        <p:nvSpPr>
+          <p:cNvPr id="15" name="Shape 12"/>
+          <p:cNvSpPr/>
+          <p:nvPr/>
+        </p:nvSpPr>
+        <p:spPr>
+          <a:xfrm>
+            <a:off x="914400" y="3822192"/>
+            <a:ext cx="4572000" cy="0"/>
+          </a:xfrm>
+          <a:prstGeom prst="line">
+            <a:avLst/>
+          </a:prstGeom>
+          <a:noFill/>
+          <a:ln w="12700">
+            <a:solidFill>
+              <a:srgbClr val="000000"/>
+            </a:solidFill>
+            <a:prstDash val="dash"/>
+          </a:ln>
+        </p:spPr>
+      </p:sp>
+      <p:sp>
+        <p:nvSpPr>
+          <p:cNvPr id="16" name="Text 13"/>
           <p:cNvSpPr txBox="1"/>
           <p:nvPr/>
         </p:nvSpPr>
@@ -20326,7 +20199,7 @@
       </p:sp>
       <p:sp>
         <p:nvSpPr>
-          <p:cNvPr id="14" name="Text 11"/>
+          <p:cNvPr id="17" name="Text 14"/>
           <p:cNvSpPr txBox="1"/>
           <p:nvPr/>
         </p:nvSpPr>
@@ -20365,7 +20238,7 @@
       </p:sp>
       <p:sp>
         <p:nvSpPr>
-          <p:cNvPr id="15" name="Text 12"/>
+          <p:cNvPr id="18" name="Text 15"/>
           <p:cNvSpPr txBox="1"/>
           <p:nvPr/>
         </p:nvSpPr>
@@ -20407,7 +20280,7 @@
       </p:sp>
       <p:sp>
         <p:nvSpPr>
-          <p:cNvPr id="16" name="Text 13"/>
+          <p:cNvPr id="19" name="Text 16"/>
           <p:cNvSpPr txBox="1"/>
           <p:nvPr/>
         </p:nvSpPr>
@@ -20446,7 +20319,7 @@
       </p:sp>
       <p:sp>
         <p:nvSpPr>
-          <p:cNvPr id="17" name="Text 14"/>
+          <p:cNvPr id="20" name="Text 17"/>
           <p:cNvSpPr txBox="1"/>
           <p:nvPr/>
         </p:nvSpPr>
@@ -20488,7 +20361,7 @@
       </p:sp>
       <p:sp>
         <p:nvSpPr>
-          <p:cNvPr id="19" name="Text 15"/>
+          <p:cNvPr id="22" name="Text 18"/>
           <p:cNvSpPr txBox="1"/>
           <p:nvPr/>
         </p:nvSpPr>

--- a/docs/2027년_사무직원_채용계획안.pptx
+++ b/docs/2027년_사무직원_채용계획안.pptx
@@ -2735,8 +2735,14 @@
                       <a:headEnd type="none" w="med" len="med"/>
                       <a:tailEnd type="none" w="med" len="med"/>
                     </a:lnT>
-                    <a:lnB w="0" cap="flat" cmpd="sng" algn="ctr">
-                      <a:noFill/>
+                    <a:lnB w="12700" cap="flat" cmpd="sng" algn="ctr">
+                      <a:solidFill>
+                        <a:srgbClr val="000000"/>
+                      </a:solidFill>
+                      <a:prstDash val="solid"/>
+                      <a:round/>
+                      <a:headEnd type="none" w="med" len="med"/>
+                      <a:tailEnd type="none" w="med" len="med"/>
                     </a:lnB>
                   </a:tcPr>
                 </a:tc>
@@ -2794,8 +2800,14 @@
                       <a:headEnd type="none" w="med" len="med"/>
                       <a:tailEnd type="none" w="med" len="med"/>
                     </a:lnT>
-                    <a:lnB w="0" cap="flat" cmpd="sng" algn="ctr">
-                      <a:noFill/>
+                    <a:lnB w="12700" cap="flat" cmpd="sng" algn="ctr">
+                      <a:solidFill>
+                        <a:srgbClr val="000000"/>
+                      </a:solidFill>
+                      <a:prstDash val="solid"/>
+                      <a:round/>
+                      <a:headEnd type="none" w="med" len="med"/>
+                      <a:tailEnd type="none" w="med" len="med"/>
                     </a:lnB>
                   </a:tcPr>
                 </a:tc>
@@ -2846,8 +2858,14 @@
                       <a:headEnd type="none" w="med" len="med"/>
                       <a:tailEnd type="none" w="med" len="med"/>
                     </a:lnR>
-                    <a:lnT w="0" cap="flat" cmpd="sng" algn="ctr">
-                      <a:noFill/>
+                    <a:lnT w="12700" cap="flat" cmpd="sng" algn="ctr">
+                      <a:solidFill>
+                        <a:srgbClr val="000000"/>
+                      </a:solidFill>
+                      <a:prstDash val="solid"/>
+                      <a:round/>
+                      <a:headEnd type="none" w="med" len="med"/>
+                      <a:tailEnd type="none" w="med" len="med"/>
                     </a:lnT>
                     <a:lnB w="12700" cap="flat" cmpd="sng" algn="ctr">
                       <a:solidFill>
@@ -2905,8 +2923,14 @@
                       <a:headEnd type="none" w="med" len="med"/>
                       <a:tailEnd type="none" w="med" len="med"/>
                     </a:lnR>
-                    <a:lnT w="0" cap="flat" cmpd="sng" algn="ctr">
-                      <a:noFill/>
+                    <a:lnT w="12700" cap="flat" cmpd="sng" algn="ctr">
+                      <a:solidFill>
+                        <a:srgbClr val="000000"/>
+                      </a:solidFill>
+                      <a:prstDash val="solid"/>
+                      <a:round/>
+                      <a:headEnd type="none" w="med" len="med"/>
+                      <a:tailEnd type="none" w="med" len="med"/>
                     </a:lnT>
                     <a:lnB w="12700" cap="flat" cmpd="sng" algn="ctr">
                       <a:solidFill>
@@ -2926,30 +2950,7 @@
       </p:graphicFrame>
       <p:sp>
         <p:nvSpPr>
-          <p:cNvPr id="13" name="Shape 10"/>
-          <p:cNvSpPr/>
-          <p:nvPr/>
-        </p:nvSpPr>
-        <p:spPr>
-          <a:xfrm>
-            <a:off x="914400" y="3182112"/>
-            <a:ext cx="7772400" cy="0"/>
-          </a:xfrm>
-          <a:prstGeom prst="line">
-            <a:avLst/>
-          </a:prstGeom>
-          <a:noFill/>
-          <a:ln w="12700">
-            <a:solidFill>
-              <a:srgbClr val="000000"/>
-            </a:solidFill>
-            <a:prstDash val="dash"/>
-          </a:ln>
-        </p:spPr>
-      </p:sp>
-      <p:sp>
-        <p:nvSpPr>
-          <p:cNvPr id="14" name="Text 11"/>
+          <p:cNvPr id="13" name="Text 10"/>
           <p:cNvSpPr txBox="1"/>
           <p:nvPr/>
         </p:nvSpPr>
@@ -3295,8 +3296,14 @@
                       <a:headEnd type="none" w="med" len="med"/>
                       <a:tailEnd type="none" w="med" len="med"/>
                     </a:lnT>
-                    <a:lnB w="0" cap="flat" cmpd="sng" algn="ctr">
-                      <a:noFill/>
+                    <a:lnB w="12700" cap="flat" cmpd="sng" algn="ctr">
+                      <a:solidFill>
+                        <a:srgbClr val="000000"/>
+                      </a:solidFill>
+                      <a:prstDash val="solid"/>
+                      <a:round/>
+                      <a:headEnd type="none" w="med" len="med"/>
+                      <a:tailEnd type="none" w="med" len="med"/>
                     </a:lnB>
                   </a:tcPr>
                 </a:tc>
@@ -3375,8 +3382,14 @@
                       <a:headEnd type="none" w="med" len="med"/>
                       <a:tailEnd type="none" w="med" len="med"/>
                     </a:lnT>
-                    <a:lnB w="0" cap="flat" cmpd="sng" algn="ctr">
-                      <a:noFill/>
+                    <a:lnB w="12700" cap="flat" cmpd="sng" algn="ctr">
+                      <a:solidFill>
+                        <a:srgbClr val="000000"/>
+                      </a:solidFill>
+                      <a:prstDash val="solid"/>
+                      <a:round/>
+                      <a:headEnd type="none" w="med" len="med"/>
+                      <a:tailEnd type="none" w="med" len="med"/>
                     </a:lnB>
                   </a:tcPr>
                 </a:tc>
@@ -3537,8 +3550,14 @@
                       <a:headEnd type="none" w="med" len="med"/>
                       <a:tailEnd type="none" w="med" len="med"/>
                     </a:lnR>
-                    <a:lnT w="0" cap="flat" cmpd="sng" algn="ctr">
-                      <a:noFill/>
+                    <a:lnT w="12700" cap="flat" cmpd="sng" algn="ctr">
+                      <a:solidFill>
+                        <a:srgbClr val="000000"/>
+                      </a:solidFill>
+                      <a:prstDash val="solid"/>
+                      <a:round/>
+                      <a:headEnd type="none" w="med" len="med"/>
+                      <a:tailEnd type="none" w="med" len="med"/>
                     </a:lnT>
                     <a:lnB w="12700" cap="flat" cmpd="sng" algn="ctr">
                       <a:solidFill>
@@ -3596,8 +3615,14 @@
                       <a:headEnd type="none" w="med" len="med"/>
                       <a:tailEnd type="none" w="med" len="med"/>
                     </a:lnR>
-                    <a:lnT w="0" cap="flat" cmpd="sng" algn="ctr">
-                      <a:noFill/>
+                    <a:lnT w="12700" cap="flat" cmpd="sng" algn="ctr">
+                      <a:solidFill>
+                        <a:srgbClr val="000000"/>
+                      </a:solidFill>
+                      <a:prstDash val="solid"/>
+                      <a:round/>
+                      <a:headEnd type="none" w="med" len="med"/>
+                      <a:tailEnd type="none" w="med" len="med"/>
                     </a:lnT>
                     <a:lnB w="12700" cap="flat" cmpd="sng" algn="ctr">
                       <a:solidFill>
@@ -3620,30 +3645,7 @@
       </p:graphicFrame>
       <p:sp>
         <p:nvSpPr>
-          <p:cNvPr id="16" name="Shape 12"/>
-          <p:cNvSpPr/>
-          <p:nvPr/>
-        </p:nvSpPr>
-        <p:spPr>
-          <a:xfrm>
-            <a:off x="914400" y="4956048"/>
-            <a:ext cx="5486400" cy="0"/>
-          </a:xfrm>
-          <a:prstGeom prst="line">
-            <a:avLst/>
-          </a:prstGeom>
-          <a:noFill/>
-          <a:ln w="12700">
-            <a:solidFill>
-              <a:srgbClr val="000000"/>
-            </a:solidFill>
-            <a:prstDash val="dash"/>
-          </a:ln>
-        </p:spPr>
-      </p:sp>
-      <p:sp>
-        <p:nvSpPr>
-          <p:cNvPr id="17" name="Text 13"/>
+          <p:cNvPr id="15" name="Text 11"/>
           <p:cNvSpPr txBox="1"/>
           <p:nvPr/>
         </p:nvSpPr>
@@ -3682,7 +3684,7 @@
       </p:sp>
       <p:sp>
         <p:nvSpPr>
-          <p:cNvPr id="19" name="Text 14"/>
+          <p:cNvPr id="17" name="Text 12"/>
           <p:cNvSpPr txBox="1"/>
           <p:nvPr/>
         </p:nvSpPr>
@@ -4738,8 +4740,14 @@
                       <a:headEnd type="none" w="med" len="med"/>
                       <a:tailEnd type="none" w="med" len="med"/>
                     </a:lnT>
-                    <a:lnB w="0" cap="flat" cmpd="sng" algn="ctr">
-                      <a:noFill/>
+                    <a:lnB w="12700" cap="flat" cmpd="sng" algn="ctr">
+                      <a:solidFill>
+                        <a:srgbClr val="000000"/>
+                      </a:solidFill>
+                      <a:prstDash val="solid"/>
+                      <a:round/>
+                      <a:headEnd type="none" w="med" len="med"/>
+                      <a:tailEnd type="none" w="med" len="med"/>
                     </a:lnB>
                   </a:tcPr>
                 </a:tc>
@@ -4797,8 +4805,14 @@
                       <a:headEnd type="none" w="med" len="med"/>
                       <a:tailEnd type="none" w="med" len="med"/>
                     </a:lnT>
-                    <a:lnB w="0" cap="flat" cmpd="sng" algn="ctr">
-                      <a:noFill/>
+                    <a:lnB w="12700" cap="flat" cmpd="sng" algn="ctr">
+                      <a:solidFill>
+                        <a:srgbClr val="000000"/>
+                      </a:solidFill>
+                      <a:prstDash val="solid"/>
+                      <a:round/>
+                      <a:headEnd type="none" w="med" len="med"/>
+                      <a:tailEnd type="none" w="med" len="med"/>
                     </a:lnB>
                   </a:tcPr>
                 </a:tc>
@@ -4849,11 +4863,23 @@
                       <a:headEnd type="none" w="med" len="med"/>
                       <a:tailEnd type="none" w="med" len="med"/>
                     </a:lnR>
-                    <a:lnT w="0" cap="flat" cmpd="sng" algn="ctr">
-                      <a:noFill/>
+                    <a:lnT w="12700" cap="flat" cmpd="sng" algn="ctr">
+                      <a:solidFill>
+                        <a:srgbClr val="000000"/>
+                      </a:solidFill>
+                      <a:prstDash val="solid"/>
+                      <a:round/>
+                      <a:headEnd type="none" w="med" len="med"/>
+                      <a:tailEnd type="none" w="med" len="med"/>
                     </a:lnT>
-                    <a:lnB w="0" cap="flat" cmpd="sng" algn="ctr">
-                      <a:noFill/>
+                    <a:lnB w="12700" cap="flat" cmpd="sng" algn="ctr">
+                      <a:solidFill>
+                        <a:srgbClr val="000000"/>
+                      </a:solidFill>
+                      <a:prstDash val="solid"/>
+                      <a:round/>
+                      <a:headEnd type="none" w="med" len="med"/>
+                      <a:tailEnd type="none" w="med" len="med"/>
                     </a:lnB>
                   </a:tcPr>
                 </a:tc>
@@ -4902,11 +4928,23 @@
                       <a:headEnd type="none" w="med" len="med"/>
                       <a:tailEnd type="none" w="med" len="med"/>
                     </a:lnR>
-                    <a:lnT w="0" cap="flat" cmpd="sng" algn="ctr">
-                      <a:noFill/>
+                    <a:lnT w="12700" cap="flat" cmpd="sng" algn="ctr">
+                      <a:solidFill>
+                        <a:srgbClr val="000000"/>
+                      </a:solidFill>
+                      <a:prstDash val="solid"/>
+                      <a:round/>
+                      <a:headEnd type="none" w="med" len="med"/>
+                      <a:tailEnd type="none" w="med" len="med"/>
                     </a:lnT>
-                    <a:lnB w="0" cap="flat" cmpd="sng" algn="ctr">
-                      <a:noFill/>
+                    <a:lnB w="12700" cap="flat" cmpd="sng" algn="ctr">
+                      <a:solidFill>
+                        <a:srgbClr val="000000"/>
+                      </a:solidFill>
+                      <a:prstDash val="solid"/>
+                      <a:round/>
+                      <a:headEnd type="none" w="med" len="med"/>
+                      <a:tailEnd type="none" w="med" len="med"/>
                     </a:lnB>
                   </a:tcPr>
                 </a:tc>
@@ -4957,11 +4995,23 @@
                       <a:headEnd type="none" w="med" len="med"/>
                       <a:tailEnd type="none" w="med" len="med"/>
                     </a:lnR>
-                    <a:lnT w="0" cap="flat" cmpd="sng" algn="ctr">
-                      <a:noFill/>
+                    <a:lnT w="12700" cap="flat" cmpd="sng" algn="ctr">
+                      <a:solidFill>
+                        <a:srgbClr val="000000"/>
+                      </a:solidFill>
+                      <a:prstDash val="solid"/>
+                      <a:round/>
+                      <a:headEnd type="none" w="med" len="med"/>
+                      <a:tailEnd type="none" w="med" len="med"/>
                     </a:lnT>
-                    <a:lnB w="0" cap="flat" cmpd="sng" algn="ctr">
-                      <a:noFill/>
+                    <a:lnB w="12700" cap="flat" cmpd="sng" algn="ctr">
+                      <a:solidFill>
+                        <a:srgbClr val="000000"/>
+                      </a:solidFill>
+                      <a:prstDash val="solid"/>
+                      <a:round/>
+                      <a:headEnd type="none" w="med" len="med"/>
+                      <a:tailEnd type="none" w="med" len="med"/>
                     </a:lnB>
                   </a:tcPr>
                 </a:tc>
@@ -5010,11 +5060,23 @@
                       <a:headEnd type="none" w="med" len="med"/>
                       <a:tailEnd type="none" w="med" len="med"/>
                     </a:lnR>
-                    <a:lnT w="0" cap="flat" cmpd="sng" algn="ctr">
-                      <a:noFill/>
+                    <a:lnT w="12700" cap="flat" cmpd="sng" algn="ctr">
+                      <a:solidFill>
+                        <a:srgbClr val="000000"/>
+                      </a:solidFill>
+                      <a:prstDash val="solid"/>
+                      <a:round/>
+                      <a:headEnd type="none" w="med" len="med"/>
+                      <a:tailEnd type="none" w="med" len="med"/>
                     </a:lnT>
-                    <a:lnB w="0" cap="flat" cmpd="sng" algn="ctr">
-                      <a:noFill/>
+                    <a:lnB w="12700" cap="flat" cmpd="sng" algn="ctr">
+                      <a:solidFill>
+                        <a:srgbClr val="000000"/>
+                      </a:solidFill>
+                      <a:prstDash val="solid"/>
+                      <a:round/>
+                      <a:headEnd type="none" w="med" len="med"/>
+                      <a:tailEnd type="none" w="med" len="med"/>
                     </a:lnB>
                   </a:tcPr>
                 </a:tc>
@@ -5065,11 +5127,23 @@
                       <a:headEnd type="none" w="med" len="med"/>
                       <a:tailEnd type="none" w="med" len="med"/>
                     </a:lnR>
-                    <a:lnT w="0" cap="flat" cmpd="sng" algn="ctr">
-                      <a:noFill/>
+                    <a:lnT w="12700" cap="flat" cmpd="sng" algn="ctr">
+                      <a:solidFill>
+                        <a:srgbClr val="000000"/>
+                      </a:solidFill>
+                      <a:prstDash val="solid"/>
+                      <a:round/>
+                      <a:headEnd type="none" w="med" len="med"/>
+                      <a:tailEnd type="none" w="med" len="med"/>
                     </a:lnT>
-                    <a:lnB w="0" cap="flat" cmpd="sng" algn="ctr">
-                      <a:noFill/>
+                    <a:lnB w="12700" cap="flat" cmpd="sng" algn="ctr">
+                      <a:solidFill>
+                        <a:srgbClr val="000000"/>
+                      </a:solidFill>
+                      <a:prstDash val="solid"/>
+                      <a:round/>
+                      <a:headEnd type="none" w="med" len="med"/>
+                      <a:tailEnd type="none" w="med" len="med"/>
                     </a:lnB>
                   </a:tcPr>
                 </a:tc>
@@ -5118,11 +5192,23 @@
                       <a:headEnd type="none" w="med" len="med"/>
                       <a:tailEnd type="none" w="med" len="med"/>
                     </a:lnR>
-                    <a:lnT w="0" cap="flat" cmpd="sng" algn="ctr">
-                      <a:noFill/>
+                    <a:lnT w="12700" cap="flat" cmpd="sng" algn="ctr">
+                      <a:solidFill>
+                        <a:srgbClr val="000000"/>
+                      </a:solidFill>
+                      <a:prstDash val="solid"/>
+                      <a:round/>
+                      <a:headEnd type="none" w="med" len="med"/>
+                      <a:tailEnd type="none" w="med" len="med"/>
                     </a:lnT>
-                    <a:lnB w="0" cap="flat" cmpd="sng" algn="ctr">
-                      <a:noFill/>
+                    <a:lnB w="12700" cap="flat" cmpd="sng" algn="ctr">
+                      <a:solidFill>
+                        <a:srgbClr val="000000"/>
+                      </a:solidFill>
+                      <a:prstDash val="solid"/>
+                      <a:round/>
+                      <a:headEnd type="none" w="med" len="med"/>
+                      <a:tailEnd type="none" w="med" len="med"/>
                     </a:lnB>
                   </a:tcPr>
                 </a:tc>
@@ -5173,11 +5259,23 @@
                       <a:headEnd type="none" w="med" len="med"/>
                       <a:tailEnd type="none" w="med" len="med"/>
                     </a:lnR>
-                    <a:lnT w="0" cap="flat" cmpd="sng" algn="ctr">
-                      <a:noFill/>
+                    <a:lnT w="12700" cap="flat" cmpd="sng" algn="ctr">
+                      <a:solidFill>
+                        <a:srgbClr val="000000"/>
+                      </a:solidFill>
+                      <a:prstDash val="solid"/>
+                      <a:round/>
+                      <a:headEnd type="none" w="med" len="med"/>
+                      <a:tailEnd type="none" w="med" len="med"/>
                     </a:lnT>
-                    <a:lnB w="0" cap="flat" cmpd="sng" algn="ctr">
-                      <a:noFill/>
+                    <a:lnB w="12700" cap="flat" cmpd="sng" algn="ctr">
+                      <a:solidFill>
+                        <a:srgbClr val="000000"/>
+                      </a:solidFill>
+                      <a:prstDash val="solid"/>
+                      <a:round/>
+                      <a:headEnd type="none" w="med" len="med"/>
+                      <a:tailEnd type="none" w="med" len="med"/>
                     </a:lnB>
                   </a:tcPr>
                 </a:tc>
@@ -5226,11 +5324,23 @@
                       <a:headEnd type="none" w="med" len="med"/>
                       <a:tailEnd type="none" w="med" len="med"/>
                     </a:lnR>
-                    <a:lnT w="0" cap="flat" cmpd="sng" algn="ctr">
-                      <a:noFill/>
+                    <a:lnT w="12700" cap="flat" cmpd="sng" algn="ctr">
+                      <a:solidFill>
+                        <a:srgbClr val="000000"/>
+                      </a:solidFill>
+                      <a:prstDash val="solid"/>
+                      <a:round/>
+                      <a:headEnd type="none" w="med" len="med"/>
+                      <a:tailEnd type="none" w="med" len="med"/>
                     </a:lnT>
-                    <a:lnB w="0" cap="flat" cmpd="sng" algn="ctr">
-                      <a:noFill/>
+                    <a:lnB w="12700" cap="flat" cmpd="sng" algn="ctr">
+                      <a:solidFill>
+                        <a:srgbClr val="000000"/>
+                      </a:solidFill>
+                      <a:prstDash val="solid"/>
+                      <a:round/>
+                      <a:headEnd type="none" w="med" len="med"/>
+                      <a:tailEnd type="none" w="med" len="med"/>
                     </a:lnB>
                   </a:tcPr>
                 </a:tc>
@@ -5281,11 +5391,23 @@
                       <a:headEnd type="none" w="med" len="med"/>
                       <a:tailEnd type="none" w="med" len="med"/>
                     </a:lnR>
-                    <a:lnT w="0" cap="flat" cmpd="sng" algn="ctr">
-                      <a:noFill/>
+                    <a:lnT w="12700" cap="flat" cmpd="sng" algn="ctr">
+                      <a:solidFill>
+                        <a:srgbClr val="000000"/>
+                      </a:solidFill>
+                      <a:prstDash val="solid"/>
+                      <a:round/>
+                      <a:headEnd type="none" w="med" len="med"/>
+                      <a:tailEnd type="none" w="med" len="med"/>
                     </a:lnT>
-                    <a:lnB w="0" cap="flat" cmpd="sng" algn="ctr">
-                      <a:noFill/>
+                    <a:lnB w="12700" cap="flat" cmpd="sng" algn="ctr">
+                      <a:solidFill>
+                        <a:srgbClr val="000000"/>
+                      </a:solidFill>
+                      <a:prstDash val="solid"/>
+                      <a:round/>
+                      <a:headEnd type="none" w="med" len="med"/>
+                      <a:tailEnd type="none" w="med" len="med"/>
                     </a:lnB>
                   </a:tcPr>
                 </a:tc>
@@ -5334,11 +5456,23 @@
                       <a:headEnd type="none" w="med" len="med"/>
                       <a:tailEnd type="none" w="med" len="med"/>
                     </a:lnR>
-                    <a:lnT w="0" cap="flat" cmpd="sng" algn="ctr">
-                      <a:noFill/>
+                    <a:lnT w="12700" cap="flat" cmpd="sng" algn="ctr">
+                      <a:solidFill>
+                        <a:srgbClr val="000000"/>
+                      </a:solidFill>
+                      <a:prstDash val="solid"/>
+                      <a:round/>
+                      <a:headEnd type="none" w="med" len="med"/>
+                      <a:tailEnd type="none" w="med" len="med"/>
                     </a:lnT>
-                    <a:lnB w="0" cap="flat" cmpd="sng" algn="ctr">
-                      <a:noFill/>
+                    <a:lnB w="12700" cap="flat" cmpd="sng" algn="ctr">
+                      <a:solidFill>
+                        <a:srgbClr val="000000"/>
+                      </a:solidFill>
+                      <a:prstDash val="solid"/>
+                      <a:round/>
+                      <a:headEnd type="none" w="med" len="med"/>
+                      <a:tailEnd type="none" w="med" len="med"/>
                     </a:lnB>
                   </a:tcPr>
                 </a:tc>
@@ -5389,8 +5523,14 @@
                       <a:headEnd type="none" w="med" len="med"/>
                       <a:tailEnd type="none" w="med" len="med"/>
                     </a:lnR>
-                    <a:lnT w="0" cap="flat" cmpd="sng" algn="ctr">
-                      <a:noFill/>
+                    <a:lnT w="12700" cap="flat" cmpd="sng" algn="ctr">
+                      <a:solidFill>
+                        <a:srgbClr val="000000"/>
+                      </a:solidFill>
+                      <a:prstDash val="solid"/>
+                      <a:round/>
+                      <a:headEnd type="none" w="med" len="med"/>
+                      <a:tailEnd type="none" w="med" len="med"/>
                     </a:lnT>
                     <a:lnB w="12700" cap="flat" cmpd="sng" algn="ctr">
                       <a:solidFill>
@@ -5448,8 +5588,14 @@
                       <a:headEnd type="none" w="med" len="med"/>
                       <a:tailEnd type="none" w="med" len="med"/>
                     </a:lnR>
-                    <a:lnT w="0" cap="flat" cmpd="sng" algn="ctr">
-                      <a:noFill/>
+                    <a:lnT w="12700" cap="flat" cmpd="sng" algn="ctr">
+                      <a:solidFill>
+                        <a:srgbClr val="000000"/>
+                      </a:solidFill>
+                      <a:prstDash val="solid"/>
+                      <a:round/>
+                      <a:headEnd type="none" w="med" len="med"/>
+                      <a:tailEnd type="none" w="med" len="med"/>
                     </a:lnT>
                     <a:lnB w="12700" cap="flat" cmpd="sng" algn="ctr">
                       <a:solidFill>
@@ -5469,145 +5615,7 @@
       </p:graphicFrame>
       <p:sp>
         <p:nvSpPr>
-          <p:cNvPr id="7" name="Shape 4"/>
-          <p:cNvSpPr/>
-          <p:nvPr/>
-        </p:nvSpPr>
-        <p:spPr>
-          <a:xfrm>
-            <a:off x="457200" y="2103120"/>
-            <a:ext cx="8229600" cy="0"/>
-          </a:xfrm>
-          <a:prstGeom prst="line">
-            <a:avLst/>
-          </a:prstGeom>
-          <a:noFill/>
-          <a:ln w="12700">
-            <a:solidFill>
-              <a:srgbClr val="000000"/>
-            </a:solidFill>
-            <a:prstDash val="dash"/>
-          </a:ln>
-        </p:spPr>
-      </p:sp>
-      <p:sp>
-        <p:nvSpPr>
-          <p:cNvPr id="8" name="Shape 5"/>
-          <p:cNvSpPr/>
-          <p:nvPr/>
-        </p:nvSpPr>
-        <p:spPr>
-          <a:xfrm>
-            <a:off x="457200" y="2487168"/>
-            <a:ext cx="8229600" cy="0"/>
-          </a:xfrm>
-          <a:prstGeom prst="line">
-            <a:avLst/>
-          </a:prstGeom>
-          <a:noFill/>
-          <a:ln w="12700">
-            <a:solidFill>
-              <a:srgbClr val="000000"/>
-            </a:solidFill>
-            <a:prstDash val="dash"/>
-          </a:ln>
-        </p:spPr>
-      </p:sp>
-      <p:sp>
-        <p:nvSpPr>
-          <p:cNvPr id="9" name="Shape 6"/>
-          <p:cNvSpPr/>
-          <p:nvPr/>
-        </p:nvSpPr>
-        <p:spPr>
-          <a:xfrm>
-            <a:off x="457200" y="2871216"/>
-            <a:ext cx="8229600" cy="0"/>
-          </a:xfrm>
-          <a:prstGeom prst="line">
-            <a:avLst/>
-          </a:prstGeom>
-          <a:noFill/>
-          <a:ln w="12700">
-            <a:solidFill>
-              <a:srgbClr val="000000"/>
-            </a:solidFill>
-            <a:prstDash val="dash"/>
-          </a:ln>
-        </p:spPr>
-      </p:sp>
-      <p:sp>
-        <p:nvSpPr>
-          <p:cNvPr id="10" name="Shape 7"/>
-          <p:cNvSpPr/>
-          <p:nvPr/>
-        </p:nvSpPr>
-        <p:spPr>
-          <a:xfrm>
-            <a:off x="457200" y="3255264"/>
-            <a:ext cx="8229600" cy="0"/>
-          </a:xfrm>
-          <a:prstGeom prst="line">
-            <a:avLst/>
-          </a:prstGeom>
-          <a:noFill/>
-          <a:ln w="12700">
-            <a:solidFill>
-              <a:srgbClr val="000000"/>
-            </a:solidFill>
-            <a:prstDash val="dash"/>
-          </a:ln>
-        </p:spPr>
-      </p:sp>
-      <p:sp>
-        <p:nvSpPr>
-          <p:cNvPr id="11" name="Shape 8"/>
-          <p:cNvSpPr/>
-          <p:nvPr/>
-        </p:nvSpPr>
-        <p:spPr>
-          <a:xfrm>
-            <a:off x="457200" y="3639312"/>
-            <a:ext cx="8229600" cy="0"/>
-          </a:xfrm>
-          <a:prstGeom prst="line">
-            <a:avLst/>
-          </a:prstGeom>
-          <a:noFill/>
-          <a:ln w="12700">
-            <a:solidFill>
-              <a:srgbClr val="000000"/>
-            </a:solidFill>
-            <a:prstDash val="dash"/>
-          </a:ln>
-        </p:spPr>
-      </p:sp>
-      <p:sp>
-        <p:nvSpPr>
-          <p:cNvPr id="12" name="Shape 9"/>
-          <p:cNvSpPr/>
-          <p:nvPr/>
-        </p:nvSpPr>
-        <p:spPr>
-          <a:xfrm>
-            <a:off x="457200" y="4023360"/>
-            <a:ext cx="8229600" cy="0"/>
-          </a:xfrm>
-          <a:prstGeom prst="line">
-            <a:avLst/>
-          </a:prstGeom>
-          <a:noFill/>
-          <a:ln w="12700">
-            <a:solidFill>
-              <a:srgbClr val="000000"/>
-            </a:solidFill>
-            <a:prstDash val="dash"/>
-          </a:ln>
-        </p:spPr>
-      </p:sp>
-      <p:sp>
-        <p:nvSpPr>
-          <p:cNvPr id="13" name="Text 10"/>
+          <p:cNvPr id="7" name="Text 4"/>
           <p:cNvSpPr txBox="1"/>
           <p:nvPr/>
         </p:nvSpPr>
@@ -6277,7 +6285,7 @@
       </p:graphicFrame>
       <p:sp>
         <p:nvSpPr>
-          <p:cNvPr id="16" name="Text 11"/>
+          <p:cNvPr id="10" name="Text 5"/>
           <p:cNvSpPr txBox="1"/>
           <p:nvPr/>
         </p:nvSpPr>
@@ -10194,8 +10202,14 @@
                       <a:headEnd type="none" w="med" len="med"/>
                       <a:tailEnd type="none" w="med" len="med"/>
                     </a:lnT>
-                    <a:lnB w="0" cap="flat" cmpd="sng" algn="ctr">
-                      <a:noFill/>
+                    <a:lnB w="12700" cap="flat" cmpd="sng" algn="ctr">
+                      <a:solidFill>
+                        <a:srgbClr val="000000"/>
+                      </a:solidFill>
+                      <a:prstDash val="solid"/>
+                      <a:round/>
+                      <a:headEnd type="none" w="med" len="med"/>
+                      <a:tailEnd type="none" w="med" len="med"/>
                     </a:lnB>
                   </a:tcPr>
                 </a:tc>
@@ -10253,8 +10267,14 @@
                       <a:headEnd type="none" w="med" len="med"/>
                       <a:tailEnd type="none" w="med" len="med"/>
                     </a:lnT>
-                    <a:lnB w="0" cap="flat" cmpd="sng" algn="ctr">
-                      <a:noFill/>
+                    <a:lnB w="12700" cap="flat" cmpd="sng" algn="ctr">
+                      <a:solidFill>
+                        <a:srgbClr val="000000"/>
+                      </a:solidFill>
+                      <a:prstDash val="solid"/>
+                      <a:round/>
+                      <a:headEnd type="none" w="med" len="med"/>
+                      <a:tailEnd type="none" w="med" len="med"/>
                     </a:lnB>
                   </a:tcPr>
                 </a:tc>
@@ -10312,8 +10332,14 @@
                       <a:headEnd type="none" w="med" len="med"/>
                       <a:tailEnd type="none" w="med" len="med"/>
                     </a:lnT>
-                    <a:lnB w="0" cap="flat" cmpd="sng" algn="ctr">
-                      <a:noFill/>
+                    <a:lnB w="12700" cap="flat" cmpd="sng" algn="ctr">
+                      <a:solidFill>
+                        <a:srgbClr val="000000"/>
+                      </a:solidFill>
+                      <a:prstDash val="solid"/>
+                      <a:round/>
+                      <a:headEnd type="none" w="med" len="med"/>
+                      <a:tailEnd type="none" w="med" len="med"/>
                     </a:lnB>
                   </a:tcPr>
                 </a:tc>
@@ -10371,8 +10397,14 @@
                       <a:headEnd type="none" w="med" len="med"/>
                       <a:tailEnd type="none" w="med" len="med"/>
                     </a:lnT>
-                    <a:lnB w="0" cap="flat" cmpd="sng" algn="ctr">
-                      <a:noFill/>
+                    <a:lnB w="12700" cap="flat" cmpd="sng" algn="ctr">
+                      <a:solidFill>
+                        <a:srgbClr val="000000"/>
+                      </a:solidFill>
+                      <a:prstDash val="solid"/>
+                      <a:round/>
+                      <a:headEnd type="none" w="med" len="med"/>
+                      <a:tailEnd type="none" w="med" len="med"/>
                     </a:lnB>
                   </a:tcPr>
                 </a:tc>
@@ -10430,8 +10462,14 @@
                       <a:headEnd type="none" w="med" len="med"/>
                       <a:tailEnd type="none" w="med" len="med"/>
                     </a:lnT>
-                    <a:lnB w="0" cap="flat" cmpd="sng" algn="ctr">
-                      <a:noFill/>
+                    <a:lnB w="12700" cap="flat" cmpd="sng" algn="ctr">
+                      <a:solidFill>
+                        <a:srgbClr val="000000"/>
+                      </a:solidFill>
+                      <a:prstDash val="solid"/>
+                      <a:round/>
+                      <a:headEnd type="none" w="med" len="med"/>
+                      <a:tailEnd type="none" w="med" len="med"/>
                     </a:lnB>
                   </a:tcPr>
                 </a:tc>
@@ -10489,8 +10527,14 @@
                       <a:headEnd type="none" w="med" len="med"/>
                       <a:tailEnd type="none" w="med" len="med"/>
                     </a:lnT>
-                    <a:lnB w="0" cap="flat" cmpd="sng" algn="ctr">
-                      <a:noFill/>
+                    <a:lnB w="12700" cap="flat" cmpd="sng" algn="ctr">
+                      <a:solidFill>
+                        <a:srgbClr val="000000"/>
+                      </a:solidFill>
+                      <a:prstDash val="solid"/>
+                      <a:round/>
+                      <a:headEnd type="none" w="med" len="med"/>
+                      <a:tailEnd type="none" w="med" len="med"/>
                     </a:lnB>
                   </a:tcPr>
                 </a:tc>
@@ -10548,8 +10592,14 @@
                       <a:headEnd type="none" w="med" len="med"/>
                       <a:tailEnd type="none" w="med" len="med"/>
                     </a:lnT>
-                    <a:lnB w="0" cap="flat" cmpd="sng" algn="ctr">
-                      <a:noFill/>
+                    <a:lnB w="12700" cap="flat" cmpd="sng" algn="ctr">
+                      <a:solidFill>
+                        <a:srgbClr val="000000"/>
+                      </a:solidFill>
+                      <a:prstDash val="solid"/>
+                      <a:round/>
+                      <a:headEnd type="none" w="med" len="med"/>
+                      <a:tailEnd type="none" w="med" len="med"/>
                     </a:lnB>
                   </a:tcPr>
                 </a:tc>
@@ -10607,8 +10657,14 @@
                       <a:headEnd type="none" w="med" len="med"/>
                       <a:tailEnd type="none" w="med" len="med"/>
                     </a:lnT>
-                    <a:lnB w="0" cap="flat" cmpd="sng" algn="ctr">
-                      <a:noFill/>
+                    <a:lnB w="12700" cap="flat" cmpd="sng" algn="ctr">
+                      <a:solidFill>
+                        <a:srgbClr val="000000"/>
+                      </a:solidFill>
+                      <a:prstDash val="solid"/>
+                      <a:round/>
+                      <a:headEnd type="none" w="med" len="med"/>
+                      <a:tailEnd type="none" w="med" len="med"/>
                     </a:lnB>
                   </a:tcPr>
                 </a:tc>
@@ -10666,8 +10722,14 @@
                       <a:headEnd type="none" w="med" len="med"/>
                       <a:tailEnd type="none" w="med" len="med"/>
                     </a:lnT>
-                    <a:lnB w="0" cap="flat" cmpd="sng" algn="ctr">
-                      <a:noFill/>
+                    <a:lnB w="12700" cap="flat" cmpd="sng" algn="ctr">
+                      <a:solidFill>
+                        <a:srgbClr val="000000"/>
+                      </a:solidFill>
+                      <a:prstDash val="solid"/>
+                      <a:round/>
+                      <a:headEnd type="none" w="med" len="med"/>
+                      <a:tailEnd type="none" w="med" len="med"/>
                     </a:lnB>
                   </a:tcPr>
                 </a:tc>
@@ -10937,8 +10999,14 @@
                       <a:headEnd type="none" w="med" len="med"/>
                       <a:tailEnd type="none" w="med" len="med"/>
                     </a:lnR>
-                    <a:lnT w="0" cap="flat" cmpd="sng" algn="ctr">
-                      <a:noFill/>
+                    <a:lnT w="12700" cap="flat" cmpd="sng" algn="ctr">
+                      <a:solidFill>
+                        <a:srgbClr val="000000"/>
+                      </a:solidFill>
+                      <a:prstDash val="solid"/>
+                      <a:round/>
+                      <a:headEnd type="none" w="med" len="med"/>
+                      <a:tailEnd type="none" w="med" len="med"/>
                     </a:lnT>
                     <a:lnB w="12700" cap="flat" cmpd="sng" algn="ctr">
                       <a:solidFill>
@@ -10985,8 +11053,14 @@
                       <a:headEnd type="none" w="med" len="med"/>
                       <a:tailEnd type="none" w="med" len="med"/>
                     </a:lnR>
-                    <a:lnT w="0" cap="flat" cmpd="sng" algn="ctr">
-                      <a:noFill/>
+                    <a:lnT w="12700" cap="flat" cmpd="sng" algn="ctr">
+                      <a:solidFill>
+                        <a:srgbClr val="000000"/>
+                      </a:solidFill>
+                      <a:prstDash val="solid"/>
+                      <a:round/>
+                      <a:headEnd type="none" w="med" len="med"/>
+                      <a:tailEnd type="none" w="med" len="med"/>
                     </a:lnT>
                     <a:lnB w="12700" cap="flat" cmpd="sng" algn="ctr">
                       <a:solidFill>
@@ -11044,8 +11118,14 @@
                       <a:headEnd type="none" w="med" len="med"/>
                       <a:tailEnd type="none" w="med" len="med"/>
                     </a:lnR>
-                    <a:lnT w="0" cap="flat" cmpd="sng" algn="ctr">
-                      <a:noFill/>
+                    <a:lnT w="12700" cap="flat" cmpd="sng" algn="ctr">
+                      <a:solidFill>
+                        <a:srgbClr val="000000"/>
+                      </a:solidFill>
+                      <a:prstDash val="solid"/>
+                      <a:round/>
+                      <a:headEnd type="none" w="med" len="med"/>
+                      <a:tailEnd type="none" w="med" len="med"/>
                     </a:lnT>
                     <a:lnB w="12700" cap="flat" cmpd="sng" algn="ctr">
                       <a:solidFill>
@@ -11103,8 +11183,14 @@
                       <a:headEnd type="none" w="med" len="med"/>
                       <a:tailEnd type="none" w="med" len="med"/>
                     </a:lnR>
-                    <a:lnT w="0" cap="flat" cmpd="sng" algn="ctr">
-                      <a:noFill/>
+                    <a:lnT w="12700" cap="flat" cmpd="sng" algn="ctr">
+                      <a:solidFill>
+                        <a:srgbClr val="000000"/>
+                      </a:solidFill>
+                      <a:prstDash val="solid"/>
+                      <a:round/>
+                      <a:headEnd type="none" w="med" len="med"/>
+                      <a:tailEnd type="none" w="med" len="med"/>
                     </a:lnT>
                     <a:lnB w="12700" cap="flat" cmpd="sng" algn="ctr">
                       <a:solidFill>
@@ -11162,8 +11248,14 @@
                       <a:headEnd type="none" w="med" len="med"/>
                       <a:tailEnd type="none" w="med" len="med"/>
                     </a:lnR>
-                    <a:lnT w="0" cap="flat" cmpd="sng" algn="ctr">
-                      <a:noFill/>
+                    <a:lnT w="12700" cap="flat" cmpd="sng" algn="ctr">
+                      <a:solidFill>
+                        <a:srgbClr val="000000"/>
+                      </a:solidFill>
+                      <a:prstDash val="solid"/>
+                      <a:round/>
+                      <a:headEnd type="none" w="med" len="med"/>
+                      <a:tailEnd type="none" w="med" len="med"/>
                     </a:lnT>
                     <a:lnB w="12700" cap="flat" cmpd="sng" algn="ctr">
                       <a:solidFill>
@@ -11221,8 +11313,14 @@
                       <a:headEnd type="none" w="med" len="med"/>
                       <a:tailEnd type="none" w="med" len="med"/>
                     </a:lnR>
-                    <a:lnT w="0" cap="flat" cmpd="sng" algn="ctr">
-                      <a:noFill/>
+                    <a:lnT w="12700" cap="flat" cmpd="sng" algn="ctr">
+                      <a:solidFill>
+                        <a:srgbClr val="000000"/>
+                      </a:solidFill>
+                      <a:prstDash val="solid"/>
+                      <a:round/>
+                      <a:headEnd type="none" w="med" len="med"/>
+                      <a:tailEnd type="none" w="med" len="med"/>
                     </a:lnT>
                     <a:lnB w="12700" cap="flat" cmpd="sng" algn="ctr">
                       <a:solidFill>
@@ -11280,8 +11378,14 @@
                       <a:headEnd type="none" w="med" len="med"/>
                       <a:tailEnd type="none" w="med" len="med"/>
                     </a:lnR>
-                    <a:lnT w="0" cap="flat" cmpd="sng" algn="ctr">
-                      <a:noFill/>
+                    <a:lnT w="12700" cap="flat" cmpd="sng" algn="ctr">
+                      <a:solidFill>
+                        <a:srgbClr val="000000"/>
+                      </a:solidFill>
+                      <a:prstDash val="solid"/>
+                      <a:round/>
+                      <a:headEnd type="none" w="med" len="med"/>
+                      <a:tailEnd type="none" w="med" len="med"/>
                     </a:lnT>
                     <a:lnB w="12700" cap="flat" cmpd="sng" algn="ctr">
                       <a:solidFill>
@@ -11339,8 +11443,14 @@
                       <a:headEnd type="none" w="med" len="med"/>
                       <a:tailEnd type="none" w="med" len="med"/>
                     </a:lnR>
-                    <a:lnT w="0" cap="flat" cmpd="sng" algn="ctr">
-                      <a:noFill/>
+                    <a:lnT w="12700" cap="flat" cmpd="sng" algn="ctr">
+                      <a:solidFill>
+                        <a:srgbClr val="000000"/>
+                      </a:solidFill>
+                      <a:prstDash val="solid"/>
+                      <a:round/>
+                      <a:headEnd type="none" w="med" len="med"/>
+                      <a:tailEnd type="none" w="med" len="med"/>
                     </a:lnT>
                     <a:lnB w="12700" cap="flat" cmpd="sng" algn="ctr">
                       <a:solidFill>
@@ -11398,8 +11508,14 @@
                       <a:headEnd type="none" w="med" len="med"/>
                       <a:tailEnd type="none" w="med" len="med"/>
                     </a:lnR>
-                    <a:lnT w="0" cap="flat" cmpd="sng" algn="ctr">
-                      <a:noFill/>
+                    <a:lnT w="12700" cap="flat" cmpd="sng" algn="ctr">
+                      <a:solidFill>
+                        <a:srgbClr val="000000"/>
+                      </a:solidFill>
+                      <a:prstDash val="solid"/>
+                      <a:round/>
+                      <a:headEnd type="none" w="med" len="med"/>
+                      <a:tailEnd type="none" w="med" len="med"/>
                     </a:lnT>
                     <a:lnB w="12700" cap="flat" cmpd="sng" algn="ctr">
                       <a:solidFill>
@@ -11428,30 +11544,7 @@
       </p:graphicFrame>
       <p:sp>
         <p:nvSpPr>
-          <p:cNvPr id="8" name="Shape 5"/>
-          <p:cNvSpPr/>
-          <p:nvPr/>
-        </p:nvSpPr>
-        <p:spPr>
-          <a:xfrm>
-            <a:off x="1371600" y="2761488"/>
-            <a:ext cx="4912431" cy="0"/>
-          </a:xfrm>
-          <a:prstGeom prst="line">
-            <a:avLst/>
-          </a:prstGeom>
-          <a:noFill/>
-          <a:ln w="12700">
-            <a:solidFill>
-              <a:srgbClr val="000000"/>
-            </a:solidFill>
-            <a:prstDash val="dash"/>
-          </a:ln>
-        </p:spPr>
-      </p:sp>
-      <p:sp>
-        <p:nvSpPr>
-          <p:cNvPr id="9" name="Text 6"/>
+          <p:cNvPr id="8" name="Text 5"/>
           <p:cNvSpPr txBox="1"/>
           <p:nvPr/>
         </p:nvSpPr>
@@ -11490,7 +11583,7 @@
       </p:sp>
       <p:sp>
         <p:nvSpPr>
-          <p:cNvPr id="10" name="Text 7"/>
+          <p:cNvPr id="9" name="Text 6"/>
           <p:cNvSpPr txBox="1"/>
           <p:nvPr/>
         </p:nvSpPr>
@@ -12450,7 +12543,7 @@
       </p:graphicFrame>
       <p:sp>
         <p:nvSpPr>
-          <p:cNvPr id="12" name="Text 8"/>
+          <p:cNvPr id="11" name="Text 7"/>
           <p:cNvSpPr txBox="1"/>
           <p:nvPr/>
         </p:nvSpPr>
@@ -12489,7 +12582,7 @@
       </p:sp>
       <p:sp>
         <p:nvSpPr>
-          <p:cNvPr id="14" name="Text 9"/>
+          <p:cNvPr id="13" name="Text 8"/>
           <p:cNvSpPr txBox="1"/>
           <p:nvPr/>
         </p:nvSpPr>
@@ -14980,8 +15073,14 @@
                       <a:headEnd type="none" w="med" len="med"/>
                       <a:tailEnd type="none" w="med" len="med"/>
                     </a:lnT>
-                    <a:lnB w="0" cap="flat" cmpd="sng" algn="ctr">
-                      <a:noFill/>
+                    <a:lnB w="12700" cap="flat" cmpd="sng" algn="ctr">
+                      <a:solidFill>
+                        <a:srgbClr val="000000"/>
+                      </a:solidFill>
+                      <a:prstDash val="solid"/>
+                      <a:round/>
+                      <a:headEnd type="none" w="med" len="med"/>
+                      <a:tailEnd type="none" w="med" len="med"/>
                     </a:lnB>
                   </a:tcPr>
                 </a:tc>
@@ -15039,8 +15138,14 @@
                       <a:headEnd type="none" w="med" len="med"/>
                       <a:tailEnd type="none" w="med" len="med"/>
                     </a:lnT>
-                    <a:lnB w="0" cap="flat" cmpd="sng" algn="ctr">
-                      <a:noFill/>
+                    <a:lnB w="12700" cap="flat" cmpd="sng" algn="ctr">
+                      <a:solidFill>
+                        <a:srgbClr val="000000"/>
+                      </a:solidFill>
+                      <a:prstDash val="solid"/>
+                      <a:round/>
+                      <a:headEnd type="none" w="med" len="med"/>
+                      <a:tailEnd type="none" w="med" len="med"/>
                     </a:lnB>
                   </a:tcPr>
                 </a:tc>
@@ -15098,8 +15203,14 @@
                       <a:headEnd type="none" w="med" len="med"/>
                       <a:tailEnd type="none" w="med" len="med"/>
                     </a:lnT>
-                    <a:lnB w="0" cap="flat" cmpd="sng" algn="ctr">
-                      <a:noFill/>
+                    <a:lnB w="12700" cap="flat" cmpd="sng" algn="ctr">
+                      <a:solidFill>
+                        <a:srgbClr val="000000"/>
+                      </a:solidFill>
+                      <a:prstDash val="solid"/>
+                      <a:round/>
+                      <a:headEnd type="none" w="med" len="med"/>
+                      <a:tailEnd type="none" w="med" len="med"/>
                     </a:lnB>
                   </a:tcPr>
                 </a:tc>
@@ -15157,8 +15268,14 @@
                       <a:headEnd type="none" w="med" len="med"/>
                       <a:tailEnd type="none" w="med" len="med"/>
                     </a:lnT>
-                    <a:lnB w="0" cap="flat" cmpd="sng" algn="ctr">
-                      <a:noFill/>
+                    <a:lnB w="12700" cap="flat" cmpd="sng" algn="ctr">
+                      <a:solidFill>
+                        <a:srgbClr val="000000"/>
+                      </a:solidFill>
+                      <a:prstDash val="solid"/>
+                      <a:round/>
+                      <a:headEnd type="none" w="med" len="med"/>
+                      <a:tailEnd type="none" w="med" len="med"/>
                     </a:lnB>
                   </a:tcPr>
                 </a:tc>
@@ -15209,8 +15326,14 @@
                       <a:headEnd type="none" w="med" len="med"/>
                       <a:tailEnd type="none" w="med" len="med"/>
                     </a:lnR>
-                    <a:lnT w="0" cap="flat" cmpd="sng" algn="ctr">
-                      <a:noFill/>
+                    <a:lnT w="12700" cap="flat" cmpd="sng" algn="ctr">
+                      <a:solidFill>
+                        <a:srgbClr val="000000"/>
+                      </a:solidFill>
+                      <a:prstDash val="solid"/>
+                      <a:round/>
+                      <a:headEnd type="none" w="med" len="med"/>
+                      <a:tailEnd type="none" w="med" len="med"/>
                     </a:lnT>
                     <a:lnB w="12700" cap="flat" cmpd="sng" algn="ctr">
                       <a:solidFill>
@@ -15268,8 +15391,14 @@
                       <a:headEnd type="none" w="med" len="med"/>
                       <a:tailEnd type="none" w="med" len="med"/>
                     </a:lnR>
-                    <a:lnT w="0" cap="flat" cmpd="sng" algn="ctr">
-                      <a:noFill/>
+                    <a:lnT w="12700" cap="flat" cmpd="sng" algn="ctr">
+                      <a:solidFill>
+                        <a:srgbClr val="000000"/>
+                      </a:solidFill>
+                      <a:prstDash val="solid"/>
+                      <a:round/>
+                      <a:headEnd type="none" w="med" len="med"/>
+                      <a:tailEnd type="none" w="med" len="med"/>
                     </a:lnT>
                     <a:lnB w="12700" cap="flat" cmpd="sng" algn="ctr">
                       <a:solidFill>
@@ -15327,8 +15456,14 @@
                       <a:headEnd type="none" w="med" len="med"/>
                       <a:tailEnd type="none" w="med" len="med"/>
                     </a:lnR>
-                    <a:lnT w="0" cap="flat" cmpd="sng" algn="ctr">
-                      <a:noFill/>
+                    <a:lnT w="12700" cap="flat" cmpd="sng" algn="ctr">
+                      <a:solidFill>
+                        <a:srgbClr val="000000"/>
+                      </a:solidFill>
+                      <a:prstDash val="solid"/>
+                      <a:round/>
+                      <a:headEnd type="none" w="med" len="med"/>
+                      <a:tailEnd type="none" w="med" len="med"/>
                     </a:lnT>
                     <a:lnB w="12700" cap="flat" cmpd="sng" algn="ctr">
                       <a:solidFill>
@@ -15386,8 +15521,14 @@
                       <a:headEnd type="none" w="med" len="med"/>
                       <a:tailEnd type="none" w="med" len="med"/>
                     </a:lnR>
-                    <a:lnT w="0" cap="flat" cmpd="sng" algn="ctr">
-                      <a:noFill/>
+                    <a:lnT w="12700" cap="flat" cmpd="sng" algn="ctr">
+                      <a:solidFill>
+                        <a:srgbClr val="000000"/>
+                      </a:solidFill>
+                      <a:prstDash val="solid"/>
+                      <a:round/>
+                      <a:headEnd type="none" w="med" len="med"/>
+                      <a:tailEnd type="none" w="med" len="med"/>
                     </a:lnT>
                     <a:lnB w="12700" cap="flat" cmpd="sng" algn="ctr">
                       <a:solidFill>
@@ -15681,30 +15822,7 @@
       </p:graphicFrame>
       <p:sp>
         <p:nvSpPr>
-          <p:cNvPr id="32" name="Shape 29"/>
-          <p:cNvSpPr/>
-          <p:nvPr/>
-        </p:nvSpPr>
-        <p:spPr>
-          <a:xfrm>
-            <a:off x="457200" y="4937760"/>
-            <a:ext cx="8229600" cy="0"/>
-          </a:xfrm>
-          <a:prstGeom prst="line">
-            <a:avLst/>
-          </a:prstGeom>
-          <a:noFill/>
-          <a:ln w="12700">
-            <a:solidFill>
-              <a:srgbClr val="000000"/>
-            </a:solidFill>
-            <a:prstDash val="dash"/>
-          </a:ln>
-        </p:spPr>
-      </p:sp>
-      <p:sp>
-        <p:nvSpPr>
-          <p:cNvPr id="34" name="Text 30"/>
+          <p:cNvPr id="33" name="Text 29"/>
           <p:cNvSpPr txBox="1"/>
           <p:nvPr/>
         </p:nvSpPr>
@@ -16929,76 +17047,7 @@
       </p:graphicFrame>
       <p:sp>
         <p:nvSpPr>
-          <p:cNvPr id="17" name="Shape 14"/>
-          <p:cNvSpPr/>
-          <p:nvPr/>
-        </p:nvSpPr>
-        <p:spPr>
-          <a:xfrm>
-            <a:off x="914400" y="4096512"/>
-            <a:ext cx="7772400" cy="0"/>
-          </a:xfrm>
-          <a:prstGeom prst="line">
-            <a:avLst/>
-          </a:prstGeom>
-          <a:noFill/>
-          <a:ln w="12700">
-            <a:solidFill>
-              <a:srgbClr val="000000"/>
-            </a:solidFill>
-            <a:prstDash val="dash"/>
-          </a:ln>
-        </p:spPr>
-      </p:sp>
-      <p:sp>
-        <p:nvSpPr>
-          <p:cNvPr id="18" name="Shape 15"/>
-          <p:cNvSpPr/>
-          <p:nvPr/>
-        </p:nvSpPr>
-        <p:spPr>
-          <a:xfrm>
-            <a:off x="914400" y="4498848"/>
-            <a:ext cx="7772400" cy="0"/>
-          </a:xfrm>
-          <a:prstGeom prst="line">
-            <a:avLst/>
-          </a:prstGeom>
-          <a:noFill/>
-          <a:ln w="12700">
-            <a:solidFill>
-              <a:srgbClr val="000000"/>
-            </a:solidFill>
-            <a:prstDash val="dash"/>
-          </a:ln>
-        </p:spPr>
-      </p:sp>
-      <p:sp>
-        <p:nvSpPr>
-          <p:cNvPr id="19" name="Shape 16"/>
-          <p:cNvSpPr/>
-          <p:nvPr/>
-        </p:nvSpPr>
-        <p:spPr>
-          <a:xfrm>
-            <a:off x="914400" y="4864608"/>
-            <a:ext cx="7772400" cy="0"/>
-          </a:xfrm>
-          <a:prstGeom prst="line">
-            <a:avLst/>
-          </a:prstGeom>
-          <a:noFill/>
-          <a:ln w="12700">
-            <a:solidFill>
-              <a:srgbClr val="000000"/>
-            </a:solidFill>
-            <a:prstDash val="dash"/>
-          </a:ln>
-        </p:spPr>
-      </p:sp>
-      <p:sp>
-        <p:nvSpPr>
-          <p:cNvPr id="21" name="Text 17"/>
+          <p:cNvPr id="18" name="Text 14"/>
           <p:cNvSpPr txBox="1"/>
           <p:nvPr/>
         </p:nvSpPr>
@@ -18369,76 +18418,7 @@
       </p:graphicFrame>
       <p:sp>
         <p:nvSpPr>
-          <p:cNvPr id="13" name="Shape 10"/>
-          <p:cNvSpPr/>
-          <p:nvPr/>
-        </p:nvSpPr>
-        <p:spPr>
-          <a:xfrm>
-            <a:off x="914400" y="3163824"/>
-            <a:ext cx="4572000" cy="0"/>
-          </a:xfrm>
-          <a:prstGeom prst="line">
-            <a:avLst/>
-          </a:prstGeom>
-          <a:noFill/>
-          <a:ln w="12700">
-            <a:solidFill>
-              <a:srgbClr val="000000"/>
-            </a:solidFill>
-            <a:prstDash val="dash"/>
-          </a:ln>
-        </p:spPr>
-      </p:sp>
-      <p:sp>
-        <p:nvSpPr>
-          <p:cNvPr id="14" name="Shape 11"/>
-          <p:cNvSpPr/>
-          <p:nvPr/>
-        </p:nvSpPr>
-        <p:spPr>
-          <a:xfrm>
-            <a:off x="914400" y="3493008"/>
-            <a:ext cx="4572000" cy="0"/>
-          </a:xfrm>
-          <a:prstGeom prst="line">
-            <a:avLst/>
-          </a:prstGeom>
-          <a:noFill/>
-          <a:ln w="12700">
-            <a:solidFill>
-              <a:srgbClr val="000000"/>
-            </a:solidFill>
-            <a:prstDash val="dash"/>
-          </a:ln>
-        </p:spPr>
-      </p:sp>
-      <p:sp>
-        <p:nvSpPr>
-          <p:cNvPr id="15" name="Shape 12"/>
-          <p:cNvSpPr/>
-          <p:nvPr/>
-        </p:nvSpPr>
-        <p:spPr>
-          <a:xfrm>
-            <a:off x="914400" y="3822192"/>
-            <a:ext cx="4572000" cy="0"/>
-          </a:xfrm>
-          <a:prstGeom prst="line">
-            <a:avLst/>
-          </a:prstGeom>
-          <a:noFill/>
-          <a:ln w="12700">
-            <a:solidFill>
-              <a:srgbClr val="000000"/>
-            </a:solidFill>
-            <a:prstDash val="dash"/>
-          </a:ln>
-        </p:spPr>
-      </p:sp>
-      <p:sp>
-        <p:nvSpPr>
-          <p:cNvPr id="16" name="Text 13"/>
+          <p:cNvPr id="13" name="Text 10"/>
           <p:cNvSpPr txBox="1"/>
           <p:nvPr/>
         </p:nvSpPr>
@@ -18477,7 +18457,7 @@
       </p:sp>
       <p:sp>
         <p:nvSpPr>
-          <p:cNvPr id="17" name="Text 14"/>
+          <p:cNvPr id="14" name="Text 11"/>
           <p:cNvSpPr txBox="1"/>
           <p:nvPr/>
         </p:nvSpPr>
@@ -18516,7 +18496,7 @@
       </p:sp>
       <p:sp>
         <p:nvSpPr>
-          <p:cNvPr id="18" name="Text 15"/>
+          <p:cNvPr id="15" name="Text 12"/>
           <p:cNvSpPr txBox="1"/>
           <p:nvPr/>
         </p:nvSpPr>
@@ -18558,7 +18538,7 @@
       </p:sp>
       <p:sp>
         <p:nvSpPr>
-          <p:cNvPr id="19" name="Text 16"/>
+          <p:cNvPr id="16" name="Text 13"/>
           <p:cNvSpPr txBox="1"/>
           <p:nvPr/>
         </p:nvSpPr>
@@ -18597,7 +18577,7 @@
       </p:sp>
       <p:sp>
         <p:nvSpPr>
-          <p:cNvPr id="20" name="Text 17"/>
+          <p:cNvPr id="17" name="Text 14"/>
           <p:cNvSpPr txBox="1"/>
           <p:nvPr/>
         </p:nvSpPr>
@@ -18639,7 +18619,7 @@
       </p:sp>
       <p:sp>
         <p:nvSpPr>
-          <p:cNvPr id="21" name="Text 18"/>
+          <p:cNvPr id="18" name="Text 15"/>
           <p:cNvSpPr txBox="1"/>
           <p:nvPr/>
         </p:nvSpPr>
@@ -18678,7 +18658,7 @@
       </p:sp>
       <p:sp>
         <p:nvSpPr>
-          <p:cNvPr id="22" name="Text 19"/>
+          <p:cNvPr id="19" name="Text 16"/>
           <p:cNvSpPr txBox="1"/>
           <p:nvPr/>
         </p:nvSpPr>
@@ -18720,7 +18700,7 @@
       </p:sp>
       <p:sp>
         <p:nvSpPr>
-          <p:cNvPr id="24" name="Text 20"/>
+          <p:cNvPr id="21" name="Text 17"/>
           <p:cNvSpPr txBox="1"/>
           <p:nvPr/>
         </p:nvSpPr>
@@ -20091,76 +20071,7 @@
       </p:graphicFrame>
       <p:sp>
         <p:nvSpPr>
-          <p:cNvPr id="13" name="Shape 10"/>
-          <p:cNvSpPr/>
-          <p:nvPr/>
-        </p:nvSpPr>
-        <p:spPr>
-          <a:xfrm>
-            <a:off x="914400" y="3163824"/>
-            <a:ext cx="4572000" cy="0"/>
-          </a:xfrm>
-          <a:prstGeom prst="line">
-            <a:avLst/>
-          </a:prstGeom>
-          <a:noFill/>
-          <a:ln w="12700">
-            <a:solidFill>
-              <a:srgbClr val="000000"/>
-            </a:solidFill>
-            <a:prstDash val="dash"/>
-          </a:ln>
-        </p:spPr>
-      </p:sp>
-      <p:sp>
-        <p:nvSpPr>
-          <p:cNvPr id="14" name="Shape 11"/>
-          <p:cNvSpPr/>
-          <p:nvPr/>
-        </p:nvSpPr>
-        <p:spPr>
-          <a:xfrm>
-            <a:off x="914400" y="3493008"/>
-            <a:ext cx="4572000" cy="0"/>
-          </a:xfrm>
-          <a:prstGeom prst="line">
-            <a:avLst/>
-          </a:prstGeom>
-          <a:noFill/>
-          <a:ln w="12700">
-            <a:solidFill>
-              <a:srgbClr val="000000"/>
-            </a:solidFill>
-            <a:prstDash val="dash"/>
-          </a:ln>
-        </p:spPr>
-      </p:sp>
-      <p:sp>
-        <p:nvSpPr>
-          <p:cNvPr id="15" name="Shape 12"/>
-          <p:cNvSpPr/>
-          <p:nvPr/>
-        </p:nvSpPr>
-        <p:spPr>
-          <a:xfrm>
-            <a:off x="914400" y="3822192"/>
-            <a:ext cx="4572000" cy="0"/>
-          </a:xfrm>
-          <a:prstGeom prst="line">
-            <a:avLst/>
-          </a:prstGeom>
-          <a:noFill/>
-          <a:ln w="12700">
-            <a:solidFill>
-              <a:srgbClr val="000000"/>
-            </a:solidFill>
-            <a:prstDash val="dash"/>
-          </a:ln>
-        </p:spPr>
-      </p:sp>
-      <p:sp>
-        <p:nvSpPr>
-          <p:cNvPr id="16" name="Text 13"/>
+          <p:cNvPr id="13" name="Text 10"/>
           <p:cNvSpPr txBox="1"/>
           <p:nvPr/>
         </p:nvSpPr>
@@ -20199,7 +20110,7 @@
       </p:sp>
       <p:sp>
         <p:nvSpPr>
-          <p:cNvPr id="17" name="Text 14"/>
+          <p:cNvPr id="14" name="Text 11"/>
           <p:cNvSpPr txBox="1"/>
           <p:nvPr/>
         </p:nvSpPr>
@@ -20238,7 +20149,7 @@
       </p:sp>
       <p:sp>
         <p:nvSpPr>
-          <p:cNvPr id="18" name="Text 15"/>
+          <p:cNvPr id="15" name="Text 12"/>
           <p:cNvSpPr txBox="1"/>
           <p:nvPr/>
         </p:nvSpPr>
@@ -20280,7 +20191,7 @@
       </p:sp>
       <p:sp>
         <p:nvSpPr>
-          <p:cNvPr id="19" name="Text 16"/>
+          <p:cNvPr id="16" name="Text 13"/>
           <p:cNvSpPr txBox="1"/>
           <p:nvPr/>
         </p:nvSpPr>
@@ -20319,7 +20230,7 @@
       </p:sp>
       <p:sp>
         <p:nvSpPr>
-          <p:cNvPr id="20" name="Text 17"/>
+          <p:cNvPr id="17" name="Text 14"/>
           <p:cNvSpPr txBox="1"/>
           <p:nvPr/>
         </p:nvSpPr>
@@ -20361,7 +20272,7 @@
       </p:sp>
       <p:sp>
         <p:nvSpPr>
-          <p:cNvPr id="22" name="Text 18"/>
+          <p:cNvPr id="19" name="Text 15"/>
           <p:cNvSpPr txBox="1"/>
           <p:nvPr/>
         </p:nvSpPr>
